--- a/presentations/ecs-to-s3/Harel_ECS_to_S3_CIO.pptx
+++ b/presentations/ecs-to-s3/Harel_ECS_to_S3_CIO.pptx
@@ -3390,7 +3390,7 @@
               <a:buNone/>
             </a:pPr>
             <a:r>
-              <a:rPr lang="en-US" sz="1200" b="1" spc="120" kern="0" dirty="0">
+              <a:rPr lang="he-IL" altLang="en-US" sz="1200" b="1" spc="120" kern="0" dirty="0">
                 <a:solidFill>
                   <a:srgbClr val="3DD9EB"/>
                 </a:solidFill>
@@ -3398,9 +3398,9 @@
                 <a:ea typeface="Calibri" pitchFamily="34" charset="-122"/>
                 <a:cs typeface="Calibri" pitchFamily="34" charset="-120"/>
               </a:rPr>
-              <a:t>‏הראל · תשתיות ⁦IT⁩ · ניהול קיבולת אחסון</a:t>
-            </a:r>
-            <a:endParaRPr lang="en-US" sz="1200" dirty="0"/>
+              <a:t>‫הראל · תשתיות ‪IT‬ · ניהול קיבולת אחסון‬</a:t>
+            </a:r>
+            <a:endParaRPr lang="he-IL" sz="1200" dirty="0"/>
           </a:p>
         </p:txBody>
       </p:sp>
@@ -3432,7 +3432,7 @@
               <a:buNone/>
             </a:pPr>
             <a:r>
-              <a:rPr lang="en-US" sz="4000" b="1" dirty="0">
+              <a:rPr lang="he-IL" altLang="en-US" sz="4000" b="1" dirty="0">
                 <a:solidFill>
                   <a:srgbClr val="F4F7FB"/>
                 </a:solidFill>
@@ -3440,9 +3440,9 @@
                 <a:ea typeface="Calibri" pitchFamily="34" charset="-122"/>
                 <a:cs typeface="Calibri" pitchFamily="34" charset="-120"/>
               </a:rPr>
-              <a:t>‏העתקת מסמכי דימות ושיחות לענן</a:t>
-            </a:r>
-            <a:endParaRPr lang="en-US" sz="4000" dirty="0"/>
+              <a:t>‫העתקת מסמכי דימות ושיחות לענן‬</a:t>
+            </a:r>
+            <a:endParaRPr lang="he-IL" sz="4000" dirty="0"/>
           </a:p>
         </p:txBody>
       </p:sp>
@@ -3474,7 +3474,7 @@
               <a:buNone/>
             </a:pPr>
             <a:r>
-              <a:rPr lang="en-US" sz="1500" dirty="0">
+              <a:rPr lang="he-IL" altLang="en-US" sz="1500" dirty="0">
                 <a:solidFill>
                   <a:srgbClr val="91A0B7"/>
                 </a:solidFill>
@@ -3482,9 +3482,9 @@
                 <a:ea typeface="Calibri" pitchFamily="34" charset="-122"/>
                 <a:cs typeface="Calibri" pitchFamily="34" charset="-120"/>
               </a:rPr>
-              <a:t>‏מ-⁦ECS On-Prem⁩ ל-⁦AWS S3⁩ · מצגת לקבלת החלטה · אוגוסט ⁦2026⁩</a:t>
-            </a:r>
-            <a:endParaRPr lang="en-US" sz="1500" dirty="0"/>
+              <a:t>‫מ-‪ECS On-Prem‬ ל-‪AWS S3‬ · מצגת לקבלת החלטה · אוגוסט ‪2026‬‬</a:t>
+            </a:r>
+            <a:endParaRPr lang="he-IL" sz="1500" dirty="0"/>
           </a:p>
         </p:txBody>
       </p:sp>
@@ -3543,7 +3543,7 @@
               <a:buNone/>
             </a:pPr>
             <a:r>
-              <a:rPr lang="en-US" sz="1050" b="1" spc="80" kern="0" dirty="0">
+              <a:rPr lang="he-IL" altLang="en-US" sz="1050" b="1" spc="80" kern="0" dirty="0">
                 <a:solidFill>
                   <a:srgbClr val="91A0B7"/>
                 </a:solidFill>
@@ -3551,9 +3551,9 @@
                 <a:ea typeface="Calibri" pitchFamily="34" charset="-122"/>
                 <a:cs typeface="Calibri" pitchFamily="34" charset="-120"/>
               </a:rPr>
-              <a:t>‏ניצולת האחסון היום</a:t>
-            </a:r>
-            <a:endParaRPr lang="en-US" sz="1050" dirty="0"/>
+              <a:t>‫ניצולת האחסון היום‬</a:t>
+            </a:r>
+            <a:endParaRPr lang="he-IL" sz="1050" dirty="0"/>
           </a:p>
         </p:txBody>
       </p:sp>
@@ -3585,7 +3585,7 @@
               <a:buNone/>
             </a:pPr>
             <a:r>
-              <a:rPr lang="en-US" sz="2600" b="1" dirty="0">
+              <a:rPr lang="en-US" altLang="en-US" sz="2600" b="1" dirty="0">
                 <a:solidFill>
                   <a:srgbClr val="FF9F43"/>
                 </a:solidFill>
@@ -3627,7 +3627,7 @@
               <a:buNone/>
             </a:pPr>
             <a:r>
-              <a:rPr lang="en-US" sz="1100" dirty="0">
+              <a:rPr lang="he-IL" altLang="en-US" sz="1100" dirty="0">
                 <a:solidFill>
                   <a:srgbClr val="5E6E85"/>
                 </a:solidFill>
@@ -3635,9 +3635,9 @@
                 <a:ea typeface="Calibri" pitchFamily="34" charset="-122"/>
                 <a:cs typeface="Calibri" pitchFamily="34" charset="-120"/>
               </a:rPr>
-              <a:t>‏⁦668 TB⁩ מתוך ⁦916 TB⁩</a:t>
-            </a:r>
-            <a:endParaRPr lang="en-US" sz="1100" dirty="0"/>
+              <a:t>‫‪668 TB‬ מתוך ‪916 TB‬‬</a:t>
+            </a:r>
+            <a:endParaRPr lang="he-IL" sz="1100" dirty="0"/>
           </a:p>
         </p:txBody>
       </p:sp>
@@ -3696,7 +3696,7 @@
               <a:buNone/>
             </a:pPr>
             <a:r>
-              <a:rPr lang="en-US" sz="1050" b="1" spc="80" kern="0" dirty="0">
+              <a:rPr lang="he-IL" altLang="en-US" sz="1050" b="1" spc="80" kern="0" dirty="0">
                 <a:solidFill>
                   <a:srgbClr val="91A0B7"/>
                 </a:solidFill>
@@ -3704,9 +3704,9 @@
                 <a:ea typeface="Calibri" pitchFamily="34" charset="-122"/>
                 <a:cs typeface="Calibri" pitchFamily="34" charset="-120"/>
               </a:rPr>
-              <a:t>‏המרווח עד סף ⁦80%⁩</a:t>
-            </a:r>
-            <a:endParaRPr lang="en-US" sz="1050" dirty="0"/>
+              <a:t>‫המרווח עד סף ‪80%‬‬</a:t>
+            </a:r>
+            <a:endParaRPr lang="he-IL" sz="1050" dirty="0"/>
           </a:p>
         </p:txBody>
       </p:sp>
@@ -3738,7 +3738,7 @@
               <a:buNone/>
             </a:pPr>
             <a:r>
-              <a:rPr lang="en-US" sz="2600" b="1" dirty="0">
+              <a:rPr lang="en-US" altLang="en-US" sz="2600" b="1" dirty="0">
                 <a:solidFill>
                   <a:srgbClr val="3DD9EB"/>
                 </a:solidFill>
@@ -3780,7 +3780,7 @@
               <a:buNone/>
             </a:pPr>
             <a:r>
-              <a:rPr lang="en-US" sz="1100" dirty="0">
+              <a:rPr lang="he-IL" altLang="en-US" sz="1100" dirty="0">
                 <a:solidFill>
                   <a:srgbClr val="5E6E85"/>
                 </a:solidFill>
@@ -3788,9 +3788,9 @@
                 <a:ea typeface="Calibri" pitchFamily="34" charset="-122"/>
                 <a:cs typeface="Calibri" pitchFamily="34" charset="-120"/>
               </a:rPr>
-              <a:t>‏כ-⁦6⁩ חודשים בקצב המגמה</a:t>
-            </a:r>
-            <a:endParaRPr lang="en-US" sz="1100" dirty="0"/>
+              <a:t>‫כ-‪6‬ חודשים בקצב המגמה‬</a:t>
+            </a:r>
+            <a:endParaRPr lang="he-IL" sz="1100" dirty="0"/>
           </a:p>
         </p:txBody>
       </p:sp>
@@ -3849,7 +3849,7 @@
               <a:buNone/>
             </a:pPr>
             <a:r>
-              <a:rPr lang="en-US" sz="1050" b="1" spc="80" kern="0" dirty="0">
+              <a:rPr lang="he-IL" altLang="en-US" sz="1050" b="1" spc="80" kern="0" dirty="0">
                 <a:solidFill>
                   <a:srgbClr val="91A0B7"/>
                 </a:solidFill>
@@ -3857,9 +3857,9 @@
                 <a:ea typeface="Calibri" pitchFamily="34" charset="-122"/>
                 <a:cs typeface="Calibri" pitchFamily="34" charset="-120"/>
               </a:rPr>
-              <a:t>‏עלות ⁦100 TB⁩ ל-⁦5⁩ שנים</a:t>
-            </a:r>
-            <a:endParaRPr lang="en-US" sz="1050" dirty="0"/>
+              <a:t>‫עלות ‪100 TB‬ ל-‪5‬ שנים‬</a:t>
+            </a:r>
+            <a:endParaRPr lang="he-IL" sz="1050" dirty="0"/>
           </a:p>
         </p:txBody>
       </p:sp>
@@ -3891,7 +3891,7 @@
               <a:buNone/>
             </a:pPr>
             <a:r>
-              <a:rPr lang="en-US" sz="2600" b="1" dirty="0">
+              <a:rPr lang="en-US" altLang="en-US" sz="2600" b="1" dirty="0">
                 <a:solidFill>
                   <a:srgbClr val="3DDC97"/>
                 </a:solidFill>
@@ -3933,7 +3933,7 @@
               <a:buNone/>
             </a:pPr>
             <a:r>
-              <a:rPr lang="en-US" sz="1100" dirty="0">
+              <a:rPr lang="he-IL" altLang="en-US" sz="1100" dirty="0">
                 <a:solidFill>
                   <a:srgbClr val="5E6E85"/>
                 </a:solidFill>
@@ -3941,9 +3941,9 @@
                 <a:ea typeface="Calibri" pitchFamily="34" charset="-122"/>
                 <a:cs typeface="Calibri" pitchFamily="34" charset="-120"/>
               </a:rPr>
-              <a:t>‏⁦On-Prem⁩ מול ⁦AWS S3 Standard⁩</a:t>
-            </a:r>
-            <a:endParaRPr lang="en-US" sz="1100" dirty="0"/>
+              <a:t>‫‪On-Prem‬ מול ‪AWS S3 Standard‬‬</a:t>
+            </a:r>
+            <a:endParaRPr lang="he-IL" sz="1100" dirty="0"/>
           </a:p>
         </p:txBody>
       </p:sp>
@@ -4000,7 +4000,7 @@
               <a:buNone/>
             </a:pPr>
             <a:r>
-              <a:rPr lang="en-US" sz="1100" dirty="0">
+              <a:rPr lang="he-IL" altLang="en-US" sz="1100" dirty="0">
                 <a:solidFill>
                   <a:srgbClr val="5E6E85"/>
                 </a:solidFill>
@@ -4008,9 +4008,9 @@
                 <a:ea typeface="Calibri" pitchFamily="34" charset="-122"/>
                 <a:cs typeface="Calibri" pitchFamily="34" charset="-120"/>
               </a:rPr>
-              <a:t>‏⁦Harel IT Infrastructure⁩ · חסוי · הנתונים נכונים לאוגוסט ⁦2026⁩</a:t>
-            </a:r>
-            <a:endParaRPr lang="en-US" sz="1100" dirty="0"/>
+              <a:t>‫‪Harel IT Infrastructure‬ · חסוי · הנתונים נכונים לאוגוסט ‪2026‬‬</a:t>
+            </a:r>
+            <a:endParaRPr lang="he-IL" sz="1100" dirty="0"/>
           </a:p>
         </p:txBody>
       </p:sp>
@@ -4074,7 +4074,7 @@
               <a:buNone/>
             </a:pPr>
             <a:r>
-              <a:rPr lang="en-US" sz="1100" b="1" spc="120" kern="0" dirty="0">
+              <a:rPr lang="he-IL" altLang="en-US" sz="1100" b="1" spc="120" kern="0" dirty="0">
                 <a:solidFill>
                   <a:srgbClr val="3DDC97"/>
                 </a:solidFill>
@@ -4082,9 +4082,9 @@
                 <a:ea typeface="Calibri" pitchFamily="34" charset="-122"/>
                 <a:cs typeface="Calibri" pitchFamily="34" charset="-120"/>
               </a:rPr>
-              <a:t>‏המלצה</a:t>
-            </a:r>
-            <a:endParaRPr lang="en-US" sz="1100" dirty="0"/>
+              <a:t>‫המלצה‬</a:t>
+            </a:r>
+            <a:endParaRPr lang="he-IL" sz="1100" dirty="0"/>
           </a:p>
         </p:txBody>
       </p:sp>
@@ -4116,7 +4116,7 @@
               <a:buNone/>
             </a:pPr>
             <a:r>
-              <a:rPr lang="en-US" sz="2700" b="1" dirty="0">
+              <a:rPr lang="he-IL" altLang="en-US" sz="2700" b="1" dirty="0">
                 <a:solidFill>
                   <a:srgbClr val="F4F7FB"/>
                 </a:solidFill>
@@ -4124,9 +4124,9 @@
                 <a:ea typeface="Calibri" pitchFamily="34" charset="-122"/>
                 <a:cs typeface="Calibri" pitchFamily="34" charset="-120"/>
               </a:rPr>
-              <a:t>‏לאשר את ההעתקה עכשיו, ולקשור את הרכש לניצולת ולא לתאריך</a:t>
-            </a:r>
-            <a:endParaRPr lang="en-US" sz="2700" dirty="0"/>
+              <a:t>‫לאשר את ההעתקה עכשיו, ולקשור את הרכש לניצולת ולא לתאריך‬</a:t>
+            </a:r>
+            <a:endParaRPr lang="he-IL" sz="2700" dirty="0"/>
           </a:p>
         </p:txBody>
       </p:sp>
@@ -4210,7 +4210,7 @@
               <a:buNone/>
             </a:pPr>
             <a:r>
-              <a:rPr lang="en-US" sz="2100" b="1" dirty="0">
+              <a:rPr lang="en-US" altLang="en-US" sz="2100" b="1" dirty="0">
                 <a:solidFill>
                   <a:srgbClr val="3DD9EB"/>
                 </a:solidFill>
@@ -4252,7 +4252,7 @@
               <a:buNone/>
             </a:pPr>
             <a:r>
-              <a:rPr lang="en-US" sz="1450" b="1" dirty="0">
+              <a:rPr lang="he-IL" altLang="en-US" sz="1450" b="1" dirty="0">
                 <a:solidFill>
                   <a:srgbClr val="F4F7FB"/>
                 </a:solidFill>
@@ -4260,9 +4260,9 @@
                 <a:ea typeface="Calibri" pitchFamily="34" charset="-122"/>
                 <a:cs typeface="Calibri" pitchFamily="34" charset="-120"/>
               </a:rPr>
-              <a:t>‏אישור עקרוני להעתקת מסמכי ⁦Commit⁩ ל-⁦AWS S3⁩</a:t>
-            </a:r>
-            <a:endParaRPr lang="en-US" sz="1450" dirty="0"/>
+              <a:t>‫אישור עקרוני להעתקת מסמכי ‪Commit‬ ל-‪AWS S3‬‬</a:t>
+            </a:r>
+            <a:endParaRPr lang="he-IL" sz="1450" dirty="0"/>
           </a:p>
         </p:txBody>
       </p:sp>
@@ -4294,7 +4294,7 @@
               <a:buNone/>
             </a:pPr>
             <a:r>
-              <a:rPr lang="en-US" sz="1150" dirty="0">
+              <a:rPr lang="he-IL" altLang="en-US" sz="1150" dirty="0">
                 <a:solidFill>
                   <a:srgbClr val="91A0B7"/>
                 </a:solidFill>
@@ -4302,9 +4302,9 @@
                 <a:ea typeface="Calibri" pitchFamily="34" charset="-122"/>
                 <a:cs typeface="Calibri" pitchFamily="34" charset="-120"/>
               </a:rPr>
-              <a:t>‏התנעה באוגוסט. תקציב ⁦POC⁩ על ⁦1–2 TB⁩, וסגירת חסמי הקבילות המשפטית והריבונות בספטמבר במקביל.</a:t>
-            </a:r>
-            <a:endParaRPr lang="en-US" sz="1150" dirty="0"/>
+              <a:t>‫התנעה באוגוסט. תקציב ‪POC‬ על ‪1–2 TB‬, וסגירת חסמי הקבילות המשפטית והריבונות בספטמבר במקביל.‬</a:t>
+            </a:r>
+            <a:endParaRPr lang="he-IL" sz="1150" dirty="0"/>
           </a:p>
         </p:txBody>
       </p:sp>
@@ -4336,7 +4336,7 @@
               <a:buNone/>
             </a:pPr>
             <a:r>
-              <a:rPr lang="en-US" sz="1000" b="1" spc="80" kern="0" dirty="0">
+              <a:rPr lang="he-IL" altLang="en-US" sz="1000" b="1" spc="80" kern="0" dirty="0">
                 <a:solidFill>
                   <a:srgbClr val="5E6E85"/>
                 </a:solidFill>
@@ -4344,9 +4344,9 @@
                 <a:ea typeface="Calibri" pitchFamily="34" charset="-122"/>
                 <a:cs typeface="Calibri" pitchFamily="34" charset="-120"/>
               </a:rPr>
-              <a:t>‏אחריות</a:t>
-            </a:r>
-            <a:endParaRPr lang="en-US" sz="1000" dirty="0"/>
+              <a:t>‫אחריות‬</a:t>
+            </a:r>
+            <a:endParaRPr lang="he-IL" sz="1000" dirty="0"/>
           </a:p>
         </p:txBody>
       </p:sp>
@@ -4378,7 +4378,7 @@
               <a:buNone/>
             </a:pPr>
             <a:r>
-              <a:rPr lang="en-US" sz="1100" dirty="0">
+              <a:rPr lang="he-IL" altLang="en-US" sz="1100" dirty="0">
                 <a:solidFill>
                   <a:srgbClr val="3DD9EB"/>
                 </a:solidFill>
@@ -4386,9 +4386,9 @@
                 <a:ea typeface="Calibri" pitchFamily="34" charset="-122"/>
                 <a:cs typeface="Calibri" pitchFamily="34" charset="-120"/>
               </a:rPr>
-              <a:t>‏תשתיות ⁦IT⁩ + יועץ משפטי + ⁦DPO⁩</a:t>
-            </a:r>
-            <a:endParaRPr lang="en-US" sz="1100" dirty="0"/>
+              <a:t>‫תשתיות ‪IT +‬ יועץ משפטי ‪+ DPO‬‬</a:t>
+            </a:r>
+            <a:endParaRPr lang="he-IL" sz="1100" dirty="0"/>
           </a:p>
         </p:txBody>
       </p:sp>
@@ -4447,7 +4447,7 @@
               <a:buNone/>
             </a:pPr>
             <a:r>
-              <a:rPr lang="en-US" sz="2100" b="1" dirty="0">
+              <a:rPr lang="en-US" altLang="en-US" sz="2100" b="1" dirty="0">
                 <a:solidFill>
                   <a:srgbClr val="FF9F43"/>
                 </a:solidFill>
@@ -4489,7 +4489,7 @@
               <a:buNone/>
             </a:pPr>
             <a:r>
-              <a:rPr lang="en-US" sz="1450" b="1" dirty="0">
+              <a:rPr lang="he-IL" altLang="en-US" sz="1450" b="1" dirty="0">
                 <a:solidFill>
                   <a:srgbClr val="F4F7FB"/>
                 </a:solidFill>
@@ -4497,9 +4497,9 @@
                 <a:ea typeface="Calibri" pitchFamily="34" charset="-122"/>
                 <a:cs typeface="Calibri" pitchFamily="34" charset="-120"/>
               </a:rPr>
-              <a:t>‏טריגר רכש בניצולת ⁦75%⁩ במקום תאריך יעד</a:t>
-            </a:r>
-            <a:endParaRPr lang="en-US" sz="1450" dirty="0"/>
+              <a:t>‫טריגר רכש בניצולת ‪75%‬ במקום תאריך יעד‬</a:t>
+            </a:r>
+            <a:endParaRPr lang="he-IL" sz="1450" dirty="0"/>
           </a:p>
         </p:txBody>
       </p:sp>
@@ -4531,7 +4531,7 @@
               <a:buNone/>
             </a:pPr>
             <a:r>
-              <a:rPr lang="en-US" sz="1150" dirty="0">
+              <a:rPr lang="he-IL" altLang="en-US" sz="1150" dirty="0">
                 <a:solidFill>
                   <a:srgbClr val="91A0B7"/>
                 </a:solidFill>
@@ -4539,9 +4539,9 @@
                 <a:ea typeface="Calibri" pitchFamily="34" charset="-122"/>
                 <a:cs typeface="Calibri" pitchFamily="34" charset="-120"/>
               </a:rPr>
-              <a:t>‏⁦PO⁩ ל-⁦Dell⁩ יוצא כאשר הניצולת מגיעה ל-⁦687 TB⁩. זה מבטיח חודשיים אספקה גם בתרחיש המואץ, ואינו מקדים רכש שאולי לא יידרש.</a:t>
-            </a:r>
-            <a:endParaRPr lang="en-US" sz="1150" dirty="0"/>
+              <a:t>‫‪PO‬ ל-‪Dell‬ יוצא כאשר הניצולת מגיעה ל-‪687 TB‬. זה מבטיח חודשיים אספקה גם בתרחיש המואץ, ואינו מקדים רכש שאולי לא יידרש.‬</a:t>
+            </a:r>
+            <a:endParaRPr lang="he-IL" sz="1150" dirty="0"/>
           </a:p>
         </p:txBody>
       </p:sp>
@@ -4573,7 +4573,7 @@
               <a:buNone/>
             </a:pPr>
             <a:r>
-              <a:rPr lang="en-US" sz="1000" b="1" spc="80" kern="0" dirty="0">
+              <a:rPr lang="he-IL" altLang="en-US" sz="1000" b="1" spc="80" kern="0" dirty="0">
                 <a:solidFill>
                   <a:srgbClr val="5E6E85"/>
                 </a:solidFill>
@@ -4581,9 +4581,9 @@
                 <a:ea typeface="Calibri" pitchFamily="34" charset="-122"/>
                 <a:cs typeface="Calibri" pitchFamily="34" charset="-120"/>
               </a:rPr>
-              <a:t>‏אחריות</a:t>
-            </a:r>
-            <a:endParaRPr lang="en-US" sz="1000" dirty="0"/>
+              <a:t>‫אחריות‬</a:t>
+            </a:r>
+            <a:endParaRPr lang="he-IL" sz="1000" dirty="0"/>
           </a:p>
         </p:txBody>
       </p:sp>
@@ -4615,7 +4615,7 @@
               <a:buNone/>
             </a:pPr>
             <a:r>
-              <a:rPr lang="en-US" sz="1100" dirty="0">
+              <a:rPr lang="he-IL" altLang="en-US" sz="1100" dirty="0">
                 <a:solidFill>
                   <a:srgbClr val="FF9F43"/>
                 </a:solidFill>
@@ -4623,9 +4623,9 @@
                 <a:ea typeface="Calibri" pitchFamily="34" charset="-122"/>
                 <a:cs typeface="Calibri" pitchFamily="34" charset="-120"/>
               </a:rPr>
-              <a:t>‏תשתיות ⁦IT⁩ + רכש</a:t>
-            </a:r>
-            <a:endParaRPr lang="en-US" sz="1100" dirty="0"/>
+              <a:t>‫תשתיות ‪IT +‬ רכש‬</a:t>
+            </a:r>
+            <a:endParaRPr lang="he-IL" sz="1100" dirty="0"/>
           </a:p>
         </p:txBody>
       </p:sp>
@@ -4684,7 +4684,7 @@
               <a:buNone/>
             </a:pPr>
             <a:r>
-              <a:rPr lang="en-US" sz="2100" b="1" dirty="0">
+              <a:rPr lang="en-US" altLang="en-US" sz="2100" b="1" dirty="0">
                 <a:solidFill>
                   <a:srgbClr val="B07CFF"/>
                 </a:solidFill>
@@ -4726,7 +4726,7 @@
               <a:buNone/>
             </a:pPr>
             <a:r>
-              <a:rPr lang="en-US" sz="1450" b="1" dirty="0">
+              <a:rPr lang="he-IL" altLang="en-US" sz="1450" b="1" dirty="0">
                 <a:solidFill>
                   <a:srgbClr val="F4F7FB"/>
                 </a:solidFill>
@@ -4734,9 +4734,9 @@
                 <a:ea typeface="Calibri" pitchFamily="34" charset="-122"/>
                 <a:cs typeface="Calibri" pitchFamily="34" charset="-120"/>
               </a:rPr>
-              <a:t>‏תמחור מחדש של חלופת הענן לפי שכבת אחסון נכונה</a:t>
-            </a:r>
-            <a:endParaRPr lang="en-US" sz="1450" dirty="0"/>
+              <a:t>‫תמחור מחדש של חלופת הענן לפי שכבת אחסון נכונה‬</a:t>
+            </a:r>
+            <a:endParaRPr lang="he-IL" sz="1450" dirty="0"/>
           </a:p>
         </p:txBody>
       </p:sp>
@@ -4768,7 +4768,7 @@
               <a:buNone/>
             </a:pPr>
             <a:r>
-              <a:rPr lang="en-US" sz="1150" dirty="0">
+              <a:rPr lang="he-IL" altLang="en-US" sz="1150" dirty="0">
                 <a:solidFill>
                   <a:srgbClr val="91A0B7"/>
                 </a:solidFill>
@@ -4776,9 +4776,9 @@
                 <a:ea typeface="Calibri" pitchFamily="34" charset="-122"/>
                 <a:cs typeface="Calibri" pitchFamily="34" charset="-120"/>
               </a:rPr>
-              <a:t>‏פילוח גודל-אובייקט ותדירות אחזור של הקורפוס, ותמחור מול ⁦Glacier Instant Retrieval⁩ באזור תל אביב — לא מול ⁦S3 Standard⁩.</a:t>
-            </a:r>
-            <a:endParaRPr lang="en-US" sz="1150" dirty="0"/>
+              <a:t>‫פילוח גודל-אובייקט ותדירות אחזור של הקורפוס, ותמחור מול ‪Glacier Instant Retrieval‬ באזור תל אביב — לא מול ‪S3 Standard‬.‬</a:t>
+            </a:r>
+            <a:endParaRPr lang="he-IL" sz="1150" dirty="0"/>
           </a:p>
         </p:txBody>
       </p:sp>
@@ -4810,7 +4810,7 @@
               <a:buNone/>
             </a:pPr>
             <a:r>
-              <a:rPr lang="en-US" sz="1000" b="1" spc="80" kern="0" dirty="0">
+              <a:rPr lang="he-IL" altLang="en-US" sz="1000" b="1" spc="80" kern="0" dirty="0">
                 <a:solidFill>
                   <a:srgbClr val="5E6E85"/>
                 </a:solidFill>
@@ -4818,9 +4818,9 @@
                 <a:ea typeface="Calibri" pitchFamily="34" charset="-122"/>
                 <a:cs typeface="Calibri" pitchFamily="34" charset="-120"/>
               </a:rPr>
-              <a:t>‏אחריות</a:t>
-            </a:r>
-            <a:endParaRPr lang="en-US" sz="1000" dirty="0"/>
+              <a:t>‫אחריות‬</a:t>
+            </a:r>
+            <a:endParaRPr lang="he-IL" sz="1000" dirty="0"/>
           </a:p>
         </p:txBody>
       </p:sp>
@@ -4852,7 +4852,7 @@
               <a:buNone/>
             </a:pPr>
             <a:r>
-              <a:rPr lang="en-US" sz="1100" dirty="0">
+              <a:rPr lang="he-IL" altLang="en-US" sz="1100" dirty="0">
                 <a:solidFill>
                   <a:srgbClr val="B07CFF"/>
                 </a:solidFill>
@@ -4860,9 +4860,9 @@
                 <a:ea typeface="Calibri" pitchFamily="34" charset="-122"/>
                 <a:cs typeface="Calibri" pitchFamily="34" charset="-120"/>
               </a:rPr>
-              <a:t>‏תשתיות ⁦IT⁩ + ⁦FinOps⁩</a:t>
-            </a:r>
-            <a:endParaRPr lang="en-US" sz="1100" dirty="0"/>
+              <a:t>‫תשתיות ‪IT + FinOps‬‬</a:t>
+            </a:r>
+            <a:endParaRPr lang="he-IL" sz="1100" dirty="0"/>
           </a:p>
         </p:txBody>
       </p:sp>
@@ -4946,7 +4946,7 @@
               <a:buNone/>
             </a:pPr>
             <a:r>
-              <a:rPr lang="en-US" sz="1400" b="1" dirty="0">
+              <a:rPr lang="he-IL" altLang="en-US" sz="1400" b="1" dirty="0">
                 <a:solidFill>
                   <a:srgbClr val="3DDC97"/>
                 </a:solidFill>
@@ -4954,9 +4954,9 @@
                 <a:ea typeface="Calibri" pitchFamily="34" charset="-122"/>
                 <a:cs typeface="Calibri" pitchFamily="34" charset="-120"/>
               </a:rPr>
-              <a:t>‏נדרש היום: אישור עקרוני להעתקה, תקציב ⁦POC⁩, ואישור טריגר הרכש ב-⁦75%⁩.</a:t>
-            </a:r>
-            <a:endParaRPr lang="en-US" sz="1400" dirty="0"/>
+              <a:t>‫נדרש היום: אישור עקרוני להעתקה, תקציב ‪POC‬, ואישור טריגר הרכש ב-‪75%‬.‬</a:t>
+            </a:r>
+            <a:endParaRPr lang="he-IL" sz="1400" dirty="0"/>
           </a:p>
         </p:txBody>
       </p:sp>
@@ -5038,7 +5038,7 @@
               <a:buNone/>
             </a:pPr>
             <a:r>
-              <a:rPr lang="en-US" sz="1150" dirty="0">
+              <a:rPr lang="he-IL" altLang="en-US" sz="1150" dirty="0">
                 <a:solidFill>
                   <a:srgbClr val="91A0B7"/>
                 </a:solidFill>
@@ -5046,9 +5046,9 @@
                 <a:ea typeface="Calibri" pitchFamily="34" charset="-122"/>
                 <a:cs typeface="Calibri" pitchFamily="34" charset="-120"/>
               </a:rPr>
-              <a:t>‏החלטת התקציב המלאה לרכש תובא לאישור כאשר הטריגר ייחצה, עם הצעת מחיר מעודכנת מ-⁦Dell⁩ ותמחור ענן מעודכן לצידה.</a:t>
-            </a:r>
-            <a:endParaRPr lang="en-US" sz="1150" dirty="0"/>
+              <a:t>‫החלטת התקציב המלאה לרכש תובא לאישור כאשר הטריגר ייחצה, עם הצעת מחיר מעודכנת מ-‪Dell‬ ותמחור ענן מעודכן לצידה.‬</a:t>
+            </a:r>
+            <a:endParaRPr lang="he-IL" sz="1150" dirty="0"/>
           </a:p>
         </p:txBody>
       </p:sp>
@@ -5112,7 +5112,7 @@
               <a:buNone/>
             </a:pPr>
             <a:r>
-              <a:rPr lang="en-US" sz="1100" b="1" spc="120" kern="0" dirty="0">
+              <a:rPr lang="he-IL" altLang="en-US" sz="1100" b="1" spc="120" kern="0" dirty="0">
                 <a:solidFill>
                   <a:srgbClr val="3DD9EB"/>
                 </a:solidFill>
@@ -5120,9 +5120,9 @@
                 <a:ea typeface="Calibri" pitchFamily="34" charset="-122"/>
                 <a:cs typeface="Calibri" pitchFamily="34" charset="-120"/>
               </a:rPr>
-              <a:t>‏ההחלטה הנדרשת</a:t>
-            </a:r>
-            <a:endParaRPr lang="en-US" sz="1100" dirty="0"/>
+              <a:t>‫ההחלטה הנדרשת‬</a:t>
+            </a:r>
+            <a:endParaRPr lang="he-IL" sz="1100" dirty="0"/>
           </a:p>
         </p:txBody>
       </p:sp>
@@ -5154,7 +5154,7 @@
               <a:buNone/>
             </a:pPr>
             <a:r>
-              <a:rPr lang="en-US" sz="2700" b="1" dirty="0">
+              <a:rPr lang="he-IL" altLang="en-US" sz="2700" b="1" dirty="0">
                 <a:solidFill>
                   <a:srgbClr val="F4F7FB"/>
                 </a:solidFill>
@@ -5162,9 +5162,9 @@
                 <a:ea typeface="Calibri" pitchFamily="34" charset="-122"/>
                 <a:cs typeface="Calibri" pitchFamily="34" charset="-120"/>
               </a:rPr>
-              <a:t>‏שתי החלטות נפרדות — ורק אחת מהן דחופה היום</a:t>
-            </a:r>
-            <a:endParaRPr lang="en-US" sz="2700" dirty="0"/>
+              <a:t>‫שתי החלטות נפרדות — ורק אחת מהן דחופה היום‬</a:t>
+            </a:r>
+            <a:endParaRPr lang="he-IL" sz="2700" dirty="0"/>
           </a:p>
         </p:txBody>
       </p:sp>
@@ -5248,7 +5248,7 @@
               <a:buNone/>
             </a:pPr>
             <a:r>
-              <a:rPr lang="en-US" sz="2200" b="1" dirty="0">
+              <a:rPr lang="en-US" altLang="en-US" sz="2200" b="1" dirty="0">
                 <a:solidFill>
                   <a:srgbClr val="3DD9EB"/>
                 </a:solidFill>
@@ -5290,7 +5290,7 @@
               <a:buNone/>
             </a:pPr>
             <a:r>
-              <a:rPr lang="en-US" sz="1650" b="1" dirty="0">
+              <a:rPr lang="he-IL" altLang="en-US" sz="1650" b="1" dirty="0">
                 <a:solidFill>
                   <a:srgbClr val="F4F7FB"/>
                 </a:solidFill>
@@ -5298,9 +5298,9 @@
                 <a:ea typeface="Calibri" pitchFamily="34" charset="-122"/>
                 <a:cs typeface="Calibri" pitchFamily="34" charset="-120"/>
               </a:rPr>
-              <a:t>‏העתקת מסמכי ⁦Commit⁩ ל-⁦AWS S3⁩</a:t>
-            </a:r>
-            <a:endParaRPr lang="en-US" sz="1650" dirty="0"/>
+              <a:t>‫העתקת מסמכי ‪Commit‬ ל-‪AWS S3‬‬</a:t>
+            </a:r>
+            <a:endParaRPr lang="he-IL" sz="1650" dirty="0"/>
           </a:p>
         </p:txBody>
       </p:sp>
@@ -5332,7 +5332,7 @@
               <a:buNone/>
             </a:pPr>
             <a:r>
-              <a:rPr lang="en-US" sz="1250" dirty="0">
+              <a:rPr lang="he-IL" altLang="en-US" sz="1250" dirty="0">
                 <a:solidFill>
                   <a:srgbClr val="91A0B7"/>
                 </a:solidFill>
@@ -5340,9 +5340,9 @@
                 <a:ea typeface="Calibri" pitchFamily="34" charset="-122"/>
                 <a:cs typeface="Calibri" pitchFamily="34" charset="-120"/>
               </a:rPr>
-              <a:t>‏מפנה שטח ב-⁦ECS⁩ תוך שבועות, ללא ⁦PO⁩ וללא זמן אספקה. זה המנוף היחיד שזמין לפני דצמבר ⁦2026⁩, והוא אינו תלוי בשרשרת האספקה של ⁦Dell⁩. החשיפה התקציבית המיידית מוגבלת ל-⁦POC⁩ בהיקף ⁦1–2 TB⁩ בלבד.</a:t>
-            </a:r>
-            <a:endParaRPr lang="en-US" sz="1250" dirty="0"/>
+              <a:t>‫מפנה שטח ב-‪ECS‬ תוך שבועות, ללא ‪PO‬ וללא זמן אספקה. זה המנוף היחיד שזמין לפני דצמבר ‪2026‬, והוא אינו תלוי בשרשרת האספקה של ‪Dell‬. החשיפה התקציבית המיידית מוגבלת ל-‪POC‬ בהיקף ‪1–2 TB‬ בלבד.‬</a:t>
+            </a:r>
+            <a:endParaRPr lang="he-IL" sz="1250" dirty="0"/>
           </a:p>
         </p:txBody>
       </p:sp>
@@ -5401,7 +5401,7 @@
               <a:buNone/>
             </a:pPr>
             <a:r>
-              <a:rPr lang="en-US" sz="1250" b="1" dirty="0">
+              <a:rPr lang="he-IL" altLang="en-US" sz="1250" b="1" dirty="0">
                 <a:solidFill>
                   <a:srgbClr val="3DD9EB"/>
                 </a:solidFill>
@@ -5409,9 +5409,9 @@
                 <a:ea typeface="Calibri" pitchFamily="34" charset="-122"/>
                 <a:cs typeface="Calibri" pitchFamily="34" charset="-120"/>
               </a:rPr>
-              <a:t>‏נדרש היום: אישור עקרוני + תקציב ⁦POC⁩</a:t>
-            </a:r>
-            <a:endParaRPr lang="en-US" sz="1250" dirty="0"/>
+              <a:t>‫נדרש היום: אישור עקרוני + תקציב ‪POC‬‬</a:t>
+            </a:r>
+            <a:endParaRPr lang="he-IL" sz="1250" dirty="0"/>
           </a:p>
         </p:txBody>
       </p:sp>
@@ -5470,7 +5470,7 @@
               <a:buNone/>
             </a:pPr>
             <a:r>
-              <a:rPr lang="en-US" sz="2200" b="1" dirty="0">
+              <a:rPr lang="en-US" altLang="en-US" sz="2200" b="1" dirty="0">
                 <a:solidFill>
                   <a:srgbClr val="FF9F43"/>
                 </a:solidFill>
@@ -5512,7 +5512,7 @@
               <a:buNone/>
             </a:pPr>
             <a:r>
-              <a:rPr lang="en-US" sz="1650" b="1" dirty="0">
+              <a:rPr lang="he-IL" altLang="en-US" sz="1650" b="1" dirty="0">
                 <a:solidFill>
                   <a:srgbClr val="F4F7FB"/>
                 </a:solidFill>
@@ -5520,9 +5520,9 @@
                 <a:ea typeface="Calibri" pitchFamily="34" charset="-122"/>
                 <a:cs typeface="Calibri" pitchFamily="34" charset="-120"/>
               </a:rPr>
-              <a:t>‏הרחבת דיסקים ב-⁦Dell ECS On-Prem⁩</a:t>
-            </a:r>
-            <a:endParaRPr lang="en-US" sz="1650" dirty="0"/>
+              <a:t>‫הרחבת דיסקים ב-‪Dell ECS On-Prem‬‬</a:t>
+            </a:r>
+            <a:endParaRPr lang="he-IL" sz="1650" dirty="0"/>
           </a:p>
         </p:txBody>
       </p:sp>
@@ -5554,7 +5554,7 @@
               <a:buNone/>
             </a:pPr>
             <a:r>
-              <a:rPr lang="en-US" sz="1250" dirty="0">
+              <a:rPr lang="he-IL" altLang="en-US" sz="1250" dirty="0">
                 <a:solidFill>
                   <a:srgbClr val="91A0B7"/>
                 </a:solidFill>
@@ -5562,9 +5562,9 @@
                 <a:ea typeface="Calibri" pitchFamily="34" charset="-122"/>
                 <a:cs typeface="Calibri" pitchFamily="34" charset="-120"/>
               </a:rPr>
-              <a:t>‏זמן אספקה כחודשיים. אינה דחופה השבוע — אך אסור שתיקבע לפי תאריך בלוח השנה, אלא לפי טריגר ניצולת שמבטיח חודשיים אספקה בכל תרחיש. הצעת ⁦Dell⁩ הנוכחית עומדת על ⁦$695,520⁩ עבור ⁦600 TB⁩ לוגי.</a:t>
-            </a:r>
-            <a:endParaRPr lang="en-US" sz="1250" dirty="0"/>
+              <a:t>‫זמן אספקה כחודשיים. אינה דחופה השבוע — אך אסור שתיקבע לפי תאריך בלוח השנה, אלא לפי טריגר ניצולת שמבטיח חודשיים אספקה בכל תרחיש. הצעת ‪Dell‬ הנוכחית עומדת על ‪$695,520‬ עבור ‪600 TB‬ לוגי.‬</a:t>
+            </a:r>
+            <a:endParaRPr lang="he-IL" sz="1250" dirty="0"/>
           </a:p>
         </p:txBody>
       </p:sp>
@@ -5623,7 +5623,7 @@
               <a:buNone/>
             </a:pPr>
             <a:r>
-              <a:rPr lang="en-US" sz="1250" b="1" dirty="0">
+              <a:rPr lang="he-IL" altLang="en-US" sz="1250" b="1" dirty="0">
                 <a:solidFill>
                   <a:srgbClr val="FF9F43"/>
                 </a:solidFill>
@@ -5631,9 +5631,9 @@
                 <a:ea typeface="Calibri" pitchFamily="34" charset="-122"/>
                 <a:cs typeface="Calibri" pitchFamily="34" charset="-120"/>
               </a:rPr>
-              <a:t>‏נדרש היום: אישור טריגר רכש בניצולת ⁦75%⁩</a:t>
-            </a:r>
-            <a:endParaRPr lang="en-US" sz="1250" dirty="0"/>
+              <a:t>‫נדרש היום: אישור טריגר רכש בניצולת ‪75%‬‬</a:t>
+            </a:r>
+            <a:endParaRPr lang="he-IL" sz="1250" dirty="0"/>
           </a:p>
         </p:txBody>
       </p:sp>
@@ -5665,7 +5665,7 @@
               <a:buNone/>
             </a:pPr>
             <a:r>
-              <a:rPr lang="en-US" sz="1500" b="1" dirty="0">
+              <a:rPr lang="he-IL" altLang="en-US" sz="1500" b="1" dirty="0">
                 <a:solidFill>
                   <a:srgbClr val="F4F7FB"/>
                 </a:solidFill>
@@ -5673,9 +5673,9 @@
                 <a:ea typeface="Calibri" pitchFamily="34" charset="-122"/>
                 <a:cs typeface="Calibri" pitchFamily="34" charset="-120"/>
               </a:rPr>
-              <a:t>‏שתי ההחלטות אינן חלופיות. ההעתקה לענן דוחה ומקטינה את הרכש — היא אינה מבטלת אותו.</a:t>
-            </a:r>
-            <a:endParaRPr lang="en-US" sz="1500" dirty="0"/>
+              <a:t>‫שתי ההחלטות אינן חלופיות. ההעתקה לענן דוחה ומקטינה את הרכש — היא אינה מבטלת אותו.‬</a:t>
+            </a:r>
+            <a:endParaRPr lang="he-IL" sz="1500" dirty="0"/>
           </a:p>
         </p:txBody>
       </p:sp>
@@ -5757,7 +5757,7 @@
               <a:buNone/>
             </a:pPr>
             <a:r>
-              <a:rPr lang="en-US" sz="1150" dirty="0">
+              <a:rPr lang="he-IL" altLang="en-US" sz="1150" dirty="0">
                 <a:solidFill>
                   <a:srgbClr val="91A0B7"/>
                 </a:solidFill>
@@ -5765,9 +5765,9 @@
                 <a:ea typeface="Calibri" pitchFamily="34" charset="-122"/>
                 <a:cs typeface="Calibri" pitchFamily="34" charset="-120"/>
               </a:rPr>
-              <a:t>‏אין צורך באישור תקציב סופי לרכש בישיבה זו. הנתון החסר להחלטה מלאה הוא גודל קורפוס ה-⁦Commit⁩ — כמה ⁦TB⁩ באמת יפונו.</a:t>
-            </a:r>
-            <a:endParaRPr lang="en-US" sz="1150" dirty="0"/>
+              <a:t>‫אין צורך באישור תקציב סופי לרכש בישיבה זו. הנתון החסר להחלטה מלאה הוא גודל קורפוס ה-‪Commit‬ — כמה ‪TB‬ באמת יפונו.‬</a:t>
+            </a:r>
+            <a:endParaRPr lang="he-IL" sz="1150" dirty="0"/>
           </a:p>
         </p:txBody>
       </p:sp>
@@ -5831,7 +5831,7 @@
               <a:buNone/>
             </a:pPr>
             <a:r>
-              <a:rPr lang="en-US" sz="1100" b="1" spc="120" kern="0" dirty="0">
+              <a:rPr lang="he-IL" altLang="en-US" sz="1100" b="1" spc="120" kern="0" dirty="0">
                 <a:solidFill>
                   <a:srgbClr val="FF9F43"/>
                 </a:solidFill>
@@ -5839,9 +5839,9 @@
                 <a:ea typeface="Calibri" pitchFamily="34" charset="-122"/>
                 <a:cs typeface="Calibri" pitchFamily="34" charset="-120"/>
               </a:rPr>
-              <a:t>‏המצב היום</a:t>
-            </a:r>
-            <a:endParaRPr lang="en-US" sz="1100" dirty="0"/>
+              <a:t>‫המצב היום‬</a:t>
+            </a:r>
+            <a:endParaRPr lang="he-IL" sz="1100" dirty="0"/>
           </a:p>
         </p:txBody>
       </p:sp>
@@ -5873,7 +5873,7 @@
               <a:buNone/>
             </a:pPr>
             <a:r>
-              <a:rPr lang="en-US" sz="2500" b="1" dirty="0">
+              <a:rPr lang="he-IL" altLang="en-US" sz="2500" b="1" dirty="0">
                 <a:solidFill>
                   <a:srgbClr val="F4F7FB"/>
                 </a:solidFill>
@@ -5881,9 +5881,9 @@
                 <a:ea typeface="Calibri" pitchFamily="34" charset="-122"/>
                 <a:cs typeface="Calibri" pitchFamily="34" charset="-120"/>
               </a:rPr>
-              <a:t>‏⁦668 TB⁩ מתוך ⁦916 TB⁩ — והגידול נעצר בשלושת החודשים האחרונים</a:t>
-            </a:r>
-            <a:endParaRPr lang="en-US" sz="2500" dirty="0"/>
+              <a:t>‫‪668 TB‬ מתוך ‪916 TB‬ — והגידול נעצר בשלושת החודשים האחרונים‬</a:t>
+            </a:r>
+            <a:endParaRPr lang="he-IL" sz="2500" dirty="0"/>
           </a:p>
         </p:txBody>
       </p:sp>
@@ -5965,7 +5965,7 @@
               <a:buNone/>
             </a:pPr>
             <a:r>
-              <a:rPr lang="en-US" sz="3000" b="1" dirty="0">
+              <a:rPr lang="en-US" altLang="en-US" sz="3000" b="1" dirty="0">
                 <a:solidFill>
                   <a:srgbClr val="FF9F43"/>
                 </a:solidFill>
@@ -6007,7 +6007,7 @@
               <a:buNone/>
             </a:pPr>
             <a:r>
-              <a:rPr lang="en-US" sz="1050" b="1" spc="80" kern="0" dirty="0">
+              <a:rPr lang="he-IL" altLang="en-US" sz="1050" b="1" spc="80" kern="0" dirty="0">
                 <a:solidFill>
                   <a:srgbClr val="91A0B7"/>
                 </a:solidFill>
@@ -6015,9 +6015,9 @@
                 <a:ea typeface="Calibri" pitchFamily="34" charset="-122"/>
                 <a:cs typeface="Calibri" pitchFamily="34" charset="-120"/>
               </a:rPr>
-              <a:t>‏ניצולת נוכחית</a:t>
-            </a:r>
-            <a:endParaRPr lang="en-US" sz="1050" dirty="0"/>
+              <a:t>‫ניצולת נוכחית‬</a:t>
+            </a:r>
+            <a:endParaRPr lang="he-IL" sz="1050" dirty="0"/>
           </a:p>
         </p:txBody>
       </p:sp>
@@ -6049,7 +6049,7 @@
               <a:buNone/>
             </a:pPr>
             <a:r>
-              <a:rPr lang="en-US" sz="1100" dirty="0">
+              <a:rPr lang="he-IL" altLang="en-US" sz="1100" dirty="0">
                 <a:solidFill>
                   <a:srgbClr val="5E6E85"/>
                 </a:solidFill>
@@ -6057,9 +6057,9 @@
                 <a:ea typeface="Calibri" pitchFamily="34" charset="-122"/>
                 <a:cs typeface="Calibri" pitchFamily="34" charset="-120"/>
               </a:rPr>
-              <a:t>‏אוגוסט ⁦2026⁩ · ⁦668 TB⁩ מתוך ⁦916 TB⁩</a:t>
-            </a:r>
-            <a:endParaRPr lang="en-US" sz="1100" dirty="0"/>
+              <a:t>‫אוגוסט ‪2026 · 668 TB‬ מתוך ‪916 TB‬‬</a:t>
+            </a:r>
+            <a:endParaRPr lang="he-IL" sz="1100" dirty="0"/>
           </a:p>
         </p:txBody>
       </p:sp>
@@ -6116,7 +6116,7 @@
               <a:buNone/>
             </a:pPr>
             <a:r>
-              <a:rPr lang="en-US" sz="3000" b="1" dirty="0">
+              <a:rPr lang="en-US" altLang="en-US" sz="3000" b="1" dirty="0">
                 <a:solidFill>
                   <a:srgbClr val="3DD9EB"/>
                 </a:solidFill>
@@ -6158,7 +6158,7 @@
               <a:buNone/>
             </a:pPr>
             <a:r>
-              <a:rPr lang="en-US" sz="1050" b="1" spc="80" kern="0" dirty="0">
+              <a:rPr lang="he-IL" altLang="en-US" sz="1050" b="1" spc="80" kern="0" dirty="0">
                 <a:solidFill>
                   <a:srgbClr val="91A0B7"/>
                 </a:solidFill>
@@ -6166,9 +6166,9 @@
                 <a:ea typeface="Calibri" pitchFamily="34" charset="-122"/>
                 <a:cs typeface="Calibri" pitchFamily="34" charset="-120"/>
               </a:rPr>
-              <a:t>‏מרווח עד סף ⁦80%⁩</a:t>
-            </a:r>
-            <a:endParaRPr lang="en-US" sz="1050" dirty="0"/>
+              <a:t>‫מרווח עד סף ‪80%‬‬</a:t>
+            </a:r>
+            <a:endParaRPr lang="he-IL" sz="1050" dirty="0"/>
           </a:p>
         </p:txBody>
       </p:sp>
@@ -6200,7 +6200,7 @@
               <a:buNone/>
             </a:pPr>
             <a:r>
-              <a:rPr lang="en-US" sz="1100" dirty="0">
+              <a:rPr lang="he-IL" altLang="en-US" sz="1100" dirty="0">
                 <a:solidFill>
                   <a:srgbClr val="5E6E85"/>
                 </a:solidFill>
@@ -6208,9 +6208,9 @@
                 <a:ea typeface="Calibri" pitchFamily="34" charset="-122"/>
                 <a:cs typeface="Calibri" pitchFamily="34" charset="-120"/>
               </a:rPr>
-              <a:t>‏הסף עומד על ⁦733 TB⁩</a:t>
-            </a:r>
-            <a:endParaRPr lang="en-US" sz="1100" dirty="0"/>
+              <a:t>‫הסף עומד על ‪733 TB‬‬</a:t>
+            </a:r>
+            <a:endParaRPr lang="he-IL" sz="1100" dirty="0"/>
           </a:p>
         </p:txBody>
       </p:sp>
@@ -6267,7 +6267,7 @@
               <a:buNone/>
             </a:pPr>
             <a:r>
-              <a:rPr lang="en-US" sz="3000" b="1" dirty="0">
+              <a:rPr lang="en-US" altLang="en-US" sz="3000" b="1" dirty="0">
                 <a:solidFill>
                   <a:srgbClr val="3DDC97"/>
                 </a:solidFill>
@@ -6309,7 +6309,7 @@
               <a:buNone/>
             </a:pPr>
             <a:r>
-              <a:rPr lang="en-US" sz="1050" b="1" spc="80" kern="0" dirty="0">
+              <a:rPr lang="he-IL" altLang="en-US" sz="1050" b="1" spc="80" kern="0" dirty="0">
                 <a:solidFill>
                   <a:srgbClr val="91A0B7"/>
                 </a:solidFill>
@@ -6317,9 +6317,9 @@
                 <a:ea typeface="Calibri" pitchFamily="34" charset="-122"/>
                 <a:cs typeface="Calibri" pitchFamily="34" charset="-120"/>
               </a:rPr>
-              <a:t>‏גידול חודשי · ⁦12⁩ חודשים</a:t>
-            </a:r>
-            <a:endParaRPr lang="en-US" sz="1050" dirty="0"/>
+              <a:t>‫גידול חודשי · ‪12‬ חודשים‬</a:t>
+            </a:r>
+            <a:endParaRPr lang="he-IL" sz="1050" dirty="0"/>
           </a:p>
         </p:txBody>
       </p:sp>
@@ -6351,7 +6351,7 @@
               <a:buNone/>
             </a:pPr>
             <a:r>
-              <a:rPr lang="en-US" sz="1100" dirty="0">
+              <a:rPr lang="he-IL" altLang="en-US" sz="1100" dirty="0">
                 <a:solidFill>
                   <a:srgbClr val="5E6E85"/>
                 </a:solidFill>
@@ -6359,9 +6359,9 @@
                 <a:ea typeface="Calibri" pitchFamily="34" charset="-122"/>
                 <a:cs typeface="Calibri" pitchFamily="34" charset="-120"/>
               </a:rPr>
-              <a:t>‏אך מאי–אוגוסט ⁦2026⁩: ללא גידול נטו</a:t>
-            </a:r>
-            <a:endParaRPr lang="en-US" sz="1100" dirty="0"/>
+              <a:t>‫אך מאי–אוגוסט ‪2026‬: ללא גידול נטו‬</a:t>
+            </a:r>
+            <a:endParaRPr lang="he-IL" sz="1100" dirty="0"/>
           </a:p>
         </p:txBody>
       </p:sp>
@@ -6393,7 +6393,7 @@
               <a:buNone/>
             </a:pPr>
             <a:r>
-              <a:rPr lang="en-US" sz="1100" b="1" spc="80" kern="0" dirty="0">
+              <a:rPr lang="he-IL" altLang="en-US" sz="1100" b="1" spc="80" kern="0" dirty="0">
                 <a:solidFill>
                   <a:srgbClr val="91A0B7"/>
                 </a:solidFill>
@@ -6401,9 +6401,9 @@
                 <a:ea typeface="Calibri" pitchFamily="34" charset="-122"/>
                 <a:cs typeface="Calibri" pitchFamily="34" charset="-120"/>
               </a:rPr>
-              <a:t>‏ניצולת אחסון ותחזית · ⁦TB⁩</a:t>
-            </a:r>
-            <a:endParaRPr lang="en-US" sz="1100" dirty="0"/>
+              <a:t>‫ניצולת אחסון ותחזית · ‪TB‬‬</a:t>
+            </a:r>
+            <a:endParaRPr lang="he-IL" sz="1100" dirty="0"/>
           </a:p>
         </p:txBody>
       </p:sp>
@@ -6476,7 +6476,7 @@
               <a:buNone/>
             </a:pPr>
             <a:r>
-              <a:rPr lang="en-US" sz="1050" dirty="0">
+              <a:rPr lang="he-IL" altLang="en-US" sz="1050" dirty="0">
                 <a:solidFill>
                   <a:srgbClr val="91A0B7"/>
                 </a:solidFill>
@@ -6484,9 +6484,9 @@
                 <a:ea typeface="Calibri" pitchFamily="34" charset="-122"/>
                 <a:cs typeface="Calibri" pitchFamily="34" charset="-120"/>
               </a:rPr>
-              <a:t>‏בשימוש בפועל</a:t>
-            </a:r>
-            <a:endParaRPr lang="en-US" sz="1050" dirty="0"/>
+              <a:t>‫בשימוש בפועל‬</a:t>
+            </a:r>
+            <a:endParaRPr lang="he-IL" sz="1050" dirty="0"/>
           </a:p>
         </p:txBody>
       </p:sp>
@@ -6543,7 +6543,7 @@
               <a:buNone/>
             </a:pPr>
             <a:r>
-              <a:rPr lang="en-US" sz="1050" dirty="0">
+              <a:rPr lang="he-IL" altLang="en-US" sz="1050" dirty="0">
                 <a:solidFill>
                   <a:srgbClr val="91A0B7"/>
                 </a:solidFill>
@@ -6551,9 +6551,9 @@
                 <a:ea typeface="Calibri" pitchFamily="34" charset="-122"/>
                 <a:cs typeface="Calibri" pitchFamily="34" charset="-120"/>
               </a:rPr>
-              <a:t>‏תחזית מגמה</a:t>
-            </a:r>
-            <a:endParaRPr lang="en-US" sz="1050" dirty="0"/>
+              <a:t>‫תחזית מגמה‬</a:t>
+            </a:r>
+            <a:endParaRPr lang="he-IL" sz="1050" dirty="0"/>
           </a:p>
         </p:txBody>
       </p:sp>
@@ -6610,7 +6610,7 @@
               <a:buNone/>
             </a:pPr>
             <a:r>
-              <a:rPr lang="en-US" sz="1050" dirty="0">
+              <a:rPr lang="he-IL" altLang="en-US" sz="1050" dirty="0">
                 <a:solidFill>
                   <a:srgbClr val="91A0B7"/>
                 </a:solidFill>
@@ -6618,9 +6618,9 @@
                 <a:ea typeface="Calibri" pitchFamily="34" charset="-122"/>
                 <a:cs typeface="Calibri" pitchFamily="34" charset="-120"/>
               </a:rPr>
-              <a:t>‏תרחיש מואץ</a:t>
-            </a:r>
-            <a:endParaRPr lang="en-US" sz="1050" dirty="0"/>
+              <a:t>‫תרחיש מואץ‬</a:t>
+            </a:r>
+            <a:endParaRPr lang="he-IL" sz="1050" dirty="0"/>
           </a:p>
         </p:txBody>
       </p:sp>
@@ -6677,7 +6677,7 @@
               <a:buNone/>
             </a:pPr>
             <a:r>
-              <a:rPr lang="en-US" sz="1050" dirty="0">
+              <a:rPr lang="he-IL" altLang="en-US" sz="1050" dirty="0">
                 <a:solidFill>
                   <a:srgbClr val="91A0B7"/>
                 </a:solidFill>
@@ -6685,9 +6685,9 @@
                 <a:ea typeface="Calibri" pitchFamily="34" charset="-122"/>
                 <a:cs typeface="Calibri" pitchFamily="34" charset="-120"/>
               </a:rPr>
-              <a:t>‏סף ⁦80%⁩</a:t>
-            </a:r>
-            <a:endParaRPr lang="en-US" sz="1050" dirty="0"/>
+              <a:t>‫סף ‪80%‬‬</a:t>
+            </a:r>
+            <a:endParaRPr lang="he-IL" sz="1050" dirty="0"/>
           </a:p>
         </p:txBody>
       </p:sp>
@@ -6744,7 +6744,7 @@
               <a:buNone/>
             </a:pPr>
             <a:r>
-              <a:rPr lang="en-US" sz="1050" dirty="0">
+              <a:rPr lang="he-IL" altLang="en-US" sz="1050" dirty="0">
                 <a:solidFill>
                   <a:srgbClr val="91A0B7"/>
                 </a:solidFill>
@@ -6752,9 +6752,9 @@
                 <a:ea typeface="Calibri" pitchFamily="34" charset="-122"/>
                 <a:cs typeface="Calibri" pitchFamily="34" charset="-120"/>
               </a:rPr>
-              <a:t>‏קיבולת</a:t>
-            </a:r>
-            <a:endParaRPr lang="en-US" sz="1050" dirty="0"/>
+              <a:t>‫קיבולת‬</a:t>
+            </a:r>
+            <a:endParaRPr lang="he-IL" sz="1050" dirty="0"/>
           </a:p>
         </p:txBody>
       </p:sp>
@@ -6836,7 +6836,7 @@
               <a:buNone/>
             </a:pPr>
             <a:r>
-              <a:rPr lang="en-US" sz="1150" dirty="0">
+              <a:rPr lang="he-IL" altLang="en-US" sz="1150" dirty="0">
                 <a:solidFill>
                   <a:srgbClr val="91A0B7"/>
                 </a:solidFill>
@@ -6844,9 +6844,9 @@
                 <a:ea typeface="Calibri" pitchFamily="34" charset="-122"/>
                 <a:cs typeface="Calibri" pitchFamily="34" charset="-120"/>
               </a:rPr>
-              <a:t>‏ההרחבה הקודמת העלתה את הקיבולת מ-⁦696 TB⁩ ל-⁦916 TB⁩ באפריל ⁦2025⁩ — ⁦220 TB⁩, כלומר כ-⁦22⁩ חודשי מרווח בקצב המגמה הנוכחי.</a:t>
-            </a:r>
-            <a:endParaRPr lang="en-US" sz="1150" dirty="0"/>
+              <a:t>‫ההרחבה הקודמת העלתה את הקיבולת מ-‪696 TB‬ ל-‪916 TB‬ באפריל ‪2025 — 220 TB‬, כלומר כ-‪22‬ חודשי מרווח בקצב המגמה הנוכחי.‬</a:t>
+            </a:r>
+            <a:endParaRPr lang="he-IL" sz="1150" dirty="0"/>
           </a:p>
         </p:txBody>
       </p:sp>
@@ -6910,7 +6910,7 @@
               <a:buNone/>
             </a:pPr>
             <a:r>
-              <a:rPr lang="en-US" sz="1100" b="1" spc="120" kern="0" dirty="0">
+              <a:rPr lang="he-IL" altLang="en-US" sz="1100" b="1" spc="120" kern="0" dirty="0">
                 <a:solidFill>
                   <a:srgbClr val="FF6B7A"/>
                 </a:solidFill>
@@ -6918,9 +6918,9 @@
                 <a:ea typeface="Calibri" pitchFamily="34" charset="-122"/>
                 <a:cs typeface="Calibri" pitchFamily="34" charset="-120"/>
               </a:rPr>
-              <a:t>‏תיקון לתחזית</a:t>
-            </a:r>
-            <a:endParaRPr lang="en-US" sz="1100" dirty="0"/>
+              <a:t>‫תיקון לתחזית‬</a:t>
+            </a:r>
+            <a:endParaRPr lang="he-IL" sz="1100" dirty="0"/>
           </a:p>
         </p:txBody>
       </p:sp>
@@ -6952,7 +6952,7 @@
               <a:buNone/>
             </a:pPr>
             <a:r>
-              <a:rPr lang="en-US" sz="2500" b="1" dirty="0">
+              <a:rPr lang="he-IL" altLang="en-US" sz="2500" b="1" dirty="0">
                 <a:solidFill>
                   <a:srgbClr val="F4F7FB"/>
                 </a:solidFill>
@@ -6960,9 +6960,9 @@
                 <a:ea typeface="Calibri" pitchFamily="34" charset="-122"/>
                 <a:cs typeface="Calibri" pitchFamily="34" charset="-120"/>
               </a:rPr>
-              <a:t>‏סף ⁦80%⁩ לא ייחצה באוקטובר ⁦2026⁩ — אלא בין נובמבר ⁦2026⁩ למרץ ⁦2027⁩</a:t>
-            </a:r>
-            <a:endParaRPr lang="en-US" sz="2500" dirty="0"/>
+              <a:t>‫סף ‪80%‬ לא ייחצה באוקטובר ‪2026‬ — אלא בין נובמבר ‪2026‬ למרץ ‪2027‬‬</a:t>
+            </a:r>
+            <a:endParaRPr lang="he-IL" sz="2500" dirty="0"/>
           </a:p>
         </p:txBody>
       </p:sp>
@@ -7071,7 +7071,7 @@
               <a:buNone/>
             </a:pPr>
             <a:r>
-              <a:rPr lang="en-US" sz="1300" b="1" dirty="0">
+              <a:rPr lang="he-IL" altLang="en-US" sz="1300" b="1" dirty="0">
                 <a:solidFill>
                   <a:srgbClr val="F4F7FB"/>
                 </a:solidFill>
@@ -7079,9 +7079,9 @@
                 <a:ea typeface="Calibri" pitchFamily="34" charset="-122"/>
                 <a:cs typeface="Calibri" pitchFamily="34" charset="-120"/>
               </a:rPr>
-              <a:t>‏תרחיש מואץ</a:t>
-            </a:r>
-            <a:endParaRPr lang="en-US" sz="1300" dirty="0"/>
+              <a:t>‫תרחיש מואץ‬</a:t>
+            </a:r>
+            <a:endParaRPr lang="he-IL" sz="1300" dirty="0"/>
           </a:p>
         </p:txBody>
       </p:sp>
@@ -7113,7 +7113,7 @@
               <a:buNone/>
             </a:pPr>
             <a:r>
-              <a:rPr lang="en-US" sz="1150" dirty="0">
+              <a:rPr lang="he-IL" altLang="en-US" sz="1150" dirty="0">
                 <a:solidFill>
                   <a:srgbClr val="91A0B7"/>
                 </a:solidFill>
@@ -7121,9 +7121,9 @@
                 <a:ea typeface="Calibri" pitchFamily="34" charset="-122"/>
                 <a:cs typeface="Calibri" pitchFamily="34" charset="-120"/>
               </a:rPr>
-              <a:t>‏כ-⁦23 TB⁩ לחודש</a:t>
-            </a:r>
-            <a:endParaRPr lang="en-US" sz="1150" dirty="0"/>
+              <a:t>‫כ-‪23 TB‬ לחודש‬</a:t>
+            </a:r>
+            <a:endParaRPr lang="he-IL" sz="1150" dirty="0"/>
           </a:p>
         </p:txBody>
       </p:sp>
@@ -7155,7 +7155,7 @@
               <a:buNone/>
             </a:pPr>
             <a:r>
-              <a:rPr lang="en-US" sz="2700" b="1" dirty="0">
+              <a:rPr lang="he-IL" altLang="en-US" sz="2700" b="1" dirty="0">
                 <a:solidFill>
                   <a:srgbClr val="B07CFF"/>
                 </a:solidFill>
@@ -7163,9 +7163,9 @@
                 <a:ea typeface="Calibri" pitchFamily="34" charset="-122"/>
                 <a:cs typeface="Calibri" pitchFamily="34" charset="-120"/>
               </a:rPr>
-              <a:t>‏נובמבר ⁦2026⁩</a:t>
-            </a:r>
-            <a:endParaRPr lang="en-US" sz="2700" dirty="0"/>
+              <a:t>‫נובמבר ‪2026‬‬</a:t>
+            </a:r>
+            <a:endParaRPr lang="he-IL" sz="2700" dirty="0"/>
           </a:p>
         </p:txBody>
       </p:sp>
@@ -7197,7 +7197,7 @@
               <a:buNone/>
             </a:pPr>
             <a:r>
-              <a:rPr lang="en-US" sz="1100" dirty="0">
+              <a:rPr lang="he-IL" altLang="en-US" sz="1100" dirty="0">
                 <a:solidFill>
                   <a:srgbClr val="5E6E85"/>
                 </a:solidFill>
@@ -7205,9 +7205,9 @@
                 <a:ea typeface="Calibri" pitchFamily="34" charset="-122"/>
                 <a:cs typeface="Calibri" pitchFamily="34" charset="-120"/>
               </a:rPr>
-              <a:t>‏גבול אי-הוודאות העליון של הדשבורד</a:t>
-            </a:r>
-            <a:endParaRPr lang="en-US" sz="1100" dirty="0"/>
+              <a:t>‫גבול אי-הוודאות העליון של הדשבורד‬</a:t>
+            </a:r>
+            <a:endParaRPr lang="he-IL" sz="1100" dirty="0"/>
           </a:p>
         </p:txBody>
       </p:sp>
@@ -7291,7 +7291,7 @@
               <a:buNone/>
             </a:pPr>
             <a:r>
-              <a:rPr lang="en-US" sz="1300" b="1" dirty="0">
+              <a:rPr lang="he-IL" altLang="en-US" sz="1300" b="1" dirty="0">
                 <a:solidFill>
                   <a:srgbClr val="F4F7FB"/>
                 </a:solidFill>
@@ -7299,9 +7299,9 @@
                 <a:ea typeface="Calibri" pitchFamily="34" charset="-122"/>
                 <a:cs typeface="Calibri" pitchFamily="34" charset="-120"/>
               </a:rPr>
-              <a:t>‏תחזית הדשבורד</a:t>
-            </a:r>
-            <a:endParaRPr lang="en-US" sz="1300" dirty="0"/>
+              <a:t>‫תחזית הדשבורד‬</a:t>
+            </a:r>
+            <a:endParaRPr lang="he-IL" sz="1300" dirty="0"/>
           </a:p>
         </p:txBody>
       </p:sp>
@@ -7333,7 +7333,7 @@
               <a:buNone/>
             </a:pPr>
             <a:r>
-              <a:rPr lang="en-US" sz="1150" dirty="0">
+              <a:rPr lang="he-IL" altLang="en-US" sz="1150" dirty="0">
                 <a:solidFill>
                   <a:srgbClr val="91A0B7"/>
                 </a:solidFill>
@@ -7341,9 +7341,9 @@
                 <a:ea typeface="Calibri" pitchFamily="34" charset="-122"/>
                 <a:cs typeface="Calibri" pitchFamily="34" charset="-120"/>
               </a:rPr>
-              <a:t>‏כ-⁦14 TB⁩ לחודש</a:t>
-            </a:r>
-            <a:endParaRPr lang="en-US" sz="1150" dirty="0"/>
+              <a:t>‫כ-‪14 TB‬ לחודש‬</a:t>
+            </a:r>
+            <a:endParaRPr lang="he-IL" sz="1150" dirty="0"/>
           </a:p>
         </p:txBody>
       </p:sp>
@@ -7375,7 +7375,7 @@
               <a:buNone/>
             </a:pPr>
             <a:r>
-              <a:rPr lang="en-US" sz="2700" b="1" dirty="0">
+              <a:rPr lang="he-IL" altLang="en-US" sz="2700" b="1" dirty="0">
                 <a:solidFill>
                   <a:srgbClr val="FF9F43"/>
                 </a:solidFill>
@@ -7383,9 +7383,9 @@
                 <a:ea typeface="Calibri" pitchFamily="34" charset="-122"/>
                 <a:cs typeface="Calibri" pitchFamily="34" charset="-120"/>
               </a:rPr>
-              <a:t>‏ינואר ⁦2027⁩</a:t>
-            </a:r>
-            <a:endParaRPr lang="en-US" sz="2700" dirty="0"/>
+              <a:t>‫ינואר ‪2027‬‬</a:t>
+            </a:r>
+            <a:endParaRPr lang="he-IL" sz="2700" dirty="0"/>
           </a:p>
         </p:txBody>
       </p:sp>
@@ -7417,7 +7417,7 @@
               <a:buNone/>
             </a:pPr>
             <a:r>
-              <a:rPr lang="en-US" sz="1100" dirty="0">
+              <a:rPr lang="he-IL" altLang="en-US" sz="1100" dirty="0">
                 <a:solidFill>
                   <a:srgbClr val="5E6E85"/>
                 </a:solidFill>
@@ -7425,9 +7425,9 @@
                 <a:ea typeface="Calibri" pitchFamily="34" charset="-122"/>
                 <a:cs typeface="Calibri" pitchFamily="34" charset="-120"/>
               </a:rPr>
-              <a:t>‏שיפוע סדרת התחזית הקיימת</a:t>
-            </a:r>
-            <a:endParaRPr lang="en-US" sz="1100" dirty="0"/>
+              <a:t>‫שיפוע סדרת התחזית הקיימת‬</a:t>
+            </a:r>
+            <a:endParaRPr lang="he-IL" sz="1100" dirty="0"/>
           </a:p>
         </p:txBody>
       </p:sp>
@@ -7511,7 +7511,7 @@
               <a:buNone/>
             </a:pPr>
             <a:r>
-              <a:rPr lang="en-US" sz="1300" b="1" dirty="0">
+              <a:rPr lang="he-IL" altLang="en-US" sz="1300" b="1" dirty="0">
                 <a:solidFill>
                   <a:srgbClr val="F4F7FB"/>
                 </a:solidFill>
@@ -7519,9 +7519,9 @@
                 <a:ea typeface="Calibri" pitchFamily="34" charset="-122"/>
                 <a:cs typeface="Calibri" pitchFamily="34" charset="-120"/>
               </a:rPr>
-              <a:t>‏תרחיש מגמה</a:t>
-            </a:r>
-            <a:endParaRPr lang="en-US" sz="1300" dirty="0"/>
+              <a:t>‫תרחיש מגמה‬</a:t>
+            </a:r>
+            <a:endParaRPr lang="he-IL" sz="1300" dirty="0"/>
           </a:p>
         </p:txBody>
       </p:sp>
@@ -7553,7 +7553,7 @@
               <a:buNone/>
             </a:pPr>
             <a:r>
-              <a:rPr lang="en-US" sz="1150" dirty="0">
+              <a:rPr lang="he-IL" altLang="en-US" sz="1150" dirty="0">
                 <a:solidFill>
                   <a:srgbClr val="91A0B7"/>
                 </a:solidFill>
@@ -7561,9 +7561,9 @@
                 <a:ea typeface="Calibri" pitchFamily="34" charset="-122"/>
                 <a:cs typeface="Calibri" pitchFamily="34" charset="-120"/>
               </a:rPr>
-              <a:t>‏⁦9.9 TB⁩ לחודש</a:t>
-            </a:r>
-            <a:endParaRPr lang="en-US" sz="1150" dirty="0"/>
+              <a:t>‫‪9.9 TB‬ לחודש‬</a:t>
+            </a:r>
+            <a:endParaRPr lang="he-IL" sz="1150" dirty="0"/>
           </a:p>
         </p:txBody>
       </p:sp>
@@ -7595,7 +7595,7 @@
               <a:buNone/>
             </a:pPr>
             <a:r>
-              <a:rPr lang="en-US" sz="2700" b="1" dirty="0">
+              <a:rPr lang="he-IL" altLang="en-US" sz="2700" b="1" dirty="0">
                 <a:solidFill>
                   <a:srgbClr val="3DDC97"/>
                 </a:solidFill>
@@ -7603,9 +7603,9 @@
                 <a:ea typeface="Calibri" pitchFamily="34" charset="-122"/>
                 <a:cs typeface="Calibri" pitchFamily="34" charset="-120"/>
               </a:rPr>
-              <a:t>‏מרץ ⁦2027⁩</a:t>
-            </a:r>
-            <a:endParaRPr lang="en-US" sz="2700" dirty="0"/>
+              <a:t>‫מרץ ‪2027‬‬</a:t>
+            </a:r>
+            <a:endParaRPr lang="he-IL" sz="2700" dirty="0"/>
           </a:p>
         </p:txBody>
       </p:sp>
@@ -7637,7 +7637,7 @@
               <a:buNone/>
             </a:pPr>
             <a:r>
-              <a:rPr lang="en-US" sz="1100" dirty="0">
+              <a:rPr lang="he-IL" altLang="en-US" sz="1100" dirty="0">
                 <a:solidFill>
                   <a:srgbClr val="5E6E85"/>
                 </a:solidFill>
@@ -7645,9 +7645,9 @@
                 <a:ea typeface="Calibri" pitchFamily="34" charset="-122"/>
                 <a:cs typeface="Calibri" pitchFamily="34" charset="-120"/>
               </a:rPr>
-              <a:t>‏ממוצע ⁦12⁩ החודשים האחרונים בפועל</a:t>
-            </a:r>
-            <a:endParaRPr lang="en-US" sz="1100" dirty="0"/>
+              <a:t>‫ממוצע ‪12‬ החודשים האחרונים בפועל‬</a:t>
+            </a:r>
+            <a:endParaRPr lang="he-IL" sz="1100" dirty="0"/>
           </a:p>
         </p:txBody>
       </p:sp>
@@ -7731,7 +7731,7 @@
               <a:buNone/>
             </a:pPr>
             <a:r>
-              <a:rPr lang="en-US" sz="1250" b="1" dirty="0">
+              <a:rPr lang="he-IL" altLang="en-US" sz="1250" b="1" dirty="0">
                 <a:solidFill>
                   <a:srgbClr val="FF6B7A"/>
                 </a:solidFill>
@@ -7739,9 +7739,9 @@
                 <a:ea typeface="Calibri" pitchFamily="34" charset="-122"/>
                 <a:cs typeface="Calibri" pitchFamily="34" charset="-120"/>
               </a:rPr>
-              <a:t>‏מה שהדשבורד מציג כיום — ומה שגוי בו</a:t>
-            </a:r>
-            <a:endParaRPr lang="en-US" sz="1250" dirty="0"/>
+              <a:t>‫מה שהדשבורד מציג כיום — ומה שגוי בו‬</a:t>
+            </a:r>
+            <a:endParaRPr lang="he-IL" sz="1250" dirty="0"/>
           </a:p>
         </p:txBody>
       </p:sp>
@@ -7773,7 +7773,7 @@
               <a:buNone/>
             </a:pPr>
             <a:r>
-              <a:rPr lang="en-US" sz="1200" dirty="0">
+              <a:rPr lang="he-IL" altLang="en-US" sz="1200" dirty="0">
                 <a:solidFill>
                   <a:srgbClr val="91A0B7"/>
                 </a:solidFill>
@@ -7781,9 +7781,9 @@
                 <a:ea typeface="Calibri" pitchFamily="34" charset="-122"/>
                 <a:cs typeface="Calibri" pitchFamily="34" charset="-120"/>
               </a:rPr>
-              <a:t>‏הדשבורד מסמן את אוקטובר ⁦2026⁩ כמועד חציית ⁦80%⁩ ומציין ⁦733 TB⁩. סדרת התחזית שבתוכו מגיעה באוקטובר ל-⁦695 TB⁩ בלבד — ⁦75.9%⁩ ניצולת. אוקטובר הוא מועד היעד להוצאת הרכש, לא מועד חציית הסף; שני הקווים מצוירים על אותו חודש וזה מקור הבלבול. בנוסף, הדשבורד מציג ניצולת של ⁦75%⁩ במקום ⁦72.9%⁩, ומציג תחזית של ⁦710 TB⁩ לדצמבר בעוד סדרת הנתונים שלו עצמה נותנת ⁦725 TB⁩.</a:t>
-            </a:r>
-            <a:endParaRPr lang="en-US" sz="1200" dirty="0"/>
+              <a:t>‫הדשבורד מסמן את אוקטובר ‪2026‬ כמועד חציית ‪80%‬ ומציין ‪733 TB‬. סדרת התחזית שבתוכו מגיעה באוקטובר ל-‪695 TB‬ בלבד — ‪75.9%‬ ניצולת. אוקטובר הוא מועד היעד להוצאת הרכש, לא מועד חציית הסף; שני הקווים מצוירים על אותו חודש וזה מקור הבלבול. בנוסף, הדשבורד מציג ניצולת של ‪75%‬ במקום ‪72.9%‬, ומציג תחזית של ‪710 TB‬ לדצמבר בעוד סדרת הנתונים שלו עצמה נותנת ‪725 TB‬.‬</a:t>
+            </a:r>
+            <a:endParaRPr lang="he-IL" sz="1200" dirty="0"/>
           </a:p>
         </p:txBody>
       </p:sp>
@@ -7865,7 +7865,7 @@
               <a:buNone/>
             </a:pPr>
             <a:r>
-              <a:rPr lang="en-US" sz="1150" dirty="0">
+              <a:rPr lang="he-IL" altLang="en-US" sz="1150" dirty="0">
                 <a:solidFill>
                   <a:srgbClr val="91A0B7"/>
                 </a:solidFill>
@@ -7873,9 +7873,9 @@
                 <a:ea typeface="Calibri" pitchFamily="34" charset="-122"/>
                 <a:cs typeface="Calibri" pitchFamily="34" charset="-120"/>
               </a:rPr>
-              <a:t>‏המלצה: להחליף יעד-תאריך בטריגר ניצולת. הוצאת ⁦PO⁩ כאשר הניצולת מגיעה ל-⁦75%⁩ (⁦687 TB⁩) משאירה לפחות חודשיים אספקה גם בתרחיש המואץ. היום חסרים ⁦19 TB⁩ לטריגר.</a:t>
-            </a:r>
-            <a:endParaRPr lang="en-US" sz="1150" dirty="0"/>
+              <a:t>‫המלצה: להחליף יעד-תאריך בטריגר ניצולת. הוצאת ‪PO‬ כאשר הניצולת מגיעה ל-‪75% (687 TB)‬ משאירה לפחות חודשיים אספקה גם בתרחיש המואץ. היום חסרים ‪19 TB‬ לטריגר.‬</a:t>
+            </a:r>
+            <a:endParaRPr lang="he-IL" sz="1150" dirty="0"/>
           </a:p>
         </p:txBody>
       </p:sp>
@@ -7939,7 +7939,7 @@
               <a:buNone/>
             </a:pPr>
             <a:r>
-              <a:rPr lang="en-US" sz="1100" b="1" spc="120" kern="0" dirty="0">
+              <a:rPr lang="he-IL" altLang="en-US" sz="1100" b="1" spc="120" kern="0" dirty="0">
                 <a:solidFill>
                   <a:srgbClr val="3DDC97"/>
                 </a:solidFill>
@@ -7947,9 +7947,9 @@
                 <a:ea typeface="Calibri" pitchFamily="34" charset="-122"/>
                 <a:cs typeface="Calibri" pitchFamily="34" charset="-120"/>
               </a:rPr>
-              <a:t>‏השוואת עלויות</a:t>
-            </a:r>
-            <a:endParaRPr lang="en-US" sz="1100" dirty="0"/>
+              <a:t>‫השוואת עלויות‬</a:t>
+            </a:r>
+            <a:endParaRPr lang="he-IL" sz="1100" dirty="0"/>
           </a:p>
         </p:txBody>
       </p:sp>
@@ -7981,7 +7981,7 @@
               <a:buNone/>
             </a:pPr>
             <a:r>
-              <a:rPr lang="en-US" sz="2400" b="1" dirty="0">
+              <a:rPr lang="he-IL" altLang="en-US" sz="2400" b="1" dirty="0">
                 <a:solidFill>
                   <a:srgbClr val="F4F7FB"/>
                 </a:solidFill>
@@ -7989,9 +7989,9 @@
                 <a:ea typeface="Calibri" pitchFamily="34" charset="-122"/>
                 <a:cs typeface="Calibri" pitchFamily="34" charset="-120"/>
               </a:rPr>
-              <a:t>‏⁦100 TB⁩ ל-⁦5⁩ שנים: ⁦$116K⁩ ב-⁦On-Prem⁩ מול ⁦$138K–165K⁩ ב-⁦AWS S3 Standard⁩</a:t>
-            </a:r>
-            <a:endParaRPr lang="en-US" sz="2400" dirty="0"/>
+              <a:t>‫‪100 TB‬ ל-‪5‬ שנים: ‪$116K‬ ב-‪On-Prem‬ מול ‪$138K–165K‬ ב-‪AWS S3 Standard‬‬</a:t>
+            </a:r>
+            <a:endParaRPr lang="he-IL" sz="2400" dirty="0"/>
           </a:p>
         </p:txBody>
       </p:sp>
@@ -8048,7 +8048,7 @@
               <a:buNone/>
             </a:pPr>
             <a:r>
-              <a:rPr lang="en-US" sz="1100" b="1" spc="80" kern="0" dirty="0">
+              <a:rPr lang="he-IL" altLang="en-US" sz="1100" b="1" spc="80" kern="0" dirty="0">
                 <a:solidFill>
                   <a:srgbClr val="91A0B7"/>
                 </a:solidFill>
@@ -8056,9 +8056,9 @@
                 <a:ea typeface="Calibri" pitchFamily="34" charset="-122"/>
                 <a:cs typeface="Calibri" pitchFamily="34" charset="-120"/>
               </a:rPr>
-              <a:t>‏עלות ⁦100 TB⁩ לחמש שנים · אלפי דולרים</a:t>
-            </a:r>
-            <a:endParaRPr lang="en-US" sz="1100" dirty="0"/>
+              <a:t>‫עלות ‪100 TB‬ לחמש שנים · אלפי דולרים‬</a:t>
+            </a:r>
+            <a:endParaRPr lang="he-IL" sz="1100" dirty="0"/>
           </a:p>
         </p:txBody>
       </p:sp>
@@ -8131,7 +8131,7 @@
               <a:buNone/>
             </a:pPr>
             <a:r>
-              <a:rPr lang="en-US" sz="2600" b="1" dirty="0">
+              <a:rPr lang="en-US" altLang="en-US" sz="2600" b="1" dirty="0">
                 <a:solidFill>
                   <a:srgbClr val="3DDC97"/>
                 </a:solidFill>
@@ -8173,7 +8173,7 @@
               <a:buNone/>
             </a:pPr>
             <a:r>
-              <a:rPr lang="en-US" sz="1050" b="1" spc="80" kern="0" dirty="0">
+              <a:rPr lang="he-IL" altLang="en-US" sz="1050" b="1" spc="80" kern="0" dirty="0">
                 <a:solidFill>
                   <a:srgbClr val="91A0B7"/>
                 </a:solidFill>
@@ -8181,9 +8181,9 @@
                 <a:ea typeface="Calibri" pitchFamily="34" charset="-122"/>
                 <a:cs typeface="Calibri" pitchFamily="34" charset="-120"/>
               </a:rPr>
-              <a:t>‏לכל ⁦TB⁩ לוגי · ⁦Dell ECS⁩</a:t>
-            </a:r>
-            <a:endParaRPr lang="en-US" sz="1050" dirty="0"/>
+              <a:t>‫לכל ‪TB‬ לוגי · ‪Dell ECS‬‬</a:t>
+            </a:r>
+            <a:endParaRPr lang="he-IL" sz="1050" dirty="0"/>
           </a:p>
         </p:txBody>
       </p:sp>
@@ -8215,7 +8215,7 @@
               <a:buNone/>
             </a:pPr>
             <a:r>
-              <a:rPr lang="en-US" sz="1100" dirty="0">
+              <a:rPr lang="he-IL" altLang="en-US" sz="1100" dirty="0">
                 <a:solidFill>
                   <a:srgbClr val="5E6E85"/>
                 </a:solidFill>
@@ -8223,9 +8223,9 @@
                 <a:ea typeface="Calibri" pitchFamily="34" charset="-122"/>
                 <a:cs typeface="Calibri" pitchFamily="34" charset="-120"/>
               </a:rPr>
-              <a:t>‏כולל ⁦Replica x3⁩ בין שלושה אתרים</a:t>
-            </a:r>
-            <a:endParaRPr lang="en-US" sz="1100" dirty="0"/>
+              <a:t>‫כולל ‪Replica x3‬ בין שלושה אתרים‬</a:t>
+            </a:r>
+            <a:endParaRPr lang="he-IL" sz="1100" dirty="0"/>
           </a:p>
         </p:txBody>
       </p:sp>
@@ -8282,7 +8282,7 @@
               <a:buNone/>
             </a:pPr>
             <a:r>
-              <a:rPr lang="en-US" sz="2600" b="1" dirty="0">
+              <a:rPr lang="en-US" altLang="en-US" sz="2600" b="1" dirty="0">
                 <a:solidFill>
                   <a:srgbClr val="3DD9EB"/>
                 </a:solidFill>
@@ -8324,7 +8324,7 @@
               <a:buNone/>
             </a:pPr>
             <a:r>
-              <a:rPr lang="en-US" sz="1050" b="1" spc="80" kern="0" dirty="0">
+              <a:rPr lang="he-IL" altLang="en-US" sz="1050" b="1" spc="80" kern="0" dirty="0">
                 <a:solidFill>
                   <a:srgbClr val="91A0B7"/>
                 </a:solidFill>
@@ -8332,9 +8332,9 @@
                 <a:ea typeface="Calibri" pitchFamily="34" charset="-122"/>
                 <a:cs typeface="Calibri" pitchFamily="34" charset="-120"/>
               </a:rPr>
-              <a:t>‏לכל ⁦TB⁩ · ⁦AWS S3 Standard⁩</a:t>
-            </a:r>
-            <a:endParaRPr lang="en-US" sz="1050" dirty="0"/>
+              <a:t>‫לכל ‪TB · AWS S3 Standard‬‬</a:t>
+            </a:r>
+            <a:endParaRPr lang="he-IL" sz="1050" dirty="0"/>
           </a:p>
         </p:txBody>
       </p:sp>
@@ -8366,7 +8366,7 @@
               <a:buNone/>
             </a:pPr>
             <a:r>
-              <a:rPr lang="en-US" sz="1100" dirty="0">
+              <a:rPr lang="he-IL" altLang="en-US" sz="1100" dirty="0">
                 <a:solidFill>
                   <a:srgbClr val="5E6E85"/>
                 </a:solidFill>
@@ -8374,9 +8374,9 @@
                 <a:ea typeface="Calibri" pitchFamily="34" charset="-122"/>
                 <a:cs typeface="Calibri" pitchFamily="34" charset="-120"/>
               </a:rPr>
-              <a:t>‏עמידות מובנית, ללא כפל אחסון מצידנו</a:t>
-            </a:r>
-            <a:endParaRPr lang="en-US" sz="1100" dirty="0"/>
+              <a:t>‫עמידות מובנית, ללא כפל אחסון מצידנו‬</a:t>
+            </a:r>
+            <a:endParaRPr lang="he-IL" sz="1100" dirty="0"/>
           </a:p>
         </p:txBody>
       </p:sp>
@@ -8433,7 +8433,7 @@
               <a:buNone/>
             </a:pPr>
             <a:r>
-              <a:rPr lang="en-US" sz="2600" b="1" dirty="0">
+              <a:rPr lang="en-US" altLang="en-US" sz="2600" b="1" dirty="0">
                 <a:solidFill>
                   <a:srgbClr val="FF9F43"/>
                 </a:solidFill>
@@ -8475,7 +8475,7 @@
               <a:buNone/>
             </a:pPr>
             <a:r>
-              <a:rPr lang="en-US" sz="1050" b="1" spc="80" kern="0" dirty="0">
+              <a:rPr lang="he-IL" altLang="en-US" sz="1050" b="1" spc="80" kern="0" dirty="0">
                 <a:solidFill>
                   <a:srgbClr val="91A0B7"/>
                 </a:solidFill>
@@ -8483,9 +8483,9 @@
                 <a:ea typeface="Calibri" pitchFamily="34" charset="-122"/>
                 <a:cs typeface="Calibri" pitchFamily="34" charset="-120"/>
               </a:rPr>
-              <a:t>‏יתרון ל-⁦Dell ECS⁩</a:t>
-            </a:r>
-            <a:endParaRPr lang="en-US" sz="1050" dirty="0"/>
+              <a:t>‫יתרון ל-‪Dell ECS‬‬</a:t>
+            </a:r>
+            <a:endParaRPr lang="he-IL" sz="1050" dirty="0"/>
           </a:p>
         </p:txBody>
       </p:sp>
@@ -8517,7 +8517,7 @@
               <a:buNone/>
             </a:pPr>
             <a:r>
-              <a:rPr lang="en-US" sz="1100" dirty="0">
+              <a:rPr lang="he-IL" altLang="en-US" sz="1100" dirty="0">
                 <a:solidFill>
                   <a:srgbClr val="5E6E85"/>
                 </a:solidFill>
@@ -8525,9 +8525,9 @@
                 <a:ea typeface="Calibri" pitchFamily="34" charset="-122"/>
                 <a:cs typeface="Calibri" pitchFamily="34" charset="-120"/>
               </a:rPr>
-              <a:t>‏מול ⁦S3 Standard⁩ בלבד — ראו השקף הבא</a:t>
-            </a:r>
-            <a:endParaRPr lang="en-US" sz="1100" dirty="0"/>
+              <a:t>‫מול ‪S3 Standard‬ בלבד — ראו השקף הבא‬</a:t>
+            </a:r>
+            <a:endParaRPr lang="he-IL" sz="1100" dirty="0"/>
           </a:p>
         </p:txBody>
       </p:sp>
@@ -8609,7 +8609,7 @@
               <a:buNone/>
             </a:pPr>
             <a:r>
-              <a:rPr lang="en-US" sz="1150" dirty="0">
+              <a:rPr lang="he-IL" altLang="en-US" sz="1150" dirty="0">
                 <a:solidFill>
                   <a:srgbClr val="91A0B7"/>
                 </a:solidFill>
@@ -8617,9 +8617,9 @@
                 <a:ea typeface="Calibri" pitchFamily="34" charset="-122"/>
                 <a:cs typeface="Calibri" pitchFamily="34" charset="-120"/>
               </a:rPr>
-              <a:t>‏מקור ⁦On-Prem⁩: הצעת ⁦Dell⁩ — ⁦$695,520⁩ עבור ⁦1,800 TB⁩ נטו (⁦3,024 TB⁩ ברוטו), ⁦$386⁩ ל-⁦TB⁩ נטו, בהוספת דיסקים ל-⁦21 nodes⁩ קיימים ללא ⁦nodes⁩ חדשים. שני הצדדים מנורמלים ל-⁦100 TB⁩ לוגי.</a:t>
-            </a:r>
-            <a:endParaRPr lang="en-US" sz="1150" dirty="0"/>
+              <a:t>‫מקור ‪On-Prem‬: הצעת ‪Dell — $695,520‬ עבור ‪1,800 TB‬ נטו ‪(3,024 TB‬ ברוטו‪), $386‬ ל-‪TB‬ נטו, בהוספת דיסקים ל-‪21 nodes‬ קיימים ללא ‪nodes‬ חדשים. שני הצדדים מנורמלים ל-‪100 TB‬ לוגי.‬</a:t>
+            </a:r>
+            <a:endParaRPr lang="he-IL" sz="1150" dirty="0"/>
           </a:p>
         </p:txBody>
       </p:sp>
@@ -8683,7 +8683,7 @@
               <a:buNone/>
             </a:pPr>
             <a:r>
-              <a:rPr lang="en-US" sz="1100" b="1" spc="120" kern="0" dirty="0">
+              <a:rPr lang="he-IL" altLang="en-US" sz="1100" b="1" spc="120" kern="0" dirty="0">
                 <a:solidFill>
                   <a:srgbClr val="B07CFF"/>
                 </a:solidFill>
@@ -8691,9 +8691,9 @@
                 <a:ea typeface="Calibri" pitchFamily="34" charset="-122"/>
                 <a:cs typeface="Calibri" pitchFamily="34" charset="-120"/>
               </a:rPr>
-              <a:t>‏מה שההשוואה מפספסת</a:t>
-            </a:r>
-            <a:endParaRPr lang="en-US" sz="1100" dirty="0"/>
+              <a:t>‫מה שההשוואה מפספסת‬</a:t>
+            </a:r>
+            <a:endParaRPr lang="he-IL" sz="1100" dirty="0"/>
           </a:p>
         </p:txBody>
       </p:sp>
@@ -8725,7 +8725,7 @@
               <a:buNone/>
             </a:pPr>
             <a:r>
-              <a:rPr lang="en-US" sz="2500" b="1" dirty="0">
+              <a:rPr lang="he-IL" altLang="en-US" sz="2500" b="1" dirty="0">
                 <a:solidFill>
                   <a:srgbClr val="F4F7FB"/>
                 </a:solidFill>
@@ -8733,9 +8733,9 @@
                 <a:ea typeface="Calibri" pitchFamily="34" charset="-122"/>
                 <a:cs typeface="Calibri" pitchFamily="34" charset="-120"/>
               </a:rPr>
-              <a:t>‏השוואנו מול ⁦S3 Standard⁩ — אבל דימות ושיחות הם דאטה ארכיוני</a:t>
-            </a:r>
-            <a:endParaRPr lang="en-US" sz="2500" dirty="0"/>
+              <a:t>‫השוואנו מול ‪S3 Standard‬ — אבל דימות ושיחות הם דאטה ארכיוני‬</a:t>
+            </a:r>
+            <a:endParaRPr lang="he-IL" sz="2500" dirty="0"/>
           </a:p>
         </p:txBody>
       </p:sp>
@@ -8792,7 +8792,7 @@
               <a:buNone/>
             </a:pPr>
             <a:r>
-              <a:rPr lang="en-US" sz="1100" b="1" spc="80" kern="0" dirty="0">
+              <a:rPr lang="he-IL" altLang="en-US" sz="1100" b="1" spc="80" kern="0" dirty="0">
                 <a:solidFill>
                   <a:srgbClr val="91A0B7"/>
                 </a:solidFill>
@@ -8800,9 +8800,9 @@
                 <a:ea typeface="Calibri" pitchFamily="34" charset="-122"/>
                 <a:cs typeface="Calibri" pitchFamily="34" charset="-120"/>
               </a:rPr>
-              <a:t>‏עלות ⁦100 TB⁩ לחמש שנים לפי שכבת אחסון</a:t>
-            </a:r>
-            <a:endParaRPr lang="en-US" sz="1100" dirty="0"/>
+              <a:t>‫עלות ‪100 TB‬ לחמש שנים לפי שכבת אחסון‬</a:t>
+            </a:r>
+            <a:endParaRPr lang="he-IL" sz="1100" dirty="0"/>
           </a:p>
         </p:txBody>
       </p:sp>
@@ -8834,7 +8834,7 @@
               <a:buNone/>
             </a:pPr>
             <a:r>
-              <a:rPr lang="en-US" sz="1250" b="1" dirty="0">
+              <a:rPr lang="he-IL" altLang="en-US" sz="1250" b="1" dirty="0">
                 <a:solidFill>
                   <a:srgbClr val="F4F7FB"/>
                 </a:solidFill>
@@ -8842,9 +8842,9 @@
                 <a:ea typeface="Calibri" pitchFamily="34" charset="-122"/>
                 <a:cs typeface="Calibri" pitchFamily="34" charset="-120"/>
               </a:rPr>
-              <a:t>‏⁦S3 Standard⁩</a:t>
-            </a:r>
-            <a:endParaRPr lang="en-US" sz="1250" dirty="0"/>
+              <a:t>‫‪S3 Standard‬‬</a:t>
+            </a:r>
+            <a:endParaRPr lang="he-IL" sz="1250" dirty="0"/>
           </a:p>
         </p:txBody>
       </p:sp>
@@ -8876,7 +8876,7 @@
               <a:buNone/>
             </a:pPr>
             <a:r>
-              <a:rPr lang="en-US" sz="1050" dirty="0">
+              <a:rPr lang="he-IL" altLang="en-US" sz="1050" dirty="0">
                 <a:solidFill>
                   <a:srgbClr val="5E6E85"/>
                 </a:solidFill>
@@ -8884,9 +8884,9 @@
                 <a:ea typeface="Calibri" pitchFamily="34" charset="-122"/>
                 <a:cs typeface="Calibri" pitchFamily="34" charset="-120"/>
               </a:rPr>
-              <a:t>‏⁦$0.023⁩ / ⁦GB⁩</a:t>
-            </a:r>
-            <a:endParaRPr lang="en-US" sz="1050" dirty="0"/>
+              <a:t>‫‪$0.023 / GB‬‬</a:t>
+            </a:r>
+            <a:endParaRPr lang="he-IL" sz="1050" dirty="0"/>
           </a:p>
         </p:txBody>
       </p:sp>
@@ -8945,7 +8945,7 @@
               <a:buNone/>
             </a:pPr>
             <a:r>
-              <a:rPr lang="en-US" sz="2000" b="1" dirty="0">
+              <a:rPr lang="en-US" altLang="en-US" sz="2000" b="1" dirty="0">
                 <a:solidFill>
                   <a:srgbClr val="FF6B7A"/>
                 </a:solidFill>
@@ -8987,7 +8987,7 @@
               <a:buNone/>
             </a:pPr>
             <a:r>
-              <a:rPr lang="en-US" sz="1250" b="1" dirty="0">
+              <a:rPr lang="he-IL" altLang="en-US" sz="1250" b="1" dirty="0">
                 <a:solidFill>
                   <a:srgbClr val="F4F7FB"/>
                 </a:solidFill>
@@ -8995,9 +8995,9 @@
                 <a:ea typeface="Calibri" pitchFamily="34" charset="-122"/>
                 <a:cs typeface="Calibri" pitchFamily="34" charset="-120"/>
               </a:rPr>
-              <a:t>‏⁦Dell ECS On-Prem⁩</a:t>
-            </a:r>
-            <a:endParaRPr lang="en-US" sz="1250" dirty="0"/>
+              <a:t>‫‪Dell ECS On-Prem‬‬</a:t>
+            </a:r>
+            <a:endParaRPr lang="he-IL" sz="1250" dirty="0"/>
           </a:p>
         </p:txBody>
       </p:sp>
@@ -9029,7 +9029,7 @@
               <a:buNone/>
             </a:pPr>
             <a:r>
-              <a:rPr lang="en-US" sz="1050" dirty="0">
+              <a:rPr lang="he-IL" altLang="en-US" sz="1050" dirty="0">
                 <a:solidFill>
                   <a:srgbClr val="5E6E85"/>
                 </a:solidFill>
@@ -9037,9 +9037,9 @@
                 <a:ea typeface="Calibri" pitchFamily="34" charset="-122"/>
                 <a:cs typeface="Calibri" pitchFamily="34" charset="-120"/>
               </a:rPr>
-              <a:t>‏⁦capex⁩ דיסקים</a:t>
-            </a:r>
-            <a:endParaRPr lang="en-US" sz="1050" dirty="0"/>
+              <a:t>‫‪capex‬ דיסקים‬</a:t>
+            </a:r>
+            <a:endParaRPr lang="he-IL" sz="1050" dirty="0"/>
           </a:p>
         </p:txBody>
       </p:sp>
@@ -9098,7 +9098,7 @@
               <a:buNone/>
             </a:pPr>
             <a:r>
-              <a:rPr lang="en-US" sz="2000" b="1" dirty="0">
+              <a:rPr lang="en-US" altLang="en-US" sz="2000" b="1" dirty="0">
                 <a:solidFill>
                   <a:srgbClr val="FF9F43"/>
                 </a:solidFill>
@@ -9140,7 +9140,7 @@
               <a:buNone/>
             </a:pPr>
             <a:r>
-              <a:rPr lang="en-US" sz="1250" b="1" dirty="0">
+              <a:rPr lang="he-IL" altLang="en-US" sz="1250" b="1" dirty="0">
                 <a:solidFill>
                   <a:srgbClr val="F4F7FB"/>
                 </a:solidFill>
@@ -9148,9 +9148,9 @@
                 <a:ea typeface="Calibri" pitchFamily="34" charset="-122"/>
                 <a:cs typeface="Calibri" pitchFamily="34" charset="-120"/>
               </a:rPr>
-              <a:t>‏⁦S3 Standard-IA⁩</a:t>
-            </a:r>
-            <a:endParaRPr lang="en-US" sz="1250" dirty="0"/>
+              <a:t>‫‪S3 Standard-IA‬‬</a:t>
+            </a:r>
+            <a:endParaRPr lang="he-IL" sz="1250" dirty="0"/>
           </a:p>
         </p:txBody>
       </p:sp>
@@ -9182,7 +9182,7 @@
               <a:buNone/>
             </a:pPr>
             <a:r>
-              <a:rPr lang="en-US" sz="1050" dirty="0">
+              <a:rPr lang="he-IL" altLang="en-US" sz="1050" dirty="0">
                 <a:solidFill>
                   <a:srgbClr val="5E6E85"/>
                 </a:solidFill>
@@ -9190,9 +9190,9 @@
                 <a:ea typeface="Calibri" pitchFamily="34" charset="-122"/>
                 <a:cs typeface="Calibri" pitchFamily="34" charset="-120"/>
               </a:rPr>
-              <a:t>‏⁦$0.0125⁩ / ⁦GB⁩</a:t>
-            </a:r>
-            <a:endParaRPr lang="en-US" sz="1050" dirty="0"/>
+              <a:t>‫‪$0.0125 / GB‬‬</a:t>
+            </a:r>
+            <a:endParaRPr lang="he-IL" sz="1050" dirty="0"/>
           </a:p>
         </p:txBody>
       </p:sp>
@@ -9251,7 +9251,7 @@
               <a:buNone/>
             </a:pPr>
             <a:r>
-              <a:rPr lang="en-US" sz="2000" b="1" dirty="0">
+              <a:rPr lang="en-US" altLang="en-US" sz="2000" b="1" dirty="0">
                 <a:solidFill>
                   <a:srgbClr val="3DD9EB"/>
                 </a:solidFill>
@@ -9293,7 +9293,7 @@
               <a:buNone/>
             </a:pPr>
             <a:r>
-              <a:rPr lang="en-US" sz="1250" b="1" dirty="0">
+              <a:rPr lang="he-IL" altLang="en-US" sz="1250" b="1" dirty="0">
                 <a:solidFill>
                   <a:srgbClr val="F4F7FB"/>
                 </a:solidFill>
@@ -9301,9 +9301,9 @@
                 <a:ea typeface="Calibri" pitchFamily="34" charset="-122"/>
                 <a:cs typeface="Calibri" pitchFamily="34" charset="-120"/>
               </a:rPr>
-              <a:t>‏⁦S3 Glacier Instant Retrieval⁩</a:t>
-            </a:r>
-            <a:endParaRPr lang="en-US" sz="1250" dirty="0"/>
+              <a:t>‫‪S3 Glacier Instant Retrieval‬‬</a:t>
+            </a:r>
+            <a:endParaRPr lang="he-IL" sz="1250" dirty="0"/>
           </a:p>
         </p:txBody>
       </p:sp>
@@ -9335,7 +9335,7 @@
               <a:buNone/>
             </a:pPr>
             <a:r>
-              <a:rPr lang="en-US" sz="1050" dirty="0">
+              <a:rPr lang="he-IL" altLang="en-US" sz="1050" dirty="0">
                 <a:solidFill>
                   <a:srgbClr val="5E6E85"/>
                 </a:solidFill>
@@ -9343,9 +9343,9 @@
                 <a:ea typeface="Calibri" pitchFamily="34" charset="-122"/>
                 <a:cs typeface="Calibri" pitchFamily="34" charset="-120"/>
               </a:rPr>
-              <a:t>‏⁦$0.004⁩ / ⁦GB⁩</a:t>
-            </a:r>
-            <a:endParaRPr lang="en-US" sz="1050" dirty="0"/>
+              <a:t>‫‪$0.004 / GB‬‬</a:t>
+            </a:r>
+            <a:endParaRPr lang="he-IL" sz="1050" dirty="0"/>
           </a:p>
         </p:txBody>
       </p:sp>
@@ -9404,7 +9404,7 @@
               <a:buNone/>
             </a:pPr>
             <a:r>
-              <a:rPr lang="en-US" sz="2000" b="1" dirty="0">
+              <a:rPr lang="en-US" altLang="en-US" sz="2000" b="1" dirty="0">
                 <a:solidFill>
                   <a:srgbClr val="3DDC97"/>
                 </a:solidFill>
@@ -9498,7 +9498,7 @@
               <a:buNone/>
             </a:pPr>
             <a:r>
-              <a:rPr lang="en-US" sz="1350" b="1" dirty="0">
+              <a:rPr lang="he-IL" altLang="en-US" sz="1350" b="1" dirty="0">
                 <a:solidFill>
                   <a:srgbClr val="3DDC97"/>
                 </a:solidFill>
@@ -9506,9 +9506,9 @@
                 <a:ea typeface="Calibri" pitchFamily="34" charset="-122"/>
                 <a:cs typeface="Calibri" pitchFamily="34" charset="-120"/>
               </a:rPr>
-              <a:t>‏מה שמוזיל את הענן</a:t>
-            </a:r>
-            <a:endParaRPr lang="en-US" sz="1350" dirty="0"/>
+              <a:t>‫מה שמוזיל את הענן‬</a:t>
+            </a:r>
+            <a:endParaRPr lang="he-IL" sz="1350" dirty="0"/>
           </a:p>
         </p:txBody>
       </p:sp>
@@ -9540,7 +9540,7 @@
               <a:buNone/>
             </a:pPr>
             <a:r>
-              <a:rPr lang="en-US" sz="1200" dirty="0">
+              <a:rPr lang="he-IL" altLang="en-US" sz="1200" dirty="0">
                 <a:solidFill>
                   <a:srgbClr val="91A0B7"/>
                 </a:solidFill>
@@ -9548,9 +9548,9 @@
                 <a:ea typeface="Calibri" pitchFamily="34" charset="-122"/>
                 <a:cs typeface="Calibri" pitchFamily="34" charset="-120"/>
               </a:rPr>
-              <a:t>‏מסמכי ⁦Commit⁩ נכתבים פעם אחת ונקראים לעיתים נדירות. ב-⁦Glacier Instant Retrieval⁩, בזמן אחזור של מילישניות, העלות יורדת לכ-⁦$25K⁩ — פי ⁦4.6⁩ זול מ-⁦On-Prem⁩, ולא יקר ממנו ב-⁦30%⁩.</a:t>
-            </a:r>
-            <a:endParaRPr lang="en-US" sz="1200" dirty="0"/>
+              <a:t>‫מסמכי ‪Commit‬ נכתבים פעם אחת ונקראים לעיתים נדירות. ב-‪Glacier Instant Retrieval‬, בזמן אחזור של מילישניות, העלות יורדת לכ-‪$25K‬ — פי ‪4.6‬ זול מ-‪On-Prem‬, ולא יקר ממנו ב-‪30%‬.‬</a:t>
+            </a:r>
+            <a:endParaRPr lang="he-IL" sz="1200" dirty="0"/>
           </a:p>
         </p:txBody>
       </p:sp>
@@ -9634,7 +9634,7 @@
               <a:buNone/>
             </a:pPr>
             <a:r>
-              <a:rPr lang="en-US" sz="1350" b="1" dirty="0">
+              <a:rPr lang="he-IL" altLang="en-US" sz="1350" b="1" dirty="0">
                 <a:solidFill>
                   <a:srgbClr val="FF6B7A"/>
                 </a:solidFill>
@@ -9642,9 +9642,9 @@
                 <a:ea typeface="Calibri" pitchFamily="34" charset="-122"/>
                 <a:cs typeface="Calibri" pitchFamily="34" charset="-120"/>
               </a:rPr>
-              <a:t>‏מה שמייקר אותו</a:t>
-            </a:r>
-            <a:endParaRPr lang="en-US" sz="1350" dirty="0"/>
+              <a:t>‫מה שמייקר אותו‬</a:t>
+            </a:r>
+            <a:endParaRPr lang="he-IL" sz="1350" dirty="0"/>
           </a:p>
         </p:txBody>
       </p:sp>
@@ -9676,7 +9676,7 @@
               <a:buNone/>
             </a:pPr>
             <a:r>
-              <a:rPr lang="en-US" sz="1200" dirty="0">
+              <a:rPr lang="he-IL" altLang="en-US" sz="1200" dirty="0">
                 <a:solidFill>
                   <a:srgbClr val="91A0B7"/>
                 </a:solidFill>
@@ -9684,9 +9684,9 @@
                 <a:ea typeface="Calibri" pitchFamily="34" charset="-122"/>
                 <a:cs typeface="Calibri" pitchFamily="34" charset="-120"/>
               </a:rPr>
-              <a:t>‏יציאת נתונים ⁦$0.09⁩ ל-⁦GB⁩ (כ-⁦$9K⁩ להוצאת ⁦100 TB⁩ חזרה), דמי אחזור ⁦$0.03⁩ ל-⁦GB⁩ ב-⁦Glacier IR⁩, מינימום ⁦90⁩ יום אחסון, וחיוב מינימלי של ⁦128 KB⁩ לאובייקט — משמעותי בדימות עם ריבוי קבצים קטנים. מחירי אזור תל אביב גבוהים ב-⁦10%–15%⁩ ממחירון ⁦us-east-1⁩.</a:t>
-            </a:r>
-            <a:endParaRPr lang="en-US" sz="1200" dirty="0"/>
+              <a:t>‫יציאת נתונים ‪$0.09‬ ל-‪GB (‬כ-‪$9K‬ להוצאת ‪100 TB‬ חזרה), דמי אחזור ‪$0.03‬ ל-‪GB‬ ב-‪Glacier IR‬, מינימום ‪90‬ יום אחסון, וחיוב מינימלי של ‪128 KB‬ לאובייקט — משמעותי בדימות עם ריבוי קבצים קטנים. מחירי אזור תל אביב גבוהים ב-‪10%–15%‬ ממחירון ‪us-east-1‬.‬</a:t>
+            </a:r>
+            <a:endParaRPr lang="he-IL" sz="1200" dirty="0"/>
           </a:p>
         </p:txBody>
       </p:sp>
@@ -9768,7 +9768,7 @@
               <a:buNone/>
             </a:pPr>
             <a:r>
-              <a:rPr lang="en-US" sz="1150" dirty="0">
+              <a:rPr lang="he-IL" altLang="en-US" sz="1150" dirty="0">
                 <a:solidFill>
                   <a:srgbClr val="91A0B7"/>
                 </a:solidFill>
@@ -9776,9 +9776,9 @@
                 <a:ea typeface="Calibri" pitchFamily="34" charset="-122"/>
                 <a:cs typeface="Calibri" pitchFamily="34" charset="-120"/>
               </a:rPr>
-              <a:t>‏הנתון שחסר להכרעה: פילוח גודל-אובייקט ותדירות אחזור של קורפוס ה-⁦Commit⁩. הוא שקובע איזו שכבה נכונה, והוא אינו קיים היום. המחירים הם מחירון רשימה, ללא הנחות נפח או התחייבות.</a:t>
-            </a:r>
-            <a:endParaRPr lang="en-US" sz="1150" dirty="0"/>
+              <a:t>‫הנתון שחסר להכרעה: פילוח גודל-אובייקט ותדירות אחזור של קורפוס ה-‪Commit‬. הוא שקובע איזו שכבה נכונה, והוא אינו קיים היום. המחירים הם מחירון רשימה, ללא הנחות נפח או התחייבות.‬</a:t>
+            </a:r>
+            <a:endParaRPr lang="he-IL" sz="1150" dirty="0"/>
           </a:p>
         </p:txBody>
       </p:sp>
@@ -9842,7 +9842,7 @@
               <a:buNone/>
             </a:pPr>
             <a:r>
-              <a:rPr lang="en-US" sz="1100" b="1" spc="120" kern="0" dirty="0">
+              <a:rPr lang="he-IL" altLang="en-US" sz="1100" b="1" spc="120" kern="0" dirty="0">
                 <a:solidFill>
                   <a:srgbClr val="FF6B7A"/>
                 </a:solidFill>
@@ -9850,9 +9850,9 @@
                 <a:ea typeface="Calibri" pitchFamily="34" charset="-122"/>
                 <a:cs typeface="Calibri" pitchFamily="34" charset="-120"/>
               </a:rPr>
-              <a:t>‏סיכונים</a:t>
-            </a:r>
-            <a:endParaRPr lang="en-US" sz="1100" dirty="0"/>
+              <a:t>‫סיכונים‬</a:t>
+            </a:r>
+            <a:endParaRPr lang="he-IL" sz="1100" dirty="0"/>
           </a:p>
         </p:txBody>
       </p:sp>
@@ -9884,7 +9884,7 @@
               <a:buNone/>
             </a:pPr>
             <a:r>
-              <a:rPr lang="en-US" sz="2600" b="1" dirty="0">
+              <a:rPr lang="he-IL" altLang="en-US" sz="2600" b="1" dirty="0">
                 <a:solidFill>
                   <a:srgbClr val="F4F7FB"/>
                 </a:solidFill>
@@ -9892,9 +9892,9 @@
                 <a:ea typeface="Calibri" pitchFamily="34" charset="-122"/>
                 <a:cs typeface="Calibri" pitchFamily="34" charset="-120"/>
               </a:rPr>
-              <a:t>‏כל סיכון מהותי ניתן להפחתה — אך שניים מהם חוסמים התחלה</a:t>
-            </a:r>
-            <a:endParaRPr lang="en-US" sz="2600" dirty="0"/>
+              <a:t>‫כל סיכון מהותי ניתן להפחתה — אך שניים מהם חוסמים התחלה‬</a:t>
+            </a:r>
+            <a:endParaRPr lang="he-IL" sz="2600" dirty="0"/>
           </a:p>
         </p:txBody>
       </p:sp>
@@ -10003,7 +10003,7 @@
               <a:buNone/>
             </a:pPr>
             <a:r>
-              <a:rPr lang="en-US" sz="1250" b="1" dirty="0">
+              <a:rPr lang="he-IL" altLang="en-US" sz="1250" b="1" dirty="0">
                 <a:solidFill>
                   <a:srgbClr val="FF6B7A"/>
                 </a:solidFill>
@@ -10011,9 +10011,9 @@
                 <a:ea typeface="Calibri" pitchFamily="34" charset="-122"/>
                 <a:cs typeface="Calibri" pitchFamily="34" charset="-120"/>
               </a:rPr>
-              <a:t>‏משפטי · קבילות</a:t>
-            </a:r>
-            <a:endParaRPr lang="en-US" sz="1250" dirty="0"/>
+              <a:t>‫משפטי · קבילות‬</a:t>
+            </a:r>
+            <a:endParaRPr lang="he-IL" sz="1250" dirty="0"/>
           </a:p>
         </p:txBody>
       </p:sp>
@@ -10045,7 +10045,7 @@
               <a:buNone/>
             </a:pPr>
             <a:r>
-              <a:rPr lang="en-US" sz="1100" dirty="0">
+              <a:rPr lang="he-IL" altLang="en-US" sz="1100" dirty="0">
                 <a:solidFill>
                   <a:srgbClr val="F4F7FB"/>
                 </a:solidFill>
@@ -10053,9 +10053,9 @@
                 <a:ea typeface="Calibri" pitchFamily="34" charset="-122"/>
                 <a:cs typeface="Calibri" pitchFamily="34" charset="-120"/>
               </a:rPr>
-              <a:t>‏תאריך היצירה של המסמך משתנה בהעתקה; בית משפט עשוי לדרוש אסמכתא שהמסמך לא שונה.</a:t>
-            </a:r>
-            <a:endParaRPr lang="en-US" sz="1100" dirty="0"/>
+              <a:t>‫תאריך היצירה של המסמך משתנה בהעתקה; בית משפט עשוי לדרוש אסמכתא שהמסמך לא שונה.‬</a:t>
+            </a:r>
+            <a:endParaRPr lang="he-IL" sz="1100" dirty="0"/>
           </a:p>
         </p:txBody>
       </p:sp>
@@ -10112,7 +10112,7 @@
               <a:buNone/>
             </a:pPr>
             <a:r>
-              <a:rPr lang="en-US" sz="1050" dirty="0">
+              <a:rPr lang="he-IL" altLang="en-US" sz="1050" dirty="0">
                 <a:solidFill>
                   <a:srgbClr val="91A0B7"/>
                 </a:solidFill>
@@ -10120,9 +10120,9 @@
                 <a:ea typeface="Calibri" pitchFamily="34" charset="-122"/>
                 <a:cs typeface="Calibri" pitchFamily="34" charset="-120"/>
               </a:rPr>
-              <a:t>‏מיטיגציה: ⁦S3 Object Lock⁩ במצב ⁦Compliance, manifest⁩ חתום ⁦SHA-256⁩ לכל אובייקט, ושימור ה-⁦metadata⁩ המקורי כ-⁦object metadata⁩.</a:t>
-            </a:r>
-            <a:endParaRPr lang="en-US" sz="1050" dirty="0"/>
+              <a:t>‫מיטיגציה: ‪S3 Object Lock‬ במצב ‪Compliance, manifest‬ חתום ‪SHA-256‬ לכל אובייקט, ושימור ה-‪metadata‬ המקורי כ-‪object metadata‬.‬</a:t>
+            </a:r>
+            <a:endParaRPr lang="he-IL" sz="1050" dirty="0"/>
           </a:p>
         </p:txBody>
       </p:sp>
@@ -10206,7 +10206,7 @@
               <a:buNone/>
             </a:pPr>
             <a:r>
-              <a:rPr lang="en-US" sz="1250" b="1" dirty="0">
+              <a:rPr lang="he-IL" altLang="en-US" sz="1250" b="1" dirty="0">
                 <a:solidFill>
                   <a:srgbClr val="FF6B7A"/>
                 </a:solidFill>
@@ -10214,9 +10214,9 @@
                 <a:ea typeface="Calibri" pitchFamily="34" charset="-122"/>
                 <a:cs typeface="Calibri" pitchFamily="34" charset="-120"/>
               </a:rPr>
-              <a:t>‏רגולציה · ריבונות</a:t>
-            </a:r>
-            <a:endParaRPr lang="en-US" sz="1250" dirty="0"/>
+              <a:t>‫רגולציה · ריבונות‬</a:t>
+            </a:r>
+            <a:endParaRPr lang="he-IL" sz="1250" dirty="0"/>
           </a:p>
         </p:txBody>
       </p:sp>
@@ -10248,7 +10248,7 @@
               <a:buNone/>
             </a:pPr>
             <a:r>
-              <a:rPr lang="en-US" sz="1100" dirty="0">
+              <a:rPr lang="he-IL" altLang="en-US" sz="1100" dirty="0">
                 <a:solidFill>
                   <a:srgbClr val="F4F7FB"/>
                 </a:solidFill>
@@ -10256,9 +10256,9 @@
                 <a:ea typeface="Calibri" pitchFamily="34" charset="-122"/>
                 <a:cs typeface="Calibri" pitchFamily="34" charset="-120"/>
               </a:rPr>
-              <a:t>‏מידע רפואי ופיננסי מזוהה היוצא משליטת הארגון.</a:t>
-            </a:r>
-            <a:endParaRPr lang="en-US" sz="1100" dirty="0"/>
+              <a:t>‫מידע רפואי ופיננסי מזוהה היוצא משליטת הארגון.‬</a:t>
+            </a:r>
+            <a:endParaRPr lang="he-IL" sz="1100" dirty="0"/>
           </a:p>
         </p:txBody>
       </p:sp>
@@ -10315,7 +10315,7 @@
               <a:buNone/>
             </a:pPr>
             <a:r>
-              <a:rPr lang="en-US" sz="1050" dirty="0">
+              <a:rPr lang="he-IL" altLang="en-US" sz="1050" dirty="0">
                 <a:solidFill>
                   <a:srgbClr val="91A0B7"/>
                 </a:solidFill>
@@ -10323,9 +10323,9 @@
                 <a:ea typeface="Calibri" pitchFamily="34" charset="-122"/>
                 <a:cs typeface="Calibri" pitchFamily="34" charset="-120"/>
               </a:rPr>
-              <a:t>‏מיטיגציה: אזור ⁦il-central-1⁩ (תל אביב), הצפנה ב-⁦KMS⁩ עם מפתח בבעלותנו, ואישור ⁦DPO⁩ ורגולטור לפני ההעתקה הראשונה.</a:t>
-            </a:r>
-            <a:endParaRPr lang="en-US" sz="1050" dirty="0"/>
+              <a:t>‫מיטיגציה: אזור ‪il-central-1 (‬תל אביב), הצפנה ב-‪KMS‬ עם מפתח בבעלותנו, ואישור ‪DPO‬ ורגולטור לפני ההעתקה הראשונה.‬</a:t>
+            </a:r>
+            <a:endParaRPr lang="he-IL" sz="1050" dirty="0"/>
           </a:p>
         </p:txBody>
       </p:sp>
@@ -10409,7 +10409,7 @@
               <a:buNone/>
             </a:pPr>
             <a:r>
-              <a:rPr lang="en-US" sz="1250" b="1" dirty="0">
+              <a:rPr lang="he-IL" altLang="en-US" sz="1250" b="1" dirty="0">
                 <a:solidFill>
                   <a:srgbClr val="FF9F43"/>
                 </a:solidFill>
@@ -10417,9 +10417,9 @@
                 <a:ea typeface="Calibri" pitchFamily="34" charset="-122"/>
                 <a:cs typeface="Calibri" pitchFamily="34" charset="-120"/>
               </a:rPr>
-              <a:t>‏טכני · שלמות</a:t>
-            </a:r>
-            <a:endParaRPr lang="en-US" sz="1250" dirty="0"/>
+              <a:t>‫טכני · שלמות‬</a:t>
+            </a:r>
+            <a:endParaRPr lang="he-IL" sz="1250" dirty="0"/>
           </a:p>
         </p:txBody>
       </p:sp>
@@ -10451,7 +10451,7 @@
               <a:buNone/>
             </a:pPr>
             <a:r>
-              <a:rPr lang="en-US" sz="1100" dirty="0">
+              <a:rPr lang="he-IL" altLang="en-US" sz="1100" dirty="0">
                 <a:solidFill>
                   <a:srgbClr val="F4F7FB"/>
                 </a:solidFill>
@@ -10459,9 +10459,9 @@
                 <a:ea typeface="Calibri" pitchFamily="34" charset="-122"/>
                 <a:cs typeface="Calibri" pitchFamily="34" charset="-120"/>
               </a:rPr>
-              <a:t>‏אין כלי העתקה ייעודי; חלק מהקבצים עלולים להיכשל בהעברה.</a:t>
-            </a:r>
-            <a:endParaRPr lang="en-US" sz="1100" dirty="0"/>
+              <a:t>‫אין כלי העתקה ייעודי; חלק מהקבצים עלולים להיכשל בהעברה.‬</a:t>
+            </a:r>
+            <a:endParaRPr lang="he-IL" sz="1100" dirty="0"/>
           </a:p>
         </p:txBody>
       </p:sp>
@@ -10518,7 +10518,7 @@
               <a:buNone/>
             </a:pPr>
             <a:r>
-              <a:rPr lang="en-US" sz="1050" dirty="0">
+              <a:rPr lang="he-IL" altLang="en-US" sz="1050" dirty="0">
                 <a:solidFill>
                   <a:srgbClr val="91A0B7"/>
                 </a:solidFill>
@@ -10526,9 +10526,9 @@
                 <a:ea typeface="Calibri" pitchFamily="34" charset="-122"/>
                 <a:cs typeface="Calibri" pitchFamily="34" charset="-120"/>
               </a:rPr>
-              <a:t>‏מיטיגציה: ⁦AWS DataSync⁩ עם ולידציה מובנית, דוח חריגים לכל ריצה, ומחיקה מ-⁦ECS⁩ רק לאחר ולידציה מלאה.</a:t>
-            </a:r>
-            <a:endParaRPr lang="en-US" sz="1050" dirty="0"/>
+              <a:t>‫מיטיגציה: ‪AWS DataSync‬ עם ולידציה מובנית, דוח חריגים לכל ריצה, ומחיקה מ-‪ECS‬ רק לאחר ולידציה מלאה.‬</a:t>
+            </a:r>
+            <a:endParaRPr lang="he-IL" sz="1050" dirty="0"/>
           </a:p>
         </p:txBody>
       </p:sp>
@@ -10612,7 +10612,7 @@
               <a:buNone/>
             </a:pPr>
             <a:r>
-              <a:rPr lang="en-US" sz="1250" b="1" dirty="0">
+              <a:rPr lang="he-IL" altLang="en-US" sz="1250" b="1" dirty="0">
                 <a:solidFill>
                   <a:srgbClr val="FF9F43"/>
                 </a:solidFill>
@@ -10620,9 +10620,9 @@
                 <a:ea typeface="Calibri" pitchFamily="34" charset="-122"/>
                 <a:cs typeface="Calibri" pitchFamily="34" charset="-120"/>
               </a:rPr>
-              <a:t>‏ביצועים</a:t>
-            </a:r>
-            <a:endParaRPr lang="en-US" sz="1250" dirty="0"/>
+              <a:t>‫ביצועים‬</a:t>
+            </a:r>
+            <a:endParaRPr lang="he-IL" sz="1250" dirty="0"/>
           </a:p>
         </p:txBody>
       </p:sp>
@@ -10654,7 +10654,7 @@
               <a:buNone/>
             </a:pPr>
             <a:r>
-              <a:rPr lang="en-US" sz="1100" dirty="0">
+              <a:rPr lang="he-IL" altLang="en-US" sz="1100" dirty="0">
                 <a:solidFill>
                   <a:srgbClr val="F4F7FB"/>
                 </a:solidFill>
@@ -10662,9 +10662,9 @@
                 <a:ea typeface="Calibri" pitchFamily="34" charset="-122"/>
                 <a:cs typeface="Calibri" pitchFamily="34" charset="-120"/>
               </a:rPr>
-              <a:t>‏זמני אחזור בענן נמוכים יותר; למערכת הדימות אין ניסיון מול ענן.</a:t>
-            </a:r>
-            <a:endParaRPr lang="en-US" sz="1100" dirty="0"/>
+              <a:t>‫זמני אחזור בענן נמוכים יותר; למערכת הדימות אין ניסיון מול ענן.‬</a:t>
+            </a:r>
+            <a:endParaRPr lang="he-IL" sz="1100" dirty="0"/>
           </a:p>
         </p:txBody>
       </p:sp>
@@ -10721,7 +10721,7 @@
               <a:buNone/>
             </a:pPr>
             <a:r>
-              <a:rPr lang="en-US" sz="1050" dirty="0">
+              <a:rPr lang="he-IL" altLang="en-US" sz="1050" dirty="0">
                 <a:solidFill>
                   <a:srgbClr val="91A0B7"/>
                 </a:solidFill>
@@ -10729,9 +10729,9 @@
                 <a:ea typeface="Calibri" pitchFamily="34" charset="-122"/>
                 <a:cs typeface="Calibri" pitchFamily="34" charset="-120"/>
               </a:rPr>
-              <a:t>‏מיטיגציה: ⁦POC⁩ על ⁦1–2 TB⁩ לפני התחייבות, חיבור ⁦Direct Connect⁩ ולא אינטרנט, ומדידת זמני אחזור מול ה-⁦SLA⁩ הקיים.</a:t>
-            </a:r>
-            <a:endParaRPr lang="en-US" sz="1050" dirty="0"/>
+              <a:t>‫מיטיגציה: ‪POC‬ על ‪1–2 TB‬ לפני התחייבות, חיבור ‪Direct Connect‬ ולא אינטרנט, ומדידת זמני אחזור מול ה-‪SLA‬ הקיים.‬</a:t>
+            </a:r>
+            <a:endParaRPr lang="he-IL" sz="1050" dirty="0"/>
           </a:p>
         </p:txBody>
       </p:sp>
@@ -10815,7 +10815,7 @@
               <a:buNone/>
             </a:pPr>
             <a:r>
-              <a:rPr lang="en-US" sz="1250" b="1" dirty="0">
+              <a:rPr lang="he-IL" altLang="en-US" sz="1250" b="1" dirty="0">
                 <a:solidFill>
                   <a:srgbClr val="3DD9EB"/>
                 </a:solidFill>
@@ -10823,9 +10823,9 @@
                 <a:ea typeface="Calibri" pitchFamily="34" charset="-122"/>
                 <a:cs typeface="Calibri" pitchFamily="34" charset="-120"/>
               </a:rPr>
-              <a:t>‏לוחות זמנים</a:t>
-            </a:r>
-            <a:endParaRPr lang="en-US" sz="1250" dirty="0"/>
+              <a:t>‫לוחות זמנים‬</a:t>
+            </a:r>
+            <a:endParaRPr lang="he-IL" sz="1250" dirty="0"/>
           </a:p>
         </p:txBody>
       </p:sp>
@@ -10857,7 +10857,7 @@
               <a:buNone/>
             </a:pPr>
             <a:r>
-              <a:rPr lang="en-US" sz="1100" dirty="0">
+              <a:rPr lang="he-IL" altLang="en-US" sz="1100" dirty="0">
                 <a:solidFill>
                   <a:srgbClr val="F4F7FB"/>
                 </a:solidFill>
@@ -10865,9 +10865,9 @@
                 <a:ea typeface="Calibri" pitchFamily="34" charset="-122"/>
                 <a:cs typeface="Calibri" pitchFamily="34" charset="-120"/>
               </a:rPr>
-              <a:t>‏ההעתקה אורכת שבועות ותלויה בפס רוחב.</a:t>
-            </a:r>
-            <a:endParaRPr lang="en-US" sz="1100" dirty="0"/>
+              <a:t>‫ההעתקה אורכת שבועות ותלויה בפס רוחב.‬</a:t>
+            </a:r>
+            <a:endParaRPr lang="he-IL" sz="1100" dirty="0"/>
           </a:p>
         </p:txBody>
       </p:sp>
@@ -10924,7 +10924,7 @@
               <a:buNone/>
             </a:pPr>
             <a:r>
-              <a:rPr lang="en-US" sz="1050" dirty="0">
+              <a:rPr lang="he-IL" altLang="en-US" sz="1050" dirty="0">
                 <a:solidFill>
                   <a:srgbClr val="91A0B7"/>
                 </a:solidFill>
@@ -10932,9 +10932,9 @@
                 <a:ea typeface="Calibri" pitchFamily="34" charset="-122"/>
                 <a:cs typeface="Calibri" pitchFamily="34" charset="-120"/>
               </a:rPr>
-              <a:t>‏מיטיגציה: העברה ראשונית ב-⁦AWS Snowball⁩. ההעתקה אינה על הנתיב הקריטי של הרכש — שני המסלולים רצים במקביל.</a:t>
-            </a:r>
-            <a:endParaRPr lang="en-US" sz="1050" dirty="0"/>
+              <a:t>‫מיטיגציה: העברה ראשונית ב-‪AWS Snowball‬. ההעתקה אינה על הנתיב הקריטי של הרכש — שני המסלולים רצים במקביל.‬</a:t>
+            </a:r>
+            <a:endParaRPr lang="he-IL" sz="1050" dirty="0"/>
           </a:p>
         </p:txBody>
       </p:sp>
@@ -11018,7 +11018,7 @@
               <a:buNone/>
             </a:pPr>
             <a:r>
-              <a:rPr lang="en-US" sz="1250" b="1" dirty="0">
+              <a:rPr lang="he-IL" altLang="en-US" sz="1250" b="1" dirty="0">
                 <a:solidFill>
                   <a:srgbClr val="3DD9EB"/>
                 </a:solidFill>
@@ -11026,9 +11026,9 @@
                 <a:ea typeface="Calibri" pitchFamily="34" charset="-122"/>
                 <a:cs typeface="Calibri" pitchFamily="34" charset="-120"/>
               </a:rPr>
-              <a:t>‏כלכלי · ⁦Lock-in⁩</a:t>
-            </a:r>
-            <a:endParaRPr lang="en-US" sz="1250" dirty="0"/>
+              <a:t>‫כלכלי · ‪Lock-in‬‬</a:t>
+            </a:r>
+            <a:endParaRPr lang="he-IL" sz="1250" dirty="0"/>
           </a:p>
         </p:txBody>
       </p:sp>
@@ -11060,7 +11060,7 @@
               <a:buNone/>
             </a:pPr>
             <a:r>
-              <a:rPr lang="en-US" sz="1100" dirty="0">
+              <a:rPr lang="he-IL" altLang="en-US" sz="1100" dirty="0">
                 <a:solidFill>
                   <a:srgbClr val="F4F7FB"/>
                 </a:solidFill>
@@ -11068,9 +11068,9 @@
                 <a:ea typeface="Calibri" pitchFamily="34" charset="-122"/>
                 <a:cs typeface="Calibri" pitchFamily="34" charset="-120"/>
               </a:rPr>
-              <a:t>‏יציאה מהענן עולה ⁦$0.09⁩ ל-⁦GB⁩; מעבר ממודל ⁦capex⁩ למודל ⁦opex⁩.</a:t>
-            </a:r>
-            <a:endParaRPr lang="en-US" sz="1100" dirty="0"/>
+              <a:t>‫יציאה מהענן עולה ‪$0.09‬ ל-‪GB‬; מעבר ממודל ‪capex‬ למודל ‪opex‬.‬</a:t>
+            </a:r>
+            <a:endParaRPr lang="he-IL" sz="1100" dirty="0"/>
           </a:p>
         </p:txBody>
       </p:sp>
@@ -11127,7 +11127,7 @@
               <a:buNone/>
             </a:pPr>
             <a:r>
-              <a:rPr lang="en-US" sz="1050" dirty="0">
+              <a:rPr lang="he-IL" altLang="en-US" sz="1050" dirty="0">
                 <a:solidFill>
                   <a:srgbClr val="91A0B7"/>
                 </a:solidFill>
@@ -11135,9 +11135,9 @@
                 <a:ea typeface="Calibri" pitchFamily="34" charset="-122"/>
                 <a:cs typeface="Calibri" pitchFamily="34" charset="-120"/>
               </a:rPr>
-              <a:t>‏מיטיגציה: תמחור תרחיש יציאה מראש, התחלה בקורפוס אחד בלבד, ואישור תקציב ⁦opex⁩ רב-שנתי.</a:t>
-            </a:r>
-            <a:endParaRPr lang="en-US" sz="1050" dirty="0"/>
+              <a:t>‫מיטיגציה: תמחור תרחיש יציאה מראש, התחלה בקורפוס אחד בלבד, ואישור תקציב ‪opex‬ רב-שנתי.‬</a:t>
+            </a:r>
+            <a:endParaRPr lang="he-IL" sz="1050" dirty="0"/>
           </a:p>
         </p:txBody>
       </p:sp>
@@ -11219,7 +11219,7 @@
               <a:buNone/>
             </a:pPr>
             <a:r>
-              <a:rPr lang="en-US" sz="1150" dirty="0">
+              <a:rPr lang="he-IL" altLang="en-US" sz="1150" dirty="0">
                 <a:solidFill>
                   <a:srgbClr val="91A0B7"/>
                 </a:solidFill>
@@ -11227,9 +11227,9 @@
                 <a:ea typeface="Calibri" pitchFamily="34" charset="-122"/>
                 <a:cs typeface="Calibri" pitchFamily="34" charset="-120"/>
               </a:rPr>
-              <a:t>‏שני הסיכונים המסומנים באדום — קבילות משפטית וריבונות נתונים — חוסמים התחלה. יש לסגור אותם בספטמבר, במקביל ל-⁦POC⁩ ולא אחריו.</a:t>
-            </a:r>
-            <a:endParaRPr lang="en-US" sz="1150" dirty="0"/>
+              <a:t>‫שני הסיכונים המסומנים באדום — קבילות משפטית וריבונות נתונים — חוסמים התחלה. יש לסגור אותם בספטמבר, במקביל ל-‪POC‬ ולא אחריו.‬</a:t>
+            </a:r>
+            <a:endParaRPr lang="he-IL" sz="1150" dirty="0"/>
           </a:p>
         </p:txBody>
       </p:sp>
@@ -11293,7 +11293,7 @@
               <a:buNone/>
             </a:pPr>
             <a:r>
-              <a:rPr lang="en-US" sz="1100" b="1" spc="120" kern="0" dirty="0">
+              <a:rPr lang="he-IL" altLang="en-US" sz="1100" b="1" spc="120" kern="0" dirty="0">
                 <a:solidFill>
                   <a:srgbClr val="3DDC97"/>
                 </a:solidFill>
@@ -11301,9 +11301,9 @@
                 <a:ea typeface="Calibri" pitchFamily="34" charset="-122"/>
                 <a:cs typeface="Calibri" pitchFamily="34" charset="-120"/>
               </a:rPr>
-              <a:t>‏מה זה נותן</a:t>
-            </a:r>
-            <a:endParaRPr lang="en-US" sz="1100" dirty="0"/>
+              <a:t>‫מה זה נותן‬</a:t>
+            </a:r>
+            <a:endParaRPr lang="he-IL" sz="1100" dirty="0"/>
           </a:p>
         </p:txBody>
       </p:sp>
@@ -11335,7 +11335,7 @@
               <a:buNone/>
             </a:pPr>
             <a:r>
-              <a:rPr lang="en-US" sz="2600" b="1" dirty="0">
+              <a:rPr lang="he-IL" altLang="en-US" sz="2600" b="1" dirty="0">
                 <a:solidFill>
                   <a:srgbClr val="F4F7FB"/>
                 </a:solidFill>
@@ -11343,9 +11343,9 @@
                 <a:ea typeface="Calibri" pitchFamily="34" charset="-122"/>
                 <a:cs typeface="Calibri" pitchFamily="34" charset="-120"/>
               </a:rPr>
-              <a:t>‏המנוף היחיד על השולחן שאינו תלוי בזמן אספקה של חודשיים</a:t>
-            </a:r>
-            <a:endParaRPr lang="en-US" sz="2600" dirty="0"/>
+              <a:t>‫המנוף היחיד על השולחן שאינו תלוי בזמן אספקה של חודשיים‬</a:t>
+            </a:r>
+            <a:endParaRPr lang="he-IL" sz="2600" dirty="0"/>
           </a:p>
         </p:txBody>
       </p:sp>
@@ -11454,7 +11454,7 @@
               <a:buNone/>
             </a:pPr>
             <a:r>
-              <a:rPr lang="en-US" sz="1350" b="1" dirty="0">
+              <a:rPr lang="he-IL" altLang="en-US" sz="1350" b="1" dirty="0">
                 <a:solidFill>
                   <a:srgbClr val="3DDC97"/>
                 </a:solidFill>
@@ -11462,9 +11462,9 @@
                 <a:ea typeface="Calibri" pitchFamily="34" charset="-122"/>
                 <a:cs typeface="Calibri" pitchFamily="34" charset="-120"/>
               </a:rPr>
-              <a:t>‏פינוי שטח מיידי</a:t>
-            </a:r>
-            <a:endParaRPr lang="en-US" sz="1350" dirty="0"/>
+              <a:t>‫פינוי שטח מיידי‬</a:t>
+            </a:r>
+            <a:endParaRPr lang="he-IL" sz="1350" dirty="0"/>
           </a:p>
         </p:txBody>
       </p:sp>
@@ -11496,7 +11496,7 @@
               <a:buNone/>
             </a:pPr>
             <a:r>
-              <a:rPr lang="en-US" sz="1150" dirty="0">
+              <a:rPr lang="he-IL" altLang="en-US" sz="1150" dirty="0">
                 <a:solidFill>
                   <a:srgbClr val="91A0B7"/>
                 </a:solidFill>
@@ -11504,9 +11504,9 @@
                 <a:ea typeface="Calibri" pitchFamily="34" charset="-122"/>
                 <a:cs typeface="Calibri" pitchFamily="34" charset="-120"/>
               </a:rPr>
-              <a:t>‏העתקת קורפוס ה-⁦Commit⁩ מפנה שטח ב-⁦ECS⁩ תוך שבועות. זו האפשרות היחידה שמשפיעה על הניצולת לפני דצמבר ⁦2026⁩.</a:t>
-            </a:r>
-            <a:endParaRPr lang="en-US" sz="1150" dirty="0"/>
+              <a:t>‫העתקת קורפוס ה-‪Commit‬ מפנה שטח ב-‪ECS‬ תוך שבועות. זו האפשרות היחידה שמשפיעה על הניצולת לפני דצמבר ‪2026‬.‬</a:t>
+            </a:r>
+            <a:endParaRPr lang="he-IL" sz="1150" dirty="0"/>
           </a:p>
         </p:txBody>
       </p:sp>
@@ -11590,7 +11590,7 @@
               <a:buNone/>
             </a:pPr>
             <a:r>
-              <a:rPr lang="en-US" sz="1350" b="1" dirty="0">
+              <a:rPr lang="he-IL" altLang="en-US" sz="1350" b="1" dirty="0">
                 <a:solidFill>
                   <a:srgbClr val="3DDC97"/>
                 </a:solidFill>
@@ -11598,9 +11598,9 @@
                 <a:ea typeface="Calibri" pitchFamily="34" charset="-122"/>
                 <a:cs typeface="Calibri" pitchFamily="34" charset="-120"/>
               </a:rPr>
-              <a:t>‏דחיית והקטנת ⁦capex⁩</a:t>
-            </a:r>
-            <a:endParaRPr lang="en-US" sz="1350" dirty="0"/>
+              <a:t>‫דחיית והקטנת ‪capex‬‬</a:t>
+            </a:r>
+            <a:endParaRPr lang="he-IL" sz="1350" dirty="0"/>
           </a:p>
         </p:txBody>
       </p:sp>
@@ -11632,7 +11632,7 @@
               <a:buNone/>
             </a:pPr>
             <a:r>
-              <a:rPr lang="en-US" sz="1150" dirty="0">
+              <a:rPr lang="he-IL" altLang="en-US" sz="1150" dirty="0">
                 <a:solidFill>
                   <a:srgbClr val="91A0B7"/>
                 </a:solidFill>
@@ -11640,9 +11640,9 @@
                 <a:ea typeface="Calibri" pitchFamily="34" charset="-122"/>
                 <a:cs typeface="Calibri" pitchFamily="34" charset="-120"/>
               </a:rPr>
-              <a:t>‏כל ⁦TB⁩ שמפונה דוחה את מועד הרכש ומקטין את היקפו. הצעת ⁦Dell⁩ הנוכחית עומדת על ⁦$695,520⁩ עבור ⁦600 TB⁩ לוגי.</a:t>
-            </a:r>
-            <a:endParaRPr lang="en-US" sz="1150" dirty="0"/>
+              <a:t>‫כל ‪TB‬ שמפונה דוחה את מועד הרכש ומקטין את היקפו. הצעת ‪Dell‬ הנוכחית עומדת על ‪$695,520‬ עבור ‪600 TB‬ לוגי.‬</a:t>
+            </a:r>
+            <a:endParaRPr lang="he-IL" sz="1150" dirty="0"/>
           </a:p>
         </p:txBody>
       </p:sp>
@@ -11726,7 +11726,7 @@
               <a:buNone/>
             </a:pPr>
             <a:r>
-              <a:rPr lang="en-US" sz="1350" b="1" dirty="0">
+              <a:rPr lang="he-IL" altLang="en-US" sz="1350" b="1" dirty="0">
                 <a:solidFill>
                   <a:srgbClr val="3DD9EB"/>
                 </a:solidFill>
@@ -11734,9 +11734,9 @@
                 <a:ea typeface="Calibri" pitchFamily="34" charset="-122"/>
                 <a:cs typeface="Calibri" pitchFamily="34" charset="-120"/>
               </a:rPr>
-              <a:t>‏ללא זמן אספקה</a:t>
-            </a:r>
-            <a:endParaRPr lang="en-US" sz="1350" dirty="0"/>
+              <a:t>‫ללא זמן אספקה‬</a:t>
+            </a:r>
+            <a:endParaRPr lang="he-IL" sz="1350" dirty="0"/>
           </a:p>
         </p:txBody>
       </p:sp>
@@ -11768,7 +11768,7 @@
               <a:buNone/>
             </a:pPr>
             <a:r>
-              <a:rPr lang="en-US" sz="1150" dirty="0">
+              <a:rPr lang="he-IL" altLang="en-US" sz="1150" dirty="0">
                 <a:solidFill>
                   <a:srgbClr val="91A0B7"/>
                 </a:solidFill>
@@ -11776,9 +11776,9 @@
                 <a:ea typeface="Calibri" pitchFamily="34" charset="-122"/>
                 <a:cs typeface="Calibri" pitchFamily="34" charset="-120"/>
               </a:rPr>
-              <a:t>‏אין ⁦PO⁩, אין דיסקים, אין חלון התקנה. הקיבולת זמינה ביום הראשון, ומשלמים רק על מה שנצרך בפועל — בלי לרכוש מראש קיבולת לשלוש שנים.</a:t>
-            </a:r>
-            <a:endParaRPr lang="en-US" sz="1150" dirty="0"/>
+              <a:t>‫אין ‪PO‬, אין דיסקים, אין חלון התקנה. הקיבולת זמינה ביום הראשון, ומשלמים רק על מה שנצרך בפועל — בלי לרכוש מראש קיבולת לשלוש שנים.‬</a:t>
+            </a:r>
+            <a:endParaRPr lang="he-IL" sz="1150" dirty="0"/>
           </a:p>
         </p:txBody>
       </p:sp>
@@ -11862,7 +11862,7 @@
               <a:buNone/>
             </a:pPr>
             <a:r>
-              <a:rPr lang="en-US" sz="1350" b="1" dirty="0">
+              <a:rPr lang="he-IL" altLang="en-US" sz="1350" b="1" dirty="0">
                 <a:solidFill>
                   <a:srgbClr val="3DD9EB"/>
                 </a:solidFill>
@@ -11870,9 +11870,9 @@
                 <a:ea typeface="Calibri" pitchFamily="34" charset="-122"/>
                 <a:cs typeface="Calibri" pitchFamily="34" charset="-120"/>
               </a:rPr>
-              <a:t>‏⁦Lifecycle⁩ אוטומטי</a:t>
-            </a:r>
-            <a:endParaRPr lang="en-US" sz="1350" dirty="0"/>
+              <a:t>‫‪Lifecycle‬ אוטומטי‬</a:t>
+            </a:r>
+            <a:endParaRPr lang="he-IL" sz="1350" dirty="0"/>
           </a:p>
         </p:txBody>
       </p:sp>
@@ -11904,7 +11904,7 @@
               <a:buNone/>
             </a:pPr>
             <a:r>
-              <a:rPr lang="en-US" sz="1150" dirty="0">
+              <a:rPr lang="he-IL" altLang="en-US" sz="1150" dirty="0">
                 <a:solidFill>
                   <a:srgbClr val="91A0B7"/>
                 </a:solidFill>
@@ -11912,9 +11912,9 @@
                 <a:ea typeface="Calibri" pitchFamily="34" charset="-122"/>
                 <a:cs typeface="Calibri" pitchFamily="34" charset="-120"/>
               </a:rPr>
-              <a:t>‏מדיניות שכבות מעבירה דאטה מתקרר לשכבה זולה יותר לאורך זמן — הוזלה שנמשכת ללא התערבות תפעולית ובלי פרויקט נוסף.</a:t>
-            </a:r>
-            <a:endParaRPr lang="en-US" sz="1150" dirty="0"/>
+              <a:t>‫מדיניות שכבות מעבירה דאטה מתקרר לשכבה זולה יותר לאורך זמן — הוזלה שנמשכת ללא התערבות תפעולית ובלי פרויקט נוסף.‬</a:t>
+            </a:r>
+            <a:endParaRPr lang="he-IL" sz="1150" dirty="0"/>
           </a:p>
         </p:txBody>
       </p:sp>
@@ -11998,7 +11998,7 @@
               <a:buNone/>
             </a:pPr>
             <a:r>
-              <a:rPr lang="en-US" sz="1350" b="1" dirty="0">
+              <a:rPr lang="he-IL" altLang="en-US" sz="1350" b="1" dirty="0">
                 <a:solidFill>
                   <a:srgbClr val="2F8CFF"/>
                 </a:solidFill>
@@ -12006,9 +12006,9 @@
                 <a:ea typeface="Calibri" pitchFamily="34" charset="-122"/>
                 <a:cs typeface="Calibri" pitchFamily="34" charset="-120"/>
               </a:rPr>
-              <a:t>‏עמידות מובנית</a:t>
-            </a:r>
-            <a:endParaRPr lang="en-US" sz="1350" dirty="0"/>
+              <a:t>‫עמידות מובנית‬</a:t>
+            </a:r>
+            <a:endParaRPr lang="he-IL" sz="1350" dirty="0"/>
           </a:p>
         </p:txBody>
       </p:sp>
@@ -12040,7 +12040,7 @@
               <a:buNone/>
             </a:pPr>
             <a:r>
-              <a:rPr lang="en-US" sz="1150" dirty="0">
+              <a:rPr lang="he-IL" altLang="en-US" sz="1150" dirty="0">
                 <a:solidFill>
                   <a:srgbClr val="91A0B7"/>
                 </a:solidFill>
@@ -12048,9 +12048,9 @@
                 <a:ea typeface="Calibri" pitchFamily="34" charset="-122"/>
                 <a:cs typeface="Calibri" pitchFamily="34" charset="-120"/>
               </a:rPr>
-              <a:t>‏⁦11⁩ תשיעיות עמידות ופיזור בין אזורי זמינות, במקום שכפול משולש שאנחנו מתחזקים ומשלמים עליו פי שלושה בשלושה אתרים.</a:t>
-            </a:r>
-            <a:endParaRPr lang="en-US" sz="1150" dirty="0"/>
+              <a:t>‫‪11‬ תשיעיות עמידות ופיזור בין אזורי זמינות, במקום שכפול משולש שאנחנו מתחזקים ומשלמים עליו פי שלושה בשלושה אתרים.‬</a:t>
+            </a:r>
+            <a:endParaRPr lang="he-IL" sz="1150" dirty="0"/>
           </a:p>
         </p:txBody>
       </p:sp>
@@ -12134,7 +12134,7 @@
               <a:buNone/>
             </a:pPr>
             <a:r>
-              <a:rPr lang="en-US" sz="1350" b="1" dirty="0">
+              <a:rPr lang="he-IL" altLang="en-US" sz="1350" b="1" dirty="0">
                 <a:solidFill>
                   <a:srgbClr val="B07CFF"/>
                 </a:solidFill>
@@ -12142,9 +12142,9 @@
                 <a:ea typeface="Calibri" pitchFamily="34" charset="-122"/>
                 <a:cs typeface="Calibri" pitchFamily="34" charset="-120"/>
               </a:rPr>
-              <a:t>‏בסיס לשירותי ⁦AI⁩</a:t>
-            </a:r>
-            <a:endParaRPr lang="en-US" sz="1350" dirty="0"/>
+              <a:t>‫בסיס לשירותי ‪AI‬‬</a:t>
+            </a:r>
+            <a:endParaRPr lang="he-IL" sz="1350" dirty="0"/>
           </a:p>
         </p:txBody>
       </p:sp>
@@ -12176,7 +12176,7 @@
               <a:buNone/>
             </a:pPr>
             <a:r>
-              <a:rPr lang="en-US" sz="1150" dirty="0">
+              <a:rPr lang="he-IL" altLang="en-US" sz="1150" dirty="0">
                 <a:solidFill>
                   <a:srgbClr val="91A0B7"/>
                 </a:solidFill>
@@ -12184,9 +12184,9 @@
                 <a:ea typeface="Calibri" pitchFamily="34" charset="-122"/>
                 <a:cs typeface="Calibri" pitchFamily="34" charset="-120"/>
               </a:rPr>
-              <a:t>‏תמלול שיחות וניתוח דימות כשירות מנוהל מעל אותו אחסון — יכולת שאינה קיימת על ⁦ECS⁩ היום ואינה דורשת פרויקט תשתית נפרד.</a:t>
-            </a:r>
-            <a:endParaRPr lang="en-US" sz="1150" dirty="0"/>
+              <a:t>‫תמלול שיחות וניתוח דימות כשירות מנוהל מעל אותו אחסון — יכולת שאינה קיימת על ‪ECS‬ היום ואינה דורשת פרויקט תשתית נפרד.‬</a:t>
+            </a:r>
+            <a:endParaRPr lang="he-IL" sz="1150" dirty="0"/>
           </a:p>
         </p:txBody>
       </p:sp>
@@ -12268,7 +12268,7 @@
               <a:buNone/>
             </a:pPr>
             <a:r>
-              <a:rPr lang="en-US" sz="1150" dirty="0">
+              <a:rPr lang="he-IL" altLang="en-US" sz="1150" dirty="0">
                 <a:solidFill>
                   <a:srgbClr val="91A0B7"/>
                 </a:solidFill>
@@ -12276,9 +12276,9 @@
                 <a:ea typeface="Calibri" pitchFamily="34" charset="-122"/>
                 <a:cs typeface="Calibri" pitchFamily="34" charset="-120"/>
               </a:rPr>
-              <a:t>‏התועלת נמדדת ב-⁦TB⁩ שפונו בפועל ובחודשי הדחייה שהושגו לרכש — לא באחוזי חיסכון תיאורטיים.</a:t>
-            </a:r>
-            <a:endParaRPr lang="en-US" sz="1150" dirty="0"/>
+              <a:t>‫התועלת נמדדת ב-‪TB‬ שפונו בפועל ובחודשי הדחייה שהושגו לרכש — לא באחוזי חיסכון תיאורטיים.‬</a:t>
+            </a:r>
+            <a:endParaRPr lang="he-IL" sz="1150" dirty="0"/>
           </a:p>
         </p:txBody>
       </p:sp>
@@ -12342,7 +12342,7 @@
               <a:buNone/>
             </a:pPr>
             <a:r>
-              <a:rPr lang="en-US" sz="1100" b="1" spc="120" kern="0" dirty="0">
+              <a:rPr lang="he-IL" altLang="en-US" sz="1100" b="1" spc="120" kern="0" dirty="0">
                 <a:solidFill>
                   <a:srgbClr val="3DD9EB"/>
                 </a:solidFill>
@@ -12350,9 +12350,9 @@
                 <a:ea typeface="Calibri" pitchFamily="34" charset="-122"/>
                 <a:cs typeface="Calibri" pitchFamily="34" charset="-120"/>
               </a:rPr>
-              <a:t>‏ציר זמן</a:t>
-            </a:r>
-            <a:endParaRPr lang="en-US" sz="1100" dirty="0"/>
+              <a:t>‫ציר זמן‬</a:t>
+            </a:r>
+            <a:endParaRPr lang="he-IL" sz="1100" dirty="0"/>
           </a:p>
         </p:txBody>
       </p:sp>
@@ -12384,7 +12384,7 @@
               <a:buNone/>
             </a:pPr>
             <a:r>
-              <a:rPr lang="en-US" sz="2500" b="1" dirty="0">
+              <a:rPr lang="he-IL" altLang="en-US" sz="2500" b="1" dirty="0">
                 <a:solidFill>
                   <a:srgbClr val="F4F7FB"/>
                 </a:solidFill>
@@ -12392,9 +12392,9 @@
                 <a:ea typeface="Calibri" pitchFamily="34" charset="-122"/>
                 <a:cs typeface="Calibri" pitchFamily="34" charset="-120"/>
               </a:rPr>
-              <a:t>‏שני מסלולים במקביל: העתקה לענן מתחילה מיד, רכש נקבע לפי טריגר</a:t>
-            </a:r>
-            <a:endParaRPr lang="en-US" sz="2500" dirty="0"/>
+              <a:t>‫שני מסלולים במקביל: העתקה לענן מתחילה מיד, רכש נקבע לפי טריגר‬</a:t>
+            </a:r>
+            <a:endParaRPr lang="he-IL" sz="2500" dirty="0"/>
           </a:p>
         </p:txBody>
       </p:sp>
@@ -12476,7 +12476,7 @@
               <a:buNone/>
             </a:pPr>
             <a:r>
-              <a:rPr lang="en-US" sz="1300" b="1" dirty="0">
+              <a:rPr lang="he-IL" altLang="en-US" sz="1300" b="1" dirty="0">
                 <a:solidFill>
                   <a:srgbClr val="F4F7FB"/>
                 </a:solidFill>
@@ -12484,9 +12484,9 @@
                 <a:ea typeface="Calibri" pitchFamily="34" charset="-122"/>
                 <a:cs typeface="Calibri" pitchFamily="34" charset="-120"/>
               </a:rPr>
-              <a:t>‏אוגוסט ⁦26⁩</a:t>
-            </a:r>
-            <a:endParaRPr lang="en-US" sz="1300" dirty="0"/>
+              <a:t>‫אוגוסט ‪26‬‬</a:t>
+            </a:r>
+            <a:endParaRPr lang="he-IL" sz="1300" dirty="0"/>
           </a:p>
         </p:txBody>
       </p:sp>
@@ -12570,7 +12570,7 @@
               <a:buNone/>
             </a:pPr>
             <a:r>
-              <a:rPr lang="en-US" sz="1150" dirty="0">
+              <a:rPr lang="he-IL" altLang="en-US" sz="1150" dirty="0">
                 <a:solidFill>
                   <a:srgbClr val="91A0B7"/>
                 </a:solidFill>
@@ -12578,9 +12578,9 @@
                 <a:ea typeface="Calibri" pitchFamily="34" charset="-122"/>
                 <a:cs typeface="Calibri" pitchFamily="34" charset="-120"/>
               </a:rPr>
-              <a:t>‏אישור עקרוני להעתקה</a:t>
-            </a:r>
-            <a:endParaRPr lang="en-US" sz="1150" dirty="0"/>
+              <a:t>‫אישור עקרוני להעתקה‬</a:t>
+            </a:r>
+            <a:endParaRPr lang="he-IL" sz="1150" dirty="0"/>
           </a:p>
           <a:p>
             <a:pPr rtl="1" algn="r" indent="0" marL="0">
@@ -12590,7 +12590,7 @@
               <a:buNone/>
             </a:pPr>
             <a:r>
-              <a:rPr lang="en-US" sz="1150" dirty="0">
+              <a:rPr lang="he-IL" altLang="en-US" sz="1150" dirty="0">
                 <a:solidFill>
                   <a:srgbClr val="91A0B7"/>
                 </a:solidFill>
@@ -12598,9 +12598,9 @@
                 <a:ea typeface="Calibri" pitchFamily="34" charset="-122"/>
                 <a:cs typeface="Calibri" pitchFamily="34" charset="-120"/>
               </a:rPr>
-              <a:t>פילוח קורפוס ה-⁦Commit⁩</a:t>
-            </a:r>
-            <a:endParaRPr lang="en-US" sz="1150" dirty="0"/>
+              <a:t>‫פילוח קורפוס ה-‪Commit‬‬</a:t>
+            </a:r>
+            <a:endParaRPr lang="he-IL" sz="1150" dirty="0"/>
           </a:p>
           <a:p>
             <a:pPr rtl="1" algn="r" indent="0" marL="0">
@@ -12610,7 +12610,7 @@
               <a:buNone/>
             </a:pPr>
             <a:r>
-              <a:rPr lang="en-US" sz="1150" dirty="0">
+              <a:rPr lang="he-IL" altLang="en-US" sz="1150" dirty="0">
                 <a:solidFill>
                   <a:srgbClr val="91A0B7"/>
                 </a:solidFill>
@@ -12618,9 +12618,9 @@
                 <a:ea typeface="Calibri" pitchFamily="34" charset="-122"/>
                 <a:cs typeface="Calibri" pitchFamily="34" charset="-120"/>
               </a:rPr>
-              <a:t>הגדרת קריטריוני קבילות</a:t>
-            </a:r>
-            <a:endParaRPr lang="en-US" sz="1150" dirty="0"/>
+              <a:t>‫הגדרת קריטריוני קבילות‬</a:t>
+            </a:r>
+            <a:endParaRPr lang="he-IL" sz="1150" dirty="0"/>
           </a:p>
         </p:txBody>
       </p:sp>
@@ -12652,7 +12652,7 @@
               <a:buNone/>
             </a:pPr>
             <a:r>
-              <a:rPr lang="en-US" sz="1300" b="1" dirty="0">
+              <a:rPr lang="he-IL" altLang="en-US" sz="1300" b="1" dirty="0">
                 <a:solidFill>
                   <a:srgbClr val="F4F7FB"/>
                 </a:solidFill>
@@ -12660,9 +12660,9 @@
                 <a:ea typeface="Calibri" pitchFamily="34" charset="-122"/>
                 <a:cs typeface="Calibri" pitchFamily="34" charset="-120"/>
               </a:rPr>
-              <a:t>‏ספטמבר ⁦26⁩</a:t>
-            </a:r>
-            <a:endParaRPr lang="en-US" sz="1300" dirty="0"/>
+              <a:t>‫ספטמבר ‪26‬‬</a:t>
+            </a:r>
+            <a:endParaRPr lang="he-IL" sz="1300" dirty="0"/>
           </a:p>
         </p:txBody>
       </p:sp>
@@ -12746,7 +12746,7 @@
               <a:buNone/>
             </a:pPr>
             <a:r>
-              <a:rPr lang="en-US" sz="1150" dirty="0">
+              <a:rPr lang="he-IL" altLang="en-US" sz="1150" dirty="0">
                 <a:solidFill>
                   <a:srgbClr val="91A0B7"/>
                 </a:solidFill>
@@ -12754,9 +12754,9 @@
                 <a:ea typeface="Calibri" pitchFamily="34" charset="-122"/>
                 <a:cs typeface="Calibri" pitchFamily="34" charset="-120"/>
               </a:rPr>
-              <a:t>‏⁦POC⁩ על ⁦1–2 TB⁩</a:t>
-            </a:r>
-            <a:endParaRPr lang="en-US" sz="1150" dirty="0"/>
+              <a:t>‫‪POC‬ על ‪1–2 TB‬‬</a:t>
+            </a:r>
+            <a:endParaRPr lang="he-IL" sz="1150" dirty="0"/>
           </a:p>
           <a:p>
             <a:pPr rtl="1" algn="r" indent="0" marL="0">
@@ -12766,7 +12766,7 @@
               <a:buNone/>
             </a:pPr>
             <a:r>
-              <a:rPr lang="en-US" sz="1150" dirty="0">
+              <a:rPr lang="he-IL" altLang="en-US" sz="1150" dirty="0">
                 <a:solidFill>
                   <a:srgbClr val="91A0B7"/>
                 </a:solidFill>
@@ -12774,9 +12774,9 @@
                 <a:ea typeface="Calibri" pitchFamily="34" charset="-122"/>
                 <a:cs typeface="Calibri" pitchFamily="34" charset="-120"/>
               </a:rPr>
-              <a:t>אישור ⁦DPO⁩ ורגולטור</a:t>
-            </a:r>
-            <a:endParaRPr lang="en-US" sz="1150" dirty="0"/>
+              <a:t>‫אישור ‪DPO‬ ורגולטור‬</a:t>
+            </a:r>
+            <a:endParaRPr lang="he-IL" sz="1150" dirty="0"/>
           </a:p>
           <a:p>
             <a:pPr rtl="1" algn="r" indent="0" marL="0">
@@ -12786,7 +12786,7 @@
               <a:buNone/>
             </a:pPr>
             <a:r>
-              <a:rPr lang="en-US" sz="1150" dirty="0">
+              <a:rPr lang="he-IL" altLang="en-US" sz="1150" dirty="0">
                 <a:solidFill>
                   <a:srgbClr val="91A0B7"/>
                 </a:solidFill>
@@ -12794,9 +12794,9 @@
                 <a:ea typeface="Calibri" pitchFamily="34" charset="-122"/>
                 <a:cs typeface="Calibri" pitchFamily="34" charset="-120"/>
               </a:rPr>
-              <a:t>הקמת ⁦Direct Connect⁩</a:t>
-            </a:r>
-            <a:endParaRPr lang="en-US" sz="1150" dirty="0"/>
+              <a:t>‫הקמת ‪Direct Connect‬‬</a:t>
+            </a:r>
+            <a:endParaRPr lang="he-IL" sz="1150" dirty="0"/>
           </a:p>
         </p:txBody>
       </p:sp>
@@ -12828,7 +12828,7 @@
               <a:buNone/>
             </a:pPr>
             <a:r>
-              <a:rPr lang="en-US" sz="1300" b="1" dirty="0">
+              <a:rPr lang="he-IL" altLang="en-US" sz="1300" b="1" dirty="0">
                 <a:solidFill>
                   <a:srgbClr val="F4F7FB"/>
                 </a:solidFill>
@@ -12836,9 +12836,9 @@
                 <a:ea typeface="Calibri" pitchFamily="34" charset="-122"/>
                 <a:cs typeface="Calibri" pitchFamily="34" charset="-120"/>
               </a:rPr>
-              <a:t>‏אוקטובר ⁦26⁩</a:t>
-            </a:r>
-            <a:endParaRPr lang="en-US" sz="1300" dirty="0"/>
+              <a:t>‫אוקטובר ‪26‬‬</a:t>
+            </a:r>
+            <a:endParaRPr lang="he-IL" sz="1300" dirty="0"/>
           </a:p>
         </p:txBody>
       </p:sp>
@@ -12922,7 +12922,7 @@
               <a:buNone/>
             </a:pPr>
             <a:r>
-              <a:rPr lang="en-US" sz="1150" dirty="0">
+              <a:rPr lang="he-IL" altLang="en-US" sz="1150" dirty="0">
                 <a:solidFill>
                   <a:srgbClr val="91A0B7"/>
                 </a:solidFill>
@@ -12930,9 +12930,9 @@
                 <a:ea typeface="Calibri" pitchFamily="34" charset="-122"/>
                 <a:cs typeface="Calibri" pitchFamily="34" charset="-120"/>
               </a:rPr>
-              <a:t>‏תחילת העתקה לייצור</a:t>
-            </a:r>
-            <a:endParaRPr lang="en-US" sz="1150" dirty="0"/>
+              <a:t>‫תחילת העתקה לייצור‬</a:t>
+            </a:r>
+            <a:endParaRPr lang="he-IL" sz="1150" dirty="0"/>
           </a:p>
           <a:p>
             <a:pPr rtl="1" algn="r" indent="0" marL="0">
@@ -12942,7 +12942,7 @@
               <a:buNone/>
             </a:pPr>
             <a:r>
-              <a:rPr lang="en-US" sz="1150" dirty="0">
+              <a:rPr lang="he-IL" altLang="en-US" sz="1150" dirty="0">
                 <a:solidFill>
                   <a:srgbClr val="91A0B7"/>
                 </a:solidFill>
@@ -12950,9 +12950,9 @@
                 <a:ea typeface="Calibri" pitchFamily="34" charset="-122"/>
                 <a:cs typeface="Calibri" pitchFamily="34" charset="-120"/>
               </a:rPr>
-              <a:t>ולידציה ראשונה ודוח חריגים</a:t>
-            </a:r>
-            <a:endParaRPr lang="en-US" sz="1150" dirty="0"/>
+              <a:t>‫ולידציה ראשונה ודוח חריגים‬</a:t>
+            </a:r>
+            <a:endParaRPr lang="he-IL" sz="1150" dirty="0"/>
           </a:p>
           <a:p>
             <a:pPr rtl="1" algn="r" indent="0" marL="0">
@@ -12962,7 +12962,7 @@
               <a:buNone/>
             </a:pPr>
             <a:r>
-              <a:rPr lang="en-US" sz="1150" dirty="0">
+              <a:rPr lang="he-IL" altLang="en-US" sz="1150" dirty="0">
                 <a:solidFill>
                   <a:srgbClr val="91A0B7"/>
                 </a:solidFill>
@@ -12970,9 +12970,9 @@
                 <a:ea typeface="Calibri" pitchFamily="34" charset="-122"/>
                 <a:cs typeface="Calibri" pitchFamily="34" charset="-120"/>
               </a:rPr>
-              <a:t>מדידת ניצולת מול טריגר ⁦75%⁩</a:t>
-            </a:r>
-            <a:endParaRPr lang="en-US" sz="1150" dirty="0"/>
+              <a:t>‫מדידת ניצולת מול טריגר ‪75%‬‬</a:t>
+            </a:r>
+            <a:endParaRPr lang="he-IL" sz="1150" dirty="0"/>
           </a:p>
         </p:txBody>
       </p:sp>
@@ -13004,7 +13004,7 @@
               <a:buNone/>
             </a:pPr>
             <a:r>
-              <a:rPr lang="en-US" sz="1300" b="1" dirty="0">
+              <a:rPr lang="he-IL" altLang="en-US" sz="1300" b="1" dirty="0">
                 <a:solidFill>
                   <a:srgbClr val="F4F7FB"/>
                 </a:solidFill>
@@ -13012,9 +13012,9 @@
                 <a:ea typeface="Calibri" pitchFamily="34" charset="-122"/>
                 <a:cs typeface="Calibri" pitchFamily="34" charset="-120"/>
               </a:rPr>
-              <a:t>‏נוב׳–דצמ׳ ⁦26⁩</a:t>
-            </a:r>
-            <a:endParaRPr lang="en-US" sz="1300" dirty="0"/>
+              <a:t>‫נוב׳–דצמ׳ ‪26‬‬</a:t>
+            </a:r>
+            <a:endParaRPr lang="he-IL" sz="1300" dirty="0"/>
           </a:p>
         </p:txBody>
       </p:sp>
@@ -13098,7 +13098,7 @@
               <a:buNone/>
             </a:pPr>
             <a:r>
-              <a:rPr lang="en-US" sz="1150" dirty="0">
+              <a:rPr lang="he-IL" altLang="en-US" sz="1150" dirty="0">
                 <a:solidFill>
                   <a:srgbClr val="91A0B7"/>
                 </a:solidFill>
@@ -13106,9 +13106,9 @@
                 <a:ea typeface="Calibri" pitchFamily="34" charset="-122"/>
                 <a:cs typeface="Calibri" pitchFamily="34" charset="-120"/>
               </a:rPr>
-              <a:t>‏המשך העתקה ומחיקה מ-⁦ECS⁩</a:t>
-            </a:r>
-            <a:endParaRPr lang="en-US" sz="1150" dirty="0"/>
+              <a:t>‫המשך העתקה ומחיקה מ-‪ECS‬‬</a:t>
+            </a:r>
+            <a:endParaRPr lang="he-IL" sz="1150" dirty="0"/>
           </a:p>
           <a:p>
             <a:pPr rtl="1" algn="r" indent="0" marL="0">
@@ -13118,7 +13118,7 @@
               <a:buNone/>
             </a:pPr>
             <a:r>
-              <a:rPr lang="en-US" sz="1150" dirty="0">
+              <a:rPr lang="he-IL" altLang="en-US" sz="1150" dirty="0">
                 <a:solidFill>
                   <a:srgbClr val="91A0B7"/>
                 </a:solidFill>
@@ -13126,9 +13126,9 @@
                 <a:ea typeface="Calibri" pitchFamily="34" charset="-122"/>
                 <a:cs typeface="Calibri" pitchFamily="34" charset="-120"/>
               </a:rPr>
-              <a:t>טריגר רכש צפוי · ⁦PO⁩ ל-⁦Dell⁩</a:t>
-            </a:r>
-            <a:endParaRPr lang="en-US" sz="1150" dirty="0"/>
+              <a:t>‫טריגר רכש צפוי · ‪PO‬ ל-‪Dell‬‬</a:t>
+            </a:r>
+            <a:endParaRPr lang="he-IL" sz="1150" dirty="0"/>
           </a:p>
           <a:p>
             <a:pPr rtl="1" algn="r" indent="0" marL="0">
@@ -13138,7 +13138,7 @@
               <a:buNone/>
             </a:pPr>
             <a:r>
-              <a:rPr lang="en-US" sz="1150" dirty="0">
+              <a:rPr lang="he-IL" altLang="en-US" sz="1150" dirty="0">
                 <a:solidFill>
                   <a:srgbClr val="91A0B7"/>
                 </a:solidFill>
@@ -13146,9 +13146,9 @@
                 <a:ea typeface="Calibri" pitchFamily="34" charset="-122"/>
                 <a:cs typeface="Calibri" pitchFamily="34" charset="-120"/>
               </a:rPr>
-              <a:t>דוח שלמות מסכם</a:t>
-            </a:r>
-            <a:endParaRPr lang="en-US" sz="1150" dirty="0"/>
+              <a:t>‫דוח שלמות מסכם‬</a:t>
+            </a:r>
+            <a:endParaRPr lang="he-IL" sz="1150" dirty="0"/>
           </a:p>
         </p:txBody>
       </p:sp>
@@ -13180,7 +13180,7 @@
               <a:buNone/>
             </a:pPr>
             <a:r>
-              <a:rPr lang="en-US" sz="1300" b="1" dirty="0">
+              <a:rPr lang="he-IL" altLang="en-US" sz="1300" b="1" dirty="0">
                 <a:solidFill>
                   <a:srgbClr val="F4F7FB"/>
                 </a:solidFill>
@@ -13188,9 +13188,9 @@
                 <a:ea typeface="Calibri" pitchFamily="34" charset="-122"/>
                 <a:cs typeface="Calibri" pitchFamily="34" charset="-120"/>
               </a:rPr>
-              <a:t>‏ינואר–מרץ ⁦27⁩</a:t>
-            </a:r>
-            <a:endParaRPr lang="en-US" sz="1300" dirty="0"/>
+              <a:t>‫ינואר–מרץ ‪27‬‬</a:t>
+            </a:r>
+            <a:endParaRPr lang="he-IL" sz="1300" dirty="0"/>
           </a:p>
         </p:txBody>
       </p:sp>
@@ -13274,7 +13274,7 @@
               <a:buNone/>
             </a:pPr>
             <a:r>
-              <a:rPr lang="en-US" sz="1150" dirty="0">
+              <a:rPr lang="he-IL" altLang="en-US" sz="1150" dirty="0">
                 <a:solidFill>
                   <a:srgbClr val="91A0B7"/>
                 </a:solidFill>
@@ -13282,9 +13282,9 @@
                 <a:ea typeface="Calibri" pitchFamily="34" charset="-122"/>
                 <a:cs typeface="Calibri" pitchFamily="34" charset="-120"/>
               </a:rPr>
-              <a:t>‏אספקת דיסקים והתקנה</a:t>
-            </a:r>
-            <a:endParaRPr lang="en-US" sz="1150" dirty="0"/>
+              <a:t>‫אספקת דיסקים והתקנה‬</a:t>
+            </a:r>
+            <a:endParaRPr lang="he-IL" sz="1150" dirty="0"/>
           </a:p>
           <a:p>
             <a:pPr rtl="1" algn="r" indent="0" marL="0">
@@ -13294,7 +13294,7 @@
               <a:buNone/>
             </a:pPr>
             <a:r>
-              <a:rPr lang="en-US" sz="1150" dirty="0">
+              <a:rPr lang="he-IL" altLang="en-US" sz="1150" dirty="0">
                 <a:solidFill>
                   <a:srgbClr val="91A0B7"/>
                 </a:solidFill>
@@ -13302,9 +13302,9 @@
                 <a:ea typeface="Calibri" pitchFamily="34" charset="-122"/>
                 <a:cs typeface="Calibri" pitchFamily="34" charset="-120"/>
               </a:rPr>
-              <a:t>צפי חציית ⁦80%⁩ בתרחיש המגמה</a:t>
-            </a:r>
-            <a:endParaRPr lang="en-US" sz="1150" dirty="0"/>
+              <a:t>‫צפי חציית ‪80%‬ בתרחיש המגמה‬</a:t>
+            </a:r>
+            <a:endParaRPr lang="he-IL" sz="1150" dirty="0"/>
           </a:p>
           <a:p>
             <a:pPr rtl="1" algn="r" indent="0" marL="0">
@@ -13314,7 +13314,7 @@
               <a:buNone/>
             </a:pPr>
             <a:r>
-              <a:rPr lang="en-US" sz="1150" dirty="0">
+              <a:rPr lang="he-IL" altLang="en-US" sz="1150" dirty="0">
                 <a:solidFill>
                   <a:srgbClr val="91A0B7"/>
                 </a:solidFill>
@@ -13322,9 +13322,9 @@
                 <a:ea typeface="Calibri" pitchFamily="34" charset="-122"/>
                 <a:cs typeface="Calibri" pitchFamily="34" charset="-120"/>
               </a:rPr>
-              <a:t>החלטה על היקף הרחבה נוסף</a:t>
-            </a:r>
-            <a:endParaRPr lang="en-US" sz="1150" dirty="0"/>
+              <a:t>‫החלטה על היקף הרחבה נוסף‬</a:t>
+            </a:r>
+            <a:endParaRPr lang="he-IL" sz="1150" dirty="0"/>
           </a:p>
         </p:txBody>
       </p:sp>
@@ -13408,7 +13408,7 @@
               <a:buNone/>
             </a:pPr>
             <a:r>
-              <a:rPr lang="en-US" sz="1300" b="1" dirty="0">
+              <a:rPr lang="he-IL" altLang="en-US" sz="1300" b="1" dirty="0">
                 <a:solidFill>
                   <a:srgbClr val="3DD9EB"/>
                 </a:solidFill>
@@ -13416,9 +13416,9 @@
                 <a:ea typeface="Calibri" pitchFamily="34" charset="-122"/>
                 <a:cs typeface="Calibri" pitchFamily="34" charset="-120"/>
               </a:rPr>
-              <a:t>‏טריגר הרכש אינו תאריך: ⁦PO⁩ יוצא כאשר הניצולת מגיעה ל-⁦75%⁩ (⁦687 TB⁩). היום ⁦72.9%⁩ — מרחק של ⁦19 TB⁩.</a:t>
-            </a:r>
-            <a:endParaRPr lang="en-US" sz="1300" dirty="0"/>
+              <a:t>‫טריגר הרכש אינו תאריך: ‪PO‬ יוצא כאשר הניצולת מגיעה ל-‪75% (687 TB)‬. היום ‪72.9%‬ — מרחק של ‪19 TB‬.‬</a:t>
+            </a:r>
+            <a:endParaRPr lang="he-IL" sz="1300" dirty="0"/>
           </a:p>
         </p:txBody>
       </p:sp>
@@ -13500,7 +13500,7 @@
               <a:buNone/>
             </a:pPr>
             <a:r>
-              <a:rPr lang="en-US" sz="1150" dirty="0">
+              <a:rPr lang="he-IL" altLang="en-US" sz="1150" dirty="0">
                 <a:solidFill>
                   <a:srgbClr val="91A0B7"/>
                 </a:solidFill>
@@ -13508,9 +13508,9 @@
                 <a:ea typeface="Calibri" pitchFamily="34" charset="-122"/>
                 <a:cs typeface="Calibri" pitchFamily="34" charset="-120"/>
               </a:rPr>
-              <a:t>‏המסלולים אינם תלויים זה בזה. עיכוב ב-⁦POC⁩ אינו מעכב את הרכש, ועיכוב ברכש אינו מעכב את ההעתקה.</a:t>
-            </a:r>
-            <a:endParaRPr lang="en-US" sz="1150" dirty="0"/>
+              <a:t>‫המסלולים אינם תלויים זה בזה. עיכוב ב-‪POC‬ אינו מעכב את הרכש, ועיכוב ברכש אינו מעכב את ההעתקה.‬</a:t>
+            </a:r>
+            <a:endParaRPr lang="he-IL" sz="1150" dirty="0"/>
           </a:p>
         </p:txBody>
       </p:sp>

--- a/presentations/ecs-to-s3/Harel_ECS_to_S3_CIO.pptx
+++ b/presentations/ecs-to-s3/Harel_ECS_to_S3_CIO.pptx
@@ -3440,7 +3440,7 @@
                 <a:ea typeface="Calibri" pitchFamily="34" charset="-122"/>
                 <a:cs typeface="Calibri" pitchFamily="34" charset="-120"/>
               </a:rPr>
-              <a:t>‫העתקת מסמכי דימות ושיחות לענן‬</a:t>
+              <a:t>‫העתקת מסמכי דימות ו-‪Verint‬ לענן‬</a:t>
             </a:r>
             <a:endParaRPr lang="he-IL" sz="4000" dirty="0"/>
           </a:p>
@@ -4260,7 +4260,7 @@
                 <a:ea typeface="Calibri" pitchFamily="34" charset="-122"/>
                 <a:cs typeface="Calibri" pitchFamily="34" charset="-120"/>
               </a:rPr>
-              <a:t>‫אישור עקרוני להעתקת מסמכי ‪Commit‬ ל-‪AWS S3‬‬</a:t>
+              <a:t>‫אישור עקרוני להעתקת מסמכי דימות ו-‪Verint‬ ל-‪AWS S3‬‬</a:t>
             </a:r>
             <a:endParaRPr lang="he-IL" sz="1450" dirty="0"/>
           </a:p>
@@ -5298,7 +5298,7 @@
                 <a:ea typeface="Calibri" pitchFamily="34" charset="-122"/>
                 <a:cs typeface="Calibri" pitchFamily="34" charset="-120"/>
               </a:rPr>
-              <a:t>‫העתקת מסמכי ‪Commit‬ ל-‪AWS S3‬‬</a:t>
+              <a:t>‫העתקת מסמכי דימות ו-‪Verint‬ ל-‪AWS S3‬‬</a:t>
             </a:r>
             <a:endParaRPr lang="he-IL" sz="1650" dirty="0"/>
           </a:p>
@@ -5765,7 +5765,7 @@
                 <a:ea typeface="Calibri" pitchFamily="34" charset="-122"/>
                 <a:cs typeface="Calibri" pitchFamily="34" charset="-120"/>
               </a:rPr>
-              <a:t>‫אין צורך באישור תקציב סופי לרכש בישיבה זו. הנתון החסר להחלטה מלאה הוא גודל קורפוס ה-‪Commit‬ — כמה ‪TB‬ באמת יפונו.‬</a:t>
+              <a:t>‫אין צורך באישור תקציב סופי לרכש בישיבה זו. הנתון החסר להחלטה מלאה הוא גודל קורפוס הדימות ו-‪Verint‬ — כמה ‪TB‬ באמת יפונו.‬</a:t>
             </a:r>
             <a:endParaRPr lang="he-IL" sz="1150" dirty="0"/>
           </a:p>
@@ -8733,7 +8733,7 @@
                 <a:ea typeface="Calibri" pitchFamily="34" charset="-122"/>
                 <a:cs typeface="Calibri" pitchFamily="34" charset="-120"/>
               </a:rPr>
-              <a:t>‫השוואנו מול ‪S3 Standard‬ — אבל דימות ושיחות הם דאטה ארכיוני‬</a:t>
+              <a:t>‫השוואנו מול ‪S3 Standard‬ — אבל דימות ו-‪Verint‬ הם דאטה ארכיוני‬</a:t>
             </a:r>
             <a:endParaRPr lang="he-IL" sz="2500" dirty="0"/>
           </a:p>
@@ -9426,12 +9426,12 @@
         </p:nvSpPr>
         <p:spPr>
           <a:xfrm>
-            <a:off x="822960" y="2286000"/>
-            <a:ext cx="5212080" cy="1207008"/>
+            <a:off x="822960" y="2231136"/>
+            <a:ext cx="5212080" cy="1389888"/>
           </a:xfrm>
           <a:prstGeom prst="roundRect">
             <a:avLst>
-              <a:gd name="adj" fmla="val 3030"/>
+              <a:gd name="adj" fmla="val 2632"/>
             </a:avLst>
           </a:prstGeom>
           <a:solidFill>
@@ -9453,7 +9453,7 @@
         </p:nvSpPr>
         <p:spPr>
           <a:xfrm>
-            <a:off x="5532120" y="2578608"/>
+            <a:off x="5532120" y="2523744"/>
             <a:ext cx="118872" cy="118872"/>
           </a:xfrm>
           <a:prstGeom prst="rect">
@@ -9478,7 +9478,7 @@
         </p:nvSpPr>
         <p:spPr>
           <a:xfrm>
-            <a:off x="1133856" y="2523744"/>
+            <a:off x="1133856" y="2468880"/>
             <a:ext cx="4261104" cy="274320"/>
           </a:xfrm>
           <a:prstGeom prst="rect">
@@ -9520,8 +9520,8 @@
         </p:nvSpPr>
         <p:spPr>
           <a:xfrm>
-            <a:off x="1133856" y="2871216"/>
-            <a:ext cx="4590288" cy="365760"/>
+            <a:off x="1133856" y="2816352"/>
+            <a:ext cx="4590288" cy="548640"/>
           </a:xfrm>
           <a:prstGeom prst="rect">
             <a:avLst/>
@@ -9548,7 +9548,7 @@
                 <a:ea typeface="Calibri" pitchFamily="34" charset="-122"/>
                 <a:cs typeface="Calibri" pitchFamily="34" charset="-120"/>
               </a:rPr>
-              <a:t>‫מסמכי ‪Commit‬ נכתבים פעם אחת ונקראים לעיתים נדירות. ב-‪Glacier Instant Retrieval‬, בזמן אחזור של מילישניות, העלות יורדת לכ-‪$25K‬ — פי ‪4.6‬ זול מ-‪On-Prem‬, ולא יקר ממנו ב-‪30%‬.‬</a:t>
+              <a:t>‫מסמכי דימות ו-‪Verint‬ נכתבים פעם אחת ונקראים לעיתים נדירות. ב-‪Glacier Instant Retrieval‬, בזמן אחזור של מילישניות, העלות יורדת לכ-‪$25K‬ — פי ‪4.6‬ זול מ-‪On-Prem‬, ולא יקר ממנו ב-‪30%‬.‬</a:t>
             </a:r>
             <a:endParaRPr lang="he-IL" sz="1200" dirty="0"/>
           </a:p>
@@ -9562,7 +9562,7 @@
         </p:nvSpPr>
         <p:spPr>
           <a:xfrm>
-            <a:off x="822960" y="3712464"/>
+            <a:off x="822960" y="3785616"/>
             <a:ext cx="5212080" cy="1463040"/>
           </a:xfrm>
           <a:prstGeom prst="roundRect">
@@ -9589,7 +9589,7 @@
         </p:nvSpPr>
         <p:spPr>
           <a:xfrm>
-            <a:off x="5532120" y="4005072"/>
+            <a:off x="5532120" y="4078224"/>
             <a:ext cx="118872" cy="118872"/>
           </a:xfrm>
           <a:prstGeom prst="rect">
@@ -9614,7 +9614,7 @@
         </p:nvSpPr>
         <p:spPr>
           <a:xfrm>
-            <a:off x="1133856" y="3950208"/>
+            <a:off x="1133856" y="4023360"/>
             <a:ext cx="4261104" cy="274320"/>
           </a:xfrm>
           <a:prstGeom prst="rect">
@@ -9656,7 +9656,7 @@
         </p:nvSpPr>
         <p:spPr>
           <a:xfrm>
-            <a:off x="1133856" y="4297680"/>
+            <a:off x="1133856" y="4370832"/>
             <a:ext cx="4590288" cy="621792"/>
           </a:xfrm>
           <a:prstGeom prst="rect">
@@ -9776,7 +9776,7 @@
                 <a:ea typeface="Calibri" pitchFamily="34" charset="-122"/>
                 <a:cs typeface="Calibri" pitchFamily="34" charset="-120"/>
               </a:rPr>
-              <a:t>‫הנתון שחסר להכרעה: פילוח גודל-אובייקט ותדירות אחזור של קורפוס ה-‪Commit‬. הוא שקובע איזו שכבה נכונה, והוא אינו קיים היום. המחירים הם מחירון רשימה, ללא הנחות נפח או התחייבות.‬</a:t>
+              <a:t>‫הנתון שחסר להכרעה: פילוח גודל-אובייקט ותדירות אחזור של קורפוס הדימות ו-‪Verint‬. הוא שקובע איזו שכבה נכונה, והוא אינו קיים היום. המחירים הם מחירון רשימה, ללא הנחות נפח או התחייבות.‬</a:t>
             </a:r>
             <a:endParaRPr lang="he-IL" sz="1150" dirty="0"/>
           </a:p>
@@ -11504,7 +11504,7 @@
                 <a:ea typeface="Calibri" pitchFamily="34" charset="-122"/>
                 <a:cs typeface="Calibri" pitchFamily="34" charset="-120"/>
               </a:rPr>
-              <a:t>‫העתקת קורפוס ה-‪Commit‬ מפנה שטח ב-‪ECS‬ תוך שבועות. זו האפשרות היחידה שמשפיעה על הניצולת לפני דצמבר ‪2026‬.‬</a:t>
+              <a:t>‫העתקת קורפוס הדימות ו-‪Verint‬ מפנה שטח ב-‪ECS‬ תוך שבועות. זו האפשרות היחידה שמשפיעה על הניצולת לפני דצמבר ‪2026‬.‬</a:t>
             </a:r>
             <a:endParaRPr lang="he-IL" sz="1150" dirty="0"/>
           </a:p>
@@ -12598,7 +12598,7 @@
                 <a:ea typeface="Calibri" pitchFamily="34" charset="-122"/>
                 <a:cs typeface="Calibri" pitchFamily="34" charset="-120"/>
               </a:rPr>
-              <a:t>‫פילוח קורפוס ה-‪Commit‬‬</a:t>
+              <a:t>‫פילוח קורפוס הדימות ו-‪Verint‬‬</a:t>
             </a:r>
             <a:endParaRPr lang="he-IL" sz="1150" dirty="0"/>
           </a:p>

--- a/presentations/ecs-to-s3/Harel_ECS_to_S3_CIO.pptx
+++ b/presentations/ecs-to-s3/Harel_ECS_to_S3_CIO.pptx
@@ -197,9 +197,9 @@
           </c:marker>
           <c:cat>
             <c:multiLvlStrRef>
-              <c:f>Sheet1!$A$2:$A$25</c:f>
+              <c:f>Sheet1!$A$2:$A$24</c:f>
               <c:multiLvlStrCache>
-                <c:ptCount val="24"/>
+                <c:ptCount val="23"/>
                 <c:lvl>
                   <c:pt idx="0">
                     <c:v>Apr-25</c:v>
@@ -270,19 +270,16 @@
                   <c:pt idx="22">
                     <c:v>Feb-27</c:v>
                   </c:pt>
-                  <c:pt idx="23">
-                    <c:v>Mar-27</c:v>
-                  </c:pt>
                 </c:lvl>
               </c:multiLvlStrCache>
             </c:multiLvlStrRef>
           </c:cat>
           <c:val>
             <c:numRef>
-              <c:f>Sheet1!$B$2:$B$25</c:f>
+              <c:f>Sheet1!$B$2:$B$24</c:f>
               <c:numCache>
                 <c:formatCode>General</c:formatCode>
-                <c:ptCount val="24"/>
+                <c:ptCount val="23"/>
                 <c:pt idx="0">
                   <c:v>916</c:v>
                 </c:pt>
@@ -352,9 +349,6 @@
                 <c:pt idx="22">
                   <c:v>916</c:v>
                 </c:pt>
-                <c:pt idx="23">
-                  <c:v>916</c:v>
-                </c:pt>
               </c:numCache>
             </c:numRef>
           </c:val>
@@ -431,9 +425,9 @@
           </c:marker>
           <c:cat>
             <c:multiLvlStrRef>
-              <c:f>Sheet1!$A$2:$A$25</c:f>
+              <c:f>Sheet1!$A$2:$A$24</c:f>
               <c:multiLvlStrCache>
-                <c:ptCount val="24"/>
+                <c:ptCount val="23"/>
                 <c:lvl>
                   <c:pt idx="0">
                     <c:v>Apr-25</c:v>
@@ -504,19 +498,16 @@
                   <c:pt idx="22">
                     <c:v>Feb-27</c:v>
                   </c:pt>
-                  <c:pt idx="23">
-                    <c:v>Mar-27</c:v>
-                  </c:pt>
                 </c:lvl>
               </c:multiLvlStrCache>
             </c:multiLvlStrRef>
           </c:cat>
           <c:val>
             <c:numRef>
-              <c:f>Sheet1!$C$2:$C$25</c:f>
+              <c:f>Sheet1!$C$2:$C$24</c:f>
               <c:numCache>
                 <c:formatCode>General</c:formatCode>
-                <c:ptCount val="24"/>
+                <c:ptCount val="23"/>
                 <c:pt idx="0">
                   <c:v>733</c:v>
                 </c:pt>
@@ -586,9 +577,6 @@
                 <c:pt idx="22">
                   <c:v>733</c:v>
                 </c:pt>
-                <c:pt idx="23">
-                  <c:v>733</c:v>
-                </c:pt>
               </c:numCache>
             </c:numRef>
           </c:val>
@@ -603,18 +591,18 @@
               <c:strCache>
                 <c:ptCount val="1"/>
                 <c:pt idx="0">
-                  <c:v>תרחיש מואץ</c:v>
+                  <c:v>תחזית</c:v>
                 </c:pt>
               </c:strCache>
             </c:strRef>
           </c:tx>
           <c:spPr>
             <a:solidFill>
-              <a:srgbClr val="B07CFF"/>
+              <a:srgbClr val="3DD9EB"/>
             </a:solidFill>
             <a:ln w="31750" cap="flat">
               <a:solidFill>
-                <a:srgbClr val="B07CFF"/>
+                <a:srgbClr val="3DD9EB"/>
               </a:solidFill>
               <a:prstDash val="solid"/>
               <a:round/>
@@ -651,11 +639,11 @@
             <c:size val="6"/>
             <c:spPr>
               <a:solidFill>
-                <a:srgbClr val="B07CFF"/>
+                <a:srgbClr val="3DD9EB"/>
               </a:solidFill>
               <a:ln w="9525" cap="flat">
                 <a:solidFill>
-                  <a:srgbClr val="B07CFF"/>
+                  <a:srgbClr val="3DD9EB"/>
                 </a:solidFill>
                 <a:prstDash val="solid"/>
                 <a:round/>
@@ -665,9 +653,9 @@
           </c:marker>
           <c:cat>
             <c:multiLvlStrRef>
-              <c:f>Sheet1!$A$2:$A$25</c:f>
+              <c:f>Sheet1!$A$2:$A$24</c:f>
               <c:multiLvlStrCache>
-                <c:ptCount val="24"/>
+                <c:ptCount val="23"/>
                 <c:lvl>
                   <c:pt idx="0">
                     <c:v>Apr-25</c:v>
@@ -738,19 +726,16 @@
                   <c:pt idx="22">
                     <c:v>Feb-27</c:v>
                   </c:pt>
-                  <c:pt idx="23">
-                    <c:v>Mar-27</c:v>
-                  </c:pt>
                 </c:lvl>
               </c:multiLvlStrCache>
             </c:multiLvlStrRef>
           </c:cat>
           <c:val>
             <c:numRef>
-              <c:f>Sheet1!$D$2:$D$25</c:f>
+              <c:f>Sheet1!$D$2:$D$24</c:f>
               <c:numCache>
                 <c:formatCode>General</c:formatCode>
-                <c:ptCount val="24"/>
+                <c:ptCount val="23"/>
                 <c:pt idx="0">
                   <c:v/>
                 </c:pt>
@@ -800,28 +785,25 @@
                   <c:v/>
                 </c:pt>
                 <c:pt idx="16">
-                  <c:v>668</c:v>
+                  <c:v>687</c:v>
                 </c:pt>
                 <c:pt idx="17">
-                  <c:v>691</c:v>
+                  <c:v>698</c:v>
                 </c:pt>
                 <c:pt idx="18">
-                  <c:v>714</c:v>
+                  <c:v>710</c:v>
                 </c:pt>
                 <c:pt idx="19">
-                  <c:v>737</c:v>
+                  <c:v>721</c:v>
                 </c:pt>
                 <c:pt idx="20">
-                  <c:v>760</c:v>
+                  <c:v>733</c:v>
                 </c:pt>
                 <c:pt idx="21">
-                  <c:v>783</c:v>
+                  <c:v>744</c:v>
                 </c:pt>
                 <c:pt idx="22">
-                  <c:v>806</c:v>
-                </c:pt>
-                <c:pt idx="23">
-                  <c:v>829</c:v>
+                  <c:v>756</c:v>
                 </c:pt>
               </c:numCache>
             </c:numRef>
@@ -837,18 +819,18 @@
               <c:strCache>
                 <c:ptCount val="1"/>
                 <c:pt idx="0">
-                  <c:v>תחזית מגמה</c:v>
+                  <c:v>בשימוש</c:v>
                 </c:pt>
               </c:strCache>
             </c:strRef>
           </c:tx>
           <c:spPr>
             <a:solidFill>
-              <a:srgbClr val="3DD9EB"/>
+              <a:srgbClr val="FF9F43"/>
             </a:solidFill>
             <a:ln w="31750" cap="flat">
               <a:solidFill>
-                <a:srgbClr val="3DD9EB"/>
+                <a:srgbClr val="FF9F43"/>
               </a:solidFill>
               <a:prstDash val="solid"/>
               <a:round/>
@@ -885,11 +867,11 @@
             <c:size val="6"/>
             <c:spPr>
               <a:solidFill>
-                <a:srgbClr val="3DD9EB"/>
+                <a:srgbClr val="FF9F43"/>
               </a:solidFill>
               <a:ln w="9525" cap="flat">
                 <a:solidFill>
-                  <a:srgbClr val="3DD9EB"/>
+                  <a:srgbClr val="FF9F43"/>
                 </a:solidFill>
                 <a:prstDash val="solid"/>
                 <a:round/>
@@ -899,9 +881,9 @@
           </c:marker>
           <c:cat>
             <c:multiLvlStrRef>
-              <c:f>Sheet1!$A$2:$A$25</c:f>
+              <c:f>Sheet1!$A$2:$A$24</c:f>
               <c:multiLvlStrCache>
-                <c:ptCount val="24"/>
+                <c:ptCount val="23"/>
                 <c:lvl>
                   <c:pt idx="0">
                     <c:v>Apr-25</c:v>
@@ -972,253 +954,16 @@
                   <c:pt idx="22">
                     <c:v>Feb-27</c:v>
                   </c:pt>
-                  <c:pt idx="23">
-                    <c:v>Mar-27</c:v>
-                  </c:pt>
                 </c:lvl>
               </c:multiLvlStrCache>
             </c:multiLvlStrRef>
           </c:cat>
           <c:val>
             <c:numRef>
-              <c:f>Sheet1!$E$2:$E$25</c:f>
+              <c:f>Sheet1!$E$2:$E$24</c:f>
               <c:numCache>
                 <c:formatCode>General</c:formatCode>
-                <c:ptCount val="24"/>
-                <c:pt idx="0">
-                  <c:v/>
-                </c:pt>
-                <c:pt idx="1">
-                  <c:v/>
-                </c:pt>
-                <c:pt idx="2">
-                  <c:v/>
-                </c:pt>
-                <c:pt idx="3">
-                  <c:v/>
-                </c:pt>
-                <c:pt idx="4">
-                  <c:v/>
-                </c:pt>
-                <c:pt idx="5">
-                  <c:v/>
-                </c:pt>
-                <c:pt idx="6">
-                  <c:v/>
-                </c:pt>
-                <c:pt idx="7">
-                  <c:v/>
-                </c:pt>
-                <c:pt idx="8">
-                  <c:v/>
-                </c:pt>
-                <c:pt idx="9">
-                  <c:v/>
-                </c:pt>
-                <c:pt idx="10">
-                  <c:v/>
-                </c:pt>
-                <c:pt idx="11">
-                  <c:v/>
-                </c:pt>
-                <c:pt idx="12">
-                  <c:v/>
-                </c:pt>
-                <c:pt idx="13">
-                  <c:v/>
-                </c:pt>
-                <c:pt idx="14">
-                  <c:v/>
-                </c:pt>
-                <c:pt idx="15">
-                  <c:v/>
-                </c:pt>
-                <c:pt idx="16">
-                  <c:v>668</c:v>
-                </c:pt>
-                <c:pt idx="17">
-                  <c:v>678</c:v>
-                </c:pt>
-                <c:pt idx="18">
-                  <c:v>688</c:v>
-                </c:pt>
-                <c:pt idx="19">
-                  <c:v>698</c:v>
-                </c:pt>
-                <c:pt idx="20">
-                  <c:v>708</c:v>
-                </c:pt>
-                <c:pt idx="21">
-                  <c:v>718</c:v>
-                </c:pt>
-                <c:pt idx="22">
-                  <c:v>727</c:v>
-                </c:pt>
-                <c:pt idx="23">
-                  <c:v>737</c:v>
-                </c:pt>
-              </c:numCache>
-            </c:numRef>
-          </c:val>
-          <c:smooth val="0"/>
-        </c:ser>
-        <c:ser>
-          <c:idx val="4"/>
-          <c:order val="4"/>
-          <c:tx>
-            <c:strRef>
-              <c:f>Sheet1!$F$1</c:f>
-              <c:strCache>
-                <c:ptCount val="1"/>
-                <c:pt idx="0">
-                  <c:v>בשימוש</c:v>
-                </c:pt>
-              </c:strCache>
-            </c:strRef>
-          </c:tx>
-          <c:spPr>
-            <a:solidFill>
-              <a:srgbClr val="FF9F43"/>
-            </a:solidFill>
-            <a:ln w="31750" cap="flat">
-              <a:solidFill>
-                <a:srgbClr val="FF9F43"/>
-              </a:solidFill>
-              <a:prstDash val="solid"/>
-              <a:round/>
-            </a:ln>
-            <a:effectLst/>
-          </c:spPr>
-          <c:invertIfNegative val="0"/>
-          <c:dLbls>
-            <c:numFmt formatCode="#,##0" sourceLinked="0"/>
-            <c:txPr>
-              <a:bodyPr/>
-              <a:lstStyle/>
-              <a:p>
-                <a:pPr>
-                  <a:defRPr b="0" i="0" strike="noStrike" sz="1200" u="none">
-                    <a:solidFill>
-                      <a:srgbClr val="000000"/>
-                    </a:solidFill>
-                    <a:latin typeface="Arial"/>
-                  </a:defRPr>
-                </a:pPr>
-              </a:p>
-            </c:txPr>
-            <c:showLegendKey val="0"/>
-            <c:showVal val="0"/>
-            <c:showCatName val="0"/>
-            <c:showSerName val="0"/>
-            <c:showPercent val="0"/>
-            <c:showBubbleSize val="0"/>
-            <c:showLeaderLines val="0"/>
-          </c:dLbls>
-          <c:marker>
-            <c:symbol val="none"/>
-            <c:size val="6"/>
-            <c:spPr>
-              <a:solidFill>
-                <a:srgbClr val="FF9F43"/>
-              </a:solidFill>
-              <a:ln w="9525" cap="flat">
-                <a:solidFill>
-                  <a:srgbClr val="FF9F43"/>
-                </a:solidFill>
-                <a:prstDash val="solid"/>
-                <a:round/>
-              </a:ln>
-              <a:effectLst/>
-            </c:spPr>
-          </c:marker>
-          <c:cat>
-            <c:multiLvlStrRef>
-              <c:f>Sheet1!$A$2:$A$25</c:f>
-              <c:multiLvlStrCache>
-                <c:ptCount val="24"/>
-                <c:lvl>
-                  <c:pt idx="0">
-                    <c:v>Apr-25</c:v>
-                  </c:pt>
-                  <c:pt idx="1">
-                    <c:v>May-25</c:v>
-                  </c:pt>
-                  <c:pt idx="2">
-                    <c:v>Jun-25</c:v>
-                  </c:pt>
-                  <c:pt idx="3">
-                    <c:v>Jul-25</c:v>
-                  </c:pt>
-                  <c:pt idx="4">
-                    <c:v>Aug-25</c:v>
-                  </c:pt>
-                  <c:pt idx="5">
-                    <c:v>Sep-25</c:v>
-                  </c:pt>
-                  <c:pt idx="6">
-                    <c:v>Oct-25</c:v>
-                  </c:pt>
-                  <c:pt idx="7">
-                    <c:v>Nov-25</c:v>
-                  </c:pt>
-                  <c:pt idx="8">
-                    <c:v>Dec-25</c:v>
-                  </c:pt>
-                  <c:pt idx="9">
-                    <c:v>Jan-26</c:v>
-                  </c:pt>
-                  <c:pt idx="10">
-                    <c:v>Feb-26</c:v>
-                  </c:pt>
-                  <c:pt idx="11">
-                    <c:v>Mar-26</c:v>
-                  </c:pt>
-                  <c:pt idx="12">
-                    <c:v>Apr-26</c:v>
-                  </c:pt>
-                  <c:pt idx="13">
-                    <c:v>May-26</c:v>
-                  </c:pt>
-                  <c:pt idx="14">
-                    <c:v>Jun-26</c:v>
-                  </c:pt>
-                  <c:pt idx="15">
-                    <c:v>Jul-26</c:v>
-                  </c:pt>
-                  <c:pt idx="16">
-                    <c:v>Aug-26</c:v>
-                  </c:pt>
-                  <c:pt idx="17">
-                    <c:v>Sep-26</c:v>
-                  </c:pt>
-                  <c:pt idx="18">
-                    <c:v>Oct-26</c:v>
-                  </c:pt>
-                  <c:pt idx="19">
-                    <c:v>Nov-26</c:v>
-                  </c:pt>
-                  <c:pt idx="20">
-                    <c:v>Dec-26</c:v>
-                  </c:pt>
-                  <c:pt idx="21">
-                    <c:v>Jan-27</c:v>
-                  </c:pt>
-                  <c:pt idx="22">
-                    <c:v>Feb-27</c:v>
-                  </c:pt>
-                  <c:pt idx="23">
-                    <c:v>Mar-27</c:v>
-                  </c:pt>
-                </c:lvl>
-              </c:multiLvlStrCache>
-            </c:multiLvlStrRef>
-          </c:cat>
-          <c:val>
-            <c:numRef>
-              <c:f>Sheet1!$F$2:$F$25</c:f>
-              <c:numCache>
-                <c:formatCode>General</c:formatCode>
-                <c:ptCount val="24"/>
+                <c:ptCount val="23"/>
                 <c:pt idx="0">
                   <c:v>516</c:v>
                 </c:pt>
@@ -1268,7 +1013,7 @@
                   <c:v>679</c:v>
                 </c:pt>
                 <c:pt idx="16">
-                  <c:v>668</c:v>
+                  <c:v>687</c:v>
                 </c:pt>
                 <c:pt idx="17">
                   <c:v/>
@@ -1286,9 +1031,6 @@
                   <c:v/>
                 </c:pt>
                 <c:pt idx="22">
-                  <c:v/>
-                </c:pt>
-                <c:pt idx="23">
                   <c:v/>
                 </c:pt>
               </c:numCache>
@@ -3578,14 +3320,14 @@
           <a:bodyPr wrap="square" lIns="0" tIns="0" rIns="0" bIns="0" rtlCol="0" anchor="ctr"/>
           <a:lstStyle/>
           <a:p>
-            <a:pPr algn="r" indent="0" marL="0">
+            <a:pPr rtl="1" algn="r" indent="0" marL="0">
               <a:lnSpc>
                 <a:spcPct val="100000"/>
               </a:lnSpc>
               <a:buNone/>
             </a:pPr>
             <a:r>
-              <a:rPr lang="en-US" altLang="en-US" sz="2600" b="1" dirty="0">
+              <a:rPr lang="he-IL" altLang="en-US" sz="2600" b="1" dirty="0">
                 <a:solidFill>
                   <a:srgbClr val="FF9F43"/>
                 </a:solidFill>
@@ -3593,9 +3335,9 @@
                 <a:ea typeface="Calibri" pitchFamily="34" charset="-122"/>
                 <a:cs typeface="Calibri" pitchFamily="34" charset="-120"/>
               </a:rPr>
-              <a:t>72.9%</a:t>
-            </a:r>
-            <a:endParaRPr lang="en-US" sz="2600" dirty="0"/>
+              <a:t>‫‪75%‬‬</a:t>
+            </a:r>
+            <a:endParaRPr lang="he-IL" sz="2600" dirty="0"/>
           </a:p>
         </p:txBody>
       </p:sp>
@@ -3635,7 +3377,7 @@
                 <a:ea typeface="Calibri" pitchFamily="34" charset="-122"/>
                 <a:cs typeface="Calibri" pitchFamily="34" charset="-120"/>
               </a:rPr>
-              <a:t>‫‪668 TB‬ מתוך ‪916 TB‬‬</a:t>
+              <a:t>‫‪687 TB‬ מתוך ‪916 TB‬‬</a:t>
             </a:r>
             <a:endParaRPr lang="he-IL" sz="1100" dirty="0"/>
           </a:p>
@@ -3704,7 +3446,7 @@
                 <a:ea typeface="Calibri" pitchFamily="34" charset="-122"/>
                 <a:cs typeface="Calibri" pitchFamily="34" charset="-120"/>
               </a:rPr>
-              <a:t>‫המרווח עד סף ‪80%‬‬</a:t>
+              <a:t>‫חציית סף ‪80%‬‬</a:t>
             </a:r>
             <a:endParaRPr lang="he-IL" sz="1050" dirty="0"/>
           </a:p>
@@ -3731,24 +3473,24 @@
           <a:bodyPr wrap="square" lIns="0" tIns="0" rIns="0" bIns="0" rtlCol="0" anchor="ctr"/>
           <a:lstStyle/>
           <a:p>
-            <a:pPr algn="r" indent="0" marL="0">
+            <a:pPr rtl="1" algn="r" indent="0" marL="0">
               <a:lnSpc>
                 <a:spcPct val="100000"/>
               </a:lnSpc>
               <a:buNone/>
             </a:pPr>
             <a:r>
-              <a:rPr lang="en-US" altLang="en-US" sz="2600" b="1" dirty="0">
-                <a:solidFill>
-                  <a:srgbClr val="3DD9EB"/>
-                </a:solidFill>
-                <a:latin typeface="Calibri" pitchFamily="34" charset="0"/>
-                <a:ea typeface="Calibri" pitchFamily="34" charset="-122"/>
-                <a:cs typeface="Calibri" pitchFamily="34" charset="-120"/>
-              </a:rPr>
-              <a:t>65 TB</a:t>
-            </a:r>
-            <a:endParaRPr lang="en-US" sz="2600" dirty="0"/>
+              <a:rPr lang="he-IL" altLang="en-US" sz="2600" b="1" dirty="0">
+                <a:solidFill>
+                  <a:srgbClr val="FF6B7A"/>
+                </a:solidFill>
+                <a:latin typeface="Calibri" pitchFamily="34" charset="0"/>
+                <a:ea typeface="Calibri" pitchFamily="34" charset="-122"/>
+                <a:cs typeface="Calibri" pitchFamily="34" charset="-120"/>
+              </a:rPr>
+              <a:t>‫דצמבר ‪2026‬‬</a:t>
+            </a:r>
+            <a:endParaRPr lang="he-IL" sz="2600" dirty="0"/>
           </a:p>
         </p:txBody>
       </p:sp>
@@ -3788,7 +3530,7 @@
                 <a:ea typeface="Calibri" pitchFamily="34" charset="-122"/>
                 <a:cs typeface="Calibri" pitchFamily="34" charset="-120"/>
               </a:rPr>
-              <a:t>‫כ-‪6‬ חודשים בקצב המגמה‬</a:t>
+              <a:t>‫‪733 TB‬ · סיכון לזמינות‬</a:t>
             </a:r>
             <a:endParaRPr lang="he-IL" sz="1100" dirty="0"/>
           </a:p>
@@ -3857,7 +3599,7 @@
                 <a:ea typeface="Calibri" pitchFamily="34" charset="-122"/>
                 <a:cs typeface="Calibri" pitchFamily="34" charset="-120"/>
               </a:rPr>
-              <a:t>‫עלות ‪100 TB‬ ל-‪5‬ שנים‬</a:t>
+              <a:t>‫מועד אחרון להוצאת ‪PO‬‬</a:t>
             </a:r>
             <a:endParaRPr lang="he-IL" sz="1050" dirty="0"/>
           </a:p>
@@ -3884,24 +3626,24 @@
           <a:bodyPr wrap="square" lIns="0" tIns="0" rIns="0" bIns="0" rtlCol="0" anchor="ctr"/>
           <a:lstStyle/>
           <a:p>
-            <a:pPr algn="r" indent="0" marL="0">
+            <a:pPr rtl="1" algn="r" indent="0" marL="0">
               <a:lnSpc>
                 <a:spcPct val="100000"/>
               </a:lnSpc>
               <a:buNone/>
             </a:pPr>
             <a:r>
-              <a:rPr lang="en-US" altLang="en-US" sz="2600" b="1" dirty="0">
-                <a:solidFill>
-                  <a:srgbClr val="3DDC97"/>
-                </a:solidFill>
-                <a:latin typeface="Calibri" pitchFamily="34" charset="0"/>
-                <a:ea typeface="Calibri" pitchFamily="34" charset="-122"/>
-                <a:cs typeface="Calibri" pitchFamily="34" charset="-120"/>
-              </a:rPr>
-              <a:t>$116K–141K</a:t>
-            </a:r>
-            <a:endParaRPr lang="en-US" sz="2600" dirty="0"/>
+              <a:rPr lang="he-IL" altLang="en-US" sz="2600" b="1" dirty="0">
+                <a:solidFill>
+                  <a:srgbClr val="3DD9EB"/>
+                </a:solidFill>
+                <a:latin typeface="Calibri" pitchFamily="34" charset="0"/>
+                <a:ea typeface="Calibri" pitchFamily="34" charset="-122"/>
+                <a:cs typeface="Calibri" pitchFamily="34" charset="-120"/>
+              </a:rPr>
+              <a:t>‫אוקטובר ‪2026‬‬</a:t>
+            </a:r>
+            <a:endParaRPr lang="he-IL" sz="2600" dirty="0"/>
           </a:p>
         </p:txBody>
       </p:sp>
@@ -3941,7 +3683,7 @@
                 <a:ea typeface="Calibri" pitchFamily="34" charset="-122"/>
                 <a:cs typeface="Calibri" pitchFamily="34" charset="-120"/>
               </a:rPr>
-              <a:t>‫‪On-Prem‬ מול ‪AWS S3 Standard‬‬</a:t>
+              <a:t>‫חודשיים אספקה מ-‪Dell‬‬</a:t>
             </a:r>
             <a:endParaRPr lang="he-IL" sz="1100" dirty="0"/>
           </a:p>
@@ -4076,7 +3818,7 @@
             <a:r>
               <a:rPr lang="he-IL" altLang="en-US" sz="1100" b="1" spc="120" kern="0" dirty="0">
                 <a:solidFill>
-                  <a:srgbClr val="3DDC97"/>
+                  <a:srgbClr val="FF6B7A"/>
                 </a:solidFill>
                 <a:latin typeface="Calibri" pitchFamily="34" charset="0"/>
                 <a:ea typeface="Calibri" pitchFamily="34" charset="-122"/>
@@ -4124,7 +3866,7 @@
                 <a:ea typeface="Calibri" pitchFamily="34" charset="-122"/>
                 <a:cs typeface="Calibri" pitchFamily="34" charset="-120"/>
               </a:rPr>
-              <a:t>‫לאשר את ההעתקה עכשיו, ולקשור את הרכש לניצולת ולא לתאריך‬</a:t>
+              <a:t>‫להוציא ‪PO‬ באוקטובר, ולהתניע את ההעתקה לענן במקביל‬</a:t>
             </a:r>
             <a:endParaRPr lang="he-IL" sz="2700" dirty="0"/>
           </a:p>
@@ -4212,7 +3954,7 @@
             <a:r>
               <a:rPr lang="en-US" altLang="en-US" sz="2100" b="1" dirty="0">
                 <a:solidFill>
-                  <a:srgbClr val="3DD9EB"/>
+                  <a:srgbClr val="FF6B7A"/>
                 </a:solidFill>
                 <a:latin typeface="Calibri" pitchFamily="34" charset="0"/>
                 <a:ea typeface="Calibri" pitchFamily="34" charset="-122"/>
@@ -4260,7 +4002,7 @@
                 <a:ea typeface="Calibri" pitchFamily="34" charset="-122"/>
                 <a:cs typeface="Calibri" pitchFamily="34" charset="-120"/>
               </a:rPr>
-              <a:t>‫אישור עקרוני להעתקת מסמכי דימות ו-‪Verint‬ ל-‪AWS S3‬‬</a:t>
+              <a:t>‫הוצאת ‪PO‬ ל-‪Dell‬ עד סוף אוקטובר ‪2026‬‬</a:t>
             </a:r>
             <a:endParaRPr lang="he-IL" sz="1450" dirty="0"/>
           </a:p>
@@ -4302,7 +4044,7 @@
                 <a:ea typeface="Calibri" pitchFamily="34" charset="-122"/>
                 <a:cs typeface="Calibri" pitchFamily="34" charset="-120"/>
               </a:rPr>
-              <a:t>‫התנעה באוגוסט. תקציב ‪POC‬ על ‪1–2 TB‬, וסגירת חסמי הקבילות המשפטית והריבונות בספטמבר במקביל.‬</a:t>
+              <a:t>‫חודשיים זמן אספקה מחייבים יציאה באוקטובר כדי שהדיסקים יהיו מותקנים בדצמבר, במועד חציית ‪80%‬. אישור התקציב נדרש בספטמבר.‬</a:t>
             </a:r>
             <a:endParaRPr lang="he-IL" sz="1150" dirty="0"/>
           </a:p>
@@ -4380,13 +4122,13 @@
             <a:r>
               <a:rPr lang="he-IL" altLang="en-US" sz="1100" dirty="0">
                 <a:solidFill>
-                  <a:srgbClr val="3DD9EB"/>
-                </a:solidFill>
-                <a:latin typeface="Calibri" pitchFamily="34" charset="0"/>
-                <a:ea typeface="Calibri" pitchFamily="34" charset="-122"/>
-                <a:cs typeface="Calibri" pitchFamily="34" charset="-120"/>
-              </a:rPr>
-              <a:t>‫תשתיות ‪IT +‬ יועץ משפטי ‪+ DPO‬‬</a:t>
+                  <a:srgbClr val="FF6B7A"/>
+                </a:solidFill>
+                <a:latin typeface="Calibri" pitchFamily="34" charset="0"/>
+                <a:ea typeface="Calibri" pitchFamily="34" charset="-122"/>
+                <a:cs typeface="Calibri" pitchFamily="34" charset="-120"/>
+              </a:rPr>
+              <a:t>‫תשתיות ‪IT‬ ורכש‬</a:t>
             </a:r>
             <a:endParaRPr lang="he-IL" sz="1100" dirty="0"/>
           </a:p>
@@ -4449,7 +4191,7 @@
             <a:r>
               <a:rPr lang="en-US" altLang="en-US" sz="2100" b="1" dirty="0">
                 <a:solidFill>
-                  <a:srgbClr val="FF9F43"/>
+                  <a:srgbClr val="3DD9EB"/>
                 </a:solidFill>
                 <a:latin typeface="Calibri" pitchFamily="34" charset="0"/>
                 <a:ea typeface="Calibri" pitchFamily="34" charset="-122"/>
@@ -4497,7 +4239,7 @@
                 <a:ea typeface="Calibri" pitchFamily="34" charset="-122"/>
                 <a:cs typeface="Calibri" pitchFamily="34" charset="-120"/>
               </a:rPr>
-              <a:t>‫טריגר רכש בניצולת ‪75%‬ במקום תאריך יעד‬</a:t>
+              <a:t>‫אישור עקרוני להעתקת מסמכי דימות ו-‪Verint‬ ל-‪AWS S3‬‬</a:t>
             </a:r>
             <a:endParaRPr lang="he-IL" sz="1450" dirty="0"/>
           </a:p>
@@ -4539,7 +4281,7 @@
                 <a:ea typeface="Calibri" pitchFamily="34" charset="-122"/>
                 <a:cs typeface="Calibri" pitchFamily="34" charset="-120"/>
               </a:rPr>
-              <a:t>‫‪PO‬ ל-‪Dell‬ יוצא כאשר הניצולת מגיעה ל-‪687 TB‬. זה מבטיח חודשיים אספקה גם בתרחיש המואץ, ואינו מקדים רכש שאולי לא יידרש.‬</a:t>
+              <a:t>‫התנעה באוגוסט. תקציב ‪POC‬ על ‪1–2 TB‬, וסגירת חסמי הקבילות המשפטית והריבונות בספטמבר במקביל.‬</a:t>
             </a:r>
             <a:endParaRPr lang="he-IL" sz="1150" dirty="0"/>
           </a:p>
@@ -4617,13 +4359,13 @@
             <a:r>
               <a:rPr lang="he-IL" altLang="en-US" sz="1100" dirty="0">
                 <a:solidFill>
-                  <a:srgbClr val="FF9F43"/>
-                </a:solidFill>
-                <a:latin typeface="Calibri" pitchFamily="34" charset="0"/>
-                <a:ea typeface="Calibri" pitchFamily="34" charset="-122"/>
-                <a:cs typeface="Calibri" pitchFamily="34" charset="-120"/>
-              </a:rPr>
-              <a:t>‫תשתיות ‪IT +‬ רכש‬</a:t>
+                  <a:srgbClr val="3DD9EB"/>
+                </a:solidFill>
+                <a:latin typeface="Calibri" pitchFamily="34" charset="0"/>
+                <a:ea typeface="Calibri" pitchFamily="34" charset="-122"/>
+                <a:cs typeface="Calibri" pitchFamily="34" charset="-120"/>
+              </a:rPr>
+              <a:t>‫תשתיות ‪IT‬, יועץ משפטי ו-‪DPO‬‬</a:t>
             </a:r>
             <a:endParaRPr lang="he-IL" sz="1100" dirty="0"/>
           </a:p>
@@ -4860,7 +4602,7 @@
                 <a:ea typeface="Calibri" pitchFamily="34" charset="-122"/>
                 <a:cs typeface="Calibri" pitchFamily="34" charset="-120"/>
               </a:rPr>
-              <a:t>‫תשתיות ‪IT + FinOps‬‬</a:t>
+              <a:t>‫תשתיות ‪IT‬ ו-‪FinOps‬‬</a:t>
             </a:r>
             <a:endParaRPr lang="he-IL" sz="1100" dirty="0"/>
           </a:p>
@@ -4883,11 +4625,11 @@
             </a:avLst>
           </a:prstGeom>
           <a:solidFill>
-            <a:srgbClr val="14302A"/>
+            <a:srgbClr val="2A1620"/>
           </a:solidFill>
           <a:ln w="12700">
             <a:solidFill>
-              <a:srgbClr val="2A6A52"/>
+              <a:srgbClr val="5A2A38"/>
             </a:solidFill>
             <a:prstDash val="solid"/>
           </a:ln>
@@ -4908,11 +4650,11 @@
             <a:avLst/>
           </a:prstGeom>
           <a:solidFill>
-            <a:srgbClr val="3DDC97"/>
+            <a:srgbClr val="FF6B7A"/>
           </a:solidFill>
           <a:ln w="12700">
             <a:solidFill>
-              <a:srgbClr val="3DDC97"/>
+              <a:srgbClr val="FF6B7A"/>
             </a:solidFill>
             <a:prstDash val="solid"/>
           </a:ln>
@@ -4948,13 +4690,13 @@
             <a:r>
               <a:rPr lang="he-IL" altLang="en-US" sz="1400" b="1" dirty="0">
                 <a:solidFill>
-                  <a:srgbClr val="3DDC97"/>
-                </a:solidFill>
-                <a:latin typeface="Calibri" pitchFamily="34" charset="0"/>
-                <a:ea typeface="Calibri" pitchFamily="34" charset="-122"/>
-                <a:cs typeface="Calibri" pitchFamily="34" charset="-120"/>
-              </a:rPr>
-              <a:t>‫נדרש היום: אישור עקרוני להעתקה, תקציב ‪POC‬, ואישור טריגר הרכש ב-‪75%‬.‬</a:t>
+                  <a:srgbClr val="FF6B7A"/>
+                </a:solidFill>
+                <a:latin typeface="Calibri" pitchFamily="34" charset="0"/>
+                <a:ea typeface="Calibri" pitchFamily="34" charset="-122"/>
+                <a:cs typeface="Calibri" pitchFamily="34" charset="-120"/>
+              </a:rPr>
+              <a:t>‫נדרש היום: אישור תקציב הרכש כדי שה-‪PO‬ יצא באוקטובר, ואישור עקרוני להעתקה.‬</a:t>
             </a:r>
             <a:endParaRPr lang="he-IL" sz="1400" dirty="0"/>
           </a:p>
@@ -5000,11 +4742,11 @@
             <a:avLst/>
           </a:prstGeom>
           <a:solidFill>
-            <a:srgbClr val="3DDC97"/>
+            <a:srgbClr val="FF6B7A"/>
           </a:solidFill>
           <a:ln w="12700">
             <a:solidFill>
-              <a:srgbClr val="3DDC97"/>
+              <a:srgbClr val="FF6B7A"/>
             </a:solidFill>
             <a:prstDash val="solid"/>
           </a:ln>
@@ -5046,7 +4788,7 @@
                 <a:ea typeface="Calibri" pitchFamily="34" charset="-122"/>
                 <a:cs typeface="Calibri" pitchFamily="34" charset="-120"/>
               </a:rPr>
-              <a:t>‫החלטת התקציב המלאה לרכש תובא לאישור כאשר הטריגר ייחצה, עם הצעת מחיר מעודכנת מ-‪Dell‬ ותמחור ענן מעודכן לצידה.‬</a:t>
+              <a:t>‫אישור התקציב נדרש בספטמבר כדי שתהליך הרכש יסתיים בהוצאת ‪PO‬ באוקטובר. הצעת המחיר של ‪Dell‬ תרוענן לקראת האישור.‬</a:t>
             </a:r>
             <a:endParaRPr lang="he-IL" sz="1150" dirty="0"/>
           </a:p>
@@ -5114,7 +4856,7 @@
             <a:r>
               <a:rPr lang="he-IL" altLang="en-US" sz="1100" b="1" spc="120" kern="0" dirty="0">
                 <a:solidFill>
-                  <a:srgbClr val="3DD9EB"/>
+                  <a:srgbClr val="FF6B7A"/>
                 </a:solidFill>
                 <a:latin typeface="Calibri" pitchFamily="34" charset="0"/>
                 <a:ea typeface="Calibri" pitchFamily="34" charset="-122"/>
@@ -5154,7 +4896,7 @@
               <a:buNone/>
             </a:pPr>
             <a:r>
-              <a:rPr lang="he-IL" altLang="en-US" sz="2700" b="1" dirty="0">
+              <a:rPr lang="he-IL" altLang="en-US" sz="2500" b="1" dirty="0">
                 <a:solidFill>
                   <a:srgbClr val="F4F7FB"/>
                 </a:solidFill>
@@ -5162,9 +4904,9 @@
                 <a:ea typeface="Calibri" pitchFamily="34" charset="-122"/>
                 <a:cs typeface="Calibri" pitchFamily="34" charset="-120"/>
               </a:rPr>
-              <a:t>‫שתי החלטות נפרדות — ורק אחת מהן דחופה היום‬</a:t>
-            </a:r>
-            <a:endParaRPr lang="he-IL" sz="2700" dirty="0"/>
+              <a:t>‫ה-‪PO‬ חייב לצאת באוקטובר ‪2026‬ — אחרת נגיע ל-‪80%‬ בדצמבר בלי דיסקים‬</a:t>
+            </a:r>
+            <a:endParaRPr lang="he-IL" sz="2500" dirty="0"/>
           </a:p>
         </p:txBody>
       </p:sp>
@@ -5201,12 +4943,777 @@
         </p:nvSpPr>
         <p:spPr>
           <a:xfrm>
-            <a:off x="6229807" y="2103120"/>
-            <a:ext cx="5138928" cy="2267712"/>
+            <a:off x="8168335" y="2048256"/>
+            <a:ext cx="3200400" cy="1170432"/>
           </a:xfrm>
           <a:prstGeom prst="roundRect">
             <a:avLst>
-              <a:gd name="adj" fmla="val 2016"/>
+              <a:gd name="adj" fmla="val 3906"/>
+            </a:avLst>
+          </a:prstGeom>
+          <a:solidFill>
+            <a:srgbClr val="182133"/>
+          </a:solidFill>
+          <a:ln w="12700">
+            <a:solidFill>
+              <a:srgbClr val="23304A"/>
+            </a:solidFill>
+            <a:prstDash val="solid"/>
+          </a:ln>
+        </p:spPr>
+      </p:sp>
+      <p:sp>
+        <p:nvSpPr>
+          <p:cNvPr id="6" name="Text 4"/>
+          <p:cNvSpPr/>
+          <p:nvPr/>
+        </p:nvSpPr>
+        <p:spPr>
+          <a:xfrm>
+            <a:off x="8424367" y="2212848"/>
+            <a:ext cx="2688336" cy="237744"/>
+          </a:xfrm>
+          <a:prstGeom prst="rect">
+            <a:avLst/>
+          </a:prstGeom>
+          <a:noFill/>
+          <a:ln/>
+        </p:spPr>
+        <p:txBody>
+          <a:bodyPr wrap="square" lIns="0" tIns="0" rIns="0" bIns="0" rtlCol="0" anchor="ctr"/>
+          <a:lstStyle/>
+          <a:p>
+            <a:pPr rtl="1" algn="r" indent="0" marL="0">
+              <a:lnSpc>
+                <a:spcPct val="100000"/>
+              </a:lnSpc>
+              <a:buNone/>
+            </a:pPr>
+            <a:r>
+              <a:rPr lang="he-IL" altLang="en-US" sz="1050" b="1" spc="80" kern="0" dirty="0">
+                <a:solidFill>
+                  <a:srgbClr val="91A0B7"/>
+                </a:solidFill>
+                <a:latin typeface="Calibri" pitchFamily="34" charset="0"/>
+                <a:ea typeface="Calibri" pitchFamily="34" charset="-122"/>
+                <a:cs typeface="Calibri" pitchFamily="34" charset="-120"/>
+              </a:rPr>
+              <a:t>‫היום · אוגוסט ‪2026‬‬</a:t>
+            </a:r>
+            <a:endParaRPr lang="he-IL" sz="1050" dirty="0"/>
+          </a:p>
+        </p:txBody>
+      </p:sp>
+      <p:sp>
+        <p:nvSpPr>
+          <p:cNvPr id="7" name="Text 5"/>
+          <p:cNvSpPr/>
+          <p:nvPr/>
+        </p:nvSpPr>
+        <p:spPr>
+          <a:xfrm>
+            <a:off x="8424367" y="2468880"/>
+            <a:ext cx="2688336" cy="420624"/>
+          </a:xfrm>
+          <a:prstGeom prst="rect">
+            <a:avLst/>
+          </a:prstGeom>
+          <a:noFill/>
+          <a:ln/>
+        </p:spPr>
+        <p:txBody>
+          <a:bodyPr wrap="square" lIns="0" tIns="0" rIns="0" bIns="0" rtlCol="0" anchor="ctr"/>
+          <a:lstStyle/>
+          <a:p>
+            <a:pPr rtl="1" algn="r" indent="0" marL="0">
+              <a:lnSpc>
+                <a:spcPct val="100000"/>
+              </a:lnSpc>
+              <a:buNone/>
+            </a:pPr>
+            <a:r>
+              <a:rPr lang="he-IL" altLang="en-US" sz="2400" b="1" dirty="0">
+                <a:solidFill>
+                  <a:srgbClr val="FF9F43"/>
+                </a:solidFill>
+                <a:latin typeface="Calibri" pitchFamily="34" charset="0"/>
+                <a:ea typeface="Calibri" pitchFamily="34" charset="-122"/>
+                <a:cs typeface="Calibri" pitchFamily="34" charset="-120"/>
+              </a:rPr>
+              <a:t>‫‪75%‬‬</a:t>
+            </a:r>
+            <a:endParaRPr lang="he-IL" sz="2400" dirty="0"/>
+          </a:p>
+        </p:txBody>
+      </p:sp>
+      <p:sp>
+        <p:nvSpPr>
+          <p:cNvPr id="8" name="Text 6"/>
+          <p:cNvSpPr/>
+          <p:nvPr/>
+        </p:nvSpPr>
+        <p:spPr>
+          <a:xfrm>
+            <a:off x="8424367" y="2907792"/>
+            <a:ext cx="2688336" cy="237744"/>
+          </a:xfrm>
+          <a:prstGeom prst="rect">
+            <a:avLst/>
+          </a:prstGeom>
+          <a:noFill/>
+          <a:ln/>
+        </p:spPr>
+        <p:txBody>
+          <a:bodyPr wrap="square" lIns="0" tIns="0" rIns="0" bIns="0" rtlCol="0" anchor="ctr"/>
+          <a:lstStyle/>
+          <a:p>
+            <a:pPr rtl="1" algn="r" indent="0" marL="0">
+              <a:lnSpc>
+                <a:spcPct val="100000"/>
+              </a:lnSpc>
+              <a:buNone/>
+            </a:pPr>
+            <a:r>
+              <a:rPr lang="he-IL" altLang="en-US" sz="1100" dirty="0">
+                <a:solidFill>
+                  <a:srgbClr val="5E6E85"/>
+                </a:solidFill>
+                <a:latin typeface="Calibri" pitchFamily="34" charset="0"/>
+                <a:ea typeface="Calibri" pitchFamily="34" charset="-122"/>
+                <a:cs typeface="Calibri" pitchFamily="34" charset="-120"/>
+              </a:rPr>
+              <a:t>‫‪687 TB‬ מתוך ‪916 TB‬ בשימוש‬</a:t>
+            </a:r>
+            <a:endParaRPr lang="he-IL" sz="1100" dirty="0"/>
+          </a:p>
+        </p:txBody>
+      </p:sp>
+      <p:sp>
+        <p:nvSpPr>
+          <p:cNvPr id="9" name="Text 7"/>
+          <p:cNvSpPr/>
+          <p:nvPr/>
+        </p:nvSpPr>
+        <p:spPr>
+          <a:xfrm>
+            <a:off x="7692847" y="2450592"/>
+            <a:ext cx="475488" cy="365760"/>
+          </a:xfrm>
+          <a:prstGeom prst="rect">
+            <a:avLst/>
+          </a:prstGeom>
+          <a:noFill/>
+          <a:ln/>
+        </p:spPr>
+        <p:txBody>
+          <a:bodyPr wrap="square" lIns="0" tIns="0" rIns="0" bIns="0" rtlCol="0" anchor="ctr"/>
+          <a:lstStyle/>
+          <a:p>
+            <a:pPr algn="ctr" indent="0" marL="0">
+              <a:lnSpc>
+                <a:spcPct val="100000"/>
+              </a:lnSpc>
+              <a:buNone/>
+            </a:pPr>
+            <a:r>
+              <a:rPr lang="en-US" altLang="en-US" sz="1900" b="1" dirty="0">
+                <a:solidFill>
+                  <a:srgbClr val="5E6E85"/>
+                </a:solidFill>
+                <a:latin typeface="Calibri" pitchFamily="34" charset="0"/>
+                <a:ea typeface="Calibri" pitchFamily="34" charset="-122"/>
+                <a:cs typeface="Calibri" pitchFamily="34" charset="-120"/>
+              </a:rPr>
+              <a:t>←</a:t>
+            </a:r>
+            <a:endParaRPr lang="en-US" sz="1900" dirty="0"/>
+          </a:p>
+        </p:txBody>
+      </p:sp>
+      <p:sp>
+        <p:nvSpPr>
+          <p:cNvPr id="10" name="Shape 8"/>
+          <p:cNvSpPr/>
+          <p:nvPr/>
+        </p:nvSpPr>
+        <p:spPr>
+          <a:xfrm>
+            <a:off x="4492447" y="2048256"/>
+            <a:ext cx="3200400" cy="1170432"/>
+          </a:xfrm>
+          <a:prstGeom prst="roundRect">
+            <a:avLst>
+              <a:gd name="adj" fmla="val 3906"/>
+            </a:avLst>
+          </a:prstGeom>
+          <a:solidFill>
+            <a:srgbClr val="182133"/>
+          </a:solidFill>
+          <a:ln w="12700">
+            <a:solidFill>
+              <a:srgbClr val="23304A"/>
+            </a:solidFill>
+            <a:prstDash val="solid"/>
+          </a:ln>
+        </p:spPr>
+      </p:sp>
+      <p:sp>
+        <p:nvSpPr>
+          <p:cNvPr id="11" name="Text 9"/>
+          <p:cNvSpPr/>
+          <p:nvPr/>
+        </p:nvSpPr>
+        <p:spPr>
+          <a:xfrm>
+            <a:off x="4748479" y="2212848"/>
+            <a:ext cx="2688336" cy="237744"/>
+          </a:xfrm>
+          <a:prstGeom prst="rect">
+            <a:avLst/>
+          </a:prstGeom>
+          <a:noFill/>
+          <a:ln/>
+        </p:spPr>
+        <p:txBody>
+          <a:bodyPr wrap="square" lIns="0" tIns="0" rIns="0" bIns="0" rtlCol="0" anchor="ctr"/>
+          <a:lstStyle/>
+          <a:p>
+            <a:pPr rtl="1" algn="r" indent="0" marL="0">
+              <a:lnSpc>
+                <a:spcPct val="100000"/>
+              </a:lnSpc>
+              <a:buNone/>
+            </a:pPr>
+            <a:r>
+              <a:rPr lang="he-IL" altLang="en-US" sz="1050" b="1" spc="80" kern="0" dirty="0">
+                <a:solidFill>
+                  <a:srgbClr val="91A0B7"/>
+                </a:solidFill>
+                <a:latin typeface="Calibri" pitchFamily="34" charset="0"/>
+                <a:ea typeface="Calibri" pitchFamily="34" charset="-122"/>
+                <a:cs typeface="Calibri" pitchFamily="34" charset="-120"/>
+              </a:rPr>
+              <a:t>‫אוקטובר ‪2026‬‬</a:t>
+            </a:r>
+            <a:endParaRPr lang="he-IL" sz="1050" dirty="0"/>
+          </a:p>
+        </p:txBody>
+      </p:sp>
+      <p:sp>
+        <p:nvSpPr>
+          <p:cNvPr id="12" name="Text 10"/>
+          <p:cNvSpPr/>
+          <p:nvPr/>
+        </p:nvSpPr>
+        <p:spPr>
+          <a:xfrm>
+            <a:off x="4748479" y="2468880"/>
+            <a:ext cx="2688336" cy="420624"/>
+          </a:xfrm>
+          <a:prstGeom prst="rect">
+            <a:avLst/>
+          </a:prstGeom>
+          <a:noFill/>
+          <a:ln/>
+        </p:spPr>
+        <p:txBody>
+          <a:bodyPr wrap="square" lIns="0" tIns="0" rIns="0" bIns="0" rtlCol="0" anchor="ctr"/>
+          <a:lstStyle/>
+          <a:p>
+            <a:pPr rtl="1" algn="r" indent="0" marL="0">
+              <a:lnSpc>
+                <a:spcPct val="100000"/>
+              </a:lnSpc>
+              <a:buNone/>
+            </a:pPr>
+            <a:r>
+              <a:rPr lang="he-IL" altLang="en-US" sz="2400" b="1" dirty="0">
+                <a:solidFill>
+                  <a:srgbClr val="3DD9EB"/>
+                </a:solidFill>
+                <a:latin typeface="Calibri" pitchFamily="34" charset="0"/>
+                <a:ea typeface="Calibri" pitchFamily="34" charset="-122"/>
+                <a:cs typeface="Calibri" pitchFamily="34" charset="-120"/>
+              </a:rPr>
+              <a:t>‫הוצאת ‪PO‬‬</a:t>
+            </a:r>
+            <a:endParaRPr lang="he-IL" sz="2400" dirty="0"/>
+          </a:p>
+        </p:txBody>
+      </p:sp>
+      <p:sp>
+        <p:nvSpPr>
+          <p:cNvPr id="13" name="Text 11"/>
+          <p:cNvSpPr/>
+          <p:nvPr/>
+        </p:nvSpPr>
+        <p:spPr>
+          <a:xfrm>
+            <a:off x="4748479" y="2907792"/>
+            <a:ext cx="2688336" cy="237744"/>
+          </a:xfrm>
+          <a:prstGeom prst="rect">
+            <a:avLst/>
+          </a:prstGeom>
+          <a:noFill/>
+          <a:ln/>
+        </p:spPr>
+        <p:txBody>
+          <a:bodyPr wrap="square" lIns="0" tIns="0" rIns="0" bIns="0" rtlCol="0" anchor="ctr"/>
+          <a:lstStyle/>
+          <a:p>
+            <a:pPr rtl="1" algn="r" indent="0" marL="0">
+              <a:lnSpc>
+                <a:spcPct val="100000"/>
+              </a:lnSpc>
+              <a:buNone/>
+            </a:pPr>
+            <a:r>
+              <a:rPr lang="he-IL" altLang="en-US" sz="1100" dirty="0">
+                <a:solidFill>
+                  <a:srgbClr val="5E6E85"/>
+                </a:solidFill>
+                <a:latin typeface="Calibri" pitchFamily="34" charset="0"/>
+                <a:ea typeface="Calibri" pitchFamily="34" charset="-122"/>
+                <a:cs typeface="Calibri" pitchFamily="34" charset="-120"/>
+              </a:rPr>
+              <a:t>‫חודשיים זמן אספקה מ-‪Dell‬‬</a:t>
+            </a:r>
+            <a:endParaRPr lang="he-IL" sz="1100" dirty="0"/>
+          </a:p>
+        </p:txBody>
+      </p:sp>
+      <p:sp>
+        <p:nvSpPr>
+          <p:cNvPr id="14" name="Text 12"/>
+          <p:cNvSpPr/>
+          <p:nvPr/>
+        </p:nvSpPr>
+        <p:spPr>
+          <a:xfrm>
+            <a:off x="4016959" y="2450592"/>
+            <a:ext cx="475488" cy="365760"/>
+          </a:xfrm>
+          <a:prstGeom prst="rect">
+            <a:avLst/>
+          </a:prstGeom>
+          <a:noFill/>
+          <a:ln/>
+        </p:spPr>
+        <p:txBody>
+          <a:bodyPr wrap="square" lIns="0" tIns="0" rIns="0" bIns="0" rtlCol="0" anchor="ctr"/>
+          <a:lstStyle/>
+          <a:p>
+            <a:pPr algn="ctr" indent="0" marL="0">
+              <a:lnSpc>
+                <a:spcPct val="100000"/>
+              </a:lnSpc>
+              <a:buNone/>
+            </a:pPr>
+            <a:r>
+              <a:rPr lang="en-US" altLang="en-US" sz="1900" b="1" dirty="0">
+                <a:solidFill>
+                  <a:srgbClr val="5E6E85"/>
+                </a:solidFill>
+                <a:latin typeface="Calibri" pitchFamily="34" charset="0"/>
+                <a:ea typeface="Calibri" pitchFamily="34" charset="-122"/>
+                <a:cs typeface="Calibri" pitchFamily="34" charset="-120"/>
+              </a:rPr>
+              <a:t>←</a:t>
+            </a:r>
+            <a:endParaRPr lang="en-US" sz="1900" dirty="0"/>
+          </a:p>
+        </p:txBody>
+      </p:sp>
+      <p:sp>
+        <p:nvSpPr>
+          <p:cNvPr id="15" name="Shape 13"/>
+          <p:cNvSpPr/>
+          <p:nvPr/>
+        </p:nvSpPr>
+        <p:spPr>
+          <a:xfrm>
+            <a:off x="816559" y="2048256"/>
+            <a:ext cx="3200400" cy="1170432"/>
+          </a:xfrm>
+          <a:prstGeom prst="roundRect">
+            <a:avLst>
+              <a:gd name="adj" fmla="val 3906"/>
+            </a:avLst>
+          </a:prstGeom>
+          <a:solidFill>
+            <a:srgbClr val="182133"/>
+          </a:solidFill>
+          <a:ln w="12700">
+            <a:solidFill>
+              <a:srgbClr val="5A2A38"/>
+            </a:solidFill>
+            <a:prstDash val="solid"/>
+          </a:ln>
+        </p:spPr>
+      </p:sp>
+      <p:sp>
+        <p:nvSpPr>
+          <p:cNvPr id="16" name="Text 14"/>
+          <p:cNvSpPr/>
+          <p:nvPr/>
+        </p:nvSpPr>
+        <p:spPr>
+          <a:xfrm>
+            <a:off x="1072591" y="2212848"/>
+            <a:ext cx="2688336" cy="237744"/>
+          </a:xfrm>
+          <a:prstGeom prst="rect">
+            <a:avLst/>
+          </a:prstGeom>
+          <a:noFill/>
+          <a:ln/>
+        </p:spPr>
+        <p:txBody>
+          <a:bodyPr wrap="square" lIns="0" tIns="0" rIns="0" bIns="0" rtlCol="0" anchor="ctr"/>
+          <a:lstStyle/>
+          <a:p>
+            <a:pPr rtl="1" algn="r" indent="0" marL="0">
+              <a:lnSpc>
+                <a:spcPct val="100000"/>
+              </a:lnSpc>
+              <a:buNone/>
+            </a:pPr>
+            <a:r>
+              <a:rPr lang="he-IL" altLang="en-US" sz="1050" b="1" spc="80" kern="0" dirty="0">
+                <a:solidFill>
+                  <a:srgbClr val="91A0B7"/>
+                </a:solidFill>
+                <a:latin typeface="Calibri" pitchFamily="34" charset="0"/>
+                <a:ea typeface="Calibri" pitchFamily="34" charset="-122"/>
+                <a:cs typeface="Calibri" pitchFamily="34" charset="-120"/>
+              </a:rPr>
+              <a:t>‫דצמבר ‪2026‬‬</a:t>
+            </a:r>
+            <a:endParaRPr lang="he-IL" sz="1050" dirty="0"/>
+          </a:p>
+        </p:txBody>
+      </p:sp>
+      <p:sp>
+        <p:nvSpPr>
+          <p:cNvPr id="17" name="Text 15"/>
+          <p:cNvSpPr/>
+          <p:nvPr/>
+        </p:nvSpPr>
+        <p:spPr>
+          <a:xfrm>
+            <a:off x="1072591" y="2468880"/>
+            <a:ext cx="2688336" cy="420624"/>
+          </a:xfrm>
+          <a:prstGeom prst="rect">
+            <a:avLst/>
+          </a:prstGeom>
+          <a:noFill/>
+          <a:ln/>
+        </p:spPr>
+        <p:txBody>
+          <a:bodyPr wrap="square" lIns="0" tIns="0" rIns="0" bIns="0" rtlCol="0" anchor="ctr"/>
+          <a:lstStyle/>
+          <a:p>
+            <a:pPr rtl="1" algn="r" indent="0" marL="0">
+              <a:lnSpc>
+                <a:spcPct val="100000"/>
+              </a:lnSpc>
+              <a:buNone/>
+            </a:pPr>
+            <a:r>
+              <a:rPr lang="he-IL" altLang="en-US" sz="2400" b="1" dirty="0">
+                <a:solidFill>
+                  <a:srgbClr val="FF6B7A"/>
+                </a:solidFill>
+                <a:latin typeface="Calibri" pitchFamily="34" charset="0"/>
+                <a:ea typeface="Calibri" pitchFamily="34" charset="-122"/>
+                <a:cs typeface="Calibri" pitchFamily="34" charset="-120"/>
+              </a:rPr>
+              <a:t>‫‪80%‬ ואספקה‬</a:t>
+            </a:r>
+            <a:endParaRPr lang="he-IL" sz="2400" dirty="0"/>
+          </a:p>
+        </p:txBody>
+      </p:sp>
+      <p:sp>
+        <p:nvSpPr>
+          <p:cNvPr id="18" name="Text 16"/>
+          <p:cNvSpPr/>
+          <p:nvPr/>
+        </p:nvSpPr>
+        <p:spPr>
+          <a:xfrm>
+            <a:off x="1072591" y="2907792"/>
+            <a:ext cx="2688336" cy="237744"/>
+          </a:xfrm>
+          <a:prstGeom prst="rect">
+            <a:avLst/>
+          </a:prstGeom>
+          <a:noFill/>
+          <a:ln/>
+        </p:spPr>
+        <p:txBody>
+          <a:bodyPr wrap="square" lIns="0" tIns="0" rIns="0" bIns="0" rtlCol="0" anchor="ctr"/>
+          <a:lstStyle/>
+          <a:p>
+            <a:pPr rtl="1" algn="r" indent="0" marL="0">
+              <a:lnSpc>
+                <a:spcPct val="100000"/>
+              </a:lnSpc>
+              <a:buNone/>
+            </a:pPr>
+            <a:r>
+              <a:rPr lang="he-IL" altLang="en-US" sz="1100" dirty="0">
+                <a:solidFill>
+                  <a:srgbClr val="5E6E85"/>
+                </a:solidFill>
+                <a:latin typeface="Calibri" pitchFamily="34" charset="0"/>
+                <a:ea typeface="Calibri" pitchFamily="34" charset="-122"/>
+                <a:cs typeface="Calibri" pitchFamily="34" charset="-120"/>
+              </a:rPr>
+              <a:t>‫הדיסקים מגיעים בדיוק בזמן‬</a:t>
+            </a:r>
+            <a:endParaRPr lang="he-IL" sz="1100" dirty="0"/>
+          </a:p>
+        </p:txBody>
+      </p:sp>
+      <p:sp>
+        <p:nvSpPr>
+          <p:cNvPr id="19" name="Shape 17"/>
+          <p:cNvSpPr/>
+          <p:nvPr/>
+        </p:nvSpPr>
+        <p:spPr>
+          <a:xfrm>
+            <a:off x="6229807" y="3529584"/>
+            <a:ext cx="5138928" cy="1700784"/>
+          </a:xfrm>
+          <a:prstGeom prst="roundRect">
+            <a:avLst>
+              <a:gd name="adj" fmla="val 2688"/>
+            </a:avLst>
+          </a:prstGeom>
+          <a:solidFill>
+            <a:srgbClr val="182133"/>
+          </a:solidFill>
+          <a:ln w="12700">
+            <a:solidFill>
+              <a:srgbClr val="5A4222"/>
+            </a:solidFill>
+            <a:prstDash val="solid"/>
+          </a:ln>
+        </p:spPr>
+      </p:sp>
+      <p:sp>
+        <p:nvSpPr>
+          <p:cNvPr id="20" name="Text 18"/>
+          <p:cNvSpPr/>
+          <p:nvPr/>
+        </p:nvSpPr>
+        <p:spPr>
+          <a:xfrm>
+            <a:off x="10454335" y="3730752"/>
+            <a:ext cx="640080" cy="384048"/>
+          </a:xfrm>
+          <a:prstGeom prst="rect">
+            <a:avLst/>
+          </a:prstGeom>
+          <a:noFill/>
+          <a:ln/>
+        </p:spPr>
+        <p:txBody>
+          <a:bodyPr wrap="square" lIns="0" tIns="0" rIns="0" bIns="0" rtlCol="0" anchor="ctr"/>
+          <a:lstStyle/>
+          <a:p>
+            <a:pPr algn="r" indent="0" marL="0">
+              <a:lnSpc>
+                <a:spcPct val="100000"/>
+              </a:lnSpc>
+              <a:buNone/>
+            </a:pPr>
+            <a:r>
+              <a:rPr lang="en-US" altLang="en-US" sz="2100" b="1" dirty="0">
+                <a:solidFill>
+                  <a:srgbClr val="FF9F43"/>
+                </a:solidFill>
+                <a:latin typeface="Calibri" pitchFamily="34" charset="0"/>
+                <a:ea typeface="Calibri" pitchFamily="34" charset="-122"/>
+                <a:cs typeface="Calibri" pitchFamily="34" charset="-120"/>
+              </a:rPr>
+              <a:t>01</a:t>
+            </a:r>
+            <a:endParaRPr lang="en-US" sz="2100" dirty="0"/>
+          </a:p>
+        </p:txBody>
+      </p:sp>
+      <p:sp>
+        <p:nvSpPr>
+          <p:cNvPr id="21" name="Text 19"/>
+          <p:cNvSpPr/>
+          <p:nvPr/>
+        </p:nvSpPr>
+        <p:spPr>
+          <a:xfrm>
+            <a:off x="6540703" y="3749040"/>
+            <a:ext cx="3822192" cy="365760"/>
+          </a:xfrm>
+          <a:prstGeom prst="rect">
+            <a:avLst/>
+          </a:prstGeom>
+          <a:noFill/>
+          <a:ln/>
+        </p:spPr>
+        <p:txBody>
+          <a:bodyPr wrap="square" lIns="0" tIns="0" rIns="0" bIns="0" rtlCol="0" anchor="ctr"/>
+          <a:lstStyle/>
+          <a:p>
+            <a:pPr rtl="1" algn="r" indent="0" marL="0">
+              <a:lnSpc>
+                <a:spcPct val="100000"/>
+              </a:lnSpc>
+              <a:buNone/>
+            </a:pPr>
+            <a:r>
+              <a:rPr lang="he-IL" altLang="en-US" sz="1600" b="1" dirty="0">
+                <a:solidFill>
+                  <a:srgbClr val="F4F7FB"/>
+                </a:solidFill>
+                <a:latin typeface="Calibri" pitchFamily="34" charset="0"/>
+                <a:ea typeface="Calibri" pitchFamily="34" charset="-122"/>
+                <a:cs typeface="Calibri" pitchFamily="34" charset="-120"/>
+              </a:rPr>
+              <a:t>‫הרחבת דיסקים ב-‪Dell ECS On-Prem‬‬</a:t>
+            </a:r>
+            <a:endParaRPr lang="he-IL" sz="1600" dirty="0"/>
+          </a:p>
+        </p:txBody>
+      </p:sp>
+      <p:sp>
+        <p:nvSpPr>
+          <p:cNvPr id="22" name="Text 20"/>
+          <p:cNvSpPr/>
+          <p:nvPr/>
+        </p:nvSpPr>
+        <p:spPr>
+          <a:xfrm>
+            <a:off x="6540703" y="4169664"/>
+            <a:ext cx="4517136" cy="603504"/>
+          </a:xfrm>
+          <a:prstGeom prst="rect">
+            <a:avLst/>
+          </a:prstGeom>
+          <a:noFill/>
+          <a:ln/>
+        </p:spPr>
+        <p:txBody>
+          <a:bodyPr wrap="square" lIns="0" tIns="0" rIns="0" bIns="0" rtlCol="0" anchor="t"/>
+          <a:lstStyle/>
+          <a:p>
+            <a:pPr rtl="1" algn="r" indent="0" marL="0">
+              <a:lnSpc>
+                <a:spcPct val="122000"/>
+              </a:lnSpc>
+              <a:buNone/>
+            </a:pPr>
+            <a:r>
+              <a:rPr lang="he-IL" altLang="en-US" sz="1200" dirty="0">
+                <a:solidFill>
+                  <a:srgbClr val="91A0B7"/>
+                </a:solidFill>
+                <a:latin typeface="Calibri" pitchFamily="34" charset="0"/>
+                <a:ea typeface="Calibri" pitchFamily="34" charset="-122"/>
+                <a:cs typeface="Calibri" pitchFamily="34" charset="-120"/>
+              </a:rPr>
+              <a:t>‫חציית ‪80%‬ מסכנת את זמינות המערכת. חודשיים אספקה מ-‪Dell‬ פירושם שהחלון להוצאת ‪PO‬ נסגר באוקטובר. הצעת ‪Dell‬ עומדת על ‪$695,520‬ עבור ‪600 TB‬ לוגי.‬</a:t>
+            </a:r>
+            <a:endParaRPr lang="he-IL" sz="1200" dirty="0"/>
+          </a:p>
+        </p:txBody>
+      </p:sp>
+      <p:sp>
+        <p:nvSpPr>
+          <p:cNvPr id="23" name="Shape 21"/>
+          <p:cNvSpPr/>
+          <p:nvPr/>
+        </p:nvSpPr>
+        <p:spPr>
+          <a:xfrm>
+            <a:off x="6540703" y="4773168"/>
+            <a:ext cx="4517136" cy="329184"/>
+          </a:xfrm>
+          <a:prstGeom prst="roundRect">
+            <a:avLst>
+              <a:gd name="adj" fmla="val 44444"/>
+            </a:avLst>
+          </a:prstGeom>
+          <a:solidFill>
+            <a:srgbClr val="3A2A12"/>
+          </a:solidFill>
+          <a:ln w="12700">
+            <a:solidFill>
+              <a:srgbClr val="3A2A12"/>
+            </a:solidFill>
+            <a:prstDash val="solid"/>
+          </a:ln>
+        </p:spPr>
+      </p:sp>
+      <p:sp>
+        <p:nvSpPr>
+          <p:cNvPr id="24" name="Text 22"/>
+          <p:cNvSpPr/>
+          <p:nvPr/>
+        </p:nvSpPr>
+        <p:spPr>
+          <a:xfrm>
+            <a:off x="6687007" y="4773168"/>
+            <a:ext cx="4224528" cy="329184"/>
+          </a:xfrm>
+          <a:prstGeom prst="rect">
+            <a:avLst/>
+          </a:prstGeom>
+          <a:noFill/>
+          <a:ln/>
+        </p:spPr>
+        <p:txBody>
+          <a:bodyPr wrap="square" lIns="0" tIns="0" rIns="0" bIns="0" rtlCol="0" anchor="ctr"/>
+          <a:lstStyle/>
+          <a:p>
+            <a:pPr rtl="1" algn="r" indent="0" marL="0">
+              <a:lnSpc>
+                <a:spcPct val="100000"/>
+              </a:lnSpc>
+              <a:buNone/>
+            </a:pPr>
+            <a:r>
+              <a:rPr lang="he-IL" altLang="en-US" sz="1200" b="1" dirty="0">
+                <a:solidFill>
+                  <a:srgbClr val="FF9F43"/>
+                </a:solidFill>
+                <a:latin typeface="Calibri" pitchFamily="34" charset="0"/>
+                <a:ea typeface="Calibri" pitchFamily="34" charset="-122"/>
+                <a:cs typeface="Calibri" pitchFamily="34" charset="-120"/>
+              </a:rPr>
+              <a:t>‫נדרש: אישור תקציב ויציאה ל-‪PO‬ באוקטובר‬</a:t>
+            </a:r>
+            <a:endParaRPr lang="he-IL" sz="1200" dirty="0"/>
+          </a:p>
+        </p:txBody>
+      </p:sp>
+      <p:sp>
+        <p:nvSpPr>
+          <p:cNvPr id="25" name="Shape 23"/>
+          <p:cNvSpPr/>
+          <p:nvPr/>
+        </p:nvSpPr>
+        <p:spPr>
+          <a:xfrm>
+            <a:off x="822960" y="3529584"/>
+            <a:ext cx="5138928" cy="1700784"/>
+          </a:xfrm>
+          <a:prstGeom prst="roundRect">
+            <a:avLst>
+              <a:gd name="adj" fmla="val 2688"/>
             </a:avLst>
           </a:prstGeom>
           <a:solidFill>
@@ -5222,14 +5729,14 @@
       </p:sp>
       <p:sp>
         <p:nvSpPr>
-          <p:cNvPr id="6" name="Text 4"/>
-          <p:cNvSpPr/>
-          <p:nvPr/>
-        </p:nvSpPr>
-        <p:spPr>
-          <a:xfrm>
-            <a:off x="10454335" y="2340864"/>
-            <a:ext cx="640080" cy="402336"/>
+          <p:cNvPr id="26" name="Text 24"/>
+          <p:cNvSpPr/>
+          <p:nvPr/>
+        </p:nvSpPr>
+        <p:spPr>
+          <a:xfrm>
+            <a:off x="5047488" y="3730752"/>
+            <a:ext cx="640080" cy="384048"/>
           </a:xfrm>
           <a:prstGeom prst="rect">
             <a:avLst/>
@@ -5248,7 +5755,7 @@
               <a:buNone/>
             </a:pPr>
             <a:r>
-              <a:rPr lang="en-US" altLang="en-US" sz="2200" b="1" dirty="0">
+              <a:rPr lang="en-US" altLang="en-US" sz="2100" b="1" dirty="0">
                 <a:solidFill>
                   <a:srgbClr val="3DD9EB"/>
                 </a:solidFill>
@@ -5256,22 +5763,22 @@
                 <a:ea typeface="Calibri" pitchFamily="34" charset="-122"/>
                 <a:cs typeface="Calibri" pitchFamily="34" charset="-120"/>
               </a:rPr>
-              <a:t>01</a:t>
-            </a:r>
-            <a:endParaRPr lang="en-US" sz="2200" dirty="0"/>
-          </a:p>
-        </p:txBody>
-      </p:sp>
-      <p:sp>
-        <p:nvSpPr>
-          <p:cNvPr id="7" name="Text 5"/>
-          <p:cNvSpPr/>
-          <p:nvPr/>
-        </p:nvSpPr>
-        <p:spPr>
-          <a:xfrm>
-            <a:off x="6540703" y="2359152"/>
-            <a:ext cx="3822192" cy="384048"/>
+              <a:t>02</a:t>
+            </a:r>
+            <a:endParaRPr lang="en-US" sz="2100" dirty="0"/>
+          </a:p>
+        </p:txBody>
+      </p:sp>
+      <p:sp>
+        <p:nvSpPr>
+          <p:cNvPr id="27" name="Text 25"/>
+          <p:cNvSpPr/>
+          <p:nvPr/>
+        </p:nvSpPr>
+        <p:spPr>
+          <a:xfrm>
+            <a:off x="1133856" y="3749040"/>
+            <a:ext cx="3822192" cy="365760"/>
           </a:xfrm>
           <a:prstGeom prst="rect">
             <a:avLst/>
@@ -5290,7 +5797,7 @@
               <a:buNone/>
             </a:pPr>
             <a:r>
-              <a:rPr lang="he-IL" altLang="en-US" sz="1650" b="1" dirty="0">
+              <a:rPr lang="he-IL" altLang="en-US" sz="1600" b="1" dirty="0">
                 <a:solidFill>
                   <a:srgbClr val="F4F7FB"/>
                 </a:solidFill>
@@ -5300,20 +5807,20 @@
               </a:rPr>
               <a:t>‫העתקת מסמכי דימות ו-‪Verint‬ ל-‪AWS S3‬‬</a:t>
             </a:r>
-            <a:endParaRPr lang="he-IL" sz="1650" dirty="0"/>
-          </a:p>
-        </p:txBody>
-      </p:sp>
-      <p:sp>
-        <p:nvSpPr>
-          <p:cNvPr id="8" name="Text 6"/>
-          <p:cNvSpPr/>
-          <p:nvPr/>
-        </p:nvSpPr>
-        <p:spPr>
-          <a:xfrm>
-            <a:off x="6540703" y="2852928"/>
-            <a:ext cx="4517136" cy="1060704"/>
+            <a:endParaRPr lang="he-IL" sz="1600" dirty="0"/>
+          </a:p>
+        </p:txBody>
+      </p:sp>
+      <p:sp>
+        <p:nvSpPr>
+          <p:cNvPr id="28" name="Text 26"/>
+          <p:cNvSpPr/>
+          <p:nvPr/>
+        </p:nvSpPr>
+        <p:spPr>
+          <a:xfrm>
+            <a:off x="1133856" y="4169664"/>
+            <a:ext cx="4517136" cy="603504"/>
           </a:xfrm>
           <a:prstGeom prst="rect">
             <a:avLst/>
@@ -5327,12 +5834,12 @@
           <a:p>
             <a:pPr rtl="1" algn="r" indent="0" marL="0">
               <a:lnSpc>
-                <a:spcPct val="124000"/>
-              </a:lnSpc>
-              <a:buNone/>
-            </a:pPr>
-            <a:r>
-              <a:rPr lang="he-IL" altLang="en-US" sz="1250" dirty="0">
+                <a:spcPct val="122000"/>
+              </a:lnSpc>
+              <a:buNone/>
+            </a:pPr>
+            <a:r>
+              <a:rPr lang="he-IL" altLang="en-US" sz="1200" dirty="0">
                 <a:solidFill>
                   <a:srgbClr val="91A0B7"/>
                 </a:solidFill>
@@ -5340,26 +5847,26 @@
                 <a:ea typeface="Calibri" pitchFamily="34" charset="-122"/>
                 <a:cs typeface="Calibri" pitchFamily="34" charset="-120"/>
               </a:rPr>
-              <a:t>‫מפנה שטח ב-‪ECS‬ תוך שבועות, ללא ‪PO‬ וללא זמן אספקה. זה המנוף היחיד שזמין לפני דצמבר ‪2026‬, והוא אינו תלוי בשרשרת האספקה של ‪Dell‬. החשיפה התקציבית המיידית מוגבלת ל-‪POC‬ בהיקף ‪1–2 TB‬ בלבד.‬</a:t>
-            </a:r>
-            <a:endParaRPr lang="he-IL" sz="1250" dirty="0"/>
-          </a:p>
-        </p:txBody>
-      </p:sp>
-      <p:sp>
-        <p:nvSpPr>
-          <p:cNvPr id="9" name="Shape 7"/>
-          <p:cNvSpPr/>
-          <p:nvPr/>
-        </p:nvSpPr>
-        <p:spPr>
-          <a:xfrm>
-            <a:off x="6540703" y="3767328"/>
-            <a:ext cx="4517136" cy="457200"/>
+              <a:t>‫מפנה שטח ב-‪ECS‬ תוך שבועות, ללא ‪PO‬ וללא זמן אספקה. רץ במקביל לרכש ומקטין את הלחץ על הסף — אך אינו מחליף את הדיסקים ואינו עוצר את השעון.‬</a:t>
+            </a:r>
+            <a:endParaRPr lang="he-IL" sz="1200" dirty="0"/>
+          </a:p>
+        </p:txBody>
+      </p:sp>
+      <p:sp>
+        <p:nvSpPr>
+          <p:cNvPr id="29" name="Shape 27"/>
+          <p:cNvSpPr/>
+          <p:nvPr/>
+        </p:nvSpPr>
+        <p:spPr>
+          <a:xfrm>
+            <a:off x="1133856" y="4773168"/>
+            <a:ext cx="4517136" cy="329184"/>
           </a:xfrm>
           <a:prstGeom prst="roundRect">
             <a:avLst>
-              <a:gd name="adj" fmla="val 24000"/>
+              <a:gd name="adj" fmla="val 44444"/>
             </a:avLst>
           </a:prstGeom>
           <a:solidFill>
@@ -5375,14 +5882,14 @@
       </p:sp>
       <p:sp>
         <p:nvSpPr>
-          <p:cNvPr id="10" name="Text 8"/>
-          <p:cNvSpPr/>
-          <p:nvPr/>
-        </p:nvSpPr>
-        <p:spPr>
-          <a:xfrm>
-            <a:off x="6687007" y="3767328"/>
-            <a:ext cx="4224528" cy="457200"/>
+          <p:cNvPr id="30" name="Text 28"/>
+          <p:cNvSpPr/>
+          <p:nvPr/>
+        </p:nvSpPr>
+        <p:spPr>
+          <a:xfrm>
+            <a:off x="1280160" y="4773168"/>
+            <a:ext cx="4224528" cy="329184"/>
           </a:xfrm>
           <a:prstGeom prst="rect">
             <a:avLst/>
@@ -5401,7 +5908,7 @@
               <a:buNone/>
             </a:pPr>
             <a:r>
-              <a:rPr lang="he-IL" altLang="en-US" sz="1250" b="1" dirty="0">
+              <a:rPr lang="he-IL" altLang="en-US" sz="1200" b="1" dirty="0">
                 <a:solidFill>
                   <a:srgbClr val="3DD9EB"/>
                 </a:solidFill>
@@ -5409,279 +5916,15 @@
                 <a:ea typeface="Calibri" pitchFamily="34" charset="-122"/>
                 <a:cs typeface="Calibri" pitchFamily="34" charset="-120"/>
               </a:rPr>
-              <a:t>‫נדרש היום: אישור עקרוני + תקציב ‪POC‬‬</a:t>
-            </a:r>
-            <a:endParaRPr lang="he-IL" sz="1250" dirty="0"/>
-          </a:p>
-        </p:txBody>
-      </p:sp>
-      <p:sp>
-        <p:nvSpPr>
-          <p:cNvPr id="11" name="Shape 9"/>
-          <p:cNvSpPr/>
-          <p:nvPr/>
-        </p:nvSpPr>
-        <p:spPr>
-          <a:xfrm>
-            <a:off x="822960" y="2103120"/>
-            <a:ext cx="5138928" cy="2267712"/>
-          </a:xfrm>
-          <a:prstGeom prst="roundRect">
-            <a:avLst>
-              <a:gd name="adj" fmla="val 2016"/>
-            </a:avLst>
-          </a:prstGeom>
-          <a:solidFill>
-            <a:srgbClr val="182133"/>
-          </a:solidFill>
-          <a:ln w="12700">
-            <a:solidFill>
-              <a:srgbClr val="5A4222"/>
-            </a:solidFill>
-            <a:prstDash val="solid"/>
-          </a:ln>
-        </p:spPr>
-      </p:sp>
-      <p:sp>
-        <p:nvSpPr>
-          <p:cNvPr id="12" name="Text 10"/>
-          <p:cNvSpPr/>
-          <p:nvPr/>
-        </p:nvSpPr>
-        <p:spPr>
-          <a:xfrm>
-            <a:off x="5047488" y="2340864"/>
-            <a:ext cx="640080" cy="402336"/>
-          </a:xfrm>
-          <a:prstGeom prst="rect">
-            <a:avLst/>
-          </a:prstGeom>
-          <a:noFill/>
-          <a:ln/>
-        </p:spPr>
-        <p:txBody>
-          <a:bodyPr wrap="square" lIns="0" tIns="0" rIns="0" bIns="0" rtlCol="0" anchor="ctr"/>
-          <a:lstStyle/>
-          <a:p>
-            <a:pPr algn="r" indent="0" marL="0">
-              <a:lnSpc>
-                <a:spcPct val="100000"/>
-              </a:lnSpc>
-              <a:buNone/>
-            </a:pPr>
-            <a:r>
-              <a:rPr lang="en-US" altLang="en-US" sz="2200" b="1" dirty="0">
-                <a:solidFill>
-                  <a:srgbClr val="FF9F43"/>
-                </a:solidFill>
-                <a:latin typeface="Calibri" pitchFamily="34" charset="0"/>
-                <a:ea typeface="Calibri" pitchFamily="34" charset="-122"/>
-                <a:cs typeface="Calibri" pitchFamily="34" charset="-120"/>
-              </a:rPr>
-              <a:t>02</a:t>
-            </a:r>
-            <a:endParaRPr lang="en-US" sz="2200" dirty="0"/>
-          </a:p>
-        </p:txBody>
-      </p:sp>
-      <p:sp>
-        <p:nvSpPr>
-          <p:cNvPr id="13" name="Text 11"/>
-          <p:cNvSpPr/>
-          <p:nvPr/>
-        </p:nvSpPr>
-        <p:spPr>
-          <a:xfrm>
-            <a:off x="1133856" y="2359152"/>
-            <a:ext cx="3822192" cy="384048"/>
-          </a:xfrm>
-          <a:prstGeom prst="rect">
-            <a:avLst/>
-          </a:prstGeom>
-          <a:noFill/>
-          <a:ln/>
-        </p:spPr>
-        <p:txBody>
-          <a:bodyPr wrap="square" lIns="0" tIns="0" rIns="0" bIns="0" rtlCol="0" anchor="ctr"/>
-          <a:lstStyle/>
-          <a:p>
-            <a:pPr rtl="1" algn="r" indent="0" marL="0">
-              <a:lnSpc>
-                <a:spcPct val="100000"/>
-              </a:lnSpc>
-              <a:buNone/>
-            </a:pPr>
-            <a:r>
-              <a:rPr lang="he-IL" altLang="en-US" sz="1650" b="1" dirty="0">
-                <a:solidFill>
-                  <a:srgbClr val="F4F7FB"/>
-                </a:solidFill>
-                <a:latin typeface="Calibri" pitchFamily="34" charset="0"/>
-                <a:ea typeface="Calibri" pitchFamily="34" charset="-122"/>
-                <a:cs typeface="Calibri" pitchFamily="34" charset="-120"/>
-              </a:rPr>
-              <a:t>‫הרחבת דיסקים ב-‪Dell ECS On-Prem‬‬</a:t>
-            </a:r>
-            <a:endParaRPr lang="he-IL" sz="1650" dirty="0"/>
-          </a:p>
-        </p:txBody>
-      </p:sp>
-      <p:sp>
-        <p:nvSpPr>
-          <p:cNvPr id="14" name="Text 12"/>
-          <p:cNvSpPr/>
-          <p:nvPr/>
-        </p:nvSpPr>
-        <p:spPr>
-          <a:xfrm>
-            <a:off x="1133856" y="2852928"/>
-            <a:ext cx="4517136" cy="1060704"/>
-          </a:xfrm>
-          <a:prstGeom prst="rect">
-            <a:avLst/>
-          </a:prstGeom>
-          <a:noFill/>
-          <a:ln/>
-        </p:spPr>
-        <p:txBody>
-          <a:bodyPr wrap="square" lIns="0" tIns="0" rIns="0" bIns="0" rtlCol="0" anchor="t"/>
-          <a:lstStyle/>
-          <a:p>
-            <a:pPr rtl="1" algn="r" indent="0" marL="0">
-              <a:lnSpc>
-                <a:spcPct val="124000"/>
-              </a:lnSpc>
-              <a:buNone/>
-            </a:pPr>
-            <a:r>
-              <a:rPr lang="he-IL" altLang="en-US" sz="1250" dirty="0">
-                <a:solidFill>
-                  <a:srgbClr val="91A0B7"/>
-                </a:solidFill>
-                <a:latin typeface="Calibri" pitchFamily="34" charset="0"/>
-                <a:ea typeface="Calibri" pitchFamily="34" charset="-122"/>
-                <a:cs typeface="Calibri" pitchFamily="34" charset="-120"/>
-              </a:rPr>
-              <a:t>‫זמן אספקה כחודשיים. אינה דחופה השבוע — אך אסור שתיקבע לפי תאריך בלוח השנה, אלא לפי טריגר ניצולת שמבטיח חודשיים אספקה בכל תרחיש. הצעת ‪Dell‬ הנוכחית עומדת על ‪$695,520‬ עבור ‪600 TB‬ לוגי.‬</a:t>
-            </a:r>
-            <a:endParaRPr lang="he-IL" sz="1250" dirty="0"/>
-          </a:p>
-        </p:txBody>
-      </p:sp>
-      <p:sp>
-        <p:nvSpPr>
-          <p:cNvPr id="15" name="Shape 13"/>
-          <p:cNvSpPr/>
-          <p:nvPr/>
-        </p:nvSpPr>
-        <p:spPr>
-          <a:xfrm>
-            <a:off x="1133856" y="3767328"/>
-            <a:ext cx="4517136" cy="457200"/>
-          </a:xfrm>
-          <a:prstGeom prst="roundRect">
-            <a:avLst>
-              <a:gd name="adj" fmla="val 24000"/>
-            </a:avLst>
-          </a:prstGeom>
-          <a:solidFill>
-            <a:srgbClr val="3A2A12"/>
-          </a:solidFill>
-          <a:ln w="12700">
-            <a:solidFill>
-              <a:srgbClr val="3A2A12"/>
-            </a:solidFill>
-            <a:prstDash val="solid"/>
-          </a:ln>
-        </p:spPr>
-      </p:sp>
-      <p:sp>
-        <p:nvSpPr>
-          <p:cNvPr id="16" name="Text 14"/>
-          <p:cNvSpPr/>
-          <p:nvPr/>
-        </p:nvSpPr>
-        <p:spPr>
-          <a:xfrm>
-            <a:off x="1280160" y="3767328"/>
-            <a:ext cx="4224528" cy="457200"/>
-          </a:xfrm>
-          <a:prstGeom prst="rect">
-            <a:avLst/>
-          </a:prstGeom>
-          <a:noFill/>
-          <a:ln/>
-        </p:spPr>
-        <p:txBody>
-          <a:bodyPr wrap="square" lIns="0" tIns="0" rIns="0" bIns="0" rtlCol="0" anchor="ctr"/>
-          <a:lstStyle/>
-          <a:p>
-            <a:pPr rtl="1" algn="r" indent="0" marL="0">
-              <a:lnSpc>
-                <a:spcPct val="100000"/>
-              </a:lnSpc>
-              <a:buNone/>
-            </a:pPr>
-            <a:r>
-              <a:rPr lang="he-IL" altLang="en-US" sz="1250" b="1" dirty="0">
-                <a:solidFill>
-                  <a:srgbClr val="FF9F43"/>
-                </a:solidFill>
-                <a:latin typeface="Calibri" pitchFamily="34" charset="0"/>
-                <a:ea typeface="Calibri" pitchFamily="34" charset="-122"/>
-                <a:cs typeface="Calibri" pitchFamily="34" charset="-120"/>
-              </a:rPr>
-              <a:t>‫נדרש היום: אישור טריגר רכש בניצולת ‪75%‬‬</a:t>
-            </a:r>
-            <a:endParaRPr lang="he-IL" sz="1250" dirty="0"/>
-          </a:p>
-        </p:txBody>
-      </p:sp>
-      <p:sp>
-        <p:nvSpPr>
-          <p:cNvPr id="17" name="Text 15"/>
-          <p:cNvSpPr/>
-          <p:nvPr/>
-        </p:nvSpPr>
-        <p:spPr>
-          <a:xfrm>
-            <a:off x="822960" y="4709160"/>
-            <a:ext cx="10545775" cy="457200"/>
-          </a:xfrm>
-          <a:prstGeom prst="rect">
-            <a:avLst/>
-          </a:prstGeom>
-          <a:noFill/>
-          <a:ln/>
-        </p:spPr>
-        <p:txBody>
-          <a:bodyPr wrap="square" lIns="0" tIns="0" rIns="0" bIns="0" rtlCol="0" anchor="ctr"/>
-          <a:lstStyle/>
-          <a:p>
-            <a:pPr rtl="1" algn="r" indent="0" marL="0">
-              <a:lnSpc>
-                <a:spcPct val="100000"/>
-              </a:lnSpc>
-              <a:buNone/>
-            </a:pPr>
-            <a:r>
-              <a:rPr lang="he-IL" altLang="en-US" sz="1500" b="1" dirty="0">
-                <a:solidFill>
-                  <a:srgbClr val="F4F7FB"/>
-                </a:solidFill>
-                <a:latin typeface="Calibri" pitchFamily="34" charset="0"/>
-                <a:ea typeface="Calibri" pitchFamily="34" charset="-122"/>
-                <a:cs typeface="Calibri" pitchFamily="34" charset="-120"/>
-              </a:rPr>
-              <a:t>‫שתי ההחלטות אינן חלופיות. ההעתקה לענן דוחה ומקטינה את הרכש — היא אינה מבטלת אותו.‬</a:t>
-            </a:r>
-            <a:endParaRPr lang="he-IL" sz="1500" dirty="0"/>
-          </a:p>
-        </p:txBody>
-      </p:sp>
-      <p:sp>
-        <p:nvSpPr>
-          <p:cNvPr id="18" name="Shape 16"/>
+              <a:t>‫נדרש: אישור עקרוני + תקציב ‪POC‬‬</a:t>
+            </a:r>
+            <a:endParaRPr lang="he-IL" sz="1200" dirty="0"/>
+          </a:p>
+        </p:txBody>
+      </p:sp>
+      <p:sp>
+        <p:nvSpPr>
+          <p:cNvPr id="31" name="Shape 29"/>
           <p:cNvSpPr/>
           <p:nvPr/>
         </p:nvSpPr>
@@ -5706,7 +5949,7 @@
       </p:sp>
       <p:sp>
         <p:nvSpPr>
-          <p:cNvPr id="19" name="Shape 17"/>
+          <p:cNvPr id="32" name="Shape 30"/>
           <p:cNvSpPr/>
           <p:nvPr/>
         </p:nvSpPr>
@@ -5719,11 +5962,11 @@
             <a:avLst/>
           </a:prstGeom>
           <a:solidFill>
-            <a:srgbClr val="3DD9EB"/>
+            <a:srgbClr val="FF6B7A"/>
           </a:solidFill>
           <a:ln w="12700">
             <a:solidFill>
-              <a:srgbClr val="3DD9EB"/>
+              <a:srgbClr val="FF6B7A"/>
             </a:solidFill>
             <a:prstDash val="solid"/>
           </a:ln>
@@ -5731,7 +5974,7 @@
       </p:sp>
       <p:sp>
         <p:nvSpPr>
-          <p:cNvPr id="20" name="Text 18"/>
+          <p:cNvPr id="33" name="Text 31"/>
           <p:cNvSpPr/>
           <p:nvPr/>
         </p:nvSpPr>
@@ -5765,7 +6008,7 @@
                 <a:ea typeface="Calibri" pitchFamily="34" charset="-122"/>
                 <a:cs typeface="Calibri" pitchFamily="34" charset="-120"/>
               </a:rPr>
-              <a:t>‫אין צורך באישור תקציב סופי לרכש בישיבה זו. הנתון החסר להחלטה מלאה הוא גודל קורפוס הדימות ו-‪Verint‬ — כמה ‪TB‬ באמת יפונו.‬</a:t>
+              <a:t>‫כל חודש עיכוב בהוצאת ה-‪PO‬ דוחה את האספקה בחודש — אך אינו דוחה את חציית ‪80%‬. עיכוב לנובמבר פירושו הגעה ל-‪80%‬ לפני שהדיסקים בבית.‬</a:t>
             </a:r>
             <a:endParaRPr lang="he-IL" sz="1150" dirty="0"/>
           </a:p>
@@ -5873,7 +6116,7 @@
               <a:buNone/>
             </a:pPr>
             <a:r>
-              <a:rPr lang="he-IL" altLang="en-US" sz="2500" b="1" dirty="0">
+              <a:rPr lang="he-IL" altLang="en-US" sz="2600" b="1" dirty="0">
                 <a:solidFill>
                   <a:srgbClr val="F4F7FB"/>
                 </a:solidFill>
@@ -5881,9 +6124,9 @@
                 <a:ea typeface="Calibri" pitchFamily="34" charset="-122"/>
                 <a:cs typeface="Calibri" pitchFamily="34" charset="-120"/>
               </a:rPr>
-              <a:t>‫‪668 TB‬ מתוך ‪916 TB‬ — והגידול נעצר בשלושת החודשים האחרונים‬</a:t>
-            </a:r>
-            <a:endParaRPr lang="he-IL" sz="2500" dirty="0"/>
+              <a:t>‫‪75%‬ ניצולת — ובקצב הנוכחי הסף נחצה בדצמבר ‪2026‬‬</a:t>
+            </a:r>
+            <a:endParaRPr lang="he-IL" sz="2600" dirty="0"/>
           </a:p>
         </p:txBody>
       </p:sp>
@@ -5973,7 +6216,7 @@
                 <a:ea typeface="Calibri" pitchFamily="34" charset="-122"/>
                 <a:cs typeface="Calibri" pitchFamily="34" charset="-120"/>
               </a:rPr>
-              <a:t>72.9%</a:t>
+              <a:t>75%</a:t>
             </a:r>
             <a:endParaRPr lang="en-US" sz="3000" dirty="0"/>
           </a:p>
@@ -6057,7 +6300,7 @@
                 <a:ea typeface="Calibri" pitchFamily="34" charset="-122"/>
                 <a:cs typeface="Calibri" pitchFamily="34" charset="-120"/>
               </a:rPr>
-              <a:t>‫אוגוסט ‪2026 · 668 TB‬ מתוך ‪916 TB‬‬</a:t>
+              <a:t>‫אוגוסט ‪2026 · 687 TB‬ מתוך ‪916 TB‬‬</a:t>
             </a:r>
             <a:endParaRPr lang="he-IL" sz="1100" dirty="0"/>
           </a:p>
@@ -6124,7 +6367,7 @@
                 <a:ea typeface="Calibri" pitchFamily="34" charset="-122"/>
                 <a:cs typeface="Calibri" pitchFamily="34" charset="-120"/>
               </a:rPr>
-              <a:t>65 TB</a:t>
+              <a:t>46 TB</a:t>
             </a:r>
             <a:endParaRPr lang="en-US" sz="3000" dirty="0"/>
           </a:p>
@@ -6229,11 +6472,11 @@
             <a:avLst/>
           </a:prstGeom>
           <a:solidFill>
-            <a:srgbClr val="3DDC97"/>
+            <a:srgbClr val="FF6B7A"/>
           </a:solidFill>
           <a:ln w="12700">
             <a:solidFill>
-              <a:srgbClr val="3DDC97"/>
+              <a:srgbClr val="FF6B7A"/>
             </a:solidFill>
             <a:prstDash val="solid"/>
           </a:ln>
@@ -6260,24 +6503,24 @@
           <a:bodyPr wrap="square" lIns="0" tIns="0" rIns="0" bIns="0" rtlCol="0" anchor="ctr"/>
           <a:lstStyle/>
           <a:p>
-            <a:pPr algn="r" indent="0" marL="0">
+            <a:pPr rtl="1" algn="r" indent="0" marL="0">
               <a:lnSpc>
                 <a:spcPct val="100000"/>
               </a:lnSpc>
               <a:buNone/>
             </a:pPr>
             <a:r>
-              <a:rPr lang="en-US" altLang="en-US" sz="3000" b="1" dirty="0">
-                <a:solidFill>
-                  <a:srgbClr val="3DDC97"/>
-                </a:solidFill>
-                <a:latin typeface="Calibri" pitchFamily="34" charset="0"/>
-                <a:ea typeface="Calibri" pitchFamily="34" charset="-122"/>
-                <a:cs typeface="Calibri" pitchFamily="34" charset="-120"/>
-              </a:rPr>
-              <a:t>9.9 TB</a:t>
-            </a:r>
-            <a:endParaRPr lang="en-US" sz="3000" dirty="0"/>
+              <a:rPr lang="he-IL" altLang="en-US" sz="2500" b="1" dirty="0">
+                <a:solidFill>
+                  <a:srgbClr val="FF6B7A"/>
+                </a:solidFill>
+                <a:latin typeface="Calibri" pitchFamily="34" charset="0"/>
+                <a:ea typeface="Calibri" pitchFamily="34" charset="-122"/>
+                <a:cs typeface="Calibri" pitchFamily="34" charset="-120"/>
+              </a:rPr>
+              <a:t>‫דצמבר ‪2026‬‬</a:t>
+            </a:r>
+            <a:endParaRPr lang="he-IL" sz="2500" dirty="0"/>
           </a:p>
         </p:txBody>
       </p:sp>
@@ -6317,7 +6560,7 @@
                 <a:ea typeface="Calibri" pitchFamily="34" charset="-122"/>
                 <a:cs typeface="Calibri" pitchFamily="34" charset="-120"/>
               </a:rPr>
-              <a:t>‫גידול חודשי · ‪12‬ חודשים‬</a:t>
+              <a:t>‫חציית ‪80%‬ צפויה‬</a:t>
             </a:r>
             <a:endParaRPr lang="he-IL" sz="1050" dirty="0"/>
           </a:p>
@@ -6359,7 +6602,7 @@
                 <a:ea typeface="Calibri" pitchFamily="34" charset="-122"/>
                 <a:cs typeface="Calibri" pitchFamily="34" charset="-120"/>
               </a:rPr>
-              <a:t>‫אך מאי–אוגוסט ‪2026‬: ללא גידול נטו‬</a:t>
+              <a:t>‫בקצב של כ-‪11.5 TB‬ לחודש‬</a:t>
             </a:r>
             <a:endParaRPr lang="he-IL" sz="1100" dirty="0"/>
           </a:p>
@@ -6498,7 +6741,7 @@
         </p:nvSpPr>
         <p:spPr>
           <a:xfrm>
-            <a:off x="9741103" y="5481828"/>
+            <a:off x="9649663" y="5481828"/>
             <a:ext cx="146304" cy="100584"/>
           </a:xfrm>
           <a:prstGeom prst="rect">
@@ -6523,7 +6766,7 @@
         </p:nvSpPr>
         <p:spPr>
           <a:xfrm>
-            <a:off x="8323783" y="5431536"/>
+            <a:off x="8232343" y="5431536"/>
             <a:ext cx="1344168" cy="201168"/>
           </a:xfrm>
           <a:prstGeom prst="rect">
@@ -6551,7 +6794,7 @@
                 <a:ea typeface="Calibri" pitchFamily="34" charset="-122"/>
                 <a:cs typeface="Calibri" pitchFamily="34" charset="-120"/>
               </a:rPr>
-              <a:t>‫תחזית מגמה‬</a:t>
+              <a:t>‫תחזית‬</a:t>
             </a:r>
             <a:endParaRPr lang="he-IL" sz="1050" dirty="0"/>
           </a:p>
@@ -6565,74 +6808,7 @@
         </p:nvSpPr>
         <p:spPr>
           <a:xfrm>
-            <a:off x="8259775" y="5481828"/>
-            <a:ext cx="146304" cy="100584"/>
-          </a:xfrm>
-          <a:prstGeom prst="rect">
-            <a:avLst/>
-          </a:prstGeom>
-          <a:solidFill>
-            <a:srgbClr val="B07CFF"/>
-          </a:solidFill>
-          <a:ln w="12700">
-            <a:solidFill>
-              <a:srgbClr val="B07CFF"/>
-            </a:solidFill>
-            <a:prstDash val="solid"/>
-          </a:ln>
-        </p:spPr>
-      </p:sp>
-      <p:sp>
-        <p:nvSpPr>
-          <p:cNvPr id="24" name="Text 21"/>
-          <p:cNvSpPr/>
-          <p:nvPr/>
-        </p:nvSpPr>
-        <p:spPr>
-          <a:xfrm>
-            <a:off x="6842455" y="5431536"/>
-            <a:ext cx="1344168" cy="201168"/>
-          </a:xfrm>
-          <a:prstGeom prst="rect">
-            <a:avLst/>
-          </a:prstGeom>
-          <a:noFill/>
-          <a:ln/>
-        </p:spPr>
-        <p:txBody>
-          <a:bodyPr wrap="square" lIns="0" tIns="0" rIns="0" bIns="0" rtlCol="0" anchor="ctr"/>
-          <a:lstStyle/>
-          <a:p>
-            <a:pPr rtl="1" algn="r" indent="0" marL="0">
-              <a:lnSpc>
-                <a:spcPct val="100000"/>
-              </a:lnSpc>
-              <a:buNone/>
-            </a:pPr>
-            <a:r>
-              <a:rPr lang="he-IL" altLang="en-US" sz="1050" dirty="0">
-                <a:solidFill>
-                  <a:srgbClr val="91A0B7"/>
-                </a:solidFill>
-                <a:latin typeface="Calibri" pitchFamily="34" charset="0"/>
-                <a:ea typeface="Calibri" pitchFamily="34" charset="-122"/>
-                <a:cs typeface="Calibri" pitchFamily="34" charset="-120"/>
-              </a:rPr>
-              <a:t>‫תרחיש מואץ‬</a:t>
-            </a:r>
-            <a:endParaRPr lang="he-IL" sz="1050" dirty="0"/>
-          </a:p>
-        </p:txBody>
-      </p:sp>
-      <p:sp>
-        <p:nvSpPr>
-          <p:cNvPr id="25" name="Shape 22"/>
-          <p:cNvSpPr/>
-          <p:nvPr/>
-        </p:nvSpPr>
-        <p:spPr>
-          <a:xfrm>
-            <a:off x="6778447" y="5481828"/>
+            <a:off x="8076895" y="5481828"/>
             <a:ext cx="146304" cy="100584"/>
           </a:xfrm>
           <a:prstGeom prst="rect">
@@ -6651,13 +6827,13 @@
       </p:sp>
       <p:sp>
         <p:nvSpPr>
-          <p:cNvPr id="26" name="Text 23"/>
-          <p:cNvSpPr/>
-          <p:nvPr/>
-        </p:nvSpPr>
-        <p:spPr>
-          <a:xfrm>
-            <a:off x="5361127" y="5431536"/>
+          <p:cNvPr id="24" name="Text 21"/>
+          <p:cNvSpPr/>
+          <p:nvPr/>
+        </p:nvSpPr>
+        <p:spPr>
+          <a:xfrm>
+            <a:off x="6659575" y="5431536"/>
             <a:ext cx="1344168" cy="201168"/>
           </a:xfrm>
           <a:prstGeom prst="rect">
@@ -6693,13 +6869,13 @@
       </p:sp>
       <p:sp>
         <p:nvSpPr>
-          <p:cNvPr id="27" name="Shape 24"/>
-          <p:cNvSpPr/>
-          <p:nvPr/>
-        </p:nvSpPr>
-        <p:spPr>
-          <a:xfrm>
-            <a:off x="5297119" y="5481828"/>
+          <p:cNvPr id="25" name="Shape 22"/>
+          <p:cNvSpPr/>
+          <p:nvPr/>
+        </p:nvSpPr>
+        <p:spPr>
+          <a:xfrm>
+            <a:off x="6504127" y="5481828"/>
             <a:ext cx="146304" cy="100584"/>
           </a:xfrm>
           <a:prstGeom prst="rect">
@@ -6718,13 +6894,13 @@
       </p:sp>
       <p:sp>
         <p:nvSpPr>
-          <p:cNvPr id="28" name="Text 25"/>
-          <p:cNvSpPr/>
-          <p:nvPr/>
-        </p:nvSpPr>
-        <p:spPr>
-          <a:xfrm>
-            <a:off x="3879799" y="5431536"/>
+          <p:cNvPr id="26" name="Text 23"/>
+          <p:cNvSpPr/>
+          <p:nvPr/>
+        </p:nvSpPr>
+        <p:spPr>
+          <a:xfrm>
+            <a:off x="5086807" y="5431536"/>
             <a:ext cx="1344168" cy="201168"/>
           </a:xfrm>
           <a:prstGeom prst="rect">
@@ -6760,7 +6936,7 @@
       </p:sp>
       <p:sp>
         <p:nvSpPr>
-          <p:cNvPr id="29" name="Shape 26"/>
+          <p:cNvPr id="27" name="Shape 24"/>
           <p:cNvSpPr/>
           <p:nvPr/>
         </p:nvSpPr>
@@ -6785,7 +6961,7 @@
       </p:sp>
       <p:sp>
         <p:nvSpPr>
-          <p:cNvPr id="30" name="Shape 27"/>
+          <p:cNvPr id="28" name="Shape 25"/>
           <p:cNvSpPr/>
           <p:nvPr/>
         </p:nvSpPr>
@@ -6798,11 +6974,11 @@
             <a:avLst/>
           </a:prstGeom>
           <a:solidFill>
-            <a:srgbClr val="FF9F43"/>
+            <a:srgbClr val="FF6B7A"/>
           </a:solidFill>
           <a:ln w="12700">
             <a:solidFill>
-              <a:srgbClr val="FF9F43"/>
+              <a:srgbClr val="FF6B7A"/>
             </a:solidFill>
             <a:prstDash val="solid"/>
           </a:ln>
@@ -6810,7 +6986,7 @@
       </p:sp>
       <p:sp>
         <p:nvSpPr>
-          <p:cNvPr id="31" name="Text 28"/>
+          <p:cNvPr id="29" name="Text 26"/>
           <p:cNvSpPr/>
           <p:nvPr/>
         </p:nvSpPr>
@@ -6844,7 +7020,7 @@
                 <a:ea typeface="Calibri" pitchFamily="34" charset="-122"/>
                 <a:cs typeface="Calibri" pitchFamily="34" charset="-120"/>
               </a:rPr>
-              <a:t>‫ההרחבה הקודמת העלתה את הקיבולת מ-‪696 TB‬ ל-‪916 TB‬ באפריל ‪2025 — 220 TB‬, כלומר כ-‪22‬ חודשי מרווח בקצב המגמה הנוכחי.‬</a:t>
+              <a:t>‫קו התחזית חוצה את סף ‪80%‬ בדצמבר ‪2026‬. מכיוון שזמן האספקה מ-‪Dell‬ הוא כחודשיים, ה-‪PO‬ חייב לצאת באוקטובר כדי שהדיסקים יגיעו לפני החצייה.‬</a:t>
             </a:r>
             <a:endParaRPr lang="he-IL" sz="1150" dirty="0"/>
           </a:p>
@@ -6918,7 +7094,7 @@
                 <a:ea typeface="Calibri" pitchFamily="34" charset="-122"/>
                 <a:cs typeface="Calibri" pitchFamily="34" charset="-120"/>
               </a:rPr>
-              <a:t>‫תיקון לתחזית‬</a:t>
+              <a:t>‫לוח הזמנים הקריטי‬</a:t>
             </a:r>
             <a:endParaRPr lang="he-IL" sz="1100" dirty="0"/>
           </a:p>
@@ -6952,7 +7128,7 @@
               <a:buNone/>
             </a:pPr>
             <a:r>
-              <a:rPr lang="he-IL" altLang="en-US" sz="2500" b="1" dirty="0">
+              <a:rPr lang="he-IL" altLang="en-US" sz="2700" b="1" dirty="0">
                 <a:solidFill>
                   <a:srgbClr val="F4F7FB"/>
                 </a:solidFill>
@@ -6960,9 +7136,9 @@
                 <a:ea typeface="Calibri" pitchFamily="34" charset="-122"/>
                 <a:cs typeface="Calibri" pitchFamily="34" charset="-120"/>
               </a:rPr>
-              <a:t>‫סף ‪80%‬ לא ייחצה באוקטובר ‪2026‬ — אלא בין נובמבר ‪2026‬ למרץ ‪2027‬‬</a:t>
-            </a:r>
-            <a:endParaRPr lang="he-IL" sz="2500" dirty="0"/>
+              <a:t>‫שני תאריכים שונים — ואוקטובר הוא זה שתלוי בנו‬</a:t>
+            </a:r>
+            <a:endParaRPr lang="he-IL" sz="2700" dirty="0"/>
           </a:p>
         </p:txBody>
       </p:sp>
@@ -6999,12 +7175,12 @@
         </p:nvSpPr>
         <p:spPr>
           <a:xfrm>
-            <a:off x="8122615" y="2066544"/>
-            <a:ext cx="3246120" cy="1938528"/>
+            <a:off x="8122615" y="2029968"/>
+            <a:ext cx="3246120" cy="2048256"/>
           </a:xfrm>
           <a:prstGeom prst="roundRect">
             <a:avLst>
-              <a:gd name="adj" fmla="val 2358"/>
+              <a:gd name="adj" fmla="val 2232"/>
             </a:avLst>
           </a:prstGeom>
           <a:solidFill>
@@ -7026,227 +7202,7 @@
         </p:nvSpPr>
         <p:spPr>
           <a:xfrm>
-            <a:off x="10911535" y="2340864"/>
-            <a:ext cx="118872" cy="118872"/>
-          </a:xfrm>
-          <a:prstGeom prst="rect">
-            <a:avLst/>
-          </a:prstGeom>
-          <a:solidFill>
-            <a:srgbClr val="B07CFF"/>
-          </a:solidFill>
-          <a:ln w="12700">
-            <a:solidFill>
-              <a:srgbClr val="B07CFF"/>
-            </a:solidFill>
-            <a:prstDash val="solid"/>
-          </a:ln>
-        </p:spPr>
-      </p:sp>
-      <p:sp>
-        <p:nvSpPr>
-          <p:cNvPr id="7" name="Text 5"/>
-          <p:cNvSpPr/>
-          <p:nvPr/>
-        </p:nvSpPr>
-        <p:spPr>
-          <a:xfrm>
-            <a:off x="8396935" y="2267712"/>
-            <a:ext cx="2423160" cy="274320"/>
-          </a:xfrm>
-          <a:prstGeom prst="rect">
-            <a:avLst/>
-          </a:prstGeom>
-          <a:noFill/>
-          <a:ln/>
-        </p:spPr>
-        <p:txBody>
-          <a:bodyPr wrap="square" lIns="0" tIns="0" rIns="0" bIns="0" rtlCol="0" anchor="ctr"/>
-          <a:lstStyle/>
-          <a:p>
-            <a:pPr rtl="1" algn="r" indent="0" marL="0">
-              <a:lnSpc>
-                <a:spcPct val="100000"/>
-              </a:lnSpc>
-              <a:buNone/>
-            </a:pPr>
-            <a:r>
-              <a:rPr lang="he-IL" altLang="en-US" sz="1300" b="1" dirty="0">
-                <a:solidFill>
-                  <a:srgbClr val="F4F7FB"/>
-                </a:solidFill>
-                <a:latin typeface="Calibri" pitchFamily="34" charset="0"/>
-                <a:ea typeface="Calibri" pitchFamily="34" charset="-122"/>
-                <a:cs typeface="Calibri" pitchFamily="34" charset="-120"/>
-              </a:rPr>
-              <a:t>‫תרחיש מואץ‬</a:t>
-            </a:r>
-            <a:endParaRPr lang="he-IL" sz="1300" dirty="0"/>
-          </a:p>
-        </p:txBody>
-      </p:sp>
-      <p:sp>
-        <p:nvSpPr>
-          <p:cNvPr id="8" name="Text 6"/>
-          <p:cNvSpPr/>
-          <p:nvPr/>
-        </p:nvSpPr>
-        <p:spPr>
-          <a:xfrm>
-            <a:off x="8396935" y="2560320"/>
-            <a:ext cx="2697480" cy="237744"/>
-          </a:xfrm>
-          <a:prstGeom prst="rect">
-            <a:avLst/>
-          </a:prstGeom>
-          <a:noFill/>
-          <a:ln/>
-        </p:spPr>
-        <p:txBody>
-          <a:bodyPr wrap="square" lIns="0" tIns="0" rIns="0" bIns="0" rtlCol="0" anchor="ctr"/>
-          <a:lstStyle/>
-          <a:p>
-            <a:pPr rtl="1" algn="r" indent="0" marL="0">
-              <a:lnSpc>
-                <a:spcPct val="100000"/>
-              </a:lnSpc>
-              <a:buNone/>
-            </a:pPr>
-            <a:r>
-              <a:rPr lang="he-IL" altLang="en-US" sz="1150" dirty="0">
-                <a:solidFill>
-                  <a:srgbClr val="91A0B7"/>
-                </a:solidFill>
-                <a:latin typeface="Calibri" pitchFamily="34" charset="0"/>
-                <a:ea typeface="Calibri" pitchFamily="34" charset="-122"/>
-                <a:cs typeface="Calibri" pitchFamily="34" charset="-120"/>
-              </a:rPr>
-              <a:t>‫כ-‪23 TB‬ לחודש‬</a:t>
-            </a:r>
-            <a:endParaRPr lang="he-IL" sz="1150" dirty="0"/>
-          </a:p>
-        </p:txBody>
-      </p:sp>
-      <p:sp>
-        <p:nvSpPr>
-          <p:cNvPr id="9" name="Text 7"/>
-          <p:cNvSpPr/>
-          <p:nvPr/>
-        </p:nvSpPr>
-        <p:spPr>
-          <a:xfrm>
-            <a:off x="8396935" y="2889504"/>
-            <a:ext cx="2697480" cy="512064"/>
-          </a:xfrm>
-          <a:prstGeom prst="rect">
-            <a:avLst/>
-          </a:prstGeom>
-          <a:noFill/>
-          <a:ln/>
-        </p:spPr>
-        <p:txBody>
-          <a:bodyPr wrap="square" lIns="0" tIns="0" rIns="0" bIns="0" rtlCol="0" anchor="ctr"/>
-          <a:lstStyle/>
-          <a:p>
-            <a:pPr rtl="1" algn="r" indent="0" marL="0">
-              <a:lnSpc>
-                <a:spcPct val="100000"/>
-              </a:lnSpc>
-              <a:buNone/>
-            </a:pPr>
-            <a:r>
-              <a:rPr lang="he-IL" altLang="en-US" sz="2700" b="1" dirty="0">
-                <a:solidFill>
-                  <a:srgbClr val="B07CFF"/>
-                </a:solidFill>
-                <a:latin typeface="Calibri" pitchFamily="34" charset="0"/>
-                <a:ea typeface="Calibri" pitchFamily="34" charset="-122"/>
-                <a:cs typeface="Calibri" pitchFamily="34" charset="-120"/>
-              </a:rPr>
-              <a:t>‫נובמבר ‪2026‬‬</a:t>
-            </a:r>
-            <a:endParaRPr lang="he-IL" sz="2700" dirty="0"/>
-          </a:p>
-        </p:txBody>
-      </p:sp>
-      <p:sp>
-        <p:nvSpPr>
-          <p:cNvPr id="10" name="Text 8"/>
-          <p:cNvSpPr/>
-          <p:nvPr/>
-        </p:nvSpPr>
-        <p:spPr>
-          <a:xfrm>
-            <a:off x="8396935" y="3438144"/>
-            <a:ext cx="2697480" cy="457200"/>
-          </a:xfrm>
-          <a:prstGeom prst="rect">
-            <a:avLst/>
-          </a:prstGeom>
-          <a:noFill/>
-          <a:ln/>
-        </p:spPr>
-        <p:txBody>
-          <a:bodyPr wrap="square" lIns="0" tIns="0" rIns="0" bIns="0" rtlCol="0" anchor="t"/>
-          <a:lstStyle/>
-          <a:p>
-            <a:pPr rtl="1" algn="r" indent="0" marL="0">
-              <a:lnSpc>
-                <a:spcPct val="115000"/>
-              </a:lnSpc>
-              <a:buNone/>
-            </a:pPr>
-            <a:r>
-              <a:rPr lang="he-IL" altLang="en-US" sz="1100" dirty="0">
-                <a:solidFill>
-                  <a:srgbClr val="5E6E85"/>
-                </a:solidFill>
-                <a:latin typeface="Calibri" pitchFamily="34" charset="0"/>
-                <a:ea typeface="Calibri" pitchFamily="34" charset="-122"/>
-                <a:cs typeface="Calibri" pitchFamily="34" charset="-120"/>
-              </a:rPr>
-              <a:t>‫גבול אי-הוודאות העליון של הדשבורד‬</a:t>
-            </a:r>
-            <a:endParaRPr lang="he-IL" sz="1100" dirty="0"/>
-          </a:p>
-        </p:txBody>
-      </p:sp>
-      <p:sp>
-        <p:nvSpPr>
-          <p:cNvPr id="11" name="Shape 9"/>
-          <p:cNvSpPr/>
-          <p:nvPr/>
-        </p:nvSpPr>
-        <p:spPr>
-          <a:xfrm>
-            <a:off x="4474159" y="2066544"/>
-            <a:ext cx="3246120" cy="1938528"/>
-          </a:xfrm>
-          <a:prstGeom prst="roundRect">
-            <a:avLst>
-              <a:gd name="adj" fmla="val 2358"/>
-            </a:avLst>
-          </a:prstGeom>
-          <a:solidFill>
-            <a:srgbClr val="182133"/>
-          </a:solidFill>
-          <a:ln w="12700">
-            <a:solidFill>
-              <a:srgbClr val="23304A"/>
-            </a:solidFill>
-            <a:prstDash val="solid"/>
-          </a:ln>
-        </p:spPr>
-      </p:sp>
-      <p:sp>
-        <p:nvSpPr>
-          <p:cNvPr id="12" name="Shape 10"/>
-          <p:cNvSpPr/>
-          <p:nvPr/>
-        </p:nvSpPr>
-        <p:spPr>
-          <a:xfrm>
-            <a:off x="7263079" y="2340864"/>
+            <a:off x="10911535" y="2304288"/>
             <a:ext cx="118872" cy="118872"/>
           </a:xfrm>
           <a:prstGeom prst="rect">
@@ -7265,13 +7221,13 @@
       </p:sp>
       <p:sp>
         <p:nvSpPr>
-          <p:cNvPr id="13" name="Text 11"/>
-          <p:cNvSpPr/>
-          <p:nvPr/>
-        </p:nvSpPr>
-        <p:spPr>
-          <a:xfrm>
-            <a:off x="4748479" y="2267712"/>
+          <p:cNvPr id="7" name="Text 5"/>
+          <p:cNvSpPr/>
+          <p:nvPr/>
+        </p:nvSpPr>
+        <p:spPr>
+          <a:xfrm>
+            <a:off x="8396935" y="2231136"/>
             <a:ext cx="2423160" cy="274320"/>
           </a:xfrm>
           <a:prstGeom prst="rect">
@@ -7291,7 +7247,49 @@
               <a:buNone/>
             </a:pPr>
             <a:r>
-              <a:rPr lang="he-IL" altLang="en-US" sz="1300" b="1" dirty="0">
+              <a:rPr lang="he-IL" altLang="en-US" sz="1100" b="1" spc="80" kern="0" dirty="0">
+                <a:solidFill>
+                  <a:srgbClr val="91A0B7"/>
+                </a:solidFill>
+                <a:latin typeface="Calibri" pitchFamily="34" charset="0"/>
+                <a:ea typeface="Calibri" pitchFamily="34" charset="-122"/>
+                <a:cs typeface="Calibri" pitchFamily="34" charset="-120"/>
+              </a:rPr>
+              <a:t>‫היום‬</a:t>
+            </a:r>
+            <a:endParaRPr lang="he-IL" sz="1100" dirty="0"/>
+          </a:p>
+        </p:txBody>
+      </p:sp>
+      <p:sp>
+        <p:nvSpPr>
+          <p:cNvPr id="8" name="Text 6"/>
+          <p:cNvSpPr/>
+          <p:nvPr/>
+        </p:nvSpPr>
+        <p:spPr>
+          <a:xfrm>
+            <a:off x="8396935" y="2542032"/>
+            <a:ext cx="2697480" cy="365760"/>
+          </a:xfrm>
+          <a:prstGeom prst="rect">
+            <a:avLst/>
+          </a:prstGeom>
+          <a:noFill/>
+          <a:ln/>
+        </p:spPr>
+        <p:txBody>
+          <a:bodyPr wrap="square" lIns="0" tIns="0" rIns="0" bIns="0" rtlCol="0" anchor="ctr"/>
+          <a:lstStyle/>
+          <a:p>
+            <a:pPr rtl="1" algn="r" indent="0" marL="0">
+              <a:lnSpc>
+                <a:spcPct val="100000"/>
+              </a:lnSpc>
+              <a:buNone/>
+            </a:pPr>
+            <a:r>
+              <a:rPr lang="he-IL" altLang="en-US" sz="1900" b="1" dirty="0">
                 <a:solidFill>
                   <a:srgbClr val="F4F7FB"/>
                 </a:solidFill>
@@ -7299,22 +7297,22 @@
                 <a:ea typeface="Calibri" pitchFamily="34" charset="-122"/>
                 <a:cs typeface="Calibri" pitchFamily="34" charset="-120"/>
               </a:rPr>
-              <a:t>‫תחזית הדשבורד‬</a:t>
-            </a:r>
-            <a:endParaRPr lang="he-IL" sz="1300" dirty="0"/>
-          </a:p>
-        </p:txBody>
-      </p:sp>
-      <p:sp>
-        <p:nvSpPr>
-          <p:cNvPr id="14" name="Text 12"/>
-          <p:cNvSpPr/>
-          <p:nvPr/>
-        </p:nvSpPr>
-        <p:spPr>
-          <a:xfrm>
-            <a:off x="4748479" y="2560320"/>
-            <a:ext cx="2697480" cy="237744"/>
+              <a:t>‫אוגוסט ‪2026‬‬</a:t>
+            </a:r>
+            <a:endParaRPr lang="he-IL" sz="1900" dirty="0"/>
+          </a:p>
+        </p:txBody>
+      </p:sp>
+      <p:sp>
+        <p:nvSpPr>
+          <p:cNvPr id="9" name="Text 7"/>
+          <p:cNvSpPr/>
+          <p:nvPr/>
+        </p:nvSpPr>
+        <p:spPr>
+          <a:xfrm>
+            <a:off x="8396935" y="2944368"/>
+            <a:ext cx="2697480" cy="457200"/>
           </a:xfrm>
           <a:prstGeom prst="rect">
             <a:avLst/>
@@ -7333,30 +7331,72 @@
               <a:buNone/>
             </a:pPr>
             <a:r>
-              <a:rPr lang="he-IL" altLang="en-US" sz="1150" dirty="0">
-                <a:solidFill>
-                  <a:srgbClr val="91A0B7"/>
-                </a:solidFill>
-                <a:latin typeface="Calibri" pitchFamily="34" charset="0"/>
-                <a:ea typeface="Calibri" pitchFamily="34" charset="-122"/>
-                <a:cs typeface="Calibri" pitchFamily="34" charset="-120"/>
-              </a:rPr>
-              <a:t>‫כ-‪14 TB‬ לחודש‬</a:t>
-            </a:r>
-            <a:endParaRPr lang="he-IL" sz="1150" dirty="0"/>
-          </a:p>
-        </p:txBody>
-      </p:sp>
-      <p:sp>
-        <p:nvSpPr>
-          <p:cNvPr id="15" name="Text 13"/>
-          <p:cNvSpPr/>
-          <p:nvPr/>
-        </p:nvSpPr>
-        <p:spPr>
-          <a:xfrm>
-            <a:off x="4748479" y="2889504"/>
-            <a:ext cx="2697480" cy="512064"/>
+              <a:rPr lang="he-IL" altLang="en-US" sz="2600" b="1" dirty="0">
+                <a:solidFill>
+                  <a:srgbClr val="FF9F43"/>
+                </a:solidFill>
+                <a:latin typeface="Calibri" pitchFamily="34" charset="0"/>
+                <a:ea typeface="Calibri" pitchFamily="34" charset="-122"/>
+                <a:cs typeface="Calibri" pitchFamily="34" charset="-120"/>
+              </a:rPr>
+              <a:t>‫‪75%‬‬</a:t>
+            </a:r>
+            <a:endParaRPr lang="he-IL" sz="2600" dirty="0"/>
+          </a:p>
+        </p:txBody>
+      </p:sp>
+      <p:sp>
+        <p:nvSpPr>
+          <p:cNvPr id="10" name="Text 8"/>
+          <p:cNvSpPr/>
+          <p:nvPr/>
+        </p:nvSpPr>
+        <p:spPr>
+          <a:xfrm>
+            <a:off x="8396935" y="3438144"/>
+            <a:ext cx="2697480" cy="548640"/>
+          </a:xfrm>
+          <a:prstGeom prst="rect">
+            <a:avLst/>
+          </a:prstGeom>
+          <a:noFill/>
+          <a:ln/>
+        </p:spPr>
+        <p:txBody>
+          <a:bodyPr wrap="square" lIns="0" tIns="0" rIns="0" bIns="0" rtlCol="0" anchor="t"/>
+          <a:lstStyle/>
+          <a:p>
+            <a:pPr rtl="1" algn="r" indent="0" marL="0">
+              <a:lnSpc>
+                <a:spcPct val="118000"/>
+              </a:lnSpc>
+              <a:buNone/>
+            </a:pPr>
+            <a:r>
+              <a:rPr lang="he-IL" altLang="en-US" sz="1100" dirty="0">
+                <a:solidFill>
+                  <a:srgbClr val="5E6E85"/>
+                </a:solidFill>
+                <a:latin typeface="Calibri" pitchFamily="34" charset="0"/>
+                <a:ea typeface="Calibri" pitchFamily="34" charset="-122"/>
+                <a:cs typeface="Calibri" pitchFamily="34" charset="-120"/>
+              </a:rPr>
+              <a:t>‫‪687 TB‬ מתוך ‪916 TB‬. נותרו ‪46 TB‬ עד לסף.‬</a:t>
+            </a:r>
+            <a:endParaRPr lang="he-IL" sz="1100" dirty="0"/>
+          </a:p>
+        </p:txBody>
+      </p:sp>
+      <p:sp>
+        <p:nvSpPr>
+          <p:cNvPr id="11" name="Text 9"/>
+          <p:cNvSpPr/>
+          <p:nvPr/>
+        </p:nvSpPr>
+        <p:spPr>
+          <a:xfrm>
+            <a:off x="7720279" y="2944368"/>
+            <a:ext cx="402336" cy="457200"/>
           </a:xfrm>
           <a:prstGeom prst="rect">
             <a:avLst/>
@@ -7368,56 +7408,14 @@
           <a:bodyPr wrap="square" lIns="0" tIns="0" rIns="0" bIns="0" rtlCol="0" anchor="ctr"/>
           <a:lstStyle/>
           <a:p>
-            <a:pPr rtl="1" algn="r" indent="0" marL="0">
+            <a:pPr algn="ctr" indent="0" marL="0">
               <a:lnSpc>
                 <a:spcPct val="100000"/>
               </a:lnSpc>
               <a:buNone/>
             </a:pPr>
             <a:r>
-              <a:rPr lang="he-IL" altLang="en-US" sz="2700" b="1" dirty="0">
-                <a:solidFill>
-                  <a:srgbClr val="FF9F43"/>
-                </a:solidFill>
-                <a:latin typeface="Calibri" pitchFamily="34" charset="0"/>
-                <a:ea typeface="Calibri" pitchFamily="34" charset="-122"/>
-                <a:cs typeface="Calibri" pitchFamily="34" charset="-120"/>
-              </a:rPr>
-              <a:t>‫ינואר ‪2027‬‬</a:t>
-            </a:r>
-            <a:endParaRPr lang="he-IL" sz="2700" dirty="0"/>
-          </a:p>
-        </p:txBody>
-      </p:sp>
-      <p:sp>
-        <p:nvSpPr>
-          <p:cNvPr id="16" name="Text 14"/>
-          <p:cNvSpPr/>
-          <p:nvPr/>
-        </p:nvSpPr>
-        <p:spPr>
-          <a:xfrm>
-            <a:off x="4748479" y="3438144"/>
-            <a:ext cx="2697480" cy="457200"/>
-          </a:xfrm>
-          <a:prstGeom prst="rect">
-            <a:avLst/>
-          </a:prstGeom>
-          <a:noFill/>
-          <a:ln/>
-        </p:spPr>
-        <p:txBody>
-          <a:bodyPr wrap="square" lIns="0" tIns="0" rIns="0" bIns="0" rtlCol="0" anchor="t"/>
-          <a:lstStyle/>
-          <a:p>
-            <a:pPr rtl="1" algn="r" indent="0" marL="0">
-              <a:lnSpc>
-                <a:spcPct val="115000"/>
-              </a:lnSpc>
-              <a:buNone/>
-            </a:pPr>
-            <a:r>
-              <a:rPr lang="he-IL" altLang="en-US" sz="1100" dirty="0">
+              <a:rPr lang="en-US" altLang="en-US" sz="1800" b="1" dirty="0">
                 <a:solidFill>
                   <a:srgbClr val="5E6E85"/>
                 </a:solidFill>
@@ -7425,26 +7423,26 @@
                 <a:ea typeface="Calibri" pitchFamily="34" charset="-122"/>
                 <a:cs typeface="Calibri" pitchFamily="34" charset="-120"/>
               </a:rPr>
-              <a:t>‫שיפוע סדרת התחזית הקיימת‬</a:t>
-            </a:r>
-            <a:endParaRPr lang="he-IL" sz="1100" dirty="0"/>
-          </a:p>
-        </p:txBody>
-      </p:sp>
-      <p:sp>
-        <p:nvSpPr>
-          <p:cNvPr id="17" name="Shape 15"/>
-          <p:cNvSpPr/>
-          <p:nvPr/>
-        </p:nvSpPr>
-        <p:spPr>
-          <a:xfrm>
-            <a:off x="825703" y="2066544"/>
-            <a:ext cx="3246120" cy="1938528"/>
+              <a:t>←</a:t>
+            </a:r>
+            <a:endParaRPr lang="en-US" sz="1800" dirty="0"/>
+          </a:p>
+        </p:txBody>
+      </p:sp>
+      <p:sp>
+        <p:nvSpPr>
+          <p:cNvPr id="12" name="Shape 10"/>
+          <p:cNvSpPr/>
+          <p:nvPr/>
+        </p:nvSpPr>
+        <p:spPr>
+          <a:xfrm>
+            <a:off x="4474159" y="2029968"/>
+            <a:ext cx="3246120" cy="2048256"/>
           </a:xfrm>
           <a:prstGeom prst="roundRect">
             <a:avLst>
-              <a:gd name="adj" fmla="val 2358"/>
+              <a:gd name="adj" fmla="val 2232"/>
             </a:avLst>
           </a:prstGeom>
           <a:solidFill>
@@ -7452,7 +7450,7 @@
           </a:solidFill>
           <a:ln w="12700">
             <a:solidFill>
-              <a:srgbClr val="23304A"/>
+              <a:srgbClr val="2E5F6B"/>
             </a:solidFill>
             <a:prstDash val="solid"/>
           </a:ln>
@@ -7460,24 +7458,24 @@
       </p:sp>
       <p:sp>
         <p:nvSpPr>
-          <p:cNvPr id="18" name="Shape 16"/>
-          <p:cNvSpPr/>
-          <p:nvPr/>
-        </p:nvSpPr>
-        <p:spPr>
-          <a:xfrm>
-            <a:off x="3614623" y="2340864"/>
+          <p:cNvPr id="13" name="Shape 11"/>
+          <p:cNvSpPr/>
+          <p:nvPr/>
+        </p:nvSpPr>
+        <p:spPr>
+          <a:xfrm>
+            <a:off x="7263079" y="2304288"/>
             <a:ext cx="118872" cy="118872"/>
           </a:xfrm>
           <a:prstGeom prst="rect">
             <a:avLst/>
           </a:prstGeom>
           <a:solidFill>
-            <a:srgbClr val="3DDC97"/>
+            <a:srgbClr val="3DD9EB"/>
           </a:solidFill>
           <a:ln w="12700">
             <a:solidFill>
-              <a:srgbClr val="3DDC97"/>
+              <a:srgbClr val="3DD9EB"/>
             </a:solidFill>
             <a:prstDash val="solid"/>
           </a:ln>
@@ -7485,13 +7483,13 @@
       </p:sp>
       <p:sp>
         <p:nvSpPr>
-          <p:cNvPr id="19" name="Text 17"/>
-          <p:cNvSpPr/>
-          <p:nvPr/>
-        </p:nvSpPr>
-        <p:spPr>
-          <a:xfrm>
-            <a:off x="1100023" y="2267712"/>
+          <p:cNvPr id="14" name="Text 12"/>
+          <p:cNvSpPr/>
+          <p:nvPr/>
+        </p:nvSpPr>
+        <p:spPr>
+          <a:xfrm>
+            <a:off x="4748479" y="2231136"/>
             <a:ext cx="2423160" cy="274320"/>
           </a:xfrm>
           <a:prstGeom prst="rect">
@@ -7511,7 +7509,49 @@
               <a:buNone/>
             </a:pPr>
             <a:r>
-              <a:rPr lang="he-IL" altLang="en-US" sz="1300" b="1" dirty="0">
+              <a:rPr lang="he-IL" altLang="en-US" sz="1100" b="1" spc="80" kern="0" dirty="0">
+                <a:solidFill>
+                  <a:srgbClr val="91A0B7"/>
+                </a:solidFill>
+                <a:latin typeface="Calibri" pitchFamily="34" charset="0"/>
+                <a:ea typeface="Calibri" pitchFamily="34" charset="-122"/>
+                <a:cs typeface="Calibri" pitchFamily="34" charset="-120"/>
+              </a:rPr>
+              <a:t>‫החלון להחלטה‬</a:t>
+            </a:r>
+            <a:endParaRPr lang="he-IL" sz="1100" dirty="0"/>
+          </a:p>
+        </p:txBody>
+      </p:sp>
+      <p:sp>
+        <p:nvSpPr>
+          <p:cNvPr id="15" name="Text 13"/>
+          <p:cNvSpPr/>
+          <p:nvPr/>
+        </p:nvSpPr>
+        <p:spPr>
+          <a:xfrm>
+            <a:off x="4748479" y="2542032"/>
+            <a:ext cx="2697480" cy="365760"/>
+          </a:xfrm>
+          <a:prstGeom prst="rect">
+            <a:avLst/>
+          </a:prstGeom>
+          <a:noFill/>
+          <a:ln/>
+        </p:spPr>
+        <p:txBody>
+          <a:bodyPr wrap="square" lIns="0" tIns="0" rIns="0" bIns="0" rtlCol="0" anchor="ctr"/>
+          <a:lstStyle/>
+          <a:p>
+            <a:pPr rtl="1" algn="r" indent="0" marL="0">
+              <a:lnSpc>
+                <a:spcPct val="100000"/>
+              </a:lnSpc>
+              <a:buNone/>
+            </a:pPr>
+            <a:r>
+              <a:rPr lang="he-IL" altLang="en-US" sz="1900" b="1" dirty="0">
                 <a:solidFill>
                   <a:srgbClr val="F4F7FB"/>
                 </a:solidFill>
@@ -7519,22 +7559,22 @@
                 <a:ea typeface="Calibri" pitchFamily="34" charset="-122"/>
                 <a:cs typeface="Calibri" pitchFamily="34" charset="-120"/>
               </a:rPr>
-              <a:t>‫תרחיש מגמה‬</a:t>
-            </a:r>
-            <a:endParaRPr lang="he-IL" sz="1300" dirty="0"/>
-          </a:p>
-        </p:txBody>
-      </p:sp>
-      <p:sp>
-        <p:nvSpPr>
-          <p:cNvPr id="20" name="Text 18"/>
-          <p:cNvSpPr/>
-          <p:nvPr/>
-        </p:nvSpPr>
-        <p:spPr>
-          <a:xfrm>
-            <a:off x="1100023" y="2560320"/>
-            <a:ext cx="2697480" cy="237744"/>
+              <a:t>‫אוקטובר ‪2026‬‬</a:t>
+            </a:r>
+            <a:endParaRPr lang="he-IL" sz="1900" dirty="0"/>
+          </a:p>
+        </p:txBody>
+      </p:sp>
+      <p:sp>
+        <p:nvSpPr>
+          <p:cNvPr id="16" name="Text 14"/>
+          <p:cNvSpPr/>
+          <p:nvPr/>
+        </p:nvSpPr>
+        <p:spPr>
+          <a:xfrm>
+            <a:off x="4748479" y="2944368"/>
+            <a:ext cx="2697480" cy="457200"/>
           </a:xfrm>
           <a:prstGeom prst="rect">
             <a:avLst/>
@@ -7553,30 +7593,72 @@
               <a:buNone/>
             </a:pPr>
             <a:r>
-              <a:rPr lang="he-IL" altLang="en-US" sz="1150" dirty="0">
-                <a:solidFill>
-                  <a:srgbClr val="91A0B7"/>
-                </a:solidFill>
-                <a:latin typeface="Calibri" pitchFamily="34" charset="0"/>
-                <a:ea typeface="Calibri" pitchFamily="34" charset="-122"/>
-                <a:cs typeface="Calibri" pitchFamily="34" charset="-120"/>
-              </a:rPr>
-              <a:t>‫‪9.9 TB‬ לחודש‬</a:t>
-            </a:r>
-            <a:endParaRPr lang="he-IL" sz="1150" dirty="0"/>
-          </a:p>
-        </p:txBody>
-      </p:sp>
-      <p:sp>
-        <p:nvSpPr>
-          <p:cNvPr id="21" name="Text 19"/>
-          <p:cNvSpPr/>
-          <p:nvPr/>
-        </p:nvSpPr>
-        <p:spPr>
-          <a:xfrm>
-            <a:off x="1100023" y="2889504"/>
-            <a:ext cx="2697480" cy="512064"/>
+              <a:rPr lang="he-IL" altLang="en-US" sz="2600" b="1" dirty="0">
+                <a:solidFill>
+                  <a:srgbClr val="3DD9EB"/>
+                </a:solidFill>
+                <a:latin typeface="Calibri" pitchFamily="34" charset="0"/>
+                <a:ea typeface="Calibri" pitchFamily="34" charset="-122"/>
+                <a:cs typeface="Calibri" pitchFamily="34" charset="-120"/>
+              </a:rPr>
+              <a:t>‫הוצאת ‪PO‬‬</a:t>
+            </a:r>
+            <a:endParaRPr lang="he-IL" sz="2600" dirty="0"/>
+          </a:p>
+        </p:txBody>
+      </p:sp>
+      <p:sp>
+        <p:nvSpPr>
+          <p:cNvPr id="17" name="Text 15"/>
+          <p:cNvSpPr/>
+          <p:nvPr/>
+        </p:nvSpPr>
+        <p:spPr>
+          <a:xfrm>
+            <a:off x="4748479" y="3438144"/>
+            <a:ext cx="2697480" cy="548640"/>
+          </a:xfrm>
+          <a:prstGeom prst="rect">
+            <a:avLst/>
+          </a:prstGeom>
+          <a:noFill/>
+          <a:ln/>
+        </p:spPr>
+        <p:txBody>
+          <a:bodyPr wrap="square" lIns="0" tIns="0" rIns="0" bIns="0" rtlCol="0" anchor="t"/>
+          <a:lstStyle/>
+          <a:p>
+            <a:pPr rtl="1" algn="r" indent="0" marL="0">
+              <a:lnSpc>
+                <a:spcPct val="118000"/>
+              </a:lnSpc>
+              <a:buNone/>
+            </a:pPr>
+            <a:r>
+              <a:rPr lang="he-IL" altLang="en-US" sz="1100" dirty="0">
+                <a:solidFill>
+                  <a:srgbClr val="5E6E85"/>
+                </a:solidFill>
+                <a:latin typeface="Calibri" pitchFamily="34" charset="0"/>
+                <a:ea typeface="Calibri" pitchFamily="34" charset="-122"/>
+                <a:cs typeface="Calibri" pitchFamily="34" charset="-120"/>
+              </a:rPr>
+              <a:t>‫חודשיים זמן אספקה מ-‪Dell‬. זהו המועד האחרון שעדיין מביא דיסקים לפני דצמבר.‬</a:t>
+            </a:r>
+            <a:endParaRPr lang="he-IL" sz="1100" dirty="0"/>
+          </a:p>
+        </p:txBody>
+      </p:sp>
+      <p:sp>
+        <p:nvSpPr>
+          <p:cNvPr id="18" name="Text 16"/>
+          <p:cNvSpPr/>
+          <p:nvPr/>
+        </p:nvSpPr>
+        <p:spPr>
+          <a:xfrm>
+            <a:off x="4071823" y="2944368"/>
+            <a:ext cx="402336" cy="457200"/>
           </a:xfrm>
           <a:prstGeom prst="rect">
             <a:avLst/>
@@ -7588,56 +7670,14 @@
           <a:bodyPr wrap="square" lIns="0" tIns="0" rIns="0" bIns="0" rtlCol="0" anchor="ctr"/>
           <a:lstStyle/>
           <a:p>
-            <a:pPr rtl="1" algn="r" indent="0" marL="0">
+            <a:pPr algn="ctr" indent="0" marL="0">
               <a:lnSpc>
                 <a:spcPct val="100000"/>
               </a:lnSpc>
               <a:buNone/>
             </a:pPr>
             <a:r>
-              <a:rPr lang="he-IL" altLang="en-US" sz="2700" b="1" dirty="0">
-                <a:solidFill>
-                  <a:srgbClr val="3DDC97"/>
-                </a:solidFill>
-                <a:latin typeface="Calibri" pitchFamily="34" charset="0"/>
-                <a:ea typeface="Calibri" pitchFamily="34" charset="-122"/>
-                <a:cs typeface="Calibri" pitchFamily="34" charset="-120"/>
-              </a:rPr>
-              <a:t>‫מרץ ‪2027‬‬</a:t>
-            </a:r>
-            <a:endParaRPr lang="he-IL" sz="2700" dirty="0"/>
-          </a:p>
-        </p:txBody>
-      </p:sp>
-      <p:sp>
-        <p:nvSpPr>
-          <p:cNvPr id="22" name="Text 20"/>
-          <p:cNvSpPr/>
-          <p:nvPr/>
-        </p:nvSpPr>
-        <p:spPr>
-          <a:xfrm>
-            <a:off x="1100023" y="3438144"/>
-            <a:ext cx="2697480" cy="457200"/>
-          </a:xfrm>
-          <a:prstGeom prst="rect">
-            <a:avLst/>
-          </a:prstGeom>
-          <a:noFill/>
-          <a:ln/>
-        </p:spPr>
-        <p:txBody>
-          <a:bodyPr wrap="square" lIns="0" tIns="0" rIns="0" bIns="0" rtlCol="0" anchor="t"/>
-          <a:lstStyle/>
-          <a:p>
-            <a:pPr rtl="1" algn="r" indent="0" marL="0">
-              <a:lnSpc>
-                <a:spcPct val="115000"/>
-              </a:lnSpc>
-              <a:buNone/>
-            </a:pPr>
-            <a:r>
-              <a:rPr lang="he-IL" altLang="en-US" sz="1100" dirty="0">
+              <a:rPr lang="en-US" altLang="en-US" sz="1800" b="1" dirty="0">
                 <a:solidFill>
                   <a:srgbClr val="5E6E85"/>
                 </a:solidFill>
@@ -7645,26 +7685,246 @@
                 <a:ea typeface="Calibri" pitchFamily="34" charset="-122"/>
                 <a:cs typeface="Calibri" pitchFamily="34" charset="-120"/>
               </a:rPr>
-              <a:t>‫ממוצע ‪12‬ החודשים האחרונים בפועל‬</a:t>
-            </a:r>
-            <a:endParaRPr lang="he-IL" sz="1100" dirty="0"/>
-          </a:p>
-        </p:txBody>
-      </p:sp>
-      <p:sp>
-        <p:nvSpPr>
-          <p:cNvPr id="23" name="Shape 21"/>
-          <p:cNvSpPr/>
-          <p:nvPr/>
-        </p:nvSpPr>
-        <p:spPr>
-          <a:xfrm>
-            <a:off x="822960" y="4261104"/>
-            <a:ext cx="10545775" cy="1243584"/>
+              <a:t>←</a:t>
+            </a:r>
+            <a:endParaRPr lang="en-US" sz="1800" dirty="0"/>
+          </a:p>
+        </p:txBody>
+      </p:sp>
+      <p:sp>
+        <p:nvSpPr>
+          <p:cNvPr id="19" name="Shape 17"/>
+          <p:cNvSpPr/>
+          <p:nvPr/>
+        </p:nvSpPr>
+        <p:spPr>
+          <a:xfrm>
+            <a:off x="825703" y="2029968"/>
+            <a:ext cx="3246120" cy="2048256"/>
           </a:xfrm>
           <a:prstGeom prst="roundRect">
             <a:avLst>
-              <a:gd name="adj" fmla="val 3676"/>
+              <a:gd name="adj" fmla="val 2232"/>
+            </a:avLst>
+          </a:prstGeom>
+          <a:solidFill>
+            <a:srgbClr val="182133"/>
+          </a:solidFill>
+          <a:ln w="12700">
+            <a:solidFill>
+              <a:srgbClr val="5A2A38"/>
+            </a:solidFill>
+            <a:prstDash val="solid"/>
+          </a:ln>
+        </p:spPr>
+      </p:sp>
+      <p:sp>
+        <p:nvSpPr>
+          <p:cNvPr id="20" name="Shape 18"/>
+          <p:cNvSpPr/>
+          <p:nvPr/>
+        </p:nvSpPr>
+        <p:spPr>
+          <a:xfrm>
+            <a:off x="3614623" y="2304288"/>
+            <a:ext cx="118872" cy="118872"/>
+          </a:xfrm>
+          <a:prstGeom prst="rect">
+            <a:avLst/>
+          </a:prstGeom>
+          <a:solidFill>
+            <a:srgbClr val="FF6B7A"/>
+          </a:solidFill>
+          <a:ln w="12700">
+            <a:solidFill>
+              <a:srgbClr val="FF6B7A"/>
+            </a:solidFill>
+            <a:prstDash val="solid"/>
+          </a:ln>
+        </p:spPr>
+      </p:sp>
+      <p:sp>
+        <p:nvSpPr>
+          <p:cNvPr id="21" name="Text 19"/>
+          <p:cNvSpPr/>
+          <p:nvPr/>
+        </p:nvSpPr>
+        <p:spPr>
+          <a:xfrm>
+            <a:off x="1100023" y="2231136"/>
+            <a:ext cx="2423160" cy="274320"/>
+          </a:xfrm>
+          <a:prstGeom prst="rect">
+            <a:avLst/>
+          </a:prstGeom>
+          <a:noFill/>
+          <a:ln/>
+        </p:spPr>
+        <p:txBody>
+          <a:bodyPr wrap="square" lIns="0" tIns="0" rIns="0" bIns="0" rtlCol="0" anchor="ctr"/>
+          <a:lstStyle/>
+          <a:p>
+            <a:pPr rtl="1" algn="r" indent="0" marL="0">
+              <a:lnSpc>
+                <a:spcPct val="100000"/>
+              </a:lnSpc>
+              <a:buNone/>
+            </a:pPr>
+            <a:r>
+              <a:rPr lang="he-IL" altLang="en-US" sz="1100" b="1" spc="80" kern="0" dirty="0">
+                <a:solidFill>
+                  <a:srgbClr val="91A0B7"/>
+                </a:solidFill>
+                <a:latin typeface="Calibri" pitchFamily="34" charset="0"/>
+                <a:ea typeface="Calibri" pitchFamily="34" charset="-122"/>
+                <a:cs typeface="Calibri" pitchFamily="34" charset="-120"/>
+              </a:rPr>
+              <a:t>‫הסף‬</a:t>
+            </a:r>
+            <a:endParaRPr lang="he-IL" sz="1100" dirty="0"/>
+          </a:p>
+        </p:txBody>
+      </p:sp>
+      <p:sp>
+        <p:nvSpPr>
+          <p:cNvPr id="22" name="Text 20"/>
+          <p:cNvSpPr/>
+          <p:nvPr/>
+        </p:nvSpPr>
+        <p:spPr>
+          <a:xfrm>
+            <a:off x="1100023" y="2542032"/>
+            <a:ext cx="2697480" cy="365760"/>
+          </a:xfrm>
+          <a:prstGeom prst="rect">
+            <a:avLst/>
+          </a:prstGeom>
+          <a:noFill/>
+          <a:ln/>
+        </p:spPr>
+        <p:txBody>
+          <a:bodyPr wrap="square" lIns="0" tIns="0" rIns="0" bIns="0" rtlCol="0" anchor="ctr"/>
+          <a:lstStyle/>
+          <a:p>
+            <a:pPr rtl="1" algn="r" indent="0" marL="0">
+              <a:lnSpc>
+                <a:spcPct val="100000"/>
+              </a:lnSpc>
+              <a:buNone/>
+            </a:pPr>
+            <a:r>
+              <a:rPr lang="he-IL" altLang="en-US" sz="1900" b="1" dirty="0">
+                <a:solidFill>
+                  <a:srgbClr val="F4F7FB"/>
+                </a:solidFill>
+                <a:latin typeface="Calibri" pitchFamily="34" charset="0"/>
+                <a:ea typeface="Calibri" pitchFamily="34" charset="-122"/>
+                <a:cs typeface="Calibri" pitchFamily="34" charset="-120"/>
+              </a:rPr>
+              <a:t>‫דצמבר ‪2026‬‬</a:t>
+            </a:r>
+            <a:endParaRPr lang="he-IL" sz="1900" dirty="0"/>
+          </a:p>
+        </p:txBody>
+      </p:sp>
+      <p:sp>
+        <p:nvSpPr>
+          <p:cNvPr id="23" name="Text 21"/>
+          <p:cNvSpPr/>
+          <p:nvPr/>
+        </p:nvSpPr>
+        <p:spPr>
+          <a:xfrm>
+            <a:off x="1100023" y="2944368"/>
+            <a:ext cx="2697480" cy="457200"/>
+          </a:xfrm>
+          <a:prstGeom prst="rect">
+            <a:avLst/>
+          </a:prstGeom>
+          <a:noFill/>
+          <a:ln/>
+        </p:spPr>
+        <p:txBody>
+          <a:bodyPr wrap="square" lIns="0" tIns="0" rIns="0" bIns="0" rtlCol="0" anchor="ctr"/>
+          <a:lstStyle/>
+          <a:p>
+            <a:pPr rtl="1" algn="r" indent="0" marL="0">
+              <a:lnSpc>
+                <a:spcPct val="100000"/>
+              </a:lnSpc>
+              <a:buNone/>
+            </a:pPr>
+            <a:r>
+              <a:rPr lang="he-IL" altLang="en-US" sz="2600" b="1" dirty="0">
+                <a:solidFill>
+                  <a:srgbClr val="FF6B7A"/>
+                </a:solidFill>
+                <a:latin typeface="Calibri" pitchFamily="34" charset="0"/>
+                <a:ea typeface="Calibri" pitchFamily="34" charset="-122"/>
+                <a:cs typeface="Calibri" pitchFamily="34" charset="-120"/>
+              </a:rPr>
+              <a:t>‫‪80%‬‬</a:t>
+            </a:r>
+            <a:endParaRPr lang="he-IL" sz="2600" dirty="0"/>
+          </a:p>
+        </p:txBody>
+      </p:sp>
+      <p:sp>
+        <p:nvSpPr>
+          <p:cNvPr id="24" name="Text 22"/>
+          <p:cNvSpPr/>
+          <p:nvPr/>
+        </p:nvSpPr>
+        <p:spPr>
+          <a:xfrm>
+            <a:off x="1100023" y="3438144"/>
+            <a:ext cx="2697480" cy="548640"/>
+          </a:xfrm>
+          <a:prstGeom prst="rect">
+            <a:avLst/>
+          </a:prstGeom>
+          <a:noFill/>
+          <a:ln/>
+        </p:spPr>
+        <p:txBody>
+          <a:bodyPr wrap="square" lIns="0" tIns="0" rIns="0" bIns="0" rtlCol="0" anchor="t"/>
+          <a:lstStyle/>
+          <a:p>
+            <a:pPr rtl="1" algn="r" indent="0" marL="0">
+              <a:lnSpc>
+                <a:spcPct val="118000"/>
+              </a:lnSpc>
+              <a:buNone/>
+            </a:pPr>
+            <a:r>
+              <a:rPr lang="he-IL" altLang="en-US" sz="1100" dirty="0">
+                <a:solidFill>
+                  <a:srgbClr val="5E6E85"/>
+                </a:solidFill>
+                <a:latin typeface="Calibri" pitchFamily="34" charset="0"/>
+                <a:ea typeface="Calibri" pitchFamily="34" charset="-122"/>
+                <a:cs typeface="Calibri" pitchFamily="34" charset="-120"/>
+              </a:rPr>
+              <a:t>‫‪733 TB‬. מעל הסף הביצועים נפגעים והסיכון לזמינות המערכת עולה.‬</a:t>
+            </a:r>
+            <a:endParaRPr lang="he-IL" sz="1100" dirty="0"/>
+          </a:p>
+        </p:txBody>
+      </p:sp>
+      <p:sp>
+        <p:nvSpPr>
+          <p:cNvPr id="25" name="Shape 23"/>
+          <p:cNvSpPr/>
+          <p:nvPr/>
+        </p:nvSpPr>
+        <p:spPr>
+          <a:xfrm>
+            <a:off x="822960" y="4315968"/>
+            <a:ext cx="10545775" cy="1188720"/>
+          </a:xfrm>
+          <a:prstGeom prst="roundRect">
+            <a:avLst>
+              <a:gd name="adj" fmla="val 3846"/>
             </a:avLst>
           </a:prstGeom>
           <a:solidFill>
@@ -7680,13 +7940,13 @@
       </p:sp>
       <p:sp>
         <p:nvSpPr>
-          <p:cNvPr id="24" name="Shape 22"/>
-          <p:cNvSpPr/>
-          <p:nvPr/>
-        </p:nvSpPr>
-        <p:spPr>
-          <a:xfrm>
-            <a:off x="10929823" y="4480560"/>
+          <p:cNvPr id="26" name="Shape 24"/>
+          <p:cNvSpPr/>
+          <p:nvPr/>
+        </p:nvSpPr>
+        <p:spPr>
+          <a:xfrm>
+            <a:off x="10929823" y="4535424"/>
             <a:ext cx="118872" cy="118872"/>
           </a:xfrm>
           <a:prstGeom prst="rect">
@@ -7705,13 +7965,13 @@
       </p:sp>
       <p:sp>
         <p:nvSpPr>
-          <p:cNvPr id="25" name="Text 23"/>
-          <p:cNvSpPr/>
-          <p:nvPr/>
-        </p:nvSpPr>
-        <p:spPr>
-          <a:xfrm>
-            <a:off x="1097280" y="4407408"/>
+          <p:cNvPr id="27" name="Text 25"/>
+          <p:cNvSpPr/>
+          <p:nvPr/>
+        </p:nvSpPr>
+        <p:spPr>
+          <a:xfrm>
+            <a:off x="1097280" y="4462272"/>
             <a:ext cx="9722815" cy="256032"/>
           </a:xfrm>
           <a:prstGeom prst="rect">
@@ -7731,7 +7991,7 @@
               <a:buNone/>
             </a:pPr>
             <a:r>
-              <a:rPr lang="he-IL" altLang="en-US" sz="1250" b="1" dirty="0">
+              <a:rPr lang="he-IL" altLang="en-US" sz="1300" b="1" dirty="0">
                 <a:solidFill>
                   <a:srgbClr val="FF6B7A"/>
                 </a:solidFill>
@@ -7739,22 +7999,22 @@
                 <a:ea typeface="Calibri" pitchFamily="34" charset="-122"/>
                 <a:cs typeface="Calibri" pitchFamily="34" charset="-120"/>
               </a:rPr>
-              <a:t>‫מה שהדשבורד מציג כיום — ומה שגוי בו‬</a:t>
-            </a:r>
-            <a:endParaRPr lang="he-IL" sz="1250" dirty="0"/>
-          </a:p>
-        </p:txBody>
-      </p:sp>
-      <p:sp>
-        <p:nvSpPr>
-          <p:cNvPr id="26" name="Text 24"/>
-          <p:cNvSpPr/>
-          <p:nvPr/>
-        </p:nvSpPr>
-        <p:spPr>
-          <a:xfrm>
-            <a:off x="1097280" y="4663440"/>
-            <a:ext cx="9997135" cy="768096"/>
+              <a:t>‫למה אי אפשר לחכות‬</a:t>
+            </a:r>
+            <a:endParaRPr lang="he-IL" sz="1300" dirty="0"/>
+          </a:p>
+        </p:txBody>
+      </p:sp>
+      <p:sp>
+        <p:nvSpPr>
+          <p:cNvPr id="28" name="Text 26"/>
+          <p:cNvSpPr/>
+          <p:nvPr/>
+        </p:nvSpPr>
+        <p:spPr>
+          <a:xfrm>
+            <a:off x="1097280" y="4718304"/>
+            <a:ext cx="9997135" cy="713232"/>
           </a:xfrm>
           <a:prstGeom prst="rect">
             <a:avLst/>
@@ -7781,7 +8041,7 @@
                 <a:ea typeface="Calibri" pitchFamily="34" charset="-122"/>
                 <a:cs typeface="Calibri" pitchFamily="34" charset="-120"/>
               </a:rPr>
-              <a:t>‫הדשבורד מסמן את אוקטובר ‪2026‬ כמועד חציית ‪80%‬ ומציין ‪733 TB‬. סדרת התחזית שבתוכו מגיעה באוקטובר ל-‪695 TB‬ בלבד — ‪75.9%‬ ניצולת. אוקטובר הוא מועד היעד להוצאת הרכש, לא מועד חציית הסף; שני הקווים מצוירים על אותו חודש וזה מקור הבלבול. בנוסף, הדשבורד מציג ניצולת של ‪75%‬ במקום ‪72.9%‬, ומציג תחזית של ‪710 TB‬ לדצמבר בעוד סדרת הנתונים שלו עצמה נותנת ‪725 TB‬.‬</a:t>
+              <a:t>‫חציית ‪80%‬ אינה אירוע תקציבי אלא אירוע תפעולי: מעל הסף ביצועי המערכת נפגעים והחשיפה להשבתה עולה. את מועד החצייה איננו שולטים בו — הוא נגזר מקצב הגידול. את מועד הרכש כן. הוצאת ‪PO‬ באוקטובר היא הפעולה היחידה שמבטיחה שהדיסקים יהיו בבית ברגע שהסף נחצה; כל דחייה מעבירה אותנו לדצמבר עם ‪80%‬ ובלי קיבולת נוספת.‬</a:t>
             </a:r>
             <a:endParaRPr lang="he-IL" sz="1200" dirty="0"/>
           </a:p>
@@ -7789,7 +8049,7 @@
       </p:sp>
       <p:sp>
         <p:nvSpPr>
-          <p:cNvPr id="27" name="Shape 25"/>
+          <p:cNvPr id="29" name="Shape 27"/>
           <p:cNvSpPr/>
           <p:nvPr/>
         </p:nvSpPr>
@@ -7814,7 +8074,7 @@
       </p:sp>
       <p:sp>
         <p:nvSpPr>
-          <p:cNvPr id="28" name="Shape 26"/>
+          <p:cNvPr id="30" name="Shape 28"/>
           <p:cNvSpPr/>
           <p:nvPr/>
         </p:nvSpPr>
@@ -7827,11 +8087,11 @@
             <a:avLst/>
           </a:prstGeom>
           <a:solidFill>
-            <a:srgbClr val="3DDC97"/>
+            <a:srgbClr val="3DD9EB"/>
           </a:solidFill>
           <a:ln w="12700">
             <a:solidFill>
-              <a:srgbClr val="3DDC97"/>
+              <a:srgbClr val="3DD9EB"/>
             </a:solidFill>
             <a:prstDash val="solid"/>
           </a:ln>
@@ -7839,7 +8099,7 @@
       </p:sp>
       <p:sp>
         <p:nvSpPr>
-          <p:cNvPr id="29" name="Text 27"/>
+          <p:cNvPr id="31" name="Text 29"/>
           <p:cNvSpPr/>
           <p:nvPr/>
         </p:nvSpPr>
@@ -7873,7 +8133,7 @@
                 <a:ea typeface="Calibri" pitchFamily="34" charset="-122"/>
                 <a:cs typeface="Calibri" pitchFamily="34" charset="-120"/>
               </a:rPr>
-              <a:t>‫המלצה: להחליף יעד-תאריך בטריגר ניצולת. הוצאת ‪PO‬ כאשר הניצולת מגיעה ל-‪75% (687 TB)‬ משאירה לפחות חודשיים אספקה גם בתרחיש המואץ. היום חסרים ‪19 TB‬ לטריגר.‬</a:t>
+              <a:t>‫ההעתקה ל-‪AWS S3‬ רצה במקביל ומקטינה את קצב ההתקרבות לסף, אך היא אינה תחליף לרכש ואינה מבטלת את מועד האוקטובר.‬</a:t>
             </a:r>
             <a:endParaRPr lang="he-IL" sz="1150" dirty="0"/>
           </a:p>
@@ -10756,7 +11016,7 @@
           </a:solidFill>
           <a:ln w="12700">
             <a:solidFill>
-              <a:srgbClr val="23304A"/>
+              <a:srgbClr val="5A2A38"/>
             </a:solidFill>
             <a:prstDash val="solid"/>
           </a:ln>
@@ -10777,11 +11037,11 @@
             <a:avLst/>
           </a:prstGeom>
           <a:solidFill>
-            <a:srgbClr val="3DD9EB"/>
+            <a:srgbClr val="FF6B7A"/>
           </a:solidFill>
           <a:ln w="12700">
             <a:solidFill>
-              <a:srgbClr val="3DD9EB"/>
+              <a:srgbClr val="FF6B7A"/>
             </a:solidFill>
             <a:prstDash val="solid"/>
           </a:ln>
@@ -10817,7 +11077,7 @@
             <a:r>
               <a:rPr lang="he-IL" altLang="en-US" sz="1250" b="1" dirty="0">
                 <a:solidFill>
-                  <a:srgbClr val="3DD9EB"/>
+                  <a:srgbClr val="FF6B7A"/>
                 </a:solidFill>
                 <a:latin typeface="Calibri" pitchFamily="34" charset="0"/>
                 <a:ea typeface="Calibri" pitchFamily="34" charset="-122"/>
@@ -10865,7 +11125,7 @@
                 <a:ea typeface="Calibri" pitchFamily="34" charset="-122"/>
                 <a:cs typeface="Calibri" pitchFamily="34" charset="-120"/>
               </a:rPr>
-              <a:t>‫ההעתקה אורכת שבועות ותלויה בפס רוחב.‬</a:t>
+              <a:t>‫זמן אספקה של חודשיים מ-‪Dell; PO‬ שיוצא אחרי אוקטובר מגיע אחרי חציית ‪80%‬.‬</a:t>
             </a:r>
             <a:endParaRPr lang="he-IL" sz="1100" dirty="0"/>
           </a:p>
@@ -10932,7 +11192,7 @@
                 <a:ea typeface="Calibri" pitchFamily="34" charset="-122"/>
                 <a:cs typeface="Calibri" pitchFamily="34" charset="-120"/>
               </a:rPr>
-              <a:t>‫מיטיגציה: העברה ראשונית ב-‪AWS Snowball‬. ההעתקה אינה על הנתיב הקריטי של הרכש — שני המסלולים רצים במקביל.‬</a:t>
+              <a:t>‫מיטיגציה: אישור תקציב בספטמבר, ‪PO‬ באוקטובר. ההעתקה לענן רצה במקביל ומקטינה את הלחץ אם האספקה תתעכב.‬</a:t>
             </a:r>
             <a:endParaRPr lang="he-IL" sz="1050" dirty="0"/>
           </a:p>
@@ -11504,7 +11764,7 @@
                 <a:ea typeface="Calibri" pitchFamily="34" charset="-122"/>
                 <a:cs typeface="Calibri" pitchFamily="34" charset="-120"/>
               </a:rPr>
-              <a:t>‫העתקת קורפוס הדימות ו-‪Verint‬ מפנה שטח ב-‪ECS‬ תוך שבועות. זו האפשרות היחידה שמשפיעה על הניצולת לפני דצמבר ‪2026‬.‬</a:t>
+              <a:t>‫העתקת קורפוס הדימות ו-‪Verint‬ מפנה שטח ב-‪ECS‬ תוך שבועות, ומאטה את ההתקרבות לסף ‪80%‬ בדצמבר — בלי להמתין לאספקה.‬</a:t>
             </a:r>
             <a:endParaRPr lang="he-IL" sz="1150" dirty="0"/>
           </a:p>
@@ -11640,7 +11900,7 @@
                 <a:ea typeface="Calibri" pitchFamily="34" charset="-122"/>
                 <a:cs typeface="Calibri" pitchFamily="34" charset="-120"/>
               </a:rPr>
-              <a:t>‫כל ‪TB‬ שמפונה דוחה את מועד הרכש ומקטין את היקפו. הצעת ‪Dell‬ הנוכחית עומדת על ‪$695,520‬ עבור ‪600 TB‬ לוגי.‬</a:t>
+              <a:t>‫כל ‪TB‬ שמפונה מקטין את היקף ההרחבה הנדרשת. הצעת ‪Dell‬ הנוכחית עומדת על ‪$695,520‬ עבור ‪600 TB‬ לוגי.‬</a:t>
             </a:r>
             <a:endParaRPr lang="he-IL" sz="1150" dirty="0"/>
           </a:p>
@@ -12344,7 +12604,7 @@
             <a:r>
               <a:rPr lang="he-IL" altLang="en-US" sz="1100" b="1" spc="120" kern="0" dirty="0">
                 <a:solidFill>
-                  <a:srgbClr val="3DD9EB"/>
+                  <a:srgbClr val="FF6B7A"/>
                 </a:solidFill>
                 <a:latin typeface="Calibri" pitchFamily="34" charset="0"/>
                 <a:ea typeface="Calibri" pitchFamily="34" charset="-122"/>
@@ -12384,7 +12644,7 @@
               <a:buNone/>
             </a:pPr>
             <a:r>
-              <a:rPr lang="he-IL" altLang="en-US" sz="2500" b="1" dirty="0">
+              <a:rPr lang="he-IL" altLang="en-US" sz="2700" b="1" dirty="0">
                 <a:solidFill>
                   <a:srgbClr val="F4F7FB"/>
                 </a:solidFill>
@@ -12392,9 +12652,9 @@
                 <a:ea typeface="Calibri" pitchFamily="34" charset="-122"/>
                 <a:cs typeface="Calibri" pitchFamily="34" charset="-120"/>
               </a:rPr>
-              <a:t>‫שני מסלולים במקביל: העתקה לענן מתחילה מיד, רכש נקבע לפי טריגר‬</a:t>
-            </a:r>
-            <a:endParaRPr lang="he-IL" sz="2500" dirty="0"/>
+              <a:t>‫שני מסלולים במקביל — והרכש נעול על אוקטובר‬</a:t>
+            </a:r>
+            <a:endParaRPr lang="he-IL" sz="2700" dirty="0"/>
           </a:p>
         </p:txBody>
       </p:sp>
@@ -12857,11 +13117,11 @@
             <a:avLst/>
           </a:prstGeom>
           <a:solidFill>
-            <a:srgbClr val="3DDC97"/>
+            <a:srgbClr val="FF6B7A"/>
           </a:solidFill>
           <a:ln w="12700">
             <a:solidFill>
-              <a:srgbClr val="3DDC97"/>
+              <a:srgbClr val="FF6B7A"/>
             </a:solidFill>
             <a:prstDash val="solid"/>
           </a:ln>
@@ -12930,6 +13190,26 @@
                 <a:ea typeface="Calibri" pitchFamily="34" charset="-122"/>
                 <a:cs typeface="Calibri" pitchFamily="34" charset="-120"/>
               </a:rPr>
+              <a:t>‫הוצאת ‪PO‬ ל-‪Dell‬ — מועד אחרון‬</a:t>
+            </a:r>
+            <a:endParaRPr lang="he-IL" sz="1150" dirty="0"/>
+          </a:p>
+          <a:p>
+            <a:pPr rtl="1" algn="r" indent="0" marL="0">
+              <a:lnSpc>
+                <a:spcPct val="122000"/>
+              </a:lnSpc>
+              <a:buNone/>
+            </a:pPr>
+            <a:r>
+              <a:rPr lang="he-IL" altLang="en-US" sz="1150" dirty="0">
+                <a:solidFill>
+                  <a:srgbClr val="91A0B7"/>
+                </a:solidFill>
+                <a:latin typeface="Calibri" pitchFamily="34" charset="0"/>
+                <a:ea typeface="Calibri" pitchFamily="34" charset="-122"/>
+                <a:cs typeface="Calibri" pitchFamily="34" charset="-120"/>
+              </a:rPr>
               <a:t>‫תחילת העתקה לייצור‬</a:t>
             </a:r>
             <a:endParaRPr lang="he-IL" sz="1150" dirty="0"/>
@@ -12951,26 +13231,6 @@
                 <a:cs typeface="Calibri" pitchFamily="34" charset="-120"/>
               </a:rPr>
               <a:t>‫ולידציה ראשונה ודוח חריגים‬</a:t>
-            </a:r>
-            <a:endParaRPr lang="he-IL" sz="1150" dirty="0"/>
-          </a:p>
-          <a:p>
-            <a:pPr rtl="1" algn="r" indent="0" marL="0">
-              <a:lnSpc>
-                <a:spcPct val="122000"/>
-              </a:lnSpc>
-              <a:buNone/>
-            </a:pPr>
-            <a:r>
-              <a:rPr lang="he-IL" altLang="en-US" sz="1150" dirty="0">
-                <a:solidFill>
-                  <a:srgbClr val="91A0B7"/>
-                </a:solidFill>
-                <a:latin typeface="Calibri" pitchFamily="34" charset="0"/>
-                <a:ea typeface="Calibri" pitchFamily="34" charset="-122"/>
-                <a:cs typeface="Calibri" pitchFamily="34" charset="-120"/>
-              </a:rPr>
-              <a:t>‫מדידת ניצולת מול טריגר ‪75%‬‬</a:t>
             </a:r>
             <a:endParaRPr lang="he-IL" sz="1150" dirty="0"/>
           </a:p>
@@ -13106,27 +13366,27 @@
                 <a:ea typeface="Calibri" pitchFamily="34" charset="-122"/>
                 <a:cs typeface="Calibri" pitchFamily="34" charset="-120"/>
               </a:rPr>
+              <a:t>‫ייצור והובלה אצל ‪Dell‬‬</a:t>
+            </a:r>
+            <a:endParaRPr lang="he-IL" sz="1150" dirty="0"/>
+          </a:p>
+          <a:p>
+            <a:pPr rtl="1" algn="r" indent="0" marL="0">
+              <a:lnSpc>
+                <a:spcPct val="122000"/>
+              </a:lnSpc>
+              <a:buNone/>
+            </a:pPr>
+            <a:r>
+              <a:rPr lang="he-IL" altLang="en-US" sz="1150" dirty="0">
+                <a:solidFill>
+                  <a:srgbClr val="91A0B7"/>
+                </a:solidFill>
+                <a:latin typeface="Calibri" pitchFamily="34" charset="0"/>
+                <a:ea typeface="Calibri" pitchFamily="34" charset="-122"/>
+                <a:cs typeface="Calibri" pitchFamily="34" charset="-120"/>
+              </a:rPr>
               <a:t>‫המשך העתקה ומחיקה מ-‪ECS‬‬</a:t>
-            </a:r>
-            <a:endParaRPr lang="he-IL" sz="1150" dirty="0"/>
-          </a:p>
-          <a:p>
-            <a:pPr rtl="1" algn="r" indent="0" marL="0">
-              <a:lnSpc>
-                <a:spcPct val="122000"/>
-              </a:lnSpc>
-              <a:buNone/>
-            </a:pPr>
-            <a:r>
-              <a:rPr lang="he-IL" altLang="en-US" sz="1150" dirty="0">
-                <a:solidFill>
-                  <a:srgbClr val="91A0B7"/>
-                </a:solidFill>
-                <a:latin typeface="Calibri" pitchFamily="34" charset="0"/>
-                <a:ea typeface="Calibri" pitchFamily="34" charset="-122"/>
-                <a:cs typeface="Calibri" pitchFamily="34" charset="-120"/>
-              </a:rPr>
-              <a:t>‫טריגר רכש צפוי · ‪PO‬ ל-‪Dell‬‬</a:t>
             </a:r>
             <a:endParaRPr lang="he-IL" sz="1150" dirty="0"/>
           </a:p>
@@ -13302,7 +13562,7 @@
                 <a:ea typeface="Calibri" pitchFamily="34" charset="-122"/>
                 <a:cs typeface="Calibri" pitchFamily="34" charset="-120"/>
               </a:rPr>
-              <a:t>‫צפי חציית ‪80%‬ בתרחיש המגמה‬</a:t>
+              <a:t>‫חציית סף ‪80% — 733 TB‬‬</a:t>
             </a:r>
             <a:endParaRPr lang="he-IL" sz="1150" dirty="0"/>
           </a:p>
@@ -13322,7 +13582,7 @@
                 <a:ea typeface="Calibri" pitchFamily="34" charset="-122"/>
                 <a:cs typeface="Calibri" pitchFamily="34" charset="-120"/>
               </a:rPr>
-              <a:t>‫החלטה על היקף הרחבה נוסף‬</a:t>
+              <a:t>‫הקיבולת הנוספת נכנסת בזמן‬</a:t>
             </a:r>
             <a:endParaRPr lang="he-IL" sz="1150" dirty="0"/>
           </a:p>
@@ -13345,11 +13605,11 @@
             </a:avLst>
           </a:prstGeom>
           <a:solidFill>
-            <a:srgbClr val="13303A"/>
+            <a:srgbClr val="2A1620"/>
           </a:solidFill>
           <a:ln w="12700">
             <a:solidFill>
-              <a:srgbClr val="13303A"/>
+              <a:srgbClr val="5A2A38"/>
             </a:solidFill>
             <a:prstDash val="solid"/>
           </a:ln>
@@ -13370,11 +13630,11 @@
             <a:avLst/>
           </a:prstGeom>
           <a:solidFill>
-            <a:srgbClr val="3DD9EB"/>
+            <a:srgbClr val="FF6B7A"/>
           </a:solidFill>
           <a:ln w="12700">
             <a:solidFill>
-              <a:srgbClr val="3DD9EB"/>
+              <a:srgbClr val="FF6B7A"/>
             </a:solidFill>
             <a:prstDash val="solid"/>
           </a:ln>
@@ -13410,13 +13670,13 @@
             <a:r>
               <a:rPr lang="he-IL" altLang="en-US" sz="1300" b="1" dirty="0">
                 <a:solidFill>
-                  <a:srgbClr val="3DD9EB"/>
-                </a:solidFill>
-                <a:latin typeface="Calibri" pitchFamily="34" charset="0"/>
-                <a:ea typeface="Calibri" pitchFamily="34" charset="-122"/>
-                <a:cs typeface="Calibri" pitchFamily="34" charset="-120"/>
-              </a:rPr>
-              <a:t>‫טריגר הרכש אינו תאריך: ‪PO‬ יוצא כאשר הניצולת מגיעה ל-‪75% (687 TB)‬. היום ‪72.9%‬ — מרחק של ‪19 TB‬.‬</a:t>
+                  <a:srgbClr val="FF6B7A"/>
+                </a:solidFill>
+                <a:latin typeface="Calibri" pitchFamily="34" charset="0"/>
+                <a:ea typeface="Calibri" pitchFamily="34" charset="-122"/>
+                <a:cs typeface="Calibri" pitchFamily="34" charset="-120"/>
+              </a:rPr>
+              <a:t>‫אוקטובר הוא נקודת האל-חזור: חודשיים אספקה פירושם שכל ‪PO‬ שיוצא אחריו מגיע אחרי חציית ‪80%‬.‬</a:t>
             </a:r>
             <a:endParaRPr lang="he-IL" sz="1300" dirty="0"/>
           </a:p>
@@ -13462,11 +13722,11 @@
             <a:avLst/>
           </a:prstGeom>
           <a:solidFill>
-            <a:srgbClr val="3DD9EB"/>
+            <a:srgbClr val="FF6B7A"/>
           </a:solidFill>
           <a:ln w="12700">
             <a:solidFill>
-              <a:srgbClr val="3DD9EB"/>
+              <a:srgbClr val="FF6B7A"/>
             </a:solidFill>
             <a:prstDash val="solid"/>
           </a:ln>
@@ -13508,7 +13768,7 @@
                 <a:ea typeface="Calibri" pitchFamily="34" charset="-122"/>
                 <a:cs typeface="Calibri" pitchFamily="34" charset="-120"/>
               </a:rPr>
-              <a:t>‫המסלולים אינם תלויים זה בזה. עיכוב ב-‪POC‬ אינו מעכב את הרכש, ועיכוב ברכש אינו מעכב את ההעתקה.‬</a:t>
+              <a:t>‫המסלולים אינם תלויים זה בזה: עיכוב ב-‪POC‬ אינו מעכב את הרכש, ועיכוב ברכש אינו מעכב את ההעתקה. רק מסלול הרכש נעול על תאריך.‬</a:t>
             </a:r>
             <a:endParaRPr lang="he-IL" sz="1150" dirty="0"/>
           </a:p>

--- a/presentations/ecs-to-s3/Harel_ECS_to_S3_CIO.pptx
+++ b/presentations/ecs-to-s3/Harel_ECS_to_S3_CIO.pptx
@@ -1268,30 +1268,16 @@
               <a:effectLst/>
             </c:spPr>
           </c:dPt>
-          <c:dPt>
-            <c:idx val="2"/>
-            <c:invertIfNegative val="0"/>
-            <c:bubble3D val="0"/>
-            <c:spPr>
-              <a:solidFill>
-                <a:srgbClr val="B07CFF"/>
-              </a:solidFill>
-              <a:effectLst/>
-            </c:spPr>
-          </c:dPt>
           <c:cat>
             <c:multiLvlStrRef>
-              <c:f>Sheet1!$A$2:$A$4</c:f>
+              <c:f>Sheet1!$A$2:$A$3</c:f>
               <c:multiLvlStrCache>
-                <c:ptCount val="3"/>
+                <c:ptCount val="2"/>
                 <c:lvl>
                   <c:pt idx="0">
                     <c:v>Dell ECS On-Prem</c:v>
                   </c:pt>
                   <c:pt idx="1">
-                    <c:v>AWS S3 Standard</c:v>
-                  </c:pt>
-                  <c:pt idx="2">
                     <c:v>AWS S3 + API</c:v>
                   </c:pt>
                 </c:lvl>
@@ -1300,17 +1286,14 @@
           </c:cat>
           <c:val>
             <c:numRef>
-              <c:f>Sheet1!$B$2:$B$4</c:f>
+              <c:f>Sheet1!$B$2:$B$3</c:f>
               <c:numCache>
                 <c:formatCode>General</c:formatCode>
-                <c:ptCount val="3"/>
+                <c:ptCount val="2"/>
                 <c:pt idx="0">
                   <c:v>115.8</c:v>
                 </c:pt>
                 <c:pt idx="1">
-                  <c:v>146.5</c:v>
-                </c:pt>
-                <c:pt idx="2">
                   <c:v>155</c:v>
                 </c:pt>
               </c:numCache>
@@ -1341,7 +1324,7 @@
           <c:showBubbleSize val="0"/>
           <c:showLeaderLines val="0"/>
         </c:dLbls>
-        <c:gapWidth val="120"/>
+        <c:gapWidth val="240"/>
         <c:overlap val="0"/>
         <c:axId val="2094734554"/>
         <c:axId val="2094734552"/>
@@ -8241,7 +8224,7 @@
               <a:buNone/>
             </a:pPr>
             <a:r>
-              <a:rPr lang="he-IL" altLang="en-US" sz="2400" b="1" dirty="0">
+              <a:rPr lang="he-IL" altLang="en-US" sz="2500" b="1" dirty="0">
                 <a:solidFill>
                   <a:srgbClr val="F4F7FB"/>
                 </a:solidFill>
@@ -8249,9 +8232,9 @@
                 <a:ea typeface="Calibri" pitchFamily="34" charset="-122"/>
                 <a:cs typeface="Calibri" pitchFamily="34" charset="-120"/>
               </a:rPr>
-              <a:t>‫‪100 TB‬ ל-‪5‬ שנים: ‪$116K‬ ב-‪On-Prem‬ מול ‪$138K–165K‬ ב-‪AWS S3 Standard‬‬</a:t>
-            </a:r>
-            <a:endParaRPr lang="he-IL" sz="2400" dirty="0"/>
+              <a:t>‫‪100 TB‬ ל-‪5‬ שנים: ‪$116K‬ ב-‪On-Prem‬ מול ‪$145K–165K‬ ב-‪AWS S3 + API‬‬</a:t>
+            </a:r>
+            <a:endParaRPr lang="he-IL" sz="2500" dirty="0"/>
           </a:p>
         </p:txBody>
       </p:sp>
@@ -8550,7 +8533,7 @@
                 <a:ea typeface="Calibri" pitchFamily="34" charset="-122"/>
                 <a:cs typeface="Calibri" pitchFamily="34" charset="-120"/>
               </a:rPr>
-              <a:t>$1,380–1,650</a:t>
+              <a:t>$1,450–1,650</a:t>
             </a:r>
             <a:endParaRPr lang="en-US" sz="2600" dirty="0"/>
           </a:p>
@@ -8592,7 +8575,7 @@
                 <a:ea typeface="Calibri" pitchFamily="34" charset="-122"/>
                 <a:cs typeface="Calibri" pitchFamily="34" charset="-120"/>
               </a:rPr>
-              <a:t>‫לכל ‪TB · AWS S3 Standard‬‬</a:t>
+              <a:t>‫לכל ‪TB · AWS S3 + API‬‬</a:t>
             </a:r>
             <a:endParaRPr lang="he-IL" sz="1050" dirty="0"/>
           </a:p>
@@ -8634,7 +8617,7 @@
                 <a:ea typeface="Calibri" pitchFamily="34" charset="-122"/>
                 <a:cs typeface="Calibri" pitchFamily="34" charset="-120"/>
               </a:rPr>
-              <a:t>‫עמידות מובנית, ללא כפל אחסון מצידנו‬</a:t>
+              <a:t>‫אחסון ופעילות שוטפת, ללא כפל אחסון מצידנו‬</a:t>
             </a:r>
             <a:endParaRPr lang="he-IL" sz="1100" dirty="0"/>
           </a:p>
@@ -8701,7 +8684,7 @@
                 <a:ea typeface="Calibri" pitchFamily="34" charset="-122"/>
                 <a:cs typeface="Calibri" pitchFamily="34" charset="-120"/>
               </a:rPr>
-              <a:t>16%–30%</a:t>
+              <a:t>20%–30%</a:t>
             </a:r>
             <a:endParaRPr lang="en-US" sz="2600" dirty="0"/>
           </a:p>
@@ -8785,7 +8768,7 @@
                 <a:ea typeface="Calibri" pitchFamily="34" charset="-122"/>
                 <a:cs typeface="Calibri" pitchFamily="34" charset="-120"/>
               </a:rPr>
-              <a:t>‫מול ‪S3 Standard‬ בלבד — ראו השקף הבא‬</a:t>
+              <a:t>‫בשכבה החמה בלבד — ראו השקף הבא‬</a:t>
             </a:r>
             <a:endParaRPr lang="he-IL" sz="1100" dirty="0"/>
           </a:p>
@@ -8985,7 +8968,7 @@
               <a:buNone/>
             </a:pPr>
             <a:r>
-              <a:rPr lang="he-IL" altLang="en-US" sz="2500" b="1" dirty="0">
+              <a:rPr lang="he-IL" altLang="en-US" sz="2600" b="1" dirty="0">
                 <a:solidFill>
                   <a:srgbClr val="F4F7FB"/>
                 </a:solidFill>
@@ -8993,9 +8976,9 @@
                 <a:ea typeface="Calibri" pitchFamily="34" charset="-122"/>
                 <a:cs typeface="Calibri" pitchFamily="34" charset="-120"/>
               </a:rPr>
-              <a:t>‫השוואנו מול ‪S3 Standard‬ — אבל דימות ו-‪Verint‬ הם דאטה ארכיוני‬</a:t>
-            </a:r>
-            <a:endParaRPr lang="he-IL" sz="2500" dirty="0"/>
+              <a:t>‫תמחרנו לפי שכבה חמה — אבל דימות ו-‪Verint‬ הם דאטה ארכיוני‬</a:t>
+            </a:r>
+            <a:endParaRPr lang="he-IL" sz="2600" dirty="0"/>
           </a:p>
         </p:txBody>
       </p:sp>

--- a/presentations/ecs-to-s3/Harel_ECS_to_S3_CIO.pptx
+++ b/presentations/ecs-to-s3/Harel_ECS_to_S3_CIO.pptx
@@ -3095,7 +3095,7 @@
         </p:nvSpPr>
         <p:spPr>
           <a:xfrm>
-            <a:off x="822960" y="1481328"/>
+            <a:off x="822960" y="2212848"/>
             <a:ext cx="10545775" cy="274320"/>
           </a:xfrm>
           <a:prstGeom prst="rect">
@@ -3123,7 +3123,7 @@
                 <a:ea typeface="Calibri" pitchFamily="34" charset="-122"/>
                 <a:cs typeface="Calibri" pitchFamily="34" charset="-120"/>
               </a:rPr>
-              <a:t>‫הראל · תשתיות ‪IT‬ · ניהול קיבולת אחסון‬</a:t>
+              <a:t>‫הראל · תשתיות ‪IT‬‬</a:t>
             </a:r>
             <a:endParaRPr lang="he-IL" sz="1200" dirty="0"/>
           </a:p>
@@ -3137,8 +3137,8 @@
         </p:nvSpPr>
         <p:spPr>
           <a:xfrm>
-            <a:off x="822960" y="1828800"/>
-            <a:ext cx="10545775" cy="868680"/>
+            <a:off x="822960" y="2578608"/>
+            <a:ext cx="10545775" cy="914400"/>
           </a:xfrm>
           <a:prstGeom prst="rect">
             <a:avLst/>
@@ -3173,68 +3173,24 @@
       </p:sp>
       <p:sp>
         <p:nvSpPr>
-          <p:cNvPr id="7" name="Text 5"/>
-          <p:cNvSpPr/>
-          <p:nvPr/>
-        </p:nvSpPr>
-        <p:spPr>
-          <a:xfrm>
-            <a:off x="822960" y="2743200"/>
-            <a:ext cx="10545775" cy="384048"/>
-          </a:xfrm>
-          <a:prstGeom prst="rect">
-            <a:avLst/>
-          </a:prstGeom>
-          <a:noFill/>
-          <a:ln/>
-        </p:spPr>
-        <p:txBody>
-          <a:bodyPr wrap="square" lIns="0" tIns="0" rIns="0" bIns="0" rtlCol="0" anchor="ctr"/>
-          <a:lstStyle/>
-          <a:p>
-            <a:pPr rtl="1" algn="r" indent="0" marL="0">
-              <a:lnSpc>
-                <a:spcPct val="100000"/>
-              </a:lnSpc>
-              <a:buNone/>
-            </a:pPr>
-            <a:r>
-              <a:rPr lang="he-IL" altLang="en-US" sz="1500" dirty="0">
-                <a:solidFill>
-                  <a:srgbClr val="91A0B7"/>
-                </a:solidFill>
-                <a:latin typeface="Calibri" pitchFamily="34" charset="0"/>
-                <a:ea typeface="Calibri" pitchFamily="34" charset="-122"/>
-                <a:cs typeface="Calibri" pitchFamily="34" charset="-120"/>
-              </a:rPr>
-              <a:t>‫מ-‪ECS On-Prem‬ ל-‪AWS S3‬ · מצגת לקבלת החלטה · אוגוסט ‪2026‬‬</a:t>
-            </a:r>
-            <a:endParaRPr lang="he-IL" sz="1500" dirty="0"/>
-          </a:p>
-        </p:txBody>
-      </p:sp>
-      <p:sp>
-        <p:nvSpPr>
-          <p:cNvPr id="8" name="Shape 6"/>
-          <p:cNvSpPr/>
-          <p:nvPr/>
-        </p:nvSpPr>
-        <p:spPr>
-          <a:xfrm>
-            <a:off x="8109509" y="3950208"/>
-            <a:ext cx="3259226" cy="1170432"/>
-          </a:xfrm>
-          <a:prstGeom prst="roundRect">
-            <a:avLst>
-              <a:gd name="adj" fmla="val 3906"/>
-            </a:avLst>
+          <p:cNvPr id="7" name="Shape 5"/>
+          <p:cNvSpPr/>
+          <p:nvPr/>
+        </p:nvSpPr>
+        <p:spPr>
+          <a:xfrm>
+            <a:off x="8991295" y="3602736"/>
+            <a:ext cx="2377440" cy="27432"/>
+          </a:xfrm>
+          <a:prstGeom prst="rect">
+            <a:avLst/>
           </a:prstGeom>
           <a:solidFill>
-            <a:srgbClr val="182133"/>
+            <a:srgbClr val="3DD9EB"/>
           </a:solidFill>
           <a:ln w="12700">
             <a:solidFill>
-              <a:srgbClr val="23304A"/>
+              <a:srgbClr val="3DD9EB"/>
             </a:solidFill>
             <a:prstDash val="solid"/>
           </a:ln>
@@ -3242,14 +3198,14 @@
       </p:sp>
       <p:sp>
         <p:nvSpPr>
-          <p:cNvPr id="9" name="Text 7"/>
-          <p:cNvSpPr/>
-          <p:nvPr/>
-        </p:nvSpPr>
-        <p:spPr>
-          <a:xfrm>
-            <a:off x="8365541" y="4078224"/>
-            <a:ext cx="2747162" cy="219456"/>
+          <p:cNvPr id="8" name="Text 6"/>
+          <p:cNvSpPr/>
+          <p:nvPr/>
+        </p:nvSpPr>
+        <p:spPr>
+          <a:xfrm>
+            <a:off x="822960" y="3767328"/>
+            <a:ext cx="10545775" cy="384048"/>
           </a:xfrm>
           <a:prstGeom prst="rect">
             <a:avLst/>
@@ -3268,7 +3224,7 @@
               <a:buNone/>
             </a:pPr>
             <a:r>
-              <a:rPr lang="he-IL" altLang="en-US" sz="1050" b="1" spc="80" kern="0" dirty="0">
+              <a:rPr lang="he-IL" altLang="en-US" sz="1600" dirty="0">
                 <a:solidFill>
                   <a:srgbClr val="91A0B7"/>
                 </a:solidFill>
@@ -3276,405 +3232,15 @@
                 <a:ea typeface="Calibri" pitchFamily="34" charset="-122"/>
                 <a:cs typeface="Calibri" pitchFamily="34" charset="-120"/>
               </a:rPr>
-              <a:t>‫ניצולת האחסון היום‬</a:t>
-            </a:r>
-            <a:endParaRPr lang="he-IL" sz="1050" dirty="0"/>
-          </a:p>
-        </p:txBody>
-      </p:sp>
-      <p:sp>
-        <p:nvSpPr>
-          <p:cNvPr id="10" name="Text 8"/>
-          <p:cNvSpPr/>
-          <p:nvPr/>
-        </p:nvSpPr>
-        <p:spPr>
-          <a:xfrm>
-            <a:off x="8365541" y="4315968"/>
-            <a:ext cx="2747162" cy="420624"/>
-          </a:xfrm>
-          <a:prstGeom prst="rect">
-            <a:avLst/>
-          </a:prstGeom>
-          <a:noFill/>
-          <a:ln/>
-        </p:spPr>
-        <p:txBody>
-          <a:bodyPr wrap="square" lIns="0" tIns="0" rIns="0" bIns="0" rtlCol="0" anchor="ctr"/>
-          <a:lstStyle/>
-          <a:p>
-            <a:pPr rtl="1" algn="r" indent="0" marL="0">
-              <a:lnSpc>
-                <a:spcPct val="100000"/>
-              </a:lnSpc>
-              <a:buNone/>
-            </a:pPr>
-            <a:r>
-              <a:rPr lang="he-IL" altLang="en-US" sz="2600" b="1" dirty="0">
-                <a:solidFill>
-                  <a:srgbClr val="FF9F43"/>
-                </a:solidFill>
-                <a:latin typeface="Calibri" pitchFamily="34" charset="0"/>
-                <a:ea typeface="Calibri" pitchFamily="34" charset="-122"/>
-                <a:cs typeface="Calibri" pitchFamily="34" charset="-120"/>
-              </a:rPr>
-              <a:t>‫‪75%‬‬</a:t>
-            </a:r>
-            <a:endParaRPr lang="he-IL" sz="2600" dirty="0"/>
-          </a:p>
-        </p:txBody>
-      </p:sp>
-      <p:sp>
-        <p:nvSpPr>
-          <p:cNvPr id="11" name="Text 9"/>
-          <p:cNvSpPr/>
-          <p:nvPr/>
-        </p:nvSpPr>
-        <p:spPr>
-          <a:xfrm>
-            <a:off x="8365541" y="4745736"/>
-            <a:ext cx="2747162" cy="256032"/>
-          </a:xfrm>
-          <a:prstGeom prst="rect">
-            <a:avLst/>
-          </a:prstGeom>
-          <a:noFill/>
-          <a:ln/>
-        </p:spPr>
-        <p:txBody>
-          <a:bodyPr wrap="square" lIns="0" tIns="0" rIns="0" bIns="0" rtlCol="0" anchor="ctr"/>
-          <a:lstStyle/>
-          <a:p>
-            <a:pPr rtl="1" algn="r" indent="0" marL="0">
-              <a:lnSpc>
-                <a:spcPct val="100000"/>
-              </a:lnSpc>
-              <a:buNone/>
-            </a:pPr>
-            <a:r>
-              <a:rPr lang="he-IL" altLang="en-US" sz="1100" dirty="0">
-                <a:solidFill>
-                  <a:srgbClr val="5E6E85"/>
-                </a:solidFill>
-                <a:latin typeface="Calibri" pitchFamily="34" charset="0"/>
-                <a:ea typeface="Calibri" pitchFamily="34" charset="-122"/>
-                <a:cs typeface="Calibri" pitchFamily="34" charset="-120"/>
-              </a:rPr>
-              <a:t>‫‪687 TB‬ מתוך ‪916 TB‬‬</a:t>
-            </a:r>
-            <a:endParaRPr lang="he-IL" sz="1100" dirty="0"/>
-          </a:p>
-        </p:txBody>
-      </p:sp>
-      <p:sp>
-        <p:nvSpPr>
-          <p:cNvPr id="12" name="Shape 10"/>
-          <p:cNvSpPr/>
-          <p:nvPr/>
-        </p:nvSpPr>
-        <p:spPr>
-          <a:xfrm>
-            <a:off x="4466234" y="3950208"/>
-            <a:ext cx="3259226" cy="1170432"/>
-          </a:xfrm>
-          <a:prstGeom prst="roundRect">
-            <a:avLst>
-              <a:gd name="adj" fmla="val 3906"/>
-            </a:avLst>
-          </a:prstGeom>
-          <a:solidFill>
-            <a:srgbClr val="182133"/>
-          </a:solidFill>
-          <a:ln w="12700">
-            <a:solidFill>
-              <a:srgbClr val="23304A"/>
-            </a:solidFill>
-            <a:prstDash val="solid"/>
-          </a:ln>
-        </p:spPr>
-      </p:sp>
-      <p:sp>
-        <p:nvSpPr>
-          <p:cNvPr id="13" name="Text 11"/>
-          <p:cNvSpPr/>
-          <p:nvPr/>
-        </p:nvSpPr>
-        <p:spPr>
-          <a:xfrm>
-            <a:off x="4722266" y="4078224"/>
-            <a:ext cx="2747162" cy="219456"/>
-          </a:xfrm>
-          <a:prstGeom prst="rect">
-            <a:avLst/>
-          </a:prstGeom>
-          <a:noFill/>
-          <a:ln/>
-        </p:spPr>
-        <p:txBody>
-          <a:bodyPr wrap="square" lIns="0" tIns="0" rIns="0" bIns="0" rtlCol="0" anchor="ctr"/>
-          <a:lstStyle/>
-          <a:p>
-            <a:pPr rtl="1" algn="r" indent="0" marL="0">
-              <a:lnSpc>
-                <a:spcPct val="100000"/>
-              </a:lnSpc>
-              <a:buNone/>
-            </a:pPr>
-            <a:r>
-              <a:rPr lang="he-IL" altLang="en-US" sz="1050" b="1" spc="80" kern="0" dirty="0">
-                <a:solidFill>
-                  <a:srgbClr val="91A0B7"/>
-                </a:solidFill>
-                <a:latin typeface="Calibri" pitchFamily="34" charset="0"/>
-                <a:ea typeface="Calibri" pitchFamily="34" charset="-122"/>
-                <a:cs typeface="Calibri" pitchFamily="34" charset="-120"/>
-              </a:rPr>
-              <a:t>‫חציית סף ‪80%‬‬</a:t>
-            </a:r>
-            <a:endParaRPr lang="he-IL" sz="1050" dirty="0"/>
-          </a:p>
-        </p:txBody>
-      </p:sp>
-      <p:sp>
-        <p:nvSpPr>
-          <p:cNvPr id="14" name="Text 12"/>
-          <p:cNvSpPr/>
-          <p:nvPr/>
-        </p:nvSpPr>
-        <p:spPr>
-          <a:xfrm>
-            <a:off x="4722266" y="4315968"/>
-            <a:ext cx="2747162" cy="420624"/>
-          </a:xfrm>
-          <a:prstGeom prst="rect">
-            <a:avLst/>
-          </a:prstGeom>
-          <a:noFill/>
-          <a:ln/>
-        </p:spPr>
-        <p:txBody>
-          <a:bodyPr wrap="square" lIns="0" tIns="0" rIns="0" bIns="0" rtlCol="0" anchor="ctr"/>
-          <a:lstStyle/>
-          <a:p>
-            <a:pPr rtl="1" algn="r" indent="0" marL="0">
-              <a:lnSpc>
-                <a:spcPct val="100000"/>
-              </a:lnSpc>
-              <a:buNone/>
-            </a:pPr>
-            <a:r>
-              <a:rPr lang="he-IL" altLang="en-US" sz="2600" b="1" dirty="0">
-                <a:solidFill>
-                  <a:srgbClr val="FF6B7A"/>
-                </a:solidFill>
-                <a:latin typeface="Calibri" pitchFamily="34" charset="0"/>
-                <a:ea typeface="Calibri" pitchFamily="34" charset="-122"/>
-                <a:cs typeface="Calibri" pitchFamily="34" charset="-120"/>
-              </a:rPr>
-              <a:t>‫דצמבר ‪2026‬‬</a:t>
-            </a:r>
-            <a:endParaRPr lang="he-IL" sz="2600" dirty="0"/>
-          </a:p>
-        </p:txBody>
-      </p:sp>
-      <p:sp>
-        <p:nvSpPr>
-          <p:cNvPr id="15" name="Text 13"/>
-          <p:cNvSpPr/>
-          <p:nvPr/>
-        </p:nvSpPr>
-        <p:spPr>
-          <a:xfrm>
-            <a:off x="4722266" y="4745736"/>
-            <a:ext cx="2747162" cy="256032"/>
-          </a:xfrm>
-          <a:prstGeom prst="rect">
-            <a:avLst/>
-          </a:prstGeom>
-          <a:noFill/>
-          <a:ln/>
-        </p:spPr>
-        <p:txBody>
-          <a:bodyPr wrap="square" lIns="0" tIns="0" rIns="0" bIns="0" rtlCol="0" anchor="ctr"/>
-          <a:lstStyle/>
-          <a:p>
-            <a:pPr rtl="1" algn="r" indent="0" marL="0">
-              <a:lnSpc>
-                <a:spcPct val="100000"/>
-              </a:lnSpc>
-              <a:buNone/>
-            </a:pPr>
-            <a:r>
-              <a:rPr lang="he-IL" altLang="en-US" sz="1100" dirty="0">
-                <a:solidFill>
-                  <a:srgbClr val="5E6E85"/>
-                </a:solidFill>
-                <a:latin typeface="Calibri" pitchFamily="34" charset="0"/>
-                <a:ea typeface="Calibri" pitchFamily="34" charset="-122"/>
-                <a:cs typeface="Calibri" pitchFamily="34" charset="-120"/>
-              </a:rPr>
-              <a:t>‫‪733 TB‬ · סיכון לזמינות‬</a:t>
-            </a:r>
-            <a:endParaRPr lang="he-IL" sz="1100" dirty="0"/>
-          </a:p>
-        </p:txBody>
-      </p:sp>
-      <p:sp>
-        <p:nvSpPr>
-          <p:cNvPr id="16" name="Shape 14"/>
-          <p:cNvSpPr/>
-          <p:nvPr/>
-        </p:nvSpPr>
-        <p:spPr>
-          <a:xfrm>
-            <a:off x="822960" y="3950208"/>
-            <a:ext cx="3259226" cy="1170432"/>
-          </a:xfrm>
-          <a:prstGeom prst="roundRect">
-            <a:avLst>
-              <a:gd name="adj" fmla="val 3906"/>
-            </a:avLst>
-          </a:prstGeom>
-          <a:solidFill>
-            <a:srgbClr val="182133"/>
-          </a:solidFill>
-          <a:ln w="12700">
-            <a:solidFill>
-              <a:srgbClr val="23304A"/>
-            </a:solidFill>
-            <a:prstDash val="solid"/>
-          </a:ln>
-        </p:spPr>
-      </p:sp>
-      <p:sp>
-        <p:nvSpPr>
-          <p:cNvPr id="17" name="Text 15"/>
-          <p:cNvSpPr/>
-          <p:nvPr/>
-        </p:nvSpPr>
-        <p:spPr>
-          <a:xfrm>
-            <a:off x="1078992" y="4078224"/>
-            <a:ext cx="2747162" cy="219456"/>
-          </a:xfrm>
-          <a:prstGeom prst="rect">
-            <a:avLst/>
-          </a:prstGeom>
-          <a:noFill/>
-          <a:ln/>
-        </p:spPr>
-        <p:txBody>
-          <a:bodyPr wrap="square" lIns="0" tIns="0" rIns="0" bIns="0" rtlCol="0" anchor="ctr"/>
-          <a:lstStyle/>
-          <a:p>
-            <a:pPr rtl="1" algn="r" indent="0" marL="0">
-              <a:lnSpc>
-                <a:spcPct val="100000"/>
-              </a:lnSpc>
-              <a:buNone/>
-            </a:pPr>
-            <a:r>
-              <a:rPr lang="he-IL" altLang="en-US" sz="1050" b="1" spc="80" kern="0" dirty="0">
-                <a:solidFill>
-                  <a:srgbClr val="91A0B7"/>
-                </a:solidFill>
-                <a:latin typeface="Calibri" pitchFamily="34" charset="0"/>
-                <a:ea typeface="Calibri" pitchFamily="34" charset="-122"/>
-                <a:cs typeface="Calibri" pitchFamily="34" charset="-120"/>
-              </a:rPr>
-              <a:t>‫מועד אחרון להוצאת ‪PO‬‬</a:t>
-            </a:r>
-            <a:endParaRPr lang="he-IL" sz="1050" dirty="0"/>
-          </a:p>
-        </p:txBody>
-      </p:sp>
-      <p:sp>
-        <p:nvSpPr>
-          <p:cNvPr id="18" name="Text 16"/>
-          <p:cNvSpPr/>
-          <p:nvPr/>
-        </p:nvSpPr>
-        <p:spPr>
-          <a:xfrm>
-            <a:off x="1078992" y="4315968"/>
-            <a:ext cx="2747162" cy="420624"/>
-          </a:xfrm>
-          <a:prstGeom prst="rect">
-            <a:avLst/>
-          </a:prstGeom>
-          <a:noFill/>
-          <a:ln/>
-        </p:spPr>
-        <p:txBody>
-          <a:bodyPr wrap="square" lIns="0" tIns="0" rIns="0" bIns="0" rtlCol="0" anchor="ctr"/>
-          <a:lstStyle/>
-          <a:p>
-            <a:pPr rtl="1" algn="r" indent="0" marL="0">
-              <a:lnSpc>
-                <a:spcPct val="100000"/>
-              </a:lnSpc>
-              <a:buNone/>
-            </a:pPr>
-            <a:r>
-              <a:rPr lang="he-IL" altLang="en-US" sz="2600" b="1" dirty="0">
-                <a:solidFill>
-                  <a:srgbClr val="3DD9EB"/>
-                </a:solidFill>
-                <a:latin typeface="Calibri" pitchFamily="34" charset="0"/>
-                <a:ea typeface="Calibri" pitchFamily="34" charset="-122"/>
-                <a:cs typeface="Calibri" pitchFamily="34" charset="-120"/>
-              </a:rPr>
-              <a:t>‫אוקטובר ‪2026‬‬</a:t>
-            </a:r>
-            <a:endParaRPr lang="he-IL" sz="2600" dirty="0"/>
-          </a:p>
-        </p:txBody>
-      </p:sp>
-      <p:sp>
-        <p:nvSpPr>
-          <p:cNvPr id="19" name="Text 17"/>
-          <p:cNvSpPr/>
-          <p:nvPr/>
-        </p:nvSpPr>
-        <p:spPr>
-          <a:xfrm>
-            <a:off x="1078992" y="4745736"/>
-            <a:ext cx="2747162" cy="256032"/>
-          </a:xfrm>
-          <a:prstGeom prst="rect">
-            <a:avLst/>
-          </a:prstGeom>
-          <a:noFill/>
-          <a:ln/>
-        </p:spPr>
-        <p:txBody>
-          <a:bodyPr wrap="square" lIns="0" tIns="0" rIns="0" bIns="0" rtlCol="0" anchor="ctr"/>
-          <a:lstStyle/>
-          <a:p>
-            <a:pPr rtl="1" algn="r" indent="0" marL="0">
-              <a:lnSpc>
-                <a:spcPct val="100000"/>
-              </a:lnSpc>
-              <a:buNone/>
-            </a:pPr>
-            <a:r>
-              <a:rPr lang="he-IL" altLang="en-US" sz="1100" dirty="0">
-                <a:solidFill>
-                  <a:srgbClr val="5E6E85"/>
-                </a:solidFill>
-                <a:latin typeface="Calibri" pitchFamily="34" charset="0"/>
-                <a:ea typeface="Calibri" pitchFamily="34" charset="-122"/>
-                <a:cs typeface="Calibri" pitchFamily="34" charset="-120"/>
-              </a:rPr>
-              <a:t>‫חודשיים אספקה מ-‪Dell‬‬</a:t>
-            </a:r>
-            <a:endParaRPr lang="he-IL" sz="1100" dirty="0"/>
-          </a:p>
-        </p:txBody>
-      </p:sp>
-      <p:sp>
-        <p:nvSpPr>
-          <p:cNvPr id="20" name="Shape 18"/>
+              <a:t>‫מ-‪ECS On-Prem‬ ל-‪AWS S3‬ · מצגת לקבלת החלטה‬</a:t>
+            </a:r>
+            <a:endParaRPr lang="he-IL" sz="1600" dirty="0"/>
+          </a:p>
+        </p:txBody>
+      </p:sp>
+      <p:sp>
+        <p:nvSpPr>
+          <p:cNvPr id="9" name="Shape 7"/>
           <p:cNvSpPr/>
           <p:nvPr/>
         </p:nvSpPr>
@@ -3699,7 +3265,7 @@
       </p:sp>
       <p:sp>
         <p:nvSpPr>
-          <p:cNvPr id="21" name="Text 19"/>
+          <p:cNvPr id="10" name="Text 8"/>
           <p:cNvSpPr/>
           <p:nvPr/>
         </p:nvSpPr>

--- a/presentations/ecs-to-s3/Harel_ECS_to_S3_CIO.pptx
+++ b/presentations/ecs-to-s3/Harel_ECS_to_S3_CIO.pptx
@@ -3045,18 +3045,18 @@
         </p:nvSpPr>
         <p:spPr>
           <a:xfrm>
-            <a:off x="-1645920" y="-1005840"/>
-            <a:ext cx="4754880" cy="4754880"/>
+            <a:off x="822960" y="566928"/>
+            <a:ext cx="10545775" cy="10973"/>
           </a:xfrm>
           <a:prstGeom prst="rect">
             <a:avLst/>
           </a:prstGeom>
           <a:solidFill>
-            <a:srgbClr val="0C1322"/>
+            <a:srgbClr val="23304A"/>
           </a:solidFill>
           <a:ln w="12700">
             <a:solidFill>
-              <a:srgbClr val="0C1322"/>
+              <a:srgbClr val="23304A"/>
             </a:solidFill>
             <a:prstDash val="solid"/>
           </a:ln>
@@ -3070,18 +3070,18 @@
         </p:nvSpPr>
         <p:spPr>
           <a:xfrm>
-            <a:off x="-1280160" y="3017520"/>
-            <a:ext cx="3108960" cy="3108960"/>
+            <a:off x="11249863" y="512064"/>
+            <a:ext cx="118872" cy="118872"/>
           </a:xfrm>
           <a:prstGeom prst="rect">
             <a:avLst/>
           </a:prstGeom>
           <a:solidFill>
-            <a:srgbClr val="0A101C"/>
+            <a:srgbClr val="3DD9EB"/>
           </a:solidFill>
           <a:ln w="12700">
             <a:solidFill>
-              <a:srgbClr val="0A101C"/>
+              <a:srgbClr val="3DD9EB"/>
             </a:solidFill>
             <a:prstDash val="solid"/>
           </a:ln>
@@ -4492,16 +4492,16 @@
         </p:nvSpPr>
         <p:spPr>
           <a:xfrm>
-            <a:off x="8168335" y="2048256"/>
-            <a:ext cx="3200400" cy="1170432"/>
+            <a:off x="8168335" y="1956816"/>
+            <a:ext cx="3200400" cy="1371600"/>
           </a:xfrm>
           <a:prstGeom prst="roundRect">
             <a:avLst>
-              <a:gd name="adj" fmla="val 3906"/>
+              <a:gd name="adj" fmla="val 3333"/>
             </a:avLst>
           </a:prstGeom>
           <a:solidFill>
-            <a:srgbClr val="182133"/>
+            <a:srgbClr val="141C2C"/>
           </a:solidFill>
           <a:ln w="12700">
             <a:solidFill>
@@ -4513,14 +4513,39 @@
       </p:sp>
       <p:sp>
         <p:nvSpPr>
-          <p:cNvPr id="6" name="Text 4"/>
-          <p:cNvSpPr/>
-          <p:nvPr/>
-        </p:nvSpPr>
-        <p:spPr>
-          <a:xfrm>
-            <a:off x="8424367" y="2212848"/>
-            <a:ext cx="2688336" cy="237744"/>
+          <p:cNvPr id="6" name="Shape 4"/>
+          <p:cNvSpPr/>
+          <p:nvPr/>
+        </p:nvSpPr>
+        <p:spPr>
+          <a:xfrm>
+            <a:off x="11318443" y="2139696"/>
+            <a:ext cx="50292" cy="1005840"/>
+          </a:xfrm>
+          <a:prstGeom prst="rect">
+            <a:avLst/>
+          </a:prstGeom>
+          <a:solidFill>
+            <a:srgbClr val="FF9F43"/>
+          </a:solidFill>
+          <a:ln w="12700">
+            <a:solidFill>
+              <a:srgbClr val="FF9F43"/>
+            </a:solidFill>
+            <a:prstDash val="solid"/>
+          </a:ln>
+        </p:spPr>
+      </p:sp>
+      <p:sp>
+        <p:nvSpPr>
+          <p:cNvPr id="7" name="Text 5"/>
+          <p:cNvSpPr/>
+          <p:nvPr/>
+        </p:nvSpPr>
+        <p:spPr>
+          <a:xfrm>
+            <a:off x="8442655" y="2139696"/>
+            <a:ext cx="2633472" cy="237744"/>
           </a:xfrm>
           <a:prstGeom prst="rect">
             <a:avLst/>
@@ -4555,14 +4580,14 @@
       </p:sp>
       <p:sp>
         <p:nvSpPr>
-          <p:cNvPr id="7" name="Text 5"/>
-          <p:cNvSpPr/>
-          <p:nvPr/>
-        </p:nvSpPr>
-        <p:spPr>
-          <a:xfrm>
-            <a:off x="8424367" y="2468880"/>
-            <a:ext cx="2688336" cy="420624"/>
+          <p:cNvPr id="8" name="Text 6"/>
+          <p:cNvSpPr/>
+          <p:nvPr/>
+        </p:nvSpPr>
+        <p:spPr>
+          <a:xfrm>
+            <a:off x="8442655" y="2432304"/>
+            <a:ext cx="2633472" cy="457200"/>
           </a:xfrm>
           <a:prstGeom prst="rect">
             <a:avLst/>
@@ -4581,7 +4606,7 @@
               <a:buNone/>
             </a:pPr>
             <a:r>
-              <a:rPr lang="he-IL" altLang="en-US" sz="2400" b="1" dirty="0">
+              <a:rPr lang="he-IL" altLang="en-US" sz="2500" b="1" dirty="0">
                 <a:solidFill>
                   <a:srgbClr val="FF9F43"/>
                 </a:solidFill>
@@ -4591,20 +4616,20 @@
               </a:rPr>
               <a:t>‫‪75%‬‬</a:t>
             </a:r>
-            <a:endParaRPr lang="he-IL" sz="2400" dirty="0"/>
-          </a:p>
-        </p:txBody>
-      </p:sp>
-      <p:sp>
-        <p:nvSpPr>
-          <p:cNvPr id="8" name="Text 6"/>
-          <p:cNvSpPr/>
-          <p:nvPr/>
-        </p:nvSpPr>
-        <p:spPr>
-          <a:xfrm>
-            <a:off x="8424367" y="2907792"/>
-            <a:ext cx="2688336" cy="237744"/>
+            <a:endParaRPr lang="he-IL" sz="2500" dirty="0"/>
+          </a:p>
+        </p:txBody>
+      </p:sp>
+      <p:sp>
+        <p:nvSpPr>
+          <p:cNvPr id="9" name="Text 7"/>
+          <p:cNvSpPr/>
+          <p:nvPr/>
+        </p:nvSpPr>
+        <p:spPr>
+          <a:xfrm>
+            <a:off x="8442655" y="2944368"/>
+            <a:ext cx="2633472" cy="256032"/>
           </a:xfrm>
           <a:prstGeom prst="rect">
             <a:avLst/>
@@ -4639,13 +4664,13 @@
       </p:sp>
       <p:sp>
         <p:nvSpPr>
-          <p:cNvPr id="9" name="Text 7"/>
-          <p:cNvSpPr/>
-          <p:nvPr/>
-        </p:nvSpPr>
-        <p:spPr>
-          <a:xfrm>
-            <a:off x="7692847" y="2450592"/>
+          <p:cNvPr id="10" name="Text 8"/>
+          <p:cNvSpPr/>
+          <p:nvPr/>
+        </p:nvSpPr>
+        <p:spPr>
+          <a:xfrm>
+            <a:off x="7692847" y="2459736"/>
             <a:ext cx="475488" cy="365760"/>
           </a:xfrm>
           <a:prstGeom prst="rect">
@@ -4665,7 +4690,7 @@
               <a:buNone/>
             </a:pPr>
             <a:r>
-              <a:rPr lang="en-US" altLang="en-US" sz="1900" b="1" dirty="0">
+              <a:rPr lang="en-US" altLang="en-US" sz="2100" b="1" dirty="0">
                 <a:solidFill>
                   <a:srgbClr val="5E6E85"/>
                 </a:solidFill>
@@ -4675,28 +4700,248 @@
               </a:rPr>
               <a:t>←</a:t>
             </a:r>
-            <a:endParaRPr lang="en-US" sz="1900" dirty="0"/>
-          </a:p>
-        </p:txBody>
-      </p:sp>
-      <p:sp>
-        <p:nvSpPr>
-          <p:cNvPr id="10" name="Shape 8"/>
-          <p:cNvSpPr/>
-          <p:nvPr/>
-        </p:nvSpPr>
-        <p:spPr>
-          <a:xfrm>
-            <a:off x="4492447" y="2048256"/>
-            <a:ext cx="3200400" cy="1170432"/>
+            <a:endParaRPr lang="en-US" sz="2100" dirty="0"/>
+          </a:p>
+        </p:txBody>
+      </p:sp>
+      <p:sp>
+        <p:nvSpPr>
+          <p:cNvPr id="11" name="Shape 9"/>
+          <p:cNvSpPr/>
+          <p:nvPr/>
+        </p:nvSpPr>
+        <p:spPr>
+          <a:xfrm>
+            <a:off x="4492447" y="1956816"/>
+            <a:ext cx="3200400" cy="1371600"/>
           </a:xfrm>
           <a:prstGeom prst="roundRect">
             <a:avLst>
-              <a:gd name="adj" fmla="val 3906"/>
+              <a:gd name="adj" fmla="val 3333"/>
             </a:avLst>
           </a:prstGeom>
           <a:solidFill>
             <a:srgbClr val="182133"/>
+          </a:solidFill>
+          <a:ln w="19050">
+            <a:solidFill>
+              <a:srgbClr val="3DD9EB"/>
+            </a:solidFill>
+            <a:prstDash val="solid"/>
+          </a:ln>
+        </p:spPr>
+      </p:sp>
+      <p:sp>
+        <p:nvSpPr>
+          <p:cNvPr id="12" name="Shape 10"/>
+          <p:cNvSpPr/>
+          <p:nvPr/>
+        </p:nvSpPr>
+        <p:spPr>
+          <a:xfrm>
+            <a:off x="7642555" y="2139696"/>
+            <a:ext cx="50292" cy="1005840"/>
+          </a:xfrm>
+          <a:prstGeom prst="rect">
+            <a:avLst/>
+          </a:prstGeom>
+          <a:solidFill>
+            <a:srgbClr val="3DD9EB"/>
+          </a:solidFill>
+          <a:ln w="12700">
+            <a:solidFill>
+              <a:srgbClr val="3DD9EB"/>
+            </a:solidFill>
+            <a:prstDash val="solid"/>
+          </a:ln>
+        </p:spPr>
+      </p:sp>
+      <p:sp>
+        <p:nvSpPr>
+          <p:cNvPr id="13" name="Text 11"/>
+          <p:cNvSpPr/>
+          <p:nvPr/>
+        </p:nvSpPr>
+        <p:spPr>
+          <a:xfrm>
+            <a:off x="4766767" y="2139696"/>
+            <a:ext cx="2633472" cy="237744"/>
+          </a:xfrm>
+          <a:prstGeom prst="rect">
+            <a:avLst/>
+          </a:prstGeom>
+          <a:noFill/>
+          <a:ln/>
+        </p:spPr>
+        <p:txBody>
+          <a:bodyPr wrap="square" lIns="0" tIns="0" rIns="0" bIns="0" rtlCol="0" anchor="ctr"/>
+          <a:lstStyle/>
+          <a:p>
+            <a:pPr rtl="1" algn="r" indent="0" marL="0">
+              <a:lnSpc>
+                <a:spcPct val="100000"/>
+              </a:lnSpc>
+              <a:buNone/>
+            </a:pPr>
+            <a:r>
+              <a:rPr lang="he-IL" altLang="en-US" sz="1050" b="1" spc="80" kern="0" dirty="0">
+                <a:solidFill>
+                  <a:srgbClr val="91A0B7"/>
+                </a:solidFill>
+                <a:latin typeface="Calibri" pitchFamily="34" charset="0"/>
+                <a:ea typeface="Calibri" pitchFamily="34" charset="-122"/>
+                <a:cs typeface="Calibri" pitchFamily="34" charset="-120"/>
+              </a:rPr>
+              <a:t>‫אוקטובר ‪2026‬‬</a:t>
+            </a:r>
+            <a:endParaRPr lang="he-IL" sz="1050" dirty="0"/>
+          </a:p>
+        </p:txBody>
+      </p:sp>
+      <p:sp>
+        <p:nvSpPr>
+          <p:cNvPr id="14" name="Text 12"/>
+          <p:cNvSpPr/>
+          <p:nvPr/>
+        </p:nvSpPr>
+        <p:spPr>
+          <a:xfrm>
+            <a:off x="4766767" y="2432304"/>
+            <a:ext cx="2633472" cy="457200"/>
+          </a:xfrm>
+          <a:prstGeom prst="rect">
+            <a:avLst/>
+          </a:prstGeom>
+          <a:noFill/>
+          <a:ln/>
+        </p:spPr>
+        <p:txBody>
+          <a:bodyPr wrap="square" lIns="0" tIns="0" rIns="0" bIns="0" rtlCol="0" anchor="ctr"/>
+          <a:lstStyle/>
+          <a:p>
+            <a:pPr rtl="1" algn="r" indent="0" marL="0">
+              <a:lnSpc>
+                <a:spcPct val="100000"/>
+              </a:lnSpc>
+              <a:buNone/>
+            </a:pPr>
+            <a:r>
+              <a:rPr lang="he-IL" altLang="en-US" sz="2500" b="1" dirty="0">
+                <a:solidFill>
+                  <a:srgbClr val="3DD9EB"/>
+                </a:solidFill>
+                <a:latin typeface="Calibri" pitchFamily="34" charset="0"/>
+                <a:ea typeface="Calibri" pitchFamily="34" charset="-122"/>
+                <a:cs typeface="Calibri" pitchFamily="34" charset="-120"/>
+              </a:rPr>
+              <a:t>‫הוצאת ‪PO‬‬</a:t>
+            </a:r>
+            <a:endParaRPr lang="he-IL" sz="2500" dirty="0"/>
+          </a:p>
+        </p:txBody>
+      </p:sp>
+      <p:sp>
+        <p:nvSpPr>
+          <p:cNvPr id="15" name="Text 13"/>
+          <p:cNvSpPr/>
+          <p:nvPr/>
+        </p:nvSpPr>
+        <p:spPr>
+          <a:xfrm>
+            <a:off x="4766767" y="2944368"/>
+            <a:ext cx="2633472" cy="256032"/>
+          </a:xfrm>
+          <a:prstGeom prst="rect">
+            <a:avLst/>
+          </a:prstGeom>
+          <a:noFill/>
+          <a:ln/>
+        </p:spPr>
+        <p:txBody>
+          <a:bodyPr wrap="square" lIns="0" tIns="0" rIns="0" bIns="0" rtlCol="0" anchor="ctr"/>
+          <a:lstStyle/>
+          <a:p>
+            <a:pPr rtl="1" algn="r" indent="0" marL="0">
+              <a:lnSpc>
+                <a:spcPct val="100000"/>
+              </a:lnSpc>
+              <a:buNone/>
+            </a:pPr>
+            <a:r>
+              <a:rPr lang="he-IL" altLang="en-US" sz="1100" dirty="0">
+                <a:solidFill>
+                  <a:srgbClr val="5E6E85"/>
+                </a:solidFill>
+                <a:latin typeface="Calibri" pitchFamily="34" charset="0"/>
+                <a:ea typeface="Calibri" pitchFamily="34" charset="-122"/>
+                <a:cs typeface="Calibri" pitchFamily="34" charset="-120"/>
+              </a:rPr>
+              <a:t>‫חודשיים זמן אספקה מ-‪Dell‬‬</a:t>
+            </a:r>
+            <a:endParaRPr lang="he-IL" sz="1100" dirty="0"/>
+          </a:p>
+        </p:txBody>
+      </p:sp>
+      <p:sp>
+        <p:nvSpPr>
+          <p:cNvPr id="16" name="Text 14"/>
+          <p:cNvSpPr/>
+          <p:nvPr/>
+        </p:nvSpPr>
+        <p:spPr>
+          <a:xfrm>
+            <a:off x="4016959" y="2459736"/>
+            <a:ext cx="475488" cy="365760"/>
+          </a:xfrm>
+          <a:prstGeom prst="rect">
+            <a:avLst/>
+          </a:prstGeom>
+          <a:noFill/>
+          <a:ln/>
+        </p:spPr>
+        <p:txBody>
+          <a:bodyPr wrap="square" lIns="0" tIns="0" rIns="0" bIns="0" rtlCol="0" anchor="ctr"/>
+          <a:lstStyle/>
+          <a:p>
+            <a:pPr algn="ctr" indent="0" marL="0">
+              <a:lnSpc>
+                <a:spcPct val="100000"/>
+              </a:lnSpc>
+              <a:buNone/>
+            </a:pPr>
+            <a:r>
+              <a:rPr lang="en-US" altLang="en-US" sz="2100" b="1" dirty="0">
+                <a:solidFill>
+                  <a:srgbClr val="5E6E85"/>
+                </a:solidFill>
+                <a:latin typeface="Calibri" pitchFamily="34" charset="0"/>
+                <a:ea typeface="Calibri" pitchFamily="34" charset="-122"/>
+                <a:cs typeface="Calibri" pitchFamily="34" charset="-120"/>
+              </a:rPr>
+              <a:t>←</a:t>
+            </a:r>
+            <a:endParaRPr lang="en-US" sz="2100" dirty="0"/>
+          </a:p>
+        </p:txBody>
+      </p:sp>
+      <p:sp>
+        <p:nvSpPr>
+          <p:cNvPr id="17" name="Shape 15"/>
+          <p:cNvSpPr/>
+          <p:nvPr/>
+        </p:nvSpPr>
+        <p:spPr>
+          <a:xfrm>
+            <a:off x="816559" y="1956816"/>
+            <a:ext cx="3200400" cy="1371600"/>
+          </a:xfrm>
+          <a:prstGeom prst="roundRect">
+            <a:avLst>
+              <a:gd name="adj" fmla="val 3333"/>
+            </a:avLst>
+          </a:prstGeom>
+          <a:solidFill>
+            <a:srgbClr val="141C2C"/>
           </a:solidFill>
           <a:ln w="12700">
             <a:solidFill>
@@ -4708,194 +4953,24 @@
       </p:sp>
       <p:sp>
         <p:nvSpPr>
-          <p:cNvPr id="11" name="Text 9"/>
-          <p:cNvSpPr/>
-          <p:nvPr/>
-        </p:nvSpPr>
-        <p:spPr>
-          <a:xfrm>
-            <a:off x="4748479" y="2212848"/>
-            <a:ext cx="2688336" cy="237744"/>
-          </a:xfrm>
-          <a:prstGeom prst="rect">
-            <a:avLst/>
-          </a:prstGeom>
-          <a:noFill/>
-          <a:ln/>
-        </p:spPr>
-        <p:txBody>
-          <a:bodyPr wrap="square" lIns="0" tIns="0" rIns="0" bIns="0" rtlCol="0" anchor="ctr"/>
-          <a:lstStyle/>
-          <a:p>
-            <a:pPr rtl="1" algn="r" indent="0" marL="0">
-              <a:lnSpc>
-                <a:spcPct val="100000"/>
-              </a:lnSpc>
-              <a:buNone/>
-            </a:pPr>
-            <a:r>
-              <a:rPr lang="he-IL" altLang="en-US" sz="1050" b="1" spc="80" kern="0" dirty="0">
-                <a:solidFill>
-                  <a:srgbClr val="91A0B7"/>
-                </a:solidFill>
-                <a:latin typeface="Calibri" pitchFamily="34" charset="0"/>
-                <a:ea typeface="Calibri" pitchFamily="34" charset="-122"/>
-                <a:cs typeface="Calibri" pitchFamily="34" charset="-120"/>
-              </a:rPr>
-              <a:t>‫אוקטובר ‪2026‬‬</a:t>
-            </a:r>
-            <a:endParaRPr lang="he-IL" sz="1050" dirty="0"/>
-          </a:p>
-        </p:txBody>
-      </p:sp>
-      <p:sp>
-        <p:nvSpPr>
-          <p:cNvPr id="12" name="Text 10"/>
-          <p:cNvSpPr/>
-          <p:nvPr/>
-        </p:nvSpPr>
-        <p:spPr>
-          <a:xfrm>
-            <a:off x="4748479" y="2468880"/>
-            <a:ext cx="2688336" cy="420624"/>
-          </a:xfrm>
-          <a:prstGeom prst="rect">
-            <a:avLst/>
-          </a:prstGeom>
-          <a:noFill/>
-          <a:ln/>
-        </p:spPr>
-        <p:txBody>
-          <a:bodyPr wrap="square" lIns="0" tIns="0" rIns="0" bIns="0" rtlCol="0" anchor="ctr"/>
-          <a:lstStyle/>
-          <a:p>
-            <a:pPr rtl="1" algn="r" indent="0" marL="0">
-              <a:lnSpc>
-                <a:spcPct val="100000"/>
-              </a:lnSpc>
-              <a:buNone/>
-            </a:pPr>
-            <a:r>
-              <a:rPr lang="he-IL" altLang="en-US" sz="2400" b="1" dirty="0">
-                <a:solidFill>
-                  <a:srgbClr val="3DD9EB"/>
-                </a:solidFill>
-                <a:latin typeface="Calibri" pitchFamily="34" charset="0"/>
-                <a:ea typeface="Calibri" pitchFamily="34" charset="-122"/>
-                <a:cs typeface="Calibri" pitchFamily="34" charset="-120"/>
-              </a:rPr>
-              <a:t>‫הוצאת ‪PO‬‬</a:t>
-            </a:r>
-            <a:endParaRPr lang="he-IL" sz="2400" dirty="0"/>
-          </a:p>
-        </p:txBody>
-      </p:sp>
-      <p:sp>
-        <p:nvSpPr>
-          <p:cNvPr id="13" name="Text 11"/>
-          <p:cNvSpPr/>
-          <p:nvPr/>
-        </p:nvSpPr>
-        <p:spPr>
-          <a:xfrm>
-            <a:off x="4748479" y="2907792"/>
-            <a:ext cx="2688336" cy="237744"/>
-          </a:xfrm>
-          <a:prstGeom prst="rect">
-            <a:avLst/>
-          </a:prstGeom>
-          <a:noFill/>
-          <a:ln/>
-        </p:spPr>
-        <p:txBody>
-          <a:bodyPr wrap="square" lIns="0" tIns="0" rIns="0" bIns="0" rtlCol="0" anchor="ctr"/>
-          <a:lstStyle/>
-          <a:p>
-            <a:pPr rtl="1" algn="r" indent="0" marL="0">
-              <a:lnSpc>
-                <a:spcPct val="100000"/>
-              </a:lnSpc>
-              <a:buNone/>
-            </a:pPr>
-            <a:r>
-              <a:rPr lang="he-IL" altLang="en-US" sz="1100" dirty="0">
-                <a:solidFill>
-                  <a:srgbClr val="5E6E85"/>
-                </a:solidFill>
-                <a:latin typeface="Calibri" pitchFamily="34" charset="0"/>
-                <a:ea typeface="Calibri" pitchFamily="34" charset="-122"/>
-                <a:cs typeface="Calibri" pitchFamily="34" charset="-120"/>
-              </a:rPr>
-              <a:t>‫חודשיים זמן אספקה מ-‪Dell‬‬</a:t>
-            </a:r>
-            <a:endParaRPr lang="he-IL" sz="1100" dirty="0"/>
-          </a:p>
-        </p:txBody>
-      </p:sp>
-      <p:sp>
-        <p:nvSpPr>
-          <p:cNvPr id="14" name="Text 12"/>
-          <p:cNvSpPr/>
-          <p:nvPr/>
-        </p:nvSpPr>
-        <p:spPr>
-          <a:xfrm>
-            <a:off x="4016959" y="2450592"/>
-            <a:ext cx="475488" cy="365760"/>
-          </a:xfrm>
-          <a:prstGeom prst="rect">
-            <a:avLst/>
-          </a:prstGeom>
-          <a:noFill/>
-          <a:ln/>
-        </p:spPr>
-        <p:txBody>
-          <a:bodyPr wrap="square" lIns="0" tIns="0" rIns="0" bIns="0" rtlCol="0" anchor="ctr"/>
-          <a:lstStyle/>
-          <a:p>
-            <a:pPr algn="ctr" indent="0" marL="0">
-              <a:lnSpc>
-                <a:spcPct val="100000"/>
-              </a:lnSpc>
-              <a:buNone/>
-            </a:pPr>
-            <a:r>
-              <a:rPr lang="en-US" altLang="en-US" sz="1900" b="1" dirty="0">
-                <a:solidFill>
-                  <a:srgbClr val="5E6E85"/>
-                </a:solidFill>
-                <a:latin typeface="Calibri" pitchFamily="34" charset="0"/>
-                <a:ea typeface="Calibri" pitchFamily="34" charset="-122"/>
-                <a:cs typeface="Calibri" pitchFamily="34" charset="-120"/>
-              </a:rPr>
-              <a:t>←</a:t>
-            </a:r>
-            <a:endParaRPr lang="en-US" sz="1900" dirty="0"/>
-          </a:p>
-        </p:txBody>
-      </p:sp>
-      <p:sp>
-        <p:nvSpPr>
-          <p:cNvPr id="15" name="Shape 13"/>
-          <p:cNvSpPr/>
-          <p:nvPr/>
-        </p:nvSpPr>
-        <p:spPr>
-          <a:xfrm>
-            <a:off x="816559" y="2048256"/>
-            <a:ext cx="3200400" cy="1170432"/>
-          </a:xfrm>
-          <a:prstGeom prst="roundRect">
-            <a:avLst>
-              <a:gd name="adj" fmla="val 3906"/>
-            </a:avLst>
+          <p:cNvPr id="18" name="Shape 16"/>
+          <p:cNvSpPr/>
+          <p:nvPr/>
+        </p:nvSpPr>
+        <p:spPr>
+          <a:xfrm>
+            <a:off x="3966667" y="2139696"/>
+            <a:ext cx="50292" cy="1005840"/>
+          </a:xfrm>
+          <a:prstGeom prst="rect">
+            <a:avLst/>
           </a:prstGeom>
           <a:solidFill>
-            <a:srgbClr val="182133"/>
+            <a:srgbClr val="FF6B7A"/>
           </a:solidFill>
           <a:ln w="12700">
             <a:solidFill>
-              <a:srgbClr val="5A2A38"/>
+              <a:srgbClr val="FF6B7A"/>
             </a:solidFill>
             <a:prstDash val="solid"/>
           </a:ln>
@@ -4903,14 +4978,14 @@
       </p:sp>
       <p:sp>
         <p:nvSpPr>
-          <p:cNvPr id="16" name="Text 14"/>
-          <p:cNvSpPr/>
-          <p:nvPr/>
-        </p:nvSpPr>
-        <p:spPr>
-          <a:xfrm>
-            <a:off x="1072591" y="2212848"/>
-            <a:ext cx="2688336" cy="237744"/>
+          <p:cNvPr id="19" name="Text 17"/>
+          <p:cNvSpPr/>
+          <p:nvPr/>
+        </p:nvSpPr>
+        <p:spPr>
+          <a:xfrm>
+            <a:off x="1090879" y="2139696"/>
+            <a:ext cx="2633472" cy="237744"/>
           </a:xfrm>
           <a:prstGeom prst="rect">
             <a:avLst/>
@@ -4945,14 +5020,14 @@
       </p:sp>
       <p:sp>
         <p:nvSpPr>
-          <p:cNvPr id="17" name="Text 15"/>
-          <p:cNvSpPr/>
-          <p:nvPr/>
-        </p:nvSpPr>
-        <p:spPr>
-          <a:xfrm>
-            <a:off x="1072591" y="2468880"/>
-            <a:ext cx="2688336" cy="420624"/>
+          <p:cNvPr id="20" name="Text 18"/>
+          <p:cNvSpPr/>
+          <p:nvPr/>
+        </p:nvSpPr>
+        <p:spPr>
+          <a:xfrm>
+            <a:off x="1090879" y="2432304"/>
+            <a:ext cx="2633472" cy="457200"/>
           </a:xfrm>
           <a:prstGeom prst="rect">
             <a:avLst/>
@@ -4971,7 +5046,7 @@
               <a:buNone/>
             </a:pPr>
             <a:r>
-              <a:rPr lang="he-IL" altLang="en-US" sz="2400" b="1" dirty="0">
+              <a:rPr lang="he-IL" altLang="en-US" sz="2500" b="1" dirty="0">
                 <a:solidFill>
                   <a:srgbClr val="FF6B7A"/>
                 </a:solidFill>
@@ -4981,20 +5056,20 @@
               </a:rPr>
               <a:t>‫‪80%‬ ואספקה‬</a:t>
             </a:r>
-            <a:endParaRPr lang="he-IL" sz="2400" dirty="0"/>
-          </a:p>
-        </p:txBody>
-      </p:sp>
-      <p:sp>
-        <p:nvSpPr>
-          <p:cNvPr id="18" name="Text 16"/>
-          <p:cNvSpPr/>
-          <p:nvPr/>
-        </p:nvSpPr>
-        <p:spPr>
-          <a:xfrm>
-            <a:off x="1072591" y="2907792"/>
-            <a:ext cx="2688336" cy="237744"/>
+            <a:endParaRPr lang="he-IL" sz="2500" dirty="0"/>
+          </a:p>
+        </p:txBody>
+      </p:sp>
+      <p:sp>
+        <p:nvSpPr>
+          <p:cNvPr id="21" name="Text 19"/>
+          <p:cNvSpPr/>
+          <p:nvPr/>
+        </p:nvSpPr>
+        <p:spPr>
+          <a:xfrm>
+            <a:off x="1090879" y="2944368"/>
+            <a:ext cx="2633472" cy="256032"/>
           </a:xfrm>
           <a:prstGeom prst="rect">
             <a:avLst/>
@@ -5029,18 +5104,18 @@
       </p:sp>
       <p:sp>
         <p:nvSpPr>
-          <p:cNvPr id="19" name="Shape 17"/>
-          <p:cNvSpPr/>
-          <p:nvPr/>
-        </p:nvSpPr>
-        <p:spPr>
-          <a:xfrm>
-            <a:off x="6229807" y="3529584"/>
-            <a:ext cx="5138928" cy="1700784"/>
+          <p:cNvPr id="22" name="Shape 20"/>
+          <p:cNvSpPr/>
+          <p:nvPr/>
+        </p:nvSpPr>
+        <p:spPr>
+          <a:xfrm>
+            <a:off x="6229807" y="3657600"/>
+            <a:ext cx="5138928" cy="1847088"/>
           </a:xfrm>
           <a:prstGeom prst="roundRect">
             <a:avLst>
-              <a:gd name="adj" fmla="val 2688"/>
+              <a:gd name="adj" fmla="val 2475"/>
             </a:avLst>
           </a:prstGeom>
           <a:solidFill>
@@ -5056,13 +5131,13 @@
       </p:sp>
       <p:sp>
         <p:nvSpPr>
-          <p:cNvPr id="20" name="Text 18"/>
-          <p:cNvSpPr/>
-          <p:nvPr/>
-        </p:nvSpPr>
-        <p:spPr>
-          <a:xfrm>
-            <a:off x="10454335" y="3730752"/>
+          <p:cNvPr id="23" name="Text 21"/>
+          <p:cNvSpPr/>
+          <p:nvPr/>
+        </p:nvSpPr>
+        <p:spPr>
+          <a:xfrm>
+            <a:off x="10454335" y="3858768"/>
             <a:ext cx="640080" cy="384048"/>
           </a:xfrm>
           <a:prstGeom prst="rect">
@@ -5098,13 +5173,13 @@
       </p:sp>
       <p:sp>
         <p:nvSpPr>
-          <p:cNvPr id="21" name="Text 19"/>
-          <p:cNvSpPr/>
-          <p:nvPr/>
-        </p:nvSpPr>
-        <p:spPr>
-          <a:xfrm>
-            <a:off x="6540703" y="3749040"/>
+          <p:cNvPr id="24" name="Text 22"/>
+          <p:cNvSpPr/>
+          <p:nvPr/>
+        </p:nvSpPr>
+        <p:spPr>
+          <a:xfrm>
+            <a:off x="6540703" y="3877056"/>
             <a:ext cx="3822192" cy="365760"/>
           </a:xfrm>
           <a:prstGeom prst="rect">
@@ -5140,14 +5215,14 @@
       </p:sp>
       <p:sp>
         <p:nvSpPr>
-          <p:cNvPr id="22" name="Text 20"/>
-          <p:cNvSpPr/>
-          <p:nvPr/>
-        </p:nvSpPr>
-        <p:spPr>
-          <a:xfrm>
-            <a:off x="6540703" y="4169664"/>
-            <a:ext cx="4517136" cy="603504"/>
+          <p:cNvPr id="25" name="Text 23"/>
+          <p:cNvSpPr/>
+          <p:nvPr/>
+        </p:nvSpPr>
+        <p:spPr>
+          <a:xfrm>
+            <a:off x="6540703" y="4352544"/>
+            <a:ext cx="4517136" cy="786384"/>
           </a:xfrm>
           <a:prstGeom prst="rect">
             <a:avLst/>
@@ -5161,12 +5236,12 @@
           <a:p>
             <a:pPr rtl="1" algn="r" indent="0" marL="0">
               <a:lnSpc>
-                <a:spcPct val="122000"/>
-              </a:lnSpc>
-              <a:buNone/>
-            </a:pPr>
-            <a:r>
-              <a:rPr lang="he-IL" altLang="en-US" sz="1200" dirty="0">
+                <a:spcPct val="126000"/>
+              </a:lnSpc>
+              <a:buNone/>
+            </a:pPr>
+            <a:r>
+              <a:rPr lang="he-IL" altLang="en-US" sz="1250" dirty="0">
                 <a:solidFill>
                   <a:srgbClr val="91A0B7"/>
                 </a:solidFill>
@@ -5176,24 +5251,24 @@
               </a:rPr>
               <a:t>‫חציית ‪80%‬ מסכנת את זמינות המערכת. חודשיים אספקה מ-‪Dell‬ פירושם שהחלון להוצאת ‪PO‬ נסגר באוקטובר. הצעת ‪Dell‬ עומדת על ‪$695,520‬ עבור ‪600 TB‬ לוגי.‬</a:t>
             </a:r>
-            <a:endParaRPr lang="he-IL" sz="1200" dirty="0"/>
-          </a:p>
-        </p:txBody>
-      </p:sp>
-      <p:sp>
-        <p:nvSpPr>
-          <p:cNvPr id="23" name="Shape 21"/>
-          <p:cNvSpPr/>
-          <p:nvPr/>
-        </p:nvSpPr>
-        <p:spPr>
-          <a:xfrm>
-            <a:off x="6540703" y="4773168"/>
-            <a:ext cx="4517136" cy="329184"/>
+            <a:endParaRPr lang="he-IL" sz="1250" dirty="0"/>
+          </a:p>
+        </p:txBody>
+      </p:sp>
+      <p:sp>
+        <p:nvSpPr>
+          <p:cNvPr id="26" name="Shape 24"/>
+          <p:cNvSpPr/>
+          <p:nvPr/>
+        </p:nvSpPr>
+        <p:spPr>
+          <a:xfrm>
+            <a:off x="6540703" y="4992624"/>
+            <a:ext cx="4517136" cy="365760"/>
           </a:xfrm>
           <a:prstGeom prst="roundRect">
             <a:avLst>
-              <a:gd name="adj" fmla="val 44444"/>
+              <a:gd name="adj" fmla="val 40000"/>
             </a:avLst>
           </a:prstGeom>
           <a:solidFill>
@@ -5209,14 +5284,14 @@
       </p:sp>
       <p:sp>
         <p:nvSpPr>
-          <p:cNvPr id="24" name="Text 22"/>
-          <p:cNvSpPr/>
-          <p:nvPr/>
-        </p:nvSpPr>
-        <p:spPr>
-          <a:xfrm>
-            <a:off x="6687007" y="4773168"/>
-            <a:ext cx="4224528" cy="329184"/>
+          <p:cNvPr id="27" name="Text 25"/>
+          <p:cNvSpPr/>
+          <p:nvPr/>
+        </p:nvSpPr>
+        <p:spPr>
+          <a:xfrm>
+            <a:off x="6687007" y="4992624"/>
+            <a:ext cx="4224528" cy="365760"/>
           </a:xfrm>
           <a:prstGeom prst="rect">
             <a:avLst/>
@@ -5251,18 +5326,18 @@
       </p:sp>
       <p:sp>
         <p:nvSpPr>
-          <p:cNvPr id="25" name="Shape 23"/>
-          <p:cNvSpPr/>
-          <p:nvPr/>
-        </p:nvSpPr>
-        <p:spPr>
-          <a:xfrm>
-            <a:off x="822960" y="3529584"/>
-            <a:ext cx="5138928" cy="1700784"/>
+          <p:cNvPr id="28" name="Shape 26"/>
+          <p:cNvSpPr/>
+          <p:nvPr/>
+        </p:nvSpPr>
+        <p:spPr>
+          <a:xfrm>
+            <a:off x="822960" y="3657600"/>
+            <a:ext cx="5138928" cy="1847088"/>
           </a:xfrm>
           <a:prstGeom prst="roundRect">
             <a:avLst>
-              <a:gd name="adj" fmla="val 2688"/>
+              <a:gd name="adj" fmla="val 2475"/>
             </a:avLst>
           </a:prstGeom>
           <a:solidFill>
@@ -5278,13 +5353,13 @@
       </p:sp>
       <p:sp>
         <p:nvSpPr>
-          <p:cNvPr id="26" name="Text 24"/>
-          <p:cNvSpPr/>
-          <p:nvPr/>
-        </p:nvSpPr>
-        <p:spPr>
-          <a:xfrm>
-            <a:off x="5047488" y="3730752"/>
+          <p:cNvPr id="29" name="Text 27"/>
+          <p:cNvSpPr/>
+          <p:nvPr/>
+        </p:nvSpPr>
+        <p:spPr>
+          <a:xfrm>
+            <a:off x="5047488" y="3858768"/>
             <a:ext cx="640080" cy="384048"/>
           </a:xfrm>
           <a:prstGeom prst="rect">
@@ -5320,13 +5395,13 @@
       </p:sp>
       <p:sp>
         <p:nvSpPr>
-          <p:cNvPr id="27" name="Text 25"/>
-          <p:cNvSpPr/>
-          <p:nvPr/>
-        </p:nvSpPr>
-        <p:spPr>
-          <a:xfrm>
-            <a:off x="1133856" y="3749040"/>
+          <p:cNvPr id="30" name="Text 28"/>
+          <p:cNvSpPr/>
+          <p:nvPr/>
+        </p:nvSpPr>
+        <p:spPr>
+          <a:xfrm>
+            <a:off x="1133856" y="3877056"/>
             <a:ext cx="3822192" cy="365760"/>
           </a:xfrm>
           <a:prstGeom prst="rect">
@@ -5362,14 +5437,14 @@
       </p:sp>
       <p:sp>
         <p:nvSpPr>
-          <p:cNvPr id="28" name="Text 26"/>
-          <p:cNvSpPr/>
-          <p:nvPr/>
-        </p:nvSpPr>
-        <p:spPr>
-          <a:xfrm>
-            <a:off x="1133856" y="4169664"/>
-            <a:ext cx="4517136" cy="603504"/>
+          <p:cNvPr id="31" name="Text 29"/>
+          <p:cNvSpPr/>
+          <p:nvPr/>
+        </p:nvSpPr>
+        <p:spPr>
+          <a:xfrm>
+            <a:off x="1133856" y="4352544"/>
+            <a:ext cx="4517136" cy="786384"/>
           </a:xfrm>
           <a:prstGeom prst="rect">
             <a:avLst/>
@@ -5383,12 +5458,12 @@
           <a:p>
             <a:pPr rtl="1" algn="r" indent="0" marL="0">
               <a:lnSpc>
-                <a:spcPct val="122000"/>
-              </a:lnSpc>
-              <a:buNone/>
-            </a:pPr>
-            <a:r>
-              <a:rPr lang="he-IL" altLang="en-US" sz="1200" dirty="0">
+                <a:spcPct val="126000"/>
+              </a:lnSpc>
+              <a:buNone/>
+            </a:pPr>
+            <a:r>
+              <a:rPr lang="he-IL" altLang="en-US" sz="1250" dirty="0">
                 <a:solidFill>
                   <a:srgbClr val="91A0B7"/>
                 </a:solidFill>
@@ -5398,24 +5473,24 @@
               </a:rPr>
               <a:t>‫מפנה שטח ב-‪ECS‬ תוך שבועות, ללא ‪PO‬ וללא זמן אספקה. רץ במקביל לרכש ומקטין את הלחץ על הסף — אך אינו מחליף את הדיסקים ואינו עוצר את השעון.‬</a:t>
             </a:r>
-            <a:endParaRPr lang="he-IL" sz="1200" dirty="0"/>
-          </a:p>
-        </p:txBody>
-      </p:sp>
-      <p:sp>
-        <p:nvSpPr>
-          <p:cNvPr id="29" name="Shape 27"/>
-          <p:cNvSpPr/>
-          <p:nvPr/>
-        </p:nvSpPr>
-        <p:spPr>
-          <a:xfrm>
-            <a:off x="1133856" y="4773168"/>
-            <a:ext cx="4517136" cy="329184"/>
+            <a:endParaRPr lang="he-IL" sz="1250" dirty="0"/>
+          </a:p>
+        </p:txBody>
+      </p:sp>
+      <p:sp>
+        <p:nvSpPr>
+          <p:cNvPr id="32" name="Shape 30"/>
+          <p:cNvSpPr/>
+          <p:nvPr/>
+        </p:nvSpPr>
+        <p:spPr>
+          <a:xfrm>
+            <a:off x="1133856" y="4992624"/>
+            <a:ext cx="4517136" cy="365760"/>
           </a:xfrm>
           <a:prstGeom prst="roundRect">
             <a:avLst>
-              <a:gd name="adj" fmla="val 44444"/>
+              <a:gd name="adj" fmla="val 40000"/>
             </a:avLst>
           </a:prstGeom>
           <a:solidFill>
@@ -5431,14 +5506,14 @@
       </p:sp>
       <p:sp>
         <p:nvSpPr>
-          <p:cNvPr id="30" name="Text 28"/>
-          <p:cNvSpPr/>
-          <p:nvPr/>
-        </p:nvSpPr>
-        <p:spPr>
-          <a:xfrm>
-            <a:off x="1280160" y="4773168"/>
-            <a:ext cx="4224528" cy="329184"/>
+          <p:cNvPr id="33" name="Text 31"/>
+          <p:cNvSpPr/>
+          <p:nvPr/>
+        </p:nvSpPr>
+        <p:spPr>
+          <a:xfrm>
+            <a:off x="1280160" y="4992624"/>
+            <a:ext cx="4224528" cy="365760"/>
           </a:xfrm>
           <a:prstGeom prst="rect">
             <a:avLst/>
@@ -5473,7 +5548,7 @@
       </p:sp>
       <p:sp>
         <p:nvSpPr>
-          <p:cNvPr id="31" name="Shape 29"/>
+          <p:cNvPr id="34" name="Shape 32"/>
           <p:cNvSpPr/>
           <p:nvPr/>
         </p:nvSpPr>
@@ -5498,7 +5573,7 @@
       </p:sp>
       <p:sp>
         <p:nvSpPr>
-          <p:cNvPr id="32" name="Shape 30"/>
+          <p:cNvPr id="35" name="Shape 33"/>
           <p:cNvSpPr/>
           <p:nvPr/>
         </p:nvSpPr>
@@ -5523,7 +5598,7 @@
       </p:sp>
       <p:sp>
         <p:nvSpPr>
-          <p:cNvPr id="33" name="Text 31"/>
+          <p:cNvPr id="36" name="Text 34"/>
           <p:cNvSpPr/>
           <p:nvPr/>
         </p:nvSpPr>

--- a/presentations/ecs-to-s3/Harel_ECS_to_S3_CIO.pptx
+++ b/presentations/ecs-to-s3/Harel_ECS_to_S3_CIO.pptx
@@ -4445,7 +4445,7 @@
               <a:buNone/>
             </a:pPr>
             <a:r>
-              <a:rPr lang="he-IL" altLang="en-US" sz="2500" b="1" dirty="0">
+              <a:rPr lang="he-IL" altLang="en-US" sz="2600" b="1" dirty="0">
                 <a:solidFill>
                   <a:srgbClr val="F4F7FB"/>
                 </a:solidFill>
@@ -4453,9 +4453,9 @@
                 <a:ea typeface="Calibri" pitchFamily="34" charset="-122"/>
                 <a:cs typeface="Calibri" pitchFamily="34" charset="-120"/>
               </a:rPr>
-              <a:t>‫ה-‪PO‬ חייב לצאת באוקטובר ‪2026‬ — אחרת נגיע ל-‪80%‬ בדצמבר בלי דיסקים‬</a:t>
-            </a:r>
-            <a:endParaRPr lang="he-IL" sz="2500" dirty="0"/>
+              <a:t>‫שני מסלולים על השולחן — ושניהם צריכים תשובה עוד באוקטובר‬</a:t>
+            </a:r>
+            <a:endParaRPr lang="he-IL" sz="2600" dirty="0"/>
           </a:p>
         </p:txBody>
       </p:sp>
@@ -4492,16 +4492,150 @@
         </p:nvSpPr>
         <p:spPr>
           <a:xfrm>
-            <a:off x="8168335" y="1956816"/>
-            <a:ext cx="3200400" cy="1371600"/>
+            <a:off x="6229807" y="2560320"/>
+            <a:ext cx="5138928" cy="2761488"/>
           </a:xfrm>
           <a:prstGeom prst="roundRect">
             <a:avLst>
-              <a:gd name="adj" fmla="val 3333"/>
+              <a:gd name="adj" fmla="val 1656"/>
             </a:avLst>
           </a:prstGeom>
           <a:solidFill>
-            <a:srgbClr val="141C2C"/>
+            <a:srgbClr val="182133"/>
+          </a:solidFill>
+          <a:ln w="12700">
+            <a:solidFill>
+              <a:srgbClr val="5A4222"/>
+            </a:solidFill>
+            <a:prstDash val="solid"/>
+          </a:ln>
+        </p:spPr>
+      </p:sp>
+      <p:sp>
+        <p:nvSpPr>
+          <p:cNvPr id="6" name="Shape 4"/>
+          <p:cNvSpPr/>
+          <p:nvPr/>
+        </p:nvSpPr>
+        <p:spPr>
+          <a:xfrm>
+            <a:off x="11213287" y="2871216"/>
+            <a:ext cx="50292" cy="384048"/>
+          </a:xfrm>
+          <a:prstGeom prst="rect">
+            <a:avLst/>
+          </a:prstGeom>
+          <a:solidFill>
+            <a:srgbClr val="FF9F43"/>
+          </a:solidFill>
+          <a:ln w="12700">
+            <a:solidFill>
+              <a:srgbClr val="FF9F43"/>
+            </a:solidFill>
+            <a:prstDash val="solid"/>
+          </a:ln>
+        </p:spPr>
+      </p:sp>
+      <p:sp>
+        <p:nvSpPr>
+          <p:cNvPr id="7" name="Text 5"/>
+          <p:cNvSpPr/>
+          <p:nvPr/>
+        </p:nvSpPr>
+        <p:spPr>
+          <a:xfrm>
+            <a:off x="10234879" y="2852928"/>
+            <a:ext cx="658368" cy="420624"/>
+          </a:xfrm>
+          <a:prstGeom prst="rect">
+            <a:avLst/>
+          </a:prstGeom>
+          <a:noFill/>
+          <a:ln/>
+        </p:spPr>
+        <p:txBody>
+          <a:bodyPr wrap="square" lIns="0" tIns="0" rIns="0" bIns="0" rtlCol="0" anchor="ctr"/>
+          <a:lstStyle/>
+          <a:p>
+            <a:pPr algn="r" indent="0" marL="0">
+              <a:lnSpc>
+                <a:spcPct val="100000"/>
+              </a:lnSpc>
+              <a:buNone/>
+            </a:pPr>
+            <a:r>
+              <a:rPr lang="en-US" altLang="en-US" sz="2300" b="1" dirty="0">
+                <a:solidFill>
+                  <a:srgbClr val="FF9F43"/>
+                </a:solidFill>
+                <a:latin typeface="Calibri" pitchFamily="34" charset="0"/>
+                <a:ea typeface="Calibri" pitchFamily="34" charset="-122"/>
+                <a:cs typeface="Calibri" pitchFamily="34" charset="-120"/>
+              </a:rPr>
+              <a:t>01</a:t>
+            </a:r>
+            <a:endParaRPr lang="en-US" sz="2300" dirty="0"/>
+          </a:p>
+        </p:txBody>
+      </p:sp>
+      <p:sp>
+        <p:nvSpPr>
+          <p:cNvPr id="8" name="Text 6"/>
+          <p:cNvSpPr/>
+          <p:nvPr/>
+        </p:nvSpPr>
+        <p:spPr>
+          <a:xfrm>
+            <a:off x="6558991" y="2834640"/>
+            <a:ext cx="3566160" cy="457200"/>
+          </a:xfrm>
+          <a:prstGeom prst="rect">
+            <a:avLst/>
+          </a:prstGeom>
+          <a:noFill/>
+          <a:ln/>
+        </p:spPr>
+        <p:txBody>
+          <a:bodyPr wrap="square" lIns="0" tIns="0" rIns="0" bIns="0" rtlCol="0" anchor="ctr"/>
+          <a:lstStyle/>
+          <a:p>
+            <a:pPr rtl="1" algn="r" indent="0" marL="0">
+              <a:lnSpc>
+                <a:spcPct val="100000"/>
+              </a:lnSpc>
+              <a:buNone/>
+            </a:pPr>
+            <a:r>
+              <a:rPr lang="he-IL" altLang="en-US" sz="1800" b="1" dirty="0">
+                <a:solidFill>
+                  <a:srgbClr val="F4F7FB"/>
+                </a:solidFill>
+                <a:latin typeface="Calibri" pitchFamily="34" charset="0"/>
+                <a:ea typeface="Calibri" pitchFamily="34" charset="-122"/>
+                <a:cs typeface="Calibri" pitchFamily="34" charset="-120"/>
+              </a:rPr>
+              <a:t>‫הרחבת דיסקים ב-‪Dell ECS On-Prem‬‬</a:t>
+            </a:r>
+            <a:endParaRPr lang="he-IL" sz="1800" dirty="0"/>
+          </a:p>
+        </p:txBody>
+      </p:sp>
+      <p:sp>
+        <p:nvSpPr>
+          <p:cNvPr id="9" name="Shape 7"/>
+          <p:cNvSpPr/>
+          <p:nvPr/>
+        </p:nvSpPr>
+        <p:spPr>
+          <a:xfrm>
+            <a:off x="6558991" y="3438144"/>
+            <a:ext cx="4480560" cy="10973"/>
+          </a:xfrm>
+          <a:prstGeom prst="rect">
+            <a:avLst/>
+          </a:prstGeom>
+          <a:solidFill>
+            <a:srgbClr val="23304A"/>
           </a:solidFill>
           <a:ln w="12700">
             <a:solidFill>
@@ -4513,24 +4647,68 @@
       </p:sp>
       <p:sp>
         <p:nvSpPr>
-          <p:cNvPr id="6" name="Shape 4"/>
-          <p:cNvSpPr/>
-          <p:nvPr/>
-        </p:nvSpPr>
-        <p:spPr>
-          <a:xfrm>
-            <a:off x="11318443" y="2139696"/>
-            <a:ext cx="50292" cy="1005840"/>
-          </a:xfrm>
-          <a:prstGeom prst="rect">
-            <a:avLst/>
-          </a:prstGeom>
-          <a:solidFill>
-            <a:srgbClr val="FF9F43"/>
+          <p:cNvPr id="10" name="Text 8"/>
+          <p:cNvSpPr/>
+          <p:nvPr/>
+        </p:nvSpPr>
+        <p:spPr>
+          <a:xfrm>
+            <a:off x="6558991" y="3584448"/>
+            <a:ext cx="4480560" cy="1024128"/>
+          </a:xfrm>
+          <a:prstGeom prst="rect">
+            <a:avLst/>
+          </a:prstGeom>
+          <a:noFill/>
+          <a:ln/>
+        </p:spPr>
+        <p:txBody>
+          <a:bodyPr wrap="square" lIns="0" tIns="0" rIns="0" bIns="0" rtlCol="0" anchor="t"/>
+          <a:lstStyle/>
+          <a:p>
+            <a:pPr rtl="1" algn="r" indent="0" marL="0">
+              <a:lnSpc>
+                <a:spcPct val="134000"/>
+              </a:lnSpc>
+              <a:buNone/>
+            </a:pPr>
+            <a:r>
+              <a:rPr lang="he-IL" altLang="en-US" sz="1400" dirty="0">
+                <a:solidFill>
+                  <a:srgbClr val="91A0B7"/>
+                </a:solidFill>
+                <a:latin typeface="Calibri" pitchFamily="34" charset="0"/>
+                <a:ea typeface="Calibri" pitchFamily="34" charset="-122"/>
+                <a:cs typeface="Calibri" pitchFamily="34" charset="-120"/>
+              </a:rPr>
+              <a:t>‫רכש תוספת קיבולת מ-‪Dell‬. הצעה קיימת: ‪$695,520‬ עבור ‪600 TB‬ לוגי, כולל ‪Replica x3‬ בין שלושה אתרים. פתרון מוכר, בתוך המרכז שלנו — אך כרוך ב-‪PO‬, בזמן אספקה ובהוצאה הונית מלאה.‬</a:t>
+            </a:r>
+            <a:endParaRPr lang="he-IL" sz="1400" dirty="0"/>
+          </a:p>
+        </p:txBody>
+      </p:sp>
+      <p:sp>
+        <p:nvSpPr>
+          <p:cNvPr id="11" name="Shape 9"/>
+          <p:cNvSpPr/>
+          <p:nvPr/>
+        </p:nvSpPr>
+        <p:spPr>
+          <a:xfrm>
+            <a:off x="6558991" y="4626864"/>
+            <a:ext cx="4480560" cy="420624"/>
+          </a:xfrm>
+          <a:prstGeom prst="roundRect">
+            <a:avLst>
+              <a:gd name="adj" fmla="val 34783"/>
+            </a:avLst>
+          </a:prstGeom>
+          <a:solidFill>
+            <a:srgbClr val="3A2A12"/>
           </a:solidFill>
           <a:ln w="12700">
             <a:solidFill>
-              <a:srgbClr val="FF9F43"/>
+              <a:srgbClr val="3A2A12"/>
             </a:solidFill>
             <a:prstDash val="solid"/>
           </a:ln>
@@ -4538,14 +4716,14 @@
       </p:sp>
       <p:sp>
         <p:nvSpPr>
-          <p:cNvPr id="7" name="Text 5"/>
-          <p:cNvSpPr/>
-          <p:nvPr/>
-        </p:nvSpPr>
-        <p:spPr>
-          <a:xfrm>
-            <a:off x="8442655" y="2139696"/>
-            <a:ext cx="2633472" cy="237744"/>
+          <p:cNvPr id="12" name="Text 10"/>
+          <p:cNvSpPr/>
+          <p:nvPr/>
+        </p:nvSpPr>
+        <p:spPr>
+          <a:xfrm>
+            <a:off x="6705295" y="4626864"/>
+            <a:ext cx="4187952" cy="420624"/>
           </a:xfrm>
           <a:prstGeom prst="rect">
             <a:avLst/>
@@ -4564,49 +4742,7 @@
               <a:buNone/>
             </a:pPr>
             <a:r>
-              <a:rPr lang="he-IL" altLang="en-US" sz="1050" b="1" spc="80" kern="0" dirty="0">
-                <a:solidFill>
-                  <a:srgbClr val="91A0B7"/>
-                </a:solidFill>
-                <a:latin typeface="Calibri" pitchFamily="34" charset="0"/>
-                <a:ea typeface="Calibri" pitchFamily="34" charset="-122"/>
-                <a:cs typeface="Calibri" pitchFamily="34" charset="-120"/>
-              </a:rPr>
-              <a:t>‫היום · אוגוסט ‪2026‬‬</a:t>
-            </a:r>
-            <a:endParaRPr lang="he-IL" sz="1050" dirty="0"/>
-          </a:p>
-        </p:txBody>
-      </p:sp>
-      <p:sp>
-        <p:nvSpPr>
-          <p:cNvPr id="8" name="Text 6"/>
-          <p:cNvSpPr/>
-          <p:nvPr/>
-        </p:nvSpPr>
-        <p:spPr>
-          <a:xfrm>
-            <a:off x="8442655" y="2432304"/>
-            <a:ext cx="2633472" cy="457200"/>
-          </a:xfrm>
-          <a:prstGeom prst="rect">
-            <a:avLst/>
-          </a:prstGeom>
-          <a:noFill/>
-          <a:ln/>
-        </p:spPr>
-        <p:txBody>
-          <a:bodyPr wrap="square" lIns="0" tIns="0" rIns="0" bIns="0" rtlCol="0" anchor="ctr"/>
-          <a:lstStyle/>
-          <a:p>
-            <a:pPr rtl="1" algn="r" indent="0" marL="0">
-              <a:lnSpc>
-                <a:spcPct val="100000"/>
-              </a:lnSpc>
-              <a:buNone/>
-            </a:pPr>
-            <a:r>
-              <a:rPr lang="he-IL" altLang="en-US" sz="2500" b="1" dirty="0">
+              <a:rPr lang="he-IL" altLang="en-US" sz="1250" b="1" dirty="0">
                 <a:solidFill>
                   <a:srgbClr val="FF9F43"/>
                 </a:solidFill>
@@ -4614,118 +4750,34 @@
                 <a:ea typeface="Calibri" pitchFamily="34" charset="-122"/>
                 <a:cs typeface="Calibri" pitchFamily="34" charset="-120"/>
               </a:rPr>
-              <a:t>‫‪75%‬‬</a:t>
-            </a:r>
-            <a:endParaRPr lang="he-IL" sz="2500" dirty="0"/>
-          </a:p>
-        </p:txBody>
-      </p:sp>
-      <p:sp>
-        <p:nvSpPr>
-          <p:cNvPr id="9" name="Text 7"/>
-          <p:cNvSpPr/>
-          <p:nvPr/>
-        </p:nvSpPr>
-        <p:spPr>
-          <a:xfrm>
-            <a:off x="8442655" y="2944368"/>
-            <a:ext cx="2633472" cy="256032"/>
-          </a:xfrm>
-          <a:prstGeom prst="rect">
-            <a:avLst/>
-          </a:prstGeom>
-          <a:noFill/>
-          <a:ln/>
-        </p:spPr>
-        <p:txBody>
-          <a:bodyPr wrap="square" lIns="0" tIns="0" rIns="0" bIns="0" rtlCol="0" anchor="ctr"/>
-          <a:lstStyle/>
-          <a:p>
-            <a:pPr rtl="1" algn="r" indent="0" marL="0">
-              <a:lnSpc>
-                <a:spcPct val="100000"/>
-              </a:lnSpc>
-              <a:buNone/>
-            </a:pPr>
-            <a:r>
-              <a:rPr lang="he-IL" altLang="en-US" sz="1100" dirty="0">
-                <a:solidFill>
-                  <a:srgbClr val="5E6E85"/>
-                </a:solidFill>
-                <a:latin typeface="Calibri" pitchFamily="34" charset="0"/>
-                <a:ea typeface="Calibri" pitchFamily="34" charset="-122"/>
-                <a:cs typeface="Calibri" pitchFamily="34" charset="-120"/>
-              </a:rPr>
-              <a:t>‫‪687 TB‬ מתוך ‪916 TB‬ בשימוש‬</a:t>
-            </a:r>
-            <a:endParaRPr lang="he-IL" sz="1100" dirty="0"/>
-          </a:p>
-        </p:txBody>
-      </p:sp>
-      <p:sp>
-        <p:nvSpPr>
-          <p:cNvPr id="10" name="Text 8"/>
-          <p:cNvSpPr/>
-          <p:nvPr/>
-        </p:nvSpPr>
-        <p:spPr>
-          <a:xfrm>
-            <a:off x="7692847" y="2459736"/>
-            <a:ext cx="475488" cy="365760"/>
-          </a:xfrm>
-          <a:prstGeom prst="rect">
-            <a:avLst/>
-          </a:prstGeom>
-          <a:noFill/>
-          <a:ln/>
-        </p:spPr>
-        <p:txBody>
-          <a:bodyPr wrap="square" lIns="0" tIns="0" rIns="0" bIns="0" rtlCol="0" anchor="ctr"/>
-          <a:lstStyle/>
-          <a:p>
-            <a:pPr algn="ctr" indent="0" marL="0">
-              <a:lnSpc>
-                <a:spcPct val="100000"/>
-              </a:lnSpc>
-              <a:buNone/>
-            </a:pPr>
-            <a:r>
-              <a:rPr lang="en-US" altLang="en-US" sz="2100" b="1" dirty="0">
-                <a:solidFill>
-                  <a:srgbClr val="5E6E85"/>
-                </a:solidFill>
-                <a:latin typeface="Calibri" pitchFamily="34" charset="0"/>
-                <a:ea typeface="Calibri" pitchFamily="34" charset="-122"/>
-                <a:cs typeface="Calibri" pitchFamily="34" charset="-120"/>
-              </a:rPr>
-              <a:t>←</a:t>
-            </a:r>
-            <a:endParaRPr lang="en-US" sz="2100" dirty="0"/>
-          </a:p>
-        </p:txBody>
-      </p:sp>
-      <p:sp>
-        <p:nvSpPr>
-          <p:cNvPr id="11" name="Shape 9"/>
-          <p:cNvSpPr/>
-          <p:nvPr/>
-        </p:nvSpPr>
-        <p:spPr>
-          <a:xfrm>
-            <a:off x="4492447" y="1956816"/>
-            <a:ext cx="3200400" cy="1371600"/>
+              <a:t>‫נדרש: אישור תקציב ויציאה ל-‪PO‬ באוקטובר‬</a:t>
+            </a:r>
+            <a:endParaRPr lang="he-IL" sz="1250" dirty="0"/>
+          </a:p>
+        </p:txBody>
+      </p:sp>
+      <p:sp>
+        <p:nvSpPr>
+          <p:cNvPr id="13" name="Shape 11"/>
+          <p:cNvSpPr/>
+          <p:nvPr/>
+        </p:nvSpPr>
+        <p:spPr>
+          <a:xfrm>
+            <a:off x="822960" y="2560320"/>
+            <a:ext cx="5138928" cy="2761488"/>
           </a:xfrm>
           <a:prstGeom prst="roundRect">
             <a:avLst>
-              <a:gd name="adj" fmla="val 3333"/>
+              <a:gd name="adj" fmla="val 1656"/>
             </a:avLst>
           </a:prstGeom>
           <a:solidFill>
             <a:srgbClr val="182133"/>
           </a:solidFill>
-          <a:ln w="19050">
+          <a:ln w="12700">
             <a:solidFill>
-              <a:srgbClr val="3DD9EB"/>
+              <a:srgbClr val="2E5F6B"/>
             </a:solidFill>
             <a:prstDash val="solid"/>
           </a:ln>
@@ -4733,14 +4785,14 @@
       </p:sp>
       <p:sp>
         <p:nvSpPr>
-          <p:cNvPr id="12" name="Shape 10"/>
-          <p:cNvSpPr/>
-          <p:nvPr/>
-        </p:nvSpPr>
-        <p:spPr>
-          <a:xfrm>
-            <a:off x="7642555" y="2139696"/>
-            <a:ext cx="50292" cy="1005840"/>
+          <p:cNvPr id="14" name="Shape 12"/>
+          <p:cNvSpPr/>
+          <p:nvPr/>
+        </p:nvSpPr>
+        <p:spPr>
+          <a:xfrm>
+            <a:off x="5806440" y="2871216"/>
+            <a:ext cx="50292" cy="384048"/>
           </a:xfrm>
           <a:prstGeom prst="rect">
             <a:avLst/>
@@ -4758,14 +4810,14 @@
       </p:sp>
       <p:sp>
         <p:nvSpPr>
-          <p:cNvPr id="13" name="Text 11"/>
-          <p:cNvSpPr/>
-          <p:nvPr/>
-        </p:nvSpPr>
-        <p:spPr>
-          <a:xfrm>
-            <a:off x="4766767" y="2139696"/>
-            <a:ext cx="2633472" cy="237744"/>
+          <p:cNvPr id="15" name="Text 13"/>
+          <p:cNvSpPr/>
+          <p:nvPr/>
+        </p:nvSpPr>
+        <p:spPr>
+          <a:xfrm>
+            <a:off x="4828032" y="2852928"/>
+            <a:ext cx="658368" cy="420624"/>
           </a:xfrm>
           <a:prstGeom prst="rect">
             <a:avLst/>
@@ -4777,37 +4829,37 @@
           <a:bodyPr wrap="square" lIns="0" tIns="0" rIns="0" bIns="0" rtlCol="0" anchor="ctr"/>
           <a:lstStyle/>
           <a:p>
-            <a:pPr rtl="1" algn="r" indent="0" marL="0">
+            <a:pPr algn="r" indent="0" marL="0">
               <a:lnSpc>
                 <a:spcPct val="100000"/>
               </a:lnSpc>
               <a:buNone/>
             </a:pPr>
             <a:r>
-              <a:rPr lang="he-IL" altLang="en-US" sz="1050" b="1" spc="80" kern="0" dirty="0">
-                <a:solidFill>
-                  <a:srgbClr val="91A0B7"/>
-                </a:solidFill>
-                <a:latin typeface="Calibri" pitchFamily="34" charset="0"/>
-                <a:ea typeface="Calibri" pitchFamily="34" charset="-122"/>
-                <a:cs typeface="Calibri" pitchFamily="34" charset="-120"/>
-              </a:rPr>
-              <a:t>‫אוקטובר ‪2026‬‬</a:t>
-            </a:r>
-            <a:endParaRPr lang="he-IL" sz="1050" dirty="0"/>
-          </a:p>
-        </p:txBody>
-      </p:sp>
-      <p:sp>
-        <p:nvSpPr>
-          <p:cNvPr id="14" name="Text 12"/>
-          <p:cNvSpPr/>
-          <p:nvPr/>
-        </p:nvSpPr>
-        <p:spPr>
-          <a:xfrm>
-            <a:off x="4766767" y="2432304"/>
-            <a:ext cx="2633472" cy="457200"/>
+              <a:rPr lang="en-US" altLang="en-US" sz="2300" b="1" dirty="0">
+                <a:solidFill>
+                  <a:srgbClr val="3DD9EB"/>
+                </a:solidFill>
+                <a:latin typeface="Calibri" pitchFamily="34" charset="0"/>
+                <a:ea typeface="Calibri" pitchFamily="34" charset="-122"/>
+                <a:cs typeface="Calibri" pitchFamily="34" charset="-120"/>
+              </a:rPr>
+              <a:t>02</a:t>
+            </a:r>
+            <a:endParaRPr lang="en-US" sz="2300" dirty="0"/>
+          </a:p>
+        </p:txBody>
+      </p:sp>
+      <p:sp>
+        <p:nvSpPr>
+          <p:cNvPr id="16" name="Text 14"/>
+          <p:cNvSpPr/>
+          <p:nvPr/>
+        </p:nvSpPr>
+        <p:spPr>
+          <a:xfrm>
+            <a:off x="1152144" y="2834640"/>
+            <a:ext cx="3566160" cy="457200"/>
           </a:xfrm>
           <a:prstGeom prst="rect">
             <a:avLst/>
@@ -4826,101 +4878,17 @@
               <a:buNone/>
             </a:pPr>
             <a:r>
-              <a:rPr lang="he-IL" altLang="en-US" sz="2500" b="1" dirty="0">
-                <a:solidFill>
-                  <a:srgbClr val="3DD9EB"/>
-                </a:solidFill>
-                <a:latin typeface="Calibri" pitchFamily="34" charset="0"/>
-                <a:ea typeface="Calibri" pitchFamily="34" charset="-122"/>
-                <a:cs typeface="Calibri" pitchFamily="34" charset="-120"/>
-              </a:rPr>
-              <a:t>‫הוצאת ‪PO‬‬</a:t>
-            </a:r>
-            <a:endParaRPr lang="he-IL" sz="2500" dirty="0"/>
-          </a:p>
-        </p:txBody>
-      </p:sp>
-      <p:sp>
-        <p:nvSpPr>
-          <p:cNvPr id="15" name="Text 13"/>
-          <p:cNvSpPr/>
-          <p:nvPr/>
-        </p:nvSpPr>
-        <p:spPr>
-          <a:xfrm>
-            <a:off x="4766767" y="2944368"/>
-            <a:ext cx="2633472" cy="256032"/>
-          </a:xfrm>
-          <a:prstGeom prst="rect">
-            <a:avLst/>
-          </a:prstGeom>
-          <a:noFill/>
-          <a:ln/>
-        </p:spPr>
-        <p:txBody>
-          <a:bodyPr wrap="square" lIns="0" tIns="0" rIns="0" bIns="0" rtlCol="0" anchor="ctr"/>
-          <a:lstStyle/>
-          <a:p>
-            <a:pPr rtl="1" algn="r" indent="0" marL="0">
-              <a:lnSpc>
-                <a:spcPct val="100000"/>
-              </a:lnSpc>
-              <a:buNone/>
-            </a:pPr>
-            <a:r>
-              <a:rPr lang="he-IL" altLang="en-US" sz="1100" dirty="0">
-                <a:solidFill>
-                  <a:srgbClr val="5E6E85"/>
-                </a:solidFill>
-                <a:latin typeface="Calibri" pitchFamily="34" charset="0"/>
-                <a:ea typeface="Calibri" pitchFamily="34" charset="-122"/>
-                <a:cs typeface="Calibri" pitchFamily="34" charset="-120"/>
-              </a:rPr>
-              <a:t>‫חודשיים זמן אספקה מ-‪Dell‬‬</a:t>
-            </a:r>
-            <a:endParaRPr lang="he-IL" sz="1100" dirty="0"/>
-          </a:p>
-        </p:txBody>
-      </p:sp>
-      <p:sp>
-        <p:nvSpPr>
-          <p:cNvPr id="16" name="Text 14"/>
-          <p:cNvSpPr/>
-          <p:nvPr/>
-        </p:nvSpPr>
-        <p:spPr>
-          <a:xfrm>
-            <a:off x="4016959" y="2459736"/>
-            <a:ext cx="475488" cy="365760"/>
-          </a:xfrm>
-          <a:prstGeom prst="rect">
-            <a:avLst/>
-          </a:prstGeom>
-          <a:noFill/>
-          <a:ln/>
-        </p:spPr>
-        <p:txBody>
-          <a:bodyPr wrap="square" lIns="0" tIns="0" rIns="0" bIns="0" rtlCol="0" anchor="ctr"/>
-          <a:lstStyle/>
-          <a:p>
-            <a:pPr algn="ctr" indent="0" marL="0">
-              <a:lnSpc>
-                <a:spcPct val="100000"/>
-              </a:lnSpc>
-              <a:buNone/>
-            </a:pPr>
-            <a:r>
-              <a:rPr lang="en-US" altLang="en-US" sz="2100" b="1" dirty="0">
-                <a:solidFill>
-                  <a:srgbClr val="5E6E85"/>
-                </a:solidFill>
-                <a:latin typeface="Calibri" pitchFamily="34" charset="0"/>
-                <a:ea typeface="Calibri" pitchFamily="34" charset="-122"/>
-                <a:cs typeface="Calibri" pitchFamily="34" charset="-120"/>
-              </a:rPr>
-              <a:t>←</a:t>
-            </a:r>
-            <a:endParaRPr lang="en-US" sz="2100" dirty="0"/>
+              <a:rPr lang="he-IL" altLang="en-US" sz="1800" b="1" dirty="0">
+                <a:solidFill>
+                  <a:srgbClr val="F4F7FB"/>
+                </a:solidFill>
+                <a:latin typeface="Calibri" pitchFamily="34" charset="0"/>
+                <a:ea typeface="Calibri" pitchFamily="34" charset="-122"/>
+                <a:cs typeface="Calibri" pitchFamily="34" charset="-120"/>
+              </a:rPr>
+              <a:t>‫העתקת מסמכי דימות ו-‪Verint‬ ל-‪AWS S3‬‬</a:t>
+            </a:r>
+            <a:endParaRPr lang="he-IL" sz="1800" dirty="0"/>
           </a:p>
         </p:txBody>
       </p:sp>
@@ -4932,16 +4900,14 @@
         </p:nvSpPr>
         <p:spPr>
           <a:xfrm>
-            <a:off x="816559" y="1956816"/>
-            <a:ext cx="3200400" cy="1371600"/>
-          </a:xfrm>
-          <a:prstGeom prst="roundRect">
-            <a:avLst>
-              <a:gd name="adj" fmla="val 3333"/>
-            </a:avLst>
-          </a:prstGeom>
-          <a:solidFill>
-            <a:srgbClr val="141C2C"/>
+            <a:off x="1152144" y="3438144"/>
+            <a:ext cx="4480560" cy="10973"/>
+          </a:xfrm>
+          <a:prstGeom prst="rect">
+            <a:avLst/>
+          </a:prstGeom>
+          <a:solidFill>
+            <a:srgbClr val="23304A"/>
           </a:solidFill>
           <a:ln w="12700">
             <a:solidFill>
@@ -4953,14 +4919,150 @@
       </p:sp>
       <p:sp>
         <p:nvSpPr>
-          <p:cNvPr id="18" name="Shape 16"/>
-          <p:cNvSpPr/>
-          <p:nvPr/>
-        </p:nvSpPr>
-        <p:spPr>
-          <a:xfrm>
-            <a:off x="3966667" y="2139696"/>
-            <a:ext cx="50292" cy="1005840"/>
+          <p:cNvPr id="18" name="Text 16"/>
+          <p:cNvSpPr/>
+          <p:nvPr/>
+        </p:nvSpPr>
+        <p:spPr>
+          <a:xfrm>
+            <a:off x="1152144" y="3584448"/>
+            <a:ext cx="4480560" cy="1024128"/>
+          </a:xfrm>
+          <a:prstGeom prst="rect">
+            <a:avLst/>
+          </a:prstGeom>
+          <a:noFill/>
+          <a:ln/>
+        </p:spPr>
+        <p:txBody>
+          <a:bodyPr wrap="square" lIns="0" tIns="0" rIns="0" bIns="0" rtlCol="0" anchor="t"/>
+          <a:lstStyle/>
+          <a:p>
+            <a:pPr rtl="1" algn="r" indent="0" marL="0">
+              <a:lnSpc>
+                <a:spcPct val="134000"/>
+              </a:lnSpc>
+              <a:buNone/>
+            </a:pPr>
+            <a:r>
+              <a:rPr lang="he-IL" altLang="en-US" sz="1400" dirty="0">
+                <a:solidFill>
+                  <a:srgbClr val="91A0B7"/>
+                </a:solidFill>
+                <a:latin typeface="Calibri" pitchFamily="34" charset="0"/>
+                <a:ea typeface="Calibri" pitchFamily="34" charset="-122"/>
+                <a:cs typeface="Calibri" pitchFamily="34" charset="-120"/>
+              </a:rPr>
+              <a:t>‫העברת הארכיון לאחסון אובייקטים בענן. מפנה שטח ב-‪ECS‬ תוך שבועות, ללא ‪PO‬ וללא זמן אספקה, בתשלום לפי צריכה. רץ במקביל לרכש — אך אינו מחליף את הדיסקים.‬</a:t>
+            </a:r>
+            <a:endParaRPr lang="he-IL" sz="1400" dirty="0"/>
+          </a:p>
+        </p:txBody>
+      </p:sp>
+      <p:sp>
+        <p:nvSpPr>
+          <p:cNvPr id="19" name="Shape 17"/>
+          <p:cNvSpPr/>
+          <p:nvPr/>
+        </p:nvSpPr>
+        <p:spPr>
+          <a:xfrm>
+            <a:off x="1152144" y="4626864"/>
+            <a:ext cx="4480560" cy="420624"/>
+          </a:xfrm>
+          <a:prstGeom prst="roundRect">
+            <a:avLst>
+              <a:gd name="adj" fmla="val 34783"/>
+            </a:avLst>
+          </a:prstGeom>
+          <a:solidFill>
+            <a:srgbClr val="13303A"/>
+          </a:solidFill>
+          <a:ln w="12700">
+            <a:solidFill>
+              <a:srgbClr val="13303A"/>
+            </a:solidFill>
+            <a:prstDash val="solid"/>
+          </a:ln>
+        </p:spPr>
+      </p:sp>
+      <p:sp>
+        <p:nvSpPr>
+          <p:cNvPr id="20" name="Text 18"/>
+          <p:cNvSpPr/>
+          <p:nvPr/>
+        </p:nvSpPr>
+        <p:spPr>
+          <a:xfrm>
+            <a:off x="1298448" y="4626864"/>
+            <a:ext cx="4187952" cy="420624"/>
+          </a:xfrm>
+          <a:prstGeom prst="rect">
+            <a:avLst/>
+          </a:prstGeom>
+          <a:noFill/>
+          <a:ln/>
+        </p:spPr>
+        <p:txBody>
+          <a:bodyPr wrap="square" lIns="0" tIns="0" rIns="0" bIns="0" rtlCol="0" anchor="ctr"/>
+          <a:lstStyle/>
+          <a:p>
+            <a:pPr rtl="1" algn="r" indent="0" marL="0">
+              <a:lnSpc>
+                <a:spcPct val="100000"/>
+              </a:lnSpc>
+              <a:buNone/>
+            </a:pPr>
+            <a:r>
+              <a:rPr lang="he-IL" altLang="en-US" sz="1250" b="1" dirty="0">
+                <a:solidFill>
+                  <a:srgbClr val="3DD9EB"/>
+                </a:solidFill>
+                <a:latin typeface="Calibri" pitchFamily="34" charset="0"/>
+                <a:ea typeface="Calibri" pitchFamily="34" charset="-122"/>
+                <a:cs typeface="Calibri" pitchFamily="34" charset="-120"/>
+              </a:rPr>
+              <a:t>‫נדרש: אישור עקרוני + תקציב ‪POC‬‬</a:t>
+            </a:r>
+            <a:endParaRPr lang="he-IL" sz="1250" dirty="0"/>
+          </a:p>
+        </p:txBody>
+      </p:sp>
+      <p:sp>
+        <p:nvSpPr>
+          <p:cNvPr id="21" name="Shape 19"/>
+          <p:cNvSpPr/>
+          <p:nvPr/>
+        </p:nvSpPr>
+        <p:spPr>
+          <a:xfrm>
+            <a:off x="822960" y="5907024"/>
+            <a:ext cx="10545775" cy="10973"/>
+          </a:xfrm>
+          <a:prstGeom prst="rect">
+            <a:avLst/>
+          </a:prstGeom>
+          <a:solidFill>
+            <a:srgbClr val="23304A"/>
+          </a:solidFill>
+          <a:ln w="12700">
+            <a:solidFill>
+              <a:srgbClr val="23304A"/>
+            </a:solidFill>
+            <a:prstDash val="solid"/>
+          </a:ln>
+        </p:spPr>
+      </p:sp>
+      <p:sp>
+        <p:nvSpPr>
+          <p:cNvPr id="22" name="Shape 20"/>
+          <p:cNvSpPr/>
+          <p:nvPr/>
+        </p:nvSpPr>
+        <p:spPr>
+          <a:xfrm>
+            <a:off x="11249863" y="6172200"/>
+            <a:ext cx="118872" cy="118872"/>
           </a:xfrm>
           <a:prstGeom prst="rect">
             <a:avLst/>
@@ -4978,627 +5080,7 @@
       </p:sp>
       <p:sp>
         <p:nvSpPr>
-          <p:cNvPr id="19" name="Text 17"/>
-          <p:cNvSpPr/>
-          <p:nvPr/>
-        </p:nvSpPr>
-        <p:spPr>
-          <a:xfrm>
-            <a:off x="1090879" y="2139696"/>
-            <a:ext cx="2633472" cy="237744"/>
-          </a:xfrm>
-          <a:prstGeom prst="rect">
-            <a:avLst/>
-          </a:prstGeom>
-          <a:noFill/>
-          <a:ln/>
-        </p:spPr>
-        <p:txBody>
-          <a:bodyPr wrap="square" lIns="0" tIns="0" rIns="0" bIns="0" rtlCol="0" anchor="ctr"/>
-          <a:lstStyle/>
-          <a:p>
-            <a:pPr rtl="1" algn="r" indent="0" marL="0">
-              <a:lnSpc>
-                <a:spcPct val="100000"/>
-              </a:lnSpc>
-              <a:buNone/>
-            </a:pPr>
-            <a:r>
-              <a:rPr lang="he-IL" altLang="en-US" sz="1050" b="1" spc="80" kern="0" dirty="0">
-                <a:solidFill>
-                  <a:srgbClr val="91A0B7"/>
-                </a:solidFill>
-                <a:latin typeface="Calibri" pitchFamily="34" charset="0"/>
-                <a:ea typeface="Calibri" pitchFamily="34" charset="-122"/>
-                <a:cs typeface="Calibri" pitchFamily="34" charset="-120"/>
-              </a:rPr>
-              <a:t>‫דצמבר ‪2026‬‬</a:t>
-            </a:r>
-            <a:endParaRPr lang="he-IL" sz="1050" dirty="0"/>
-          </a:p>
-        </p:txBody>
-      </p:sp>
-      <p:sp>
-        <p:nvSpPr>
-          <p:cNvPr id="20" name="Text 18"/>
-          <p:cNvSpPr/>
-          <p:nvPr/>
-        </p:nvSpPr>
-        <p:spPr>
-          <a:xfrm>
-            <a:off x="1090879" y="2432304"/>
-            <a:ext cx="2633472" cy="457200"/>
-          </a:xfrm>
-          <a:prstGeom prst="rect">
-            <a:avLst/>
-          </a:prstGeom>
-          <a:noFill/>
-          <a:ln/>
-        </p:spPr>
-        <p:txBody>
-          <a:bodyPr wrap="square" lIns="0" tIns="0" rIns="0" bIns="0" rtlCol="0" anchor="ctr"/>
-          <a:lstStyle/>
-          <a:p>
-            <a:pPr rtl="1" algn="r" indent="0" marL="0">
-              <a:lnSpc>
-                <a:spcPct val="100000"/>
-              </a:lnSpc>
-              <a:buNone/>
-            </a:pPr>
-            <a:r>
-              <a:rPr lang="he-IL" altLang="en-US" sz="2500" b="1" dirty="0">
-                <a:solidFill>
-                  <a:srgbClr val="FF6B7A"/>
-                </a:solidFill>
-                <a:latin typeface="Calibri" pitchFamily="34" charset="0"/>
-                <a:ea typeface="Calibri" pitchFamily="34" charset="-122"/>
-                <a:cs typeface="Calibri" pitchFamily="34" charset="-120"/>
-              </a:rPr>
-              <a:t>‫‪80%‬ ואספקה‬</a:t>
-            </a:r>
-            <a:endParaRPr lang="he-IL" sz="2500" dirty="0"/>
-          </a:p>
-        </p:txBody>
-      </p:sp>
-      <p:sp>
-        <p:nvSpPr>
-          <p:cNvPr id="21" name="Text 19"/>
-          <p:cNvSpPr/>
-          <p:nvPr/>
-        </p:nvSpPr>
-        <p:spPr>
-          <a:xfrm>
-            <a:off x="1090879" y="2944368"/>
-            <a:ext cx="2633472" cy="256032"/>
-          </a:xfrm>
-          <a:prstGeom prst="rect">
-            <a:avLst/>
-          </a:prstGeom>
-          <a:noFill/>
-          <a:ln/>
-        </p:spPr>
-        <p:txBody>
-          <a:bodyPr wrap="square" lIns="0" tIns="0" rIns="0" bIns="0" rtlCol="0" anchor="ctr"/>
-          <a:lstStyle/>
-          <a:p>
-            <a:pPr rtl="1" algn="r" indent="0" marL="0">
-              <a:lnSpc>
-                <a:spcPct val="100000"/>
-              </a:lnSpc>
-              <a:buNone/>
-            </a:pPr>
-            <a:r>
-              <a:rPr lang="he-IL" altLang="en-US" sz="1100" dirty="0">
-                <a:solidFill>
-                  <a:srgbClr val="5E6E85"/>
-                </a:solidFill>
-                <a:latin typeface="Calibri" pitchFamily="34" charset="0"/>
-                <a:ea typeface="Calibri" pitchFamily="34" charset="-122"/>
-                <a:cs typeface="Calibri" pitchFamily="34" charset="-120"/>
-              </a:rPr>
-              <a:t>‫הדיסקים מגיעים בדיוק בזמן‬</a:t>
-            </a:r>
-            <a:endParaRPr lang="he-IL" sz="1100" dirty="0"/>
-          </a:p>
-        </p:txBody>
-      </p:sp>
-      <p:sp>
-        <p:nvSpPr>
-          <p:cNvPr id="22" name="Shape 20"/>
-          <p:cNvSpPr/>
-          <p:nvPr/>
-        </p:nvSpPr>
-        <p:spPr>
-          <a:xfrm>
-            <a:off x="6229807" y="3657600"/>
-            <a:ext cx="5138928" cy="1847088"/>
-          </a:xfrm>
-          <a:prstGeom prst="roundRect">
-            <a:avLst>
-              <a:gd name="adj" fmla="val 2475"/>
-            </a:avLst>
-          </a:prstGeom>
-          <a:solidFill>
-            <a:srgbClr val="182133"/>
-          </a:solidFill>
-          <a:ln w="12700">
-            <a:solidFill>
-              <a:srgbClr val="5A4222"/>
-            </a:solidFill>
-            <a:prstDash val="solid"/>
-          </a:ln>
-        </p:spPr>
-      </p:sp>
-      <p:sp>
-        <p:nvSpPr>
           <p:cNvPr id="23" name="Text 21"/>
-          <p:cNvSpPr/>
-          <p:nvPr/>
-        </p:nvSpPr>
-        <p:spPr>
-          <a:xfrm>
-            <a:off x="10454335" y="3858768"/>
-            <a:ext cx="640080" cy="384048"/>
-          </a:xfrm>
-          <a:prstGeom prst="rect">
-            <a:avLst/>
-          </a:prstGeom>
-          <a:noFill/>
-          <a:ln/>
-        </p:spPr>
-        <p:txBody>
-          <a:bodyPr wrap="square" lIns="0" tIns="0" rIns="0" bIns="0" rtlCol="0" anchor="ctr"/>
-          <a:lstStyle/>
-          <a:p>
-            <a:pPr algn="r" indent="0" marL="0">
-              <a:lnSpc>
-                <a:spcPct val="100000"/>
-              </a:lnSpc>
-              <a:buNone/>
-            </a:pPr>
-            <a:r>
-              <a:rPr lang="en-US" altLang="en-US" sz="2100" b="1" dirty="0">
-                <a:solidFill>
-                  <a:srgbClr val="FF9F43"/>
-                </a:solidFill>
-                <a:latin typeface="Calibri" pitchFamily="34" charset="0"/>
-                <a:ea typeface="Calibri" pitchFamily="34" charset="-122"/>
-                <a:cs typeface="Calibri" pitchFamily="34" charset="-120"/>
-              </a:rPr>
-              <a:t>01</a:t>
-            </a:r>
-            <a:endParaRPr lang="en-US" sz="2100" dirty="0"/>
-          </a:p>
-        </p:txBody>
-      </p:sp>
-      <p:sp>
-        <p:nvSpPr>
-          <p:cNvPr id="24" name="Text 22"/>
-          <p:cNvSpPr/>
-          <p:nvPr/>
-        </p:nvSpPr>
-        <p:spPr>
-          <a:xfrm>
-            <a:off x="6540703" y="3877056"/>
-            <a:ext cx="3822192" cy="365760"/>
-          </a:xfrm>
-          <a:prstGeom prst="rect">
-            <a:avLst/>
-          </a:prstGeom>
-          <a:noFill/>
-          <a:ln/>
-        </p:spPr>
-        <p:txBody>
-          <a:bodyPr wrap="square" lIns="0" tIns="0" rIns="0" bIns="0" rtlCol="0" anchor="ctr"/>
-          <a:lstStyle/>
-          <a:p>
-            <a:pPr rtl="1" algn="r" indent="0" marL="0">
-              <a:lnSpc>
-                <a:spcPct val="100000"/>
-              </a:lnSpc>
-              <a:buNone/>
-            </a:pPr>
-            <a:r>
-              <a:rPr lang="he-IL" altLang="en-US" sz="1600" b="1" dirty="0">
-                <a:solidFill>
-                  <a:srgbClr val="F4F7FB"/>
-                </a:solidFill>
-                <a:latin typeface="Calibri" pitchFamily="34" charset="0"/>
-                <a:ea typeface="Calibri" pitchFamily="34" charset="-122"/>
-                <a:cs typeface="Calibri" pitchFamily="34" charset="-120"/>
-              </a:rPr>
-              <a:t>‫הרחבת דיסקים ב-‪Dell ECS On-Prem‬‬</a:t>
-            </a:r>
-            <a:endParaRPr lang="he-IL" sz="1600" dirty="0"/>
-          </a:p>
-        </p:txBody>
-      </p:sp>
-      <p:sp>
-        <p:nvSpPr>
-          <p:cNvPr id="25" name="Text 23"/>
-          <p:cNvSpPr/>
-          <p:nvPr/>
-        </p:nvSpPr>
-        <p:spPr>
-          <a:xfrm>
-            <a:off x="6540703" y="4352544"/>
-            <a:ext cx="4517136" cy="786384"/>
-          </a:xfrm>
-          <a:prstGeom prst="rect">
-            <a:avLst/>
-          </a:prstGeom>
-          <a:noFill/>
-          <a:ln/>
-        </p:spPr>
-        <p:txBody>
-          <a:bodyPr wrap="square" lIns="0" tIns="0" rIns="0" bIns="0" rtlCol="0" anchor="t"/>
-          <a:lstStyle/>
-          <a:p>
-            <a:pPr rtl="1" algn="r" indent="0" marL="0">
-              <a:lnSpc>
-                <a:spcPct val="126000"/>
-              </a:lnSpc>
-              <a:buNone/>
-            </a:pPr>
-            <a:r>
-              <a:rPr lang="he-IL" altLang="en-US" sz="1250" dirty="0">
-                <a:solidFill>
-                  <a:srgbClr val="91A0B7"/>
-                </a:solidFill>
-                <a:latin typeface="Calibri" pitchFamily="34" charset="0"/>
-                <a:ea typeface="Calibri" pitchFamily="34" charset="-122"/>
-                <a:cs typeface="Calibri" pitchFamily="34" charset="-120"/>
-              </a:rPr>
-              <a:t>‫חציית ‪80%‬ מסכנת את זמינות המערכת. חודשיים אספקה מ-‪Dell‬ פירושם שהחלון להוצאת ‪PO‬ נסגר באוקטובר. הצעת ‪Dell‬ עומדת על ‪$695,520‬ עבור ‪600 TB‬ לוגי.‬</a:t>
-            </a:r>
-            <a:endParaRPr lang="he-IL" sz="1250" dirty="0"/>
-          </a:p>
-        </p:txBody>
-      </p:sp>
-      <p:sp>
-        <p:nvSpPr>
-          <p:cNvPr id="26" name="Shape 24"/>
-          <p:cNvSpPr/>
-          <p:nvPr/>
-        </p:nvSpPr>
-        <p:spPr>
-          <a:xfrm>
-            <a:off x="6540703" y="4992624"/>
-            <a:ext cx="4517136" cy="365760"/>
-          </a:xfrm>
-          <a:prstGeom prst="roundRect">
-            <a:avLst>
-              <a:gd name="adj" fmla="val 40000"/>
-            </a:avLst>
-          </a:prstGeom>
-          <a:solidFill>
-            <a:srgbClr val="3A2A12"/>
-          </a:solidFill>
-          <a:ln w="12700">
-            <a:solidFill>
-              <a:srgbClr val="3A2A12"/>
-            </a:solidFill>
-            <a:prstDash val="solid"/>
-          </a:ln>
-        </p:spPr>
-      </p:sp>
-      <p:sp>
-        <p:nvSpPr>
-          <p:cNvPr id="27" name="Text 25"/>
-          <p:cNvSpPr/>
-          <p:nvPr/>
-        </p:nvSpPr>
-        <p:spPr>
-          <a:xfrm>
-            <a:off x="6687007" y="4992624"/>
-            <a:ext cx="4224528" cy="365760"/>
-          </a:xfrm>
-          <a:prstGeom prst="rect">
-            <a:avLst/>
-          </a:prstGeom>
-          <a:noFill/>
-          <a:ln/>
-        </p:spPr>
-        <p:txBody>
-          <a:bodyPr wrap="square" lIns="0" tIns="0" rIns="0" bIns="0" rtlCol="0" anchor="ctr"/>
-          <a:lstStyle/>
-          <a:p>
-            <a:pPr rtl="1" algn="r" indent="0" marL="0">
-              <a:lnSpc>
-                <a:spcPct val="100000"/>
-              </a:lnSpc>
-              <a:buNone/>
-            </a:pPr>
-            <a:r>
-              <a:rPr lang="he-IL" altLang="en-US" sz="1200" b="1" dirty="0">
-                <a:solidFill>
-                  <a:srgbClr val="FF9F43"/>
-                </a:solidFill>
-                <a:latin typeface="Calibri" pitchFamily="34" charset="0"/>
-                <a:ea typeface="Calibri" pitchFamily="34" charset="-122"/>
-                <a:cs typeface="Calibri" pitchFamily="34" charset="-120"/>
-              </a:rPr>
-              <a:t>‫נדרש: אישור תקציב ויציאה ל-‪PO‬ באוקטובר‬</a:t>
-            </a:r>
-            <a:endParaRPr lang="he-IL" sz="1200" dirty="0"/>
-          </a:p>
-        </p:txBody>
-      </p:sp>
-      <p:sp>
-        <p:nvSpPr>
-          <p:cNvPr id="28" name="Shape 26"/>
-          <p:cNvSpPr/>
-          <p:nvPr/>
-        </p:nvSpPr>
-        <p:spPr>
-          <a:xfrm>
-            <a:off x="822960" y="3657600"/>
-            <a:ext cx="5138928" cy="1847088"/>
-          </a:xfrm>
-          <a:prstGeom prst="roundRect">
-            <a:avLst>
-              <a:gd name="adj" fmla="val 2475"/>
-            </a:avLst>
-          </a:prstGeom>
-          <a:solidFill>
-            <a:srgbClr val="182133"/>
-          </a:solidFill>
-          <a:ln w="12700">
-            <a:solidFill>
-              <a:srgbClr val="2E5F6B"/>
-            </a:solidFill>
-            <a:prstDash val="solid"/>
-          </a:ln>
-        </p:spPr>
-      </p:sp>
-      <p:sp>
-        <p:nvSpPr>
-          <p:cNvPr id="29" name="Text 27"/>
-          <p:cNvSpPr/>
-          <p:nvPr/>
-        </p:nvSpPr>
-        <p:spPr>
-          <a:xfrm>
-            <a:off x="5047488" y="3858768"/>
-            <a:ext cx="640080" cy="384048"/>
-          </a:xfrm>
-          <a:prstGeom prst="rect">
-            <a:avLst/>
-          </a:prstGeom>
-          <a:noFill/>
-          <a:ln/>
-        </p:spPr>
-        <p:txBody>
-          <a:bodyPr wrap="square" lIns="0" tIns="0" rIns="0" bIns="0" rtlCol="0" anchor="ctr"/>
-          <a:lstStyle/>
-          <a:p>
-            <a:pPr algn="r" indent="0" marL="0">
-              <a:lnSpc>
-                <a:spcPct val="100000"/>
-              </a:lnSpc>
-              <a:buNone/>
-            </a:pPr>
-            <a:r>
-              <a:rPr lang="en-US" altLang="en-US" sz="2100" b="1" dirty="0">
-                <a:solidFill>
-                  <a:srgbClr val="3DD9EB"/>
-                </a:solidFill>
-                <a:latin typeface="Calibri" pitchFamily="34" charset="0"/>
-                <a:ea typeface="Calibri" pitchFamily="34" charset="-122"/>
-                <a:cs typeface="Calibri" pitchFamily="34" charset="-120"/>
-              </a:rPr>
-              <a:t>02</a:t>
-            </a:r>
-            <a:endParaRPr lang="en-US" sz="2100" dirty="0"/>
-          </a:p>
-        </p:txBody>
-      </p:sp>
-      <p:sp>
-        <p:nvSpPr>
-          <p:cNvPr id="30" name="Text 28"/>
-          <p:cNvSpPr/>
-          <p:nvPr/>
-        </p:nvSpPr>
-        <p:spPr>
-          <a:xfrm>
-            <a:off x="1133856" y="3877056"/>
-            <a:ext cx="3822192" cy="365760"/>
-          </a:xfrm>
-          <a:prstGeom prst="rect">
-            <a:avLst/>
-          </a:prstGeom>
-          <a:noFill/>
-          <a:ln/>
-        </p:spPr>
-        <p:txBody>
-          <a:bodyPr wrap="square" lIns="0" tIns="0" rIns="0" bIns="0" rtlCol="0" anchor="ctr"/>
-          <a:lstStyle/>
-          <a:p>
-            <a:pPr rtl="1" algn="r" indent="0" marL="0">
-              <a:lnSpc>
-                <a:spcPct val="100000"/>
-              </a:lnSpc>
-              <a:buNone/>
-            </a:pPr>
-            <a:r>
-              <a:rPr lang="he-IL" altLang="en-US" sz="1600" b="1" dirty="0">
-                <a:solidFill>
-                  <a:srgbClr val="F4F7FB"/>
-                </a:solidFill>
-                <a:latin typeface="Calibri" pitchFamily="34" charset="0"/>
-                <a:ea typeface="Calibri" pitchFamily="34" charset="-122"/>
-                <a:cs typeface="Calibri" pitchFamily="34" charset="-120"/>
-              </a:rPr>
-              <a:t>‫העתקת מסמכי דימות ו-‪Verint‬ ל-‪AWS S3‬‬</a:t>
-            </a:r>
-            <a:endParaRPr lang="he-IL" sz="1600" dirty="0"/>
-          </a:p>
-        </p:txBody>
-      </p:sp>
-      <p:sp>
-        <p:nvSpPr>
-          <p:cNvPr id="31" name="Text 29"/>
-          <p:cNvSpPr/>
-          <p:nvPr/>
-        </p:nvSpPr>
-        <p:spPr>
-          <a:xfrm>
-            <a:off x="1133856" y="4352544"/>
-            <a:ext cx="4517136" cy="786384"/>
-          </a:xfrm>
-          <a:prstGeom prst="rect">
-            <a:avLst/>
-          </a:prstGeom>
-          <a:noFill/>
-          <a:ln/>
-        </p:spPr>
-        <p:txBody>
-          <a:bodyPr wrap="square" lIns="0" tIns="0" rIns="0" bIns="0" rtlCol="0" anchor="t"/>
-          <a:lstStyle/>
-          <a:p>
-            <a:pPr rtl="1" algn="r" indent="0" marL="0">
-              <a:lnSpc>
-                <a:spcPct val="126000"/>
-              </a:lnSpc>
-              <a:buNone/>
-            </a:pPr>
-            <a:r>
-              <a:rPr lang="he-IL" altLang="en-US" sz="1250" dirty="0">
-                <a:solidFill>
-                  <a:srgbClr val="91A0B7"/>
-                </a:solidFill>
-                <a:latin typeface="Calibri" pitchFamily="34" charset="0"/>
-                <a:ea typeface="Calibri" pitchFamily="34" charset="-122"/>
-                <a:cs typeface="Calibri" pitchFamily="34" charset="-120"/>
-              </a:rPr>
-              <a:t>‫מפנה שטח ב-‪ECS‬ תוך שבועות, ללא ‪PO‬ וללא זמן אספקה. רץ במקביל לרכש ומקטין את הלחץ על הסף — אך אינו מחליף את הדיסקים ואינו עוצר את השעון.‬</a:t>
-            </a:r>
-            <a:endParaRPr lang="he-IL" sz="1250" dirty="0"/>
-          </a:p>
-        </p:txBody>
-      </p:sp>
-      <p:sp>
-        <p:nvSpPr>
-          <p:cNvPr id="32" name="Shape 30"/>
-          <p:cNvSpPr/>
-          <p:nvPr/>
-        </p:nvSpPr>
-        <p:spPr>
-          <a:xfrm>
-            <a:off x="1133856" y="4992624"/>
-            <a:ext cx="4517136" cy="365760"/>
-          </a:xfrm>
-          <a:prstGeom prst="roundRect">
-            <a:avLst>
-              <a:gd name="adj" fmla="val 40000"/>
-            </a:avLst>
-          </a:prstGeom>
-          <a:solidFill>
-            <a:srgbClr val="13303A"/>
-          </a:solidFill>
-          <a:ln w="12700">
-            <a:solidFill>
-              <a:srgbClr val="13303A"/>
-            </a:solidFill>
-            <a:prstDash val="solid"/>
-          </a:ln>
-        </p:spPr>
-      </p:sp>
-      <p:sp>
-        <p:nvSpPr>
-          <p:cNvPr id="33" name="Text 31"/>
-          <p:cNvSpPr/>
-          <p:nvPr/>
-        </p:nvSpPr>
-        <p:spPr>
-          <a:xfrm>
-            <a:off x="1280160" y="4992624"/>
-            <a:ext cx="4224528" cy="365760"/>
-          </a:xfrm>
-          <a:prstGeom prst="rect">
-            <a:avLst/>
-          </a:prstGeom>
-          <a:noFill/>
-          <a:ln/>
-        </p:spPr>
-        <p:txBody>
-          <a:bodyPr wrap="square" lIns="0" tIns="0" rIns="0" bIns="0" rtlCol="0" anchor="ctr"/>
-          <a:lstStyle/>
-          <a:p>
-            <a:pPr rtl="1" algn="r" indent="0" marL="0">
-              <a:lnSpc>
-                <a:spcPct val="100000"/>
-              </a:lnSpc>
-              <a:buNone/>
-            </a:pPr>
-            <a:r>
-              <a:rPr lang="he-IL" altLang="en-US" sz="1200" b="1" dirty="0">
-                <a:solidFill>
-                  <a:srgbClr val="3DD9EB"/>
-                </a:solidFill>
-                <a:latin typeface="Calibri" pitchFamily="34" charset="0"/>
-                <a:ea typeface="Calibri" pitchFamily="34" charset="-122"/>
-                <a:cs typeface="Calibri" pitchFamily="34" charset="-120"/>
-              </a:rPr>
-              <a:t>‫נדרש: אישור עקרוני + תקציב ‪POC‬‬</a:t>
-            </a:r>
-            <a:endParaRPr lang="he-IL" sz="1200" dirty="0"/>
-          </a:p>
-        </p:txBody>
-      </p:sp>
-      <p:sp>
-        <p:nvSpPr>
-          <p:cNvPr id="34" name="Shape 32"/>
-          <p:cNvSpPr/>
-          <p:nvPr/>
-        </p:nvSpPr>
-        <p:spPr>
-          <a:xfrm>
-            <a:off x="822960" y="5907024"/>
-            <a:ext cx="10545775" cy="10973"/>
-          </a:xfrm>
-          <a:prstGeom prst="rect">
-            <a:avLst/>
-          </a:prstGeom>
-          <a:solidFill>
-            <a:srgbClr val="23304A"/>
-          </a:solidFill>
-          <a:ln w="12700">
-            <a:solidFill>
-              <a:srgbClr val="23304A"/>
-            </a:solidFill>
-            <a:prstDash val="solid"/>
-          </a:ln>
-        </p:spPr>
-      </p:sp>
-      <p:sp>
-        <p:nvSpPr>
-          <p:cNvPr id="35" name="Shape 33"/>
-          <p:cNvSpPr/>
-          <p:nvPr/>
-        </p:nvSpPr>
-        <p:spPr>
-          <a:xfrm>
-            <a:off x="11249863" y="6172200"/>
-            <a:ext cx="118872" cy="118872"/>
-          </a:xfrm>
-          <a:prstGeom prst="rect">
-            <a:avLst/>
-          </a:prstGeom>
-          <a:solidFill>
-            <a:srgbClr val="FF6B7A"/>
-          </a:solidFill>
-          <a:ln w="12700">
-            <a:solidFill>
-              <a:srgbClr val="FF6B7A"/>
-            </a:solidFill>
-            <a:prstDash val="solid"/>
-          </a:ln>
-        </p:spPr>
-      </p:sp>
-      <p:sp>
-        <p:nvSpPr>
-          <p:cNvPr id="36" name="Text 34"/>
           <p:cNvSpPr/>
           <p:nvPr/>
         </p:nvSpPr>
@@ -5632,7 +5114,7 @@
                 <a:ea typeface="Calibri" pitchFamily="34" charset="-122"/>
                 <a:cs typeface="Calibri" pitchFamily="34" charset="-120"/>
               </a:rPr>
-              <a:t>‫כל חודש עיכוב בהוצאת ה-‪PO‬ דוחה את האספקה בחודש — אך אינו דוחה את חציית ‪80%‬. עיכוב לנובמבר פירושו הגעה ל-‪80%‬ לפני שהדיסקים בבית.‬</a:t>
+              <a:t>‫שני המסלולים אינם חלופיים: ‪01‬ מוסיף קיבולת, ‪02‬ מקטין את הצריכה. ה-‪PO‬ של ‪01‬ חייב לצאת באוקטובר — הרציונל והנתונים בשקפים הבאים.‬</a:t>
             </a:r>
             <a:endParaRPr lang="he-IL" sz="1150" dirty="0"/>
           </a:p>

--- a/presentations/ecs-to-s3/Harel_ECS_to_S3_CIO.pptx
+++ b/presentations/ecs-to-s3/Harel_ECS_to_S3_CIO.pptx
@@ -4067,7 +4067,7 @@
                 <a:ea typeface="Calibri" pitchFamily="34" charset="-122"/>
                 <a:cs typeface="Calibri" pitchFamily="34" charset="-120"/>
               </a:rPr>
-              <a:t>‫פילוח גודל-אובייקט ותדירות אחזור של הקורפוס, ותמחור מול ‪Glacier Instant Retrieval‬ באזור תל אביב — לא מול ‪S3 Standard‬.‬</a:t>
+              <a:t>‫פילוח גודל-אובייקט ותדירות אחזור של הקורפוס, ותמחור מול ‪Glacier Instant Retrieval‬ ו-‪Standard-IA‬ באזור תל אביב.‬</a:t>
             </a:r>
             <a:endParaRPr lang="he-IL" sz="1150" dirty="0"/>
           </a:p>
@@ -4492,12 +4492,12 @@
         </p:nvSpPr>
         <p:spPr>
           <a:xfrm>
-            <a:off x="6229807" y="2560320"/>
-            <a:ext cx="5138928" cy="2761488"/>
+            <a:off x="6229807" y="2066544"/>
+            <a:ext cx="5138928" cy="3657600"/>
           </a:xfrm>
           <a:prstGeom prst="roundRect">
             <a:avLst>
-              <a:gd name="adj" fmla="val 1656"/>
+              <a:gd name="adj" fmla="val 1250"/>
             </a:avLst>
           </a:prstGeom>
           <a:solidFill>
@@ -4519,8 +4519,8 @@
         </p:nvSpPr>
         <p:spPr>
           <a:xfrm>
-            <a:off x="11213287" y="2871216"/>
-            <a:ext cx="50292" cy="384048"/>
+            <a:off x="11213287" y="2395728"/>
+            <a:ext cx="50292" cy="402336"/>
           </a:xfrm>
           <a:prstGeom prst="rect">
             <a:avLst/>
@@ -4544,8 +4544,8 @@
         </p:nvSpPr>
         <p:spPr>
           <a:xfrm>
-            <a:off x="10234879" y="2852928"/>
-            <a:ext cx="658368" cy="420624"/>
+            <a:off x="10198303" y="2377440"/>
+            <a:ext cx="676656" cy="438912"/>
           </a:xfrm>
           <a:prstGeom prst="rect">
             <a:avLst/>
@@ -4564,7 +4564,7 @@
               <a:buNone/>
             </a:pPr>
             <a:r>
-              <a:rPr lang="en-US" altLang="en-US" sz="2300" b="1" dirty="0">
+              <a:rPr lang="en-US" altLang="en-US" sz="2400" b="1" dirty="0">
                 <a:solidFill>
                   <a:srgbClr val="FF9F43"/>
                 </a:solidFill>
@@ -4574,7 +4574,7 @@
               </a:rPr>
               <a:t>01</a:t>
             </a:r>
-            <a:endParaRPr lang="en-US" sz="2300" dirty="0"/>
+            <a:endParaRPr lang="en-US" sz="2400" dirty="0"/>
           </a:p>
         </p:txBody>
       </p:sp>
@@ -4586,8 +4586,8 @@
         </p:nvSpPr>
         <p:spPr>
           <a:xfrm>
-            <a:off x="6558991" y="2834640"/>
-            <a:ext cx="3566160" cy="457200"/>
+            <a:off x="6577279" y="2359152"/>
+            <a:ext cx="3511296" cy="475488"/>
           </a:xfrm>
           <a:prstGeom prst="rect">
             <a:avLst/>
@@ -4606,7 +4606,7 @@
               <a:buNone/>
             </a:pPr>
             <a:r>
-              <a:rPr lang="he-IL" altLang="en-US" sz="1800" b="1" dirty="0">
+              <a:rPr lang="he-IL" altLang="en-US" sz="1900" b="1" dirty="0">
                 <a:solidFill>
                   <a:srgbClr val="F4F7FB"/>
                 </a:solidFill>
@@ -4614,9 +4614,9 @@
                 <a:ea typeface="Calibri" pitchFamily="34" charset="-122"/>
                 <a:cs typeface="Calibri" pitchFamily="34" charset="-120"/>
               </a:rPr>
-              <a:t>‫הרחבת דיסקים ב-‪Dell ECS On-Prem‬‬</a:t>
-            </a:r>
-            <a:endParaRPr lang="he-IL" sz="1800" dirty="0"/>
+              <a:t>‫הרחבת דיסקים ב-‪Dell ECS‬‬</a:t>
+            </a:r>
+            <a:endParaRPr lang="he-IL" sz="1900" dirty="0"/>
           </a:p>
         </p:txBody>
       </p:sp>
@@ -4628,8 +4628,8 @@
         </p:nvSpPr>
         <p:spPr>
           <a:xfrm>
-            <a:off x="6558991" y="3438144"/>
-            <a:ext cx="4480560" cy="10973"/>
+            <a:off x="6577279" y="2980944"/>
+            <a:ext cx="4443984" cy="10973"/>
           </a:xfrm>
           <a:prstGeom prst="rect">
             <a:avLst/>
@@ -4653,8 +4653,8 @@
         </p:nvSpPr>
         <p:spPr>
           <a:xfrm>
-            <a:off x="6558991" y="3584448"/>
-            <a:ext cx="4480560" cy="1024128"/>
+            <a:off x="6577279" y="3108960"/>
+            <a:ext cx="4443984" cy="603504"/>
           </a:xfrm>
           <a:prstGeom prst="rect">
             <a:avLst/>
@@ -4668,39 +4668,240 @@
           <a:p>
             <a:pPr rtl="1" algn="r" indent="0" marL="0">
               <a:lnSpc>
-                <a:spcPct val="134000"/>
+                <a:spcPct val="132000"/>
               </a:lnSpc>
               <a:buNone/>
             </a:pPr>
             <a:r>
               <a:rPr lang="he-IL" altLang="en-US" sz="1400" dirty="0">
                 <a:solidFill>
+                  <a:srgbClr val="F4F7FB"/>
+                </a:solidFill>
+                <a:latin typeface="Calibri" pitchFamily="34" charset="0"/>
+                <a:ea typeface="Calibri" pitchFamily="34" charset="-122"/>
+                <a:cs typeface="Calibri" pitchFamily="34" charset="-120"/>
+              </a:rPr>
+              <a:t>‫הרחבת המערך הקיים: רכש תוספת דיסקים מ-‪Dell‬, באותה ארכיטקטורה ובאותם ממשקים.‬</a:t>
+            </a:r>
+            <a:endParaRPr lang="he-IL" sz="1400" dirty="0"/>
+          </a:p>
+        </p:txBody>
+      </p:sp>
+      <p:sp>
+        <p:nvSpPr>
+          <p:cNvPr id="11" name="Shape 9"/>
+          <p:cNvSpPr/>
+          <p:nvPr/>
+        </p:nvSpPr>
+        <p:spPr>
+          <a:xfrm>
+            <a:off x="10966399" y="3931920"/>
+            <a:ext cx="91440" cy="91440"/>
+          </a:xfrm>
+          <a:prstGeom prst="rect">
+            <a:avLst/>
+          </a:prstGeom>
+          <a:solidFill>
+            <a:srgbClr val="FF9F43"/>
+          </a:solidFill>
+          <a:ln w="12700">
+            <a:solidFill>
+              <a:srgbClr val="FF9F43"/>
+            </a:solidFill>
+            <a:prstDash val="solid"/>
+          </a:ln>
+        </p:spPr>
+      </p:sp>
+      <p:sp>
+        <p:nvSpPr>
+          <p:cNvPr id="12" name="Text 10"/>
+          <p:cNvSpPr/>
+          <p:nvPr/>
+        </p:nvSpPr>
+        <p:spPr>
+          <a:xfrm>
+            <a:off x="6577279" y="3803904"/>
+            <a:ext cx="4279392" cy="384048"/>
+          </a:xfrm>
+          <a:prstGeom prst="rect">
+            <a:avLst/>
+          </a:prstGeom>
+          <a:noFill/>
+          <a:ln/>
+        </p:spPr>
+        <p:txBody>
+          <a:bodyPr wrap="square" lIns="0" tIns="0" rIns="0" bIns="0" rtlCol="0" anchor="ctr"/>
+          <a:lstStyle/>
+          <a:p>
+            <a:pPr rtl="1" algn="r" indent="0" marL="0">
+              <a:lnSpc>
+                <a:spcPct val="100000"/>
+              </a:lnSpc>
+              <a:buNone/>
+            </a:pPr>
+            <a:r>
+              <a:rPr lang="he-IL" altLang="en-US" sz="1300" dirty="0">
+                <a:solidFill>
+                  <a:srgbClr val="F4F7FB"/>
+                </a:solidFill>
+                <a:latin typeface="Calibri" pitchFamily="34" charset="0"/>
+                <a:ea typeface="Calibri" pitchFamily="34" charset="-122"/>
+                <a:cs typeface="Calibri" pitchFamily="34" charset="-120"/>
+              </a:rPr>
+              <a:t>‫עלות: ‪$695,520 · 600 TB‬ לוגי · ‪Replica x3‬‬</a:t>
+            </a:r>
+            <a:endParaRPr lang="he-IL" sz="1300" dirty="0"/>
+          </a:p>
+        </p:txBody>
+      </p:sp>
+      <p:sp>
+        <p:nvSpPr>
+          <p:cNvPr id="13" name="Shape 11"/>
+          <p:cNvSpPr/>
+          <p:nvPr/>
+        </p:nvSpPr>
+        <p:spPr>
+          <a:xfrm>
+            <a:off x="10966399" y="4334256"/>
+            <a:ext cx="91440" cy="91440"/>
+          </a:xfrm>
+          <a:prstGeom prst="rect">
+            <a:avLst/>
+          </a:prstGeom>
+          <a:solidFill>
+            <a:srgbClr val="FF9F43"/>
+          </a:solidFill>
+          <a:ln w="12700">
+            <a:solidFill>
+              <a:srgbClr val="FF9F43"/>
+            </a:solidFill>
+            <a:prstDash val="solid"/>
+          </a:ln>
+        </p:spPr>
+      </p:sp>
+      <p:sp>
+        <p:nvSpPr>
+          <p:cNvPr id="14" name="Text 12"/>
+          <p:cNvSpPr/>
+          <p:nvPr/>
+        </p:nvSpPr>
+        <p:spPr>
+          <a:xfrm>
+            <a:off x="6577279" y="4206240"/>
+            <a:ext cx="4279392" cy="384048"/>
+          </a:xfrm>
+          <a:prstGeom prst="rect">
+            <a:avLst/>
+          </a:prstGeom>
+          <a:noFill/>
+          <a:ln/>
+        </p:spPr>
+        <p:txBody>
+          <a:bodyPr wrap="square" lIns="0" tIns="0" rIns="0" bIns="0" rtlCol="0" anchor="ctr"/>
+          <a:lstStyle/>
+          <a:p>
+            <a:pPr rtl="1" algn="r" indent="0" marL="0">
+              <a:lnSpc>
+                <a:spcPct val="100000"/>
+              </a:lnSpc>
+              <a:buNone/>
+            </a:pPr>
+            <a:r>
+              <a:rPr lang="he-IL" altLang="en-US" sz="1300" dirty="0">
+                <a:solidFill>
+                  <a:srgbClr val="F4F7FB"/>
+                </a:solidFill>
+                <a:latin typeface="Calibri" pitchFamily="34" charset="0"/>
+                <a:ea typeface="Calibri" pitchFamily="34" charset="-122"/>
+                <a:cs typeface="Calibri" pitchFamily="34" charset="-120"/>
+              </a:rPr>
+              <a:t>‫זמן: ‪PO‬ באוקטובר, אספקה תוך כחודשיים‬</a:t>
+            </a:r>
+            <a:endParaRPr lang="he-IL" sz="1300" dirty="0"/>
+          </a:p>
+        </p:txBody>
+      </p:sp>
+      <p:sp>
+        <p:nvSpPr>
+          <p:cNvPr id="15" name="Shape 13"/>
+          <p:cNvSpPr/>
+          <p:nvPr/>
+        </p:nvSpPr>
+        <p:spPr>
+          <a:xfrm>
+            <a:off x="10966399" y="4736592"/>
+            <a:ext cx="91440" cy="91440"/>
+          </a:xfrm>
+          <a:prstGeom prst="rect">
+            <a:avLst/>
+          </a:prstGeom>
+          <a:solidFill>
+            <a:srgbClr val="5E6E85"/>
+          </a:solidFill>
+          <a:ln w="12700">
+            <a:solidFill>
+              <a:srgbClr val="5E6E85"/>
+            </a:solidFill>
+            <a:prstDash val="solid"/>
+          </a:ln>
+        </p:spPr>
+      </p:sp>
+      <p:sp>
+        <p:nvSpPr>
+          <p:cNvPr id="16" name="Text 14"/>
+          <p:cNvSpPr/>
+          <p:nvPr/>
+        </p:nvSpPr>
+        <p:spPr>
+          <a:xfrm>
+            <a:off x="6577279" y="4608576"/>
+            <a:ext cx="4279392" cy="384048"/>
+          </a:xfrm>
+          <a:prstGeom prst="rect">
+            <a:avLst/>
+          </a:prstGeom>
+          <a:noFill/>
+          <a:ln/>
+        </p:spPr>
+        <p:txBody>
+          <a:bodyPr wrap="square" lIns="0" tIns="0" rIns="0" bIns="0" rtlCol="0" anchor="ctr"/>
+          <a:lstStyle/>
+          <a:p>
+            <a:pPr rtl="1" algn="r" indent="0" marL="0">
+              <a:lnSpc>
+                <a:spcPct val="100000"/>
+              </a:lnSpc>
+              <a:buNone/>
+            </a:pPr>
+            <a:r>
+              <a:rPr lang="he-IL" altLang="en-US" sz="1300" dirty="0">
+                <a:solidFill>
                   <a:srgbClr val="91A0B7"/>
                 </a:solidFill>
                 <a:latin typeface="Calibri" pitchFamily="34" charset="0"/>
                 <a:ea typeface="Calibri" pitchFamily="34" charset="-122"/>
                 <a:cs typeface="Calibri" pitchFamily="34" charset="-120"/>
               </a:rPr>
-              <a:t>‫רכש תוספת קיבולת מ-‪Dell‬. הצעה קיימת: ‪$695,520‬ עבור ‪600 TB‬ לוגי, כולל ‪Replica x3‬ בין שלושה אתרים. פתרון מוכר, בתוך המרכז שלנו — אך כרוך ב-‪PO‬, בזמן אספקה ובהוצאה הונית מלאה.‬</a:t>
-            </a:r>
-            <a:endParaRPr lang="he-IL" sz="1400" dirty="0"/>
-          </a:p>
-        </p:txBody>
-      </p:sp>
-      <p:sp>
-        <p:nvSpPr>
-          <p:cNvPr id="11" name="Shape 9"/>
-          <p:cNvSpPr/>
-          <p:nvPr/>
-        </p:nvSpPr>
-        <p:spPr>
-          <a:xfrm>
-            <a:off x="6558991" y="4626864"/>
-            <a:ext cx="4480560" cy="420624"/>
+              <a:t>‫ללא שינוי באפליקציות, אך הוצאה הונית מלאה‬</a:t>
+            </a:r>
+            <a:endParaRPr lang="he-IL" sz="1300" dirty="0"/>
+          </a:p>
+        </p:txBody>
+      </p:sp>
+      <p:sp>
+        <p:nvSpPr>
+          <p:cNvPr id="17" name="Shape 15"/>
+          <p:cNvSpPr/>
+          <p:nvPr/>
+        </p:nvSpPr>
+        <p:spPr>
+          <a:xfrm>
+            <a:off x="6577279" y="5120640"/>
+            <a:ext cx="4443984" cy="457200"/>
           </a:xfrm>
           <a:prstGeom prst="roundRect">
             <a:avLst>
-              <a:gd name="adj" fmla="val 34783"/>
+              <a:gd name="adj" fmla="val 32000"/>
             </a:avLst>
           </a:prstGeom>
           <a:solidFill>
@@ -4716,14 +4917,14 @@
       </p:sp>
       <p:sp>
         <p:nvSpPr>
-          <p:cNvPr id="12" name="Text 10"/>
-          <p:cNvSpPr/>
-          <p:nvPr/>
-        </p:nvSpPr>
-        <p:spPr>
-          <a:xfrm>
-            <a:off x="6705295" y="4626864"/>
-            <a:ext cx="4187952" cy="420624"/>
+          <p:cNvPr id="18" name="Text 16"/>
+          <p:cNvSpPr/>
+          <p:nvPr/>
+        </p:nvSpPr>
+        <p:spPr>
+          <a:xfrm>
+            <a:off x="6723583" y="5120640"/>
+            <a:ext cx="4151376" cy="457200"/>
           </a:xfrm>
           <a:prstGeom prst="rect">
             <a:avLst/>
@@ -4742,7 +4943,7 @@
               <a:buNone/>
             </a:pPr>
             <a:r>
-              <a:rPr lang="he-IL" altLang="en-US" sz="1250" b="1" dirty="0">
+              <a:rPr lang="he-IL" altLang="en-US" sz="1300" b="1" dirty="0">
                 <a:solidFill>
                   <a:srgbClr val="FF9F43"/>
                 </a:solidFill>
@@ -4752,24 +4953,24 @@
               </a:rPr>
               <a:t>‫נדרש: אישור תקציב ויציאה ל-‪PO‬ באוקטובר‬</a:t>
             </a:r>
-            <a:endParaRPr lang="he-IL" sz="1250" dirty="0"/>
-          </a:p>
-        </p:txBody>
-      </p:sp>
-      <p:sp>
-        <p:nvSpPr>
-          <p:cNvPr id="13" name="Shape 11"/>
-          <p:cNvSpPr/>
-          <p:nvPr/>
-        </p:nvSpPr>
-        <p:spPr>
-          <a:xfrm>
-            <a:off x="822960" y="2560320"/>
-            <a:ext cx="5138928" cy="2761488"/>
+            <a:endParaRPr lang="he-IL" sz="1300" dirty="0"/>
+          </a:p>
+        </p:txBody>
+      </p:sp>
+      <p:sp>
+        <p:nvSpPr>
+          <p:cNvPr id="19" name="Shape 17"/>
+          <p:cNvSpPr/>
+          <p:nvPr/>
+        </p:nvSpPr>
+        <p:spPr>
+          <a:xfrm>
+            <a:off x="822960" y="2066544"/>
+            <a:ext cx="5138928" cy="3657600"/>
           </a:xfrm>
           <a:prstGeom prst="roundRect">
             <a:avLst>
-              <a:gd name="adj" fmla="val 1656"/>
+              <a:gd name="adj" fmla="val 1250"/>
             </a:avLst>
           </a:prstGeom>
           <a:solidFill>
@@ -4785,14 +4986,14 @@
       </p:sp>
       <p:sp>
         <p:nvSpPr>
-          <p:cNvPr id="14" name="Shape 12"/>
-          <p:cNvSpPr/>
-          <p:nvPr/>
-        </p:nvSpPr>
-        <p:spPr>
-          <a:xfrm>
-            <a:off x="5806440" y="2871216"/>
-            <a:ext cx="50292" cy="384048"/>
+          <p:cNvPr id="20" name="Shape 18"/>
+          <p:cNvSpPr/>
+          <p:nvPr/>
+        </p:nvSpPr>
+        <p:spPr>
+          <a:xfrm>
+            <a:off x="5806440" y="2395728"/>
+            <a:ext cx="50292" cy="402336"/>
           </a:xfrm>
           <a:prstGeom prst="rect">
             <a:avLst/>
@@ -4810,14 +5011,14 @@
       </p:sp>
       <p:sp>
         <p:nvSpPr>
-          <p:cNvPr id="15" name="Text 13"/>
-          <p:cNvSpPr/>
-          <p:nvPr/>
-        </p:nvSpPr>
-        <p:spPr>
-          <a:xfrm>
-            <a:off x="4828032" y="2852928"/>
-            <a:ext cx="658368" cy="420624"/>
+          <p:cNvPr id="21" name="Text 19"/>
+          <p:cNvSpPr/>
+          <p:nvPr/>
+        </p:nvSpPr>
+        <p:spPr>
+          <a:xfrm>
+            <a:off x="4791456" y="2377440"/>
+            <a:ext cx="676656" cy="438912"/>
           </a:xfrm>
           <a:prstGeom prst="rect">
             <a:avLst/>
@@ -4836,7 +5037,7 @@
               <a:buNone/>
             </a:pPr>
             <a:r>
-              <a:rPr lang="en-US" altLang="en-US" sz="2300" b="1" dirty="0">
+              <a:rPr lang="en-US" altLang="en-US" sz="2400" b="1" dirty="0">
                 <a:solidFill>
                   <a:srgbClr val="3DD9EB"/>
                 </a:solidFill>
@@ -4846,20 +5047,20 @@
               </a:rPr>
               <a:t>02</a:t>
             </a:r>
-            <a:endParaRPr lang="en-US" sz="2300" dirty="0"/>
-          </a:p>
-        </p:txBody>
-      </p:sp>
-      <p:sp>
-        <p:nvSpPr>
-          <p:cNvPr id="16" name="Text 14"/>
-          <p:cNvSpPr/>
-          <p:nvPr/>
-        </p:nvSpPr>
-        <p:spPr>
-          <a:xfrm>
-            <a:off x="1152144" y="2834640"/>
-            <a:ext cx="3566160" cy="457200"/>
+            <a:endParaRPr lang="en-US" sz="2400" dirty="0"/>
+          </a:p>
+        </p:txBody>
+      </p:sp>
+      <p:sp>
+        <p:nvSpPr>
+          <p:cNvPr id="22" name="Text 20"/>
+          <p:cNvSpPr/>
+          <p:nvPr/>
+        </p:nvSpPr>
+        <p:spPr>
+          <a:xfrm>
+            <a:off x="1170432" y="2359152"/>
+            <a:ext cx="3511296" cy="475488"/>
           </a:xfrm>
           <a:prstGeom prst="rect">
             <a:avLst/>
@@ -4878,7 +5079,7 @@
               <a:buNone/>
             </a:pPr>
             <a:r>
-              <a:rPr lang="he-IL" altLang="en-US" sz="1800" b="1" dirty="0">
+              <a:rPr lang="he-IL" altLang="en-US" sz="1900" b="1" dirty="0">
                 <a:solidFill>
                   <a:srgbClr val="F4F7FB"/>
                 </a:solidFill>
@@ -4886,22 +5087,22 @@
                 <a:ea typeface="Calibri" pitchFamily="34" charset="-122"/>
                 <a:cs typeface="Calibri" pitchFamily="34" charset="-120"/>
               </a:rPr>
-              <a:t>‫העתקת מסמכי דימות ו-‪Verint‬ ל-‪AWS S3‬‬</a:t>
-            </a:r>
-            <a:endParaRPr lang="he-IL" sz="1800" dirty="0"/>
-          </a:p>
-        </p:txBody>
-      </p:sp>
-      <p:sp>
-        <p:nvSpPr>
-          <p:cNvPr id="17" name="Shape 15"/>
-          <p:cNvSpPr/>
-          <p:nvPr/>
-        </p:nvSpPr>
-        <p:spPr>
-          <a:xfrm>
-            <a:off x="1152144" y="3438144"/>
-            <a:ext cx="4480560" cy="10973"/>
+              <a:t>‫העתקת דימות ו-‪Verint‬ לענן‬</a:t>
+            </a:r>
+            <a:endParaRPr lang="he-IL" sz="1900" dirty="0"/>
+          </a:p>
+        </p:txBody>
+      </p:sp>
+      <p:sp>
+        <p:nvSpPr>
+          <p:cNvPr id="23" name="Shape 21"/>
+          <p:cNvSpPr/>
+          <p:nvPr/>
+        </p:nvSpPr>
+        <p:spPr>
+          <a:xfrm>
+            <a:off x="1170432" y="2980944"/>
+            <a:ext cx="4443984" cy="10973"/>
           </a:xfrm>
           <a:prstGeom prst="rect">
             <a:avLst/>
@@ -4919,14 +5120,14 @@
       </p:sp>
       <p:sp>
         <p:nvSpPr>
-          <p:cNvPr id="18" name="Text 16"/>
-          <p:cNvSpPr/>
-          <p:nvPr/>
-        </p:nvSpPr>
-        <p:spPr>
-          <a:xfrm>
-            <a:off x="1152144" y="3584448"/>
-            <a:ext cx="4480560" cy="1024128"/>
+          <p:cNvPr id="24" name="Text 22"/>
+          <p:cNvSpPr/>
+          <p:nvPr/>
+        </p:nvSpPr>
+        <p:spPr>
+          <a:xfrm>
+            <a:off x="1170432" y="3108960"/>
+            <a:ext cx="4443984" cy="603504"/>
           </a:xfrm>
           <a:prstGeom prst="rect">
             <a:avLst/>
@@ -4940,39 +5141,240 @@
           <a:p>
             <a:pPr rtl="1" algn="r" indent="0" marL="0">
               <a:lnSpc>
-                <a:spcPct val="134000"/>
+                <a:spcPct val="132000"/>
               </a:lnSpc>
               <a:buNone/>
             </a:pPr>
             <a:r>
               <a:rPr lang="he-IL" altLang="en-US" sz="1400" dirty="0">
                 <a:solidFill>
+                  <a:srgbClr val="F4F7FB"/>
+                </a:solidFill>
+                <a:latin typeface="Calibri" pitchFamily="34" charset="0"/>
+                <a:ea typeface="Calibri" pitchFamily="34" charset="-122"/>
+                <a:cs typeface="Calibri" pitchFamily="34" charset="-120"/>
+              </a:rPr>
+              <a:t>‫העברת הארכיון לאחסון אובייקטים ב-‪AWS‬, ופינוי השטח שהוא תופס היום ב-‪ECS‬.‬</a:t>
+            </a:r>
+            <a:endParaRPr lang="he-IL" sz="1400" dirty="0"/>
+          </a:p>
+        </p:txBody>
+      </p:sp>
+      <p:sp>
+        <p:nvSpPr>
+          <p:cNvPr id="25" name="Shape 23"/>
+          <p:cNvSpPr/>
+          <p:nvPr/>
+        </p:nvSpPr>
+        <p:spPr>
+          <a:xfrm>
+            <a:off x="5559552" y="3931920"/>
+            <a:ext cx="91440" cy="91440"/>
+          </a:xfrm>
+          <a:prstGeom prst="rect">
+            <a:avLst/>
+          </a:prstGeom>
+          <a:solidFill>
+            <a:srgbClr val="3DD9EB"/>
+          </a:solidFill>
+          <a:ln w="12700">
+            <a:solidFill>
+              <a:srgbClr val="3DD9EB"/>
+            </a:solidFill>
+            <a:prstDash val="solid"/>
+          </a:ln>
+        </p:spPr>
+      </p:sp>
+      <p:sp>
+        <p:nvSpPr>
+          <p:cNvPr id="26" name="Text 24"/>
+          <p:cNvSpPr/>
+          <p:nvPr/>
+        </p:nvSpPr>
+        <p:spPr>
+          <a:xfrm>
+            <a:off x="1170432" y="3803904"/>
+            <a:ext cx="4279392" cy="384048"/>
+          </a:xfrm>
+          <a:prstGeom prst="rect">
+            <a:avLst/>
+          </a:prstGeom>
+          <a:noFill/>
+          <a:ln/>
+        </p:spPr>
+        <p:txBody>
+          <a:bodyPr wrap="square" lIns="0" tIns="0" rIns="0" bIns="0" rtlCol="0" anchor="ctr"/>
+          <a:lstStyle/>
+          <a:p>
+            <a:pPr rtl="1" algn="r" indent="0" marL="0">
+              <a:lnSpc>
+                <a:spcPct val="100000"/>
+              </a:lnSpc>
+              <a:buNone/>
+            </a:pPr>
+            <a:r>
+              <a:rPr lang="he-IL" altLang="en-US" sz="1300" dirty="0">
+                <a:solidFill>
+                  <a:srgbClr val="F4F7FB"/>
+                </a:solidFill>
+                <a:latin typeface="Calibri" pitchFamily="34" charset="0"/>
+                <a:ea typeface="Calibri" pitchFamily="34" charset="-122"/>
+                <a:cs typeface="Calibri" pitchFamily="34" charset="-120"/>
+              </a:rPr>
+              <a:t>‫עלות: תשלום לפי צריכה, ללא הוצאה הונית‬</a:t>
+            </a:r>
+            <a:endParaRPr lang="he-IL" sz="1300" dirty="0"/>
+          </a:p>
+        </p:txBody>
+      </p:sp>
+      <p:sp>
+        <p:nvSpPr>
+          <p:cNvPr id="27" name="Shape 25"/>
+          <p:cNvSpPr/>
+          <p:nvPr/>
+        </p:nvSpPr>
+        <p:spPr>
+          <a:xfrm>
+            <a:off x="5559552" y="4334256"/>
+            <a:ext cx="91440" cy="91440"/>
+          </a:xfrm>
+          <a:prstGeom prst="rect">
+            <a:avLst/>
+          </a:prstGeom>
+          <a:solidFill>
+            <a:srgbClr val="3DD9EB"/>
+          </a:solidFill>
+          <a:ln w="12700">
+            <a:solidFill>
+              <a:srgbClr val="3DD9EB"/>
+            </a:solidFill>
+            <a:prstDash val="solid"/>
+          </a:ln>
+        </p:spPr>
+      </p:sp>
+      <p:sp>
+        <p:nvSpPr>
+          <p:cNvPr id="28" name="Text 26"/>
+          <p:cNvSpPr/>
+          <p:nvPr/>
+        </p:nvSpPr>
+        <p:spPr>
+          <a:xfrm>
+            <a:off x="1170432" y="4206240"/>
+            <a:ext cx="4279392" cy="384048"/>
+          </a:xfrm>
+          <a:prstGeom prst="rect">
+            <a:avLst/>
+          </a:prstGeom>
+          <a:noFill/>
+          <a:ln/>
+        </p:spPr>
+        <p:txBody>
+          <a:bodyPr wrap="square" lIns="0" tIns="0" rIns="0" bIns="0" rtlCol="0" anchor="ctr"/>
+          <a:lstStyle/>
+          <a:p>
+            <a:pPr rtl="1" algn="r" indent="0" marL="0">
+              <a:lnSpc>
+                <a:spcPct val="100000"/>
+              </a:lnSpc>
+              <a:buNone/>
+            </a:pPr>
+            <a:r>
+              <a:rPr lang="he-IL" altLang="en-US" sz="1300" dirty="0">
+                <a:solidFill>
+                  <a:srgbClr val="F4F7FB"/>
+                </a:solidFill>
+                <a:latin typeface="Calibri" pitchFamily="34" charset="0"/>
+                <a:ea typeface="Calibri" pitchFamily="34" charset="-122"/>
+                <a:cs typeface="Calibri" pitchFamily="34" charset="-120"/>
+              </a:rPr>
+              <a:t>‫זמן: שבועות — ללא ‪PO‬ וללא זמן אספקה‬</a:t>
+            </a:r>
+            <a:endParaRPr lang="he-IL" sz="1300" dirty="0"/>
+          </a:p>
+        </p:txBody>
+      </p:sp>
+      <p:sp>
+        <p:nvSpPr>
+          <p:cNvPr id="29" name="Shape 27"/>
+          <p:cNvSpPr/>
+          <p:nvPr/>
+        </p:nvSpPr>
+        <p:spPr>
+          <a:xfrm>
+            <a:off x="5559552" y="4736592"/>
+            <a:ext cx="91440" cy="91440"/>
+          </a:xfrm>
+          <a:prstGeom prst="rect">
+            <a:avLst/>
+          </a:prstGeom>
+          <a:solidFill>
+            <a:srgbClr val="5E6E85"/>
+          </a:solidFill>
+          <a:ln w="12700">
+            <a:solidFill>
+              <a:srgbClr val="5E6E85"/>
+            </a:solidFill>
+            <a:prstDash val="solid"/>
+          </a:ln>
+        </p:spPr>
+      </p:sp>
+      <p:sp>
+        <p:nvSpPr>
+          <p:cNvPr id="30" name="Text 28"/>
+          <p:cNvSpPr/>
+          <p:nvPr/>
+        </p:nvSpPr>
+        <p:spPr>
+          <a:xfrm>
+            <a:off x="1170432" y="4608576"/>
+            <a:ext cx="4279392" cy="384048"/>
+          </a:xfrm>
+          <a:prstGeom prst="rect">
+            <a:avLst/>
+          </a:prstGeom>
+          <a:noFill/>
+          <a:ln/>
+        </p:spPr>
+        <p:txBody>
+          <a:bodyPr wrap="square" lIns="0" tIns="0" rIns="0" bIns="0" rtlCol="0" anchor="ctr"/>
+          <a:lstStyle/>
+          <a:p>
+            <a:pPr rtl="1" algn="r" indent="0" marL="0">
+              <a:lnSpc>
+                <a:spcPct val="100000"/>
+              </a:lnSpc>
+              <a:buNone/>
+            </a:pPr>
+            <a:r>
+              <a:rPr lang="he-IL" altLang="en-US" sz="1300" dirty="0">
+                <a:solidFill>
                   <a:srgbClr val="91A0B7"/>
                 </a:solidFill>
                 <a:latin typeface="Calibri" pitchFamily="34" charset="0"/>
                 <a:ea typeface="Calibri" pitchFamily="34" charset="-122"/>
                 <a:cs typeface="Calibri" pitchFamily="34" charset="-120"/>
               </a:rPr>
-              <a:t>‫העברת הארכיון לאחסון אובייקטים בענן. מפנה שטח ב-‪ECS‬ תוך שבועות, ללא ‪PO‬ וללא זמן אספקה, בתשלום לפי צריכה. רץ במקביל לרכש — אך אינו מחליף את הדיסקים.‬</a:t>
-            </a:r>
-            <a:endParaRPr lang="he-IL" sz="1400" dirty="0"/>
-          </a:p>
-        </p:txBody>
-      </p:sp>
-      <p:sp>
-        <p:nvSpPr>
-          <p:cNvPr id="19" name="Shape 17"/>
-          <p:cNvSpPr/>
-          <p:nvPr/>
-        </p:nvSpPr>
-        <p:spPr>
-          <a:xfrm>
-            <a:off x="1152144" y="4626864"/>
-            <a:ext cx="4480560" cy="420624"/>
+              <a:t>‫מפנה שטח מיד, אך נדרשת שכבת ‪API‬ באפליקציה‬</a:t>
+            </a:r>
+            <a:endParaRPr lang="he-IL" sz="1300" dirty="0"/>
+          </a:p>
+        </p:txBody>
+      </p:sp>
+      <p:sp>
+        <p:nvSpPr>
+          <p:cNvPr id="31" name="Shape 29"/>
+          <p:cNvSpPr/>
+          <p:nvPr/>
+        </p:nvSpPr>
+        <p:spPr>
+          <a:xfrm>
+            <a:off x="1170432" y="5120640"/>
+            <a:ext cx="4443984" cy="457200"/>
           </a:xfrm>
           <a:prstGeom prst="roundRect">
             <a:avLst>
-              <a:gd name="adj" fmla="val 34783"/>
+              <a:gd name="adj" fmla="val 32000"/>
             </a:avLst>
           </a:prstGeom>
           <a:solidFill>
@@ -4988,14 +5390,14 @@
       </p:sp>
       <p:sp>
         <p:nvSpPr>
-          <p:cNvPr id="20" name="Text 18"/>
-          <p:cNvSpPr/>
-          <p:nvPr/>
-        </p:nvSpPr>
-        <p:spPr>
-          <a:xfrm>
-            <a:off x="1298448" y="4626864"/>
-            <a:ext cx="4187952" cy="420624"/>
+          <p:cNvPr id="32" name="Text 30"/>
+          <p:cNvSpPr/>
+          <p:nvPr/>
+        </p:nvSpPr>
+        <p:spPr>
+          <a:xfrm>
+            <a:off x="1316736" y="5120640"/>
+            <a:ext cx="4151376" cy="457200"/>
           </a:xfrm>
           <a:prstGeom prst="rect">
             <a:avLst/>
@@ -5014,7 +5416,7 @@
               <a:buNone/>
             </a:pPr>
             <a:r>
-              <a:rPr lang="he-IL" altLang="en-US" sz="1250" b="1" dirty="0">
+              <a:rPr lang="he-IL" altLang="en-US" sz="1300" b="1" dirty="0">
                 <a:solidFill>
                   <a:srgbClr val="3DD9EB"/>
                 </a:solidFill>
@@ -5024,13 +5426,13 @@
               </a:rPr>
               <a:t>‫נדרש: אישור עקרוני + תקציב ‪POC‬‬</a:t>
             </a:r>
-            <a:endParaRPr lang="he-IL" sz="1250" dirty="0"/>
-          </a:p>
-        </p:txBody>
-      </p:sp>
-      <p:sp>
-        <p:nvSpPr>
-          <p:cNvPr id="21" name="Shape 19"/>
+            <a:endParaRPr lang="he-IL" sz="1300" dirty="0"/>
+          </a:p>
+        </p:txBody>
+      </p:sp>
+      <p:sp>
+        <p:nvSpPr>
+          <p:cNvPr id="33" name="Shape 31"/>
           <p:cNvSpPr/>
           <p:nvPr/>
         </p:nvSpPr>
@@ -5055,7 +5457,7 @@
       </p:sp>
       <p:sp>
         <p:nvSpPr>
-          <p:cNvPr id="22" name="Shape 20"/>
+          <p:cNvPr id="34" name="Shape 32"/>
           <p:cNvSpPr/>
           <p:nvPr/>
         </p:nvSpPr>
@@ -5080,7 +5482,7 @@
       </p:sp>
       <p:sp>
         <p:nvSpPr>
-          <p:cNvPr id="23" name="Text 21"/>
+          <p:cNvPr id="35" name="Text 33"/>
           <p:cNvSpPr/>
           <p:nvPr/>
         </p:nvSpPr>
@@ -8180,7 +8582,7 @@
         </p:nvSpPr>
         <p:spPr>
           <a:xfrm>
-            <a:off x="7836408" y="2249424"/>
+            <a:off x="7836408" y="2304288"/>
             <a:ext cx="3529584" cy="237744"/>
           </a:xfrm>
           <a:prstGeom prst="rect">
@@ -8208,7 +8610,7 @@
                 <a:ea typeface="Calibri" pitchFamily="34" charset="-122"/>
                 <a:cs typeface="Calibri" pitchFamily="34" charset="-120"/>
               </a:rPr>
-              <a:t>‫‪S3 Standard‬‬</a:t>
+              <a:t>‫‪Dell ECS On-Prem‬‬</a:t>
             </a:r>
             <a:endParaRPr lang="he-IL" sz="1250" dirty="0"/>
           </a:p>
@@ -8222,7 +8624,7 @@
         </p:nvSpPr>
         <p:spPr>
           <a:xfrm>
-            <a:off x="7836408" y="2487168"/>
+            <a:off x="7836408" y="2542032"/>
             <a:ext cx="3529584" cy="219456"/>
           </a:xfrm>
           <a:prstGeom prst="rect">
@@ -8250,7 +8652,7 @@
                 <a:ea typeface="Calibri" pitchFamily="34" charset="-122"/>
                 <a:cs typeface="Calibri" pitchFamily="34" charset="-120"/>
               </a:rPr>
-              <a:t>‫‪$0.023 / GB‬‬</a:t>
+              <a:t>‫‪capex‬ דיסקים‬</a:t>
             </a:r>
             <a:endParaRPr lang="he-IL" sz="1050" dirty="0"/>
           </a:p>
@@ -8264,13 +8666,549 @@
         </p:nvSpPr>
         <p:spPr>
           <a:xfrm>
-            <a:off x="7836408" y="2724912"/>
+            <a:off x="7836408" y="2779776"/>
             <a:ext cx="3383280" cy="173736"/>
           </a:xfrm>
           <a:prstGeom prst="roundRect">
             <a:avLst>
               <a:gd name="adj" fmla="val 210526"/>
             </a:avLst>
+          </a:prstGeom>
+          <a:solidFill>
+            <a:srgbClr val="FF9F43"/>
+          </a:solidFill>
+          <a:ln w="12700">
+            <a:solidFill>
+              <a:srgbClr val="FF9F43"/>
+            </a:solidFill>
+            <a:prstDash val="solid"/>
+          </a:ln>
+        </p:spPr>
+      </p:sp>
+      <p:sp>
+        <p:nvSpPr>
+          <p:cNvPr id="9" name="Text 7"/>
+          <p:cNvSpPr/>
+          <p:nvPr/>
+        </p:nvSpPr>
+        <p:spPr>
+          <a:xfrm>
+            <a:off x="6355080" y="2377440"/>
+            <a:ext cx="1298448" cy="402336"/>
+          </a:xfrm>
+          <a:prstGeom prst="rect">
+            <a:avLst/>
+          </a:prstGeom>
+          <a:noFill/>
+          <a:ln/>
+        </p:spPr>
+        <p:txBody>
+          <a:bodyPr wrap="square" lIns="0" tIns="0" rIns="0" bIns="0" rtlCol="0" anchor="ctr"/>
+          <a:lstStyle/>
+          <a:p>
+            <a:pPr algn="r" indent="0" marL="0">
+              <a:lnSpc>
+                <a:spcPct val="100000"/>
+              </a:lnSpc>
+              <a:buNone/>
+            </a:pPr>
+            <a:r>
+              <a:rPr lang="en-US" altLang="en-US" sz="2000" b="1" dirty="0">
+                <a:solidFill>
+                  <a:srgbClr val="FF9F43"/>
+                </a:solidFill>
+                <a:latin typeface="Calibri" pitchFamily="34" charset="0"/>
+                <a:ea typeface="Calibri" pitchFamily="34" charset="-122"/>
+                <a:cs typeface="Calibri" pitchFamily="34" charset="-120"/>
+              </a:rPr>
+              <a:t>$116K</a:t>
+            </a:r>
+            <a:endParaRPr lang="en-US" sz="2000" dirty="0"/>
+          </a:p>
+        </p:txBody>
+      </p:sp>
+      <p:sp>
+        <p:nvSpPr>
+          <p:cNvPr id="10" name="Text 8"/>
+          <p:cNvSpPr/>
+          <p:nvPr/>
+        </p:nvSpPr>
+        <p:spPr>
+          <a:xfrm>
+            <a:off x="7836408" y="3273552"/>
+            <a:ext cx="3529584" cy="237744"/>
+          </a:xfrm>
+          <a:prstGeom prst="rect">
+            <a:avLst/>
+          </a:prstGeom>
+          <a:noFill/>
+          <a:ln/>
+        </p:spPr>
+        <p:txBody>
+          <a:bodyPr wrap="square" lIns="0" tIns="0" rIns="0" bIns="0" rtlCol="0" anchor="ctr"/>
+          <a:lstStyle/>
+          <a:p>
+            <a:pPr rtl="1" algn="r" indent="0" marL="0">
+              <a:lnSpc>
+                <a:spcPct val="100000"/>
+              </a:lnSpc>
+              <a:buNone/>
+            </a:pPr>
+            <a:r>
+              <a:rPr lang="he-IL" altLang="en-US" sz="1250" b="1" dirty="0">
+                <a:solidFill>
+                  <a:srgbClr val="F4F7FB"/>
+                </a:solidFill>
+                <a:latin typeface="Calibri" pitchFamily="34" charset="0"/>
+                <a:ea typeface="Calibri" pitchFamily="34" charset="-122"/>
+                <a:cs typeface="Calibri" pitchFamily="34" charset="-120"/>
+              </a:rPr>
+              <a:t>‫‪S3 Standard-IA‬‬</a:t>
+            </a:r>
+            <a:endParaRPr lang="he-IL" sz="1250" dirty="0"/>
+          </a:p>
+        </p:txBody>
+      </p:sp>
+      <p:sp>
+        <p:nvSpPr>
+          <p:cNvPr id="11" name="Text 9"/>
+          <p:cNvSpPr/>
+          <p:nvPr/>
+        </p:nvSpPr>
+        <p:spPr>
+          <a:xfrm>
+            <a:off x="7836408" y="3511296"/>
+            <a:ext cx="3529584" cy="219456"/>
+          </a:xfrm>
+          <a:prstGeom prst="rect">
+            <a:avLst/>
+          </a:prstGeom>
+          <a:noFill/>
+          <a:ln/>
+        </p:spPr>
+        <p:txBody>
+          <a:bodyPr wrap="square" lIns="0" tIns="0" rIns="0" bIns="0" rtlCol="0" anchor="ctr"/>
+          <a:lstStyle/>
+          <a:p>
+            <a:pPr rtl="1" algn="r" indent="0" marL="0">
+              <a:lnSpc>
+                <a:spcPct val="100000"/>
+              </a:lnSpc>
+              <a:buNone/>
+            </a:pPr>
+            <a:r>
+              <a:rPr lang="he-IL" altLang="en-US" sz="1050" dirty="0">
+                <a:solidFill>
+                  <a:srgbClr val="5E6E85"/>
+                </a:solidFill>
+                <a:latin typeface="Calibri" pitchFamily="34" charset="0"/>
+                <a:ea typeface="Calibri" pitchFamily="34" charset="-122"/>
+                <a:cs typeface="Calibri" pitchFamily="34" charset="-120"/>
+              </a:rPr>
+              <a:t>‫‪$0.0125 / GB‬‬</a:t>
+            </a:r>
+            <a:endParaRPr lang="he-IL" sz="1050" dirty="0"/>
+          </a:p>
+        </p:txBody>
+      </p:sp>
+      <p:sp>
+        <p:nvSpPr>
+          <p:cNvPr id="12" name="Shape 10"/>
+          <p:cNvSpPr/>
+          <p:nvPr/>
+        </p:nvSpPr>
+        <p:spPr>
+          <a:xfrm>
+            <a:off x="8986723" y="3749040"/>
+            <a:ext cx="2232965" cy="173736"/>
+          </a:xfrm>
+          <a:prstGeom prst="roundRect">
+            <a:avLst>
+              <a:gd name="adj" fmla="val 210526"/>
+            </a:avLst>
+          </a:prstGeom>
+          <a:solidFill>
+            <a:srgbClr val="3DD9EB"/>
+          </a:solidFill>
+          <a:ln w="12700">
+            <a:solidFill>
+              <a:srgbClr val="3DD9EB"/>
+            </a:solidFill>
+            <a:prstDash val="solid"/>
+          </a:ln>
+        </p:spPr>
+      </p:sp>
+      <p:sp>
+        <p:nvSpPr>
+          <p:cNvPr id="13" name="Text 11"/>
+          <p:cNvSpPr/>
+          <p:nvPr/>
+        </p:nvSpPr>
+        <p:spPr>
+          <a:xfrm>
+            <a:off x="6355080" y="3346704"/>
+            <a:ext cx="1298448" cy="402336"/>
+          </a:xfrm>
+          <a:prstGeom prst="rect">
+            <a:avLst/>
+          </a:prstGeom>
+          <a:noFill/>
+          <a:ln/>
+        </p:spPr>
+        <p:txBody>
+          <a:bodyPr wrap="square" lIns="0" tIns="0" rIns="0" bIns="0" rtlCol="0" anchor="ctr"/>
+          <a:lstStyle/>
+          <a:p>
+            <a:pPr algn="r" indent="0" marL="0">
+              <a:lnSpc>
+                <a:spcPct val="100000"/>
+              </a:lnSpc>
+              <a:buNone/>
+            </a:pPr>
+            <a:r>
+              <a:rPr lang="en-US" altLang="en-US" sz="2000" b="1" dirty="0">
+                <a:solidFill>
+                  <a:srgbClr val="3DD9EB"/>
+                </a:solidFill>
+                <a:latin typeface="Calibri" pitchFamily="34" charset="0"/>
+                <a:ea typeface="Calibri" pitchFamily="34" charset="-122"/>
+                <a:cs typeface="Calibri" pitchFamily="34" charset="-120"/>
+              </a:rPr>
+              <a:t>$77K</a:t>
+            </a:r>
+            <a:endParaRPr lang="en-US" sz="2000" dirty="0"/>
+          </a:p>
+        </p:txBody>
+      </p:sp>
+      <p:sp>
+        <p:nvSpPr>
+          <p:cNvPr id="14" name="Text 12"/>
+          <p:cNvSpPr/>
+          <p:nvPr/>
+        </p:nvSpPr>
+        <p:spPr>
+          <a:xfrm>
+            <a:off x="7836408" y="4242816"/>
+            <a:ext cx="3529584" cy="237744"/>
+          </a:xfrm>
+          <a:prstGeom prst="rect">
+            <a:avLst/>
+          </a:prstGeom>
+          <a:noFill/>
+          <a:ln/>
+        </p:spPr>
+        <p:txBody>
+          <a:bodyPr wrap="square" lIns="0" tIns="0" rIns="0" bIns="0" rtlCol="0" anchor="ctr"/>
+          <a:lstStyle/>
+          <a:p>
+            <a:pPr rtl="1" algn="r" indent="0" marL="0">
+              <a:lnSpc>
+                <a:spcPct val="100000"/>
+              </a:lnSpc>
+              <a:buNone/>
+            </a:pPr>
+            <a:r>
+              <a:rPr lang="he-IL" altLang="en-US" sz="1250" b="1" dirty="0">
+                <a:solidFill>
+                  <a:srgbClr val="F4F7FB"/>
+                </a:solidFill>
+                <a:latin typeface="Calibri" pitchFamily="34" charset="0"/>
+                <a:ea typeface="Calibri" pitchFamily="34" charset="-122"/>
+                <a:cs typeface="Calibri" pitchFamily="34" charset="-120"/>
+              </a:rPr>
+              <a:t>‫‪S3 Glacier Instant Retrieval‬‬</a:t>
+            </a:r>
+            <a:endParaRPr lang="he-IL" sz="1250" dirty="0"/>
+          </a:p>
+        </p:txBody>
+      </p:sp>
+      <p:sp>
+        <p:nvSpPr>
+          <p:cNvPr id="15" name="Text 13"/>
+          <p:cNvSpPr/>
+          <p:nvPr/>
+        </p:nvSpPr>
+        <p:spPr>
+          <a:xfrm>
+            <a:off x="7836408" y="4480560"/>
+            <a:ext cx="3529584" cy="219456"/>
+          </a:xfrm>
+          <a:prstGeom prst="rect">
+            <a:avLst/>
+          </a:prstGeom>
+          <a:noFill/>
+          <a:ln/>
+        </p:spPr>
+        <p:txBody>
+          <a:bodyPr wrap="square" lIns="0" tIns="0" rIns="0" bIns="0" rtlCol="0" anchor="ctr"/>
+          <a:lstStyle/>
+          <a:p>
+            <a:pPr rtl="1" algn="r" indent="0" marL="0">
+              <a:lnSpc>
+                <a:spcPct val="100000"/>
+              </a:lnSpc>
+              <a:buNone/>
+            </a:pPr>
+            <a:r>
+              <a:rPr lang="he-IL" altLang="en-US" sz="1050" dirty="0">
+                <a:solidFill>
+                  <a:srgbClr val="5E6E85"/>
+                </a:solidFill>
+                <a:latin typeface="Calibri" pitchFamily="34" charset="0"/>
+                <a:ea typeface="Calibri" pitchFamily="34" charset="-122"/>
+                <a:cs typeface="Calibri" pitchFamily="34" charset="-120"/>
+              </a:rPr>
+              <a:t>‫‪$0.004 / GB‬‬</a:t>
+            </a:r>
+            <a:endParaRPr lang="he-IL" sz="1050" dirty="0"/>
+          </a:p>
+        </p:txBody>
+      </p:sp>
+      <p:sp>
+        <p:nvSpPr>
+          <p:cNvPr id="16" name="Shape 14"/>
+          <p:cNvSpPr/>
+          <p:nvPr/>
+        </p:nvSpPr>
+        <p:spPr>
+          <a:xfrm>
+            <a:off x="10475366" y="4718304"/>
+            <a:ext cx="744322" cy="173736"/>
+          </a:xfrm>
+          <a:prstGeom prst="roundRect">
+            <a:avLst>
+              <a:gd name="adj" fmla="val 210526"/>
+            </a:avLst>
+          </a:prstGeom>
+          <a:solidFill>
+            <a:srgbClr val="3DDC97"/>
+          </a:solidFill>
+          <a:ln w="12700">
+            <a:solidFill>
+              <a:srgbClr val="3DDC97"/>
+            </a:solidFill>
+            <a:prstDash val="solid"/>
+          </a:ln>
+        </p:spPr>
+      </p:sp>
+      <p:sp>
+        <p:nvSpPr>
+          <p:cNvPr id="17" name="Text 15"/>
+          <p:cNvSpPr/>
+          <p:nvPr/>
+        </p:nvSpPr>
+        <p:spPr>
+          <a:xfrm>
+            <a:off x="6355080" y="4315968"/>
+            <a:ext cx="1298448" cy="402336"/>
+          </a:xfrm>
+          <a:prstGeom prst="rect">
+            <a:avLst/>
+          </a:prstGeom>
+          <a:noFill/>
+          <a:ln/>
+        </p:spPr>
+        <p:txBody>
+          <a:bodyPr wrap="square" lIns="0" tIns="0" rIns="0" bIns="0" rtlCol="0" anchor="ctr"/>
+          <a:lstStyle/>
+          <a:p>
+            <a:pPr algn="r" indent="0" marL="0">
+              <a:lnSpc>
+                <a:spcPct val="100000"/>
+              </a:lnSpc>
+              <a:buNone/>
+            </a:pPr>
+            <a:r>
+              <a:rPr lang="en-US" altLang="en-US" sz="2000" b="1" dirty="0">
+                <a:solidFill>
+                  <a:srgbClr val="3DDC97"/>
+                </a:solidFill>
+                <a:latin typeface="Calibri" pitchFamily="34" charset="0"/>
+                <a:ea typeface="Calibri" pitchFamily="34" charset="-122"/>
+                <a:cs typeface="Calibri" pitchFamily="34" charset="-120"/>
+              </a:rPr>
+              <a:t>$25K</a:t>
+            </a:r>
+            <a:endParaRPr lang="en-US" sz="2000" dirty="0"/>
+          </a:p>
+        </p:txBody>
+      </p:sp>
+      <p:sp>
+        <p:nvSpPr>
+          <p:cNvPr id="18" name="Shape 16"/>
+          <p:cNvSpPr/>
+          <p:nvPr/>
+        </p:nvSpPr>
+        <p:spPr>
+          <a:xfrm>
+            <a:off x="822960" y="2231136"/>
+            <a:ext cx="5212080" cy="1389888"/>
+          </a:xfrm>
+          <a:prstGeom prst="roundRect">
+            <a:avLst>
+              <a:gd name="adj" fmla="val 2632"/>
+            </a:avLst>
+          </a:prstGeom>
+          <a:solidFill>
+            <a:srgbClr val="182133"/>
+          </a:solidFill>
+          <a:ln w="12700">
+            <a:solidFill>
+              <a:srgbClr val="23304A"/>
+            </a:solidFill>
+            <a:prstDash val="solid"/>
+          </a:ln>
+        </p:spPr>
+      </p:sp>
+      <p:sp>
+        <p:nvSpPr>
+          <p:cNvPr id="19" name="Shape 17"/>
+          <p:cNvSpPr/>
+          <p:nvPr/>
+        </p:nvSpPr>
+        <p:spPr>
+          <a:xfrm>
+            <a:off x="5532120" y="2523744"/>
+            <a:ext cx="118872" cy="118872"/>
+          </a:xfrm>
+          <a:prstGeom prst="rect">
+            <a:avLst/>
+          </a:prstGeom>
+          <a:solidFill>
+            <a:srgbClr val="3DDC97"/>
+          </a:solidFill>
+          <a:ln w="12700">
+            <a:solidFill>
+              <a:srgbClr val="3DDC97"/>
+            </a:solidFill>
+            <a:prstDash val="solid"/>
+          </a:ln>
+        </p:spPr>
+      </p:sp>
+      <p:sp>
+        <p:nvSpPr>
+          <p:cNvPr id="20" name="Text 18"/>
+          <p:cNvSpPr/>
+          <p:nvPr/>
+        </p:nvSpPr>
+        <p:spPr>
+          <a:xfrm>
+            <a:off x="1133856" y="2468880"/>
+            <a:ext cx="4261104" cy="274320"/>
+          </a:xfrm>
+          <a:prstGeom prst="rect">
+            <a:avLst/>
+          </a:prstGeom>
+          <a:noFill/>
+          <a:ln/>
+        </p:spPr>
+        <p:txBody>
+          <a:bodyPr wrap="square" lIns="0" tIns="0" rIns="0" bIns="0" rtlCol="0" anchor="ctr"/>
+          <a:lstStyle/>
+          <a:p>
+            <a:pPr rtl="1" algn="r" indent="0" marL="0">
+              <a:lnSpc>
+                <a:spcPct val="100000"/>
+              </a:lnSpc>
+              <a:buNone/>
+            </a:pPr>
+            <a:r>
+              <a:rPr lang="he-IL" altLang="en-US" sz="1350" b="1" dirty="0">
+                <a:solidFill>
+                  <a:srgbClr val="3DDC97"/>
+                </a:solidFill>
+                <a:latin typeface="Calibri" pitchFamily="34" charset="0"/>
+                <a:ea typeface="Calibri" pitchFamily="34" charset="-122"/>
+                <a:cs typeface="Calibri" pitchFamily="34" charset="-120"/>
+              </a:rPr>
+              <a:t>‫מה שמוזיל את הענן‬</a:t>
+            </a:r>
+            <a:endParaRPr lang="he-IL" sz="1350" dirty="0"/>
+          </a:p>
+        </p:txBody>
+      </p:sp>
+      <p:sp>
+        <p:nvSpPr>
+          <p:cNvPr id="21" name="Text 19"/>
+          <p:cNvSpPr/>
+          <p:nvPr/>
+        </p:nvSpPr>
+        <p:spPr>
+          <a:xfrm>
+            <a:off x="1133856" y="2816352"/>
+            <a:ext cx="4590288" cy="548640"/>
+          </a:xfrm>
+          <a:prstGeom prst="rect">
+            <a:avLst/>
+          </a:prstGeom>
+          <a:noFill/>
+          <a:ln/>
+        </p:spPr>
+        <p:txBody>
+          <a:bodyPr wrap="square" lIns="0" tIns="0" rIns="0" bIns="0" rtlCol="0" anchor="t"/>
+          <a:lstStyle/>
+          <a:p>
+            <a:pPr rtl="1" algn="r" indent="0" marL="0">
+              <a:lnSpc>
+                <a:spcPct val="122000"/>
+              </a:lnSpc>
+              <a:buNone/>
+            </a:pPr>
+            <a:r>
+              <a:rPr lang="he-IL" altLang="en-US" sz="1200" dirty="0">
+                <a:solidFill>
+                  <a:srgbClr val="91A0B7"/>
+                </a:solidFill>
+                <a:latin typeface="Calibri" pitchFamily="34" charset="0"/>
+                <a:ea typeface="Calibri" pitchFamily="34" charset="-122"/>
+                <a:cs typeface="Calibri" pitchFamily="34" charset="-120"/>
+              </a:rPr>
+              <a:t>‫מסמכי דימות ו-‪Verint‬ נכתבים פעם אחת ונקראים לעיתים נדירות. ב-‪Glacier Instant Retrieval‬, בזמן אחזור של מילישניות, העלות יורדת לכ-‪$25K‬ — פי ‪4.6‬ זול מ-‪On-Prem‬, ולא יקר ממנו ב-‪30%‬.‬</a:t>
+            </a:r>
+            <a:endParaRPr lang="he-IL" sz="1200" dirty="0"/>
+          </a:p>
+        </p:txBody>
+      </p:sp>
+      <p:sp>
+        <p:nvSpPr>
+          <p:cNvPr id="22" name="Shape 20"/>
+          <p:cNvSpPr/>
+          <p:nvPr/>
+        </p:nvSpPr>
+        <p:spPr>
+          <a:xfrm>
+            <a:off x="822960" y="3785616"/>
+            <a:ext cx="5212080" cy="1463040"/>
+          </a:xfrm>
+          <a:prstGeom prst="roundRect">
+            <a:avLst>
+              <a:gd name="adj" fmla="val 2500"/>
+            </a:avLst>
+          </a:prstGeom>
+          <a:solidFill>
+            <a:srgbClr val="182133"/>
+          </a:solidFill>
+          <a:ln w="12700">
+            <a:solidFill>
+              <a:srgbClr val="23304A"/>
+            </a:solidFill>
+            <a:prstDash val="solid"/>
+          </a:ln>
+        </p:spPr>
+      </p:sp>
+      <p:sp>
+        <p:nvSpPr>
+          <p:cNvPr id="23" name="Shape 21"/>
+          <p:cNvSpPr/>
+          <p:nvPr/>
+        </p:nvSpPr>
+        <p:spPr>
+          <a:xfrm>
+            <a:off x="5532120" y="4078224"/>
+            <a:ext cx="118872" cy="118872"/>
+          </a:xfrm>
+          <a:prstGeom prst="rect">
+            <a:avLst/>
           </a:prstGeom>
           <a:solidFill>
             <a:srgbClr val="FF6B7A"/>
@@ -8285,14 +9223,14 @@
       </p:sp>
       <p:sp>
         <p:nvSpPr>
-          <p:cNvPr id="9" name="Text 7"/>
-          <p:cNvSpPr/>
-          <p:nvPr/>
-        </p:nvSpPr>
-        <p:spPr>
-          <a:xfrm>
-            <a:off x="6355080" y="2322576"/>
-            <a:ext cx="1298448" cy="402336"/>
+          <p:cNvPr id="24" name="Text 22"/>
+          <p:cNvSpPr/>
+          <p:nvPr/>
+        </p:nvSpPr>
+        <p:spPr>
+          <a:xfrm>
+            <a:off x="1133856" y="4023360"/>
+            <a:ext cx="4261104" cy="274320"/>
           </a:xfrm>
           <a:prstGeom prst="rect">
             <a:avLst/>
@@ -8304,14 +9242,14 @@
           <a:bodyPr wrap="square" lIns="0" tIns="0" rIns="0" bIns="0" rtlCol="0" anchor="ctr"/>
           <a:lstStyle/>
           <a:p>
-            <a:pPr algn="r" indent="0" marL="0">
+            <a:pPr rtl="1" algn="r" indent="0" marL="0">
               <a:lnSpc>
                 <a:spcPct val="100000"/>
               </a:lnSpc>
               <a:buNone/>
             </a:pPr>
             <a:r>
-              <a:rPr lang="en-US" altLang="en-US" sz="2000" b="1" dirty="0">
+              <a:rPr lang="he-IL" altLang="en-US" sz="1350" b="1" dirty="0">
                 <a:solidFill>
                   <a:srgbClr val="FF6B7A"/>
                 </a:solidFill>
@@ -8319,489 +9257,70 @@
                 <a:ea typeface="Calibri" pitchFamily="34" charset="-122"/>
                 <a:cs typeface="Calibri" pitchFamily="34" charset="-120"/>
               </a:rPr>
-              <a:t>$141K</a:t>
-            </a:r>
-            <a:endParaRPr lang="en-US" sz="2000" dirty="0"/>
-          </a:p>
-        </p:txBody>
-      </p:sp>
-      <p:sp>
-        <p:nvSpPr>
-          <p:cNvPr id="10" name="Text 8"/>
-          <p:cNvSpPr/>
-          <p:nvPr/>
-        </p:nvSpPr>
-        <p:spPr>
-          <a:xfrm>
-            <a:off x="7836408" y="2999232"/>
-            <a:ext cx="3529584" cy="237744"/>
-          </a:xfrm>
-          <a:prstGeom prst="rect">
-            <a:avLst/>
-          </a:prstGeom>
-          <a:noFill/>
-          <a:ln/>
-        </p:spPr>
-        <p:txBody>
-          <a:bodyPr wrap="square" lIns="0" tIns="0" rIns="0" bIns="0" rtlCol="0" anchor="ctr"/>
-          <a:lstStyle/>
-          <a:p>
-            <a:pPr rtl="1" algn="r" indent="0" marL="0">
-              <a:lnSpc>
-                <a:spcPct val="100000"/>
-              </a:lnSpc>
-              <a:buNone/>
-            </a:pPr>
-            <a:r>
-              <a:rPr lang="he-IL" altLang="en-US" sz="1250" b="1" dirty="0">
-                <a:solidFill>
-                  <a:srgbClr val="F4F7FB"/>
-                </a:solidFill>
-                <a:latin typeface="Calibri" pitchFamily="34" charset="0"/>
-                <a:ea typeface="Calibri" pitchFamily="34" charset="-122"/>
-                <a:cs typeface="Calibri" pitchFamily="34" charset="-120"/>
-              </a:rPr>
-              <a:t>‫‪Dell ECS On-Prem‬‬</a:t>
-            </a:r>
-            <a:endParaRPr lang="he-IL" sz="1250" dirty="0"/>
-          </a:p>
-        </p:txBody>
-      </p:sp>
-      <p:sp>
-        <p:nvSpPr>
-          <p:cNvPr id="11" name="Text 9"/>
-          <p:cNvSpPr/>
-          <p:nvPr/>
-        </p:nvSpPr>
-        <p:spPr>
-          <a:xfrm>
-            <a:off x="7836408" y="3236976"/>
-            <a:ext cx="3529584" cy="219456"/>
-          </a:xfrm>
-          <a:prstGeom prst="rect">
-            <a:avLst/>
-          </a:prstGeom>
-          <a:noFill/>
-          <a:ln/>
-        </p:spPr>
-        <p:txBody>
-          <a:bodyPr wrap="square" lIns="0" tIns="0" rIns="0" bIns="0" rtlCol="0" anchor="ctr"/>
-          <a:lstStyle/>
-          <a:p>
-            <a:pPr rtl="1" algn="r" indent="0" marL="0">
-              <a:lnSpc>
-                <a:spcPct val="100000"/>
-              </a:lnSpc>
-              <a:buNone/>
-            </a:pPr>
-            <a:r>
-              <a:rPr lang="he-IL" altLang="en-US" sz="1050" dirty="0">
-                <a:solidFill>
-                  <a:srgbClr val="5E6E85"/>
-                </a:solidFill>
-                <a:latin typeface="Calibri" pitchFamily="34" charset="0"/>
-                <a:ea typeface="Calibri" pitchFamily="34" charset="-122"/>
-                <a:cs typeface="Calibri" pitchFamily="34" charset="-120"/>
-              </a:rPr>
-              <a:t>‫‪capex‬ דיסקים‬</a:t>
-            </a:r>
-            <a:endParaRPr lang="he-IL" sz="1050" dirty="0"/>
-          </a:p>
-        </p:txBody>
-      </p:sp>
-      <p:sp>
-        <p:nvSpPr>
-          <p:cNvPr id="12" name="Shape 10"/>
-          <p:cNvSpPr/>
-          <p:nvPr/>
-        </p:nvSpPr>
-        <p:spPr>
-          <a:xfrm>
-            <a:off x="8445398" y="3474720"/>
-            <a:ext cx="2774290" cy="173736"/>
-          </a:xfrm>
-          <a:prstGeom prst="roundRect">
-            <a:avLst>
-              <a:gd name="adj" fmla="val 210526"/>
-            </a:avLst>
-          </a:prstGeom>
-          <a:solidFill>
-            <a:srgbClr val="FF9F43"/>
-          </a:solidFill>
-          <a:ln w="12700">
-            <a:solidFill>
-              <a:srgbClr val="FF9F43"/>
-            </a:solidFill>
-            <a:prstDash val="solid"/>
-          </a:ln>
-        </p:spPr>
-      </p:sp>
-      <p:sp>
-        <p:nvSpPr>
-          <p:cNvPr id="13" name="Text 11"/>
-          <p:cNvSpPr/>
-          <p:nvPr/>
-        </p:nvSpPr>
-        <p:spPr>
-          <a:xfrm>
-            <a:off x="6355080" y="3072384"/>
-            <a:ext cx="1298448" cy="402336"/>
-          </a:xfrm>
-          <a:prstGeom prst="rect">
-            <a:avLst/>
-          </a:prstGeom>
-          <a:noFill/>
-          <a:ln/>
-        </p:spPr>
-        <p:txBody>
-          <a:bodyPr wrap="square" lIns="0" tIns="0" rIns="0" bIns="0" rtlCol="0" anchor="ctr"/>
-          <a:lstStyle/>
-          <a:p>
-            <a:pPr algn="r" indent="0" marL="0">
-              <a:lnSpc>
-                <a:spcPct val="100000"/>
-              </a:lnSpc>
-              <a:buNone/>
-            </a:pPr>
-            <a:r>
-              <a:rPr lang="en-US" altLang="en-US" sz="2000" b="1" dirty="0">
-                <a:solidFill>
-                  <a:srgbClr val="FF9F43"/>
-                </a:solidFill>
-                <a:latin typeface="Calibri" pitchFamily="34" charset="0"/>
-                <a:ea typeface="Calibri" pitchFamily="34" charset="-122"/>
-                <a:cs typeface="Calibri" pitchFamily="34" charset="-120"/>
-              </a:rPr>
-              <a:t>$116K</a:t>
-            </a:r>
-            <a:endParaRPr lang="en-US" sz="2000" dirty="0"/>
-          </a:p>
-        </p:txBody>
-      </p:sp>
-      <p:sp>
-        <p:nvSpPr>
-          <p:cNvPr id="14" name="Text 12"/>
-          <p:cNvSpPr/>
-          <p:nvPr/>
-        </p:nvSpPr>
-        <p:spPr>
-          <a:xfrm>
-            <a:off x="7836408" y="3749040"/>
-            <a:ext cx="3529584" cy="237744"/>
-          </a:xfrm>
-          <a:prstGeom prst="rect">
-            <a:avLst/>
-          </a:prstGeom>
-          <a:noFill/>
-          <a:ln/>
-        </p:spPr>
-        <p:txBody>
-          <a:bodyPr wrap="square" lIns="0" tIns="0" rIns="0" bIns="0" rtlCol="0" anchor="ctr"/>
-          <a:lstStyle/>
-          <a:p>
-            <a:pPr rtl="1" algn="r" indent="0" marL="0">
-              <a:lnSpc>
-                <a:spcPct val="100000"/>
-              </a:lnSpc>
-              <a:buNone/>
-            </a:pPr>
-            <a:r>
-              <a:rPr lang="he-IL" altLang="en-US" sz="1250" b="1" dirty="0">
-                <a:solidFill>
-                  <a:srgbClr val="F4F7FB"/>
-                </a:solidFill>
-                <a:latin typeface="Calibri" pitchFamily="34" charset="0"/>
-                <a:ea typeface="Calibri" pitchFamily="34" charset="-122"/>
-                <a:cs typeface="Calibri" pitchFamily="34" charset="-120"/>
-              </a:rPr>
-              <a:t>‫‪S3 Standard-IA‬‬</a:t>
-            </a:r>
-            <a:endParaRPr lang="he-IL" sz="1250" dirty="0"/>
-          </a:p>
-        </p:txBody>
-      </p:sp>
-      <p:sp>
-        <p:nvSpPr>
-          <p:cNvPr id="15" name="Text 13"/>
-          <p:cNvSpPr/>
-          <p:nvPr/>
-        </p:nvSpPr>
-        <p:spPr>
-          <a:xfrm>
-            <a:off x="7836408" y="3986784"/>
-            <a:ext cx="3529584" cy="219456"/>
-          </a:xfrm>
-          <a:prstGeom prst="rect">
-            <a:avLst/>
-          </a:prstGeom>
-          <a:noFill/>
-          <a:ln/>
-        </p:spPr>
-        <p:txBody>
-          <a:bodyPr wrap="square" lIns="0" tIns="0" rIns="0" bIns="0" rtlCol="0" anchor="ctr"/>
-          <a:lstStyle/>
-          <a:p>
-            <a:pPr rtl="1" algn="r" indent="0" marL="0">
-              <a:lnSpc>
-                <a:spcPct val="100000"/>
-              </a:lnSpc>
-              <a:buNone/>
-            </a:pPr>
-            <a:r>
-              <a:rPr lang="he-IL" altLang="en-US" sz="1050" dirty="0">
-                <a:solidFill>
-                  <a:srgbClr val="5E6E85"/>
-                </a:solidFill>
-                <a:latin typeface="Calibri" pitchFamily="34" charset="0"/>
-                <a:ea typeface="Calibri" pitchFamily="34" charset="-122"/>
-                <a:cs typeface="Calibri" pitchFamily="34" charset="-120"/>
-              </a:rPr>
-              <a:t>‫‪$0.0125 / GB‬‬</a:t>
-            </a:r>
-            <a:endParaRPr lang="he-IL" sz="1050" dirty="0"/>
-          </a:p>
-        </p:txBody>
-      </p:sp>
-      <p:sp>
-        <p:nvSpPr>
-          <p:cNvPr id="16" name="Shape 14"/>
-          <p:cNvSpPr/>
-          <p:nvPr/>
-        </p:nvSpPr>
-        <p:spPr>
-          <a:xfrm>
-            <a:off x="9392717" y="4224528"/>
-            <a:ext cx="1826971" cy="173736"/>
-          </a:xfrm>
-          <a:prstGeom prst="roundRect">
-            <a:avLst>
-              <a:gd name="adj" fmla="val 210526"/>
-            </a:avLst>
-          </a:prstGeom>
-          <a:solidFill>
-            <a:srgbClr val="3DD9EB"/>
-          </a:solidFill>
-          <a:ln w="12700">
-            <a:solidFill>
-              <a:srgbClr val="3DD9EB"/>
-            </a:solidFill>
-            <a:prstDash val="solid"/>
-          </a:ln>
-        </p:spPr>
-      </p:sp>
-      <p:sp>
-        <p:nvSpPr>
-          <p:cNvPr id="17" name="Text 15"/>
-          <p:cNvSpPr/>
-          <p:nvPr/>
-        </p:nvSpPr>
-        <p:spPr>
-          <a:xfrm>
-            <a:off x="6355080" y="3822192"/>
-            <a:ext cx="1298448" cy="402336"/>
-          </a:xfrm>
-          <a:prstGeom prst="rect">
-            <a:avLst/>
-          </a:prstGeom>
-          <a:noFill/>
-          <a:ln/>
-        </p:spPr>
-        <p:txBody>
-          <a:bodyPr wrap="square" lIns="0" tIns="0" rIns="0" bIns="0" rtlCol="0" anchor="ctr"/>
-          <a:lstStyle/>
-          <a:p>
-            <a:pPr algn="r" indent="0" marL="0">
-              <a:lnSpc>
-                <a:spcPct val="100000"/>
-              </a:lnSpc>
-              <a:buNone/>
-            </a:pPr>
-            <a:r>
-              <a:rPr lang="en-US" altLang="en-US" sz="2000" b="1" dirty="0">
-                <a:solidFill>
-                  <a:srgbClr val="3DD9EB"/>
-                </a:solidFill>
-                <a:latin typeface="Calibri" pitchFamily="34" charset="0"/>
-                <a:ea typeface="Calibri" pitchFamily="34" charset="-122"/>
-                <a:cs typeface="Calibri" pitchFamily="34" charset="-120"/>
-              </a:rPr>
-              <a:t>$77K</a:t>
-            </a:r>
-            <a:endParaRPr lang="en-US" sz="2000" dirty="0"/>
-          </a:p>
-        </p:txBody>
-      </p:sp>
-      <p:sp>
-        <p:nvSpPr>
-          <p:cNvPr id="18" name="Text 16"/>
-          <p:cNvSpPr/>
-          <p:nvPr/>
-        </p:nvSpPr>
-        <p:spPr>
-          <a:xfrm>
-            <a:off x="7836408" y="4498848"/>
-            <a:ext cx="3529584" cy="237744"/>
-          </a:xfrm>
-          <a:prstGeom prst="rect">
-            <a:avLst/>
-          </a:prstGeom>
-          <a:noFill/>
-          <a:ln/>
-        </p:spPr>
-        <p:txBody>
-          <a:bodyPr wrap="square" lIns="0" tIns="0" rIns="0" bIns="0" rtlCol="0" anchor="ctr"/>
-          <a:lstStyle/>
-          <a:p>
-            <a:pPr rtl="1" algn="r" indent="0" marL="0">
-              <a:lnSpc>
-                <a:spcPct val="100000"/>
-              </a:lnSpc>
-              <a:buNone/>
-            </a:pPr>
-            <a:r>
-              <a:rPr lang="he-IL" altLang="en-US" sz="1250" b="1" dirty="0">
-                <a:solidFill>
-                  <a:srgbClr val="F4F7FB"/>
-                </a:solidFill>
-                <a:latin typeface="Calibri" pitchFamily="34" charset="0"/>
-                <a:ea typeface="Calibri" pitchFamily="34" charset="-122"/>
-                <a:cs typeface="Calibri" pitchFamily="34" charset="-120"/>
-              </a:rPr>
-              <a:t>‫‪S3 Glacier Instant Retrieval‬‬</a:t>
-            </a:r>
-            <a:endParaRPr lang="he-IL" sz="1250" dirty="0"/>
-          </a:p>
-        </p:txBody>
-      </p:sp>
-      <p:sp>
-        <p:nvSpPr>
-          <p:cNvPr id="19" name="Text 17"/>
-          <p:cNvSpPr/>
-          <p:nvPr/>
-        </p:nvSpPr>
-        <p:spPr>
-          <a:xfrm>
-            <a:off x="7836408" y="4736592"/>
-            <a:ext cx="3529584" cy="219456"/>
-          </a:xfrm>
-          <a:prstGeom prst="rect">
-            <a:avLst/>
-          </a:prstGeom>
-          <a:noFill/>
-          <a:ln/>
-        </p:spPr>
-        <p:txBody>
-          <a:bodyPr wrap="square" lIns="0" tIns="0" rIns="0" bIns="0" rtlCol="0" anchor="ctr"/>
-          <a:lstStyle/>
-          <a:p>
-            <a:pPr rtl="1" algn="r" indent="0" marL="0">
-              <a:lnSpc>
-                <a:spcPct val="100000"/>
-              </a:lnSpc>
-              <a:buNone/>
-            </a:pPr>
-            <a:r>
-              <a:rPr lang="he-IL" altLang="en-US" sz="1050" dirty="0">
-                <a:solidFill>
-                  <a:srgbClr val="5E6E85"/>
-                </a:solidFill>
-                <a:latin typeface="Calibri" pitchFamily="34" charset="0"/>
-                <a:ea typeface="Calibri" pitchFamily="34" charset="-122"/>
-                <a:cs typeface="Calibri" pitchFamily="34" charset="-120"/>
-              </a:rPr>
-              <a:t>‫‪$0.004 / GB‬‬</a:t>
-            </a:r>
-            <a:endParaRPr lang="he-IL" sz="1050" dirty="0"/>
-          </a:p>
-        </p:txBody>
-      </p:sp>
-      <p:sp>
-        <p:nvSpPr>
-          <p:cNvPr id="20" name="Shape 18"/>
-          <p:cNvSpPr/>
-          <p:nvPr/>
-        </p:nvSpPr>
-        <p:spPr>
-          <a:xfrm>
-            <a:off x="10644530" y="4974336"/>
-            <a:ext cx="575158" cy="173736"/>
-          </a:xfrm>
-          <a:prstGeom prst="roundRect">
-            <a:avLst>
-              <a:gd name="adj" fmla="val 210526"/>
-            </a:avLst>
-          </a:prstGeom>
-          <a:solidFill>
-            <a:srgbClr val="3DDC97"/>
-          </a:solidFill>
-          <a:ln w="12700">
-            <a:solidFill>
-              <a:srgbClr val="3DDC97"/>
-            </a:solidFill>
-            <a:prstDash val="solid"/>
-          </a:ln>
-        </p:spPr>
-      </p:sp>
-      <p:sp>
-        <p:nvSpPr>
-          <p:cNvPr id="21" name="Text 19"/>
-          <p:cNvSpPr/>
-          <p:nvPr/>
-        </p:nvSpPr>
-        <p:spPr>
-          <a:xfrm>
-            <a:off x="6355080" y="4572000"/>
-            <a:ext cx="1298448" cy="402336"/>
-          </a:xfrm>
-          <a:prstGeom prst="rect">
-            <a:avLst/>
-          </a:prstGeom>
-          <a:noFill/>
-          <a:ln/>
-        </p:spPr>
-        <p:txBody>
-          <a:bodyPr wrap="square" lIns="0" tIns="0" rIns="0" bIns="0" rtlCol="0" anchor="ctr"/>
-          <a:lstStyle/>
-          <a:p>
-            <a:pPr algn="r" indent="0" marL="0">
-              <a:lnSpc>
-                <a:spcPct val="100000"/>
-              </a:lnSpc>
-              <a:buNone/>
-            </a:pPr>
-            <a:r>
-              <a:rPr lang="en-US" altLang="en-US" sz="2000" b="1" dirty="0">
-                <a:solidFill>
-                  <a:srgbClr val="3DDC97"/>
-                </a:solidFill>
-                <a:latin typeface="Calibri" pitchFamily="34" charset="0"/>
-                <a:ea typeface="Calibri" pitchFamily="34" charset="-122"/>
-                <a:cs typeface="Calibri" pitchFamily="34" charset="-120"/>
-              </a:rPr>
-              <a:t>$25K</a:t>
-            </a:r>
-            <a:endParaRPr lang="en-US" sz="2000" dirty="0"/>
-          </a:p>
-        </p:txBody>
-      </p:sp>
-      <p:sp>
-        <p:nvSpPr>
-          <p:cNvPr id="22" name="Shape 20"/>
-          <p:cNvSpPr/>
-          <p:nvPr/>
-        </p:nvSpPr>
-        <p:spPr>
-          <a:xfrm>
-            <a:off x="822960" y="2231136"/>
-            <a:ext cx="5212080" cy="1389888"/>
-          </a:xfrm>
-          <a:prstGeom prst="roundRect">
-            <a:avLst>
-              <a:gd name="adj" fmla="val 2632"/>
-            </a:avLst>
-          </a:prstGeom>
-          <a:solidFill>
-            <a:srgbClr val="182133"/>
+              <a:t>‫מה שמייקר אותו‬</a:t>
+            </a:r>
+            <a:endParaRPr lang="he-IL" sz="1350" dirty="0"/>
+          </a:p>
+        </p:txBody>
+      </p:sp>
+      <p:sp>
+        <p:nvSpPr>
+          <p:cNvPr id="25" name="Text 23"/>
+          <p:cNvSpPr/>
+          <p:nvPr/>
+        </p:nvSpPr>
+        <p:spPr>
+          <a:xfrm>
+            <a:off x="1133856" y="4370832"/>
+            <a:ext cx="4590288" cy="621792"/>
+          </a:xfrm>
+          <a:prstGeom prst="rect">
+            <a:avLst/>
+          </a:prstGeom>
+          <a:noFill/>
+          <a:ln/>
+        </p:spPr>
+        <p:txBody>
+          <a:bodyPr wrap="square" lIns="0" tIns="0" rIns="0" bIns="0" rtlCol="0" anchor="t"/>
+          <a:lstStyle/>
+          <a:p>
+            <a:pPr rtl="1" algn="r" indent="0" marL="0">
+              <a:lnSpc>
+                <a:spcPct val="122000"/>
+              </a:lnSpc>
+              <a:buNone/>
+            </a:pPr>
+            <a:r>
+              <a:rPr lang="he-IL" altLang="en-US" sz="1200" dirty="0">
+                <a:solidFill>
+                  <a:srgbClr val="91A0B7"/>
+                </a:solidFill>
+                <a:latin typeface="Calibri" pitchFamily="34" charset="0"/>
+                <a:ea typeface="Calibri" pitchFamily="34" charset="-122"/>
+                <a:cs typeface="Calibri" pitchFamily="34" charset="-120"/>
+              </a:rPr>
+              <a:t>‫יציאת נתונים ‪$0.09‬ ל-‪GB (‬כ-‪$9K‬ להוצאת ‪100 TB‬ חזרה), דמי אחזור ‪$0.03‬ ל-‪GB‬ ב-‪Glacier IR‬, מינימום ‪90‬ יום אחסון, וחיוב מינימלי של ‪128 KB‬ לאובייקט — משמעותי בדימות עם ריבוי קבצים קטנים. מחירי אזור תל אביב גבוהים ב-‪10%–15%‬ ממחירון ‪us-east-1‬.‬</a:t>
+            </a:r>
+            <a:endParaRPr lang="he-IL" sz="1200" dirty="0"/>
+          </a:p>
+        </p:txBody>
+      </p:sp>
+      <p:sp>
+        <p:nvSpPr>
+          <p:cNvPr id="26" name="Shape 24"/>
+          <p:cNvSpPr/>
+          <p:nvPr/>
+        </p:nvSpPr>
+        <p:spPr>
+          <a:xfrm>
+            <a:off x="822960" y="5907024"/>
+            <a:ext cx="10545775" cy="10973"/>
+          </a:xfrm>
+          <a:prstGeom prst="rect">
+            <a:avLst/>
+          </a:prstGeom>
+          <a:solidFill>
+            <a:srgbClr val="23304A"/>
           </a:solidFill>
           <a:ln w="12700">
             <a:solidFill>
@@ -8813,277 +9332,7 @@
       </p:sp>
       <p:sp>
         <p:nvSpPr>
-          <p:cNvPr id="23" name="Shape 21"/>
-          <p:cNvSpPr/>
-          <p:nvPr/>
-        </p:nvSpPr>
-        <p:spPr>
-          <a:xfrm>
-            <a:off x="5532120" y="2523744"/>
-            <a:ext cx="118872" cy="118872"/>
-          </a:xfrm>
-          <a:prstGeom prst="rect">
-            <a:avLst/>
-          </a:prstGeom>
-          <a:solidFill>
-            <a:srgbClr val="3DDC97"/>
-          </a:solidFill>
-          <a:ln w="12700">
-            <a:solidFill>
-              <a:srgbClr val="3DDC97"/>
-            </a:solidFill>
-            <a:prstDash val="solid"/>
-          </a:ln>
-        </p:spPr>
-      </p:sp>
-      <p:sp>
-        <p:nvSpPr>
-          <p:cNvPr id="24" name="Text 22"/>
-          <p:cNvSpPr/>
-          <p:nvPr/>
-        </p:nvSpPr>
-        <p:spPr>
-          <a:xfrm>
-            <a:off x="1133856" y="2468880"/>
-            <a:ext cx="4261104" cy="274320"/>
-          </a:xfrm>
-          <a:prstGeom prst="rect">
-            <a:avLst/>
-          </a:prstGeom>
-          <a:noFill/>
-          <a:ln/>
-        </p:spPr>
-        <p:txBody>
-          <a:bodyPr wrap="square" lIns="0" tIns="0" rIns="0" bIns="0" rtlCol="0" anchor="ctr"/>
-          <a:lstStyle/>
-          <a:p>
-            <a:pPr rtl="1" algn="r" indent="0" marL="0">
-              <a:lnSpc>
-                <a:spcPct val="100000"/>
-              </a:lnSpc>
-              <a:buNone/>
-            </a:pPr>
-            <a:r>
-              <a:rPr lang="he-IL" altLang="en-US" sz="1350" b="1" dirty="0">
-                <a:solidFill>
-                  <a:srgbClr val="3DDC97"/>
-                </a:solidFill>
-                <a:latin typeface="Calibri" pitchFamily="34" charset="0"/>
-                <a:ea typeface="Calibri" pitchFamily="34" charset="-122"/>
-                <a:cs typeface="Calibri" pitchFamily="34" charset="-120"/>
-              </a:rPr>
-              <a:t>‫מה שמוזיל את הענן‬</a:t>
-            </a:r>
-            <a:endParaRPr lang="he-IL" sz="1350" dirty="0"/>
-          </a:p>
-        </p:txBody>
-      </p:sp>
-      <p:sp>
-        <p:nvSpPr>
-          <p:cNvPr id="25" name="Text 23"/>
-          <p:cNvSpPr/>
-          <p:nvPr/>
-        </p:nvSpPr>
-        <p:spPr>
-          <a:xfrm>
-            <a:off x="1133856" y="2816352"/>
-            <a:ext cx="4590288" cy="548640"/>
-          </a:xfrm>
-          <a:prstGeom prst="rect">
-            <a:avLst/>
-          </a:prstGeom>
-          <a:noFill/>
-          <a:ln/>
-        </p:spPr>
-        <p:txBody>
-          <a:bodyPr wrap="square" lIns="0" tIns="0" rIns="0" bIns="0" rtlCol="0" anchor="t"/>
-          <a:lstStyle/>
-          <a:p>
-            <a:pPr rtl="1" algn="r" indent="0" marL="0">
-              <a:lnSpc>
-                <a:spcPct val="122000"/>
-              </a:lnSpc>
-              <a:buNone/>
-            </a:pPr>
-            <a:r>
-              <a:rPr lang="he-IL" altLang="en-US" sz="1200" dirty="0">
-                <a:solidFill>
-                  <a:srgbClr val="91A0B7"/>
-                </a:solidFill>
-                <a:latin typeface="Calibri" pitchFamily="34" charset="0"/>
-                <a:ea typeface="Calibri" pitchFamily="34" charset="-122"/>
-                <a:cs typeface="Calibri" pitchFamily="34" charset="-120"/>
-              </a:rPr>
-              <a:t>‫מסמכי דימות ו-‪Verint‬ נכתבים פעם אחת ונקראים לעיתים נדירות. ב-‪Glacier Instant Retrieval‬, בזמן אחזור של מילישניות, העלות יורדת לכ-‪$25K‬ — פי ‪4.6‬ זול מ-‪On-Prem‬, ולא יקר ממנו ב-‪30%‬.‬</a:t>
-            </a:r>
-            <a:endParaRPr lang="he-IL" sz="1200" dirty="0"/>
-          </a:p>
-        </p:txBody>
-      </p:sp>
-      <p:sp>
-        <p:nvSpPr>
-          <p:cNvPr id="26" name="Shape 24"/>
-          <p:cNvSpPr/>
-          <p:nvPr/>
-        </p:nvSpPr>
-        <p:spPr>
-          <a:xfrm>
-            <a:off x="822960" y="3785616"/>
-            <a:ext cx="5212080" cy="1463040"/>
-          </a:xfrm>
-          <a:prstGeom prst="roundRect">
-            <a:avLst>
-              <a:gd name="adj" fmla="val 2500"/>
-            </a:avLst>
-          </a:prstGeom>
-          <a:solidFill>
-            <a:srgbClr val="182133"/>
-          </a:solidFill>
-          <a:ln w="12700">
-            <a:solidFill>
-              <a:srgbClr val="23304A"/>
-            </a:solidFill>
-            <a:prstDash val="solid"/>
-          </a:ln>
-        </p:spPr>
-      </p:sp>
-      <p:sp>
-        <p:nvSpPr>
           <p:cNvPr id="27" name="Shape 25"/>
-          <p:cNvSpPr/>
-          <p:nvPr/>
-        </p:nvSpPr>
-        <p:spPr>
-          <a:xfrm>
-            <a:off x="5532120" y="4078224"/>
-            <a:ext cx="118872" cy="118872"/>
-          </a:xfrm>
-          <a:prstGeom prst="rect">
-            <a:avLst/>
-          </a:prstGeom>
-          <a:solidFill>
-            <a:srgbClr val="FF6B7A"/>
-          </a:solidFill>
-          <a:ln w="12700">
-            <a:solidFill>
-              <a:srgbClr val="FF6B7A"/>
-            </a:solidFill>
-            <a:prstDash val="solid"/>
-          </a:ln>
-        </p:spPr>
-      </p:sp>
-      <p:sp>
-        <p:nvSpPr>
-          <p:cNvPr id="28" name="Text 26"/>
-          <p:cNvSpPr/>
-          <p:nvPr/>
-        </p:nvSpPr>
-        <p:spPr>
-          <a:xfrm>
-            <a:off x="1133856" y="4023360"/>
-            <a:ext cx="4261104" cy="274320"/>
-          </a:xfrm>
-          <a:prstGeom prst="rect">
-            <a:avLst/>
-          </a:prstGeom>
-          <a:noFill/>
-          <a:ln/>
-        </p:spPr>
-        <p:txBody>
-          <a:bodyPr wrap="square" lIns="0" tIns="0" rIns="0" bIns="0" rtlCol="0" anchor="ctr"/>
-          <a:lstStyle/>
-          <a:p>
-            <a:pPr rtl="1" algn="r" indent="0" marL="0">
-              <a:lnSpc>
-                <a:spcPct val="100000"/>
-              </a:lnSpc>
-              <a:buNone/>
-            </a:pPr>
-            <a:r>
-              <a:rPr lang="he-IL" altLang="en-US" sz="1350" b="1" dirty="0">
-                <a:solidFill>
-                  <a:srgbClr val="FF6B7A"/>
-                </a:solidFill>
-                <a:latin typeface="Calibri" pitchFamily="34" charset="0"/>
-                <a:ea typeface="Calibri" pitchFamily="34" charset="-122"/>
-                <a:cs typeface="Calibri" pitchFamily="34" charset="-120"/>
-              </a:rPr>
-              <a:t>‫מה שמייקר אותו‬</a:t>
-            </a:r>
-            <a:endParaRPr lang="he-IL" sz="1350" dirty="0"/>
-          </a:p>
-        </p:txBody>
-      </p:sp>
-      <p:sp>
-        <p:nvSpPr>
-          <p:cNvPr id="29" name="Text 27"/>
-          <p:cNvSpPr/>
-          <p:nvPr/>
-        </p:nvSpPr>
-        <p:spPr>
-          <a:xfrm>
-            <a:off x="1133856" y="4370832"/>
-            <a:ext cx="4590288" cy="621792"/>
-          </a:xfrm>
-          <a:prstGeom prst="rect">
-            <a:avLst/>
-          </a:prstGeom>
-          <a:noFill/>
-          <a:ln/>
-        </p:spPr>
-        <p:txBody>
-          <a:bodyPr wrap="square" lIns="0" tIns="0" rIns="0" bIns="0" rtlCol="0" anchor="t"/>
-          <a:lstStyle/>
-          <a:p>
-            <a:pPr rtl="1" algn="r" indent="0" marL="0">
-              <a:lnSpc>
-                <a:spcPct val="122000"/>
-              </a:lnSpc>
-              <a:buNone/>
-            </a:pPr>
-            <a:r>
-              <a:rPr lang="he-IL" altLang="en-US" sz="1200" dirty="0">
-                <a:solidFill>
-                  <a:srgbClr val="91A0B7"/>
-                </a:solidFill>
-                <a:latin typeface="Calibri" pitchFamily="34" charset="0"/>
-                <a:ea typeface="Calibri" pitchFamily="34" charset="-122"/>
-                <a:cs typeface="Calibri" pitchFamily="34" charset="-120"/>
-              </a:rPr>
-              <a:t>‫יציאת נתונים ‪$0.09‬ ל-‪GB (‬כ-‪$9K‬ להוצאת ‪100 TB‬ חזרה), דמי אחזור ‪$0.03‬ ל-‪GB‬ ב-‪Glacier IR‬, מינימום ‪90‬ יום אחסון, וחיוב מינימלי של ‪128 KB‬ לאובייקט — משמעותי בדימות עם ריבוי קבצים קטנים. מחירי אזור תל אביב גבוהים ב-‪10%–15%‬ ממחירון ‪us-east-1‬.‬</a:t>
-            </a:r>
-            <a:endParaRPr lang="he-IL" sz="1200" dirty="0"/>
-          </a:p>
-        </p:txBody>
-      </p:sp>
-      <p:sp>
-        <p:nvSpPr>
-          <p:cNvPr id="30" name="Shape 28"/>
-          <p:cNvSpPr/>
-          <p:nvPr/>
-        </p:nvSpPr>
-        <p:spPr>
-          <a:xfrm>
-            <a:off x="822960" y="5907024"/>
-            <a:ext cx="10545775" cy="10973"/>
-          </a:xfrm>
-          <a:prstGeom prst="rect">
-            <a:avLst/>
-          </a:prstGeom>
-          <a:solidFill>
-            <a:srgbClr val="23304A"/>
-          </a:solidFill>
-          <a:ln w="12700">
-            <a:solidFill>
-              <a:srgbClr val="23304A"/>
-            </a:solidFill>
-            <a:prstDash val="solid"/>
-          </a:ln>
-        </p:spPr>
-      </p:sp>
-      <p:sp>
-        <p:nvSpPr>
-          <p:cNvPr id="31" name="Shape 29"/>
           <p:cNvSpPr/>
           <p:nvPr/>
         </p:nvSpPr>
@@ -9108,7 +9357,7 @@
       </p:sp>
       <p:sp>
         <p:nvSpPr>
-          <p:cNvPr id="32" name="Text 30"/>
+          <p:cNvPr id="28" name="Text 26"/>
           <p:cNvSpPr/>
           <p:nvPr/>
         </p:nvSpPr>

--- a/presentations/ecs-to-s3/Harel_ECS_to_S3_CIO.pptx
+++ b/presentations/ecs-to-s3/Harel_ECS_to_S3_CIO.pptx
@@ -8385,7 +8385,7 @@
                 <a:ea typeface="Calibri" pitchFamily="34" charset="-122"/>
                 <a:cs typeface="Calibri" pitchFamily="34" charset="-120"/>
               </a:rPr>
-              <a:t>‫מקור ‪On-Prem‬: הצעת ‪Dell — $695,520‬ עבור ‪1,800 TB‬ נטו ‪(3,024 TB‬ ברוטו‪), $386‬ ל-‪TB‬ נטו, בהוספת דיסקים ל-‪21 nodes‬ קיימים ללא ‪nodes‬ חדשים. שני הצדדים מנורמלים ל-‪100 TB‬ לוגי.‬</a:t>
+              <a:t>‫מקור ‪On-Prem‬: הצעת ‪Dell — $695,520‬ עבור ‪1,800 TB‬ נטו — ‪3,024 TB‬ ברוטו — ‪$386‬ ל-‪TB‬ נטו, בהוספת דיסקים ל-‪21 nodes‬ קיימים ללא ‪nodes‬ חדשים. שני הצדדים מנורמלים ל-‪100 TB‬ לוגי.‬</a:t>
             </a:r>
             <a:endParaRPr lang="he-IL" sz="1150" dirty="0"/>
           </a:p>
@@ -9299,7 +9299,7 @@
                 <a:ea typeface="Calibri" pitchFamily="34" charset="-122"/>
                 <a:cs typeface="Calibri" pitchFamily="34" charset="-120"/>
               </a:rPr>
-              <a:t>‫יציאת נתונים ‪$0.09‬ ל-‪GB (‬כ-‪$9K‬ להוצאת ‪100 TB‬ חזרה), דמי אחזור ‪$0.03‬ ל-‪GB‬ ב-‪Glacier IR‬, מינימום ‪90‬ יום אחסון, וחיוב מינימלי של ‪128 KB‬ לאובייקט — משמעותי בדימות עם ריבוי קבצים קטנים. מחירי אזור תל אביב גבוהים ב-‪10%–15%‬ ממחירון ‪us-east-1‬.‬</a:t>
+              <a:t>‫יציאת נתונים ‪$0.09‬ ל-‪GB‬ — כ-‪$9K‬ להוצאת ‪100 TB‬ חזרה. דמי אחזור ‪$0.03‬ ל-‪GB‬ ב-‪Glacier IR‬, מינימום ‪90‬ יום אחסון, וחיוב מינימלי של ‪128 KB‬ לאובייקט — משמעותי בדימות עם ריבוי קבצים קטנים. מחירי אזור תל אביב גבוהים ב-‪10%–15%‬ ממחירון ‪us-east-1‬.‬</a:t>
             </a:r>
             <a:endParaRPr lang="he-IL" sz="1200" dirty="0"/>
           </a:p>
@@ -9546,12 +9546,12 @@
         </p:nvSpPr>
         <p:spPr>
           <a:xfrm>
-            <a:off x="8122615" y="2048256"/>
-            <a:ext cx="3246120" cy="1700784"/>
+            <a:off x="8122615" y="2011680"/>
+            <a:ext cx="3246120" cy="1773936"/>
           </a:xfrm>
           <a:prstGeom prst="roundRect">
             <a:avLst>
-              <a:gd name="adj" fmla="val 2688"/>
+              <a:gd name="adj" fmla="val 2577"/>
             </a:avLst>
           </a:prstGeom>
           <a:solidFill>
@@ -9573,7 +9573,7 @@
         </p:nvSpPr>
         <p:spPr>
           <a:xfrm>
-            <a:off x="10948111" y="2286000"/>
+            <a:off x="10948111" y="2231136"/>
             <a:ext cx="118872" cy="118872"/>
           </a:xfrm>
           <a:prstGeom prst="rect">
@@ -9598,7 +9598,7 @@
         </p:nvSpPr>
         <p:spPr>
           <a:xfrm>
-            <a:off x="8378647" y="2212848"/>
+            <a:off x="8378647" y="2157984"/>
             <a:ext cx="2478024" cy="256032"/>
           </a:xfrm>
           <a:prstGeom prst="rect">
@@ -9626,7 +9626,7 @@
                 <a:ea typeface="Calibri" pitchFamily="34" charset="-122"/>
                 <a:cs typeface="Calibri" pitchFamily="34" charset="-120"/>
               </a:rPr>
-              <a:t>‫משפטי · קבילות‬</a:t>
+              <a:t>‫משפטי · קבילות ואישור‬</a:t>
             </a:r>
             <a:endParaRPr lang="he-IL" sz="1250" dirty="0"/>
           </a:p>
@@ -9640,8 +9640,8 @@
         </p:nvSpPr>
         <p:spPr>
           <a:xfrm>
-            <a:off x="8378647" y="2505456"/>
-            <a:ext cx="2734056" cy="475488"/>
+            <a:off x="8378647" y="2450592"/>
+            <a:ext cx="2734056" cy="512064"/>
           </a:xfrm>
           <a:prstGeom prst="rect">
             <a:avLst/>
@@ -9668,7 +9668,7 @@
                 <a:ea typeface="Calibri" pitchFamily="34" charset="-122"/>
                 <a:cs typeface="Calibri" pitchFamily="34" charset="-120"/>
               </a:rPr>
-              <a:t>‫תאריך היצירה של המסמך משתנה בהעתקה; בית משפט עשוי לדרוש אסמכתא שהמסמך לא שונה.‬</a:t>
+              <a:t>‫שם הקובץ ותאריך היצירה משתנים בהעתקה. בית משפט עשוי לדרוש אסמכתא שהתוכן לא שונה.‬</a:t>
             </a:r>
             <a:endParaRPr lang="he-IL" sz="1100" dirty="0"/>
           </a:p>
@@ -9708,7 +9708,7 @@
         <p:spPr>
           <a:xfrm>
             <a:off x="8378647" y="3063240"/>
-            <a:ext cx="2734056" cy="603504"/>
+            <a:ext cx="2734056" cy="658368"/>
           </a:xfrm>
           <a:prstGeom prst="rect">
             <a:avLst/>
@@ -9735,7 +9735,7 @@
                 <a:ea typeface="Calibri" pitchFamily="34" charset="-122"/>
                 <a:cs typeface="Calibri" pitchFamily="34" charset="-120"/>
               </a:rPr>
-              <a:t>‫מיטיגציה: ‪S3 Object Lock‬ במצב ‪Compliance, manifest‬ חתום ‪SHA-256‬ לכל אובייקט, ושימור ה-‪metadata‬ המקורי כ-‪object metadata‬.‬</a:t>
+              <a:t>‫מיטיגציה: ‪manifest‬ חתום ‪SHA-256‬ לכל אובייקט — שם מקורי, שם יעד ותאריך מקור — יחד עם ‪S3 Object Lock‬. הפתרון מחייב אישור מפורש של הלשכה המשפטית לפני ההעתקה הראשונה.‬</a:t>
             </a:r>
             <a:endParaRPr lang="he-IL" sz="1050" dirty="0"/>
           </a:p>
@@ -9749,12 +9749,12 @@
         </p:nvSpPr>
         <p:spPr>
           <a:xfrm>
-            <a:off x="4474159" y="2048256"/>
-            <a:ext cx="3246120" cy="1700784"/>
+            <a:off x="4474159" y="2011680"/>
+            <a:ext cx="3246120" cy="1773936"/>
           </a:xfrm>
           <a:prstGeom prst="roundRect">
             <a:avLst>
-              <a:gd name="adj" fmla="val 2688"/>
+              <a:gd name="adj" fmla="val 2577"/>
             </a:avLst>
           </a:prstGeom>
           <a:solidFill>
@@ -9776,7 +9776,7 @@
         </p:nvSpPr>
         <p:spPr>
           <a:xfrm>
-            <a:off x="7299655" y="2286000"/>
+            <a:off x="7299655" y="2231136"/>
             <a:ext cx="118872" cy="118872"/>
           </a:xfrm>
           <a:prstGeom prst="rect">
@@ -9801,7 +9801,7 @@
         </p:nvSpPr>
         <p:spPr>
           <a:xfrm>
-            <a:off x="4730191" y="2212848"/>
+            <a:off x="4730191" y="2157984"/>
             <a:ext cx="2478024" cy="256032"/>
           </a:xfrm>
           <a:prstGeom prst="rect">
@@ -9843,8 +9843,8 @@
         </p:nvSpPr>
         <p:spPr>
           <a:xfrm>
-            <a:off x="4730191" y="2505456"/>
-            <a:ext cx="2734056" cy="475488"/>
+            <a:off x="4730191" y="2450592"/>
+            <a:ext cx="2734056" cy="512064"/>
           </a:xfrm>
           <a:prstGeom prst="rect">
             <a:avLst/>
@@ -9911,7 +9911,7 @@
         <p:spPr>
           <a:xfrm>
             <a:off x="4730191" y="3063240"/>
-            <a:ext cx="2734056" cy="603504"/>
+            <a:ext cx="2734056" cy="658368"/>
           </a:xfrm>
           <a:prstGeom prst="rect">
             <a:avLst/>
@@ -9938,7 +9938,7 @@
                 <a:ea typeface="Calibri" pitchFamily="34" charset="-122"/>
                 <a:cs typeface="Calibri" pitchFamily="34" charset="-120"/>
               </a:rPr>
-              <a:t>‫מיטיגציה: אזור ‪il-central-1 (‬תל אביב), הצפנה ב-‪KMS‬ עם מפתח בבעלותנו, ואישור ‪DPO‬ ורגולטור לפני ההעתקה הראשונה.‬</a:t>
+              <a:t>‫מיטיגציה: אזור ‪il-central-1‬ בתל אביב, הצפנה ב-‪KMS‬ עם מפתח בבעלותנו, ואישור ‪DPO‬ ורגולטור לפני ההעתקה.‬</a:t>
             </a:r>
             <a:endParaRPr lang="he-IL" sz="1050" dirty="0"/>
           </a:p>
@@ -9952,12 +9952,12 @@
         </p:nvSpPr>
         <p:spPr>
           <a:xfrm>
-            <a:off x="825703" y="2048256"/>
-            <a:ext cx="3246120" cy="1700784"/>
+            <a:off x="825703" y="2011680"/>
+            <a:ext cx="3246120" cy="1773936"/>
           </a:xfrm>
           <a:prstGeom prst="roundRect">
             <a:avLst>
-              <a:gd name="adj" fmla="val 2688"/>
+              <a:gd name="adj" fmla="val 2577"/>
             </a:avLst>
           </a:prstGeom>
           <a:solidFill>
@@ -9979,7 +9979,7 @@
         </p:nvSpPr>
         <p:spPr>
           <a:xfrm>
-            <a:off x="3651199" y="2286000"/>
+            <a:off x="3651199" y="2231136"/>
             <a:ext cx="118872" cy="118872"/>
           </a:xfrm>
           <a:prstGeom prst="rect">
@@ -10004,7 +10004,7 @@
         </p:nvSpPr>
         <p:spPr>
           <a:xfrm>
-            <a:off x="1081735" y="2212848"/>
+            <a:off x="1081735" y="2157984"/>
             <a:ext cx="2478024" cy="256032"/>
           </a:xfrm>
           <a:prstGeom prst="rect">
@@ -10032,7 +10032,7 @@
                 <a:ea typeface="Calibri" pitchFamily="34" charset="-122"/>
                 <a:cs typeface="Calibri" pitchFamily="34" charset="-120"/>
               </a:rPr>
-              <a:t>‫טכני · שלמות‬</a:t>
+              <a:t>‫אפליקציה · שינוי מצביעים‬</a:t>
             </a:r>
             <a:endParaRPr lang="he-IL" sz="1250" dirty="0"/>
           </a:p>
@@ -10046,8 +10046,8 @@
         </p:nvSpPr>
         <p:spPr>
           <a:xfrm>
-            <a:off x="1081735" y="2505456"/>
-            <a:ext cx="2734056" cy="475488"/>
+            <a:off x="1081735" y="2450592"/>
+            <a:ext cx="2734056" cy="512064"/>
           </a:xfrm>
           <a:prstGeom prst="rect">
             <a:avLst/>
@@ -10074,7 +10074,7 @@
                 <a:ea typeface="Calibri" pitchFamily="34" charset="-122"/>
                 <a:cs typeface="Calibri" pitchFamily="34" charset="-120"/>
               </a:rPr>
-              <a:t>‫אין כלי העתקה ייעודי; חלק מהקבצים עלולים להיכשל בהעברה.‬</a:t>
+              <a:t>‫האפליקציות מצביעות היום לנתיב ב-‪ECS‬. מעבר ל-‪S3‬ מחייב פיתוח בצד היישום, לא רק העברת דאטה.‬</a:t>
             </a:r>
             <a:endParaRPr lang="he-IL" sz="1100" dirty="0"/>
           </a:p>
@@ -10114,7 +10114,7 @@
         <p:spPr>
           <a:xfrm>
             <a:off x="1081735" y="3063240"/>
-            <a:ext cx="2734056" cy="603504"/>
+            <a:ext cx="2734056" cy="658368"/>
           </a:xfrm>
           <a:prstGeom prst="rect">
             <a:avLst/>
@@ -10141,7 +10141,7 @@
                 <a:ea typeface="Calibri" pitchFamily="34" charset="-122"/>
                 <a:cs typeface="Calibri" pitchFamily="34" charset="-120"/>
               </a:rPr>
-              <a:t>‫מיטיגציה: ‪AWS DataSync‬ עם ולידציה מובנית, דוח חריגים לכל ריצה, ומחיקה מ-‪ECS‬ רק לאחר ולידציה מלאה.‬</a:t>
+              <a:t>‫מיטיגציה: אפיון מול צוותי הדימות ו-‪Verint‬, הערכת מאמץ פיתוח, ותקופת ביניים שבה שתי הכתובות פעילות במקביל.‬</a:t>
             </a:r>
             <a:endParaRPr lang="he-IL" sz="1050" dirty="0"/>
           </a:p>
@@ -10155,12 +10155,12 @@
         </p:nvSpPr>
         <p:spPr>
           <a:xfrm>
-            <a:off x="8122615" y="4041648"/>
-            <a:ext cx="3246120" cy="1700784"/>
+            <a:off x="8122615" y="4023360"/>
+            <a:ext cx="3246120" cy="1773936"/>
           </a:xfrm>
           <a:prstGeom prst="roundRect">
             <a:avLst>
-              <a:gd name="adj" fmla="val 2688"/>
+              <a:gd name="adj" fmla="val 2577"/>
             </a:avLst>
           </a:prstGeom>
           <a:solidFill>
@@ -10182,7 +10182,7 @@
         </p:nvSpPr>
         <p:spPr>
           <a:xfrm>
-            <a:off x="10948111" y="4279392"/>
+            <a:off x="10948111" y="4242816"/>
             <a:ext cx="118872" cy="118872"/>
           </a:xfrm>
           <a:prstGeom prst="rect">
@@ -10207,7 +10207,7 @@
         </p:nvSpPr>
         <p:spPr>
           <a:xfrm>
-            <a:off x="8378647" y="4206240"/>
+            <a:off x="8378647" y="4169664"/>
             <a:ext cx="2478024" cy="256032"/>
           </a:xfrm>
           <a:prstGeom prst="rect">
@@ -10235,7 +10235,7 @@
                 <a:ea typeface="Calibri" pitchFamily="34" charset="-122"/>
                 <a:cs typeface="Calibri" pitchFamily="34" charset="-120"/>
               </a:rPr>
-              <a:t>‫ביצועים‬</a:t>
+              <a:t>‫מיליוני קבצים קטנים‬</a:t>
             </a:r>
             <a:endParaRPr lang="he-IL" sz="1250" dirty="0"/>
           </a:p>
@@ -10249,8 +10249,8 @@
         </p:nvSpPr>
         <p:spPr>
           <a:xfrm>
-            <a:off x="8378647" y="4498848"/>
-            <a:ext cx="2734056" cy="475488"/>
+            <a:off x="8378647" y="4462272"/>
+            <a:ext cx="2734056" cy="512064"/>
           </a:xfrm>
           <a:prstGeom prst="rect">
             <a:avLst/>
@@ -10277,7 +10277,7 @@
                 <a:ea typeface="Calibri" pitchFamily="34" charset="-122"/>
                 <a:cs typeface="Calibri" pitchFamily="34" charset="-120"/>
               </a:rPr>
-              <a:t>‫זמני אחזור בענן נמוכים יותר; למערכת הדימות אין ניסיון מול ענן.‬</a:t>
+              <a:t>‫הקורפוס הוא מיליוני קבצים קטנים; שמות ומבנה התיקיות ב-‪S3‬ שונים, ואין מיפוי אחד-לאחד.‬</a:t>
             </a:r>
             <a:endParaRPr lang="he-IL" sz="1100" dirty="0"/>
           </a:p>
@@ -10291,7 +10291,7 @@
         </p:nvSpPr>
         <p:spPr>
           <a:xfrm>
-            <a:off x="8378647" y="4992624"/>
+            <a:off x="8378647" y="5010912"/>
             <a:ext cx="2734056" cy="9144"/>
           </a:xfrm>
           <a:prstGeom prst="rect">
@@ -10316,8 +10316,8 @@
         </p:nvSpPr>
         <p:spPr>
           <a:xfrm>
-            <a:off x="8378647" y="5056632"/>
-            <a:ext cx="2734056" cy="603504"/>
+            <a:off x="8378647" y="5074920"/>
+            <a:ext cx="2734056" cy="658368"/>
           </a:xfrm>
           <a:prstGeom prst="rect">
             <a:avLst/>
@@ -10344,7 +10344,7 @@
                 <a:ea typeface="Calibri" pitchFamily="34" charset="-122"/>
                 <a:cs typeface="Calibri" pitchFamily="34" charset="-120"/>
               </a:rPr>
-              <a:t>‫מיטיגציה: ‪POC‬ על ‪1–2 TB‬ לפני התחייבות, חיבור ‪Direct Connect‬ ולא אינטרנט, ומדידת זמני אחזור מול ה-‪SLA‬ הקיים.‬</a:t>
+              <a:t>‫מיטיגציה: מיפוי שמות ומבנה מוסכם מראש, ואימות של צוותי האפליקציה שכל מסמך נגיש בשמו החדש. נדרש זמן צוות ייעודי.‬</a:t>
             </a:r>
             <a:endParaRPr lang="he-IL" sz="1050" dirty="0"/>
           </a:p>
@@ -10358,12 +10358,12 @@
         </p:nvSpPr>
         <p:spPr>
           <a:xfrm>
-            <a:off x="4474159" y="4041648"/>
-            <a:ext cx="3246120" cy="1700784"/>
+            <a:off x="4474159" y="4023360"/>
+            <a:ext cx="3246120" cy="1773936"/>
           </a:xfrm>
           <a:prstGeom prst="roundRect">
             <a:avLst>
-              <a:gd name="adj" fmla="val 2688"/>
+              <a:gd name="adj" fmla="val 2577"/>
             </a:avLst>
           </a:prstGeom>
           <a:solidFill>
@@ -10371,7 +10371,7 @@
           </a:solidFill>
           <a:ln w="12700">
             <a:solidFill>
-              <a:srgbClr val="5A2A38"/>
+              <a:srgbClr val="23304A"/>
             </a:solidFill>
             <a:prstDash val="solid"/>
           </a:ln>
@@ -10385,7 +10385,411 @@
         </p:nvSpPr>
         <p:spPr>
           <a:xfrm>
-            <a:off x="7299655" y="4279392"/>
+            <a:off x="7299655" y="4242816"/>
+            <a:ext cx="118872" cy="118872"/>
+          </a:xfrm>
+          <a:prstGeom prst="rect">
+            <a:avLst/>
+          </a:prstGeom>
+          <a:solidFill>
+            <a:srgbClr val="FF9F43"/>
+          </a:solidFill>
+          <a:ln w="12700">
+            <a:solidFill>
+              <a:srgbClr val="FF9F43"/>
+            </a:solidFill>
+            <a:prstDash val="solid"/>
+          </a:ln>
+        </p:spPr>
+      </p:sp>
+      <p:sp>
+        <p:nvSpPr>
+          <p:cNvPr id="31" name="Text 29"/>
+          <p:cNvSpPr/>
+          <p:nvPr/>
+        </p:nvSpPr>
+        <p:spPr>
+          <a:xfrm>
+            <a:off x="4730191" y="4169664"/>
+            <a:ext cx="2478024" cy="256032"/>
+          </a:xfrm>
+          <a:prstGeom prst="rect">
+            <a:avLst/>
+          </a:prstGeom>
+          <a:noFill/>
+          <a:ln/>
+        </p:spPr>
+        <p:txBody>
+          <a:bodyPr wrap="square" lIns="0" tIns="0" rIns="0" bIns="0" rtlCol="0" anchor="ctr"/>
+          <a:lstStyle/>
+          <a:p>
+            <a:pPr rtl="1" algn="r" indent="0" marL="0">
+              <a:lnSpc>
+                <a:spcPct val="100000"/>
+              </a:lnSpc>
+              <a:buNone/>
+            </a:pPr>
+            <a:r>
+              <a:rPr lang="he-IL" altLang="en-US" sz="1250" b="1" dirty="0">
+                <a:solidFill>
+                  <a:srgbClr val="FF9F43"/>
+                </a:solidFill>
+                <a:latin typeface="Calibri" pitchFamily="34" charset="0"/>
+                <a:ea typeface="Calibri" pitchFamily="34" charset="-122"/>
+                <a:cs typeface="Calibri" pitchFamily="34" charset="-120"/>
+              </a:rPr>
+              <a:t>‫ביצועים · זמני אחזור‬</a:t>
+            </a:r>
+            <a:endParaRPr lang="he-IL" sz="1250" dirty="0"/>
+          </a:p>
+        </p:txBody>
+      </p:sp>
+      <p:sp>
+        <p:nvSpPr>
+          <p:cNvPr id="32" name="Text 30"/>
+          <p:cNvSpPr/>
+          <p:nvPr/>
+        </p:nvSpPr>
+        <p:spPr>
+          <a:xfrm>
+            <a:off x="4730191" y="4462272"/>
+            <a:ext cx="2734056" cy="512064"/>
+          </a:xfrm>
+          <a:prstGeom prst="rect">
+            <a:avLst/>
+          </a:prstGeom>
+          <a:noFill/>
+          <a:ln/>
+        </p:spPr>
+        <p:txBody>
+          <a:bodyPr wrap="square" lIns="0" tIns="0" rIns="0" bIns="0" rtlCol="0" anchor="t"/>
+          <a:lstStyle/>
+          <a:p>
+            <a:pPr rtl="1" algn="r" indent="0" marL="0">
+              <a:lnSpc>
+                <a:spcPct val="116000"/>
+              </a:lnSpc>
+              <a:buNone/>
+            </a:pPr>
+            <a:r>
+              <a:rPr lang="he-IL" altLang="en-US" sz="1100" dirty="0">
+                <a:solidFill>
+                  <a:srgbClr val="F4F7FB"/>
+                </a:solidFill>
+                <a:latin typeface="Calibri" pitchFamily="34" charset="0"/>
+                <a:ea typeface="Calibri" pitchFamily="34" charset="-122"/>
+                <a:cs typeface="Calibri" pitchFamily="34" charset="-120"/>
+              </a:rPr>
+              <a:t>‫אחזור מהענן איטי מאחזור מ-‪ECS‬ מקומי. לטנציה בשליפה עלולה לפגוע בשירות למשתמש הקצה.‬</a:t>
+            </a:r>
+            <a:endParaRPr lang="he-IL" sz="1100" dirty="0"/>
+          </a:p>
+        </p:txBody>
+      </p:sp>
+      <p:sp>
+        <p:nvSpPr>
+          <p:cNvPr id="33" name="Shape 31"/>
+          <p:cNvSpPr/>
+          <p:nvPr/>
+        </p:nvSpPr>
+        <p:spPr>
+          <a:xfrm>
+            <a:off x="4730191" y="5010912"/>
+            <a:ext cx="2734056" cy="9144"/>
+          </a:xfrm>
+          <a:prstGeom prst="rect">
+            <a:avLst/>
+          </a:prstGeom>
+          <a:solidFill>
+            <a:srgbClr val="2C3A54"/>
+          </a:solidFill>
+          <a:ln w="12700">
+            <a:solidFill>
+              <a:srgbClr val="2C3A54"/>
+            </a:solidFill>
+            <a:prstDash val="solid"/>
+          </a:ln>
+        </p:spPr>
+      </p:sp>
+      <p:sp>
+        <p:nvSpPr>
+          <p:cNvPr id="34" name="Text 32"/>
+          <p:cNvSpPr/>
+          <p:nvPr/>
+        </p:nvSpPr>
+        <p:spPr>
+          <a:xfrm>
+            <a:off x="4730191" y="5074920"/>
+            <a:ext cx="2734056" cy="658368"/>
+          </a:xfrm>
+          <a:prstGeom prst="rect">
+            <a:avLst/>
+          </a:prstGeom>
+          <a:noFill/>
+          <a:ln/>
+        </p:spPr>
+        <p:txBody>
+          <a:bodyPr wrap="square" lIns="0" tIns="0" rIns="0" bIns="0" rtlCol="0" anchor="t"/>
+          <a:lstStyle/>
+          <a:p>
+            <a:pPr rtl="1" algn="r" indent="0" marL="0">
+              <a:lnSpc>
+                <a:spcPct val="116000"/>
+              </a:lnSpc>
+              <a:buNone/>
+            </a:pPr>
+            <a:r>
+              <a:rPr lang="he-IL" altLang="en-US" sz="1050" dirty="0">
+                <a:solidFill>
+                  <a:srgbClr val="91A0B7"/>
+                </a:solidFill>
+                <a:latin typeface="Calibri" pitchFamily="34" charset="0"/>
+                <a:ea typeface="Calibri" pitchFamily="34" charset="-122"/>
+                <a:cs typeface="Calibri" pitchFamily="34" charset="-120"/>
+              </a:rPr>
+              <a:t>‫מיטיגציה: מדידת זמני אחזור מול ה-‪SLA‬ הקיים לפני התחייבות, חיבור ‪Direct Connect‬ ולא אינטרנט, וקאשינג מקומי לפריטים חמים.‬</a:t>
+            </a:r>
+            <a:endParaRPr lang="he-IL" sz="1050" dirty="0"/>
+          </a:p>
+        </p:txBody>
+      </p:sp>
+      <p:sp>
+        <p:nvSpPr>
+          <p:cNvPr id="35" name="Shape 33"/>
+          <p:cNvSpPr/>
+          <p:nvPr/>
+        </p:nvSpPr>
+        <p:spPr>
+          <a:xfrm>
+            <a:off x="825703" y="4023360"/>
+            <a:ext cx="3246120" cy="1773936"/>
+          </a:xfrm>
+          <a:prstGeom prst="roundRect">
+            <a:avLst>
+              <a:gd name="adj" fmla="val 2577"/>
+            </a:avLst>
+          </a:prstGeom>
+          <a:solidFill>
+            <a:srgbClr val="182133"/>
+          </a:solidFill>
+          <a:ln w="12700">
+            <a:solidFill>
+              <a:srgbClr val="23304A"/>
+            </a:solidFill>
+            <a:prstDash val="solid"/>
+          </a:ln>
+        </p:spPr>
+      </p:sp>
+      <p:sp>
+        <p:nvSpPr>
+          <p:cNvPr id="36" name="Shape 34"/>
+          <p:cNvSpPr/>
+          <p:nvPr/>
+        </p:nvSpPr>
+        <p:spPr>
+          <a:xfrm>
+            <a:off x="3651199" y="4242816"/>
+            <a:ext cx="118872" cy="118872"/>
+          </a:xfrm>
+          <a:prstGeom prst="rect">
+            <a:avLst/>
+          </a:prstGeom>
+          <a:solidFill>
+            <a:srgbClr val="FF9F43"/>
+          </a:solidFill>
+          <a:ln w="12700">
+            <a:solidFill>
+              <a:srgbClr val="FF9F43"/>
+            </a:solidFill>
+            <a:prstDash val="solid"/>
+          </a:ln>
+        </p:spPr>
+      </p:sp>
+      <p:sp>
+        <p:nvSpPr>
+          <p:cNvPr id="37" name="Text 35"/>
+          <p:cNvSpPr/>
+          <p:nvPr/>
+        </p:nvSpPr>
+        <p:spPr>
+          <a:xfrm>
+            <a:off x="1081735" y="4169664"/>
+            <a:ext cx="2478024" cy="256032"/>
+          </a:xfrm>
+          <a:prstGeom prst="rect">
+            <a:avLst/>
+          </a:prstGeom>
+          <a:noFill/>
+          <a:ln/>
+        </p:spPr>
+        <p:txBody>
+          <a:bodyPr wrap="square" lIns="0" tIns="0" rIns="0" bIns="0" rtlCol="0" anchor="ctr"/>
+          <a:lstStyle/>
+          <a:p>
+            <a:pPr rtl="1" algn="r" indent="0" marL="0">
+              <a:lnSpc>
+                <a:spcPct val="100000"/>
+              </a:lnSpc>
+              <a:buNone/>
+            </a:pPr>
+            <a:r>
+              <a:rPr lang="he-IL" altLang="en-US" sz="1250" b="1" dirty="0">
+                <a:solidFill>
+                  <a:srgbClr val="FF9F43"/>
+                </a:solidFill>
+                <a:latin typeface="Calibri" pitchFamily="34" charset="0"/>
+                <a:ea typeface="Calibri" pitchFamily="34" charset="-122"/>
+                <a:cs typeface="Calibri" pitchFamily="34" charset="-120"/>
+              </a:rPr>
+              <a:t>‫כלי ההעברה · ‪POC‬‬</a:t>
+            </a:r>
+            <a:endParaRPr lang="he-IL" sz="1250" dirty="0"/>
+          </a:p>
+        </p:txBody>
+      </p:sp>
+      <p:sp>
+        <p:nvSpPr>
+          <p:cNvPr id="38" name="Text 36"/>
+          <p:cNvSpPr/>
+          <p:nvPr/>
+        </p:nvSpPr>
+        <p:spPr>
+          <a:xfrm>
+            <a:off x="1081735" y="4462272"/>
+            <a:ext cx="2734056" cy="512064"/>
+          </a:xfrm>
+          <a:prstGeom prst="rect">
+            <a:avLst/>
+          </a:prstGeom>
+          <a:noFill/>
+          <a:ln/>
+        </p:spPr>
+        <p:txBody>
+          <a:bodyPr wrap="square" lIns="0" tIns="0" rIns="0" bIns="0" rtlCol="0" anchor="t"/>
+          <a:lstStyle/>
+          <a:p>
+            <a:pPr rtl="1" algn="r" indent="0" marL="0">
+              <a:lnSpc>
+                <a:spcPct val="116000"/>
+              </a:lnSpc>
+              <a:buNone/>
+            </a:pPr>
+            <a:r>
+              <a:rPr lang="he-IL" altLang="en-US" sz="1100" dirty="0">
+                <a:solidFill>
+                  <a:srgbClr val="F4F7FB"/>
+                </a:solidFill>
+                <a:latin typeface="Calibri" pitchFamily="34" charset="0"/>
+                <a:ea typeface="Calibri" pitchFamily="34" charset="-122"/>
+                <a:cs typeface="Calibri" pitchFamily="34" charset="-120"/>
+              </a:rPr>
+              <a:t>‫אין כלי העתקה מוכח בסדר גודל כזה; קבצים עלולים להיכשל בהעברה בלי שהדבר יתגלה.‬</a:t>
+            </a:r>
+            <a:endParaRPr lang="he-IL" sz="1100" dirty="0"/>
+          </a:p>
+        </p:txBody>
+      </p:sp>
+      <p:sp>
+        <p:nvSpPr>
+          <p:cNvPr id="39" name="Shape 37"/>
+          <p:cNvSpPr/>
+          <p:nvPr/>
+        </p:nvSpPr>
+        <p:spPr>
+          <a:xfrm>
+            <a:off x="1081735" y="5010912"/>
+            <a:ext cx="2734056" cy="9144"/>
+          </a:xfrm>
+          <a:prstGeom prst="rect">
+            <a:avLst/>
+          </a:prstGeom>
+          <a:solidFill>
+            <a:srgbClr val="2C3A54"/>
+          </a:solidFill>
+          <a:ln w="12700">
+            <a:solidFill>
+              <a:srgbClr val="2C3A54"/>
+            </a:solidFill>
+            <a:prstDash val="solid"/>
+          </a:ln>
+        </p:spPr>
+      </p:sp>
+      <p:sp>
+        <p:nvSpPr>
+          <p:cNvPr id="40" name="Text 38"/>
+          <p:cNvSpPr/>
+          <p:nvPr/>
+        </p:nvSpPr>
+        <p:spPr>
+          <a:xfrm>
+            <a:off x="1081735" y="5074920"/>
+            <a:ext cx="2734056" cy="658368"/>
+          </a:xfrm>
+          <a:prstGeom prst="rect">
+            <a:avLst/>
+          </a:prstGeom>
+          <a:noFill/>
+          <a:ln/>
+        </p:spPr>
+        <p:txBody>
+          <a:bodyPr wrap="square" lIns="0" tIns="0" rIns="0" bIns="0" rtlCol="0" anchor="t"/>
+          <a:lstStyle/>
+          <a:p>
+            <a:pPr rtl="1" algn="r" indent="0" marL="0">
+              <a:lnSpc>
+                <a:spcPct val="116000"/>
+              </a:lnSpc>
+              <a:buNone/>
+            </a:pPr>
+            <a:r>
+              <a:rPr lang="he-IL" altLang="en-US" sz="1050" dirty="0">
+                <a:solidFill>
+                  <a:srgbClr val="91A0B7"/>
+                </a:solidFill>
+                <a:latin typeface="Calibri" pitchFamily="34" charset="0"/>
+                <a:ea typeface="Calibri" pitchFamily="34" charset="-122"/>
+                <a:cs typeface="Calibri" pitchFamily="34" charset="-120"/>
+              </a:rPr>
+              <a:t>‫מיטיגציה: ‪POC‬ קצר על ‪1–2 TB‬ עם ‪AWS DataSync‬: ולידציה מובנית, דוח חריגים לכל ריצה, ומחיקה מ-‪ECS‬ רק לאחר אימות מלא.‬</a:t>
+            </a:r>
+            <a:endParaRPr lang="he-IL" sz="1050" dirty="0"/>
+          </a:p>
+        </p:txBody>
+      </p:sp>
+      <p:sp>
+        <p:nvSpPr>
+          <p:cNvPr id="41" name="Shape 39"/>
+          <p:cNvSpPr/>
+          <p:nvPr/>
+        </p:nvSpPr>
+        <p:spPr>
+          <a:xfrm>
+            <a:off x="822960" y="5907024"/>
+            <a:ext cx="10545775" cy="10973"/>
+          </a:xfrm>
+          <a:prstGeom prst="rect">
+            <a:avLst/>
+          </a:prstGeom>
+          <a:solidFill>
+            <a:srgbClr val="23304A"/>
+          </a:solidFill>
+          <a:ln w="12700">
+            <a:solidFill>
+              <a:srgbClr val="23304A"/>
+            </a:solidFill>
+            <a:prstDash val="solid"/>
+          </a:ln>
+        </p:spPr>
+      </p:sp>
+      <p:sp>
+        <p:nvSpPr>
+          <p:cNvPr id="42" name="Shape 40"/>
+          <p:cNvSpPr/>
+          <p:nvPr/>
+        </p:nvSpPr>
+        <p:spPr>
+          <a:xfrm>
+            <a:off x="11249863" y="6172200"/>
             <a:ext cx="118872" cy="118872"/>
           </a:xfrm>
           <a:prstGeom prst="rect">
@@ -10404,410 +10808,6 @@
       </p:sp>
       <p:sp>
         <p:nvSpPr>
-          <p:cNvPr id="31" name="Text 29"/>
-          <p:cNvSpPr/>
-          <p:nvPr/>
-        </p:nvSpPr>
-        <p:spPr>
-          <a:xfrm>
-            <a:off x="4730191" y="4206240"/>
-            <a:ext cx="2478024" cy="256032"/>
-          </a:xfrm>
-          <a:prstGeom prst="rect">
-            <a:avLst/>
-          </a:prstGeom>
-          <a:noFill/>
-          <a:ln/>
-        </p:spPr>
-        <p:txBody>
-          <a:bodyPr wrap="square" lIns="0" tIns="0" rIns="0" bIns="0" rtlCol="0" anchor="ctr"/>
-          <a:lstStyle/>
-          <a:p>
-            <a:pPr rtl="1" algn="r" indent="0" marL="0">
-              <a:lnSpc>
-                <a:spcPct val="100000"/>
-              </a:lnSpc>
-              <a:buNone/>
-            </a:pPr>
-            <a:r>
-              <a:rPr lang="he-IL" altLang="en-US" sz="1250" b="1" dirty="0">
-                <a:solidFill>
-                  <a:srgbClr val="FF6B7A"/>
-                </a:solidFill>
-                <a:latin typeface="Calibri" pitchFamily="34" charset="0"/>
-                <a:ea typeface="Calibri" pitchFamily="34" charset="-122"/>
-                <a:cs typeface="Calibri" pitchFamily="34" charset="-120"/>
-              </a:rPr>
-              <a:t>‫לוחות זמנים‬</a:t>
-            </a:r>
-            <a:endParaRPr lang="he-IL" sz="1250" dirty="0"/>
-          </a:p>
-        </p:txBody>
-      </p:sp>
-      <p:sp>
-        <p:nvSpPr>
-          <p:cNvPr id="32" name="Text 30"/>
-          <p:cNvSpPr/>
-          <p:nvPr/>
-        </p:nvSpPr>
-        <p:spPr>
-          <a:xfrm>
-            <a:off x="4730191" y="4498848"/>
-            <a:ext cx="2734056" cy="475488"/>
-          </a:xfrm>
-          <a:prstGeom prst="rect">
-            <a:avLst/>
-          </a:prstGeom>
-          <a:noFill/>
-          <a:ln/>
-        </p:spPr>
-        <p:txBody>
-          <a:bodyPr wrap="square" lIns="0" tIns="0" rIns="0" bIns="0" rtlCol="0" anchor="t"/>
-          <a:lstStyle/>
-          <a:p>
-            <a:pPr rtl="1" algn="r" indent="0" marL="0">
-              <a:lnSpc>
-                <a:spcPct val="116000"/>
-              </a:lnSpc>
-              <a:buNone/>
-            </a:pPr>
-            <a:r>
-              <a:rPr lang="he-IL" altLang="en-US" sz="1100" dirty="0">
-                <a:solidFill>
-                  <a:srgbClr val="F4F7FB"/>
-                </a:solidFill>
-                <a:latin typeface="Calibri" pitchFamily="34" charset="0"/>
-                <a:ea typeface="Calibri" pitchFamily="34" charset="-122"/>
-                <a:cs typeface="Calibri" pitchFamily="34" charset="-120"/>
-              </a:rPr>
-              <a:t>‫זמן אספקה של חודשיים מ-‪Dell; PO‬ שיוצא אחרי אוקטובר מגיע אחרי חציית ‪80%‬.‬</a:t>
-            </a:r>
-            <a:endParaRPr lang="he-IL" sz="1100" dirty="0"/>
-          </a:p>
-        </p:txBody>
-      </p:sp>
-      <p:sp>
-        <p:nvSpPr>
-          <p:cNvPr id="33" name="Shape 31"/>
-          <p:cNvSpPr/>
-          <p:nvPr/>
-        </p:nvSpPr>
-        <p:spPr>
-          <a:xfrm>
-            <a:off x="4730191" y="4992624"/>
-            <a:ext cx="2734056" cy="9144"/>
-          </a:xfrm>
-          <a:prstGeom prst="rect">
-            <a:avLst/>
-          </a:prstGeom>
-          <a:solidFill>
-            <a:srgbClr val="2C3A54"/>
-          </a:solidFill>
-          <a:ln w="12700">
-            <a:solidFill>
-              <a:srgbClr val="2C3A54"/>
-            </a:solidFill>
-            <a:prstDash val="solid"/>
-          </a:ln>
-        </p:spPr>
-      </p:sp>
-      <p:sp>
-        <p:nvSpPr>
-          <p:cNvPr id="34" name="Text 32"/>
-          <p:cNvSpPr/>
-          <p:nvPr/>
-        </p:nvSpPr>
-        <p:spPr>
-          <a:xfrm>
-            <a:off x="4730191" y="5056632"/>
-            <a:ext cx="2734056" cy="603504"/>
-          </a:xfrm>
-          <a:prstGeom prst="rect">
-            <a:avLst/>
-          </a:prstGeom>
-          <a:noFill/>
-          <a:ln/>
-        </p:spPr>
-        <p:txBody>
-          <a:bodyPr wrap="square" lIns="0" tIns="0" rIns="0" bIns="0" rtlCol="0" anchor="t"/>
-          <a:lstStyle/>
-          <a:p>
-            <a:pPr rtl="1" algn="r" indent="0" marL="0">
-              <a:lnSpc>
-                <a:spcPct val="116000"/>
-              </a:lnSpc>
-              <a:buNone/>
-            </a:pPr>
-            <a:r>
-              <a:rPr lang="he-IL" altLang="en-US" sz="1050" dirty="0">
-                <a:solidFill>
-                  <a:srgbClr val="91A0B7"/>
-                </a:solidFill>
-                <a:latin typeface="Calibri" pitchFamily="34" charset="0"/>
-                <a:ea typeface="Calibri" pitchFamily="34" charset="-122"/>
-                <a:cs typeface="Calibri" pitchFamily="34" charset="-120"/>
-              </a:rPr>
-              <a:t>‫מיטיגציה: אישור תקציב בספטמבר, ‪PO‬ באוקטובר. ההעתקה לענן רצה במקביל ומקטינה את הלחץ אם האספקה תתעכב.‬</a:t>
-            </a:r>
-            <a:endParaRPr lang="he-IL" sz="1050" dirty="0"/>
-          </a:p>
-        </p:txBody>
-      </p:sp>
-      <p:sp>
-        <p:nvSpPr>
-          <p:cNvPr id="35" name="Shape 33"/>
-          <p:cNvSpPr/>
-          <p:nvPr/>
-        </p:nvSpPr>
-        <p:spPr>
-          <a:xfrm>
-            <a:off x="825703" y="4041648"/>
-            <a:ext cx="3246120" cy="1700784"/>
-          </a:xfrm>
-          <a:prstGeom prst="roundRect">
-            <a:avLst>
-              <a:gd name="adj" fmla="val 2688"/>
-            </a:avLst>
-          </a:prstGeom>
-          <a:solidFill>
-            <a:srgbClr val="182133"/>
-          </a:solidFill>
-          <a:ln w="12700">
-            <a:solidFill>
-              <a:srgbClr val="23304A"/>
-            </a:solidFill>
-            <a:prstDash val="solid"/>
-          </a:ln>
-        </p:spPr>
-      </p:sp>
-      <p:sp>
-        <p:nvSpPr>
-          <p:cNvPr id="36" name="Shape 34"/>
-          <p:cNvSpPr/>
-          <p:nvPr/>
-        </p:nvSpPr>
-        <p:spPr>
-          <a:xfrm>
-            <a:off x="3651199" y="4279392"/>
-            <a:ext cx="118872" cy="118872"/>
-          </a:xfrm>
-          <a:prstGeom prst="rect">
-            <a:avLst/>
-          </a:prstGeom>
-          <a:solidFill>
-            <a:srgbClr val="3DD9EB"/>
-          </a:solidFill>
-          <a:ln w="12700">
-            <a:solidFill>
-              <a:srgbClr val="3DD9EB"/>
-            </a:solidFill>
-            <a:prstDash val="solid"/>
-          </a:ln>
-        </p:spPr>
-      </p:sp>
-      <p:sp>
-        <p:nvSpPr>
-          <p:cNvPr id="37" name="Text 35"/>
-          <p:cNvSpPr/>
-          <p:nvPr/>
-        </p:nvSpPr>
-        <p:spPr>
-          <a:xfrm>
-            <a:off x="1081735" y="4206240"/>
-            <a:ext cx="2478024" cy="256032"/>
-          </a:xfrm>
-          <a:prstGeom prst="rect">
-            <a:avLst/>
-          </a:prstGeom>
-          <a:noFill/>
-          <a:ln/>
-        </p:spPr>
-        <p:txBody>
-          <a:bodyPr wrap="square" lIns="0" tIns="0" rIns="0" bIns="0" rtlCol="0" anchor="ctr"/>
-          <a:lstStyle/>
-          <a:p>
-            <a:pPr rtl="1" algn="r" indent="0" marL="0">
-              <a:lnSpc>
-                <a:spcPct val="100000"/>
-              </a:lnSpc>
-              <a:buNone/>
-            </a:pPr>
-            <a:r>
-              <a:rPr lang="he-IL" altLang="en-US" sz="1250" b="1" dirty="0">
-                <a:solidFill>
-                  <a:srgbClr val="3DD9EB"/>
-                </a:solidFill>
-                <a:latin typeface="Calibri" pitchFamily="34" charset="0"/>
-                <a:ea typeface="Calibri" pitchFamily="34" charset="-122"/>
-                <a:cs typeface="Calibri" pitchFamily="34" charset="-120"/>
-              </a:rPr>
-              <a:t>‫כלכלי · ‪Lock-in‬‬</a:t>
-            </a:r>
-            <a:endParaRPr lang="he-IL" sz="1250" dirty="0"/>
-          </a:p>
-        </p:txBody>
-      </p:sp>
-      <p:sp>
-        <p:nvSpPr>
-          <p:cNvPr id="38" name="Text 36"/>
-          <p:cNvSpPr/>
-          <p:nvPr/>
-        </p:nvSpPr>
-        <p:spPr>
-          <a:xfrm>
-            <a:off x="1081735" y="4498848"/>
-            <a:ext cx="2734056" cy="475488"/>
-          </a:xfrm>
-          <a:prstGeom prst="rect">
-            <a:avLst/>
-          </a:prstGeom>
-          <a:noFill/>
-          <a:ln/>
-        </p:spPr>
-        <p:txBody>
-          <a:bodyPr wrap="square" lIns="0" tIns="0" rIns="0" bIns="0" rtlCol="0" anchor="t"/>
-          <a:lstStyle/>
-          <a:p>
-            <a:pPr rtl="1" algn="r" indent="0" marL="0">
-              <a:lnSpc>
-                <a:spcPct val="116000"/>
-              </a:lnSpc>
-              <a:buNone/>
-            </a:pPr>
-            <a:r>
-              <a:rPr lang="he-IL" altLang="en-US" sz="1100" dirty="0">
-                <a:solidFill>
-                  <a:srgbClr val="F4F7FB"/>
-                </a:solidFill>
-                <a:latin typeface="Calibri" pitchFamily="34" charset="0"/>
-                <a:ea typeface="Calibri" pitchFamily="34" charset="-122"/>
-                <a:cs typeface="Calibri" pitchFamily="34" charset="-120"/>
-              </a:rPr>
-              <a:t>‫יציאה מהענן עולה ‪$0.09‬ ל-‪GB‬; מעבר ממודל ‪capex‬ למודל ‪opex‬.‬</a:t>
-            </a:r>
-            <a:endParaRPr lang="he-IL" sz="1100" dirty="0"/>
-          </a:p>
-        </p:txBody>
-      </p:sp>
-      <p:sp>
-        <p:nvSpPr>
-          <p:cNvPr id="39" name="Shape 37"/>
-          <p:cNvSpPr/>
-          <p:nvPr/>
-        </p:nvSpPr>
-        <p:spPr>
-          <a:xfrm>
-            <a:off x="1081735" y="4992624"/>
-            <a:ext cx="2734056" cy="9144"/>
-          </a:xfrm>
-          <a:prstGeom prst="rect">
-            <a:avLst/>
-          </a:prstGeom>
-          <a:solidFill>
-            <a:srgbClr val="2C3A54"/>
-          </a:solidFill>
-          <a:ln w="12700">
-            <a:solidFill>
-              <a:srgbClr val="2C3A54"/>
-            </a:solidFill>
-            <a:prstDash val="solid"/>
-          </a:ln>
-        </p:spPr>
-      </p:sp>
-      <p:sp>
-        <p:nvSpPr>
-          <p:cNvPr id="40" name="Text 38"/>
-          <p:cNvSpPr/>
-          <p:nvPr/>
-        </p:nvSpPr>
-        <p:spPr>
-          <a:xfrm>
-            <a:off x="1081735" y="5056632"/>
-            <a:ext cx="2734056" cy="603504"/>
-          </a:xfrm>
-          <a:prstGeom prst="rect">
-            <a:avLst/>
-          </a:prstGeom>
-          <a:noFill/>
-          <a:ln/>
-        </p:spPr>
-        <p:txBody>
-          <a:bodyPr wrap="square" lIns="0" tIns="0" rIns="0" bIns="0" rtlCol="0" anchor="t"/>
-          <a:lstStyle/>
-          <a:p>
-            <a:pPr rtl="1" algn="r" indent="0" marL="0">
-              <a:lnSpc>
-                <a:spcPct val="116000"/>
-              </a:lnSpc>
-              <a:buNone/>
-            </a:pPr>
-            <a:r>
-              <a:rPr lang="he-IL" altLang="en-US" sz="1050" dirty="0">
-                <a:solidFill>
-                  <a:srgbClr val="91A0B7"/>
-                </a:solidFill>
-                <a:latin typeface="Calibri" pitchFamily="34" charset="0"/>
-                <a:ea typeface="Calibri" pitchFamily="34" charset="-122"/>
-                <a:cs typeface="Calibri" pitchFamily="34" charset="-120"/>
-              </a:rPr>
-              <a:t>‫מיטיגציה: תמחור תרחיש יציאה מראש, התחלה בקורפוס אחד בלבד, ואישור תקציב ‪opex‬ רב-שנתי.‬</a:t>
-            </a:r>
-            <a:endParaRPr lang="he-IL" sz="1050" dirty="0"/>
-          </a:p>
-        </p:txBody>
-      </p:sp>
-      <p:sp>
-        <p:nvSpPr>
-          <p:cNvPr id="41" name="Shape 39"/>
-          <p:cNvSpPr/>
-          <p:nvPr/>
-        </p:nvSpPr>
-        <p:spPr>
-          <a:xfrm>
-            <a:off x="822960" y="5907024"/>
-            <a:ext cx="10545775" cy="10973"/>
-          </a:xfrm>
-          <a:prstGeom prst="rect">
-            <a:avLst/>
-          </a:prstGeom>
-          <a:solidFill>
-            <a:srgbClr val="23304A"/>
-          </a:solidFill>
-          <a:ln w="12700">
-            <a:solidFill>
-              <a:srgbClr val="23304A"/>
-            </a:solidFill>
-            <a:prstDash val="solid"/>
-          </a:ln>
-        </p:spPr>
-      </p:sp>
-      <p:sp>
-        <p:nvSpPr>
-          <p:cNvPr id="42" name="Shape 40"/>
-          <p:cNvSpPr/>
-          <p:nvPr/>
-        </p:nvSpPr>
-        <p:spPr>
-          <a:xfrm>
-            <a:off x="11249863" y="6172200"/>
-            <a:ext cx="118872" cy="118872"/>
-          </a:xfrm>
-          <a:prstGeom prst="rect">
-            <a:avLst/>
-          </a:prstGeom>
-          <a:solidFill>
-            <a:srgbClr val="FF6B7A"/>
-          </a:solidFill>
-          <a:ln w="12700">
-            <a:solidFill>
-              <a:srgbClr val="FF6B7A"/>
-            </a:solidFill>
-            <a:prstDash val="solid"/>
-          </a:ln>
-        </p:spPr>
-      </p:sp>
-      <p:sp>
-        <p:nvSpPr>
           <p:cNvPr id="43" name="Text 41"/>
           <p:cNvSpPr/>
           <p:nvPr/>
@@ -10842,7 +10842,7 @@
                 <a:ea typeface="Calibri" pitchFamily="34" charset="-122"/>
                 <a:cs typeface="Calibri" pitchFamily="34" charset="-120"/>
               </a:rPr>
-              <a:t>‫שני הסיכונים המסומנים באדום — קבילות משפטית וריבונות נתונים — חוסמים התחלה. יש לסגור אותם בספטמבר, במקביל ל-‪POC‬ ולא אחריו.‬</a:t>
+              <a:t>‫שני הסיכונים באדום חוסמים התחלה: בלי אישור הלשכה המשפטית ובלי אישור ‪DPO‬ ורגולטור אין העתקה ראשונה. ארבעת הכתומים נסגרים ב-‪POC‬ ובאפיון מול צוותי האפליקציה.‬</a:t>
             </a:r>
             <a:endParaRPr lang="he-IL" sz="1150" dirty="0"/>
           </a:p>

--- a/presentations/ecs-to-s3/Harel_ECS_to_S3_CIO.pptx
+++ b/presentations/ecs-to-s3/Harel_ECS_to_S3_CIO.pptx
@@ -4492,12 +4492,12 @@
         </p:nvSpPr>
         <p:spPr>
           <a:xfrm>
-            <a:off x="6229807" y="2066544"/>
-            <a:ext cx="5138928" cy="3657600"/>
+            <a:off x="6229807" y="2029968"/>
+            <a:ext cx="5138928" cy="3749040"/>
           </a:xfrm>
           <a:prstGeom prst="roundRect">
             <a:avLst>
-              <a:gd name="adj" fmla="val 1250"/>
+              <a:gd name="adj" fmla="val 1220"/>
             </a:avLst>
           </a:prstGeom>
           <a:solidFill>
@@ -4519,7 +4519,7 @@
         </p:nvSpPr>
         <p:spPr>
           <a:xfrm>
-            <a:off x="11213287" y="2395728"/>
+            <a:off x="11213287" y="2359152"/>
             <a:ext cx="50292" cy="402336"/>
           </a:xfrm>
           <a:prstGeom prst="rect">
@@ -4544,7 +4544,7 @@
         </p:nvSpPr>
         <p:spPr>
           <a:xfrm>
-            <a:off x="10198303" y="2377440"/>
+            <a:off x="10198303" y="2340864"/>
             <a:ext cx="676656" cy="438912"/>
           </a:xfrm>
           <a:prstGeom prst="rect">
@@ -4586,7 +4586,7 @@
         </p:nvSpPr>
         <p:spPr>
           <a:xfrm>
-            <a:off x="6577279" y="2359152"/>
+            <a:off x="6577279" y="2322576"/>
             <a:ext cx="3511296" cy="475488"/>
           </a:xfrm>
           <a:prstGeom prst="rect">
@@ -4628,7 +4628,7 @@
         </p:nvSpPr>
         <p:spPr>
           <a:xfrm>
-            <a:off x="6577279" y="2980944"/>
+            <a:off x="6577279" y="2944368"/>
             <a:ext cx="4443984" cy="10973"/>
           </a:xfrm>
           <a:prstGeom prst="rect">
@@ -4653,8 +4653,8 @@
         </p:nvSpPr>
         <p:spPr>
           <a:xfrm>
-            <a:off x="6577279" y="3108960"/>
-            <a:ext cx="4443984" cy="603504"/>
+            <a:off x="6577279" y="3054096"/>
+            <a:ext cx="4443984" cy="475488"/>
           </a:xfrm>
           <a:prstGeom prst="rect">
             <a:avLst/>
@@ -4681,7 +4681,7 @@
                 <a:ea typeface="Calibri" pitchFamily="34" charset="-122"/>
                 <a:cs typeface="Calibri" pitchFamily="34" charset="-120"/>
               </a:rPr>
-              <a:t>‫הרחבת המערך הקיים: רכש תוספת דיסקים מ-‪Dell‬, באותה ארכיטקטורה ובאותם ממשקים.‬</a:t>
+              <a:t>‫הרחבת המערך הקיים — באותה ארכיטקטורה ובאותם ממשקים.‬</a:t>
             </a:r>
             <a:endParaRPr lang="he-IL" sz="1400" dirty="0"/>
           </a:p>
@@ -4695,7 +4695,7 @@
         </p:nvSpPr>
         <p:spPr>
           <a:xfrm>
-            <a:off x="10966399" y="3931920"/>
+            <a:off x="10966399" y="3694176"/>
             <a:ext cx="91440" cy="91440"/>
           </a:xfrm>
           <a:prstGeom prst="rect">
@@ -4720,8 +4720,8 @@
         </p:nvSpPr>
         <p:spPr>
           <a:xfrm>
-            <a:off x="6577279" y="3803904"/>
-            <a:ext cx="4279392" cy="384048"/>
+            <a:off x="6577279" y="3566160"/>
+            <a:ext cx="4279392" cy="365760"/>
           </a:xfrm>
           <a:prstGeom prst="rect">
             <a:avLst/>
@@ -4762,7 +4762,7 @@
         </p:nvSpPr>
         <p:spPr>
           <a:xfrm>
-            <a:off x="10966399" y="4334256"/>
+            <a:off x="10966399" y="4078224"/>
             <a:ext cx="91440" cy="91440"/>
           </a:xfrm>
           <a:prstGeom prst="rect">
@@ -4787,8 +4787,8 @@
         </p:nvSpPr>
         <p:spPr>
           <a:xfrm>
-            <a:off x="6577279" y="4206240"/>
-            <a:ext cx="4279392" cy="384048"/>
+            <a:off x="6577279" y="3950208"/>
+            <a:ext cx="4279392" cy="365760"/>
           </a:xfrm>
           <a:prstGeom prst="rect">
             <a:avLst/>
@@ -4829,7 +4829,74 @@
         </p:nvSpPr>
         <p:spPr>
           <a:xfrm>
-            <a:off x="10966399" y="4736592"/>
+            <a:off x="10966399" y="4462272"/>
+            <a:ext cx="91440" cy="91440"/>
+          </a:xfrm>
+          <a:prstGeom prst="rect">
+            <a:avLst/>
+          </a:prstGeom>
+          <a:solidFill>
+            <a:srgbClr val="FF9F43"/>
+          </a:solidFill>
+          <a:ln w="12700">
+            <a:solidFill>
+              <a:srgbClr val="FF9F43"/>
+            </a:solidFill>
+            <a:prstDash val="solid"/>
+          </a:ln>
+        </p:spPr>
+      </p:sp>
+      <p:sp>
+        <p:nvSpPr>
+          <p:cNvPr id="16" name="Text 14"/>
+          <p:cNvSpPr/>
+          <p:nvPr/>
+        </p:nvSpPr>
+        <p:spPr>
+          <a:xfrm>
+            <a:off x="6577279" y="4334256"/>
+            <a:ext cx="4279392" cy="365760"/>
+          </a:xfrm>
+          <a:prstGeom prst="rect">
+            <a:avLst/>
+          </a:prstGeom>
+          <a:noFill/>
+          <a:ln/>
+        </p:spPr>
+        <p:txBody>
+          <a:bodyPr wrap="square" lIns="0" tIns="0" rIns="0" bIns="0" rtlCol="0" anchor="ctr"/>
+          <a:lstStyle/>
+          <a:p>
+            <a:pPr rtl="1" algn="r" indent="0" marL="0">
+              <a:lnSpc>
+                <a:spcPct val="100000"/>
+              </a:lnSpc>
+              <a:buNone/>
+            </a:pPr>
+            <a:r>
+              <a:rPr lang="he-IL" altLang="en-US" sz="1300" dirty="0">
+                <a:solidFill>
+                  <a:srgbClr val="F4F7FB"/>
+                </a:solidFill>
+                <a:latin typeface="Calibri" pitchFamily="34" charset="0"/>
+                <a:ea typeface="Calibri" pitchFamily="34" charset="-122"/>
+                <a:cs typeface="Calibri" pitchFamily="34" charset="-120"/>
+              </a:rPr>
+              <a:t>‫תוספת דיסקים ל-‪nodes‬ קיימים · תחזוקה ל-‪5‬ שנים‬</a:t>
+            </a:r>
+            <a:endParaRPr lang="he-IL" sz="1300" dirty="0"/>
+          </a:p>
+        </p:txBody>
+      </p:sp>
+      <p:sp>
+        <p:nvSpPr>
+          <p:cNvPr id="17" name="Shape 15"/>
+          <p:cNvSpPr/>
+          <p:nvPr/>
+        </p:nvSpPr>
+        <p:spPr>
+          <a:xfrm>
+            <a:off x="10966399" y="4846320"/>
             <a:ext cx="91440" cy="91440"/>
           </a:xfrm>
           <a:prstGeom prst="rect">
@@ -4848,14 +4915,14 @@
       </p:sp>
       <p:sp>
         <p:nvSpPr>
-          <p:cNvPr id="16" name="Text 14"/>
-          <p:cNvSpPr/>
-          <p:nvPr/>
-        </p:nvSpPr>
-        <p:spPr>
-          <a:xfrm>
-            <a:off x="6577279" y="4608576"/>
-            <a:ext cx="4279392" cy="384048"/>
+          <p:cNvPr id="18" name="Text 16"/>
+          <p:cNvSpPr/>
+          <p:nvPr/>
+        </p:nvSpPr>
+        <p:spPr>
+          <a:xfrm>
+            <a:off x="6577279" y="4718304"/>
+            <a:ext cx="4279392" cy="365760"/>
           </a:xfrm>
           <a:prstGeom prst="rect">
             <a:avLst/>
@@ -4890,13 +4957,13 @@
       </p:sp>
       <p:sp>
         <p:nvSpPr>
-          <p:cNvPr id="17" name="Shape 15"/>
-          <p:cNvSpPr/>
-          <p:nvPr/>
-        </p:nvSpPr>
-        <p:spPr>
-          <a:xfrm>
-            <a:off x="6577279" y="5120640"/>
+          <p:cNvPr id="19" name="Shape 17"/>
+          <p:cNvSpPr/>
+          <p:nvPr/>
+        </p:nvSpPr>
+        <p:spPr>
+          <a:xfrm>
+            <a:off x="6577279" y="5175504"/>
             <a:ext cx="4443984" cy="457200"/>
           </a:xfrm>
           <a:prstGeom prst="roundRect">
@@ -4917,13 +4984,13 @@
       </p:sp>
       <p:sp>
         <p:nvSpPr>
-          <p:cNvPr id="18" name="Text 16"/>
-          <p:cNvSpPr/>
-          <p:nvPr/>
-        </p:nvSpPr>
-        <p:spPr>
-          <a:xfrm>
-            <a:off x="6723583" y="5120640"/>
+          <p:cNvPr id="20" name="Text 18"/>
+          <p:cNvSpPr/>
+          <p:nvPr/>
+        </p:nvSpPr>
+        <p:spPr>
+          <a:xfrm>
+            <a:off x="6723583" y="5175504"/>
             <a:ext cx="4151376" cy="457200"/>
           </a:xfrm>
           <a:prstGeom prst="rect">
@@ -4959,18 +5026,18 @@
       </p:sp>
       <p:sp>
         <p:nvSpPr>
-          <p:cNvPr id="19" name="Shape 17"/>
-          <p:cNvSpPr/>
-          <p:nvPr/>
-        </p:nvSpPr>
-        <p:spPr>
-          <a:xfrm>
-            <a:off x="822960" y="2066544"/>
-            <a:ext cx="5138928" cy="3657600"/>
+          <p:cNvPr id="21" name="Shape 19"/>
+          <p:cNvSpPr/>
+          <p:nvPr/>
+        </p:nvSpPr>
+        <p:spPr>
+          <a:xfrm>
+            <a:off x="822960" y="2029968"/>
+            <a:ext cx="5138928" cy="3749040"/>
           </a:xfrm>
           <a:prstGeom prst="roundRect">
             <a:avLst>
-              <a:gd name="adj" fmla="val 1250"/>
+              <a:gd name="adj" fmla="val 1220"/>
             </a:avLst>
           </a:prstGeom>
           <a:solidFill>
@@ -4986,13 +5053,13 @@
       </p:sp>
       <p:sp>
         <p:nvSpPr>
-          <p:cNvPr id="20" name="Shape 18"/>
-          <p:cNvSpPr/>
-          <p:nvPr/>
-        </p:nvSpPr>
-        <p:spPr>
-          <a:xfrm>
-            <a:off x="5806440" y="2395728"/>
+          <p:cNvPr id="22" name="Shape 20"/>
+          <p:cNvSpPr/>
+          <p:nvPr/>
+        </p:nvSpPr>
+        <p:spPr>
+          <a:xfrm>
+            <a:off x="5806440" y="2359152"/>
             <a:ext cx="50292" cy="402336"/>
           </a:xfrm>
           <a:prstGeom prst="rect">
@@ -5011,13 +5078,13 @@
       </p:sp>
       <p:sp>
         <p:nvSpPr>
-          <p:cNvPr id="21" name="Text 19"/>
-          <p:cNvSpPr/>
-          <p:nvPr/>
-        </p:nvSpPr>
-        <p:spPr>
-          <a:xfrm>
-            <a:off x="4791456" y="2377440"/>
+          <p:cNvPr id="23" name="Text 21"/>
+          <p:cNvSpPr/>
+          <p:nvPr/>
+        </p:nvSpPr>
+        <p:spPr>
+          <a:xfrm>
+            <a:off x="4791456" y="2340864"/>
             <a:ext cx="676656" cy="438912"/>
           </a:xfrm>
           <a:prstGeom prst="rect">
@@ -5053,13 +5120,13 @@
       </p:sp>
       <p:sp>
         <p:nvSpPr>
-          <p:cNvPr id="22" name="Text 20"/>
-          <p:cNvSpPr/>
-          <p:nvPr/>
-        </p:nvSpPr>
-        <p:spPr>
-          <a:xfrm>
-            <a:off x="1170432" y="2359152"/>
+          <p:cNvPr id="24" name="Text 22"/>
+          <p:cNvSpPr/>
+          <p:nvPr/>
+        </p:nvSpPr>
+        <p:spPr>
+          <a:xfrm>
+            <a:off x="1170432" y="2322576"/>
             <a:ext cx="3511296" cy="475488"/>
           </a:xfrm>
           <a:prstGeom prst="rect">
@@ -5095,13 +5162,13 @@
       </p:sp>
       <p:sp>
         <p:nvSpPr>
-          <p:cNvPr id="23" name="Shape 21"/>
-          <p:cNvSpPr/>
-          <p:nvPr/>
-        </p:nvSpPr>
-        <p:spPr>
-          <a:xfrm>
-            <a:off x="1170432" y="2980944"/>
+          <p:cNvPr id="25" name="Shape 23"/>
+          <p:cNvSpPr/>
+          <p:nvPr/>
+        </p:nvSpPr>
+        <p:spPr>
+          <a:xfrm>
+            <a:off x="1170432" y="2944368"/>
             <a:ext cx="4443984" cy="10973"/>
           </a:xfrm>
           <a:prstGeom prst="rect">
@@ -5120,14 +5187,14 @@
       </p:sp>
       <p:sp>
         <p:nvSpPr>
-          <p:cNvPr id="24" name="Text 22"/>
-          <p:cNvSpPr/>
-          <p:nvPr/>
-        </p:nvSpPr>
-        <p:spPr>
-          <a:xfrm>
-            <a:off x="1170432" y="3108960"/>
-            <a:ext cx="4443984" cy="603504"/>
+          <p:cNvPr id="26" name="Text 24"/>
+          <p:cNvSpPr/>
+          <p:nvPr/>
+        </p:nvSpPr>
+        <p:spPr>
+          <a:xfrm>
+            <a:off x="1170432" y="3054096"/>
+            <a:ext cx="4443984" cy="475488"/>
           </a:xfrm>
           <a:prstGeom prst="rect">
             <a:avLst/>
@@ -5162,13 +5229,13 @@
       </p:sp>
       <p:sp>
         <p:nvSpPr>
-          <p:cNvPr id="25" name="Shape 23"/>
-          <p:cNvSpPr/>
-          <p:nvPr/>
-        </p:nvSpPr>
-        <p:spPr>
-          <a:xfrm>
-            <a:off x="5559552" y="3931920"/>
+          <p:cNvPr id="27" name="Shape 25"/>
+          <p:cNvSpPr/>
+          <p:nvPr/>
+        </p:nvSpPr>
+        <p:spPr>
+          <a:xfrm>
+            <a:off x="5559552" y="3694176"/>
             <a:ext cx="91440" cy="91440"/>
           </a:xfrm>
           <a:prstGeom prst="rect">
@@ -5187,14 +5254,14 @@
       </p:sp>
       <p:sp>
         <p:nvSpPr>
-          <p:cNvPr id="26" name="Text 24"/>
-          <p:cNvSpPr/>
-          <p:nvPr/>
-        </p:nvSpPr>
-        <p:spPr>
-          <a:xfrm>
-            <a:off x="1170432" y="3803904"/>
-            <a:ext cx="4279392" cy="384048"/>
+          <p:cNvPr id="28" name="Text 26"/>
+          <p:cNvSpPr/>
+          <p:nvPr/>
+        </p:nvSpPr>
+        <p:spPr>
+          <a:xfrm>
+            <a:off x="1170432" y="3566160"/>
+            <a:ext cx="4279392" cy="365760"/>
           </a:xfrm>
           <a:prstGeom prst="rect">
             <a:avLst/>
@@ -5229,13 +5296,13 @@
       </p:sp>
       <p:sp>
         <p:nvSpPr>
-          <p:cNvPr id="27" name="Shape 25"/>
-          <p:cNvSpPr/>
-          <p:nvPr/>
-        </p:nvSpPr>
-        <p:spPr>
-          <a:xfrm>
-            <a:off x="5559552" y="4334256"/>
+          <p:cNvPr id="29" name="Shape 27"/>
+          <p:cNvSpPr/>
+          <p:nvPr/>
+        </p:nvSpPr>
+        <p:spPr>
+          <a:xfrm>
+            <a:off x="5559552" y="4078224"/>
             <a:ext cx="91440" cy="91440"/>
           </a:xfrm>
           <a:prstGeom prst="rect">
@@ -5254,14 +5321,14 @@
       </p:sp>
       <p:sp>
         <p:nvSpPr>
-          <p:cNvPr id="28" name="Text 26"/>
-          <p:cNvSpPr/>
-          <p:nvPr/>
-        </p:nvSpPr>
-        <p:spPr>
-          <a:xfrm>
-            <a:off x="1170432" y="4206240"/>
-            <a:ext cx="4279392" cy="384048"/>
+          <p:cNvPr id="30" name="Text 28"/>
+          <p:cNvSpPr/>
+          <p:nvPr/>
+        </p:nvSpPr>
+        <p:spPr>
+          <a:xfrm>
+            <a:off x="1170432" y="3950208"/>
+            <a:ext cx="4279392" cy="365760"/>
           </a:xfrm>
           <a:prstGeom prst="rect">
             <a:avLst/>
@@ -5296,13 +5363,80 @@
       </p:sp>
       <p:sp>
         <p:nvSpPr>
-          <p:cNvPr id="29" name="Shape 27"/>
-          <p:cNvSpPr/>
-          <p:nvPr/>
-        </p:nvSpPr>
-        <p:spPr>
-          <a:xfrm>
-            <a:off x="5559552" y="4736592"/>
+          <p:cNvPr id="31" name="Shape 29"/>
+          <p:cNvSpPr/>
+          <p:nvPr/>
+        </p:nvSpPr>
+        <p:spPr>
+          <a:xfrm>
+            <a:off x="5559552" y="4462272"/>
+            <a:ext cx="91440" cy="91440"/>
+          </a:xfrm>
+          <a:prstGeom prst="rect">
+            <a:avLst/>
+          </a:prstGeom>
+          <a:solidFill>
+            <a:srgbClr val="3DD9EB"/>
+          </a:solidFill>
+          <a:ln w="12700">
+            <a:solidFill>
+              <a:srgbClr val="3DD9EB"/>
+            </a:solidFill>
+            <a:prstDash val="solid"/>
+          </a:ln>
+        </p:spPr>
+      </p:sp>
+      <p:sp>
+        <p:nvSpPr>
+          <p:cNvPr id="32" name="Text 30"/>
+          <p:cNvSpPr/>
+          <p:nvPr/>
+        </p:nvSpPr>
+        <p:spPr>
+          <a:xfrm>
+            <a:off x="1170432" y="4334256"/>
+            <a:ext cx="4279392" cy="365760"/>
+          </a:xfrm>
+          <a:prstGeom prst="rect">
+            <a:avLst/>
+          </a:prstGeom>
+          <a:noFill/>
+          <a:ln/>
+        </p:spPr>
+        <p:txBody>
+          <a:bodyPr wrap="square" lIns="0" tIns="0" rIns="0" bIns="0" rtlCol="0" anchor="ctr"/>
+          <a:lstStyle/>
+          <a:p>
+            <a:pPr rtl="1" algn="r" indent="0" marL="0">
+              <a:lnSpc>
+                <a:spcPct val="100000"/>
+              </a:lnSpc>
+              <a:buNone/>
+            </a:pPr>
+            <a:r>
+              <a:rPr lang="he-IL" altLang="en-US" sz="1300" dirty="0">
+                <a:solidFill>
+                  <a:srgbClr val="F4F7FB"/>
+                </a:solidFill>
+                <a:latin typeface="Calibri" pitchFamily="34" charset="0"/>
+                <a:ea typeface="Calibri" pitchFamily="34" charset="-122"/>
+                <a:cs typeface="Calibri" pitchFamily="34" charset="-120"/>
+              </a:rPr>
+              <a:t>‫ניתן להתחיל בקורפוס אחד ולהרחיב בהדרגה‬</a:t>
+            </a:r>
+            <a:endParaRPr lang="he-IL" sz="1300" dirty="0"/>
+          </a:p>
+        </p:txBody>
+      </p:sp>
+      <p:sp>
+        <p:nvSpPr>
+          <p:cNvPr id="33" name="Shape 31"/>
+          <p:cNvSpPr/>
+          <p:nvPr/>
+        </p:nvSpPr>
+        <p:spPr>
+          <a:xfrm>
+            <a:off x="5559552" y="4846320"/>
             <a:ext cx="91440" cy="91440"/>
           </a:xfrm>
           <a:prstGeom prst="rect">
@@ -5321,14 +5455,14 @@
       </p:sp>
       <p:sp>
         <p:nvSpPr>
-          <p:cNvPr id="30" name="Text 28"/>
-          <p:cNvSpPr/>
-          <p:nvPr/>
-        </p:nvSpPr>
-        <p:spPr>
-          <a:xfrm>
-            <a:off x="1170432" y="4608576"/>
-            <a:ext cx="4279392" cy="384048"/>
+          <p:cNvPr id="34" name="Text 32"/>
+          <p:cNvSpPr/>
+          <p:nvPr/>
+        </p:nvSpPr>
+        <p:spPr>
+          <a:xfrm>
+            <a:off x="1170432" y="4718304"/>
+            <a:ext cx="4279392" cy="365760"/>
           </a:xfrm>
           <a:prstGeom prst="rect">
             <a:avLst/>
@@ -5363,13 +5497,13 @@
       </p:sp>
       <p:sp>
         <p:nvSpPr>
-          <p:cNvPr id="31" name="Shape 29"/>
-          <p:cNvSpPr/>
-          <p:nvPr/>
-        </p:nvSpPr>
-        <p:spPr>
-          <a:xfrm>
-            <a:off x="1170432" y="5120640"/>
+          <p:cNvPr id="35" name="Shape 33"/>
+          <p:cNvSpPr/>
+          <p:nvPr/>
+        </p:nvSpPr>
+        <p:spPr>
+          <a:xfrm>
+            <a:off x="1170432" y="5175504"/>
             <a:ext cx="4443984" cy="457200"/>
           </a:xfrm>
           <a:prstGeom prst="roundRect">
@@ -5390,13 +5524,13 @@
       </p:sp>
       <p:sp>
         <p:nvSpPr>
-          <p:cNvPr id="32" name="Text 30"/>
-          <p:cNvSpPr/>
-          <p:nvPr/>
-        </p:nvSpPr>
-        <p:spPr>
-          <a:xfrm>
-            <a:off x="1316736" y="5120640"/>
+          <p:cNvPr id="36" name="Text 34"/>
+          <p:cNvSpPr/>
+          <p:nvPr/>
+        </p:nvSpPr>
+        <p:spPr>
+          <a:xfrm>
+            <a:off x="1316736" y="5175504"/>
             <a:ext cx="4151376" cy="457200"/>
           </a:xfrm>
           <a:prstGeom prst="rect">
@@ -5432,7 +5566,7 @@
       </p:sp>
       <p:sp>
         <p:nvSpPr>
-          <p:cNvPr id="33" name="Shape 31"/>
+          <p:cNvPr id="37" name="Shape 35"/>
           <p:cNvSpPr/>
           <p:nvPr/>
         </p:nvSpPr>
@@ -5457,7 +5591,7 @@
       </p:sp>
       <p:sp>
         <p:nvSpPr>
-          <p:cNvPr id="34" name="Shape 32"/>
+          <p:cNvPr id="38" name="Shape 36"/>
           <p:cNvSpPr/>
           <p:nvPr/>
         </p:nvSpPr>
@@ -5482,7 +5616,7 @@
       </p:sp>
       <p:sp>
         <p:nvSpPr>
-          <p:cNvPr id="35" name="Text 33"/>
+          <p:cNvPr id="39" name="Text 37"/>
           <p:cNvSpPr/>
           <p:nvPr/>
         </p:nvSpPr>

--- a/presentations/ecs-to-s3/Harel_ECS_to_S3_CIO.pptx
+++ b/presentations/ecs-to-s3/Harel_ECS_to_S3_CIO.pptx
@@ -9680,20 +9680,20 @@
         </p:nvSpPr>
         <p:spPr>
           <a:xfrm>
-            <a:off x="8122615" y="2011680"/>
-            <a:ext cx="3246120" cy="1773936"/>
+            <a:off x="8122615" y="1975104"/>
+            <a:ext cx="3246120" cy="1810512"/>
           </a:xfrm>
           <a:prstGeom prst="roundRect">
             <a:avLst>
-              <a:gd name="adj" fmla="val 2577"/>
+              <a:gd name="adj" fmla="val 2525"/>
             </a:avLst>
           </a:prstGeom>
           <a:solidFill>
             <a:srgbClr val="182133"/>
           </a:solidFill>
-          <a:ln w="12700">
+          <a:ln w="19050">
             <a:solidFill>
-              <a:srgbClr val="5A2A38"/>
+              <a:srgbClr val="FF6B7A"/>
             </a:solidFill>
             <a:prstDash val="solid"/>
           </a:ln>
@@ -9707,8 +9707,8 @@
         </p:nvSpPr>
         <p:spPr>
           <a:xfrm>
-            <a:off x="10948111" y="2231136"/>
-            <a:ext cx="118872" cy="118872"/>
+            <a:off x="11318443" y="2121408"/>
+            <a:ext cx="50292" cy="1517904"/>
           </a:xfrm>
           <a:prstGeom prst="rect">
             <a:avLst/>
@@ -9732,8 +9732,8 @@
         </p:nvSpPr>
         <p:spPr>
           <a:xfrm>
-            <a:off x="8378647" y="2157984"/>
-            <a:ext cx="2478024" cy="256032"/>
+            <a:off x="9421063" y="2103120"/>
+            <a:ext cx="1618488" cy="310896"/>
           </a:xfrm>
           <a:prstGeom prst="rect">
             <a:avLst/>
@@ -9752,7 +9752,7 @@
               <a:buNone/>
             </a:pPr>
             <a:r>
-              <a:rPr lang="he-IL" altLang="en-US" sz="1250" b="1" dirty="0">
+              <a:rPr lang="he-IL" altLang="en-US" sz="1400" b="1" dirty="0">
                 <a:solidFill>
                   <a:srgbClr val="FF6B7A"/>
                 </a:solidFill>
@@ -9760,7 +9760,118 @@
                 <a:ea typeface="Calibri" pitchFamily="34" charset="-122"/>
                 <a:cs typeface="Calibri" pitchFamily="34" charset="-120"/>
               </a:rPr>
-              <a:t>‫משפטי · קבילות ואישור‬</a:t>
+              <a:t>‫משפטי · קבילות‬</a:t>
+            </a:r>
+            <a:endParaRPr lang="he-IL" sz="1400" dirty="0"/>
+          </a:p>
+        </p:txBody>
+      </p:sp>
+      <p:sp>
+        <p:nvSpPr>
+          <p:cNvPr id="8" name="Shape 6"/>
+          <p:cNvSpPr/>
+          <p:nvPr/>
+        </p:nvSpPr>
+        <p:spPr>
+          <a:xfrm>
+            <a:off x="8378647" y="2139696"/>
+            <a:ext cx="932688" cy="237744"/>
+          </a:xfrm>
+          <a:prstGeom prst="roundRect">
+            <a:avLst>
+              <a:gd name="adj" fmla="val 115385"/>
+            </a:avLst>
+          </a:prstGeom>
+          <a:solidFill>
+            <a:srgbClr val="3A1620"/>
+          </a:solidFill>
+          <a:ln w="12700">
+            <a:solidFill>
+              <a:srgbClr val="3A1620"/>
+            </a:solidFill>
+            <a:prstDash val="solid"/>
+          </a:ln>
+        </p:spPr>
+      </p:sp>
+      <p:sp>
+        <p:nvSpPr>
+          <p:cNvPr id="9" name="Text 7"/>
+          <p:cNvSpPr/>
+          <p:nvPr/>
+        </p:nvSpPr>
+        <p:spPr>
+          <a:xfrm>
+            <a:off x="8378647" y="2139696"/>
+            <a:ext cx="932688" cy="237744"/>
+          </a:xfrm>
+          <a:prstGeom prst="rect">
+            <a:avLst/>
+          </a:prstGeom>
+          <a:noFill/>
+          <a:ln/>
+        </p:spPr>
+        <p:txBody>
+          <a:bodyPr wrap="square" lIns="0" tIns="0" rIns="0" bIns="0" rtlCol="0" anchor="ctr"/>
+          <a:lstStyle/>
+          <a:p>
+            <a:pPr rtl="1" algn="ctr" indent="0" marL="0">
+              <a:lnSpc>
+                <a:spcPct val="100000"/>
+              </a:lnSpc>
+              <a:buNone/>
+            </a:pPr>
+            <a:r>
+              <a:rPr lang="he-IL" altLang="en-US" sz="950" b="1" dirty="0">
+                <a:solidFill>
+                  <a:srgbClr val="FF6B7A"/>
+                </a:solidFill>
+                <a:latin typeface="Calibri" pitchFamily="34" charset="0"/>
+                <a:ea typeface="Calibri" pitchFamily="34" charset="-122"/>
+                <a:cs typeface="Calibri" pitchFamily="34" charset="-120"/>
+              </a:rPr>
+              <a:t>‫חוסם התחלה‬</a:t>
+            </a:r>
+            <a:endParaRPr lang="he-IL" sz="950" dirty="0"/>
+          </a:p>
+        </p:txBody>
+      </p:sp>
+      <p:sp>
+        <p:nvSpPr>
+          <p:cNvPr id="10" name="Text 8"/>
+          <p:cNvSpPr/>
+          <p:nvPr/>
+        </p:nvSpPr>
+        <p:spPr>
+          <a:xfrm>
+            <a:off x="8378647" y="2468880"/>
+            <a:ext cx="2679192" cy="457200"/>
+          </a:xfrm>
+          <a:prstGeom prst="rect">
+            <a:avLst/>
+          </a:prstGeom>
+          <a:noFill/>
+          <a:ln/>
+        </p:spPr>
+        <p:txBody>
+          <a:bodyPr wrap="square" lIns="0" tIns="0" rIns="0" bIns="0" rtlCol="0" anchor="t"/>
+          <a:lstStyle/>
+          <a:p>
+            <a:pPr rtl="1" algn="r" indent="0" marL="0">
+              <a:lnSpc>
+                <a:spcPct val="120000"/>
+              </a:lnSpc>
+              <a:buNone/>
+            </a:pPr>
+            <a:r>
+              <a:rPr lang="he-IL" altLang="en-US" sz="1250" dirty="0">
+                <a:solidFill>
+                  <a:srgbClr val="F4F7FB"/>
+                </a:solidFill>
+                <a:latin typeface="Calibri" pitchFamily="34" charset="0"/>
+                <a:ea typeface="Calibri" pitchFamily="34" charset="-122"/>
+                <a:cs typeface="Calibri" pitchFamily="34" charset="-120"/>
+              </a:rPr>
+              <a:t>‫שם הקובץ ותאריך היצירה משתנים בהעתקה. בית משפט עשוי לדרוש אסמכתא שהתוכן לא שונה.‬</a:t>
             </a:r>
             <a:endParaRPr lang="he-IL" sz="1250" dirty="0"/>
           </a:p>
@@ -9768,56 +9879,14 @@
       </p:sp>
       <p:sp>
         <p:nvSpPr>
-          <p:cNvPr id="8" name="Text 6"/>
-          <p:cNvSpPr/>
-          <p:nvPr/>
-        </p:nvSpPr>
-        <p:spPr>
-          <a:xfrm>
-            <a:off x="8378647" y="2450592"/>
-            <a:ext cx="2734056" cy="512064"/>
-          </a:xfrm>
-          <a:prstGeom prst="rect">
-            <a:avLst/>
-          </a:prstGeom>
-          <a:noFill/>
-          <a:ln/>
-        </p:spPr>
-        <p:txBody>
-          <a:bodyPr wrap="square" lIns="0" tIns="0" rIns="0" bIns="0" rtlCol="0" anchor="t"/>
-          <a:lstStyle/>
-          <a:p>
-            <a:pPr rtl="1" algn="r" indent="0" marL="0">
-              <a:lnSpc>
-                <a:spcPct val="116000"/>
-              </a:lnSpc>
-              <a:buNone/>
-            </a:pPr>
-            <a:r>
-              <a:rPr lang="he-IL" altLang="en-US" sz="1100" dirty="0">
-                <a:solidFill>
-                  <a:srgbClr val="F4F7FB"/>
-                </a:solidFill>
-                <a:latin typeface="Calibri" pitchFamily="34" charset="0"/>
-                <a:ea typeface="Calibri" pitchFamily="34" charset="-122"/>
-                <a:cs typeface="Calibri" pitchFamily="34" charset="-120"/>
-              </a:rPr>
-              <a:t>‫שם הקובץ ותאריך היצירה משתנים בהעתקה. בית משפט עשוי לדרוש אסמכתא שהתוכן לא שונה.‬</a:t>
-            </a:r>
-            <a:endParaRPr lang="he-IL" sz="1100" dirty="0"/>
-          </a:p>
-        </p:txBody>
-      </p:sp>
-      <p:sp>
-        <p:nvSpPr>
-          <p:cNvPr id="9" name="Shape 7"/>
-          <p:cNvSpPr/>
-          <p:nvPr/>
-        </p:nvSpPr>
-        <p:spPr>
-          <a:xfrm>
-            <a:off x="8378647" y="2999232"/>
-            <a:ext cx="2734056" cy="9144"/>
+          <p:cNvPr id="11" name="Shape 9"/>
+          <p:cNvSpPr/>
+          <p:nvPr/>
+        </p:nvSpPr>
+        <p:spPr>
+          <a:xfrm>
+            <a:off x="8378647" y="2962656"/>
+            <a:ext cx="2679192" cy="9144"/>
           </a:xfrm>
           <a:prstGeom prst="rect">
             <a:avLst/>
@@ -9835,14 +9904,14 @@
       </p:sp>
       <p:sp>
         <p:nvSpPr>
-          <p:cNvPr id="10" name="Text 8"/>
-          <p:cNvSpPr/>
-          <p:nvPr/>
-        </p:nvSpPr>
-        <p:spPr>
-          <a:xfrm>
-            <a:off x="8378647" y="3063240"/>
-            <a:ext cx="2734056" cy="658368"/>
+          <p:cNvPr id="12" name="Text 10"/>
+          <p:cNvSpPr/>
+          <p:nvPr/>
+        </p:nvSpPr>
+        <p:spPr>
+          <a:xfrm>
+            <a:off x="8378647" y="3035808"/>
+            <a:ext cx="2679192" cy="658368"/>
           </a:xfrm>
           <a:prstGeom prst="rect">
             <a:avLst/>
@@ -9856,12 +9925,12 @@
           <a:p>
             <a:pPr rtl="1" algn="r" indent="0" marL="0">
               <a:lnSpc>
-                <a:spcPct val="116000"/>
-              </a:lnSpc>
-              <a:buNone/>
-            </a:pPr>
-            <a:r>
-              <a:rPr lang="he-IL" altLang="en-US" sz="1050" dirty="0">
+                <a:spcPct val="120000"/>
+              </a:lnSpc>
+              <a:buNone/>
+            </a:pPr>
+            <a:r>
+              <a:rPr lang="he-IL" altLang="en-US" sz="1150" dirty="0">
                 <a:solidFill>
                   <a:srgbClr val="91A0B7"/>
                 </a:solidFill>
@@ -9869,34 +9938,34 @@
                 <a:ea typeface="Calibri" pitchFamily="34" charset="-122"/>
                 <a:cs typeface="Calibri" pitchFamily="34" charset="-120"/>
               </a:rPr>
-              <a:t>‫מיטיגציה: ‪manifest‬ חתום ‪SHA-256‬ לכל אובייקט — שם מקורי, שם יעד ותאריך מקור — יחד עם ‪S3 Object Lock‬. הפתרון מחייב אישור מפורש של הלשכה המשפטית לפני ההעתקה הראשונה.‬</a:t>
-            </a:r>
-            <a:endParaRPr lang="he-IL" sz="1050" dirty="0"/>
-          </a:p>
-        </p:txBody>
-      </p:sp>
-      <p:sp>
-        <p:nvSpPr>
-          <p:cNvPr id="11" name="Shape 9"/>
-          <p:cNvSpPr/>
-          <p:nvPr/>
-        </p:nvSpPr>
-        <p:spPr>
-          <a:xfrm>
-            <a:off x="4474159" y="2011680"/>
-            <a:ext cx="3246120" cy="1773936"/>
+              <a:t>‫מיטיגציה: ‪manifest‬ חתום ‪SHA-256‬ לכל אובייקט — שם מקורי, שם יעד ותאריך מקור — עם ‪S3 Object Lock‬. נדרש אישור מפורש של הלשכה המשפטית לפני ההעתקה.‬</a:t>
+            </a:r>
+            <a:endParaRPr lang="he-IL" sz="1150" dirty="0"/>
+          </a:p>
+        </p:txBody>
+      </p:sp>
+      <p:sp>
+        <p:nvSpPr>
+          <p:cNvPr id="13" name="Shape 11"/>
+          <p:cNvSpPr/>
+          <p:nvPr/>
+        </p:nvSpPr>
+        <p:spPr>
+          <a:xfrm>
+            <a:off x="4474159" y="1975104"/>
+            <a:ext cx="3246120" cy="1810512"/>
           </a:xfrm>
           <a:prstGeom prst="roundRect">
             <a:avLst>
-              <a:gd name="adj" fmla="val 2577"/>
+              <a:gd name="adj" fmla="val 2525"/>
             </a:avLst>
           </a:prstGeom>
           <a:solidFill>
             <a:srgbClr val="182133"/>
           </a:solidFill>
-          <a:ln w="12700">
+          <a:ln w="19050">
             <a:solidFill>
-              <a:srgbClr val="5A2A38"/>
+              <a:srgbClr val="FF6B7A"/>
             </a:solidFill>
             <a:prstDash val="solid"/>
           </a:ln>
@@ -9904,14 +9973,14 @@
       </p:sp>
       <p:sp>
         <p:nvSpPr>
-          <p:cNvPr id="12" name="Shape 10"/>
-          <p:cNvSpPr/>
-          <p:nvPr/>
-        </p:nvSpPr>
-        <p:spPr>
-          <a:xfrm>
-            <a:off x="7299655" y="2231136"/>
-            <a:ext cx="118872" cy="118872"/>
+          <p:cNvPr id="14" name="Shape 12"/>
+          <p:cNvSpPr/>
+          <p:nvPr/>
+        </p:nvSpPr>
+        <p:spPr>
+          <a:xfrm>
+            <a:off x="7669987" y="2121408"/>
+            <a:ext cx="50292" cy="1517904"/>
           </a:xfrm>
           <a:prstGeom prst="rect">
             <a:avLst/>
@@ -9929,14 +9998,14 @@
       </p:sp>
       <p:sp>
         <p:nvSpPr>
-          <p:cNvPr id="13" name="Text 11"/>
-          <p:cNvSpPr/>
-          <p:nvPr/>
-        </p:nvSpPr>
-        <p:spPr>
-          <a:xfrm>
-            <a:off x="4730191" y="2157984"/>
-            <a:ext cx="2478024" cy="256032"/>
+          <p:cNvPr id="15" name="Text 13"/>
+          <p:cNvSpPr/>
+          <p:nvPr/>
+        </p:nvSpPr>
+        <p:spPr>
+          <a:xfrm>
+            <a:off x="5772607" y="2103120"/>
+            <a:ext cx="1618488" cy="310896"/>
           </a:xfrm>
           <a:prstGeom prst="rect">
             <a:avLst/>
@@ -9955,7 +10024,7 @@
               <a:buNone/>
             </a:pPr>
             <a:r>
-              <a:rPr lang="he-IL" altLang="en-US" sz="1250" b="1" dirty="0">
+              <a:rPr lang="he-IL" altLang="en-US" sz="1400" b="1" dirty="0">
                 <a:solidFill>
                   <a:srgbClr val="FF6B7A"/>
                 </a:solidFill>
@@ -9965,62 +10034,131 @@
               </a:rPr>
               <a:t>‫רגולציה · ריבונות‬</a:t>
             </a:r>
+            <a:endParaRPr lang="he-IL" sz="1400" dirty="0"/>
+          </a:p>
+        </p:txBody>
+      </p:sp>
+      <p:sp>
+        <p:nvSpPr>
+          <p:cNvPr id="16" name="Shape 14"/>
+          <p:cNvSpPr/>
+          <p:nvPr/>
+        </p:nvSpPr>
+        <p:spPr>
+          <a:xfrm>
+            <a:off x="4730191" y="2139696"/>
+            <a:ext cx="932688" cy="237744"/>
+          </a:xfrm>
+          <a:prstGeom prst="roundRect">
+            <a:avLst>
+              <a:gd name="adj" fmla="val 115385"/>
+            </a:avLst>
+          </a:prstGeom>
+          <a:solidFill>
+            <a:srgbClr val="3A1620"/>
+          </a:solidFill>
+          <a:ln w="12700">
+            <a:solidFill>
+              <a:srgbClr val="3A1620"/>
+            </a:solidFill>
+            <a:prstDash val="solid"/>
+          </a:ln>
+        </p:spPr>
+      </p:sp>
+      <p:sp>
+        <p:nvSpPr>
+          <p:cNvPr id="17" name="Text 15"/>
+          <p:cNvSpPr/>
+          <p:nvPr/>
+        </p:nvSpPr>
+        <p:spPr>
+          <a:xfrm>
+            <a:off x="4730191" y="2139696"/>
+            <a:ext cx="932688" cy="237744"/>
+          </a:xfrm>
+          <a:prstGeom prst="rect">
+            <a:avLst/>
+          </a:prstGeom>
+          <a:noFill/>
+          <a:ln/>
+        </p:spPr>
+        <p:txBody>
+          <a:bodyPr wrap="square" lIns="0" tIns="0" rIns="0" bIns="0" rtlCol="0" anchor="ctr"/>
+          <a:lstStyle/>
+          <a:p>
+            <a:pPr rtl="1" algn="ctr" indent="0" marL="0">
+              <a:lnSpc>
+                <a:spcPct val="100000"/>
+              </a:lnSpc>
+              <a:buNone/>
+            </a:pPr>
+            <a:r>
+              <a:rPr lang="he-IL" altLang="en-US" sz="950" b="1" dirty="0">
+                <a:solidFill>
+                  <a:srgbClr val="FF6B7A"/>
+                </a:solidFill>
+                <a:latin typeface="Calibri" pitchFamily="34" charset="0"/>
+                <a:ea typeface="Calibri" pitchFamily="34" charset="-122"/>
+                <a:cs typeface="Calibri" pitchFamily="34" charset="-120"/>
+              </a:rPr>
+              <a:t>‫חוסם התחלה‬</a:t>
+            </a:r>
+            <a:endParaRPr lang="he-IL" sz="950" dirty="0"/>
+          </a:p>
+        </p:txBody>
+      </p:sp>
+      <p:sp>
+        <p:nvSpPr>
+          <p:cNvPr id="18" name="Text 16"/>
+          <p:cNvSpPr/>
+          <p:nvPr/>
+        </p:nvSpPr>
+        <p:spPr>
+          <a:xfrm>
+            <a:off x="4730191" y="2468880"/>
+            <a:ext cx="2679192" cy="457200"/>
+          </a:xfrm>
+          <a:prstGeom prst="rect">
+            <a:avLst/>
+          </a:prstGeom>
+          <a:noFill/>
+          <a:ln/>
+        </p:spPr>
+        <p:txBody>
+          <a:bodyPr wrap="square" lIns="0" tIns="0" rIns="0" bIns="0" rtlCol="0" anchor="t"/>
+          <a:lstStyle/>
+          <a:p>
+            <a:pPr rtl="1" algn="r" indent="0" marL="0">
+              <a:lnSpc>
+                <a:spcPct val="120000"/>
+              </a:lnSpc>
+              <a:buNone/>
+            </a:pPr>
+            <a:r>
+              <a:rPr lang="he-IL" altLang="en-US" sz="1250" dirty="0">
+                <a:solidFill>
+                  <a:srgbClr val="F4F7FB"/>
+                </a:solidFill>
+                <a:latin typeface="Calibri" pitchFamily="34" charset="0"/>
+                <a:ea typeface="Calibri" pitchFamily="34" charset="-122"/>
+                <a:cs typeface="Calibri" pitchFamily="34" charset="-120"/>
+              </a:rPr>
+              <a:t>‫מידע רפואי ופיננסי מזוהה היוצא משליטת הארגון.‬</a:t>
+            </a:r>
             <a:endParaRPr lang="he-IL" sz="1250" dirty="0"/>
           </a:p>
         </p:txBody>
       </p:sp>
       <p:sp>
         <p:nvSpPr>
-          <p:cNvPr id="14" name="Text 12"/>
-          <p:cNvSpPr/>
-          <p:nvPr/>
-        </p:nvSpPr>
-        <p:spPr>
-          <a:xfrm>
-            <a:off x="4730191" y="2450592"/>
-            <a:ext cx="2734056" cy="512064"/>
-          </a:xfrm>
-          <a:prstGeom prst="rect">
-            <a:avLst/>
-          </a:prstGeom>
-          <a:noFill/>
-          <a:ln/>
-        </p:spPr>
-        <p:txBody>
-          <a:bodyPr wrap="square" lIns="0" tIns="0" rIns="0" bIns="0" rtlCol="0" anchor="t"/>
-          <a:lstStyle/>
-          <a:p>
-            <a:pPr rtl="1" algn="r" indent="0" marL="0">
-              <a:lnSpc>
-                <a:spcPct val="116000"/>
-              </a:lnSpc>
-              <a:buNone/>
-            </a:pPr>
-            <a:r>
-              <a:rPr lang="he-IL" altLang="en-US" sz="1100" dirty="0">
-                <a:solidFill>
-                  <a:srgbClr val="F4F7FB"/>
-                </a:solidFill>
-                <a:latin typeface="Calibri" pitchFamily="34" charset="0"/>
-                <a:ea typeface="Calibri" pitchFamily="34" charset="-122"/>
-                <a:cs typeface="Calibri" pitchFamily="34" charset="-120"/>
-              </a:rPr>
-              <a:t>‫מידע רפואי ופיננסי מזוהה היוצא משליטת הארגון.‬</a:t>
-            </a:r>
-            <a:endParaRPr lang="he-IL" sz="1100" dirty="0"/>
-          </a:p>
-        </p:txBody>
-      </p:sp>
-      <p:sp>
-        <p:nvSpPr>
-          <p:cNvPr id="15" name="Shape 13"/>
-          <p:cNvSpPr/>
-          <p:nvPr/>
-        </p:nvSpPr>
-        <p:spPr>
-          <a:xfrm>
-            <a:off x="4730191" y="2999232"/>
-            <a:ext cx="2734056" cy="9144"/>
+          <p:cNvPr id="19" name="Shape 17"/>
+          <p:cNvSpPr/>
+          <p:nvPr/>
+        </p:nvSpPr>
+        <p:spPr>
+          <a:xfrm>
+            <a:off x="4730191" y="2962656"/>
+            <a:ext cx="2679192" cy="9144"/>
           </a:xfrm>
           <a:prstGeom prst="rect">
             <a:avLst/>
@@ -10038,14 +10176,14 @@
       </p:sp>
       <p:sp>
         <p:nvSpPr>
-          <p:cNvPr id="16" name="Text 14"/>
-          <p:cNvSpPr/>
-          <p:nvPr/>
-        </p:nvSpPr>
-        <p:spPr>
-          <a:xfrm>
-            <a:off x="4730191" y="3063240"/>
-            <a:ext cx="2734056" cy="658368"/>
+          <p:cNvPr id="20" name="Text 18"/>
+          <p:cNvSpPr/>
+          <p:nvPr/>
+        </p:nvSpPr>
+        <p:spPr>
+          <a:xfrm>
+            <a:off x="4730191" y="3035808"/>
+            <a:ext cx="2679192" cy="658368"/>
           </a:xfrm>
           <a:prstGeom prst="rect">
             <a:avLst/>
@@ -10059,12 +10197,12 @@
           <a:p>
             <a:pPr rtl="1" algn="r" indent="0" marL="0">
               <a:lnSpc>
-                <a:spcPct val="116000"/>
-              </a:lnSpc>
-              <a:buNone/>
-            </a:pPr>
-            <a:r>
-              <a:rPr lang="he-IL" altLang="en-US" sz="1050" dirty="0">
+                <a:spcPct val="120000"/>
+              </a:lnSpc>
+              <a:buNone/>
+            </a:pPr>
+            <a:r>
+              <a:rPr lang="he-IL" altLang="en-US" sz="1150" dirty="0">
                 <a:solidFill>
                   <a:srgbClr val="91A0B7"/>
                 </a:solidFill>
@@ -10074,28 +10212,28 @@
               </a:rPr>
               <a:t>‫מיטיגציה: אזור ‪il-central-1‬ בתל אביב, הצפנה ב-‪KMS‬ עם מפתח בבעלותנו, ואישור ‪DPO‬ ורגולטור לפני ההעתקה.‬</a:t>
             </a:r>
-            <a:endParaRPr lang="he-IL" sz="1050" dirty="0"/>
-          </a:p>
-        </p:txBody>
-      </p:sp>
-      <p:sp>
-        <p:nvSpPr>
-          <p:cNvPr id="17" name="Shape 15"/>
-          <p:cNvSpPr/>
-          <p:nvPr/>
-        </p:nvSpPr>
-        <p:spPr>
-          <a:xfrm>
-            <a:off x="825703" y="2011680"/>
-            <a:ext cx="3246120" cy="1773936"/>
+            <a:endParaRPr lang="he-IL" sz="1150" dirty="0"/>
+          </a:p>
+        </p:txBody>
+      </p:sp>
+      <p:sp>
+        <p:nvSpPr>
+          <p:cNvPr id="21" name="Shape 19"/>
+          <p:cNvSpPr/>
+          <p:nvPr/>
+        </p:nvSpPr>
+        <p:spPr>
+          <a:xfrm>
+            <a:off x="825703" y="1975104"/>
+            <a:ext cx="3246120" cy="1810512"/>
           </a:xfrm>
           <a:prstGeom prst="roundRect">
             <a:avLst>
-              <a:gd name="adj" fmla="val 2577"/>
+              <a:gd name="adj" fmla="val 2525"/>
             </a:avLst>
           </a:prstGeom>
           <a:solidFill>
-            <a:srgbClr val="182133"/>
+            <a:srgbClr val="141C2C"/>
           </a:solidFill>
           <a:ln w="12700">
             <a:solidFill>
@@ -10107,14 +10245,14 @@
       </p:sp>
       <p:sp>
         <p:nvSpPr>
-          <p:cNvPr id="18" name="Shape 16"/>
-          <p:cNvSpPr/>
-          <p:nvPr/>
-        </p:nvSpPr>
-        <p:spPr>
-          <a:xfrm>
-            <a:off x="3651199" y="2231136"/>
-            <a:ext cx="118872" cy="118872"/>
+          <p:cNvPr id="22" name="Shape 20"/>
+          <p:cNvSpPr/>
+          <p:nvPr/>
+        </p:nvSpPr>
+        <p:spPr>
+          <a:xfrm>
+            <a:off x="4021531" y="2121408"/>
+            <a:ext cx="50292" cy="1517904"/>
           </a:xfrm>
           <a:prstGeom prst="rect">
             <a:avLst/>
@@ -10132,14 +10270,14 @@
       </p:sp>
       <p:sp>
         <p:nvSpPr>
-          <p:cNvPr id="19" name="Text 17"/>
-          <p:cNvSpPr/>
-          <p:nvPr/>
-        </p:nvSpPr>
-        <p:spPr>
-          <a:xfrm>
-            <a:off x="1081735" y="2157984"/>
-            <a:ext cx="2478024" cy="256032"/>
+          <p:cNvPr id="23" name="Text 21"/>
+          <p:cNvSpPr/>
+          <p:nvPr/>
+        </p:nvSpPr>
+        <p:spPr>
+          <a:xfrm>
+            <a:off x="2124151" y="2103120"/>
+            <a:ext cx="1618488" cy="310896"/>
           </a:xfrm>
           <a:prstGeom prst="rect">
             <a:avLst/>
@@ -10158,7 +10296,7 @@
               <a:buNone/>
             </a:pPr>
             <a:r>
-              <a:rPr lang="he-IL" altLang="en-US" sz="1250" b="1" dirty="0">
+              <a:rPr lang="he-IL" altLang="en-US" sz="1400" b="1" dirty="0">
                 <a:solidFill>
                   <a:srgbClr val="FF9F43"/>
                 </a:solidFill>
@@ -10166,7 +10304,49 @@
                 <a:ea typeface="Calibri" pitchFamily="34" charset="-122"/>
                 <a:cs typeface="Calibri" pitchFamily="34" charset="-120"/>
               </a:rPr>
-              <a:t>‫אפליקציה · שינוי מצביעים‬</a:t>
+              <a:t>‫אפליקציה · מצביעים‬</a:t>
+            </a:r>
+            <a:endParaRPr lang="he-IL" sz="1400" dirty="0"/>
+          </a:p>
+        </p:txBody>
+      </p:sp>
+      <p:sp>
+        <p:nvSpPr>
+          <p:cNvPr id="24" name="Text 22"/>
+          <p:cNvSpPr/>
+          <p:nvPr/>
+        </p:nvSpPr>
+        <p:spPr>
+          <a:xfrm>
+            <a:off x="1081735" y="2468880"/>
+            <a:ext cx="2679192" cy="457200"/>
+          </a:xfrm>
+          <a:prstGeom prst="rect">
+            <a:avLst/>
+          </a:prstGeom>
+          <a:noFill/>
+          <a:ln/>
+        </p:spPr>
+        <p:txBody>
+          <a:bodyPr wrap="square" lIns="0" tIns="0" rIns="0" bIns="0" rtlCol="0" anchor="t"/>
+          <a:lstStyle/>
+          <a:p>
+            <a:pPr rtl="1" algn="r" indent="0" marL="0">
+              <a:lnSpc>
+                <a:spcPct val="120000"/>
+              </a:lnSpc>
+              <a:buNone/>
+            </a:pPr>
+            <a:r>
+              <a:rPr lang="he-IL" altLang="en-US" sz="1250" dirty="0">
+                <a:solidFill>
+                  <a:srgbClr val="F4F7FB"/>
+                </a:solidFill>
+                <a:latin typeface="Calibri" pitchFamily="34" charset="0"/>
+                <a:ea typeface="Calibri" pitchFamily="34" charset="-122"/>
+                <a:cs typeface="Calibri" pitchFamily="34" charset="-120"/>
+              </a:rPr>
+              <a:t>‫האפליקציות מצביעות לנתיב ב-‪ECS‬. מעבר ל-‪S3‬ מחייב פיתוח בצד היישום, לא רק העברת דאטה.‬</a:t>
             </a:r>
             <a:endParaRPr lang="he-IL" sz="1250" dirty="0"/>
           </a:p>
@@ -10174,56 +10354,14 @@
       </p:sp>
       <p:sp>
         <p:nvSpPr>
-          <p:cNvPr id="20" name="Text 18"/>
-          <p:cNvSpPr/>
-          <p:nvPr/>
-        </p:nvSpPr>
-        <p:spPr>
-          <a:xfrm>
-            <a:off x="1081735" y="2450592"/>
-            <a:ext cx="2734056" cy="512064"/>
-          </a:xfrm>
-          <a:prstGeom prst="rect">
-            <a:avLst/>
-          </a:prstGeom>
-          <a:noFill/>
-          <a:ln/>
-        </p:spPr>
-        <p:txBody>
-          <a:bodyPr wrap="square" lIns="0" tIns="0" rIns="0" bIns="0" rtlCol="0" anchor="t"/>
-          <a:lstStyle/>
-          <a:p>
-            <a:pPr rtl="1" algn="r" indent="0" marL="0">
-              <a:lnSpc>
-                <a:spcPct val="116000"/>
-              </a:lnSpc>
-              <a:buNone/>
-            </a:pPr>
-            <a:r>
-              <a:rPr lang="he-IL" altLang="en-US" sz="1100" dirty="0">
-                <a:solidFill>
-                  <a:srgbClr val="F4F7FB"/>
-                </a:solidFill>
-                <a:latin typeface="Calibri" pitchFamily="34" charset="0"/>
-                <a:ea typeface="Calibri" pitchFamily="34" charset="-122"/>
-                <a:cs typeface="Calibri" pitchFamily="34" charset="-120"/>
-              </a:rPr>
-              <a:t>‫האפליקציות מצביעות היום לנתיב ב-‪ECS‬. מעבר ל-‪S3‬ מחייב פיתוח בצד היישום, לא רק העברת דאטה.‬</a:t>
-            </a:r>
-            <a:endParaRPr lang="he-IL" sz="1100" dirty="0"/>
-          </a:p>
-        </p:txBody>
-      </p:sp>
-      <p:sp>
-        <p:nvSpPr>
-          <p:cNvPr id="21" name="Shape 19"/>
-          <p:cNvSpPr/>
-          <p:nvPr/>
-        </p:nvSpPr>
-        <p:spPr>
-          <a:xfrm>
-            <a:off x="1081735" y="2999232"/>
-            <a:ext cx="2734056" cy="9144"/>
+          <p:cNvPr id="25" name="Shape 23"/>
+          <p:cNvSpPr/>
+          <p:nvPr/>
+        </p:nvSpPr>
+        <p:spPr>
+          <a:xfrm>
+            <a:off x="1081735" y="2962656"/>
+            <a:ext cx="2679192" cy="9144"/>
           </a:xfrm>
           <a:prstGeom prst="rect">
             <a:avLst/>
@@ -10241,14 +10379,14 @@
       </p:sp>
       <p:sp>
         <p:nvSpPr>
-          <p:cNvPr id="22" name="Text 20"/>
-          <p:cNvSpPr/>
-          <p:nvPr/>
-        </p:nvSpPr>
-        <p:spPr>
-          <a:xfrm>
-            <a:off x="1081735" y="3063240"/>
-            <a:ext cx="2734056" cy="658368"/>
+          <p:cNvPr id="26" name="Text 24"/>
+          <p:cNvSpPr/>
+          <p:nvPr/>
+        </p:nvSpPr>
+        <p:spPr>
+          <a:xfrm>
+            <a:off x="1081735" y="3035808"/>
+            <a:ext cx="2679192" cy="658368"/>
           </a:xfrm>
           <a:prstGeom prst="rect">
             <a:avLst/>
@@ -10262,12 +10400,12 @@
           <a:p>
             <a:pPr rtl="1" algn="r" indent="0" marL="0">
               <a:lnSpc>
-                <a:spcPct val="116000"/>
-              </a:lnSpc>
-              <a:buNone/>
-            </a:pPr>
-            <a:r>
-              <a:rPr lang="he-IL" altLang="en-US" sz="1050" dirty="0">
+                <a:spcPct val="120000"/>
+              </a:lnSpc>
+              <a:buNone/>
+            </a:pPr>
+            <a:r>
+              <a:rPr lang="he-IL" altLang="en-US" sz="1150" dirty="0">
                 <a:solidFill>
                   <a:srgbClr val="91A0B7"/>
                 </a:solidFill>
@@ -10275,30 +10413,30 @@
                 <a:ea typeface="Calibri" pitchFamily="34" charset="-122"/>
                 <a:cs typeface="Calibri" pitchFamily="34" charset="-120"/>
               </a:rPr>
-              <a:t>‫מיטיגציה: אפיון מול צוותי הדימות ו-‪Verint‬, הערכת מאמץ פיתוח, ותקופת ביניים שבה שתי הכתובות פעילות במקביל.‬</a:t>
-            </a:r>
-            <a:endParaRPr lang="he-IL" sz="1050" dirty="0"/>
-          </a:p>
-        </p:txBody>
-      </p:sp>
-      <p:sp>
-        <p:nvSpPr>
-          <p:cNvPr id="23" name="Shape 21"/>
-          <p:cNvSpPr/>
-          <p:nvPr/>
-        </p:nvSpPr>
-        <p:spPr>
-          <a:xfrm>
-            <a:off x="8122615" y="4023360"/>
-            <a:ext cx="3246120" cy="1773936"/>
+              <a:t>‫מיטיגציה: אפיון מול צוותי הדימות ו-‪Verint‬, הערכת מאמץ פיתוח, ותקופת ביניים ששתי הכתובות פעילות בה.‬</a:t>
+            </a:r>
+            <a:endParaRPr lang="he-IL" sz="1150" dirty="0"/>
+          </a:p>
+        </p:txBody>
+      </p:sp>
+      <p:sp>
+        <p:nvSpPr>
+          <p:cNvPr id="27" name="Shape 25"/>
+          <p:cNvSpPr/>
+          <p:nvPr/>
+        </p:nvSpPr>
+        <p:spPr>
+          <a:xfrm>
+            <a:off x="8122615" y="3986784"/>
+            <a:ext cx="3246120" cy="1810512"/>
           </a:xfrm>
           <a:prstGeom prst="roundRect">
             <a:avLst>
-              <a:gd name="adj" fmla="val 2577"/>
+              <a:gd name="adj" fmla="val 2525"/>
             </a:avLst>
           </a:prstGeom>
           <a:solidFill>
-            <a:srgbClr val="182133"/>
+            <a:srgbClr val="141C2C"/>
           </a:solidFill>
           <a:ln w="12700">
             <a:solidFill>
@@ -10310,14 +10448,14 @@
       </p:sp>
       <p:sp>
         <p:nvSpPr>
-          <p:cNvPr id="24" name="Shape 22"/>
-          <p:cNvSpPr/>
-          <p:nvPr/>
-        </p:nvSpPr>
-        <p:spPr>
-          <a:xfrm>
-            <a:off x="10948111" y="4242816"/>
-            <a:ext cx="118872" cy="118872"/>
+          <p:cNvPr id="28" name="Shape 26"/>
+          <p:cNvSpPr/>
+          <p:nvPr/>
+        </p:nvSpPr>
+        <p:spPr>
+          <a:xfrm>
+            <a:off x="11318443" y="4133088"/>
+            <a:ext cx="50292" cy="1517904"/>
           </a:xfrm>
           <a:prstGeom prst="rect">
             <a:avLst/>
@@ -10335,14 +10473,14 @@
       </p:sp>
       <p:sp>
         <p:nvSpPr>
-          <p:cNvPr id="25" name="Text 23"/>
-          <p:cNvSpPr/>
-          <p:nvPr/>
-        </p:nvSpPr>
-        <p:spPr>
-          <a:xfrm>
-            <a:off x="8378647" y="4169664"/>
-            <a:ext cx="2478024" cy="256032"/>
+          <p:cNvPr id="29" name="Text 27"/>
+          <p:cNvSpPr/>
+          <p:nvPr/>
+        </p:nvSpPr>
+        <p:spPr>
+          <a:xfrm>
+            <a:off x="9421063" y="4114800"/>
+            <a:ext cx="1618488" cy="310896"/>
           </a:xfrm>
           <a:prstGeom prst="rect">
             <a:avLst/>
@@ -10361,7 +10499,7 @@
               <a:buNone/>
             </a:pPr>
             <a:r>
-              <a:rPr lang="he-IL" altLang="en-US" sz="1250" b="1" dirty="0">
+              <a:rPr lang="he-IL" altLang="en-US" sz="1400" b="1" dirty="0">
                 <a:solidFill>
                   <a:srgbClr val="FF9F43"/>
                 </a:solidFill>
@@ -10369,7 +10507,49 @@
                 <a:ea typeface="Calibri" pitchFamily="34" charset="-122"/>
                 <a:cs typeface="Calibri" pitchFamily="34" charset="-120"/>
               </a:rPr>
-              <a:t>‫מיליוני קבצים קטנים‬</a:t>
+              <a:t>‫מיליוני קבצים‬</a:t>
+            </a:r>
+            <a:endParaRPr lang="he-IL" sz="1400" dirty="0"/>
+          </a:p>
+        </p:txBody>
+      </p:sp>
+      <p:sp>
+        <p:nvSpPr>
+          <p:cNvPr id="30" name="Text 28"/>
+          <p:cNvSpPr/>
+          <p:nvPr/>
+        </p:nvSpPr>
+        <p:spPr>
+          <a:xfrm>
+            <a:off x="8378647" y="4480560"/>
+            <a:ext cx="2679192" cy="457200"/>
+          </a:xfrm>
+          <a:prstGeom prst="rect">
+            <a:avLst/>
+          </a:prstGeom>
+          <a:noFill/>
+          <a:ln/>
+        </p:spPr>
+        <p:txBody>
+          <a:bodyPr wrap="square" lIns="0" tIns="0" rIns="0" bIns="0" rtlCol="0" anchor="t"/>
+          <a:lstStyle/>
+          <a:p>
+            <a:pPr rtl="1" algn="r" indent="0" marL="0">
+              <a:lnSpc>
+                <a:spcPct val="120000"/>
+              </a:lnSpc>
+              <a:buNone/>
+            </a:pPr>
+            <a:r>
+              <a:rPr lang="he-IL" altLang="en-US" sz="1250" dirty="0">
+                <a:solidFill>
+                  <a:srgbClr val="F4F7FB"/>
+                </a:solidFill>
+                <a:latin typeface="Calibri" pitchFamily="34" charset="0"/>
+                <a:ea typeface="Calibri" pitchFamily="34" charset="-122"/>
+                <a:cs typeface="Calibri" pitchFamily="34" charset="-120"/>
+              </a:rPr>
+              <a:t>‫מיליוני קבצים קטנים. שמות ומבנה התיקיות ב-‪S3‬ שונים, ואין מיפוי אחד-לאחד.‬</a:t>
             </a:r>
             <a:endParaRPr lang="he-IL" sz="1250" dirty="0"/>
           </a:p>
@@ -10377,56 +10557,14 @@
       </p:sp>
       <p:sp>
         <p:nvSpPr>
-          <p:cNvPr id="26" name="Text 24"/>
-          <p:cNvSpPr/>
-          <p:nvPr/>
-        </p:nvSpPr>
-        <p:spPr>
-          <a:xfrm>
-            <a:off x="8378647" y="4462272"/>
-            <a:ext cx="2734056" cy="512064"/>
-          </a:xfrm>
-          <a:prstGeom prst="rect">
-            <a:avLst/>
-          </a:prstGeom>
-          <a:noFill/>
-          <a:ln/>
-        </p:spPr>
-        <p:txBody>
-          <a:bodyPr wrap="square" lIns="0" tIns="0" rIns="0" bIns="0" rtlCol="0" anchor="t"/>
-          <a:lstStyle/>
-          <a:p>
-            <a:pPr rtl="1" algn="r" indent="0" marL="0">
-              <a:lnSpc>
-                <a:spcPct val="116000"/>
-              </a:lnSpc>
-              <a:buNone/>
-            </a:pPr>
-            <a:r>
-              <a:rPr lang="he-IL" altLang="en-US" sz="1100" dirty="0">
-                <a:solidFill>
-                  <a:srgbClr val="F4F7FB"/>
-                </a:solidFill>
-                <a:latin typeface="Calibri" pitchFamily="34" charset="0"/>
-                <a:ea typeface="Calibri" pitchFamily="34" charset="-122"/>
-                <a:cs typeface="Calibri" pitchFamily="34" charset="-120"/>
-              </a:rPr>
-              <a:t>‫הקורפוס הוא מיליוני קבצים קטנים; שמות ומבנה התיקיות ב-‪S3‬ שונים, ואין מיפוי אחד-לאחד.‬</a:t>
-            </a:r>
-            <a:endParaRPr lang="he-IL" sz="1100" dirty="0"/>
-          </a:p>
-        </p:txBody>
-      </p:sp>
-      <p:sp>
-        <p:nvSpPr>
-          <p:cNvPr id="27" name="Shape 25"/>
-          <p:cNvSpPr/>
-          <p:nvPr/>
-        </p:nvSpPr>
-        <p:spPr>
-          <a:xfrm>
-            <a:off x="8378647" y="5010912"/>
-            <a:ext cx="2734056" cy="9144"/>
+          <p:cNvPr id="31" name="Shape 29"/>
+          <p:cNvSpPr/>
+          <p:nvPr/>
+        </p:nvSpPr>
+        <p:spPr>
+          <a:xfrm>
+            <a:off x="8378647" y="4974336"/>
+            <a:ext cx="2679192" cy="9144"/>
           </a:xfrm>
           <a:prstGeom prst="rect">
             <a:avLst/>
@@ -10444,14 +10582,14 @@
       </p:sp>
       <p:sp>
         <p:nvSpPr>
-          <p:cNvPr id="28" name="Text 26"/>
-          <p:cNvSpPr/>
-          <p:nvPr/>
-        </p:nvSpPr>
-        <p:spPr>
-          <a:xfrm>
-            <a:off x="8378647" y="5074920"/>
-            <a:ext cx="2734056" cy="658368"/>
+          <p:cNvPr id="32" name="Text 30"/>
+          <p:cNvSpPr/>
+          <p:nvPr/>
+        </p:nvSpPr>
+        <p:spPr>
+          <a:xfrm>
+            <a:off x="8378647" y="5047488"/>
+            <a:ext cx="2679192" cy="658368"/>
           </a:xfrm>
           <a:prstGeom prst="rect">
             <a:avLst/>
@@ -10465,12 +10603,12 @@
           <a:p>
             <a:pPr rtl="1" algn="r" indent="0" marL="0">
               <a:lnSpc>
-                <a:spcPct val="116000"/>
-              </a:lnSpc>
-              <a:buNone/>
-            </a:pPr>
-            <a:r>
-              <a:rPr lang="he-IL" altLang="en-US" sz="1050" dirty="0">
+                <a:spcPct val="120000"/>
+              </a:lnSpc>
+              <a:buNone/>
+            </a:pPr>
+            <a:r>
+              <a:rPr lang="he-IL" altLang="en-US" sz="1150" dirty="0">
                 <a:solidFill>
                   <a:srgbClr val="91A0B7"/>
                 </a:solidFill>
@@ -10480,28 +10618,28 @@
               </a:rPr>
               <a:t>‫מיטיגציה: מיפוי שמות ומבנה מוסכם מראש, ואימות של צוותי האפליקציה שכל מסמך נגיש בשמו החדש. נדרש זמן צוות ייעודי.‬</a:t>
             </a:r>
-            <a:endParaRPr lang="he-IL" sz="1050" dirty="0"/>
-          </a:p>
-        </p:txBody>
-      </p:sp>
-      <p:sp>
-        <p:nvSpPr>
-          <p:cNvPr id="29" name="Shape 27"/>
-          <p:cNvSpPr/>
-          <p:nvPr/>
-        </p:nvSpPr>
-        <p:spPr>
-          <a:xfrm>
-            <a:off x="4474159" y="4023360"/>
-            <a:ext cx="3246120" cy="1773936"/>
+            <a:endParaRPr lang="he-IL" sz="1150" dirty="0"/>
+          </a:p>
+        </p:txBody>
+      </p:sp>
+      <p:sp>
+        <p:nvSpPr>
+          <p:cNvPr id="33" name="Shape 31"/>
+          <p:cNvSpPr/>
+          <p:nvPr/>
+        </p:nvSpPr>
+        <p:spPr>
+          <a:xfrm>
+            <a:off x="4474159" y="3986784"/>
+            <a:ext cx="3246120" cy="1810512"/>
           </a:xfrm>
           <a:prstGeom prst="roundRect">
             <a:avLst>
-              <a:gd name="adj" fmla="val 2577"/>
+              <a:gd name="adj" fmla="val 2525"/>
             </a:avLst>
           </a:prstGeom>
           <a:solidFill>
-            <a:srgbClr val="182133"/>
+            <a:srgbClr val="141C2C"/>
           </a:solidFill>
           <a:ln w="12700">
             <a:solidFill>
@@ -10513,14 +10651,14 @@
       </p:sp>
       <p:sp>
         <p:nvSpPr>
-          <p:cNvPr id="30" name="Shape 28"/>
-          <p:cNvSpPr/>
-          <p:nvPr/>
-        </p:nvSpPr>
-        <p:spPr>
-          <a:xfrm>
-            <a:off x="7299655" y="4242816"/>
-            <a:ext cx="118872" cy="118872"/>
+          <p:cNvPr id="34" name="Shape 32"/>
+          <p:cNvSpPr/>
+          <p:nvPr/>
+        </p:nvSpPr>
+        <p:spPr>
+          <a:xfrm>
+            <a:off x="7669987" y="4133088"/>
+            <a:ext cx="50292" cy="1517904"/>
           </a:xfrm>
           <a:prstGeom prst="rect">
             <a:avLst/>
@@ -10538,14 +10676,14 @@
       </p:sp>
       <p:sp>
         <p:nvSpPr>
-          <p:cNvPr id="31" name="Text 29"/>
-          <p:cNvSpPr/>
-          <p:nvPr/>
-        </p:nvSpPr>
-        <p:spPr>
-          <a:xfrm>
-            <a:off x="4730191" y="4169664"/>
-            <a:ext cx="2478024" cy="256032"/>
+          <p:cNvPr id="35" name="Text 33"/>
+          <p:cNvSpPr/>
+          <p:nvPr/>
+        </p:nvSpPr>
+        <p:spPr>
+          <a:xfrm>
+            <a:off x="5772607" y="4114800"/>
+            <a:ext cx="1618488" cy="310896"/>
           </a:xfrm>
           <a:prstGeom prst="rect">
             <a:avLst/>
@@ -10564,7 +10702,7 @@
               <a:buNone/>
             </a:pPr>
             <a:r>
-              <a:rPr lang="he-IL" altLang="en-US" sz="1250" b="1" dirty="0">
+              <a:rPr lang="he-IL" altLang="en-US" sz="1400" b="1" dirty="0">
                 <a:solidFill>
                   <a:srgbClr val="FF9F43"/>
                 </a:solidFill>
@@ -10572,7 +10710,49 @@
                 <a:ea typeface="Calibri" pitchFamily="34" charset="-122"/>
                 <a:cs typeface="Calibri" pitchFamily="34" charset="-120"/>
               </a:rPr>
-              <a:t>‫ביצועים · זמני אחזור‬</a:t>
+              <a:t>‫ביצועים · לטנציה‬</a:t>
+            </a:r>
+            <a:endParaRPr lang="he-IL" sz="1400" dirty="0"/>
+          </a:p>
+        </p:txBody>
+      </p:sp>
+      <p:sp>
+        <p:nvSpPr>
+          <p:cNvPr id="36" name="Text 34"/>
+          <p:cNvSpPr/>
+          <p:nvPr/>
+        </p:nvSpPr>
+        <p:spPr>
+          <a:xfrm>
+            <a:off x="4730191" y="4480560"/>
+            <a:ext cx="2679192" cy="457200"/>
+          </a:xfrm>
+          <a:prstGeom prst="rect">
+            <a:avLst/>
+          </a:prstGeom>
+          <a:noFill/>
+          <a:ln/>
+        </p:spPr>
+        <p:txBody>
+          <a:bodyPr wrap="square" lIns="0" tIns="0" rIns="0" bIns="0" rtlCol="0" anchor="t"/>
+          <a:lstStyle/>
+          <a:p>
+            <a:pPr rtl="1" algn="r" indent="0" marL="0">
+              <a:lnSpc>
+                <a:spcPct val="120000"/>
+              </a:lnSpc>
+              <a:buNone/>
+            </a:pPr>
+            <a:r>
+              <a:rPr lang="he-IL" altLang="en-US" sz="1250" dirty="0">
+                <a:solidFill>
+                  <a:srgbClr val="F4F7FB"/>
+                </a:solidFill>
+                <a:latin typeface="Calibri" pitchFamily="34" charset="0"/>
+                <a:ea typeface="Calibri" pitchFamily="34" charset="-122"/>
+                <a:cs typeface="Calibri" pitchFamily="34" charset="-120"/>
+              </a:rPr>
+              <a:t>‫אחזור מהענן איטי מאחזור מ-‪ECS‬ מקומי, ועלול לפגוע בשירות למשתמש הקצה.‬</a:t>
             </a:r>
             <a:endParaRPr lang="he-IL" sz="1250" dirty="0"/>
           </a:p>
@@ -10580,56 +10760,14 @@
       </p:sp>
       <p:sp>
         <p:nvSpPr>
-          <p:cNvPr id="32" name="Text 30"/>
-          <p:cNvSpPr/>
-          <p:nvPr/>
-        </p:nvSpPr>
-        <p:spPr>
-          <a:xfrm>
-            <a:off x="4730191" y="4462272"/>
-            <a:ext cx="2734056" cy="512064"/>
-          </a:xfrm>
-          <a:prstGeom prst="rect">
-            <a:avLst/>
-          </a:prstGeom>
-          <a:noFill/>
-          <a:ln/>
-        </p:spPr>
-        <p:txBody>
-          <a:bodyPr wrap="square" lIns="0" tIns="0" rIns="0" bIns="0" rtlCol="0" anchor="t"/>
-          <a:lstStyle/>
-          <a:p>
-            <a:pPr rtl="1" algn="r" indent="0" marL="0">
-              <a:lnSpc>
-                <a:spcPct val="116000"/>
-              </a:lnSpc>
-              <a:buNone/>
-            </a:pPr>
-            <a:r>
-              <a:rPr lang="he-IL" altLang="en-US" sz="1100" dirty="0">
-                <a:solidFill>
-                  <a:srgbClr val="F4F7FB"/>
-                </a:solidFill>
-                <a:latin typeface="Calibri" pitchFamily="34" charset="0"/>
-                <a:ea typeface="Calibri" pitchFamily="34" charset="-122"/>
-                <a:cs typeface="Calibri" pitchFamily="34" charset="-120"/>
-              </a:rPr>
-              <a:t>‫אחזור מהענן איטי מאחזור מ-‪ECS‬ מקומי. לטנציה בשליפה עלולה לפגוע בשירות למשתמש הקצה.‬</a:t>
-            </a:r>
-            <a:endParaRPr lang="he-IL" sz="1100" dirty="0"/>
-          </a:p>
-        </p:txBody>
-      </p:sp>
-      <p:sp>
-        <p:nvSpPr>
-          <p:cNvPr id="33" name="Shape 31"/>
-          <p:cNvSpPr/>
-          <p:nvPr/>
-        </p:nvSpPr>
-        <p:spPr>
-          <a:xfrm>
-            <a:off x="4730191" y="5010912"/>
-            <a:ext cx="2734056" cy="9144"/>
+          <p:cNvPr id="37" name="Shape 35"/>
+          <p:cNvSpPr/>
+          <p:nvPr/>
+        </p:nvSpPr>
+        <p:spPr>
+          <a:xfrm>
+            <a:off x="4730191" y="4974336"/>
+            <a:ext cx="2679192" cy="9144"/>
           </a:xfrm>
           <a:prstGeom prst="rect">
             <a:avLst/>
@@ -10647,14 +10785,14 @@
       </p:sp>
       <p:sp>
         <p:nvSpPr>
-          <p:cNvPr id="34" name="Text 32"/>
-          <p:cNvSpPr/>
-          <p:nvPr/>
-        </p:nvSpPr>
-        <p:spPr>
-          <a:xfrm>
-            <a:off x="4730191" y="5074920"/>
-            <a:ext cx="2734056" cy="658368"/>
+          <p:cNvPr id="38" name="Text 36"/>
+          <p:cNvSpPr/>
+          <p:nvPr/>
+        </p:nvSpPr>
+        <p:spPr>
+          <a:xfrm>
+            <a:off x="4730191" y="5047488"/>
+            <a:ext cx="2679192" cy="658368"/>
           </a:xfrm>
           <a:prstGeom prst="rect">
             <a:avLst/>
@@ -10668,12 +10806,12 @@
           <a:p>
             <a:pPr rtl="1" algn="r" indent="0" marL="0">
               <a:lnSpc>
-                <a:spcPct val="116000"/>
-              </a:lnSpc>
-              <a:buNone/>
-            </a:pPr>
-            <a:r>
-              <a:rPr lang="he-IL" altLang="en-US" sz="1050" dirty="0">
+                <a:spcPct val="120000"/>
+              </a:lnSpc>
+              <a:buNone/>
+            </a:pPr>
+            <a:r>
+              <a:rPr lang="he-IL" altLang="en-US" sz="1150" dirty="0">
                 <a:solidFill>
                   <a:srgbClr val="91A0B7"/>
                 </a:solidFill>
@@ -10681,30 +10819,30 @@
                 <a:ea typeface="Calibri" pitchFamily="34" charset="-122"/>
                 <a:cs typeface="Calibri" pitchFamily="34" charset="-120"/>
               </a:rPr>
-              <a:t>‫מיטיגציה: מדידת זמני אחזור מול ה-‪SLA‬ הקיים לפני התחייבות, חיבור ‪Direct Connect‬ ולא אינטרנט, וקאשינג מקומי לפריטים חמים.‬</a:t>
-            </a:r>
-            <a:endParaRPr lang="he-IL" sz="1050" dirty="0"/>
-          </a:p>
-        </p:txBody>
-      </p:sp>
-      <p:sp>
-        <p:nvSpPr>
-          <p:cNvPr id="35" name="Shape 33"/>
-          <p:cNvSpPr/>
-          <p:nvPr/>
-        </p:nvSpPr>
-        <p:spPr>
-          <a:xfrm>
-            <a:off x="825703" y="4023360"/>
-            <a:ext cx="3246120" cy="1773936"/>
+              <a:t>‫מיטיגציה: מדידת זמני אחזור מול ה-‪SLA‬ הקיים לפני התחייבות, חיבור ‪Direct Connect‬ ולא אינטרנט, וקאשינג לפריטים חמים.‬</a:t>
+            </a:r>
+            <a:endParaRPr lang="he-IL" sz="1150" dirty="0"/>
+          </a:p>
+        </p:txBody>
+      </p:sp>
+      <p:sp>
+        <p:nvSpPr>
+          <p:cNvPr id="39" name="Shape 37"/>
+          <p:cNvSpPr/>
+          <p:nvPr/>
+        </p:nvSpPr>
+        <p:spPr>
+          <a:xfrm>
+            <a:off x="825703" y="3986784"/>
+            <a:ext cx="3246120" cy="1810512"/>
           </a:xfrm>
           <a:prstGeom prst="roundRect">
             <a:avLst>
-              <a:gd name="adj" fmla="val 2577"/>
+              <a:gd name="adj" fmla="val 2525"/>
             </a:avLst>
           </a:prstGeom>
           <a:solidFill>
-            <a:srgbClr val="182133"/>
+            <a:srgbClr val="141C2C"/>
           </a:solidFill>
           <a:ln w="12700">
             <a:solidFill>
@@ -10716,14 +10854,14 @@
       </p:sp>
       <p:sp>
         <p:nvSpPr>
-          <p:cNvPr id="36" name="Shape 34"/>
-          <p:cNvSpPr/>
-          <p:nvPr/>
-        </p:nvSpPr>
-        <p:spPr>
-          <a:xfrm>
-            <a:off x="3651199" y="4242816"/>
-            <a:ext cx="118872" cy="118872"/>
+          <p:cNvPr id="40" name="Shape 38"/>
+          <p:cNvSpPr/>
+          <p:nvPr/>
+        </p:nvSpPr>
+        <p:spPr>
+          <a:xfrm>
+            <a:off x="4021531" y="4133088"/>
+            <a:ext cx="50292" cy="1517904"/>
           </a:xfrm>
           <a:prstGeom prst="rect">
             <a:avLst/>
@@ -10741,14 +10879,14 @@
       </p:sp>
       <p:sp>
         <p:nvSpPr>
-          <p:cNvPr id="37" name="Text 35"/>
-          <p:cNvSpPr/>
-          <p:nvPr/>
-        </p:nvSpPr>
-        <p:spPr>
-          <a:xfrm>
-            <a:off x="1081735" y="4169664"/>
-            <a:ext cx="2478024" cy="256032"/>
+          <p:cNvPr id="41" name="Text 39"/>
+          <p:cNvSpPr/>
+          <p:nvPr/>
+        </p:nvSpPr>
+        <p:spPr>
+          <a:xfrm>
+            <a:off x="2124151" y="4114800"/>
+            <a:ext cx="1618488" cy="310896"/>
           </a:xfrm>
           <a:prstGeom prst="rect">
             <a:avLst/>
@@ -10767,7 +10905,7 @@
               <a:buNone/>
             </a:pPr>
             <a:r>
-              <a:rPr lang="he-IL" altLang="en-US" sz="1250" b="1" dirty="0">
+              <a:rPr lang="he-IL" altLang="en-US" sz="1400" b="1" dirty="0">
                 <a:solidFill>
                   <a:srgbClr val="FF9F43"/>
                 </a:solidFill>
@@ -10777,62 +10915,62 @@
               </a:rPr>
               <a:t>‫כלי ההעברה · ‪POC‬‬</a:t>
             </a:r>
+            <a:endParaRPr lang="he-IL" sz="1400" dirty="0"/>
+          </a:p>
+        </p:txBody>
+      </p:sp>
+      <p:sp>
+        <p:nvSpPr>
+          <p:cNvPr id="42" name="Text 40"/>
+          <p:cNvSpPr/>
+          <p:nvPr/>
+        </p:nvSpPr>
+        <p:spPr>
+          <a:xfrm>
+            <a:off x="1081735" y="4480560"/>
+            <a:ext cx="2679192" cy="457200"/>
+          </a:xfrm>
+          <a:prstGeom prst="rect">
+            <a:avLst/>
+          </a:prstGeom>
+          <a:noFill/>
+          <a:ln/>
+        </p:spPr>
+        <p:txBody>
+          <a:bodyPr wrap="square" lIns="0" tIns="0" rIns="0" bIns="0" rtlCol="0" anchor="t"/>
+          <a:lstStyle/>
+          <a:p>
+            <a:pPr rtl="1" algn="r" indent="0" marL="0">
+              <a:lnSpc>
+                <a:spcPct val="120000"/>
+              </a:lnSpc>
+              <a:buNone/>
+            </a:pPr>
+            <a:r>
+              <a:rPr lang="he-IL" altLang="en-US" sz="1250" dirty="0">
+                <a:solidFill>
+                  <a:srgbClr val="F4F7FB"/>
+                </a:solidFill>
+                <a:latin typeface="Calibri" pitchFamily="34" charset="0"/>
+                <a:ea typeface="Calibri" pitchFamily="34" charset="-122"/>
+                <a:cs typeface="Calibri" pitchFamily="34" charset="-120"/>
+              </a:rPr>
+              <a:t>‫אין כלי העתקה מוכח בסדר גודל כזה; קבצים עלולים להיכשל בלי שהדבר יתגלה.‬</a:t>
+            </a:r>
             <a:endParaRPr lang="he-IL" sz="1250" dirty="0"/>
           </a:p>
         </p:txBody>
       </p:sp>
       <p:sp>
         <p:nvSpPr>
-          <p:cNvPr id="38" name="Text 36"/>
-          <p:cNvSpPr/>
-          <p:nvPr/>
-        </p:nvSpPr>
-        <p:spPr>
-          <a:xfrm>
-            <a:off x="1081735" y="4462272"/>
-            <a:ext cx="2734056" cy="512064"/>
-          </a:xfrm>
-          <a:prstGeom prst="rect">
-            <a:avLst/>
-          </a:prstGeom>
-          <a:noFill/>
-          <a:ln/>
-        </p:spPr>
-        <p:txBody>
-          <a:bodyPr wrap="square" lIns="0" tIns="0" rIns="0" bIns="0" rtlCol="0" anchor="t"/>
-          <a:lstStyle/>
-          <a:p>
-            <a:pPr rtl="1" algn="r" indent="0" marL="0">
-              <a:lnSpc>
-                <a:spcPct val="116000"/>
-              </a:lnSpc>
-              <a:buNone/>
-            </a:pPr>
-            <a:r>
-              <a:rPr lang="he-IL" altLang="en-US" sz="1100" dirty="0">
-                <a:solidFill>
-                  <a:srgbClr val="F4F7FB"/>
-                </a:solidFill>
-                <a:latin typeface="Calibri" pitchFamily="34" charset="0"/>
-                <a:ea typeface="Calibri" pitchFamily="34" charset="-122"/>
-                <a:cs typeface="Calibri" pitchFamily="34" charset="-120"/>
-              </a:rPr>
-              <a:t>‫אין כלי העתקה מוכח בסדר גודל כזה; קבצים עלולים להיכשל בהעברה בלי שהדבר יתגלה.‬</a:t>
-            </a:r>
-            <a:endParaRPr lang="he-IL" sz="1100" dirty="0"/>
-          </a:p>
-        </p:txBody>
-      </p:sp>
-      <p:sp>
-        <p:nvSpPr>
-          <p:cNvPr id="39" name="Shape 37"/>
-          <p:cNvSpPr/>
-          <p:nvPr/>
-        </p:nvSpPr>
-        <p:spPr>
-          <a:xfrm>
-            <a:off x="1081735" y="5010912"/>
-            <a:ext cx="2734056" cy="9144"/>
+          <p:cNvPr id="43" name="Shape 41"/>
+          <p:cNvSpPr/>
+          <p:nvPr/>
+        </p:nvSpPr>
+        <p:spPr>
+          <a:xfrm>
+            <a:off x="1081735" y="4974336"/>
+            <a:ext cx="2679192" cy="9144"/>
           </a:xfrm>
           <a:prstGeom prst="rect">
             <a:avLst/>
@@ -10850,14 +10988,14 @@
       </p:sp>
       <p:sp>
         <p:nvSpPr>
-          <p:cNvPr id="40" name="Text 38"/>
-          <p:cNvSpPr/>
-          <p:nvPr/>
-        </p:nvSpPr>
-        <p:spPr>
-          <a:xfrm>
-            <a:off x="1081735" y="5074920"/>
-            <a:ext cx="2734056" cy="658368"/>
+          <p:cNvPr id="44" name="Text 42"/>
+          <p:cNvSpPr/>
+          <p:nvPr/>
+        </p:nvSpPr>
+        <p:spPr>
+          <a:xfrm>
+            <a:off x="1081735" y="5047488"/>
+            <a:ext cx="2679192" cy="658368"/>
           </a:xfrm>
           <a:prstGeom prst="rect">
             <a:avLst/>
@@ -10871,12 +11009,12 @@
           <a:p>
             <a:pPr rtl="1" algn="r" indent="0" marL="0">
               <a:lnSpc>
-                <a:spcPct val="116000"/>
-              </a:lnSpc>
-              <a:buNone/>
-            </a:pPr>
-            <a:r>
-              <a:rPr lang="he-IL" altLang="en-US" sz="1050" dirty="0">
+                <a:spcPct val="120000"/>
+              </a:lnSpc>
+              <a:buNone/>
+            </a:pPr>
+            <a:r>
+              <a:rPr lang="he-IL" altLang="en-US" sz="1150" dirty="0">
                 <a:solidFill>
                   <a:srgbClr val="91A0B7"/>
                 </a:solidFill>
@@ -10884,15 +11022,15 @@
                 <a:ea typeface="Calibri" pitchFamily="34" charset="-122"/>
                 <a:cs typeface="Calibri" pitchFamily="34" charset="-120"/>
               </a:rPr>
-              <a:t>‫מיטיגציה: ‪POC‬ קצר על ‪1–2 TB‬ עם ‪AWS DataSync‬: ולידציה מובנית, דוח חריגים לכל ריצה, ומחיקה מ-‪ECS‬ רק לאחר אימות מלא.‬</a:t>
-            </a:r>
-            <a:endParaRPr lang="he-IL" sz="1050" dirty="0"/>
-          </a:p>
-        </p:txBody>
-      </p:sp>
-      <p:sp>
-        <p:nvSpPr>
-          <p:cNvPr id="41" name="Shape 39"/>
+              <a:t>‫מיטיגציה: ‪POC‬ קצר על ‪1–2 TB‬ עם ‪AWS DataSync‬: ולידציה מובנית, דוח חריגים לכל ריצה, ומחיקה מ-‪ECS‬ רק לאחר אימות.‬</a:t>
+            </a:r>
+            <a:endParaRPr lang="he-IL" sz="1150" dirty="0"/>
+          </a:p>
+        </p:txBody>
+      </p:sp>
+      <p:sp>
+        <p:nvSpPr>
+          <p:cNvPr id="45" name="Shape 43"/>
           <p:cNvSpPr/>
           <p:nvPr/>
         </p:nvSpPr>
@@ -10917,7 +11055,7 @@
       </p:sp>
       <p:sp>
         <p:nvSpPr>
-          <p:cNvPr id="42" name="Shape 40"/>
+          <p:cNvPr id="46" name="Shape 44"/>
           <p:cNvSpPr/>
           <p:nvPr/>
         </p:nvSpPr>
@@ -10942,7 +11080,7 @@
       </p:sp>
       <p:sp>
         <p:nvSpPr>
-          <p:cNvPr id="43" name="Text 41"/>
+          <p:cNvPr id="47" name="Text 45"/>
           <p:cNvSpPr/>
           <p:nvPr/>
         </p:nvSpPr>
@@ -10976,7 +11114,7 @@
                 <a:ea typeface="Calibri" pitchFamily="34" charset="-122"/>
                 <a:cs typeface="Calibri" pitchFamily="34" charset="-120"/>
               </a:rPr>
-              <a:t>‫שני הסיכונים באדום חוסמים התחלה: בלי אישור הלשכה המשפטית ובלי אישור ‪DPO‬ ורגולטור אין העתקה ראשונה. ארבעת הכתומים נסגרים ב-‪POC‬ ובאפיון מול צוותי האפליקציה.‬</a:t>
+              <a:t>‫שני הסיכונים המסומנים "חוסם התחלה" אינם ניתנים לעקיפה: בלי אישור הלשכה המשפטית ובלי אישור ‪DPO‬ ורגולטור אין העתקה ראשונה. ארבעת הנותרים נסגרים ב-‪POC‬ ובאפיון מול צוותי האפליקציה.‬</a:t>
             </a:r>
             <a:endParaRPr lang="he-IL" sz="1150" dirty="0"/>
           </a:p>

--- a/presentations/ecs-to-s3/Harel_ECS_to_S3_CIO.pptx
+++ b/presentations/ecs-to-s3/Harel_ECS_to_S3_CIO.pptx
@@ -15,9 +15,10 @@
     <p:sldId id="263" r:id="rId9"/>
     <p:sldId id="264" r:id="rId10"/>
     <p:sldId id="265" r:id="rId11"/>
+    <p:sldId id="266" r:id="rId12"/>
   </p:sldIdLst>
   <p:notesMasterIdLst>
-    <p:notesMasterId r:id="rId12"/>
+    <p:notesMasterId r:id="rId13"/>
   </p:notesMasterIdLst>
   <p:sldSz cx="12192000" cy="6858000"/>
   <p:notesSz cx="6858000" cy="12192000"/>
@@ -1977,6 +1978,94 @@
 </p:notes>
 </file>
 
+<file path=ppt/notesSlides/notesSlide11.xml><?xml version="1.0" encoding="utf-8"?>
+<p:notes xmlns:a="http://schemas.openxmlformats.org/drawingml/2006/main" xmlns:r="http://schemas.openxmlformats.org/officeDocument/2006/relationships" xmlns:p="http://schemas.openxmlformats.org/presentationml/2006/main">
+  <p:cSld>
+    <p:spTree>
+      <p:nvGrpSpPr>
+        <p:cNvPr id="1" name=""/>
+        <p:cNvGrpSpPr/>
+        <p:nvPr/>
+      </p:nvGrpSpPr>
+      <p:grpSpPr>
+        <a:xfrm>
+          <a:off x="0" y="0"/>
+          <a:ext cx="0" cy="0"/>
+          <a:chOff x="0" y="0"/>
+          <a:chExt cx="0" cy="0"/>
+        </a:xfrm>
+      </p:grpSpPr>
+      <p:sp>
+        <p:nvSpPr>
+          <p:cNvPr id="2" name="Slide Image Placeholder 1"/>
+          <p:cNvSpPr>
+            <a:spLocks noGrp="1" noRot="1" noChangeAspect="1"/>
+          </p:cNvSpPr>
+          <p:nvPr>
+            <p:ph type="sldImg"/>
+          </p:nvPr>
+        </p:nvSpPr>
+        <p:spPr/>
+      </p:sp>
+      <p:sp>
+        <p:nvSpPr>
+          <p:cNvPr id="3" name="Notes Placeholder 2"/>
+          <p:cNvSpPr>
+            <a:spLocks noGrp="1"/>
+          </p:cNvSpPr>
+          <p:nvPr>
+            <p:ph type="body" idx="1"/>
+          </p:nvPr>
+        </p:nvSpPr>
+        <p:spPr/>
+        <p:txBody>
+          <a:bodyPr/>
+          <a:lstStyle/>
+          <a:p>
+            <a:r>
+              <a:rPr lang="en-US" dirty="0"/>
+              <a:t/>
+            </a:r>
+            <a:endParaRPr lang="en-US" dirty="0"/>
+          </a:p>
+        </p:txBody>
+      </p:sp>
+      <p:sp>
+        <p:nvSpPr>
+          <p:cNvPr id="4" name="Slide Number Placeholder 3"/>
+          <p:cNvSpPr>
+            <a:spLocks noGrp="1"/>
+          </p:cNvSpPr>
+          <p:nvPr>
+            <p:ph type="sldNum" sz="quarter" idx="10"/>
+          </p:nvPr>
+        </p:nvSpPr>
+        <p:spPr/>
+        <p:txBody>
+          <a:bodyPr/>
+          <a:lstStyle/>
+          <a:p>
+            <a:fld id="{F7021451-1387-4CA6-816F-3879F97B5CBC}" type="slidenum">
+              <a:rPr lang="en-US"/>
+              <a:t>11</a:t>
+            </a:fld>
+            <a:endParaRPr lang="en-US"/>
+          </a:p>
+        </p:txBody>
+      </p:sp>
+    </p:spTree>
+    <p:extLst>
+      <p:ext uri="{BB962C8B-B14F-4D97-AF65-F5344CB8AC3E}">
+        <p14:creationId xmlns:p14="http://schemas.microsoft.com/office/powerpoint/2010/main" val="1024086991"/>
+      </p:ext>
+    </p:extLst>
+  </p:cSld>
+  <p:clrMapOvr>
+    <a:masterClrMapping/>
+  </p:clrMapOvr>
+</p:notes>
+</file>
+
 <file path=ppt/notesSlides/notesSlide2.xml><?xml version="1.0" encoding="utf-8"?>
 <p:notes xmlns:a="http://schemas.openxmlformats.org/drawingml/2006/main" xmlns:r="http://schemas.openxmlformats.org/officeDocument/2006/relationships" xmlns:p="http://schemas.openxmlformats.org/presentationml/2006/main">
   <p:cSld>
@@ -3373,6 +3462,1238 @@
                 <a:ea typeface="Calibri" pitchFamily="34" charset="-122"/>
                 <a:cs typeface="Calibri" pitchFamily="34" charset="-120"/>
               </a:rPr>
+              <a:t>‫ציר זמן‬</a:t>
+            </a:r>
+            <a:endParaRPr lang="he-IL" sz="1100" dirty="0"/>
+          </a:p>
+        </p:txBody>
+      </p:sp>
+      <p:sp>
+        <p:nvSpPr>
+          <p:cNvPr id="3" name="Text 1"/>
+          <p:cNvSpPr/>
+          <p:nvPr/>
+        </p:nvSpPr>
+        <p:spPr>
+          <a:xfrm>
+            <a:off x="822960" y="786384"/>
+            <a:ext cx="10545775" cy="841248"/>
+          </a:xfrm>
+          <a:prstGeom prst="rect">
+            <a:avLst/>
+          </a:prstGeom>
+          <a:noFill/>
+          <a:ln/>
+        </p:spPr>
+        <p:txBody>
+          <a:bodyPr wrap="square" lIns="0" tIns="0" rIns="0" bIns="0" rtlCol="0" anchor="t"/>
+          <a:lstStyle/>
+          <a:p>
+            <a:pPr rtl="1" algn="r" indent="0" marL="0">
+              <a:lnSpc>
+                <a:spcPct val="105000"/>
+              </a:lnSpc>
+              <a:buNone/>
+            </a:pPr>
+            <a:r>
+              <a:rPr lang="he-IL" altLang="en-US" sz="2700" b="1" dirty="0">
+                <a:solidFill>
+                  <a:srgbClr val="F4F7FB"/>
+                </a:solidFill>
+                <a:latin typeface="Calibri" pitchFamily="34" charset="0"/>
+                <a:ea typeface="Calibri" pitchFamily="34" charset="-122"/>
+                <a:cs typeface="Calibri" pitchFamily="34" charset="-120"/>
+              </a:rPr>
+              <a:t>‫שני מסלולים במקביל — והרכש נעול על אוקטובר‬</a:t>
+            </a:r>
+            <a:endParaRPr lang="he-IL" sz="2700" dirty="0"/>
+          </a:p>
+        </p:txBody>
+      </p:sp>
+      <p:sp>
+        <p:nvSpPr>
+          <p:cNvPr id="4" name="Shape 2"/>
+          <p:cNvSpPr/>
+          <p:nvPr/>
+        </p:nvSpPr>
+        <p:spPr>
+          <a:xfrm>
+            <a:off x="822960" y="1700784"/>
+            <a:ext cx="10545775" cy="10973"/>
+          </a:xfrm>
+          <a:prstGeom prst="rect">
+            <a:avLst/>
+          </a:prstGeom>
+          <a:solidFill>
+            <a:srgbClr val="23304A"/>
+          </a:solidFill>
+          <a:ln w="12700">
+            <a:solidFill>
+              <a:srgbClr val="23304A"/>
+            </a:solidFill>
+            <a:prstDash val="solid"/>
+          </a:ln>
+        </p:spPr>
+      </p:sp>
+      <p:sp>
+        <p:nvSpPr>
+          <p:cNvPr id="5" name="Shape 3"/>
+          <p:cNvSpPr/>
+          <p:nvPr/>
+        </p:nvSpPr>
+        <p:spPr>
+          <a:xfrm>
+            <a:off x="822960" y="2999232"/>
+            <a:ext cx="10545775" cy="27432"/>
+          </a:xfrm>
+          <a:prstGeom prst="rect">
+            <a:avLst/>
+          </a:prstGeom>
+          <a:solidFill>
+            <a:srgbClr val="23304A"/>
+          </a:solidFill>
+          <a:ln w="12700">
+            <a:solidFill>
+              <a:srgbClr val="23304A"/>
+            </a:solidFill>
+            <a:prstDash val="solid"/>
+          </a:ln>
+        </p:spPr>
+      </p:sp>
+      <p:sp>
+        <p:nvSpPr>
+          <p:cNvPr id="6" name="Text 4"/>
+          <p:cNvSpPr/>
+          <p:nvPr/>
+        </p:nvSpPr>
+        <p:spPr>
+          <a:xfrm>
+            <a:off x="9420515" y="2322576"/>
+            <a:ext cx="1948221" cy="274320"/>
+          </a:xfrm>
+          <a:prstGeom prst="rect">
+            <a:avLst/>
+          </a:prstGeom>
+          <a:noFill/>
+          <a:ln/>
+        </p:spPr>
+        <p:txBody>
+          <a:bodyPr wrap="square" lIns="0" tIns="0" rIns="0" bIns="0" rtlCol="0" anchor="ctr"/>
+          <a:lstStyle/>
+          <a:p>
+            <a:pPr rtl="1" algn="r" indent="0" marL="0">
+              <a:lnSpc>
+                <a:spcPct val="100000"/>
+              </a:lnSpc>
+              <a:buNone/>
+            </a:pPr>
+            <a:r>
+              <a:rPr lang="he-IL" altLang="en-US" sz="1300" b="1" dirty="0">
+                <a:solidFill>
+                  <a:srgbClr val="F4F7FB"/>
+                </a:solidFill>
+                <a:latin typeface="Calibri" pitchFamily="34" charset="0"/>
+                <a:ea typeface="Calibri" pitchFamily="34" charset="-122"/>
+                <a:cs typeface="Calibri" pitchFamily="34" charset="-120"/>
+              </a:rPr>
+              <a:t>‫אוגוסט ‪26‬‬</a:t>
+            </a:r>
+            <a:endParaRPr lang="he-IL" sz="1300" dirty="0"/>
+          </a:p>
+        </p:txBody>
+      </p:sp>
+      <p:sp>
+        <p:nvSpPr>
+          <p:cNvPr id="7" name="Shape 5"/>
+          <p:cNvSpPr/>
+          <p:nvPr/>
+        </p:nvSpPr>
+        <p:spPr>
+          <a:xfrm>
+            <a:off x="11204143" y="2935224"/>
+            <a:ext cx="155448" cy="155448"/>
+          </a:xfrm>
+          <a:prstGeom prst="rect">
+            <a:avLst/>
+          </a:prstGeom>
+          <a:solidFill>
+            <a:srgbClr val="3DD9EB"/>
+          </a:solidFill>
+          <a:ln w="12700">
+            <a:solidFill>
+              <a:srgbClr val="3DD9EB"/>
+            </a:solidFill>
+            <a:prstDash val="solid"/>
+          </a:ln>
+        </p:spPr>
+      </p:sp>
+      <p:sp>
+        <p:nvSpPr>
+          <p:cNvPr id="8" name="Shape 6"/>
+          <p:cNvSpPr/>
+          <p:nvPr/>
+        </p:nvSpPr>
+        <p:spPr>
+          <a:xfrm>
+            <a:off x="9420515" y="3273552"/>
+            <a:ext cx="1948221" cy="1225296"/>
+          </a:xfrm>
+          <a:prstGeom prst="roundRect">
+            <a:avLst>
+              <a:gd name="adj" fmla="val 4478"/>
+            </a:avLst>
+          </a:prstGeom>
+          <a:solidFill>
+            <a:srgbClr val="182133"/>
+          </a:solidFill>
+          <a:ln w="12700">
+            <a:solidFill>
+              <a:srgbClr val="23304A"/>
+            </a:solidFill>
+            <a:prstDash val="solid"/>
+          </a:ln>
+        </p:spPr>
+      </p:sp>
+      <p:sp>
+        <p:nvSpPr>
+          <p:cNvPr id="9" name="Text 7"/>
+          <p:cNvSpPr/>
+          <p:nvPr/>
+        </p:nvSpPr>
+        <p:spPr>
+          <a:xfrm>
+            <a:off x="9621683" y="3401568"/>
+            <a:ext cx="1545885" cy="987552"/>
+          </a:xfrm>
+          <a:prstGeom prst="rect">
+            <a:avLst/>
+          </a:prstGeom>
+          <a:noFill/>
+          <a:ln/>
+        </p:spPr>
+        <p:txBody>
+          <a:bodyPr wrap="square" lIns="0" tIns="0" rIns="0" bIns="0" rtlCol="0" anchor="t"/>
+          <a:lstStyle/>
+          <a:p>
+            <a:pPr rtl="1" algn="r" indent="0" marL="0">
+              <a:lnSpc>
+                <a:spcPct val="122000"/>
+              </a:lnSpc>
+              <a:buNone/>
+            </a:pPr>
+            <a:r>
+              <a:rPr lang="he-IL" altLang="en-US" sz="1150" dirty="0">
+                <a:solidFill>
+                  <a:srgbClr val="91A0B7"/>
+                </a:solidFill>
+                <a:latin typeface="Calibri" pitchFamily="34" charset="0"/>
+                <a:ea typeface="Calibri" pitchFamily="34" charset="-122"/>
+                <a:cs typeface="Calibri" pitchFamily="34" charset="-120"/>
+              </a:rPr>
+              <a:t>‫אישור עקרוני להעתקה‬</a:t>
+            </a:r>
+            <a:endParaRPr lang="he-IL" sz="1150" dirty="0"/>
+          </a:p>
+          <a:p>
+            <a:pPr rtl="1" algn="r" indent="0" marL="0">
+              <a:lnSpc>
+                <a:spcPct val="122000"/>
+              </a:lnSpc>
+              <a:buNone/>
+            </a:pPr>
+            <a:r>
+              <a:rPr lang="he-IL" altLang="en-US" sz="1150" dirty="0">
+                <a:solidFill>
+                  <a:srgbClr val="91A0B7"/>
+                </a:solidFill>
+                <a:latin typeface="Calibri" pitchFamily="34" charset="0"/>
+                <a:ea typeface="Calibri" pitchFamily="34" charset="-122"/>
+                <a:cs typeface="Calibri" pitchFamily="34" charset="-120"/>
+              </a:rPr>
+              <a:t>‫פילוח קורפוס הדימות ו-‪Verint‬‬</a:t>
+            </a:r>
+            <a:endParaRPr lang="he-IL" sz="1150" dirty="0"/>
+          </a:p>
+          <a:p>
+            <a:pPr rtl="1" algn="r" indent="0" marL="0">
+              <a:lnSpc>
+                <a:spcPct val="122000"/>
+              </a:lnSpc>
+              <a:buNone/>
+            </a:pPr>
+            <a:r>
+              <a:rPr lang="he-IL" altLang="en-US" sz="1150" dirty="0">
+                <a:solidFill>
+                  <a:srgbClr val="91A0B7"/>
+                </a:solidFill>
+                <a:latin typeface="Calibri" pitchFamily="34" charset="0"/>
+                <a:ea typeface="Calibri" pitchFamily="34" charset="-122"/>
+                <a:cs typeface="Calibri" pitchFamily="34" charset="-120"/>
+              </a:rPr>
+              <a:t>‫הגדרת קריטריוני קבילות‬</a:t>
+            </a:r>
+            <a:endParaRPr lang="he-IL" sz="1150" dirty="0"/>
+          </a:p>
+        </p:txBody>
+      </p:sp>
+      <p:sp>
+        <p:nvSpPr>
+          <p:cNvPr id="10" name="Text 8"/>
+          <p:cNvSpPr/>
+          <p:nvPr/>
+        </p:nvSpPr>
+        <p:spPr>
+          <a:xfrm>
+            <a:off x="7271126" y="2322576"/>
+            <a:ext cx="1948221" cy="274320"/>
+          </a:xfrm>
+          <a:prstGeom prst="rect">
+            <a:avLst/>
+          </a:prstGeom>
+          <a:noFill/>
+          <a:ln/>
+        </p:spPr>
+        <p:txBody>
+          <a:bodyPr wrap="square" lIns="0" tIns="0" rIns="0" bIns="0" rtlCol="0" anchor="ctr"/>
+          <a:lstStyle/>
+          <a:p>
+            <a:pPr rtl="1" algn="r" indent="0" marL="0">
+              <a:lnSpc>
+                <a:spcPct val="100000"/>
+              </a:lnSpc>
+              <a:buNone/>
+            </a:pPr>
+            <a:r>
+              <a:rPr lang="he-IL" altLang="en-US" sz="1300" b="1" dirty="0">
+                <a:solidFill>
+                  <a:srgbClr val="F4F7FB"/>
+                </a:solidFill>
+                <a:latin typeface="Calibri" pitchFamily="34" charset="0"/>
+                <a:ea typeface="Calibri" pitchFamily="34" charset="-122"/>
+                <a:cs typeface="Calibri" pitchFamily="34" charset="-120"/>
+              </a:rPr>
+              <a:t>‫ספטמבר ‪26‬‬</a:t>
+            </a:r>
+            <a:endParaRPr lang="he-IL" sz="1300" dirty="0"/>
+          </a:p>
+        </p:txBody>
+      </p:sp>
+      <p:sp>
+        <p:nvSpPr>
+          <p:cNvPr id="11" name="Shape 9"/>
+          <p:cNvSpPr/>
+          <p:nvPr/>
+        </p:nvSpPr>
+        <p:spPr>
+          <a:xfrm>
+            <a:off x="9054755" y="2935224"/>
+            <a:ext cx="155448" cy="155448"/>
+          </a:xfrm>
+          <a:prstGeom prst="rect">
+            <a:avLst/>
+          </a:prstGeom>
+          <a:solidFill>
+            <a:srgbClr val="3DD9EB"/>
+          </a:solidFill>
+          <a:ln w="12700">
+            <a:solidFill>
+              <a:srgbClr val="3DD9EB"/>
+            </a:solidFill>
+            <a:prstDash val="solid"/>
+          </a:ln>
+        </p:spPr>
+      </p:sp>
+      <p:sp>
+        <p:nvSpPr>
+          <p:cNvPr id="12" name="Shape 10"/>
+          <p:cNvSpPr/>
+          <p:nvPr/>
+        </p:nvSpPr>
+        <p:spPr>
+          <a:xfrm>
+            <a:off x="7271126" y="3273552"/>
+            <a:ext cx="1948221" cy="1225296"/>
+          </a:xfrm>
+          <a:prstGeom prst="roundRect">
+            <a:avLst>
+              <a:gd name="adj" fmla="val 4478"/>
+            </a:avLst>
+          </a:prstGeom>
+          <a:solidFill>
+            <a:srgbClr val="182133"/>
+          </a:solidFill>
+          <a:ln w="12700">
+            <a:solidFill>
+              <a:srgbClr val="23304A"/>
+            </a:solidFill>
+            <a:prstDash val="solid"/>
+          </a:ln>
+        </p:spPr>
+      </p:sp>
+      <p:sp>
+        <p:nvSpPr>
+          <p:cNvPr id="13" name="Text 11"/>
+          <p:cNvSpPr/>
+          <p:nvPr/>
+        </p:nvSpPr>
+        <p:spPr>
+          <a:xfrm>
+            <a:off x="7472294" y="3401568"/>
+            <a:ext cx="1545885" cy="987552"/>
+          </a:xfrm>
+          <a:prstGeom prst="rect">
+            <a:avLst/>
+          </a:prstGeom>
+          <a:noFill/>
+          <a:ln/>
+        </p:spPr>
+        <p:txBody>
+          <a:bodyPr wrap="square" lIns="0" tIns="0" rIns="0" bIns="0" rtlCol="0" anchor="t"/>
+          <a:lstStyle/>
+          <a:p>
+            <a:pPr rtl="1" algn="r" indent="0" marL="0">
+              <a:lnSpc>
+                <a:spcPct val="122000"/>
+              </a:lnSpc>
+              <a:buNone/>
+            </a:pPr>
+            <a:r>
+              <a:rPr lang="he-IL" altLang="en-US" sz="1150" dirty="0">
+                <a:solidFill>
+                  <a:srgbClr val="91A0B7"/>
+                </a:solidFill>
+                <a:latin typeface="Calibri" pitchFamily="34" charset="0"/>
+                <a:ea typeface="Calibri" pitchFamily="34" charset="-122"/>
+                <a:cs typeface="Calibri" pitchFamily="34" charset="-120"/>
+              </a:rPr>
+              <a:t>‫‪POC‬ על ‪1–2 TB‬‬</a:t>
+            </a:r>
+            <a:endParaRPr lang="he-IL" sz="1150" dirty="0"/>
+          </a:p>
+          <a:p>
+            <a:pPr rtl="1" algn="r" indent="0" marL="0">
+              <a:lnSpc>
+                <a:spcPct val="122000"/>
+              </a:lnSpc>
+              <a:buNone/>
+            </a:pPr>
+            <a:r>
+              <a:rPr lang="he-IL" altLang="en-US" sz="1150" dirty="0">
+                <a:solidFill>
+                  <a:srgbClr val="91A0B7"/>
+                </a:solidFill>
+                <a:latin typeface="Calibri" pitchFamily="34" charset="0"/>
+                <a:ea typeface="Calibri" pitchFamily="34" charset="-122"/>
+                <a:cs typeface="Calibri" pitchFamily="34" charset="-120"/>
+              </a:rPr>
+              <a:t>‫אישור ‪DPO‬ ורגולטור‬</a:t>
+            </a:r>
+            <a:endParaRPr lang="he-IL" sz="1150" dirty="0"/>
+          </a:p>
+          <a:p>
+            <a:pPr rtl="1" algn="r" indent="0" marL="0">
+              <a:lnSpc>
+                <a:spcPct val="122000"/>
+              </a:lnSpc>
+              <a:buNone/>
+            </a:pPr>
+            <a:r>
+              <a:rPr lang="he-IL" altLang="en-US" sz="1150" dirty="0">
+                <a:solidFill>
+                  <a:srgbClr val="91A0B7"/>
+                </a:solidFill>
+                <a:latin typeface="Calibri" pitchFamily="34" charset="0"/>
+                <a:ea typeface="Calibri" pitchFamily="34" charset="-122"/>
+                <a:cs typeface="Calibri" pitchFamily="34" charset="-120"/>
+              </a:rPr>
+              <a:t>‫הקמת ‪Direct Connect‬‬</a:t>
+            </a:r>
+            <a:endParaRPr lang="he-IL" sz="1150" dirty="0"/>
+          </a:p>
+        </p:txBody>
+      </p:sp>
+      <p:sp>
+        <p:nvSpPr>
+          <p:cNvPr id="14" name="Text 12"/>
+          <p:cNvSpPr/>
+          <p:nvPr/>
+        </p:nvSpPr>
+        <p:spPr>
+          <a:xfrm>
+            <a:off x="5121737" y="2322576"/>
+            <a:ext cx="1948221" cy="274320"/>
+          </a:xfrm>
+          <a:prstGeom prst="rect">
+            <a:avLst/>
+          </a:prstGeom>
+          <a:noFill/>
+          <a:ln/>
+        </p:spPr>
+        <p:txBody>
+          <a:bodyPr wrap="square" lIns="0" tIns="0" rIns="0" bIns="0" rtlCol="0" anchor="ctr"/>
+          <a:lstStyle/>
+          <a:p>
+            <a:pPr rtl="1" algn="r" indent="0" marL="0">
+              <a:lnSpc>
+                <a:spcPct val="100000"/>
+              </a:lnSpc>
+              <a:buNone/>
+            </a:pPr>
+            <a:r>
+              <a:rPr lang="he-IL" altLang="en-US" sz="1300" b="1" dirty="0">
+                <a:solidFill>
+                  <a:srgbClr val="F4F7FB"/>
+                </a:solidFill>
+                <a:latin typeface="Calibri" pitchFamily="34" charset="0"/>
+                <a:ea typeface="Calibri" pitchFamily="34" charset="-122"/>
+                <a:cs typeface="Calibri" pitchFamily="34" charset="-120"/>
+              </a:rPr>
+              <a:t>‫אוקטובר ‪26‬‬</a:t>
+            </a:r>
+            <a:endParaRPr lang="he-IL" sz="1300" dirty="0"/>
+          </a:p>
+        </p:txBody>
+      </p:sp>
+      <p:sp>
+        <p:nvSpPr>
+          <p:cNvPr id="15" name="Shape 13"/>
+          <p:cNvSpPr/>
+          <p:nvPr/>
+        </p:nvSpPr>
+        <p:spPr>
+          <a:xfrm>
+            <a:off x="6905366" y="2935224"/>
+            <a:ext cx="155448" cy="155448"/>
+          </a:xfrm>
+          <a:prstGeom prst="rect">
+            <a:avLst/>
+          </a:prstGeom>
+          <a:solidFill>
+            <a:srgbClr val="FF6B7A"/>
+          </a:solidFill>
+          <a:ln w="12700">
+            <a:solidFill>
+              <a:srgbClr val="FF6B7A"/>
+            </a:solidFill>
+            <a:prstDash val="solid"/>
+          </a:ln>
+        </p:spPr>
+      </p:sp>
+      <p:sp>
+        <p:nvSpPr>
+          <p:cNvPr id="16" name="Shape 14"/>
+          <p:cNvSpPr/>
+          <p:nvPr/>
+        </p:nvSpPr>
+        <p:spPr>
+          <a:xfrm>
+            <a:off x="5121737" y="3273552"/>
+            <a:ext cx="1948221" cy="1225296"/>
+          </a:xfrm>
+          <a:prstGeom prst="roundRect">
+            <a:avLst>
+              <a:gd name="adj" fmla="val 4478"/>
+            </a:avLst>
+          </a:prstGeom>
+          <a:solidFill>
+            <a:srgbClr val="182133"/>
+          </a:solidFill>
+          <a:ln w="12700">
+            <a:solidFill>
+              <a:srgbClr val="23304A"/>
+            </a:solidFill>
+            <a:prstDash val="solid"/>
+          </a:ln>
+        </p:spPr>
+      </p:sp>
+      <p:sp>
+        <p:nvSpPr>
+          <p:cNvPr id="17" name="Text 15"/>
+          <p:cNvSpPr/>
+          <p:nvPr/>
+        </p:nvSpPr>
+        <p:spPr>
+          <a:xfrm>
+            <a:off x="5322905" y="3401568"/>
+            <a:ext cx="1545885" cy="987552"/>
+          </a:xfrm>
+          <a:prstGeom prst="rect">
+            <a:avLst/>
+          </a:prstGeom>
+          <a:noFill/>
+          <a:ln/>
+        </p:spPr>
+        <p:txBody>
+          <a:bodyPr wrap="square" lIns="0" tIns="0" rIns="0" bIns="0" rtlCol="0" anchor="t"/>
+          <a:lstStyle/>
+          <a:p>
+            <a:pPr rtl="1" algn="r" indent="0" marL="0">
+              <a:lnSpc>
+                <a:spcPct val="122000"/>
+              </a:lnSpc>
+              <a:buNone/>
+            </a:pPr>
+            <a:r>
+              <a:rPr lang="he-IL" altLang="en-US" sz="1150" dirty="0">
+                <a:solidFill>
+                  <a:srgbClr val="91A0B7"/>
+                </a:solidFill>
+                <a:latin typeface="Calibri" pitchFamily="34" charset="0"/>
+                <a:ea typeface="Calibri" pitchFamily="34" charset="-122"/>
+                <a:cs typeface="Calibri" pitchFamily="34" charset="-120"/>
+              </a:rPr>
+              <a:t>‫הוצאת ‪PO‬ ל-‪Dell‬ — מועד אחרון‬</a:t>
+            </a:r>
+            <a:endParaRPr lang="he-IL" sz="1150" dirty="0"/>
+          </a:p>
+          <a:p>
+            <a:pPr rtl="1" algn="r" indent="0" marL="0">
+              <a:lnSpc>
+                <a:spcPct val="122000"/>
+              </a:lnSpc>
+              <a:buNone/>
+            </a:pPr>
+            <a:r>
+              <a:rPr lang="he-IL" altLang="en-US" sz="1150" dirty="0">
+                <a:solidFill>
+                  <a:srgbClr val="91A0B7"/>
+                </a:solidFill>
+                <a:latin typeface="Calibri" pitchFamily="34" charset="0"/>
+                <a:ea typeface="Calibri" pitchFamily="34" charset="-122"/>
+                <a:cs typeface="Calibri" pitchFamily="34" charset="-120"/>
+              </a:rPr>
+              <a:t>‫תחילת העתקה לייצור‬</a:t>
+            </a:r>
+            <a:endParaRPr lang="he-IL" sz="1150" dirty="0"/>
+          </a:p>
+          <a:p>
+            <a:pPr rtl="1" algn="r" indent="0" marL="0">
+              <a:lnSpc>
+                <a:spcPct val="122000"/>
+              </a:lnSpc>
+              <a:buNone/>
+            </a:pPr>
+            <a:r>
+              <a:rPr lang="he-IL" altLang="en-US" sz="1150" dirty="0">
+                <a:solidFill>
+                  <a:srgbClr val="91A0B7"/>
+                </a:solidFill>
+                <a:latin typeface="Calibri" pitchFamily="34" charset="0"/>
+                <a:ea typeface="Calibri" pitchFamily="34" charset="-122"/>
+                <a:cs typeface="Calibri" pitchFamily="34" charset="-120"/>
+              </a:rPr>
+              <a:t>‫ולידציה ראשונה ודוח חריגים‬</a:t>
+            </a:r>
+            <a:endParaRPr lang="he-IL" sz="1150" dirty="0"/>
+          </a:p>
+        </p:txBody>
+      </p:sp>
+      <p:sp>
+        <p:nvSpPr>
+          <p:cNvPr id="18" name="Text 16"/>
+          <p:cNvSpPr/>
+          <p:nvPr/>
+        </p:nvSpPr>
+        <p:spPr>
+          <a:xfrm>
+            <a:off x="2972349" y="2322576"/>
+            <a:ext cx="1948221" cy="274320"/>
+          </a:xfrm>
+          <a:prstGeom prst="rect">
+            <a:avLst/>
+          </a:prstGeom>
+          <a:noFill/>
+          <a:ln/>
+        </p:spPr>
+        <p:txBody>
+          <a:bodyPr wrap="square" lIns="0" tIns="0" rIns="0" bIns="0" rtlCol="0" anchor="ctr"/>
+          <a:lstStyle/>
+          <a:p>
+            <a:pPr rtl="1" algn="r" indent="0" marL="0">
+              <a:lnSpc>
+                <a:spcPct val="100000"/>
+              </a:lnSpc>
+              <a:buNone/>
+            </a:pPr>
+            <a:r>
+              <a:rPr lang="he-IL" altLang="en-US" sz="1300" b="1" dirty="0">
+                <a:solidFill>
+                  <a:srgbClr val="F4F7FB"/>
+                </a:solidFill>
+                <a:latin typeface="Calibri" pitchFamily="34" charset="0"/>
+                <a:ea typeface="Calibri" pitchFamily="34" charset="-122"/>
+                <a:cs typeface="Calibri" pitchFamily="34" charset="-120"/>
+              </a:rPr>
+              <a:t>‫נוב׳–דצמ׳ ‪26‬‬</a:t>
+            </a:r>
+            <a:endParaRPr lang="he-IL" sz="1300" dirty="0"/>
+          </a:p>
+        </p:txBody>
+      </p:sp>
+      <p:sp>
+        <p:nvSpPr>
+          <p:cNvPr id="19" name="Shape 17"/>
+          <p:cNvSpPr/>
+          <p:nvPr/>
+        </p:nvSpPr>
+        <p:spPr>
+          <a:xfrm>
+            <a:off x="4755977" y="2935224"/>
+            <a:ext cx="155448" cy="155448"/>
+          </a:xfrm>
+          <a:prstGeom prst="rect">
+            <a:avLst/>
+          </a:prstGeom>
+          <a:solidFill>
+            <a:srgbClr val="FF9F43"/>
+          </a:solidFill>
+          <a:ln w="12700">
+            <a:solidFill>
+              <a:srgbClr val="FF9F43"/>
+            </a:solidFill>
+            <a:prstDash val="solid"/>
+          </a:ln>
+        </p:spPr>
+      </p:sp>
+      <p:sp>
+        <p:nvSpPr>
+          <p:cNvPr id="20" name="Shape 18"/>
+          <p:cNvSpPr/>
+          <p:nvPr/>
+        </p:nvSpPr>
+        <p:spPr>
+          <a:xfrm>
+            <a:off x="2972349" y="3273552"/>
+            <a:ext cx="1948221" cy="1225296"/>
+          </a:xfrm>
+          <a:prstGeom prst="roundRect">
+            <a:avLst>
+              <a:gd name="adj" fmla="val 4478"/>
+            </a:avLst>
+          </a:prstGeom>
+          <a:solidFill>
+            <a:srgbClr val="182133"/>
+          </a:solidFill>
+          <a:ln w="12700">
+            <a:solidFill>
+              <a:srgbClr val="23304A"/>
+            </a:solidFill>
+            <a:prstDash val="solid"/>
+          </a:ln>
+        </p:spPr>
+      </p:sp>
+      <p:sp>
+        <p:nvSpPr>
+          <p:cNvPr id="21" name="Text 19"/>
+          <p:cNvSpPr/>
+          <p:nvPr/>
+        </p:nvSpPr>
+        <p:spPr>
+          <a:xfrm>
+            <a:off x="3173517" y="3401568"/>
+            <a:ext cx="1545885" cy="987552"/>
+          </a:xfrm>
+          <a:prstGeom prst="rect">
+            <a:avLst/>
+          </a:prstGeom>
+          <a:noFill/>
+          <a:ln/>
+        </p:spPr>
+        <p:txBody>
+          <a:bodyPr wrap="square" lIns="0" tIns="0" rIns="0" bIns="0" rtlCol="0" anchor="t"/>
+          <a:lstStyle/>
+          <a:p>
+            <a:pPr rtl="1" algn="r" indent="0" marL="0">
+              <a:lnSpc>
+                <a:spcPct val="122000"/>
+              </a:lnSpc>
+              <a:buNone/>
+            </a:pPr>
+            <a:r>
+              <a:rPr lang="he-IL" altLang="en-US" sz="1150" dirty="0">
+                <a:solidFill>
+                  <a:srgbClr val="91A0B7"/>
+                </a:solidFill>
+                <a:latin typeface="Calibri" pitchFamily="34" charset="0"/>
+                <a:ea typeface="Calibri" pitchFamily="34" charset="-122"/>
+                <a:cs typeface="Calibri" pitchFamily="34" charset="-120"/>
+              </a:rPr>
+              <a:t>‫ייצור והובלה אצל ‪Dell‬‬</a:t>
+            </a:r>
+            <a:endParaRPr lang="he-IL" sz="1150" dirty="0"/>
+          </a:p>
+          <a:p>
+            <a:pPr rtl="1" algn="r" indent="0" marL="0">
+              <a:lnSpc>
+                <a:spcPct val="122000"/>
+              </a:lnSpc>
+              <a:buNone/>
+            </a:pPr>
+            <a:r>
+              <a:rPr lang="he-IL" altLang="en-US" sz="1150" dirty="0">
+                <a:solidFill>
+                  <a:srgbClr val="91A0B7"/>
+                </a:solidFill>
+                <a:latin typeface="Calibri" pitchFamily="34" charset="0"/>
+                <a:ea typeface="Calibri" pitchFamily="34" charset="-122"/>
+                <a:cs typeface="Calibri" pitchFamily="34" charset="-120"/>
+              </a:rPr>
+              <a:t>‫המשך העתקה ומחיקה מ-‪ECS‬‬</a:t>
+            </a:r>
+            <a:endParaRPr lang="he-IL" sz="1150" dirty="0"/>
+          </a:p>
+          <a:p>
+            <a:pPr rtl="1" algn="r" indent="0" marL="0">
+              <a:lnSpc>
+                <a:spcPct val="122000"/>
+              </a:lnSpc>
+              <a:buNone/>
+            </a:pPr>
+            <a:r>
+              <a:rPr lang="he-IL" altLang="en-US" sz="1150" dirty="0">
+                <a:solidFill>
+                  <a:srgbClr val="91A0B7"/>
+                </a:solidFill>
+                <a:latin typeface="Calibri" pitchFamily="34" charset="0"/>
+                <a:ea typeface="Calibri" pitchFamily="34" charset="-122"/>
+                <a:cs typeface="Calibri" pitchFamily="34" charset="-120"/>
+              </a:rPr>
+              <a:t>‫דוח שלמות מסכם‬</a:t>
+            </a:r>
+            <a:endParaRPr lang="he-IL" sz="1150" dirty="0"/>
+          </a:p>
+        </p:txBody>
+      </p:sp>
+      <p:sp>
+        <p:nvSpPr>
+          <p:cNvPr id="22" name="Text 20"/>
+          <p:cNvSpPr/>
+          <p:nvPr/>
+        </p:nvSpPr>
+        <p:spPr>
+          <a:xfrm>
+            <a:off x="822960" y="2322576"/>
+            <a:ext cx="1948221" cy="274320"/>
+          </a:xfrm>
+          <a:prstGeom prst="rect">
+            <a:avLst/>
+          </a:prstGeom>
+          <a:noFill/>
+          <a:ln/>
+        </p:spPr>
+        <p:txBody>
+          <a:bodyPr wrap="square" lIns="0" tIns="0" rIns="0" bIns="0" rtlCol="0" anchor="ctr"/>
+          <a:lstStyle/>
+          <a:p>
+            <a:pPr rtl="1" algn="r" indent="0" marL="0">
+              <a:lnSpc>
+                <a:spcPct val="100000"/>
+              </a:lnSpc>
+              <a:buNone/>
+            </a:pPr>
+            <a:r>
+              <a:rPr lang="he-IL" altLang="en-US" sz="1300" b="1" dirty="0">
+                <a:solidFill>
+                  <a:srgbClr val="F4F7FB"/>
+                </a:solidFill>
+                <a:latin typeface="Calibri" pitchFamily="34" charset="0"/>
+                <a:ea typeface="Calibri" pitchFamily="34" charset="-122"/>
+                <a:cs typeface="Calibri" pitchFamily="34" charset="-120"/>
+              </a:rPr>
+              <a:t>‫ינואר–מרץ ‪27‬‬</a:t>
+            </a:r>
+            <a:endParaRPr lang="he-IL" sz="1300" dirty="0"/>
+          </a:p>
+        </p:txBody>
+      </p:sp>
+      <p:sp>
+        <p:nvSpPr>
+          <p:cNvPr id="23" name="Shape 21"/>
+          <p:cNvSpPr/>
+          <p:nvPr/>
+        </p:nvSpPr>
+        <p:spPr>
+          <a:xfrm>
+            <a:off x="2606589" y="2935224"/>
+            <a:ext cx="155448" cy="155448"/>
+          </a:xfrm>
+          <a:prstGeom prst="rect">
+            <a:avLst/>
+          </a:prstGeom>
+          <a:solidFill>
+            <a:srgbClr val="B07CFF"/>
+          </a:solidFill>
+          <a:ln w="12700">
+            <a:solidFill>
+              <a:srgbClr val="B07CFF"/>
+            </a:solidFill>
+            <a:prstDash val="solid"/>
+          </a:ln>
+        </p:spPr>
+      </p:sp>
+      <p:sp>
+        <p:nvSpPr>
+          <p:cNvPr id="24" name="Shape 22"/>
+          <p:cNvSpPr/>
+          <p:nvPr/>
+        </p:nvSpPr>
+        <p:spPr>
+          <a:xfrm>
+            <a:off x="822960" y="3273552"/>
+            <a:ext cx="1948221" cy="1225296"/>
+          </a:xfrm>
+          <a:prstGeom prst="roundRect">
+            <a:avLst>
+              <a:gd name="adj" fmla="val 4478"/>
+            </a:avLst>
+          </a:prstGeom>
+          <a:solidFill>
+            <a:srgbClr val="182133"/>
+          </a:solidFill>
+          <a:ln w="12700">
+            <a:solidFill>
+              <a:srgbClr val="23304A"/>
+            </a:solidFill>
+            <a:prstDash val="solid"/>
+          </a:ln>
+        </p:spPr>
+      </p:sp>
+      <p:sp>
+        <p:nvSpPr>
+          <p:cNvPr id="25" name="Text 23"/>
+          <p:cNvSpPr/>
+          <p:nvPr/>
+        </p:nvSpPr>
+        <p:spPr>
+          <a:xfrm>
+            <a:off x="1024128" y="3401568"/>
+            <a:ext cx="1545885" cy="987552"/>
+          </a:xfrm>
+          <a:prstGeom prst="rect">
+            <a:avLst/>
+          </a:prstGeom>
+          <a:noFill/>
+          <a:ln/>
+        </p:spPr>
+        <p:txBody>
+          <a:bodyPr wrap="square" lIns="0" tIns="0" rIns="0" bIns="0" rtlCol="0" anchor="t"/>
+          <a:lstStyle/>
+          <a:p>
+            <a:pPr rtl="1" algn="r" indent="0" marL="0">
+              <a:lnSpc>
+                <a:spcPct val="122000"/>
+              </a:lnSpc>
+              <a:buNone/>
+            </a:pPr>
+            <a:r>
+              <a:rPr lang="he-IL" altLang="en-US" sz="1150" dirty="0">
+                <a:solidFill>
+                  <a:srgbClr val="91A0B7"/>
+                </a:solidFill>
+                <a:latin typeface="Calibri" pitchFamily="34" charset="0"/>
+                <a:ea typeface="Calibri" pitchFamily="34" charset="-122"/>
+                <a:cs typeface="Calibri" pitchFamily="34" charset="-120"/>
+              </a:rPr>
+              <a:t>‫אספקת דיסקים והתקנה‬</a:t>
+            </a:r>
+            <a:endParaRPr lang="he-IL" sz="1150" dirty="0"/>
+          </a:p>
+          <a:p>
+            <a:pPr rtl="1" algn="r" indent="0" marL="0">
+              <a:lnSpc>
+                <a:spcPct val="122000"/>
+              </a:lnSpc>
+              <a:buNone/>
+            </a:pPr>
+            <a:r>
+              <a:rPr lang="he-IL" altLang="en-US" sz="1150" dirty="0">
+                <a:solidFill>
+                  <a:srgbClr val="91A0B7"/>
+                </a:solidFill>
+                <a:latin typeface="Calibri" pitchFamily="34" charset="0"/>
+                <a:ea typeface="Calibri" pitchFamily="34" charset="-122"/>
+                <a:cs typeface="Calibri" pitchFamily="34" charset="-120"/>
+              </a:rPr>
+              <a:t>‫חציית סף ‪80% — 733 TB‬‬</a:t>
+            </a:r>
+            <a:endParaRPr lang="he-IL" sz="1150" dirty="0"/>
+          </a:p>
+          <a:p>
+            <a:pPr rtl="1" algn="r" indent="0" marL="0">
+              <a:lnSpc>
+                <a:spcPct val="122000"/>
+              </a:lnSpc>
+              <a:buNone/>
+            </a:pPr>
+            <a:r>
+              <a:rPr lang="he-IL" altLang="en-US" sz="1150" dirty="0">
+                <a:solidFill>
+                  <a:srgbClr val="91A0B7"/>
+                </a:solidFill>
+                <a:latin typeface="Calibri" pitchFamily="34" charset="0"/>
+                <a:ea typeface="Calibri" pitchFamily="34" charset="-122"/>
+                <a:cs typeface="Calibri" pitchFamily="34" charset="-120"/>
+              </a:rPr>
+              <a:t>‫הקיבולת הנוספת נכנסת בזמן‬</a:t>
+            </a:r>
+            <a:endParaRPr lang="he-IL" sz="1150" dirty="0"/>
+          </a:p>
+        </p:txBody>
+      </p:sp>
+      <p:sp>
+        <p:nvSpPr>
+          <p:cNvPr id="26" name="Shape 24"/>
+          <p:cNvSpPr/>
+          <p:nvPr/>
+        </p:nvSpPr>
+        <p:spPr>
+          <a:xfrm>
+            <a:off x="822960" y="4809744"/>
+            <a:ext cx="10545775" cy="566928"/>
+          </a:xfrm>
+          <a:prstGeom prst="roundRect">
+            <a:avLst>
+              <a:gd name="adj" fmla="val 12903"/>
+            </a:avLst>
+          </a:prstGeom>
+          <a:solidFill>
+            <a:srgbClr val="2A1620"/>
+          </a:solidFill>
+          <a:ln w="12700">
+            <a:solidFill>
+              <a:srgbClr val="5A2A38"/>
+            </a:solidFill>
+            <a:prstDash val="solid"/>
+          </a:ln>
+        </p:spPr>
+      </p:sp>
+      <p:sp>
+        <p:nvSpPr>
+          <p:cNvPr id="27" name="Shape 25"/>
+          <p:cNvSpPr/>
+          <p:nvPr/>
+        </p:nvSpPr>
+        <p:spPr>
+          <a:xfrm>
+            <a:off x="10966399" y="5029200"/>
+            <a:ext cx="118872" cy="118872"/>
+          </a:xfrm>
+          <a:prstGeom prst="rect">
+            <a:avLst/>
+          </a:prstGeom>
+          <a:solidFill>
+            <a:srgbClr val="FF6B7A"/>
+          </a:solidFill>
+          <a:ln w="12700">
+            <a:solidFill>
+              <a:srgbClr val="FF6B7A"/>
+            </a:solidFill>
+            <a:prstDash val="solid"/>
+          </a:ln>
+        </p:spPr>
+      </p:sp>
+      <p:sp>
+        <p:nvSpPr>
+          <p:cNvPr id="28" name="Text 26"/>
+          <p:cNvSpPr/>
+          <p:nvPr/>
+        </p:nvSpPr>
+        <p:spPr>
+          <a:xfrm>
+            <a:off x="1097280" y="4809744"/>
+            <a:ext cx="9722815" cy="566928"/>
+          </a:xfrm>
+          <a:prstGeom prst="rect">
+            <a:avLst/>
+          </a:prstGeom>
+          <a:noFill/>
+          <a:ln/>
+        </p:spPr>
+        <p:txBody>
+          <a:bodyPr wrap="square" lIns="0" tIns="0" rIns="0" bIns="0" rtlCol="0" anchor="ctr"/>
+          <a:lstStyle/>
+          <a:p>
+            <a:pPr rtl="1" algn="r" indent="0" marL="0">
+              <a:lnSpc>
+                <a:spcPct val="100000"/>
+              </a:lnSpc>
+              <a:buNone/>
+            </a:pPr>
+            <a:r>
+              <a:rPr lang="he-IL" altLang="en-US" sz="1300" b="1" dirty="0">
+                <a:solidFill>
+                  <a:srgbClr val="FF6B7A"/>
+                </a:solidFill>
+                <a:latin typeface="Calibri" pitchFamily="34" charset="0"/>
+                <a:ea typeface="Calibri" pitchFamily="34" charset="-122"/>
+                <a:cs typeface="Calibri" pitchFamily="34" charset="-120"/>
+              </a:rPr>
+              <a:t>‫אוקטובר הוא נקודת האל-חזור: חודשיים אספקה פירושם שכל ‪PO‬ שיוצא אחריו מגיע אחרי חציית ‪80%‬.‬</a:t>
+            </a:r>
+            <a:endParaRPr lang="he-IL" sz="1300" dirty="0"/>
+          </a:p>
+        </p:txBody>
+      </p:sp>
+      <p:sp>
+        <p:nvSpPr>
+          <p:cNvPr id="29" name="Shape 27"/>
+          <p:cNvSpPr/>
+          <p:nvPr/>
+        </p:nvSpPr>
+        <p:spPr>
+          <a:xfrm>
+            <a:off x="822960" y="5907024"/>
+            <a:ext cx="10545775" cy="10973"/>
+          </a:xfrm>
+          <a:prstGeom prst="rect">
+            <a:avLst/>
+          </a:prstGeom>
+          <a:solidFill>
+            <a:srgbClr val="23304A"/>
+          </a:solidFill>
+          <a:ln w="12700">
+            <a:solidFill>
+              <a:srgbClr val="23304A"/>
+            </a:solidFill>
+            <a:prstDash val="solid"/>
+          </a:ln>
+        </p:spPr>
+      </p:sp>
+      <p:sp>
+        <p:nvSpPr>
+          <p:cNvPr id="30" name="Shape 28"/>
+          <p:cNvSpPr/>
+          <p:nvPr/>
+        </p:nvSpPr>
+        <p:spPr>
+          <a:xfrm>
+            <a:off x="11249863" y="6172200"/>
+            <a:ext cx="118872" cy="118872"/>
+          </a:xfrm>
+          <a:prstGeom prst="rect">
+            <a:avLst/>
+          </a:prstGeom>
+          <a:solidFill>
+            <a:srgbClr val="FF6B7A"/>
+          </a:solidFill>
+          <a:ln w="12700">
+            <a:solidFill>
+              <a:srgbClr val="FF6B7A"/>
+            </a:solidFill>
+            <a:prstDash val="solid"/>
+          </a:ln>
+        </p:spPr>
+      </p:sp>
+      <p:sp>
+        <p:nvSpPr>
+          <p:cNvPr id="31" name="Text 29"/>
+          <p:cNvSpPr/>
+          <p:nvPr/>
+        </p:nvSpPr>
+        <p:spPr>
+          <a:xfrm>
+            <a:off x="822960" y="6089904"/>
+            <a:ext cx="10289743" cy="566928"/>
+          </a:xfrm>
+          <a:prstGeom prst="rect">
+            <a:avLst/>
+          </a:prstGeom>
+          <a:noFill/>
+          <a:ln/>
+        </p:spPr>
+        <p:txBody>
+          <a:bodyPr wrap="square" lIns="0" tIns="0" rIns="0" bIns="0" rtlCol="0" anchor="t"/>
+          <a:lstStyle/>
+          <a:p>
+            <a:pPr rtl="1" algn="r" indent="0" marL="0">
+              <a:lnSpc>
+                <a:spcPct val="115000"/>
+              </a:lnSpc>
+              <a:buNone/>
+            </a:pPr>
+            <a:r>
+              <a:rPr lang="he-IL" altLang="en-US" sz="1150" dirty="0">
+                <a:solidFill>
+                  <a:srgbClr val="91A0B7"/>
+                </a:solidFill>
+                <a:latin typeface="Calibri" pitchFamily="34" charset="0"/>
+                <a:ea typeface="Calibri" pitchFamily="34" charset="-122"/>
+                <a:cs typeface="Calibri" pitchFamily="34" charset="-120"/>
+              </a:rPr>
+              <a:t>‫המסלולים אינם תלויים זה בזה: עיכוב ב-‪POC‬ אינו מעכב את הרכש, ועיכוב ברכש אינו מעכב את ההעתקה. רק מסלול הרכש נעול על תאריך.‬</a:t>
+            </a:r>
+            <a:endParaRPr lang="he-IL" sz="1150" dirty="0"/>
+          </a:p>
+        </p:txBody>
+      </p:sp>
+    </p:spTree>
+  </p:cSld>
+  <p:clrMapOvr>
+    <a:masterClrMapping/>
+  </p:clrMapOvr>
+</p:sld>
+</file>
+
+<file path=ppt/slides/slide11.xml><?xml version="1.0" encoding="utf-8"?>
+<p:sld xmlns:a="http://schemas.openxmlformats.org/drawingml/2006/main" xmlns:r="http://schemas.openxmlformats.org/officeDocument/2006/relationships" xmlns:p="http://schemas.openxmlformats.org/presentationml/2006/main">
+  <p:cSld name="Slide 11">
+    <p:bg>
+      <p:bgPr>
+        <a:solidFill>
+          <a:srgbClr val="0E1422"/>
+        </a:solidFill>
+      </p:bgPr>
+    </p:bg>
+    <p:spTree>
+      <p:nvGrpSpPr>
+        <p:cNvPr id="1" name=""/>
+        <p:cNvGrpSpPr/>
+        <p:nvPr/>
+      </p:nvGrpSpPr>
+      <p:grpSpPr>
+        <a:xfrm>
+          <a:off x="0" y="0"/>
+          <a:ext cx="0" cy="0"/>
+          <a:chOff x="0" y="0"/>
+          <a:chExt cx="0" cy="0"/>
+        </a:xfrm>
+      </p:grpSpPr>
+      <p:sp>
+        <p:nvSpPr>
+          <p:cNvPr id="2" name="Text 0"/>
+          <p:cNvSpPr/>
+          <p:nvPr/>
+        </p:nvSpPr>
+        <p:spPr>
+          <a:xfrm>
+            <a:off x="822960" y="475488"/>
+            <a:ext cx="10545775" cy="237744"/>
+          </a:xfrm>
+          <a:prstGeom prst="rect">
+            <a:avLst/>
+          </a:prstGeom>
+          <a:noFill/>
+          <a:ln/>
+        </p:spPr>
+        <p:txBody>
+          <a:bodyPr wrap="square" lIns="0" tIns="0" rIns="0" bIns="0" rtlCol="0" anchor="ctr"/>
+          <a:lstStyle/>
+          <a:p>
+            <a:pPr rtl="1" algn="r" indent="0" marL="0">
+              <a:lnSpc>
+                <a:spcPct val="100000"/>
+              </a:lnSpc>
+              <a:buNone/>
+            </a:pPr>
+            <a:r>
+              <a:rPr lang="he-IL" altLang="en-US" sz="1100" b="1" spc="120" kern="0" dirty="0">
+                <a:solidFill>
+                  <a:srgbClr val="FF6B7A"/>
+                </a:solidFill>
+                <a:latin typeface="Calibri" pitchFamily="34" charset="0"/>
+                <a:ea typeface="Calibri" pitchFamily="34" charset="-122"/>
+                <a:cs typeface="Calibri" pitchFamily="34" charset="-120"/>
+              </a:rPr>
               <a:t>‫המלצה‬</a:t>
             </a:r>
             <a:endParaRPr lang="he-IL" sz="1100" dirty="0"/>
@@ -9599,7 +10920,7 @@
                 <a:ea typeface="Calibri" pitchFamily="34" charset="-122"/>
                 <a:cs typeface="Calibri" pitchFamily="34" charset="-120"/>
               </a:rPr>
-              <a:t>‫סיכונים‬</a:t>
+              <a:t>‫סיכונים · חלק א‬</a:t>
             </a:r>
             <a:endParaRPr lang="he-IL" sz="1100" dirty="0"/>
           </a:p>
@@ -9641,7 +10962,7 @@
                 <a:ea typeface="Calibri" pitchFamily="34" charset="-122"/>
                 <a:cs typeface="Calibri" pitchFamily="34" charset="-120"/>
               </a:rPr>
-              <a:t>‫כל סיכון מהותי ניתן להפחתה — אך שניים מהם חוסמים התחלה‬</a:t>
+              <a:t>‫שני חוסמים שחייבים להיסגר לפני ההעתקה הראשונה‬</a:t>
             </a:r>
             <a:endParaRPr lang="he-IL" sz="2600" dirty="0"/>
           </a:p>
@@ -9680,12 +11001,12 @@
         </p:nvSpPr>
         <p:spPr>
           <a:xfrm>
-            <a:off x="8122615" y="1975104"/>
-            <a:ext cx="3246120" cy="1810512"/>
+            <a:off x="6293815" y="2011680"/>
+            <a:ext cx="5074920" cy="3712464"/>
           </a:xfrm>
           <a:prstGeom prst="roundRect">
             <a:avLst>
-              <a:gd name="adj" fmla="val 2525"/>
+              <a:gd name="adj" fmla="val 1232"/>
             </a:avLst>
           </a:prstGeom>
           <a:solidFill>
@@ -9707,8 +11028,8 @@
         </p:nvSpPr>
         <p:spPr>
           <a:xfrm>
-            <a:off x="11318443" y="2121408"/>
-            <a:ext cx="50292" cy="1517904"/>
+            <a:off x="11318443" y="2194560"/>
+            <a:ext cx="50292" cy="3346704"/>
           </a:xfrm>
           <a:prstGeom prst="rect">
             <a:avLst/>
@@ -9726,60 +11047,18 @@
       </p:sp>
       <p:sp>
         <p:nvSpPr>
-          <p:cNvPr id="7" name="Text 5"/>
-          <p:cNvSpPr/>
-          <p:nvPr/>
-        </p:nvSpPr>
-        <p:spPr>
-          <a:xfrm>
-            <a:off x="9421063" y="2103120"/>
-            <a:ext cx="1618488" cy="310896"/>
-          </a:xfrm>
-          <a:prstGeom prst="rect">
-            <a:avLst/>
-          </a:prstGeom>
-          <a:noFill/>
-          <a:ln/>
-        </p:spPr>
-        <p:txBody>
-          <a:bodyPr wrap="square" lIns="0" tIns="0" rIns="0" bIns="0" rtlCol="0" anchor="ctr"/>
-          <a:lstStyle/>
-          <a:p>
-            <a:pPr rtl="1" algn="r" indent="0" marL="0">
-              <a:lnSpc>
-                <a:spcPct val="100000"/>
-              </a:lnSpc>
-              <a:buNone/>
-            </a:pPr>
-            <a:r>
-              <a:rPr lang="he-IL" altLang="en-US" sz="1400" b="1" dirty="0">
-                <a:solidFill>
-                  <a:srgbClr val="FF6B7A"/>
-                </a:solidFill>
-                <a:latin typeface="Calibri" pitchFamily="34" charset="0"/>
-                <a:ea typeface="Calibri" pitchFamily="34" charset="-122"/>
-                <a:cs typeface="Calibri" pitchFamily="34" charset="-120"/>
-              </a:rPr>
-              <a:t>‫משפטי · קבילות‬</a:t>
-            </a:r>
-            <a:endParaRPr lang="he-IL" sz="1400" dirty="0"/>
-          </a:p>
-        </p:txBody>
-      </p:sp>
-      <p:sp>
-        <p:nvSpPr>
-          <p:cNvPr id="8" name="Shape 6"/>
-          <p:cNvSpPr/>
-          <p:nvPr/>
-        </p:nvSpPr>
-        <p:spPr>
-          <a:xfrm>
-            <a:off x="8378647" y="2139696"/>
-            <a:ext cx="932688" cy="237744"/>
+          <p:cNvPr id="7" name="Shape 5"/>
+          <p:cNvSpPr/>
+          <p:nvPr/>
+        </p:nvSpPr>
+        <p:spPr>
+          <a:xfrm>
+            <a:off x="6604711" y="2286000"/>
+            <a:ext cx="1078992" cy="274320"/>
           </a:xfrm>
           <a:prstGeom prst="roundRect">
             <a:avLst>
-              <a:gd name="adj" fmla="val 115385"/>
+              <a:gd name="adj" fmla="val 100000"/>
             </a:avLst>
           </a:prstGeom>
           <a:solidFill>
@@ -9795,14 +11074,56 @@
       </p:sp>
       <p:sp>
         <p:nvSpPr>
+          <p:cNvPr id="8" name="Text 6"/>
+          <p:cNvSpPr/>
+          <p:nvPr/>
+        </p:nvSpPr>
+        <p:spPr>
+          <a:xfrm>
+            <a:off x="6604711" y="2286000"/>
+            <a:ext cx="1078992" cy="274320"/>
+          </a:xfrm>
+          <a:prstGeom prst="rect">
+            <a:avLst/>
+          </a:prstGeom>
+          <a:noFill/>
+          <a:ln/>
+        </p:spPr>
+        <p:txBody>
+          <a:bodyPr wrap="square" lIns="0" tIns="0" rIns="0" bIns="0" rtlCol="0" anchor="ctr"/>
+          <a:lstStyle/>
+          <a:p>
+            <a:pPr rtl="1" algn="ctr" indent="0" marL="0">
+              <a:lnSpc>
+                <a:spcPct val="100000"/>
+              </a:lnSpc>
+              <a:buNone/>
+            </a:pPr>
+            <a:r>
+              <a:rPr lang="he-IL" altLang="en-US" sz="1000" b="1" dirty="0">
+                <a:solidFill>
+                  <a:srgbClr val="FF6B7A"/>
+                </a:solidFill>
+                <a:latin typeface="Calibri" pitchFamily="34" charset="0"/>
+                <a:ea typeface="Calibri" pitchFamily="34" charset="-122"/>
+                <a:cs typeface="Calibri" pitchFamily="34" charset="-120"/>
+              </a:rPr>
+              <a:t>‫חוסם התחלה‬</a:t>
+            </a:r>
+            <a:endParaRPr lang="he-IL" sz="1000" dirty="0"/>
+          </a:p>
+        </p:txBody>
+      </p:sp>
+      <p:sp>
+        <p:nvSpPr>
           <p:cNvPr id="9" name="Text 7"/>
           <p:cNvSpPr/>
           <p:nvPr/>
         </p:nvSpPr>
         <p:spPr>
           <a:xfrm>
-            <a:off x="8378647" y="2139696"/>
-            <a:ext cx="932688" cy="237744"/>
+            <a:off x="7811719" y="2249424"/>
+            <a:ext cx="3191256" cy="347472"/>
           </a:xfrm>
           <a:prstGeom prst="rect">
             <a:avLst/>
@@ -9814,14 +11135,14 @@
           <a:bodyPr wrap="square" lIns="0" tIns="0" rIns="0" bIns="0" rtlCol="0" anchor="ctr"/>
           <a:lstStyle/>
           <a:p>
-            <a:pPr rtl="1" algn="ctr" indent="0" marL="0">
+            <a:pPr rtl="1" algn="r" indent="0" marL="0">
               <a:lnSpc>
                 <a:spcPct val="100000"/>
               </a:lnSpc>
               <a:buNone/>
             </a:pPr>
             <a:r>
-              <a:rPr lang="he-IL" altLang="en-US" sz="950" b="1" dirty="0">
+              <a:rPr lang="he-IL" altLang="en-US" sz="2000" b="1" dirty="0">
                 <a:solidFill>
                   <a:srgbClr val="FF6B7A"/>
                 </a:solidFill>
@@ -9829,74 +11150,32 @@
                 <a:ea typeface="Calibri" pitchFamily="34" charset="-122"/>
                 <a:cs typeface="Calibri" pitchFamily="34" charset="-120"/>
               </a:rPr>
-              <a:t>‫חוסם התחלה‬</a:t>
-            </a:r>
-            <a:endParaRPr lang="he-IL" sz="950" dirty="0"/>
-          </a:p>
-        </p:txBody>
-      </p:sp>
-      <p:sp>
-        <p:nvSpPr>
-          <p:cNvPr id="10" name="Text 8"/>
-          <p:cNvSpPr/>
-          <p:nvPr/>
-        </p:nvSpPr>
-        <p:spPr>
-          <a:xfrm>
-            <a:off x="8378647" y="2468880"/>
-            <a:ext cx="2679192" cy="457200"/>
-          </a:xfrm>
-          <a:prstGeom prst="rect">
-            <a:avLst/>
-          </a:prstGeom>
-          <a:noFill/>
-          <a:ln/>
-        </p:spPr>
-        <p:txBody>
-          <a:bodyPr wrap="square" lIns="0" tIns="0" rIns="0" bIns="0" rtlCol="0" anchor="t"/>
-          <a:lstStyle/>
-          <a:p>
-            <a:pPr rtl="1" algn="r" indent="0" marL="0">
-              <a:lnSpc>
-                <a:spcPct val="120000"/>
-              </a:lnSpc>
-              <a:buNone/>
-            </a:pPr>
-            <a:r>
-              <a:rPr lang="he-IL" altLang="en-US" sz="1250" dirty="0">
-                <a:solidFill>
-                  <a:srgbClr val="F4F7FB"/>
-                </a:solidFill>
-                <a:latin typeface="Calibri" pitchFamily="34" charset="0"/>
-                <a:ea typeface="Calibri" pitchFamily="34" charset="-122"/>
-                <a:cs typeface="Calibri" pitchFamily="34" charset="-120"/>
-              </a:rPr>
-              <a:t>‫שם הקובץ ותאריך היצירה משתנים בהעתקה. בית משפט עשוי לדרוש אסמכתא שהתוכן לא שונה.‬</a:t>
-            </a:r>
-            <a:endParaRPr lang="he-IL" sz="1250" dirty="0"/>
-          </a:p>
-        </p:txBody>
-      </p:sp>
-      <p:sp>
-        <p:nvSpPr>
-          <p:cNvPr id="11" name="Shape 9"/>
-          <p:cNvSpPr/>
-          <p:nvPr/>
-        </p:nvSpPr>
-        <p:spPr>
-          <a:xfrm>
-            <a:off x="8378647" y="2962656"/>
-            <a:ext cx="2679192" cy="9144"/>
-          </a:xfrm>
-          <a:prstGeom prst="rect">
-            <a:avLst/>
-          </a:prstGeom>
-          <a:solidFill>
-            <a:srgbClr val="2C3A54"/>
+              <a:t>‫משפטי · קבילות המסמך‬</a:t>
+            </a:r>
+            <a:endParaRPr lang="he-IL" sz="2000" dirty="0"/>
+          </a:p>
+        </p:txBody>
+      </p:sp>
+      <p:sp>
+        <p:nvSpPr>
+          <p:cNvPr id="10" name="Shape 8"/>
+          <p:cNvSpPr/>
+          <p:nvPr/>
+        </p:nvSpPr>
+        <p:spPr>
+          <a:xfrm>
+            <a:off x="6604711" y="2724912"/>
+            <a:ext cx="4453128" cy="10973"/>
+          </a:xfrm>
+          <a:prstGeom prst="rect">
+            <a:avLst/>
+          </a:prstGeom>
+          <a:solidFill>
+            <a:srgbClr val="3A2430"/>
           </a:solidFill>
           <a:ln w="12700">
             <a:solidFill>
-              <a:srgbClr val="2C3A54"/>
+              <a:srgbClr val="3A2430"/>
             </a:solidFill>
             <a:prstDash val="solid"/>
           </a:ln>
@@ -9904,14 +11183,123 @@
       </p:sp>
       <p:sp>
         <p:nvSpPr>
+          <p:cNvPr id="11" name="Text 9"/>
+          <p:cNvSpPr/>
+          <p:nvPr/>
+        </p:nvSpPr>
+        <p:spPr>
+          <a:xfrm>
+            <a:off x="6604711" y="2852928"/>
+            <a:ext cx="4453128" cy="786384"/>
+          </a:xfrm>
+          <a:prstGeom prst="rect">
+            <a:avLst/>
+          </a:prstGeom>
+          <a:noFill/>
+          <a:ln/>
+        </p:spPr>
+        <p:txBody>
+          <a:bodyPr wrap="square" lIns="0" tIns="0" rIns="0" bIns="0" rtlCol="0" anchor="t"/>
+          <a:lstStyle/>
+          <a:p>
+            <a:pPr rtl="1" algn="r" indent="0" marL="0">
+              <a:lnSpc>
+                <a:spcPct val="130000"/>
+              </a:lnSpc>
+              <a:buNone/>
+            </a:pPr>
+            <a:r>
+              <a:rPr lang="he-IL" altLang="en-US" sz="1400" dirty="0">
+                <a:solidFill>
+                  <a:srgbClr val="F4F7FB"/>
+                </a:solidFill>
+                <a:latin typeface="Calibri" pitchFamily="34" charset="0"/>
+                <a:ea typeface="Calibri" pitchFamily="34" charset="-122"/>
+                <a:cs typeface="Calibri" pitchFamily="34" charset="-120"/>
+              </a:rPr>
+              <a:t>‫בהעתקה משתנים שם הקובץ, הנתיב ותאריך היצירה. במחלוקת משפטית ייתכן שנידרש להוכיח שהמסמך שהוצג הוא בדיוק המסמך המקורי, ושלא שונה מאז נוצר.‬</a:t>
+            </a:r>
+            <a:endParaRPr lang="he-IL" sz="1400" dirty="0"/>
+          </a:p>
+        </p:txBody>
+      </p:sp>
+      <p:sp>
+        <p:nvSpPr>
           <p:cNvPr id="12" name="Text 10"/>
           <p:cNvSpPr/>
           <p:nvPr/>
         </p:nvSpPr>
         <p:spPr>
           <a:xfrm>
-            <a:off x="8378647" y="3035808"/>
-            <a:ext cx="2679192" cy="658368"/>
+            <a:off x="6604711" y="3694176"/>
+            <a:ext cx="4453128" cy="237744"/>
+          </a:xfrm>
+          <a:prstGeom prst="rect">
+            <a:avLst/>
+          </a:prstGeom>
+          <a:noFill/>
+          <a:ln/>
+        </p:spPr>
+        <p:txBody>
+          <a:bodyPr wrap="square" lIns="0" tIns="0" rIns="0" bIns="0" rtlCol="0" anchor="ctr"/>
+          <a:lstStyle/>
+          <a:p>
+            <a:pPr rtl="1" algn="r" indent="0" marL="0">
+              <a:lnSpc>
+                <a:spcPct val="100000"/>
+              </a:lnSpc>
+              <a:buNone/>
+            </a:pPr>
+            <a:r>
+              <a:rPr lang="he-IL" altLang="en-US" sz="1050" b="1" spc="110" kern="0" dirty="0">
+                <a:solidFill>
+                  <a:srgbClr val="5E6E85"/>
+                </a:solidFill>
+                <a:latin typeface="Calibri" pitchFamily="34" charset="0"/>
+                <a:ea typeface="Calibri" pitchFamily="34" charset="-122"/>
+                <a:cs typeface="Calibri" pitchFamily="34" charset="-120"/>
+              </a:rPr>
+              <a:t>‫מיטיגציה‬</a:t>
+            </a:r>
+            <a:endParaRPr lang="he-IL" sz="1050" dirty="0"/>
+          </a:p>
+        </p:txBody>
+      </p:sp>
+      <p:sp>
+        <p:nvSpPr>
+          <p:cNvPr id="13" name="Shape 11"/>
+          <p:cNvSpPr/>
+          <p:nvPr/>
+        </p:nvSpPr>
+        <p:spPr>
+          <a:xfrm>
+            <a:off x="10966399" y="4087368"/>
+            <a:ext cx="91440" cy="91440"/>
+          </a:xfrm>
+          <a:prstGeom prst="rect">
+            <a:avLst/>
+          </a:prstGeom>
+          <a:solidFill>
+            <a:srgbClr val="FF6B7A"/>
+          </a:solidFill>
+          <a:ln w="12700">
+            <a:solidFill>
+              <a:srgbClr val="FF6B7A"/>
+            </a:solidFill>
+            <a:prstDash val="solid"/>
+          </a:ln>
+        </p:spPr>
+      </p:sp>
+      <p:sp>
+        <p:nvSpPr>
+          <p:cNvPr id="14" name="Text 12"/>
+          <p:cNvSpPr/>
+          <p:nvPr/>
+        </p:nvSpPr>
+        <p:spPr>
+          <a:xfrm>
+            <a:off x="6604711" y="3968496"/>
+            <a:ext cx="4251960" cy="347472"/>
           </a:xfrm>
           <a:prstGeom prst="rect">
             <a:avLst/>
@@ -9930,7 +11318,7 @@
               <a:buNone/>
             </a:pPr>
             <a:r>
-              <a:rPr lang="he-IL" altLang="en-US" sz="1150" dirty="0">
+              <a:rPr lang="he-IL" altLang="en-US" sz="1300" dirty="0">
                 <a:solidFill>
                   <a:srgbClr val="91A0B7"/>
                 </a:solidFill>
@@ -9938,26 +11326,229 @@
                 <a:ea typeface="Calibri" pitchFamily="34" charset="-122"/>
                 <a:cs typeface="Calibri" pitchFamily="34" charset="-120"/>
               </a:rPr>
-              <a:t>‫מיטיגציה: ‪manifest‬ חתום ‪SHA-256‬ לכל אובייקט — שם מקורי, שם יעד ותאריך מקור — עם ‪S3 Object Lock‬. נדרש אישור מפורש של הלשכה המשפטית לפני ההעתקה.‬</a:t>
-            </a:r>
-            <a:endParaRPr lang="he-IL" sz="1150" dirty="0"/>
-          </a:p>
-        </p:txBody>
-      </p:sp>
-      <p:sp>
-        <p:nvSpPr>
-          <p:cNvPr id="13" name="Shape 11"/>
-          <p:cNvSpPr/>
-          <p:nvPr/>
-        </p:nvSpPr>
-        <p:spPr>
-          <a:xfrm>
-            <a:off x="4474159" y="1975104"/>
-            <a:ext cx="3246120" cy="1810512"/>
+              <a:t>‫‪manifest‬ חתום ‪SHA-256‬ לכל אובייקט: שם מקורי, נתיב ותאריך מקור‬</a:t>
+            </a:r>
+            <a:endParaRPr lang="he-IL" sz="1300" dirty="0"/>
+          </a:p>
+        </p:txBody>
+      </p:sp>
+      <p:sp>
+        <p:nvSpPr>
+          <p:cNvPr id="15" name="Shape 13"/>
+          <p:cNvSpPr/>
+          <p:nvPr/>
+        </p:nvSpPr>
+        <p:spPr>
+          <a:xfrm>
+            <a:off x="10966399" y="4471416"/>
+            <a:ext cx="91440" cy="91440"/>
+          </a:xfrm>
+          <a:prstGeom prst="rect">
+            <a:avLst/>
+          </a:prstGeom>
+          <a:solidFill>
+            <a:srgbClr val="FF6B7A"/>
+          </a:solidFill>
+          <a:ln w="12700">
+            <a:solidFill>
+              <a:srgbClr val="FF6B7A"/>
+            </a:solidFill>
+            <a:prstDash val="solid"/>
+          </a:ln>
+        </p:spPr>
+      </p:sp>
+      <p:sp>
+        <p:nvSpPr>
+          <p:cNvPr id="16" name="Text 14"/>
+          <p:cNvSpPr/>
+          <p:nvPr/>
+        </p:nvSpPr>
+        <p:spPr>
+          <a:xfrm>
+            <a:off x="6604711" y="4352544"/>
+            <a:ext cx="4251960" cy="347472"/>
+          </a:xfrm>
+          <a:prstGeom prst="rect">
+            <a:avLst/>
+          </a:prstGeom>
+          <a:noFill/>
+          <a:ln/>
+        </p:spPr>
+        <p:txBody>
+          <a:bodyPr wrap="square" lIns="0" tIns="0" rIns="0" bIns="0" rtlCol="0" anchor="t"/>
+          <a:lstStyle/>
+          <a:p>
+            <a:pPr rtl="1" algn="r" indent="0" marL="0">
+              <a:lnSpc>
+                <a:spcPct val="120000"/>
+              </a:lnSpc>
+              <a:buNone/>
+            </a:pPr>
+            <a:r>
+              <a:rPr lang="he-IL" altLang="en-US" sz="1300" dirty="0">
+                <a:solidFill>
+                  <a:srgbClr val="91A0B7"/>
+                </a:solidFill>
+                <a:latin typeface="Calibri" pitchFamily="34" charset="0"/>
+                <a:ea typeface="Calibri" pitchFamily="34" charset="-122"/>
+                <a:cs typeface="Calibri" pitchFamily="34" charset="-120"/>
+              </a:rPr>
+              <a:t>‫‪S3 Object Lock‬ במצב ‪Compliance‬ — אין שינוי ואין מחיקה‬</a:t>
+            </a:r>
+            <a:endParaRPr lang="he-IL" sz="1300" dirty="0"/>
+          </a:p>
+        </p:txBody>
+      </p:sp>
+      <p:sp>
+        <p:nvSpPr>
+          <p:cNvPr id="17" name="Shape 15"/>
+          <p:cNvSpPr/>
+          <p:nvPr/>
+        </p:nvSpPr>
+        <p:spPr>
+          <a:xfrm>
+            <a:off x="10966399" y="4855464"/>
+            <a:ext cx="91440" cy="91440"/>
+          </a:xfrm>
+          <a:prstGeom prst="rect">
+            <a:avLst/>
+          </a:prstGeom>
+          <a:solidFill>
+            <a:srgbClr val="FF6B7A"/>
+          </a:solidFill>
+          <a:ln w="12700">
+            <a:solidFill>
+              <a:srgbClr val="FF6B7A"/>
+            </a:solidFill>
+            <a:prstDash val="solid"/>
+          </a:ln>
+        </p:spPr>
+      </p:sp>
+      <p:sp>
+        <p:nvSpPr>
+          <p:cNvPr id="18" name="Text 16"/>
+          <p:cNvSpPr/>
+          <p:nvPr/>
+        </p:nvSpPr>
+        <p:spPr>
+          <a:xfrm>
+            <a:off x="6604711" y="4736592"/>
+            <a:ext cx="4251960" cy="347472"/>
+          </a:xfrm>
+          <a:prstGeom prst="rect">
+            <a:avLst/>
+          </a:prstGeom>
+          <a:noFill/>
+          <a:ln/>
+        </p:spPr>
+        <p:txBody>
+          <a:bodyPr wrap="square" lIns="0" tIns="0" rIns="0" bIns="0" rtlCol="0" anchor="t"/>
+          <a:lstStyle/>
+          <a:p>
+            <a:pPr rtl="1" algn="r" indent="0" marL="0">
+              <a:lnSpc>
+                <a:spcPct val="120000"/>
+              </a:lnSpc>
+              <a:buNone/>
+            </a:pPr>
+            <a:r>
+              <a:rPr lang="he-IL" altLang="en-US" sz="1300" dirty="0">
+                <a:solidFill>
+                  <a:srgbClr val="91A0B7"/>
+                </a:solidFill>
+                <a:latin typeface="Calibri" pitchFamily="34" charset="0"/>
+                <a:ea typeface="Calibri" pitchFamily="34" charset="-122"/>
+                <a:cs typeface="Calibri" pitchFamily="34" charset="-120"/>
+              </a:rPr>
+              <a:t>‫שימור ה-‪metadata‬ המקורי לצד הקובץ ביעד‬</a:t>
+            </a:r>
+            <a:endParaRPr lang="he-IL" sz="1300" dirty="0"/>
+          </a:p>
+        </p:txBody>
+      </p:sp>
+      <p:sp>
+        <p:nvSpPr>
+          <p:cNvPr id="19" name="Shape 17"/>
+          <p:cNvSpPr/>
+          <p:nvPr/>
+        </p:nvSpPr>
+        <p:spPr>
+          <a:xfrm>
+            <a:off x="6604711" y="5157216"/>
+            <a:ext cx="4453128" cy="457200"/>
           </a:xfrm>
           <a:prstGeom prst="roundRect">
             <a:avLst>
-              <a:gd name="adj" fmla="val 2525"/>
+              <a:gd name="adj" fmla="val 32000"/>
+            </a:avLst>
+          </a:prstGeom>
+          <a:solidFill>
+            <a:srgbClr val="3A1620"/>
+          </a:solidFill>
+          <a:ln w="12700">
+            <a:solidFill>
+              <a:srgbClr val="3A1620"/>
+            </a:solidFill>
+            <a:prstDash val="solid"/>
+          </a:ln>
+        </p:spPr>
+      </p:sp>
+      <p:sp>
+        <p:nvSpPr>
+          <p:cNvPr id="20" name="Text 18"/>
+          <p:cNvSpPr/>
+          <p:nvPr/>
+        </p:nvSpPr>
+        <p:spPr>
+          <a:xfrm>
+            <a:off x="6751015" y="5157216"/>
+            <a:ext cx="4160520" cy="457200"/>
+          </a:xfrm>
+          <a:prstGeom prst="rect">
+            <a:avLst/>
+          </a:prstGeom>
+          <a:noFill/>
+          <a:ln/>
+        </p:spPr>
+        <p:txBody>
+          <a:bodyPr wrap="square" lIns="0" tIns="0" rIns="0" bIns="0" rtlCol="0" anchor="ctr"/>
+          <a:lstStyle/>
+          <a:p>
+            <a:pPr rtl="1" algn="r" indent="0" marL="0">
+              <a:lnSpc>
+                <a:spcPct val="100000"/>
+              </a:lnSpc>
+              <a:buNone/>
+            </a:pPr>
+            <a:r>
+              <a:rPr lang="he-IL" altLang="en-US" sz="1300" b="1" dirty="0">
+                <a:solidFill>
+                  <a:srgbClr val="FF6B7A"/>
+                </a:solidFill>
+                <a:latin typeface="Calibri" pitchFamily="34" charset="0"/>
+                <a:ea typeface="Calibri" pitchFamily="34" charset="-122"/>
+                <a:cs typeface="Calibri" pitchFamily="34" charset="-120"/>
+              </a:rPr>
+              <a:t>‫נדרש: אישור הלשכה המשפטית לפני ההעתקה הראשונה‬</a:t>
+            </a:r>
+            <a:endParaRPr lang="he-IL" sz="1300" dirty="0"/>
+          </a:p>
+        </p:txBody>
+      </p:sp>
+      <p:sp>
+        <p:nvSpPr>
+          <p:cNvPr id="21" name="Shape 19"/>
+          <p:cNvSpPr/>
+          <p:nvPr/>
+        </p:nvSpPr>
+        <p:spPr>
+          <a:xfrm>
+            <a:off x="822960" y="2011680"/>
+            <a:ext cx="5074920" cy="3712464"/>
+          </a:xfrm>
+          <a:prstGeom prst="roundRect">
+            <a:avLst>
+              <a:gd name="adj" fmla="val 1232"/>
             </a:avLst>
           </a:prstGeom>
           <a:solidFill>
@@ -9973,14 +11564,14 @@
       </p:sp>
       <p:sp>
         <p:nvSpPr>
-          <p:cNvPr id="14" name="Shape 12"/>
-          <p:cNvSpPr/>
-          <p:nvPr/>
-        </p:nvSpPr>
-        <p:spPr>
-          <a:xfrm>
-            <a:off x="7669987" y="2121408"/>
-            <a:ext cx="50292" cy="1517904"/>
+          <p:cNvPr id="22" name="Shape 20"/>
+          <p:cNvSpPr/>
+          <p:nvPr/>
+        </p:nvSpPr>
+        <p:spPr>
+          <a:xfrm>
+            <a:off x="5847588" y="2194560"/>
+            <a:ext cx="50292" cy="3346704"/>
           </a:xfrm>
           <a:prstGeom prst="rect">
             <a:avLst/>
@@ -9998,60 +11589,18 @@
       </p:sp>
       <p:sp>
         <p:nvSpPr>
-          <p:cNvPr id="15" name="Text 13"/>
-          <p:cNvSpPr/>
-          <p:nvPr/>
-        </p:nvSpPr>
-        <p:spPr>
-          <a:xfrm>
-            <a:off x="5772607" y="2103120"/>
-            <a:ext cx="1618488" cy="310896"/>
-          </a:xfrm>
-          <a:prstGeom prst="rect">
-            <a:avLst/>
-          </a:prstGeom>
-          <a:noFill/>
-          <a:ln/>
-        </p:spPr>
-        <p:txBody>
-          <a:bodyPr wrap="square" lIns="0" tIns="0" rIns="0" bIns="0" rtlCol="0" anchor="ctr"/>
-          <a:lstStyle/>
-          <a:p>
-            <a:pPr rtl="1" algn="r" indent="0" marL="0">
-              <a:lnSpc>
-                <a:spcPct val="100000"/>
-              </a:lnSpc>
-              <a:buNone/>
-            </a:pPr>
-            <a:r>
-              <a:rPr lang="he-IL" altLang="en-US" sz="1400" b="1" dirty="0">
-                <a:solidFill>
-                  <a:srgbClr val="FF6B7A"/>
-                </a:solidFill>
-                <a:latin typeface="Calibri" pitchFamily="34" charset="0"/>
-                <a:ea typeface="Calibri" pitchFamily="34" charset="-122"/>
-                <a:cs typeface="Calibri" pitchFamily="34" charset="-120"/>
-              </a:rPr>
-              <a:t>‫רגולציה · ריבונות‬</a:t>
-            </a:r>
-            <a:endParaRPr lang="he-IL" sz="1400" dirty="0"/>
-          </a:p>
-        </p:txBody>
-      </p:sp>
-      <p:sp>
-        <p:nvSpPr>
-          <p:cNvPr id="16" name="Shape 14"/>
-          <p:cNvSpPr/>
-          <p:nvPr/>
-        </p:nvSpPr>
-        <p:spPr>
-          <a:xfrm>
-            <a:off x="4730191" y="2139696"/>
-            <a:ext cx="932688" cy="237744"/>
+          <p:cNvPr id="23" name="Shape 21"/>
+          <p:cNvSpPr/>
+          <p:nvPr/>
+        </p:nvSpPr>
+        <p:spPr>
+          <a:xfrm>
+            <a:off x="1133856" y="2286000"/>
+            <a:ext cx="1078992" cy="274320"/>
           </a:xfrm>
           <a:prstGeom prst="roundRect">
             <a:avLst>
-              <a:gd name="adj" fmla="val 115385"/>
+              <a:gd name="adj" fmla="val 100000"/>
             </a:avLst>
           </a:prstGeom>
           <a:solidFill>
@@ -10067,14 +11616,14 @@
       </p:sp>
       <p:sp>
         <p:nvSpPr>
-          <p:cNvPr id="17" name="Text 15"/>
-          <p:cNvSpPr/>
-          <p:nvPr/>
-        </p:nvSpPr>
-        <p:spPr>
-          <a:xfrm>
-            <a:off x="4730191" y="2139696"/>
-            <a:ext cx="932688" cy="237744"/>
+          <p:cNvPr id="24" name="Text 22"/>
+          <p:cNvSpPr/>
+          <p:nvPr/>
+        </p:nvSpPr>
+        <p:spPr>
+          <a:xfrm>
+            <a:off x="1133856" y="2286000"/>
+            <a:ext cx="1078992" cy="274320"/>
           </a:xfrm>
           <a:prstGeom prst="rect">
             <a:avLst/>
@@ -10093,7 +11642,7 @@
               <a:buNone/>
             </a:pPr>
             <a:r>
-              <a:rPr lang="he-IL" altLang="en-US" sz="950" b="1" dirty="0">
+              <a:rPr lang="he-IL" altLang="en-US" sz="1000" b="1" dirty="0">
                 <a:solidFill>
                   <a:srgbClr val="FF6B7A"/>
                 </a:solidFill>
@@ -10103,72 +11652,72 @@
               </a:rPr>
               <a:t>‫חוסם התחלה‬</a:t>
             </a:r>
-            <a:endParaRPr lang="he-IL" sz="950" dirty="0"/>
-          </a:p>
-        </p:txBody>
-      </p:sp>
-      <p:sp>
-        <p:nvSpPr>
-          <p:cNvPr id="18" name="Text 16"/>
-          <p:cNvSpPr/>
-          <p:nvPr/>
-        </p:nvSpPr>
-        <p:spPr>
-          <a:xfrm>
-            <a:off x="4730191" y="2468880"/>
-            <a:ext cx="2679192" cy="457200"/>
-          </a:xfrm>
-          <a:prstGeom prst="rect">
-            <a:avLst/>
-          </a:prstGeom>
-          <a:noFill/>
-          <a:ln/>
-        </p:spPr>
-        <p:txBody>
-          <a:bodyPr wrap="square" lIns="0" tIns="0" rIns="0" bIns="0" rtlCol="0" anchor="t"/>
-          <a:lstStyle/>
-          <a:p>
-            <a:pPr rtl="1" algn="r" indent="0" marL="0">
-              <a:lnSpc>
-                <a:spcPct val="120000"/>
-              </a:lnSpc>
-              <a:buNone/>
-            </a:pPr>
-            <a:r>
-              <a:rPr lang="he-IL" altLang="en-US" sz="1250" dirty="0">
-                <a:solidFill>
-                  <a:srgbClr val="F4F7FB"/>
-                </a:solidFill>
-                <a:latin typeface="Calibri" pitchFamily="34" charset="0"/>
-                <a:ea typeface="Calibri" pitchFamily="34" charset="-122"/>
-                <a:cs typeface="Calibri" pitchFamily="34" charset="-120"/>
-              </a:rPr>
-              <a:t>‫מידע רפואי ופיננסי מזוהה היוצא משליטת הארגון.‬</a:t>
-            </a:r>
-            <a:endParaRPr lang="he-IL" sz="1250" dirty="0"/>
-          </a:p>
-        </p:txBody>
-      </p:sp>
-      <p:sp>
-        <p:nvSpPr>
-          <p:cNvPr id="19" name="Shape 17"/>
-          <p:cNvSpPr/>
-          <p:nvPr/>
-        </p:nvSpPr>
-        <p:spPr>
-          <a:xfrm>
-            <a:off x="4730191" y="2962656"/>
-            <a:ext cx="2679192" cy="9144"/>
-          </a:xfrm>
-          <a:prstGeom prst="rect">
-            <a:avLst/>
-          </a:prstGeom>
-          <a:solidFill>
-            <a:srgbClr val="2C3A54"/>
+            <a:endParaRPr lang="he-IL" sz="1000" dirty="0"/>
+          </a:p>
+        </p:txBody>
+      </p:sp>
+      <p:sp>
+        <p:nvSpPr>
+          <p:cNvPr id="25" name="Text 23"/>
+          <p:cNvSpPr/>
+          <p:nvPr/>
+        </p:nvSpPr>
+        <p:spPr>
+          <a:xfrm>
+            <a:off x="2340864" y="2249424"/>
+            <a:ext cx="3191256" cy="347472"/>
+          </a:xfrm>
+          <a:prstGeom prst="rect">
+            <a:avLst/>
+          </a:prstGeom>
+          <a:noFill/>
+          <a:ln/>
+        </p:spPr>
+        <p:txBody>
+          <a:bodyPr wrap="square" lIns="0" tIns="0" rIns="0" bIns="0" rtlCol="0" anchor="ctr"/>
+          <a:lstStyle/>
+          <a:p>
+            <a:pPr rtl="1" algn="r" indent="0" marL="0">
+              <a:lnSpc>
+                <a:spcPct val="100000"/>
+              </a:lnSpc>
+              <a:buNone/>
+            </a:pPr>
+            <a:r>
+              <a:rPr lang="he-IL" altLang="en-US" sz="2000" b="1" dirty="0">
+                <a:solidFill>
+                  <a:srgbClr val="FF6B7A"/>
+                </a:solidFill>
+                <a:latin typeface="Calibri" pitchFamily="34" charset="0"/>
+                <a:ea typeface="Calibri" pitchFamily="34" charset="-122"/>
+                <a:cs typeface="Calibri" pitchFamily="34" charset="-120"/>
+              </a:rPr>
+              <a:t>‫רגולציה · ריבונות הנתונים‬</a:t>
+            </a:r>
+            <a:endParaRPr lang="he-IL" sz="2000" dirty="0"/>
+          </a:p>
+        </p:txBody>
+      </p:sp>
+      <p:sp>
+        <p:nvSpPr>
+          <p:cNvPr id="26" name="Shape 24"/>
+          <p:cNvSpPr/>
+          <p:nvPr/>
+        </p:nvSpPr>
+        <p:spPr>
+          <a:xfrm>
+            <a:off x="1133856" y="2724912"/>
+            <a:ext cx="4453128" cy="10973"/>
+          </a:xfrm>
+          <a:prstGeom prst="rect">
+            <a:avLst/>
+          </a:prstGeom>
+          <a:solidFill>
+            <a:srgbClr val="3A2430"/>
           </a:solidFill>
           <a:ln w="12700">
             <a:solidFill>
-              <a:srgbClr val="2C3A54"/>
+              <a:srgbClr val="3A2430"/>
             </a:solidFill>
             <a:prstDash val="solid"/>
           </a:ln>
@@ -10176,14 +11725,14 @@
       </p:sp>
       <p:sp>
         <p:nvSpPr>
-          <p:cNvPr id="20" name="Text 18"/>
-          <p:cNvSpPr/>
-          <p:nvPr/>
-        </p:nvSpPr>
-        <p:spPr>
-          <a:xfrm>
-            <a:off x="4730191" y="3035808"/>
-            <a:ext cx="2679192" cy="658368"/>
+          <p:cNvPr id="27" name="Text 25"/>
+          <p:cNvSpPr/>
+          <p:nvPr/>
+        </p:nvSpPr>
+        <p:spPr>
+          <a:xfrm>
+            <a:off x="1133856" y="2852928"/>
+            <a:ext cx="4453128" cy="786384"/>
           </a:xfrm>
           <a:prstGeom prst="rect">
             <a:avLst/>
@@ -10197,12 +11746,121 @@
           <a:p>
             <a:pPr rtl="1" algn="r" indent="0" marL="0">
               <a:lnSpc>
+                <a:spcPct val="130000"/>
+              </a:lnSpc>
+              <a:buNone/>
+            </a:pPr>
+            <a:r>
+              <a:rPr lang="he-IL" altLang="en-US" sz="1400" dirty="0">
+                <a:solidFill>
+                  <a:srgbClr val="F4F7FB"/>
+                </a:solidFill>
+                <a:latin typeface="Calibri" pitchFamily="34" charset="0"/>
+                <a:ea typeface="Calibri" pitchFamily="34" charset="-122"/>
+                <a:cs typeface="Calibri" pitchFamily="34" charset="-120"/>
+              </a:rPr>
+              <a:t>‫דימות והקלטות ‪Verint‬ מכילים מידע רפואי ופיננסי מזוהה. העברתם לספק ענן מוציאה אותם משליטת הארגון ונכנסת לתחום הרגולציה על מידע רגיש.‬</a:t>
+            </a:r>
+            <a:endParaRPr lang="he-IL" sz="1400" dirty="0"/>
+          </a:p>
+        </p:txBody>
+      </p:sp>
+      <p:sp>
+        <p:nvSpPr>
+          <p:cNvPr id="28" name="Text 26"/>
+          <p:cNvSpPr/>
+          <p:nvPr/>
+        </p:nvSpPr>
+        <p:spPr>
+          <a:xfrm>
+            <a:off x="1133856" y="3694176"/>
+            <a:ext cx="4453128" cy="237744"/>
+          </a:xfrm>
+          <a:prstGeom prst="rect">
+            <a:avLst/>
+          </a:prstGeom>
+          <a:noFill/>
+          <a:ln/>
+        </p:spPr>
+        <p:txBody>
+          <a:bodyPr wrap="square" lIns="0" tIns="0" rIns="0" bIns="0" rtlCol="0" anchor="ctr"/>
+          <a:lstStyle/>
+          <a:p>
+            <a:pPr rtl="1" algn="r" indent="0" marL="0">
+              <a:lnSpc>
+                <a:spcPct val="100000"/>
+              </a:lnSpc>
+              <a:buNone/>
+            </a:pPr>
+            <a:r>
+              <a:rPr lang="he-IL" altLang="en-US" sz="1050" b="1" spc="110" kern="0" dirty="0">
+                <a:solidFill>
+                  <a:srgbClr val="5E6E85"/>
+                </a:solidFill>
+                <a:latin typeface="Calibri" pitchFamily="34" charset="0"/>
+                <a:ea typeface="Calibri" pitchFamily="34" charset="-122"/>
+                <a:cs typeface="Calibri" pitchFamily="34" charset="-120"/>
+              </a:rPr>
+              <a:t>‫מיטיגציה‬</a:t>
+            </a:r>
+            <a:endParaRPr lang="he-IL" sz="1050" dirty="0"/>
+          </a:p>
+        </p:txBody>
+      </p:sp>
+      <p:sp>
+        <p:nvSpPr>
+          <p:cNvPr id="29" name="Shape 27"/>
+          <p:cNvSpPr/>
+          <p:nvPr/>
+        </p:nvSpPr>
+        <p:spPr>
+          <a:xfrm>
+            <a:off x="5495544" y="4087368"/>
+            <a:ext cx="91440" cy="91440"/>
+          </a:xfrm>
+          <a:prstGeom prst="rect">
+            <a:avLst/>
+          </a:prstGeom>
+          <a:solidFill>
+            <a:srgbClr val="FF6B7A"/>
+          </a:solidFill>
+          <a:ln w="12700">
+            <a:solidFill>
+              <a:srgbClr val="FF6B7A"/>
+            </a:solidFill>
+            <a:prstDash val="solid"/>
+          </a:ln>
+        </p:spPr>
+      </p:sp>
+      <p:sp>
+        <p:nvSpPr>
+          <p:cNvPr id="30" name="Text 28"/>
+          <p:cNvSpPr/>
+          <p:nvPr/>
+        </p:nvSpPr>
+        <p:spPr>
+          <a:xfrm>
+            <a:off x="1133856" y="3968496"/>
+            <a:ext cx="4251960" cy="347472"/>
+          </a:xfrm>
+          <a:prstGeom prst="rect">
+            <a:avLst/>
+          </a:prstGeom>
+          <a:noFill/>
+          <a:ln/>
+        </p:spPr>
+        <p:txBody>
+          <a:bodyPr wrap="square" lIns="0" tIns="0" rIns="0" bIns="0" rtlCol="0" anchor="t"/>
+          <a:lstStyle/>
+          <a:p>
+            <a:pPr rtl="1" algn="r" indent="0" marL="0">
+              <a:lnSpc>
                 <a:spcPct val="120000"/>
               </a:lnSpc>
               <a:buNone/>
             </a:pPr>
             <a:r>
-              <a:rPr lang="he-IL" altLang="en-US" sz="1150" dirty="0">
+              <a:rPr lang="he-IL" altLang="en-US" sz="1300" dirty="0">
                 <a:solidFill>
                   <a:srgbClr val="91A0B7"/>
                 </a:solidFill>
@@ -10210,30 +11868,231 @@
                 <a:ea typeface="Calibri" pitchFamily="34" charset="-122"/>
                 <a:cs typeface="Calibri" pitchFamily="34" charset="-120"/>
               </a:rPr>
-              <a:t>‫מיטיגציה: אזור ‪il-central-1‬ בתל אביב, הצפנה ב-‪KMS‬ עם מפתח בבעלותנו, ואישור ‪DPO‬ ורגולטור לפני ההעתקה.‬</a:t>
-            </a:r>
-            <a:endParaRPr lang="he-IL" sz="1150" dirty="0"/>
-          </a:p>
-        </p:txBody>
-      </p:sp>
-      <p:sp>
-        <p:nvSpPr>
-          <p:cNvPr id="21" name="Shape 19"/>
-          <p:cNvSpPr/>
-          <p:nvPr/>
-        </p:nvSpPr>
-        <p:spPr>
-          <a:xfrm>
-            <a:off x="825703" y="1975104"/>
-            <a:ext cx="3246120" cy="1810512"/>
+              <a:t>‫אחסון באזור ‪il-central-1‬ בתל אביב — הדאטה אינו יוצא מישראל‬</a:t>
+            </a:r>
+            <a:endParaRPr lang="he-IL" sz="1300" dirty="0"/>
+          </a:p>
+        </p:txBody>
+      </p:sp>
+      <p:sp>
+        <p:nvSpPr>
+          <p:cNvPr id="31" name="Shape 29"/>
+          <p:cNvSpPr/>
+          <p:nvPr/>
+        </p:nvSpPr>
+        <p:spPr>
+          <a:xfrm>
+            <a:off x="5495544" y="4471416"/>
+            <a:ext cx="91440" cy="91440"/>
+          </a:xfrm>
+          <a:prstGeom prst="rect">
+            <a:avLst/>
+          </a:prstGeom>
+          <a:solidFill>
+            <a:srgbClr val="FF6B7A"/>
+          </a:solidFill>
+          <a:ln w="12700">
+            <a:solidFill>
+              <a:srgbClr val="FF6B7A"/>
+            </a:solidFill>
+            <a:prstDash val="solid"/>
+          </a:ln>
+        </p:spPr>
+      </p:sp>
+      <p:sp>
+        <p:nvSpPr>
+          <p:cNvPr id="32" name="Text 30"/>
+          <p:cNvSpPr/>
+          <p:nvPr/>
+        </p:nvSpPr>
+        <p:spPr>
+          <a:xfrm>
+            <a:off x="1133856" y="4352544"/>
+            <a:ext cx="4251960" cy="347472"/>
+          </a:xfrm>
+          <a:prstGeom prst="rect">
+            <a:avLst/>
+          </a:prstGeom>
+          <a:noFill/>
+          <a:ln/>
+        </p:spPr>
+        <p:txBody>
+          <a:bodyPr wrap="square" lIns="0" tIns="0" rIns="0" bIns="0" rtlCol="0" anchor="t"/>
+          <a:lstStyle/>
+          <a:p>
+            <a:pPr rtl="1" algn="r" indent="0" marL="0">
+              <a:lnSpc>
+                <a:spcPct val="120000"/>
+              </a:lnSpc>
+              <a:buNone/>
+            </a:pPr>
+            <a:r>
+              <a:rPr lang="he-IL" altLang="en-US" sz="1300" dirty="0">
+                <a:solidFill>
+                  <a:srgbClr val="91A0B7"/>
+                </a:solidFill>
+                <a:latin typeface="Calibri" pitchFamily="34" charset="0"/>
+                <a:ea typeface="Calibri" pitchFamily="34" charset="-122"/>
+                <a:cs typeface="Calibri" pitchFamily="34" charset="-120"/>
+              </a:rPr>
+              <a:t>‫הצפנה ב-‪KMS‬ עם מפתח בבעלותנו; ל-‪AWS‬ אין גישה לתוכן‬</a:t>
+            </a:r>
+            <a:endParaRPr lang="he-IL" sz="1300" dirty="0"/>
+          </a:p>
+        </p:txBody>
+      </p:sp>
+      <p:sp>
+        <p:nvSpPr>
+          <p:cNvPr id="33" name="Shape 31"/>
+          <p:cNvSpPr/>
+          <p:nvPr/>
+        </p:nvSpPr>
+        <p:spPr>
+          <a:xfrm>
+            <a:off x="5495544" y="4855464"/>
+            <a:ext cx="91440" cy="91440"/>
+          </a:xfrm>
+          <a:prstGeom prst="rect">
+            <a:avLst/>
+          </a:prstGeom>
+          <a:solidFill>
+            <a:srgbClr val="FF6B7A"/>
+          </a:solidFill>
+          <a:ln w="12700">
+            <a:solidFill>
+              <a:srgbClr val="FF6B7A"/>
+            </a:solidFill>
+            <a:prstDash val="solid"/>
+          </a:ln>
+        </p:spPr>
+      </p:sp>
+      <p:sp>
+        <p:nvSpPr>
+          <p:cNvPr id="34" name="Text 32"/>
+          <p:cNvSpPr/>
+          <p:nvPr/>
+        </p:nvSpPr>
+        <p:spPr>
+          <a:xfrm>
+            <a:off x="1133856" y="4736592"/>
+            <a:ext cx="4251960" cy="347472"/>
+          </a:xfrm>
+          <a:prstGeom prst="rect">
+            <a:avLst/>
+          </a:prstGeom>
+          <a:noFill/>
+          <a:ln/>
+        </p:spPr>
+        <p:txBody>
+          <a:bodyPr wrap="square" lIns="0" tIns="0" rIns="0" bIns="0" rtlCol="0" anchor="t"/>
+          <a:lstStyle/>
+          <a:p>
+            <a:pPr rtl="1" algn="r" indent="0" marL="0">
+              <a:lnSpc>
+                <a:spcPct val="120000"/>
+              </a:lnSpc>
+              <a:buNone/>
+            </a:pPr>
+            <a:r>
+              <a:rPr lang="he-IL" altLang="en-US" sz="1300" dirty="0">
+                <a:solidFill>
+                  <a:srgbClr val="91A0B7"/>
+                </a:solidFill>
+                <a:latin typeface="Calibri" pitchFamily="34" charset="0"/>
+                <a:ea typeface="Calibri" pitchFamily="34" charset="-122"/>
+                <a:cs typeface="Calibri" pitchFamily="34" charset="-120"/>
+              </a:rPr>
+              <a:t>‫הרשאות מינימום ותיעוד גישה מלא ב-‪CloudTrail‬‬</a:t>
+            </a:r>
+            <a:endParaRPr lang="he-IL" sz="1300" dirty="0"/>
+          </a:p>
+        </p:txBody>
+      </p:sp>
+      <p:sp>
+        <p:nvSpPr>
+          <p:cNvPr id="35" name="Shape 33"/>
+          <p:cNvSpPr/>
+          <p:nvPr/>
+        </p:nvSpPr>
+        <p:spPr>
+          <a:xfrm>
+            <a:off x="1133856" y="5157216"/>
+            <a:ext cx="4453128" cy="457200"/>
           </a:xfrm>
           <a:prstGeom prst="roundRect">
             <a:avLst>
-              <a:gd name="adj" fmla="val 2525"/>
+              <a:gd name="adj" fmla="val 32000"/>
             </a:avLst>
           </a:prstGeom>
           <a:solidFill>
-            <a:srgbClr val="141C2C"/>
+            <a:srgbClr val="3A1620"/>
+          </a:solidFill>
+          <a:ln w="12700">
+            <a:solidFill>
+              <a:srgbClr val="3A1620"/>
+            </a:solidFill>
+            <a:prstDash val="solid"/>
+          </a:ln>
+        </p:spPr>
+      </p:sp>
+      <p:sp>
+        <p:nvSpPr>
+          <p:cNvPr id="36" name="Text 34"/>
+          <p:cNvSpPr/>
+          <p:nvPr/>
+        </p:nvSpPr>
+        <p:spPr>
+          <a:xfrm>
+            <a:off x="1280160" y="5157216"/>
+            <a:ext cx="4160520" cy="457200"/>
+          </a:xfrm>
+          <a:prstGeom prst="rect">
+            <a:avLst/>
+          </a:prstGeom>
+          <a:noFill/>
+          <a:ln/>
+        </p:spPr>
+        <p:txBody>
+          <a:bodyPr wrap="square" lIns="0" tIns="0" rIns="0" bIns="0" rtlCol="0" anchor="ctr"/>
+          <a:lstStyle/>
+          <a:p>
+            <a:pPr rtl="1" algn="r" indent="0" marL="0">
+              <a:lnSpc>
+                <a:spcPct val="100000"/>
+              </a:lnSpc>
+              <a:buNone/>
+            </a:pPr>
+            <a:r>
+              <a:rPr lang="he-IL" altLang="en-US" sz="1300" b="1" dirty="0">
+                <a:solidFill>
+                  <a:srgbClr val="FF6B7A"/>
+                </a:solidFill>
+                <a:latin typeface="Calibri" pitchFamily="34" charset="0"/>
+                <a:ea typeface="Calibri" pitchFamily="34" charset="-122"/>
+                <a:cs typeface="Calibri" pitchFamily="34" charset="-120"/>
+              </a:rPr>
+              <a:t>‫נדרש: אישור ‪DPO‬ והרגולטור לפני ההעתקה הראשונה‬</a:t>
+            </a:r>
+            <a:endParaRPr lang="he-IL" sz="1300" dirty="0"/>
+          </a:p>
+        </p:txBody>
+      </p:sp>
+      <p:sp>
+        <p:nvSpPr>
+          <p:cNvPr id="37" name="Shape 35"/>
+          <p:cNvSpPr/>
+          <p:nvPr/>
+        </p:nvSpPr>
+        <p:spPr>
+          <a:xfrm>
+            <a:off x="822960" y="5907024"/>
+            <a:ext cx="10545775" cy="10973"/>
+          </a:xfrm>
+          <a:prstGeom prst="rect">
+            <a:avLst/>
+          </a:prstGeom>
+          <a:solidFill>
+            <a:srgbClr val="23304A"/>
           </a:solidFill>
           <a:ln w="12700">
             <a:solidFill>
@@ -10245,817 +12104,7 @@
       </p:sp>
       <p:sp>
         <p:nvSpPr>
-          <p:cNvPr id="22" name="Shape 20"/>
-          <p:cNvSpPr/>
-          <p:nvPr/>
-        </p:nvSpPr>
-        <p:spPr>
-          <a:xfrm>
-            <a:off x="4021531" y="2121408"/>
-            <a:ext cx="50292" cy="1517904"/>
-          </a:xfrm>
-          <a:prstGeom prst="rect">
-            <a:avLst/>
-          </a:prstGeom>
-          <a:solidFill>
-            <a:srgbClr val="FF9F43"/>
-          </a:solidFill>
-          <a:ln w="12700">
-            <a:solidFill>
-              <a:srgbClr val="FF9F43"/>
-            </a:solidFill>
-            <a:prstDash val="solid"/>
-          </a:ln>
-        </p:spPr>
-      </p:sp>
-      <p:sp>
-        <p:nvSpPr>
-          <p:cNvPr id="23" name="Text 21"/>
-          <p:cNvSpPr/>
-          <p:nvPr/>
-        </p:nvSpPr>
-        <p:spPr>
-          <a:xfrm>
-            <a:off x="2124151" y="2103120"/>
-            <a:ext cx="1618488" cy="310896"/>
-          </a:xfrm>
-          <a:prstGeom prst="rect">
-            <a:avLst/>
-          </a:prstGeom>
-          <a:noFill/>
-          <a:ln/>
-        </p:spPr>
-        <p:txBody>
-          <a:bodyPr wrap="square" lIns="0" tIns="0" rIns="0" bIns="0" rtlCol="0" anchor="ctr"/>
-          <a:lstStyle/>
-          <a:p>
-            <a:pPr rtl="1" algn="r" indent="0" marL="0">
-              <a:lnSpc>
-                <a:spcPct val="100000"/>
-              </a:lnSpc>
-              <a:buNone/>
-            </a:pPr>
-            <a:r>
-              <a:rPr lang="he-IL" altLang="en-US" sz="1400" b="1" dirty="0">
-                <a:solidFill>
-                  <a:srgbClr val="FF9F43"/>
-                </a:solidFill>
-                <a:latin typeface="Calibri" pitchFamily="34" charset="0"/>
-                <a:ea typeface="Calibri" pitchFamily="34" charset="-122"/>
-                <a:cs typeface="Calibri" pitchFamily="34" charset="-120"/>
-              </a:rPr>
-              <a:t>‫אפליקציה · מצביעים‬</a:t>
-            </a:r>
-            <a:endParaRPr lang="he-IL" sz="1400" dirty="0"/>
-          </a:p>
-        </p:txBody>
-      </p:sp>
-      <p:sp>
-        <p:nvSpPr>
-          <p:cNvPr id="24" name="Text 22"/>
-          <p:cNvSpPr/>
-          <p:nvPr/>
-        </p:nvSpPr>
-        <p:spPr>
-          <a:xfrm>
-            <a:off x="1081735" y="2468880"/>
-            <a:ext cx="2679192" cy="457200"/>
-          </a:xfrm>
-          <a:prstGeom prst="rect">
-            <a:avLst/>
-          </a:prstGeom>
-          <a:noFill/>
-          <a:ln/>
-        </p:spPr>
-        <p:txBody>
-          <a:bodyPr wrap="square" lIns="0" tIns="0" rIns="0" bIns="0" rtlCol="0" anchor="t"/>
-          <a:lstStyle/>
-          <a:p>
-            <a:pPr rtl="1" algn="r" indent="0" marL="0">
-              <a:lnSpc>
-                <a:spcPct val="120000"/>
-              </a:lnSpc>
-              <a:buNone/>
-            </a:pPr>
-            <a:r>
-              <a:rPr lang="he-IL" altLang="en-US" sz="1250" dirty="0">
-                <a:solidFill>
-                  <a:srgbClr val="F4F7FB"/>
-                </a:solidFill>
-                <a:latin typeface="Calibri" pitchFamily="34" charset="0"/>
-                <a:ea typeface="Calibri" pitchFamily="34" charset="-122"/>
-                <a:cs typeface="Calibri" pitchFamily="34" charset="-120"/>
-              </a:rPr>
-              <a:t>‫האפליקציות מצביעות לנתיב ב-‪ECS‬. מעבר ל-‪S3‬ מחייב פיתוח בצד היישום, לא רק העברת דאטה.‬</a:t>
-            </a:r>
-            <a:endParaRPr lang="he-IL" sz="1250" dirty="0"/>
-          </a:p>
-        </p:txBody>
-      </p:sp>
-      <p:sp>
-        <p:nvSpPr>
-          <p:cNvPr id="25" name="Shape 23"/>
-          <p:cNvSpPr/>
-          <p:nvPr/>
-        </p:nvSpPr>
-        <p:spPr>
-          <a:xfrm>
-            <a:off x="1081735" y="2962656"/>
-            <a:ext cx="2679192" cy="9144"/>
-          </a:xfrm>
-          <a:prstGeom prst="rect">
-            <a:avLst/>
-          </a:prstGeom>
-          <a:solidFill>
-            <a:srgbClr val="2C3A54"/>
-          </a:solidFill>
-          <a:ln w="12700">
-            <a:solidFill>
-              <a:srgbClr val="2C3A54"/>
-            </a:solidFill>
-            <a:prstDash val="solid"/>
-          </a:ln>
-        </p:spPr>
-      </p:sp>
-      <p:sp>
-        <p:nvSpPr>
-          <p:cNvPr id="26" name="Text 24"/>
-          <p:cNvSpPr/>
-          <p:nvPr/>
-        </p:nvSpPr>
-        <p:spPr>
-          <a:xfrm>
-            <a:off x="1081735" y="3035808"/>
-            <a:ext cx="2679192" cy="658368"/>
-          </a:xfrm>
-          <a:prstGeom prst="rect">
-            <a:avLst/>
-          </a:prstGeom>
-          <a:noFill/>
-          <a:ln/>
-        </p:spPr>
-        <p:txBody>
-          <a:bodyPr wrap="square" lIns="0" tIns="0" rIns="0" bIns="0" rtlCol="0" anchor="t"/>
-          <a:lstStyle/>
-          <a:p>
-            <a:pPr rtl="1" algn="r" indent="0" marL="0">
-              <a:lnSpc>
-                <a:spcPct val="120000"/>
-              </a:lnSpc>
-              <a:buNone/>
-            </a:pPr>
-            <a:r>
-              <a:rPr lang="he-IL" altLang="en-US" sz="1150" dirty="0">
-                <a:solidFill>
-                  <a:srgbClr val="91A0B7"/>
-                </a:solidFill>
-                <a:latin typeface="Calibri" pitchFamily="34" charset="0"/>
-                <a:ea typeface="Calibri" pitchFamily="34" charset="-122"/>
-                <a:cs typeface="Calibri" pitchFamily="34" charset="-120"/>
-              </a:rPr>
-              <a:t>‫מיטיגציה: אפיון מול צוותי הדימות ו-‪Verint‬, הערכת מאמץ פיתוח, ותקופת ביניים ששתי הכתובות פעילות בה.‬</a:t>
-            </a:r>
-            <a:endParaRPr lang="he-IL" sz="1150" dirty="0"/>
-          </a:p>
-        </p:txBody>
-      </p:sp>
-      <p:sp>
-        <p:nvSpPr>
-          <p:cNvPr id="27" name="Shape 25"/>
-          <p:cNvSpPr/>
-          <p:nvPr/>
-        </p:nvSpPr>
-        <p:spPr>
-          <a:xfrm>
-            <a:off x="8122615" y="3986784"/>
-            <a:ext cx="3246120" cy="1810512"/>
-          </a:xfrm>
-          <a:prstGeom prst="roundRect">
-            <a:avLst>
-              <a:gd name="adj" fmla="val 2525"/>
-            </a:avLst>
-          </a:prstGeom>
-          <a:solidFill>
-            <a:srgbClr val="141C2C"/>
-          </a:solidFill>
-          <a:ln w="12700">
-            <a:solidFill>
-              <a:srgbClr val="23304A"/>
-            </a:solidFill>
-            <a:prstDash val="solid"/>
-          </a:ln>
-        </p:spPr>
-      </p:sp>
-      <p:sp>
-        <p:nvSpPr>
-          <p:cNvPr id="28" name="Shape 26"/>
-          <p:cNvSpPr/>
-          <p:nvPr/>
-        </p:nvSpPr>
-        <p:spPr>
-          <a:xfrm>
-            <a:off x="11318443" y="4133088"/>
-            <a:ext cx="50292" cy="1517904"/>
-          </a:xfrm>
-          <a:prstGeom prst="rect">
-            <a:avLst/>
-          </a:prstGeom>
-          <a:solidFill>
-            <a:srgbClr val="FF9F43"/>
-          </a:solidFill>
-          <a:ln w="12700">
-            <a:solidFill>
-              <a:srgbClr val="FF9F43"/>
-            </a:solidFill>
-            <a:prstDash val="solid"/>
-          </a:ln>
-        </p:spPr>
-      </p:sp>
-      <p:sp>
-        <p:nvSpPr>
-          <p:cNvPr id="29" name="Text 27"/>
-          <p:cNvSpPr/>
-          <p:nvPr/>
-        </p:nvSpPr>
-        <p:spPr>
-          <a:xfrm>
-            <a:off x="9421063" y="4114800"/>
-            <a:ext cx="1618488" cy="310896"/>
-          </a:xfrm>
-          <a:prstGeom prst="rect">
-            <a:avLst/>
-          </a:prstGeom>
-          <a:noFill/>
-          <a:ln/>
-        </p:spPr>
-        <p:txBody>
-          <a:bodyPr wrap="square" lIns="0" tIns="0" rIns="0" bIns="0" rtlCol="0" anchor="ctr"/>
-          <a:lstStyle/>
-          <a:p>
-            <a:pPr rtl="1" algn="r" indent="0" marL="0">
-              <a:lnSpc>
-                <a:spcPct val="100000"/>
-              </a:lnSpc>
-              <a:buNone/>
-            </a:pPr>
-            <a:r>
-              <a:rPr lang="he-IL" altLang="en-US" sz="1400" b="1" dirty="0">
-                <a:solidFill>
-                  <a:srgbClr val="FF9F43"/>
-                </a:solidFill>
-                <a:latin typeface="Calibri" pitchFamily="34" charset="0"/>
-                <a:ea typeface="Calibri" pitchFamily="34" charset="-122"/>
-                <a:cs typeface="Calibri" pitchFamily="34" charset="-120"/>
-              </a:rPr>
-              <a:t>‫מיליוני קבצים‬</a:t>
-            </a:r>
-            <a:endParaRPr lang="he-IL" sz="1400" dirty="0"/>
-          </a:p>
-        </p:txBody>
-      </p:sp>
-      <p:sp>
-        <p:nvSpPr>
-          <p:cNvPr id="30" name="Text 28"/>
-          <p:cNvSpPr/>
-          <p:nvPr/>
-        </p:nvSpPr>
-        <p:spPr>
-          <a:xfrm>
-            <a:off x="8378647" y="4480560"/>
-            <a:ext cx="2679192" cy="457200"/>
-          </a:xfrm>
-          <a:prstGeom prst="rect">
-            <a:avLst/>
-          </a:prstGeom>
-          <a:noFill/>
-          <a:ln/>
-        </p:spPr>
-        <p:txBody>
-          <a:bodyPr wrap="square" lIns="0" tIns="0" rIns="0" bIns="0" rtlCol="0" anchor="t"/>
-          <a:lstStyle/>
-          <a:p>
-            <a:pPr rtl="1" algn="r" indent="0" marL="0">
-              <a:lnSpc>
-                <a:spcPct val="120000"/>
-              </a:lnSpc>
-              <a:buNone/>
-            </a:pPr>
-            <a:r>
-              <a:rPr lang="he-IL" altLang="en-US" sz="1250" dirty="0">
-                <a:solidFill>
-                  <a:srgbClr val="F4F7FB"/>
-                </a:solidFill>
-                <a:latin typeface="Calibri" pitchFamily="34" charset="0"/>
-                <a:ea typeface="Calibri" pitchFamily="34" charset="-122"/>
-                <a:cs typeface="Calibri" pitchFamily="34" charset="-120"/>
-              </a:rPr>
-              <a:t>‫מיליוני קבצים קטנים. שמות ומבנה התיקיות ב-‪S3‬ שונים, ואין מיפוי אחד-לאחד.‬</a:t>
-            </a:r>
-            <a:endParaRPr lang="he-IL" sz="1250" dirty="0"/>
-          </a:p>
-        </p:txBody>
-      </p:sp>
-      <p:sp>
-        <p:nvSpPr>
-          <p:cNvPr id="31" name="Shape 29"/>
-          <p:cNvSpPr/>
-          <p:nvPr/>
-        </p:nvSpPr>
-        <p:spPr>
-          <a:xfrm>
-            <a:off x="8378647" y="4974336"/>
-            <a:ext cx="2679192" cy="9144"/>
-          </a:xfrm>
-          <a:prstGeom prst="rect">
-            <a:avLst/>
-          </a:prstGeom>
-          <a:solidFill>
-            <a:srgbClr val="2C3A54"/>
-          </a:solidFill>
-          <a:ln w="12700">
-            <a:solidFill>
-              <a:srgbClr val="2C3A54"/>
-            </a:solidFill>
-            <a:prstDash val="solid"/>
-          </a:ln>
-        </p:spPr>
-      </p:sp>
-      <p:sp>
-        <p:nvSpPr>
-          <p:cNvPr id="32" name="Text 30"/>
-          <p:cNvSpPr/>
-          <p:nvPr/>
-        </p:nvSpPr>
-        <p:spPr>
-          <a:xfrm>
-            <a:off x="8378647" y="5047488"/>
-            <a:ext cx="2679192" cy="658368"/>
-          </a:xfrm>
-          <a:prstGeom prst="rect">
-            <a:avLst/>
-          </a:prstGeom>
-          <a:noFill/>
-          <a:ln/>
-        </p:spPr>
-        <p:txBody>
-          <a:bodyPr wrap="square" lIns="0" tIns="0" rIns="0" bIns="0" rtlCol="0" anchor="t"/>
-          <a:lstStyle/>
-          <a:p>
-            <a:pPr rtl="1" algn="r" indent="0" marL="0">
-              <a:lnSpc>
-                <a:spcPct val="120000"/>
-              </a:lnSpc>
-              <a:buNone/>
-            </a:pPr>
-            <a:r>
-              <a:rPr lang="he-IL" altLang="en-US" sz="1150" dirty="0">
-                <a:solidFill>
-                  <a:srgbClr val="91A0B7"/>
-                </a:solidFill>
-                <a:latin typeface="Calibri" pitchFamily="34" charset="0"/>
-                <a:ea typeface="Calibri" pitchFamily="34" charset="-122"/>
-                <a:cs typeface="Calibri" pitchFamily="34" charset="-120"/>
-              </a:rPr>
-              <a:t>‫מיטיגציה: מיפוי שמות ומבנה מוסכם מראש, ואימות של צוותי האפליקציה שכל מסמך נגיש בשמו החדש. נדרש זמן צוות ייעודי.‬</a:t>
-            </a:r>
-            <a:endParaRPr lang="he-IL" sz="1150" dirty="0"/>
-          </a:p>
-        </p:txBody>
-      </p:sp>
-      <p:sp>
-        <p:nvSpPr>
-          <p:cNvPr id="33" name="Shape 31"/>
-          <p:cNvSpPr/>
-          <p:nvPr/>
-        </p:nvSpPr>
-        <p:spPr>
-          <a:xfrm>
-            <a:off x="4474159" y="3986784"/>
-            <a:ext cx="3246120" cy="1810512"/>
-          </a:xfrm>
-          <a:prstGeom prst="roundRect">
-            <a:avLst>
-              <a:gd name="adj" fmla="val 2525"/>
-            </a:avLst>
-          </a:prstGeom>
-          <a:solidFill>
-            <a:srgbClr val="141C2C"/>
-          </a:solidFill>
-          <a:ln w="12700">
-            <a:solidFill>
-              <a:srgbClr val="23304A"/>
-            </a:solidFill>
-            <a:prstDash val="solid"/>
-          </a:ln>
-        </p:spPr>
-      </p:sp>
-      <p:sp>
-        <p:nvSpPr>
-          <p:cNvPr id="34" name="Shape 32"/>
-          <p:cNvSpPr/>
-          <p:nvPr/>
-        </p:nvSpPr>
-        <p:spPr>
-          <a:xfrm>
-            <a:off x="7669987" y="4133088"/>
-            <a:ext cx="50292" cy="1517904"/>
-          </a:xfrm>
-          <a:prstGeom prst="rect">
-            <a:avLst/>
-          </a:prstGeom>
-          <a:solidFill>
-            <a:srgbClr val="FF9F43"/>
-          </a:solidFill>
-          <a:ln w="12700">
-            <a:solidFill>
-              <a:srgbClr val="FF9F43"/>
-            </a:solidFill>
-            <a:prstDash val="solid"/>
-          </a:ln>
-        </p:spPr>
-      </p:sp>
-      <p:sp>
-        <p:nvSpPr>
-          <p:cNvPr id="35" name="Text 33"/>
-          <p:cNvSpPr/>
-          <p:nvPr/>
-        </p:nvSpPr>
-        <p:spPr>
-          <a:xfrm>
-            <a:off x="5772607" y="4114800"/>
-            <a:ext cx="1618488" cy="310896"/>
-          </a:xfrm>
-          <a:prstGeom prst="rect">
-            <a:avLst/>
-          </a:prstGeom>
-          <a:noFill/>
-          <a:ln/>
-        </p:spPr>
-        <p:txBody>
-          <a:bodyPr wrap="square" lIns="0" tIns="0" rIns="0" bIns="0" rtlCol="0" anchor="ctr"/>
-          <a:lstStyle/>
-          <a:p>
-            <a:pPr rtl="1" algn="r" indent="0" marL="0">
-              <a:lnSpc>
-                <a:spcPct val="100000"/>
-              </a:lnSpc>
-              <a:buNone/>
-            </a:pPr>
-            <a:r>
-              <a:rPr lang="he-IL" altLang="en-US" sz="1400" b="1" dirty="0">
-                <a:solidFill>
-                  <a:srgbClr val="FF9F43"/>
-                </a:solidFill>
-                <a:latin typeface="Calibri" pitchFamily="34" charset="0"/>
-                <a:ea typeface="Calibri" pitchFamily="34" charset="-122"/>
-                <a:cs typeface="Calibri" pitchFamily="34" charset="-120"/>
-              </a:rPr>
-              <a:t>‫ביצועים · לטנציה‬</a:t>
-            </a:r>
-            <a:endParaRPr lang="he-IL" sz="1400" dirty="0"/>
-          </a:p>
-        </p:txBody>
-      </p:sp>
-      <p:sp>
-        <p:nvSpPr>
-          <p:cNvPr id="36" name="Text 34"/>
-          <p:cNvSpPr/>
-          <p:nvPr/>
-        </p:nvSpPr>
-        <p:spPr>
-          <a:xfrm>
-            <a:off x="4730191" y="4480560"/>
-            <a:ext cx="2679192" cy="457200"/>
-          </a:xfrm>
-          <a:prstGeom prst="rect">
-            <a:avLst/>
-          </a:prstGeom>
-          <a:noFill/>
-          <a:ln/>
-        </p:spPr>
-        <p:txBody>
-          <a:bodyPr wrap="square" lIns="0" tIns="0" rIns="0" bIns="0" rtlCol="0" anchor="t"/>
-          <a:lstStyle/>
-          <a:p>
-            <a:pPr rtl="1" algn="r" indent="0" marL="0">
-              <a:lnSpc>
-                <a:spcPct val="120000"/>
-              </a:lnSpc>
-              <a:buNone/>
-            </a:pPr>
-            <a:r>
-              <a:rPr lang="he-IL" altLang="en-US" sz="1250" dirty="0">
-                <a:solidFill>
-                  <a:srgbClr val="F4F7FB"/>
-                </a:solidFill>
-                <a:latin typeface="Calibri" pitchFamily="34" charset="0"/>
-                <a:ea typeface="Calibri" pitchFamily="34" charset="-122"/>
-                <a:cs typeface="Calibri" pitchFamily="34" charset="-120"/>
-              </a:rPr>
-              <a:t>‫אחזור מהענן איטי מאחזור מ-‪ECS‬ מקומי, ועלול לפגוע בשירות למשתמש הקצה.‬</a:t>
-            </a:r>
-            <a:endParaRPr lang="he-IL" sz="1250" dirty="0"/>
-          </a:p>
-        </p:txBody>
-      </p:sp>
-      <p:sp>
-        <p:nvSpPr>
-          <p:cNvPr id="37" name="Shape 35"/>
-          <p:cNvSpPr/>
-          <p:nvPr/>
-        </p:nvSpPr>
-        <p:spPr>
-          <a:xfrm>
-            <a:off x="4730191" y="4974336"/>
-            <a:ext cx="2679192" cy="9144"/>
-          </a:xfrm>
-          <a:prstGeom prst="rect">
-            <a:avLst/>
-          </a:prstGeom>
-          <a:solidFill>
-            <a:srgbClr val="2C3A54"/>
-          </a:solidFill>
-          <a:ln w="12700">
-            <a:solidFill>
-              <a:srgbClr val="2C3A54"/>
-            </a:solidFill>
-            <a:prstDash val="solid"/>
-          </a:ln>
-        </p:spPr>
-      </p:sp>
-      <p:sp>
-        <p:nvSpPr>
-          <p:cNvPr id="38" name="Text 36"/>
-          <p:cNvSpPr/>
-          <p:nvPr/>
-        </p:nvSpPr>
-        <p:spPr>
-          <a:xfrm>
-            <a:off x="4730191" y="5047488"/>
-            <a:ext cx="2679192" cy="658368"/>
-          </a:xfrm>
-          <a:prstGeom prst="rect">
-            <a:avLst/>
-          </a:prstGeom>
-          <a:noFill/>
-          <a:ln/>
-        </p:spPr>
-        <p:txBody>
-          <a:bodyPr wrap="square" lIns="0" tIns="0" rIns="0" bIns="0" rtlCol="0" anchor="t"/>
-          <a:lstStyle/>
-          <a:p>
-            <a:pPr rtl="1" algn="r" indent="0" marL="0">
-              <a:lnSpc>
-                <a:spcPct val="120000"/>
-              </a:lnSpc>
-              <a:buNone/>
-            </a:pPr>
-            <a:r>
-              <a:rPr lang="he-IL" altLang="en-US" sz="1150" dirty="0">
-                <a:solidFill>
-                  <a:srgbClr val="91A0B7"/>
-                </a:solidFill>
-                <a:latin typeface="Calibri" pitchFamily="34" charset="0"/>
-                <a:ea typeface="Calibri" pitchFamily="34" charset="-122"/>
-                <a:cs typeface="Calibri" pitchFamily="34" charset="-120"/>
-              </a:rPr>
-              <a:t>‫מיטיגציה: מדידת זמני אחזור מול ה-‪SLA‬ הקיים לפני התחייבות, חיבור ‪Direct Connect‬ ולא אינטרנט, וקאשינג לפריטים חמים.‬</a:t>
-            </a:r>
-            <a:endParaRPr lang="he-IL" sz="1150" dirty="0"/>
-          </a:p>
-        </p:txBody>
-      </p:sp>
-      <p:sp>
-        <p:nvSpPr>
-          <p:cNvPr id="39" name="Shape 37"/>
-          <p:cNvSpPr/>
-          <p:nvPr/>
-        </p:nvSpPr>
-        <p:spPr>
-          <a:xfrm>
-            <a:off x="825703" y="3986784"/>
-            <a:ext cx="3246120" cy="1810512"/>
-          </a:xfrm>
-          <a:prstGeom prst="roundRect">
-            <a:avLst>
-              <a:gd name="adj" fmla="val 2525"/>
-            </a:avLst>
-          </a:prstGeom>
-          <a:solidFill>
-            <a:srgbClr val="141C2C"/>
-          </a:solidFill>
-          <a:ln w="12700">
-            <a:solidFill>
-              <a:srgbClr val="23304A"/>
-            </a:solidFill>
-            <a:prstDash val="solid"/>
-          </a:ln>
-        </p:spPr>
-      </p:sp>
-      <p:sp>
-        <p:nvSpPr>
-          <p:cNvPr id="40" name="Shape 38"/>
-          <p:cNvSpPr/>
-          <p:nvPr/>
-        </p:nvSpPr>
-        <p:spPr>
-          <a:xfrm>
-            <a:off x="4021531" y="4133088"/>
-            <a:ext cx="50292" cy="1517904"/>
-          </a:xfrm>
-          <a:prstGeom prst="rect">
-            <a:avLst/>
-          </a:prstGeom>
-          <a:solidFill>
-            <a:srgbClr val="FF9F43"/>
-          </a:solidFill>
-          <a:ln w="12700">
-            <a:solidFill>
-              <a:srgbClr val="FF9F43"/>
-            </a:solidFill>
-            <a:prstDash val="solid"/>
-          </a:ln>
-        </p:spPr>
-      </p:sp>
-      <p:sp>
-        <p:nvSpPr>
-          <p:cNvPr id="41" name="Text 39"/>
-          <p:cNvSpPr/>
-          <p:nvPr/>
-        </p:nvSpPr>
-        <p:spPr>
-          <a:xfrm>
-            <a:off x="2124151" y="4114800"/>
-            <a:ext cx="1618488" cy="310896"/>
-          </a:xfrm>
-          <a:prstGeom prst="rect">
-            <a:avLst/>
-          </a:prstGeom>
-          <a:noFill/>
-          <a:ln/>
-        </p:spPr>
-        <p:txBody>
-          <a:bodyPr wrap="square" lIns="0" tIns="0" rIns="0" bIns="0" rtlCol="0" anchor="ctr"/>
-          <a:lstStyle/>
-          <a:p>
-            <a:pPr rtl="1" algn="r" indent="0" marL="0">
-              <a:lnSpc>
-                <a:spcPct val="100000"/>
-              </a:lnSpc>
-              <a:buNone/>
-            </a:pPr>
-            <a:r>
-              <a:rPr lang="he-IL" altLang="en-US" sz="1400" b="1" dirty="0">
-                <a:solidFill>
-                  <a:srgbClr val="FF9F43"/>
-                </a:solidFill>
-                <a:latin typeface="Calibri" pitchFamily="34" charset="0"/>
-                <a:ea typeface="Calibri" pitchFamily="34" charset="-122"/>
-                <a:cs typeface="Calibri" pitchFamily="34" charset="-120"/>
-              </a:rPr>
-              <a:t>‫כלי ההעברה · ‪POC‬‬</a:t>
-            </a:r>
-            <a:endParaRPr lang="he-IL" sz="1400" dirty="0"/>
-          </a:p>
-        </p:txBody>
-      </p:sp>
-      <p:sp>
-        <p:nvSpPr>
-          <p:cNvPr id="42" name="Text 40"/>
-          <p:cNvSpPr/>
-          <p:nvPr/>
-        </p:nvSpPr>
-        <p:spPr>
-          <a:xfrm>
-            <a:off x="1081735" y="4480560"/>
-            <a:ext cx="2679192" cy="457200"/>
-          </a:xfrm>
-          <a:prstGeom prst="rect">
-            <a:avLst/>
-          </a:prstGeom>
-          <a:noFill/>
-          <a:ln/>
-        </p:spPr>
-        <p:txBody>
-          <a:bodyPr wrap="square" lIns="0" tIns="0" rIns="0" bIns="0" rtlCol="0" anchor="t"/>
-          <a:lstStyle/>
-          <a:p>
-            <a:pPr rtl="1" algn="r" indent="0" marL="0">
-              <a:lnSpc>
-                <a:spcPct val="120000"/>
-              </a:lnSpc>
-              <a:buNone/>
-            </a:pPr>
-            <a:r>
-              <a:rPr lang="he-IL" altLang="en-US" sz="1250" dirty="0">
-                <a:solidFill>
-                  <a:srgbClr val="F4F7FB"/>
-                </a:solidFill>
-                <a:latin typeface="Calibri" pitchFamily="34" charset="0"/>
-                <a:ea typeface="Calibri" pitchFamily="34" charset="-122"/>
-                <a:cs typeface="Calibri" pitchFamily="34" charset="-120"/>
-              </a:rPr>
-              <a:t>‫אין כלי העתקה מוכח בסדר גודל כזה; קבצים עלולים להיכשל בלי שהדבר יתגלה.‬</a:t>
-            </a:r>
-            <a:endParaRPr lang="he-IL" sz="1250" dirty="0"/>
-          </a:p>
-        </p:txBody>
-      </p:sp>
-      <p:sp>
-        <p:nvSpPr>
-          <p:cNvPr id="43" name="Shape 41"/>
-          <p:cNvSpPr/>
-          <p:nvPr/>
-        </p:nvSpPr>
-        <p:spPr>
-          <a:xfrm>
-            <a:off x="1081735" y="4974336"/>
-            <a:ext cx="2679192" cy="9144"/>
-          </a:xfrm>
-          <a:prstGeom prst="rect">
-            <a:avLst/>
-          </a:prstGeom>
-          <a:solidFill>
-            <a:srgbClr val="2C3A54"/>
-          </a:solidFill>
-          <a:ln w="12700">
-            <a:solidFill>
-              <a:srgbClr val="2C3A54"/>
-            </a:solidFill>
-            <a:prstDash val="solid"/>
-          </a:ln>
-        </p:spPr>
-      </p:sp>
-      <p:sp>
-        <p:nvSpPr>
-          <p:cNvPr id="44" name="Text 42"/>
-          <p:cNvSpPr/>
-          <p:nvPr/>
-        </p:nvSpPr>
-        <p:spPr>
-          <a:xfrm>
-            <a:off x="1081735" y="5047488"/>
-            <a:ext cx="2679192" cy="658368"/>
-          </a:xfrm>
-          <a:prstGeom prst="rect">
-            <a:avLst/>
-          </a:prstGeom>
-          <a:noFill/>
-          <a:ln/>
-        </p:spPr>
-        <p:txBody>
-          <a:bodyPr wrap="square" lIns="0" tIns="0" rIns="0" bIns="0" rtlCol="0" anchor="t"/>
-          <a:lstStyle/>
-          <a:p>
-            <a:pPr rtl="1" algn="r" indent="0" marL="0">
-              <a:lnSpc>
-                <a:spcPct val="120000"/>
-              </a:lnSpc>
-              <a:buNone/>
-            </a:pPr>
-            <a:r>
-              <a:rPr lang="he-IL" altLang="en-US" sz="1150" dirty="0">
-                <a:solidFill>
-                  <a:srgbClr val="91A0B7"/>
-                </a:solidFill>
-                <a:latin typeface="Calibri" pitchFamily="34" charset="0"/>
-                <a:ea typeface="Calibri" pitchFamily="34" charset="-122"/>
-                <a:cs typeface="Calibri" pitchFamily="34" charset="-120"/>
-              </a:rPr>
-              <a:t>‫מיטיגציה: ‪POC‬ קצר על ‪1–2 TB‬ עם ‪AWS DataSync‬: ולידציה מובנית, דוח חריגים לכל ריצה, ומחיקה מ-‪ECS‬ רק לאחר אימות.‬</a:t>
-            </a:r>
-            <a:endParaRPr lang="he-IL" sz="1150" dirty="0"/>
-          </a:p>
-        </p:txBody>
-      </p:sp>
-      <p:sp>
-        <p:nvSpPr>
-          <p:cNvPr id="45" name="Shape 43"/>
-          <p:cNvSpPr/>
-          <p:nvPr/>
-        </p:nvSpPr>
-        <p:spPr>
-          <a:xfrm>
-            <a:off x="822960" y="5907024"/>
-            <a:ext cx="10545775" cy="10973"/>
-          </a:xfrm>
-          <a:prstGeom prst="rect">
-            <a:avLst/>
-          </a:prstGeom>
-          <a:solidFill>
-            <a:srgbClr val="23304A"/>
-          </a:solidFill>
-          <a:ln w="12700">
-            <a:solidFill>
-              <a:srgbClr val="23304A"/>
-            </a:solidFill>
-            <a:prstDash val="solid"/>
-          </a:ln>
-        </p:spPr>
-      </p:sp>
-      <p:sp>
-        <p:nvSpPr>
-          <p:cNvPr id="46" name="Shape 44"/>
+          <p:cNvPr id="38" name="Shape 36"/>
           <p:cNvSpPr/>
           <p:nvPr/>
         </p:nvSpPr>
@@ -11080,7 +12129,7 @@
       </p:sp>
       <p:sp>
         <p:nvSpPr>
-          <p:cNvPr id="47" name="Text 45"/>
+          <p:cNvPr id="39" name="Text 37"/>
           <p:cNvSpPr/>
           <p:nvPr/>
         </p:nvSpPr>
@@ -11114,7 +12163,7 @@
                 <a:ea typeface="Calibri" pitchFamily="34" charset="-122"/>
                 <a:cs typeface="Calibri" pitchFamily="34" charset="-120"/>
               </a:rPr>
-              <a:t>‫שני הסיכונים המסומנים "חוסם התחלה" אינם ניתנים לעקיפה: בלי אישור הלשכה המשפטית ובלי אישור ‪DPO‬ ורגולטור אין העתקה ראשונה. ארבעת הנותרים נסגרים ב-‪POC‬ ובאפיון מול צוותי האפליקציה.‬</a:t>
+              <a:t>‫שני אלה אינם ניתנים לעקיפה ואינם נסגרים ב-‪POC‬. יש להתניע אותם בספטמבר, במקביל לבדיקות הטכניות ולא אחריהן.‬</a:t>
             </a:r>
             <a:endParaRPr lang="he-IL" sz="1150" dirty="0"/>
           </a:p>
@@ -11182,13 +12231,13 @@
             <a:r>
               <a:rPr lang="he-IL" altLang="en-US" sz="1100" b="1" spc="120" kern="0" dirty="0">
                 <a:solidFill>
-                  <a:srgbClr val="3DDC97"/>
-                </a:solidFill>
-                <a:latin typeface="Calibri" pitchFamily="34" charset="0"/>
-                <a:ea typeface="Calibri" pitchFamily="34" charset="-122"/>
-                <a:cs typeface="Calibri" pitchFamily="34" charset="-120"/>
-              </a:rPr>
-              <a:t>‫מה זה נותן‬</a:t>
+                  <a:srgbClr val="FF9F43"/>
+                </a:solidFill>
+                <a:latin typeface="Calibri" pitchFamily="34" charset="0"/>
+                <a:ea typeface="Calibri" pitchFamily="34" charset="-122"/>
+                <a:cs typeface="Calibri" pitchFamily="34" charset="-120"/>
+              </a:rPr>
+              <a:t>‫סיכונים · חלק ב‬</a:t>
             </a:r>
             <a:endParaRPr lang="he-IL" sz="1100" dirty="0"/>
           </a:p>
@@ -11230,7 +12279,7 @@
                 <a:ea typeface="Calibri" pitchFamily="34" charset="-122"/>
                 <a:cs typeface="Calibri" pitchFamily="34" charset="-120"/>
               </a:rPr>
-              <a:t>‫המנוף היחיד על השולחן שאינו תלוי בזמן אספקה של חודשיים‬</a:t>
+              <a:t>‫ארבעה סיכוני ביצוע — כולם נסגרים ב-‪POC‬ ובאפיון מול הפיתוח‬</a:t>
             </a:r>
             <a:endParaRPr lang="he-IL" sz="2600" dirty="0"/>
           </a:p>
@@ -11269,12 +12318,12 @@
         </p:nvSpPr>
         <p:spPr>
           <a:xfrm>
-            <a:off x="8122615" y="2121408"/>
-            <a:ext cx="3246120" cy="1463040"/>
+            <a:off x="6293815" y="2011680"/>
+            <a:ext cx="5074920" cy="1792224"/>
           </a:xfrm>
           <a:prstGeom prst="roundRect">
             <a:avLst>
-              <a:gd name="adj" fmla="val 3125"/>
+              <a:gd name="adj" fmla="val 2551"/>
             </a:avLst>
           </a:prstGeom>
           <a:solidFill>
@@ -11296,18 +12345,18 @@
         </p:nvSpPr>
         <p:spPr>
           <a:xfrm>
-            <a:off x="10948111" y="2377440"/>
-            <a:ext cx="118872" cy="118872"/>
-          </a:xfrm>
-          <a:prstGeom prst="rect">
-            <a:avLst/>
-          </a:prstGeom>
-          <a:solidFill>
-            <a:srgbClr val="3DDC97"/>
+            <a:off x="11318443" y="2157984"/>
+            <a:ext cx="50292" cy="1499616"/>
+          </a:xfrm>
+          <a:prstGeom prst="rect">
+            <a:avLst/>
+          </a:prstGeom>
+          <a:solidFill>
+            <a:srgbClr val="FF9F43"/>
           </a:solidFill>
           <a:ln w="12700">
             <a:solidFill>
-              <a:srgbClr val="3DDC97"/>
+              <a:srgbClr val="FF9F43"/>
             </a:solidFill>
             <a:prstDash val="solid"/>
           </a:ln>
@@ -11321,8 +12370,8 @@
         </p:nvSpPr>
         <p:spPr>
           <a:xfrm>
-            <a:off x="8378647" y="2304288"/>
-            <a:ext cx="2478024" cy="274320"/>
+            <a:off x="6568135" y="2157984"/>
+            <a:ext cx="4489704" cy="292608"/>
           </a:xfrm>
           <a:prstGeom prst="rect">
             <a:avLst/>
@@ -11341,17 +12390,17 @@
               <a:buNone/>
             </a:pPr>
             <a:r>
-              <a:rPr lang="he-IL" altLang="en-US" sz="1350" b="1" dirty="0">
-                <a:solidFill>
-                  <a:srgbClr val="3DDC97"/>
-                </a:solidFill>
-                <a:latin typeface="Calibri" pitchFamily="34" charset="0"/>
-                <a:ea typeface="Calibri" pitchFamily="34" charset="-122"/>
-                <a:cs typeface="Calibri" pitchFamily="34" charset="-120"/>
-              </a:rPr>
-              <a:t>‫פינוי שטח מיידי‬</a:t>
-            </a:r>
-            <a:endParaRPr lang="he-IL" sz="1350" dirty="0"/>
+              <a:rPr lang="he-IL" altLang="en-US" sz="1500" b="1" dirty="0">
+                <a:solidFill>
+                  <a:srgbClr val="FF9F43"/>
+                </a:solidFill>
+                <a:latin typeface="Calibri" pitchFamily="34" charset="0"/>
+                <a:ea typeface="Calibri" pitchFamily="34" charset="-122"/>
+                <a:cs typeface="Calibri" pitchFamily="34" charset="-120"/>
+              </a:rPr>
+              <a:t>‫אפליקציה · שינוי מצביעים‬</a:t>
+            </a:r>
+            <a:endParaRPr lang="he-IL" sz="1500" dirty="0"/>
           </a:p>
         </p:txBody>
       </p:sp>
@@ -11363,8 +12412,8 @@
         </p:nvSpPr>
         <p:spPr>
           <a:xfrm>
-            <a:off x="8378647" y="2651760"/>
-            <a:ext cx="2734056" cy="822960"/>
+            <a:off x="6568135" y="2523744"/>
+            <a:ext cx="4489704" cy="402336"/>
           </a:xfrm>
           <a:prstGeom prst="rect">
             <a:avLst/>
@@ -11383,7 +12432,74 @@
               <a:buNone/>
             </a:pPr>
             <a:r>
-              <a:rPr lang="he-IL" altLang="en-US" sz="1150" dirty="0">
+              <a:rPr lang="he-IL" altLang="en-US" sz="1300" dirty="0">
+                <a:solidFill>
+                  <a:srgbClr val="F4F7FB"/>
+                </a:solidFill>
+                <a:latin typeface="Calibri" pitchFamily="34" charset="0"/>
+                <a:ea typeface="Calibri" pitchFamily="34" charset="-122"/>
+                <a:cs typeface="Calibri" pitchFamily="34" charset="-120"/>
+              </a:rPr>
+              <a:t>‫האפליקציות מצביעות היום לנתיב ב-‪ECS‬. מעבר ל-‪S3‬ מחייב פיתוח בצד היישום — זו אינה העברת דאטה בלבד.‬</a:t>
+            </a:r>
+            <a:endParaRPr lang="he-IL" sz="1300" dirty="0"/>
+          </a:p>
+        </p:txBody>
+      </p:sp>
+      <p:sp>
+        <p:nvSpPr>
+          <p:cNvPr id="9" name="Shape 7"/>
+          <p:cNvSpPr/>
+          <p:nvPr/>
+        </p:nvSpPr>
+        <p:spPr>
+          <a:xfrm>
+            <a:off x="6568135" y="2962656"/>
+            <a:ext cx="4489704" cy="9144"/>
+          </a:xfrm>
+          <a:prstGeom prst="rect">
+            <a:avLst/>
+          </a:prstGeom>
+          <a:solidFill>
+            <a:srgbClr val="2C3A54"/>
+          </a:solidFill>
+          <a:ln w="12700">
+            <a:solidFill>
+              <a:srgbClr val="2C3A54"/>
+            </a:solidFill>
+            <a:prstDash val="solid"/>
+          </a:ln>
+        </p:spPr>
+      </p:sp>
+      <p:sp>
+        <p:nvSpPr>
+          <p:cNvPr id="10" name="Text 8"/>
+          <p:cNvSpPr/>
+          <p:nvPr/>
+        </p:nvSpPr>
+        <p:spPr>
+          <a:xfrm>
+            <a:off x="6568135" y="3035808"/>
+            <a:ext cx="4489704" cy="658368"/>
+          </a:xfrm>
+          <a:prstGeom prst="rect">
+            <a:avLst/>
+          </a:prstGeom>
+          <a:noFill/>
+          <a:ln/>
+        </p:spPr>
+        <p:txBody>
+          <a:bodyPr wrap="square" lIns="0" tIns="0" rIns="0" bIns="0" rtlCol="0" anchor="t"/>
+          <a:lstStyle/>
+          <a:p>
+            <a:pPr rtl="1" algn="r" indent="0" marL="0">
+              <a:lnSpc>
+                <a:spcPct val="120000"/>
+              </a:lnSpc>
+              <a:buNone/>
+            </a:pPr>
+            <a:r>
+              <a:rPr lang="he-IL" altLang="en-US" sz="1200" dirty="0">
                 <a:solidFill>
                   <a:srgbClr val="91A0B7"/>
                 </a:solidFill>
@@ -11391,26 +12507,26 @@
                 <a:ea typeface="Calibri" pitchFamily="34" charset="-122"/>
                 <a:cs typeface="Calibri" pitchFamily="34" charset="-120"/>
               </a:rPr>
-              <a:t>‫העתקת קורפוס הדימות ו-‪Verint‬ מפנה שטח ב-‪ECS‬ תוך שבועות, ומאטה את ההתקרבות לסף ‪80%‬ בדצמבר — בלי להמתין לאספקה.‬</a:t>
-            </a:r>
-            <a:endParaRPr lang="he-IL" sz="1150" dirty="0"/>
-          </a:p>
-        </p:txBody>
-      </p:sp>
-      <p:sp>
-        <p:nvSpPr>
-          <p:cNvPr id="9" name="Shape 7"/>
-          <p:cNvSpPr/>
-          <p:nvPr/>
-        </p:nvSpPr>
-        <p:spPr>
-          <a:xfrm>
-            <a:off x="4474159" y="2121408"/>
-            <a:ext cx="3246120" cy="1463040"/>
+              <a:t>‫מיטיגציה: אפיון מול צוותי הדימות ו-‪Verint‬, הערכת מאמץ פיתוח, ותקופת ביניים שבה שתי הכתובות פעילות במקביל.‬</a:t>
+            </a:r>
+            <a:endParaRPr lang="he-IL" sz="1200" dirty="0"/>
+          </a:p>
+        </p:txBody>
+      </p:sp>
+      <p:sp>
+        <p:nvSpPr>
+          <p:cNvPr id="11" name="Shape 9"/>
+          <p:cNvSpPr/>
+          <p:nvPr/>
+        </p:nvSpPr>
+        <p:spPr>
+          <a:xfrm>
+            <a:off x="822960" y="2011680"/>
+            <a:ext cx="5074920" cy="1792224"/>
           </a:xfrm>
           <a:prstGeom prst="roundRect">
             <a:avLst>
-              <a:gd name="adj" fmla="val 3125"/>
+              <a:gd name="adj" fmla="val 2551"/>
             </a:avLst>
           </a:prstGeom>
           <a:solidFill>
@@ -11426,24 +12542,24 @@
       </p:sp>
       <p:sp>
         <p:nvSpPr>
-          <p:cNvPr id="10" name="Shape 8"/>
-          <p:cNvSpPr/>
-          <p:nvPr/>
-        </p:nvSpPr>
-        <p:spPr>
-          <a:xfrm>
-            <a:off x="7299655" y="2377440"/>
-            <a:ext cx="118872" cy="118872"/>
-          </a:xfrm>
-          <a:prstGeom prst="rect">
-            <a:avLst/>
-          </a:prstGeom>
-          <a:solidFill>
-            <a:srgbClr val="3DDC97"/>
+          <p:cNvPr id="12" name="Shape 10"/>
+          <p:cNvSpPr/>
+          <p:nvPr/>
+        </p:nvSpPr>
+        <p:spPr>
+          <a:xfrm>
+            <a:off x="5847588" y="2157984"/>
+            <a:ext cx="50292" cy="1499616"/>
+          </a:xfrm>
+          <a:prstGeom prst="rect">
+            <a:avLst/>
+          </a:prstGeom>
+          <a:solidFill>
+            <a:srgbClr val="FF9F43"/>
           </a:solidFill>
           <a:ln w="12700">
             <a:solidFill>
-              <a:srgbClr val="3DDC97"/>
+              <a:srgbClr val="FF9F43"/>
             </a:solidFill>
             <a:prstDash val="solid"/>
           </a:ln>
@@ -11451,14 +12567,14 @@
       </p:sp>
       <p:sp>
         <p:nvSpPr>
-          <p:cNvPr id="11" name="Text 9"/>
-          <p:cNvSpPr/>
-          <p:nvPr/>
-        </p:nvSpPr>
-        <p:spPr>
-          <a:xfrm>
-            <a:off x="4730191" y="2304288"/>
-            <a:ext cx="2478024" cy="274320"/>
+          <p:cNvPr id="13" name="Text 11"/>
+          <p:cNvSpPr/>
+          <p:nvPr/>
+        </p:nvSpPr>
+        <p:spPr>
+          <a:xfrm>
+            <a:off x="1097280" y="2157984"/>
+            <a:ext cx="4489704" cy="292608"/>
           </a:xfrm>
           <a:prstGeom prst="rect">
             <a:avLst/>
@@ -11477,30 +12593,30 @@
               <a:buNone/>
             </a:pPr>
             <a:r>
-              <a:rPr lang="he-IL" altLang="en-US" sz="1350" b="1" dirty="0">
-                <a:solidFill>
-                  <a:srgbClr val="3DDC97"/>
-                </a:solidFill>
-                <a:latin typeface="Calibri" pitchFamily="34" charset="0"/>
-                <a:ea typeface="Calibri" pitchFamily="34" charset="-122"/>
-                <a:cs typeface="Calibri" pitchFamily="34" charset="-120"/>
-              </a:rPr>
-              <a:t>‫דחיית והקטנת ‪capex‬‬</a:t>
-            </a:r>
-            <a:endParaRPr lang="he-IL" sz="1350" dirty="0"/>
-          </a:p>
-        </p:txBody>
-      </p:sp>
-      <p:sp>
-        <p:nvSpPr>
-          <p:cNvPr id="12" name="Text 10"/>
-          <p:cNvSpPr/>
-          <p:nvPr/>
-        </p:nvSpPr>
-        <p:spPr>
-          <a:xfrm>
-            <a:off x="4730191" y="2651760"/>
-            <a:ext cx="2734056" cy="822960"/>
+              <a:rPr lang="he-IL" altLang="en-US" sz="1500" b="1" dirty="0">
+                <a:solidFill>
+                  <a:srgbClr val="FF9F43"/>
+                </a:solidFill>
+                <a:latin typeface="Calibri" pitchFamily="34" charset="0"/>
+                <a:ea typeface="Calibri" pitchFamily="34" charset="-122"/>
+                <a:cs typeface="Calibri" pitchFamily="34" charset="-120"/>
+              </a:rPr>
+              <a:t>‫מיליוני קבצים קטנים‬</a:t>
+            </a:r>
+            <a:endParaRPr lang="he-IL" sz="1500" dirty="0"/>
+          </a:p>
+        </p:txBody>
+      </p:sp>
+      <p:sp>
+        <p:nvSpPr>
+          <p:cNvPr id="14" name="Text 12"/>
+          <p:cNvSpPr/>
+          <p:nvPr/>
+        </p:nvSpPr>
+        <p:spPr>
+          <a:xfrm>
+            <a:off x="1097280" y="2523744"/>
+            <a:ext cx="4489704" cy="402336"/>
           </a:xfrm>
           <a:prstGeom prst="rect">
             <a:avLst/>
@@ -11519,7 +12635,74 @@
               <a:buNone/>
             </a:pPr>
             <a:r>
-              <a:rPr lang="he-IL" altLang="en-US" sz="1150" dirty="0">
+              <a:rPr lang="he-IL" altLang="en-US" sz="1300" dirty="0">
+                <a:solidFill>
+                  <a:srgbClr val="F4F7FB"/>
+                </a:solidFill>
+                <a:latin typeface="Calibri" pitchFamily="34" charset="0"/>
+                <a:ea typeface="Calibri" pitchFamily="34" charset="-122"/>
+                <a:cs typeface="Calibri" pitchFamily="34" charset="-120"/>
+              </a:rPr>
+              <a:t>‫הקורפוס הוא מיליוני קבצים קטנים. השמות ומבנה התיקיות ב-‪S3‬ שונים, ואין מיפוי אחד-לאחד מהמצב היום.‬</a:t>
+            </a:r>
+            <a:endParaRPr lang="he-IL" sz="1300" dirty="0"/>
+          </a:p>
+        </p:txBody>
+      </p:sp>
+      <p:sp>
+        <p:nvSpPr>
+          <p:cNvPr id="15" name="Shape 13"/>
+          <p:cNvSpPr/>
+          <p:nvPr/>
+        </p:nvSpPr>
+        <p:spPr>
+          <a:xfrm>
+            <a:off x="1097280" y="2962656"/>
+            <a:ext cx="4489704" cy="9144"/>
+          </a:xfrm>
+          <a:prstGeom prst="rect">
+            <a:avLst/>
+          </a:prstGeom>
+          <a:solidFill>
+            <a:srgbClr val="2C3A54"/>
+          </a:solidFill>
+          <a:ln w="12700">
+            <a:solidFill>
+              <a:srgbClr val="2C3A54"/>
+            </a:solidFill>
+            <a:prstDash val="solid"/>
+          </a:ln>
+        </p:spPr>
+      </p:sp>
+      <p:sp>
+        <p:nvSpPr>
+          <p:cNvPr id="16" name="Text 14"/>
+          <p:cNvSpPr/>
+          <p:nvPr/>
+        </p:nvSpPr>
+        <p:spPr>
+          <a:xfrm>
+            <a:off x="1097280" y="3035808"/>
+            <a:ext cx="4489704" cy="658368"/>
+          </a:xfrm>
+          <a:prstGeom prst="rect">
+            <a:avLst/>
+          </a:prstGeom>
+          <a:noFill/>
+          <a:ln/>
+        </p:spPr>
+        <p:txBody>
+          <a:bodyPr wrap="square" lIns="0" tIns="0" rIns="0" bIns="0" rtlCol="0" anchor="t"/>
+          <a:lstStyle/>
+          <a:p>
+            <a:pPr rtl="1" algn="r" indent="0" marL="0">
+              <a:lnSpc>
+                <a:spcPct val="120000"/>
+              </a:lnSpc>
+              <a:buNone/>
+            </a:pPr>
+            <a:r>
+              <a:rPr lang="he-IL" altLang="en-US" sz="1200" dirty="0">
                 <a:solidFill>
                   <a:srgbClr val="91A0B7"/>
                 </a:solidFill>
@@ -11527,26 +12710,26 @@
                 <a:ea typeface="Calibri" pitchFamily="34" charset="-122"/>
                 <a:cs typeface="Calibri" pitchFamily="34" charset="-120"/>
               </a:rPr>
-              <a:t>‫כל ‪TB‬ שמפונה מקטין את היקף ההרחבה הנדרשת. הצעת ‪Dell‬ הנוכחית עומדת על ‪$695,520‬ עבור ‪600 TB‬ לוגי.‬</a:t>
-            </a:r>
-            <a:endParaRPr lang="he-IL" sz="1150" dirty="0"/>
-          </a:p>
-        </p:txBody>
-      </p:sp>
-      <p:sp>
-        <p:nvSpPr>
-          <p:cNvPr id="13" name="Shape 11"/>
-          <p:cNvSpPr/>
-          <p:nvPr/>
-        </p:nvSpPr>
-        <p:spPr>
-          <a:xfrm>
-            <a:off x="825703" y="2121408"/>
-            <a:ext cx="3246120" cy="1463040"/>
+              <a:t>‫מיטיגציה: מיפוי שמות ומבנה מוסכם מראש, ואימות של צוותי האפליקציה שכל מסמך נגיש בשמו החדש. נדרש זמן צוות ייעודי.‬</a:t>
+            </a:r>
+            <a:endParaRPr lang="he-IL" sz="1200" dirty="0"/>
+          </a:p>
+        </p:txBody>
+      </p:sp>
+      <p:sp>
+        <p:nvSpPr>
+          <p:cNvPr id="17" name="Shape 15"/>
+          <p:cNvSpPr/>
+          <p:nvPr/>
+        </p:nvSpPr>
+        <p:spPr>
+          <a:xfrm>
+            <a:off x="6293815" y="4023360"/>
+            <a:ext cx="5074920" cy="1792224"/>
           </a:xfrm>
           <a:prstGeom prst="roundRect">
             <a:avLst>
-              <a:gd name="adj" fmla="val 3125"/>
+              <a:gd name="adj" fmla="val 2551"/>
             </a:avLst>
           </a:prstGeom>
           <a:solidFill>
@@ -11562,24 +12745,24 @@
       </p:sp>
       <p:sp>
         <p:nvSpPr>
-          <p:cNvPr id="14" name="Shape 12"/>
-          <p:cNvSpPr/>
-          <p:nvPr/>
-        </p:nvSpPr>
-        <p:spPr>
-          <a:xfrm>
-            <a:off x="3651199" y="2377440"/>
-            <a:ext cx="118872" cy="118872"/>
-          </a:xfrm>
-          <a:prstGeom prst="rect">
-            <a:avLst/>
-          </a:prstGeom>
-          <a:solidFill>
-            <a:srgbClr val="3DD9EB"/>
+          <p:cNvPr id="18" name="Shape 16"/>
+          <p:cNvSpPr/>
+          <p:nvPr/>
+        </p:nvSpPr>
+        <p:spPr>
+          <a:xfrm>
+            <a:off x="11318443" y="4169664"/>
+            <a:ext cx="50292" cy="1499616"/>
+          </a:xfrm>
+          <a:prstGeom prst="rect">
+            <a:avLst/>
+          </a:prstGeom>
+          <a:solidFill>
+            <a:srgbClr val="FF9F43"/>
           </a:solidFill>
           <a:ln w="12700">
             <a:solidFill>
-              <a:srgbClr val="3DD9EB"/>
+              <a:srgbClr val="FF9F43"/>
             </a:solidFill>
             <a:prstDash val="solid"/>
           </a:ln>
@@ -11587,14 +12770,14 @@
       </p:sp>
       <p:sp>
         <p:nvSpPr>
-          <p:cNvPr id="15" name="Text 13"/>
-          <p:cNvSpPr/>
-          <p:nvPr/>
-        </p:nvSpPr>
-        <p:spPr>
-          <a:xfrm>
-            <a:off x="1081735" y="2304288"/>
-            <a:ext cx="2478024" cy="274320"/>
+          <p:cNvPr id="19" name="Text 17"/>
+          <p:cNvSpPr/>
+          <p:nvPr/>
+        </p:nvSpPr>
+        <p:spPr>
+          <a:xfrm>
+            <a:off x="6568135" y="4169664"/>
+            <a:ext cx="4489704" cy="292608"/>
           </a:xfrm>
           <a:prstGeom prst="rect">
             <a:avLst/>
@@ -11613,30 +12796,30 @@
               <a:buNone/>
             </a:pPr>
             <a:r>
-              <a:rPr lang="he-IL" altLang="en-US" sz="1350" b="1" dirty="0">
-                <a:solidFill>
-                  <a:srgbClr val="3DD9EB"/>
-                </a:solidFill>
-                <a:latin typeface="Calibri" pitchFamily="34" charset="0"/>
-                <a:ea typeface="Calibri" pitchFamily="34" charset="-122"/>
-                <a:cs typeface="Calibri" pitchFamily="34" charset="-120"/>
-              </a:rPr>
-              <a:t>‫ללא זמן אספקה‬</a:t>
-            </a:r>
-            <a:endParaRPr lang="he-IL" sz="1350" dirty="0"/>
-          </a:p>
-        </p:txBody>
-      </p:sp>
-      <p:sp>
-        <p:nvSpPr>
-          <p:cNvPr id="16" name="Text 14"/>
-          <p:cNvSpPr/>
-          <p:nvPr/>
-        </p:nvSpPr>
-        <p:spPr>
-          <a:xfrm>
-            <a:off x="1081735" y="2651760"/>
-            <a:ext cx="2734056" cy="822960"/>
+              <a:rPr lang="he-IL" altLang="en-US" sz="1500" b="1" dirty="0">
+                <a:solidFill>
+                  <a:srgbClr val="FF9F43"/>
+                </a:solidFill>
+                <a:latin typeface="Calibri" pitchFamily="34" charset="0"/>
+                <a:ea typeface="Calibri" pitchFamily="34" charset="-122"/>
+                <a:cs typeface="Calibri" pitchFamily="34" charset="-120"/>
+              </a:rPr>
+              <a:t>‫ביצועים · זמני אחזור‬</a:t>
+            </a:r>
+            <a:endParaRPr lang="he-IL" sz="1500" dirty="0"/>
+          </a:p>
+        </p:txBody>
+      </p:sp>
+      <p:sp>
+        <p:nvSpPr>
+          <p:cNvPr id="20" name="Text 18"/>
+          <p:cNvSpPr/>
+          <p:nvPr/>
+        </p:nvSpPr>
+        <p:spPr>
+          <a:xfrm>
+            <a:off x="6568135" y="4535424"/>
+            <a:ext cx="4489704" cy="402336"/>
           </a:xfrm>
           <a:prstGeom prst="rect">
             <a:avLst/>
@@ -11655,7 +12838,74 @@
               <a:buNone/>
             </a:pPr>
             <a:r>
-              <a:rPr lang="he-IL" altLang="en-US" sz="1150" dirty="0">
+              <a:rPr lang="he-IL" altLang="en-US" sz="1300" dirty="0">
+                <a:solidFill>
+                  <a:srgbClr val="F4F7FB"/>
+                </a:solidFill>
+                <a:latin typeface="Calibri" pitchFamily="34" charset="0"/>
+                <a:ea typeface="Calibri" pitchFamily="34" charset="-122"/>
+                <a:cs typeface="Calibri" pitchFamily="34" charset="-120"/>
+              </a:rPr>
+              <a:t>‫אחזור מהענן איטי מאחזור מ-‪ECS‬ מקומי. לטנציה בשליפה עלולה לפגוע בשירות למשתמש הקצה.‬</a:t>
+            </a:r>
+            <a:endParaRPr lang="he-IL" sz="1300" dirty="0"/>
+          </a:p>
+        </p:txBody>
+      </p:sp>
+      <p:sp>
+        <p:nvSpPr>
+          <p:cNvPr id="21" name="Shape 19"/>
+          <p:cNvSpPr/>
+          <p:nvPr/>
+        </p:nvSpPr>
+        <p:spPr>
+          <a:xfrm>
+            <a:off x="6568135" y="4974336"/>
+            <a:ext cx="4489704" cy="9144"/>
+          </a:xfrm>
+          <a:prstGeom prst="rect">
+            <a:avLst/>
+          </a:prstGeom>
+          <a:solidFill>
+            <a:srgbClr val="2C3A54"/>
+          </a:solidFill>
+          <a:ln w="12700">
+            <a:solidFill>
+              <a:srgbClr val="2C3A54"/>
+            </a:solidFill>
+            <a:prstDash val="solid"/>
+          </a:ln>
+        </p:spPr>
+      </p:sp>
+      <p:sp>
+        <p:nvSpPr>
+          <p:cNvPr id="22" name="Text 20"/>
+          <p:cNvSpPr/>
+          <p:nvPr/>
+        </p:nvSpPr>
+        <p:spPr>
+          <a:xfrm>
+            <a:off x="6568135" y="5047488"/>
+            <a:ext cx="4489704" cy="658368"/>
+          </a:xfrm>
+          <a:prstGeom prst="rect">
+            <a:avLst/>
+          </a:prstGeom>
+          <a:noFill/>
+          <a:ln/>
+        </p:spPr>
+        <p:txBody>
+          <a:bodyPr wrap="square" lIns="0" tIns="0" rIns="0" bIns="0" rtlCol="0" anchor="t"/>
+          <a:lstStyle/>
+          <a:p>
+            <a:pPr rtl="1" algn="r" indent="0" marL="0">
+              <a:lnSpc>
+                <a:spcPct val="120000"/>
+              </a:lnSpc>
+              <a:buNone/>
+            </a:pPr>
+            <a:r>
+              <a:rPr lang="he-IL" altLang="en-US" sz="1200" dirty="0">
                 <a:solidFill>
                   <a:srgbClr val="91A0B7"/>
                 </a:solidFill>
@@ -11663,26 +12913,26 @@
                 <a:ea typeface="Calibri" pitchFamily="34" charset="-122"/>
                 <a:cs typeface="Calibri" pitchFamily="34" charset="-120"/>
               </a:rPr>
-              <a:t>‫אין ‪PO‬, אין דיסקים, אין חלון התקנה. הקיבולת זמינה ביום הראשון, ומשלמים רק על מה שנצרך בפועל — בלי לרכוש מראש קיבולת לשלוש שנים.‬</a:t>
-            </a:r>
-            <a:endParaRPr lang="he-IL" sz="1150" dirty="0"/>
-          </a:p>
-        </p:txBody>
-      </p:sp>
-      <p:sp>
-        <p:nvSpPr>
-          <p:cNvPr id="17" name="Shape 15"/>
-          <p:cNvSpPr/>
-          <p:nvPr/>
-        </p:nvSpPr>
-        <p:spPr>
-          <a:xfrm>
-            <a:off x="8122615" y="3931920"/>
-            <a:ext cx="3246120" cy="1463040"/>
+              <a:t>‫מיטיגציה: מדידת זמני אחזור מול ה-‪SLA‬ הקיים לפני התחייבות, חיבור ‪Direct Connect‬ ולא אינטרנט, וקאשינג מקומי לפריטים חמים.‬</a:t>
+            </a:r>
+            <a:endParaRPr lang="he-IL" sz="1200" dirty="0"/>
+          </a:p>
+        </p:txBody>
+      </p:sp>
+      <p:sp>
+        <p:nvSpPr>
+          <p:cNvPr id="23" name="Shape 21"/>
+          <p:cNvSpPr/>
+          <p:nvPr/>
+        </p:nvSpPr>
+        <p:spPr>
+          <a:xfrm>
+            <a:off x="822960" y="4023360"/>
+            <a:ext cx="5074920" cy="1792224"/>
           </a:xfrm>
           <a:prstGeom prst="roundRect">
             <a:avLst>
-              <a:gd name="adj" fmla="val 3125"/>
+              <a:gd name="adj" fmla="val 2551"/>
             </a:avLst>
           </a:prstGeom>
           <a:solidFill>
@@ -11698,24 +12948,24 @@
       </p:sp>
       <p:sp>
         <p:nvSpPr>
-          <p:cNvPr id="18" name="Shape 16"/>
-          <p:cNvSpPr/>
-          <p:nvPr/>
-        </p:nvSpPr>
-        <p:spPr>
-          <a:xfrm>
-            <a:off x="10948111" y="4187952"/>
-            <a:ext cx="118872" cy="118872"/>
-          </a:xfrm>
-          <a:prstGeom prst="rect">
-            <a:avLst/>
-          </a:prstGeom>
-          <a:solidFill>
-            <a:srgbClr val="3DD9EB"/>
+          <p:cNvPr id="24" name="Shape 22"/>
+          <p:cNvSpPr/>
+          <p:nvPr/>
+        </p:nvSpPr>
+        <p:spPr>
+          <a:xfrm>
+            <a:off x="5847588" y="4169664"/>
+            <a:ext cx="50292" cy="1499616"/>
+          </a:xfrm>
+          <a:prstGeom prst="rect">
+            <a:avLst/>
+          </a:prstGeom>
+          <a:solidFill>
+            <a:srgbClr val="FF9F43"/>
           </a:solidFill>
           <a:ln w="12700">
             <a:solidFill>
-              <a:srgbClr val="3DD9EB"/>
+              <a:srgbClr val="FF9F43"/>
             </a:solidFill>
             <a:prstDash val="solid"/>
           </a:ln>
@@ -11723,14 +12973,14 @@
       </p:sp>
       <p:sp>
         <p:nvSpPr>
-          <p:cNvPr id="19" name="Text 17"/>
-          <p:cNvSpPr/>
-          <p:nvPr/>
-        </p:nvSpPr>
-        <p:spPr>
-          <a:xfrm>
-            <a:off x="8378647" y="4114800"/>
-            <a:ext cx="2478024" cy="274320"/>
+          <p:cNvPr id="25" name="Text 23"/>
+          <p:cNvSpPr/>
+          <p:nvPr/>
+        </p:nvSpPr>
+        <p:spPr>
+          <a:xfrm>
+            <a:off x="1097280" y="4169664"/>
+            <a:ext cx="4489704" cy="292608"/>
           </a:xfrm>
           <a:prstGeom prst="rect">
             <a:avLst/>
@@ -11749,30 +12999,30 @@
               <a:buNone/>
             </a:pPr>
             <a:r>
-              <a:rPr lang="he-IL" altLang="en-US" sz="1350" b="1" dirty="0">
-                <a:solidFill>
-                  <a:srgbClr val="3DD9EB"/>
-                </a:solidFill>
-                <a:latin typeface="Calibri" pitchFamily="34" charset="0"/>
-                <a:ea typeface="Calibri" pitchFamily="34" charset="-122"/>
-                <a:cs typeface="Calibri" pitchFamily="34" charset="-120"/>
-              </a:rPr>
-              <a:t>‫‪Lifecycle‬ אוטומטי‬</a:t>
-            </a:r>
-            <a:endParaRPr lang="he-IL" sz="1350" dirty="0"/>
-          </a:p>
-        </p:txBody>
-      </p:sp>
-      <p:sp>
-        <p:nvSpPr>
-          <p:cNvPr id="20" name="Text 18"/>
-          <p:cNvSpPr/>
-          <p:nvPr/>
-        </p:nvSpPr>
-        <p:spPr>
-          <a:xfrm>
-            <a:off x="8378647" y="4462272"/>
-            <a:ext cx="2734056" cy="822960"/>
+              <a:rPr lang="he-IL" altLang="en-US" sz="1500" b="1" dirty="0">
+                <a:solidFill>
+                  <a:srgbClr val="FF9F43"/>
+                </a:solidFill>
+                <a:latin typeface="Calibri" pitchFamily="34" charset="0"/>
+                <a:ea typeface="Calibri" pitchFamily="34" charset="-122"/>
+                <a:cs typeface="Calibri" pitchFamily="34" charset="-120"/>
+              </a:rPr>
+              <a:t>‫כלי ההעברה · ‪POC‬‬</a:t>
+            </a:r>
+            <a:endParaRPr lang="he-IL" sz="1500" dirty="0"/>
+          </a:p>
+        </p:txBody>
+      </p:sp>
+      <p:sp>
+        <p:nvSpPr>
+          <p:cNvPr id="26" name="Text 24"/>
+          <p:cNvSpPr/>
+          <p:nvPr/>
+        </p:nvSpPr>
+        <p:spPr>
+          <a:xfrm>
+            <a:off x="1097280" y="4535424"/>
+            <a:ext cx="4489704" cy="402336"/>
           </a:xfrm>
           <a:prstGeom prst="rect">
             <a:avLst/>
@@ -11791,7 +13041,74 @@
               <a:buNone/>
             </a:pPr>
             <a:r>
-              <a:rPr lang="he-IL" altLang="en-US" sz="1150" dirty="0">
+              <a:rPr lang="he-IL" altLang="en-US" sz="1300" dirty="0">
+                <a:solidFill>
+                  <a:srgbClr val="F4F7FB"/>
+                </a:solidFill>
+                <a:latin typeface="Calibri" pitchFamily="34" charset="0"/>
+                <a:ea typeface="Calibri" pitchFamily="34" charset="-122"/>
+                <a:cs typeface="Calibri" pitchFamily="34" charset="-120"/>
+              </a:rPr>
+              <a:t>‫אין כלי העתקה מוכח בסדר גודל כזה. קבצים עלולים להיכשל בהעברה בלי שהדבר יתגלה.‬</a:t>
+            </a:r>
+            <a:endParaRPr lang="he-IL" sz="1300" dirty="0"/>
+          </a:p>
+        </p:txBody>
+      </p:sp>
+      <p:sp>
+        <p:nvSpPr>
+          <p:cNvPr id="27" name="Shape 25"/>
+          <p:cNvSpPr/>
+          <p:nvPr/>
+        </p:nvSpPr>
+        <p:spPr>
+          <a:xfrm>
+            <a:off x="1097280" y="4974336"/>
+            <a:ext cx="4489704" cy="9144"/>
+          </a:xfrm>
+          <a:prstGeom prst="rect">
+            <a:avLst/>
+          </a:prstGeom>
+          <a:solidFill>
+            <a:srgbClr val="2C3A54"/>
+          </a:solidFill>
+          <a:ln w="12700">
+            <a:solidFill>
+              <a:srgbClr val="2C3A54"/>
+            </a:solidFill>
+            <a:prstDash val="solid"/>
+          </a:ln>
+        </p:spPr>
+      </p:sp>
+      <p:sp>
+        <p:nvSpPr>
+          <p:cNvPr id="28" name="Text 26"/>
+          <p:cNvSpPr/>
+          <p:nvPr/>
+        </p:nvSpPr>
+        <p:spPr>
+          <a:xfrm>
+            <a:off x="1097280" y="5047488"/>
+            <a:ext cx="4489704" cy="658368"/>
+          </a:xfrm>
+          <a:prstGeom prst="rect">
+            <a:avLst/>
+          </a:prstGeom>
+          <a:noFill/>
+          <a:ln/>
+        </p:spPr>
+        <p:txBody>
+          <a:bodyPr wrap="square" lIns="0" tIns="0" rIns="0" bIns="0" rtlCol="0" anchor="t"/>
+          <a:lstStyle/>
+          <a:p>
+            <a:pPr rtl="1" algn="r" indent="0" marL="0">
+              <a:lnSpc>
+                <a:spcPct val="120000"/>
+              </a:lnSpc>
+              <a:buNone/>
+            </a:pPr>
+            <a:r>
+              <a:rPr lang="he-IL" altLang="en-US" sz="1200" dirty="0">
                 <a:solidFill>
                   <a:srgbClr val="91A0B7"/>
                 </a:solidFill>
@@ -11799,30 +13116,28 @@
                 <a:ea typeface="Calibri" pitchFamily="34" charset="-122"/>
                 <a:cs typeface="Calibri" pitchFamily="34" charset="-120"/>
               </a:rPr>
-              <a:t>‫מדיניות שכבות מעבירה דאטה מתקרר לשכבה זולה יותר לאורך זמן — הוזלה שנמשכת ללא התערבות תפעולית ובלי פרויקט נוסף.‬</a:t>
-            </a:r>
-            <a:endParaRPr lang="he-IL" sz="1150" dirty="0"/>
-          </a:p>
-        </p:txBody>
-      </p:sp>
-      <p:sp>
-        <p:nvSpPr>
-          <p:cNvPr id="21" name="Shape 19"/>
-          <p:cNvSpPr/>
-          <p:nvPr/>
-        </p:nvSpPr>
-        <p:spPr>
-          <a:xfrm>
-            <a:off x="4474159" y="3931920"/>
-            <a:ext cx="3246120" cy="1463040"/>
-          </a:xfrm>
-          <a:prstGeom prst="roundRect">
-            <a:avLst>
-              <a:gd name="adj" fmla="val 3125"/>
-            </a:avLst>
-          </a:prstGeom>
-          <a:solidFill>
-            <a:srgbClr val="182133"/>
+              <a:t>‫מיטיגציה: ‪POC‬ קצר על ‪1–2 TB‬ עם ‪AWS DataSync‬: ולידציה מובנית, דוח חריגים לכל ריצה, ומחיקה מ-‪ECS‬ רק לאחר אימות מלא.‬</a:t>
+            </a:r>
+            <a:endParaRPr lang="he-IL" sz="1200" dirty="0"/>
+          </a:p>
+        </p:txBody>
+      </p:sp>
+      <p:sp>
+        <p:nvSpPr>
+          <p:cNvPr id="29" name="Shape 27"/>
+          <p:cNvSpPr/>
+          <p:nvPr/>
+        </p:nvSpPr>
+        <p:spPr>
+          <a:xfrm>
+            <a:off x="822960" y="5907024"/>
+            <a:ext cx="10545775" cy="10973"/>
+          </a:xfrm>
+          <a:prstGeom prst="rect">
+            <a:avLst/>
+          </a:prstGeom>
+          <a:solidFill>
+            <a:srgbClr val="23304A"/>
           </a:solidFill>
           <a:ln w="12700">
             <a:solidFill>
@@ -11834,24 +13149,24 @@
       </p:sp>
       <p:sp>
         <p:nvSpPr>
-          <p:cNvPr id="22" name="Shape 20"/>
-          <p:cNvSpPr/>
-          <p:nvPr/>
-        </p:nvSpPr>
-        <p:spPr>
-          <a:xfrm>
-            <a:off x="7299655" y="4187952"/>
+          <p:cNvPr id="30" name="Shape 28"/>
+          <p:cNvSpPr/>
+          <p:nvPr/>
+        </p:nvSpPr>
+        <p:spPr>
+          <a:xfrm>
+            <a:off x="11249863" y="6172200"/>
             <a:ext cx="118872" cy="118872"/>
           </a:xfrm>
           <a:prstGeom prst="rect">
             <a:avLst/>
           </a:prstGeom>
           <a:solidFill>
-            <a:srgbClr val="2F8CFF"/>
+            <a:srgbClr val="FF9F43"/>
           </a:solidFill>
           <a:ln w="12700">
             <a:solidFill>
-              <a:srgbClr val="2F8CFF"/>
+              <a:srgbClr val="FF9F43"/>
             </a:solidFill>
             <a:prstDash val="solid"/>
           </a:ln>
@@ -11859,276 +13174,6 @@
       </p:sp>
       <p:sp>
         <p:nvSpPr>
-          <p:cNvPr id="23" name="Text 21"/>
-          <p:cNvSpPr/>
-          <p:nvPr/>
-        </p:nvSpPr>
-        <p:spPr>
-          <a:xfrm>
-            <a:off x="4730191" y="4114800"/>
-            <a:ext cx="2478024" cy="274320"/>
-          </a:xfrm>
-          <a:prstGeom prst="rect">
-            <a:avLst/>
-          </a:prstGeom>
-          <a:noFill/>
-          <a:ln/>
-        </p:spPr>
-        <p:txBody>
-          <a:bodyPr wrap="square" lIns="0" tIns="0" rIns="0" bIns="0" rtlCol="0" anchor="ctr"/>
-          <a:lstStyle/>
-          <a:p>
-            <a:pPr rtl="1" algn="r" indent="0" marL="0">
-              <a:lnSpc>
-                <a:spcPct val="100000"/>
-              </a:lnSpc>
-              <a:buNone/>
-            </a:pPr>
-            <a:r>
-              <a:rPr lang="he-IL" altLang="en-US" sz="1350" b="1" dirty="0">
-                <a:solidFill>
-                  <a:srgbClr val="2F8CFF"/>
-                </a:solidFill>
-                <a:latin typeface="Calibri" pitchFamily="34" charset="0"/>
-                <a:ea typeface="Calibri" pitchFamily="34" charset="-122"/>
-                <a:cs typeface="Calibri" pitchFamily="34" charset="-120"/>
-              </a:rPr>
-              <a:t>‫עמידות מובנית‬</a:t>
-            </a:r>
-            <a:endParaRPr lang="he-IL" sz="1350" dirty="0"/>
-          </a:p>
-        </p:txBody>
-      </p:sp>
-      <p:sp>
-        <p:nvSpPr>
-          <p:cNvPr id="24" name="Text 22"/>
-          <p:cNvSpPr/>
-          <p:nvPr/>
-        </p:nvSpPr>
-        <p:spPr>
-          <a:xfrm>
-            <a:off x="4730191" y="4462272"/>
-            <a:ext cx="2734056" cy="822960"/>
-          </a:xfrm>
-          <a:prstGeom prst="rect">
-            <a:avLst/>
-          </a:prstGeom>
-          <a:noFill/>
-          <a:ln/>
-        </p:spPr>
-        <p:txBody>
-          <a:bodyPr wrap="square" lIns="0" tIns="0" rIns="0" bIns="0" rtlCol="0" anchor="t"/>
-          <a:lstStyle/>
-          <a:p>
-            <a:pPr rtl="1" algn="r" indent="0" marL="0">
-              <a:lnSpc>
-                <a:spcPct val="120000"/>
-              </a:lnSpc>
-              <a:buNone/>
-            </a:pPr>
-            <a:r>
-              <a:rPr lang="he-IL" altLang="en-US" sz="1150" dirty="0">
-                <a:solidFill>
-                  <a:srgbClr val="91A0B7"/>
-                </a:solidFill>
-                <a:latin typeface="Calibri" pitchFamily="34" charset="0"/>
-                <a:ea typeface="Calibri" pitchFamily="34" charset="-122"/>
-                <a:cs typeface="Calibri" pitchFamily="34" charset="-120"/>
-              </a:rPr>
-              <a:t>‫‪11‬ תשיעיות עמידות ופיזור בין אזורי זמינות, במקום שכפול משולש שאנחנו מתחזקים ומשלמים עליו פי שלושה בשלושה אתרים.‬</a:t>
-            </a:r>
-            <a:endParaRPr lang="he-IL" sz="1150" dirty="0"/>
-          </a:p>
-        </p:txBody>
-      </p:sp>
-      <p:sp>
-        <p:nvSpPr>
-          <p:cNvPr id="25" name="Shape 23"/>
-          <p:cNvSpPr/>
-          <p:nvPr/>
-        </p:nvSpPr>
-        <p:spPr>
-          <a:xfrm>
-            <a:off x="825703" y="3931920"/>
-            <a:ext cx="3246120" cy="1463040"/>
-          </a:xfrm>
-          <a:prstGeom prst="roundRect">
-            <a:avLst>
-              <a:gd name="adj" fmla="val 3125"/>
-            </a:avLst>
-          </a:prstGeom>
-          <a:solidFill>
-            <a:srgbClr val="182133"/>
-          </a:solidFill>
-          <a:ln w="12700">
-            <a:solidFill>
-              <a:srgbClr val="23304A"/>
-            </a:solidFill>
-            <a:prstDash val="solid"/>
-          </a:ln>
-        </p:spPr>
-      </p:sp>
-      <p:sp>
-        <p:nvSpPr>
-          <p:cNvPr id="26" name="Shape 24"/>
-          <p:cNvSpPr/>
-          <p:nvPr/>
-        </p:nvSpPr>
-        <p:spPr>
-          <a:xfrm>
-            <a:off x="3651199" y="4187952"/>
-            <a:ext cx="118872" cy="118872"/>
-          </a:xfrm>
-          <a:prstGeom prst="rect">
-            <a:avLst/>
-          </a:prstGeom>
-          <a:solidFill>
-            <a:srgbClr val="B07CFF"/>
-          </a:solidFill>
-          <a:ln w="12700">
-            <a:solidFill>
-              <a:srgbClr val="B07CFF"/>
-            </a:solidFill>
-            <a:prstDash val="solid"/>
-          </a:ln>
-        </p:spPr>
-      </p:sp>
-      <p:sp>
-        <p:nvSpPr>
-          <p:cNvPr id="27" name="Text 25"/>
-          <p:cNvSpPr/>
-          <p:nvPr/>
-        </p:nvSpPr>
-        <p:spPr>
-          <a:xfrm>
-            <a:off x="1081735" y="4114800"/>
-            <a:ext cx="2478024" cy="274320"/>
-          </a:xfrm>
-          <a:prstGeom prst="rect">
-            <a:avLst/>
-          </a:prstGeom>
-          <a:noFill/>
-          <a:ln/>
-        </p:spPr>
-        <p:txBody>
-          <a:bodyPr wrap="square" lIns="0" tIns="0" rIns="0" bIns="0" rtlCol="0" anchor="ctr"/>
-          <a:lstStyle/>
-          <a:p>
-            <a:pPr rtl="1" algn="r" indent="0" marL="0">
-              <a:lnSpc>
-                <a:spcPct val="100000"/>
-              </a:lnSpc>
-              <a:buNone/>
-            </a:pPr>
-            <a:r>
-              <a:rPr lang="he-IL" altLang="en-US" sz="1350" b="1" dirty="0">
-                <a:solidFill>
-                  <a:srgbClr val="B07CFF"/>
-                </a:solidFill>
-                <a:latin typeface="Calibri" pitchFamily="34" charset="0"/>
-                <a:ea typeface="Calibri" pitchFamily="34" charset="-122"/>
-                <a:cs typeface="Calibri" pitchFamily="34" charset="-120"/>
-              </a:rPr>
-              <a:t>‫בסיס לשירותי ‪AI‬‬</a:t>
-            </a:r>
-            <a:endParaRPr lang="he-IL" sz="1350" dirty="0"/>
-          </a:p>
-        </p:txBody>
-      </p:sp>
-      <p:sp>
-        <p:nvSpPr>
-          <p:cNvPr id="28" name="Text 26"/>
-          <p:cNvSpPr/>
-          <p:nvPr/>
-        </p:nvSpPr>
-        <p:spPr>
-          <a:xfrm>
-            <a:off x="1081735" y="4462272"/>
-            <a:ext cx="2734056" cy="822960"/>
-          </a:xfrm>
-          <a:prstGeom prst="rect">
-            <a:avLst/>
-          </a:prstGeom>
-          <a:noFill/>
-          <a:ln/>
-        </p:spPr>
-        <p:txBody>
-          <a:bodyPr wrap="square" lIns="0" tIns="0" rIns="0" bIns="0" rtlCol="0" anchor="t"/>
-          <a:lstStyle/>
-          <a:p>
-            <a:pPr rtl="1" algn="r" indent="0" marL="0">
-              <a:lnSpc>
-                <a:spcPct val="120000"/>
-              </a:lnSpc>
-              <a:buNone/>
-            </a:pPr>
-            <a:r>
-              <a:rPr lang="he-IL" altLang="en-US" sz="1150" dirty="0">
-                <a:solidFill>
-                  <a:srgbClr val="91A0B7"/>
-                </a:solidFill>
-                <a:latin typeface="Calibri" pitchFamily="34" charset="0"/>
-                <a:ea typeface="Calibri" pitchFamily="34" charset="-122"/>
-                <a:cs typeface="Calibri" pitchFamily="34" charset="-120"/>
-              </a:rPr>
-              <a:t>‫תמלול שיחות וניתוח דימות כשירות מנוהל מעל אותו אחסון — יכולת שאינה קיימת על ‪ECS‬ היום ואינה דורשת פרויקט תשתית נפרד.‬</a:t>
-            </a:r>
-            <a:endParaRPr lang="he-IL" sz="1150" dirty="0"/>
-          </a:p>
-        </p:txBody>
-      </p:sp>
-      <p:sp>
-        <p:nvSpPr>
-          <p:cNvPr id="29" name="Shape 27"/>
-          <p:cNvSpPr/>
-          <p:nvPr/>
-        </p:nvSpPr>
-        <p:spPr>
-          <a:xfrm>
-            <a:off x="822960" y="5907024"/>
-            <a:ext cx="10545775" cy="10973"/>
-          </a:xfrm>
-          <a:prstGeom prst="rect">
-            <a:avLst/>
-          </a:prstGeom>
-          <a:solidFill>
-            <a:srgbClr val="23304A"/>
-          </a:solidFill>
-          <a:ln w="12700">
-            <a:solidFill>
-              <a:srgbClr val="23304A"/>
-            </a:solidFill>
-            <a:prstDash val="solid"/>
-          </a:ln>
-        </p:spPr>
-      </p:sp>
-      <p:sp>
-        <p:nvSpPr>
-          <p:cNvPr id="30" name="Shape 28"/>
-          <p:cNvSpPr/>
-          <p:nvPr/>
-        </p:nvSpPr>
-        <p:spPr>
-          <a:xfrm>
-            <a:off x="11249863" y="6172200"/>
-            <a:ext cx="118872" cy="118872"/>
-          </a:xfrm>
-          <a:prstGeom prst="rect">
-            <a:avLst/>
-          </a:prstGeom>
-          <a:solidFill>
-            <a:srgbClr val="3DDC97"/>
-          </a:solidFill>
-          <a:ln w="12700">
-            <a:solidFill>
-              <a:srgbClr val="3DDC97"/>
-            </a:solidFill>
-            <a:prstDash val="solid"/>
-          </a:ln>
-        </p:spPr>
-      </p:sp>
-      <p:sp>
-        <p:nvSpPr>
           <p:cNvPr id="31" name="Text 29"/>
           <p:cNvSpPr/>
           <p:nvPr/>
@@ -12163,7 +13208,7 @@
                 <a:ea typeface="Calibri" pitchFamily="34" charset="-122"/>
                 <a:cs typeface="Calibri" pitchFamily="34" charset="-120"/>
               </a:rPr>
-              <a:t>‫התועלת נמדדת ב-‪TB‬ שפונו בפועל ובחודשי הדחייה שהושגו לרכש — לא באחוזי חיסכון תיאורטיים.‬</a:t>
+              <a:t>‫ארבעת אלה אינם חוסמים החלטה — הם מגדירים את היקף ה-‪POC‬ ואת עומס העבודה על צוותי האפליקציה. אומדן המאמץ יתקבל בסיום האפיון.‬</a:t>
             </a:r>
             <a:endParaRPr lang="he-IL" sz="1150" dirty="0"/>
           </a:p>
@@ -12231,13 +13276,13 @@
             <a:r>
               <a:rPr lang="he-IL" altLang="en-US" sz="1100" b="1" spc="120" kern="0" dirty="0">
                 <a:solidFill>
-                  <a:srgbClr val="FF6B7A"/>
-                </a:solidFill>
-                <a:latin typeface="Calibri" pitchFamily="34" charset="0"/>
-                <a:ea typeface="Calibri" pitchFamily="34" charset="-122"/>
-                <a:cs typeface="Calibri" pitchFamily="34" charset="-120"/>
-              </a:rPr>
-              <a:t>‫ציר זמן‬</a:t>
+                  <a:srgbClr val="3DDC97"/>
+                </a:solidFill>
+                <a:latin typeface="Calibri" pitchFamily="34" charset="0"/>
+                <a:ea typeface="Calibri" pitchFamily="34" charset="-122"/>
+                <a:cs typeface="Calibri" pitchFamily="34" charset="-120"/>
+              </a:rPr>
+              <a:t>‫מה זה נותן‬</a:t>
             </a:r>
             <a:endParaRPr lang="he-IL" sz="1100" dirty="0"/>
           </a:p>
@@ -12271,7 +13316,7 @@
               <a:buNone/>
             </a:pPr>
             <a:r>
-              <a:rPr lang="he-IL" altLang="en-US" sz="2700" b="1" dirty="0">
+              <a:rPr lang="he-IL" altLang="en-US" sz="2600" b="1" dirty="0">
                 <a:solidFill>
                   <a:srgbClr val="F4F7FB"/>
                 </a:solidFill>
@@ -12279,9 +13324,9 @@
                 <a:ea typeface="Calibri" pitchFamily="34" charset="-122"/>
                 <a:cs typeface="Calibri" pitchFamily="34" charset="-120"/>
               </a:rPr>
-              <a:t>‫שני מסלולים במקביל — והרכש נעול על אוקטובר‬</a:t>
-            </a:r>
-            <a:endParaRPr lang="he-IL" sz="2700" dirty="0"/>
+              <a:t>‫המנוף היחיד על השולחן שאינו תלוי בזמן אספקה של חודשיים‬</a:t>
+            </a:r>
+            <a:endParaRPr lang="he-IL" sz="2600" dirty="0"/>
           </a:p>
         </p:txBody>
       </p:sp>
@@ -12318,14 +13363,16 @@
         </p:nvSpPr>
         <p:spPr>
           <a:xfrm>
-            <a:off x="822960" y="2999232"/>
-            <a:ext cx="10545775" cy="27432"/>
-          </a:xfrm>
-          <a:prstGeom prst="rect">
-            <a:avLst/>
-          </a:prstGeom>
-          <a:solidFill>
-            <a:srgbClr val="23304A"/>
+            <a:off x="8122615" y="2121408"/>
+            <a:ext cx="3246120" cy="1463040"/>
+          </a:xfrm>
+          <a:prstGeom prst="roundRect">
+            <a:avLst>
+              <a:gd name="adj" fmla="val 3125"/>
+            </a:avLst>
+          </a:prstGeom>
+          <a:solidFill>
+            <a:srgbClr val="182133"/>
           </a:solidFill>
           <a:ln w="12700">
             <a:solidFill>
@@ -12337,14 +13384,39 @@
       </p:sp>
       <p:sp>
         <p:nvSpPr>
-          <p:cNvPr id="6" name="Text 4"/>
-          <p:cNvSpPr/>
-          <p:nvPr/>
-        </p:nvSpPr>
-        <p:spPr>
-          <a:xfrm>
-            <a:off x="9420515" y="2322576"/>
-            <a:ext cx="1948221" cy="274320"/>
+          <p:cNvPr id="6" name="Shape 4"/>
+          <p:cNvSpPr/>
+          <p:nvPr/>
+        </p:nvSpPr>
+        <p:spPr>
+          <a:xfrm>
+            <a:off x="10948111" y="2377440"/>
+            <a:ext cx="118872" cy="118872"/>
+          </a:xfrm>
+          <a:prstGeom prst="rect">
+            <a:avLst/>
+          </a:prstGeom>
+          <a:solidFill>
+            <a:srgbClr val="3DDC97"/>
+          </a:solidFill>
+          <a:ln w="12700">
+            <a:solidFill>
+              <a:srgbClr val="3DDC97"/>
+            </a:solidFill>
+            <a:prstDash val="solid"/>
+          </a:ln>
+        </p:spPr>
+      </p:sp>
+      <p:sp>
+        <p:nvSpPr>
+          <p:cNvPr id="7" name="Text 5"/>
+          <p:cNvSpPr/>
+          <p:nvPr/>
+        </p:nvSpPr>
+        <p:spPr>
+          <a:xfrm>
+            <a:off x="8378647" y="2304288"/>
+            <a:ext cx="2478024" cy="274320"/>
           </a:xfrm>
           <a:prstGeom prst="rect">
             <a:avLst/>
@@ -12363,30 +13435,235 @@
               <a:buNone/>
             </a:pPr>
             <a:r>
-              <a:rPr lang="he-IL" altLang="en-US" sz="1300" b="1" dirty="0">
-                <a:solidFill>
-                  <a:srgbClr val="F4F7FB"/>
-                </a:solidFill>
-                <a:latin typeface="Calibri" pitchFamily="34" charset="0"/>
-                <a:ea typeface="Calibri" pitchFamily="34" charset="-122"/>
-                <a:cs typeface="Calibri" pitchFamily="34" charset="-120"/>
-              </a:rPr>
-              <a:t>‫אוגוסט ‪26‬‬</a:t>
-            </a:r>
-            <a:endParaRPr lang="he-IL" sz="1300" dirty="0"/>
-          </a:p>
-        </p:txBody>
-      </p:sp>
-      <p:sp>
-        <p:nvSpPr>
-          <p:cNvPr id="7" name="Shape 5"/>
-          <p:cNvSpPr/>
-          <p:nvPr/>
-        </p:nvSpPr>
-        <p:spPr>
-          <a:xfrm>
-            <a:off x="11204143" y="2935224"/>
-            <a:ext cx="155448" cy="155448"/>
+              <a:rPr lang="he-IL" altLang="en-US" sz="1350" b="1" dirty="0">
+                <a:solidFill>
+                  <a:srgbClr val="3DDC97"/>
+                </a:solidFill>
+                <a:latin typeface="Calibri" pitchFamily="34" charset="0"/>
+                <a:ea typeface="Calibri" pitchFamily="34" charset="-122"/>
+                <a:cs typeface="Calibri" pitchFamily="34" charset="-120"/>
+              </a:rPr>
+              <a:t>‫פינוי שטח מיידי‬</a:t>
+            </a:r>
+            <a:endParaRPr lang="he-IL" sz="1350" dirty="0"/>
+          </a:p>
+        </p:txBody>
+      </p:sp>
+      <p:sp>
+        <p:nvSpPr>
+          <p:cNvPr id="8" name="Text 6"/>
+          <p:cNvSpPr/>
+          <p:nvPr/>
+        </p:nvSpPr>
+        <p:spPr>
+          <a:xfrm>
+            <a:off x="8378647" y="2651760"/>
+            <a:ext cx="2734056" cy="822960"/>
+          </a:xfrm>
+          <a:prstGeom prst="rect">
+            <a:avLst/>
+          </a:prstGeom>
+          <a:noFill/>
+          <a:ln/>
+        </p:spPr>
+        <p:txBody>
+          <a:bodyPr wrap="square" lIns="0" tIns="0" rIns="0" bIns="0" rtlCol="0" anchor="t"/>
+          <a:lstStyle/>
+          <a:p>
+            <a:pPr rtl="1" algn="r" indent="0" marL="0">
+              <a:lnSpc>
+                <a:spcPct val="120000"/>
+              </a:lnSpc>
+              <a:buNone/>
+            </a:pPr>
+            <a:r>
+              <a:rPr lang="he-IL" altLang="en-US" sz="1150" dirty="0">
+                <a:solidFill>
+                  <a:srgbClr val="91A0B7"/>
+                </a:solidFill>
+                <a:latin typeface="Calibri" pitchFamily="34" charset="0"/>
+                <a:ea typeface="Calibri" pitchFamily="34" charset="-122"/>
+                <a:cs typeface="Calibri" pitchFamily="34" charset="-120"/>
+              </a:rPr>
+              <a:t>‫העתקת קורפוס הדימות ו-‪Verint‬ מפנה שטח ב-‪ECS‬ תוך שבועות, ומאטה את ההתקרבות לסף ‪80%‬ בדצמבר — בלי להמתין לאספקה.‬</a:t>
+            </a:r>
+            <a:endParaRPr lang="he-IL" sz="1150" dirty="0"/>
+          </a:p>
+        </p:txBody>
+      </p:sp>
+      <p:sp>
+        <p:nvSpPr>
+          <p:cNvPr id="9" name="Shape 7"/>
+          <p:cNvSpPr/>
+          <p:nvPr/>
+        </p:nvSpPr>
+        <p:spPr>
+          <a:xfrm>
+            <a:off x="4474159" y="2121408"/>
+            <a:ext cx="3246120" cy="1463040"/>
+          </a:xfrm>
+          <a:prstGeom prst="roundRect">
+            <a:avLst>
+              <a:gd name="adj" fmla="val 3125"/>
+            </a:avLst>
+          </a:prstGeom>
+          <a:solidFill>
+            <a:srgbClr val="182133"/>
+          </a:solidFill>
+          <a:ln w="12700">
+            <a:solidFill>
+              <a:srgbClr val="23304A"/>
+            </a:solidFill>
+            <a:prstDash val="solid"/>
+          </a:ln>
+        </p:spPr>
+      </p:sp>
+      <p:sp>
+        <p:nvSpPr>
+          <p:cNvPr id="10" name="Shape 8"/>
+          <p:cNvSpPr/>
+          <p:nvPr/>
+        </p:nvSpPr>
+        <p:spPr>
+          <a:xfrm>
+            <a:off x="7299655" y="2377440"/>
+            <a:ext cx="118872" cy="118872"/>
+          </a:xfrm>
+          <a:prstGeom prst="rect">
+            <a:avLst/>
+          </a:prstGeom>
+          <a:solidFill>
+            <a:srgbClr val="3DDC97"/>
+          </a:solidFill>
+          <a:ln w="12700">
+            <a:solidFill>
+              <a:srgbClr val="3DDC97"/>
+            </a:solidFill>
+            <a:prstDash val="solid"/>
+          </a:ln>
+        </p:spPr>
+      </p:sp>
+      <p:sp>
+        <p:nvSpPr>
+          <p:cNvPr id="11" name="Text 9"/>
+          <p:cNvSpPr/>
+          <p:nvPr/>
+        </p:nvSpPr>
+        <p:spPr>
+          <a:xfrm>
+            <a:off x="4730191" y="2304288"/>
+            <a:ext cx="2478024" cy="274320"/>
+          </a:xfrm>
+          <a:prstGeom prst="rect">
+            <a:avLst/>
+          </a:prstGeom>
+          <a:noFill/>
+          <a:ln/>
+        </p:spPr>
+        <p:txBody>
+          <a:bodyPr wrap="square" lIns="0" tIns="0" rIns="0" bIns="0" rtlCol="0" anchor="ctr"/>
+          <a:lstStyle/>
+          <a:p>
+            <a:pPr rtl="1" algn="r" indent="0" marL="0">
+              <a:lnSpc>
+                <a:spcPct val="100000"/>
+              </a:lnSpc>
+              <a:buNone/>
+            </a:pPr>
+            <a:r>
+              <a:rPr lang="he-IL" altLang="en-US" sz="1350" b="1" dirty="0">
+                <a:solidFill>
+                  <a:srgbClr val="3DDC97"/>
+                </a:solidFill>
+                <a:latin typeface="Calibri" pitchFamily="34" charset="0"/>
+                <a:ea typeface="Calibri" pitchFamily="34" charset="-122"/>
+                <a:cs typeface="Calibri" pitchFamily="34" charset="-120"/>
+              </a:rPr>
+              <a:t>‫דחיית והקטנת ‪capex‬‬</a:t>
+            </a:r>
+            <a:endParaRPr lang="he-IL" sz="1350" dirty="0"/>
+          </a:p>
+        </p:txBody>
+      </p:sp>
+      <p:sp>
+        <p:nvSpPr>
+          <p:cNvPr id="12" name="Text 10"/>
+          <p:cNvSpPr/>
+          <p:nvPr/>
+        </p:nvSpPr>
+        <p:spPr>
+          <a:xfrm>
+            <a:off x="4730191" y="2651760"/>
+            <a:ext cx="2734056" cy="822960"/>
+          </a:xfrm>
+          <a:prstGeom prst="rect">
+            <a:avLst/>
+          </a:prstGeom>
+          <a:noFill/>
+          <a:ln/>
+        </p:spPr>
+        <p:txBody>
+          <a:bodyPr wrap="square" lIns="0" tIns="0" rIns="0" bIns="0" rtlCol="0" anchor="t"/>
+          <a:lstStyle/>
+          <a:p>
+            <a:pPr rtl="1" algn="r" indent="0" marL="0">
+              <a:lnSpc>
+                <a:spcPct val="120000"/>
+              </a:lnSpc>
+              <a:buNone/>
+            </a:pPr>
+            <a:r>
+              <a:rPr lang="he-IL" altLang="en-US" sz="1150" dirty="0">
+                <a:solidFill>
+                  <a:srgbClr val="91A0B7"/>
+                </a:solidFill>
+                <a:latin typeface="Calibri" pitchFamily="34" charset="0"/>
+                <a:ea typeface="Calibri" pitchFamily="34" charset="-122"/>
+                <a:cs typeface="Calibri" pitchFamily="34" charset="-120"/>
+              </a:rPr>
+              <a:t>‫כל ‪TB‬ שמפונה מקטין את היקף ההרחבה הנדרשת. הצעת ‪Dell‬ הנוכחית עומדת על ‪$695,520‬ עבור ‪600 TB‬ לוגי.‬</a:t>
+            </a:r>
+            <a:endParaRPr lang="he-IL" sz="1150" dirty="0"/>
+          </a:p>
+        </p:txBody>
+      </p:sp>
+      <p:sp>
+        <p:nvSpPr>
+          <p:cNvPr id="13" name="Shape 11"/>
+          <p:cNvSpPr/>
+          <p:nvPr/>
+        </p:nvSpPr>
+        <p:spPr>
+          <a:xfrm>
+            <a:off x="825703" y="2121408"/>
+            <a:ext cx="3246120" cy="1463040"/>
+          </a:xfrm>
+          <a:prstGeom prst="roundRect">
+            <a:avLst>
+              <a:gd name="adj" fmla="val 3125"/>
+            </a:avLst>
+          </a:prstGeom>
+          <a:solidFill>
+            <a:srgbClr val="182133"/>
+          </a:solidFill>
+          <a:ln w="12700">
+            <a:solidFill>
+              <a:srgbClr val="23304A"/>
+            </a:solidFill>
+            <a:prstDash val="solid"/>
+          </a:ln>
+        </p:spPr>
+      </p:sp>
+      <p:sp>
+        <p:nvSpPr>
+          <p:cNvPr id="14" name="Shape 12"/>
+          <p:cNvSpPr/>
+          <p:nvPr/>
+        </p:nvSpPr>
+        <p:spPr>
+          <a:xfrm>
+            <a:off x="3651199" y="2377440"/>
+            <a:ext cx="118872" cy="118872"/>
           </a:xfrm>
           <a:prstGeom prst="rect">
             <a:avLst/>
@@ -12404,18 +13681,102 @@
       </p:sp>
       <p:sp>
         <p:nvSpPr>
-          <p:cNvPr id="8" name="Shape 6"/>
-          <p:cNvSpPr/>
-          <p:nvPr/>
-        </p:nvSpPr>
-        <p:spPr>
-          <a:xfrm>
-            <a:off x="9420515" y="3273552"/>
-            <a:ext cx="1948221" cy="1225296"/>
+          <p:cNvPr id="15" name="Text 13"/>
+          <p:cNvSpPr/>
+          <p:nvPr/>
+        </p:nvSpPr>
+        <p:spPr>
+          <a:xfrm>
+            <a:off x="1081735" y="2304288"/>
+            <a:ext cx="2478024" cy="274320"/>
+          </a:xfrm>
+          <a:prstGeom prst="rect">
+            <a:avLst/>
+          </a:prstGeom>
+          <a:noFill/>
+          <a:ln/>
+        </p:spPr>
+        <p:txBody>
+          <a:bodyPr wrap="square" lIns="0" tIns="0" rIns="0" bIns="0" rtlCol="0" anchor="ctr"/>
+          <a:lstStyle/>
+          <a:p>
+            <a:pPr rtl="1" algn="r" indent="0" marL="0">
+              <a:lnSpc>
+                <a:spcPct val="100000"/>
+              </a:lnSpc>
+              <a:buNone/>
+            </a:pPr>
+            <a:r>
+              <a:rPr lang="he-IL" altLang="en-US" sz="1350" b="1" dirty="0">
+                <a:solidFill>
+                  <a:srgbClr val="3DD9EB"/>
+                </a:solidFill>
+                <a:latin typeface="Calibri" pitchFamily="34" charset="0"/>
+                <a:ea typeface="Calibri" pitchFamily="34" charset="-122"/>
+                <a:cs typeface="Calibri" pitchFamily="34" charset="-120"/>
+              </a:rPr>
+              <a:t>‫ללא זמן אספקה‬</a:t>
+            </a:r>
+            <a:endParaRPr lang="he-IL" sz="1350" dirty="0"/>
+          </a:p>
+        </p:txBody>
+      </p:sp>
+      <p:sp>
+        <p:nvSpPr>
+          <p:cNvPr id="16" name="Text 14"/>
+          <p:cNvSpPr/>
+          <p:nvPr/>
+        </p:nvSpPr>
+        <p:spPr>
+          <a:xfrm>
+            <a:off x="1081735" y="2651760"/>
+            <a:ext cx="2734056" cy="822960"/>
+          </a:xfrm>
+          <a:prstGeom prst="rect">
+            <a:avLst/>
+          </a:prstGeom>
+          <a:noFill/>
+          <a:ln/>
+        </p:spPr>
+        <p:txBody>
+          <a:bodyPr wrap="square" lIns="0" tIns="0" rIns="0" bIns="0" rtlCol="0" anchor="t"/>
+          <a:lstStyle/>
+          <a:p>
+            <a:pPr rtl="1" algn="r" indent="0" marL="0">
+              <a:lnSpc>
+                <a:spcPct val="120000"/>
+              </a:lnSpc>
+              <a:buNone/>
+            </a:pPr>
+            <a:r>
+              <a:rPr lang="he-IL" altLang="en-US" sz="1150" dirty="0">
+                <a:solidFill>
+                  <a:srgbClr val="91A0B7"/>
+                </a:solidFill>
+                <a:latin typeface="Calibri" pitchFamily="34" charset="0"/>
+                <a:ea typeface="Calibri" pitchFamily="34" charset="-122"/>
+                <a:cs typeface="Calibri" pitchFamily="34" charset="-120"/>
+              </a:rPr>
+              <a:t>‫אין ‪PO‬, אין דיסקים, אין חלון התקנה. הקיבולת זמינה ביום הראשון, ומשלמים רק על מה שנצרך בפועל — בלי לרכוש מראש קיבולת לשלוש שנים.‬</a:t>
+            </a:r>
+            <a:endParaRPr lang="he-IL" sz="1150" dirty="0"/>
+          </a:p>
+        </p:txBody>
+      </p:sp>
+      <p:sp>
+        <p:nvSpPr>
+          <p:cNvPr id="17" name="Shape 15"/>
+          <p:cNvSpPr/>
+          <p:nvPr/>
+        </p:nvSpPr>
+        <p:spPr>
+          <a:xfrm>
+            <a:off x="8122615" y="3931920"/>
+            <a:ext cx="3246120" cy="1463040"/>
           </a:xfrm>
           <a:prstGeom prst="roundRect">
             <a:avLst>
-              <a:gd name="adj" fmla="val 4478"/>
+              <a:gd name="adj" fmla="val 3125"/>
             </a:avLst>
           </a:prstGeom>
           <a:solidFill>
@@ -12431,138 +13792,14 @@
       </p:sp>
       <p:sp>
         <p:nvSpPr>
-          <p:cNvPr id="9" name="Text 7"/>
-          <p:cNvSpPr/>
-          <p:nvPr/>
-        </p:nvSpPr>
-        <p:spPr>
-          <a:xfrm>
-            <a:off x="9621683" y="3401568"/>
-            <a:ext cx="1545885" cy="987552"/>
-          </a:xfrm>
-          <a:prstGeom prst="rect">
-            <a:avLst/>
-          </a:prstGeom>
-          <a:noFill/>
-          <a:ln/>
-        </p:spPr>
-        <p:txBody>
-          <a:bodyPr wrap="square" lIns="0" tIns="0" rIns="0" bIns="0" rtlCol="0" anchor="t"/>
-          <a:lstStyle/>
-          <a:p>
-            <a:pPr rtl="1" algn="r" indent="0" marL="0">
-              <a:lnSpc>
-                <a:spcPct val="122000"/>
-              </a:lnSpc>
-              <a:buNone/>
-            </a:pPr>
-            <a:r>
-              <a:rPr lang="he-IL" altLang="en-US" sz="1150" dirty="0">
-                <a:solidFill>
-                  <a:srgbClr val="91A0B7"/>
-                </a:solidFill>
-                <a:latin typeface="Calibri" pitchFamily="34" charset="0"/>
-                <a:ea typeface="Calibri" pitchFamily="34" charset="-122"/>
-                <a:cs typeface="Calibri" pitchFamily="34" charset="-120"/>
-              </a:rPr>
-              <a:t>‫אישור עקרוני להעתקה‬</a:t>
-            </a:r>
-            <a:endParaRPr lang="he-IL" sz="1150" dirty="0"/>
-          </a:p>
-          <a:p>
-            <a:pPr rtl="1" algn="r" indent="0" marL="0">
-              <a:lnSpc>
-                <a:spcPct val="122000"/>
-              </a:lnSpc>
-              <a:buNone/>
-            </a:pPr>
-            <a:r>
-              <a:rPr lang="he-IL" altLang="en-US" sz="1150" dirty="0">
-                <a:solidFill>
-                  <a:srgbClr val="91A0B7"/>
-                </a:solidFill>
-                <a:latin typeface="Calibri" pitchFamily="34" charset="0"/>
-                <a:ea typeface="Calibri" pitchFamily="34" charset="-122"/>
-                <a:cs typeface="Calibri" pitchFamily="34" charset="-120"/>
-              </a:rPr>
-              <a:t>‫פילוח קורפוס הדימות ו-‪Verint‬‬</a:t>
-            </a:r>
-            <a:endParaRPr lang="he-IL" sz="1150" dirty="0"/>
-          </a:p>
-          <a:p>
-            <a:pPr rtl="1" algn="r" indent="0" marL="0">
-              <a:lnSpc>
-                <a:spcPct val="122000"/>
-              </a:lnSpc>
-              <a:buNone/>
-            </a:pPr>
-            <a:r>
-              <a:rPr lang="he-IL" altLang="en-US" sz="1150" dirty="0">
-                <a:solidFill>
-                  <a:srgbClr val="91A0B7"/>
-                </a:solidFill>
-                <a:latin typeface="Calibri" pitchFamily="34" charset="0"/>
-                <a:ea typeface="Calibri" pitchFamily="34" charset="-122"/>
-                <a:cs typeface="Calibri" pitchFamily="34" charset="-120"/>
-              </a:rPr>
-              <a:t>‫הגדרת קריטריוני קבילות‬</a:t>
-            </a:r>
-            <a:endParaRPr lang="he-IL" sz="1150" dirty="0"/>
-          </a:p>
-        </p:txBody>
-      </p:sp>
-      <p:sp>
-        <p:nvSpPr>
-          <p:cNvPr id="10" name="Text 8"/>
-          <p:cNvSpPr/>
-          <p:nvPr/>
-        </p:nvSpPr>
-        <p:spPr>
-          <a:xfrm>
-            <a:off x="7271126" y="2322576"/>
-            <a:ext cx="1948221" cy="274320"/>
-          </a:xfrm>
-          <a:prstGeom prst="rect">
-            <a:avLst/>
-          </a:prstGeom>
-          <a:noFill/>
-          <a:ln/>
-        </p:spPr>
-        <p:txBody>
-          <a:bodyPr wrap="square" lIns="0" tIns="0" rIns="0" bIns="0" rtlCol="0" anchor="ctr"/>
-          <a:lstStyle/>
-          <a:p>
-            <a:pPr rtl="1" algn="r" indent="0" marL="0">
-              <a:lnSpc>
-                <a:spcPct val="100000"/>
-              </a:lnSpc>
-              <a:buNone/>
-            </a:pPr>
-            <a:r>
-              <a:rPr lang="he-IL" altLang="en-US" sz="1300" b="1" dirty="0">
-                <a:solidFill>
-                  <a:srgbClr val="F4F7FB"/>
-                </a:solidFill>
-                <a:latin typeface="Calibri" pitchFamily="34" charset="0"/>
-                <a:ea typeface="Calibri" pitchFamily="34" charset="-122"/>
-                <a:cs typeface="Calibri" pitchFamily="34" charset="-120"/>
-              </a:rPr>
-              <a:t>‫ספטמבר ‪26‬‬</a:t>
-            </a:r>
-            <a:endParaRPr lang="he-IL" sz="1300" dirty="0"/>
-          </a:p>
-        </p:txBody>
-      </p:sp>
-      <p:sp>
-        <p:nvSpPr>
-          <p:cNvPr id="11" name="Shape 9"/>
-          <p:cNvSpPr/>
-          <p:nvPr/>
-        </p:nvSpPr>
-        <p:spPr>
-          <a:xfrm>
-            <a:off x="9054755" y="2935224"/>
-            <a:ext cx="155448" cy="155448"/>
+          <p:cNvPr id="18" name="Shape 16"/>
+          <p:cNvSpPr/>
+          <p:nvPr/>
+        </p:nvSpPr>
+        <p:spPr>
+          <a:xfrm>
+            <a:off x="10948111" y="4187952"/>
+            <a:ext cx="118872" cy="118872"/>
           </a:xfrm>
           <a:prstGeom prst="rect">
             <a:avLst/>
@@ -12580,18 +13817,102 @@
       </p:sp>
       <p:sp>
         <p:nvSpPr>
-          <p:cNvPr id="12" name="Shape 10"/>
-          <p:cNvSpPr/>
-          <p:nvPr/>
-        </p:nvSpPr>
-        <p:spPr>
-          <a:xfrm>
-            <a:off x="7271126" y="3273552"/>
-            <a:ext cx="1948221" cy="1225296"/>
+          <p:cNvPr id="19" name="Text 17"/>
+          <p:cNvSpPr/>
+          <p:nvPr/>
+        </p:nvSpPr>
+        <p:spPr>
+          <a:xfrm>
+            <a:off x="8378647" y="4114800"/>
+            <a:ext cx="2478024" cy="274320"/>
+          </a:xfrm>
+          <a:prstGeom prst="rect">
+            <a:avLst/>
+          </a:prstGeom>
+          <a:noFill/>
+          <a:ln/>
+        </p:spPr>
+        <p:txBody>
+          <a:bodyPr wrap="square" lIns="0" tIns="0" rIns="0" bIns="0" rtlCol="0" anchor="ctr"/>
+          <a:lstStyle/>
+          <a:p>
+            <a:pPr rtl="1" algn="r" indent="0" marL="0">
+              <a:lnSpc>
+                <a:spcPct val="100000"/>
+              </a:lnSpc>
+              <a:buNone/>
+            </a:pPr>
+            <a:r>
+              <a:rPr lang="he-IL" altLang="en-US" sz="1350" b="1" dirty="0">
+                <a:solidFill>
+                  <a:srgbClr val="3DD9EB"/>
+                </a:solidFill>
+                <a:latin typeface="Calibri" pitchFamily="34" charset="0"/>
+                <a:ea typeface="Calibri" pitchFamily="34" charset="-122"/>
+                <a:cs typeface="Calibri" pitchFamily="34" charset="-120"/>
+              </a:rPr>
+              <a:t>‫‪Lifecycle‬ אוטומטי‬</a:t>
+            </a:r>
+            <a:endParaRPr lang="he-IL" sz="1350" dirty="0"/>
+          </a:p>
+        </p:txBody>
+      </p:sp>
+      <p:sp>
+        <p:nvSpPr>
+          <p:cNvPr id="20" name="Text 18"/>
+          <p:cNvSpPr/>
+          <p:nvPr/>
+        </p:nvSpPr>
+        <p:spPr>
+          <a:xfrm>
+            <a:off x="8378647" y="4462272"/>
+            <a:ext cx="2734056" cy="822960"/>
+          </a:xfrm>
+          <a:prstGeom prst="rect">
+            <a:avLst/>
+          </a:prstGeom>
+          <a:noFill/>
+          <a:ln/>
+        </p:spPr>
+        <p:txBody>
+          <a:bodyPr wrap="square" lIns="0" tIns="0" rIns="0" bIns="0" rtlCol="0" anchor="t"/>
+          <a:lstStyle/>
+          <a:p>
+            <a:pPr rtl="1" algn="r" indent="0" marL="0">
+              <a:lnSpc>
+                <a:spcPct val="120000"/>
+              </a:lnSpc>
+              <a:buNone/>
+            </a:pPr>
+            <a:r>
+              <a:rPr lang="he-IL" altLang="en-US" sz="1150" dirty="0">
+                <a:solidFill>
+                  <a:srgbClr val="91A0B7"/>
+                </a:solidFill>
+                <a:latin typeface="Calibri" pitchFamily="34" charset="0"/>
+                <a:ea typeface="Calibri" pitchFamily="34" charset="-122"/>
+                <a:cs typeface="Calibri" pitchFamily="34" charset="-120"/>
+              </a:rPr>
+              <a:t>‫מדיניות שכבות מעבירה דאטה מתקרר לשכבה זולה יותר לאורך זמן — הוזלה שנמשכת ללא התערבות תפעולית ובלי פרויקט נוסף.‬</a:t>
+            </a:r>
+            <a:endParaRPr lang="he-IL" sz="1150" dirty="0"/>
+          </a:p>
+        </p:txBody>
+      </p:sp>
+      <p:sp>
+        <p:nvSpPr>
+          <p:cNvPr id="21" name="Shape 19"/>
+          <p:cNvSpPr/>
+          <p:nvPr/>
+        </p:nvSpPr>
+        <p:spPr>
+          <a:xfrm>
+            <a:off x="4474159" y="3931920"/>
+            <a:ext cx="3246120" cy="1463040"/>
           </a:xfrm>
           <a:prstGeom prst="roundRect">
             <a:avLst>
-              <a:gd name="adj" fmla="val 4478"/>
+              <a:gd name="adj" fmla="val 3125"/>
             </a:avLst>
           </a:prstGeom>
           <a:solidFill>
@@ -12607,148 +13928,24 @@
       </p:sp>
       <p:sp>
         <p:nvSpPr>
-          <p:cNvPr id="13" name="Text 11"/>
-          <p:cNvSpPr/>
-          <p:nvPr/>
-        </p:nvSpPr>
-        <p:spPr>
-          <a:xfrm>
-            <a:off x="7472294" y="3401568"/>
-            <a:ext cx="1545885" cy="987552"/>
-          </a:xfrm>
-          <a:prstGeom prst="rect">
-            <a:avLst/>
-          </a:prstGeom>
-          <a:noFill/>
-          <a:ln/>
-        </p:spPr>
-        <p:txBody>
-          <a:bodyPr wrap="square" lIns="0" tIns="0" rIns="0" bIns="0" rtlCol="0" anchor="t"/>
-          <a:lstStyle/>
-          <a:p>
-            <a:pPr rtl="1" algn="r" indent="0" marL="0">
-              <a:lnSpc>
-                <a:spcPct val="122000"/>
-              </a:lnSpc>
-              <a:buNone/>
-            </a:pPr>
-            <a:r>
-              <a:rPr lang="he-IL" altLang="en-US" sz="1150" dirty="0">
-                <a:solidFill>
-                  <a:srgbClr val="91A0B7"/>
-                </a:solidFill>
-                <a:latin typeface="Calibri" pitchFamily="34" charset="0"/>
-                <a:ea typeface="Calibri" pitchFamily="34" charset="-122"/>
-                <a:cs typeface="Calibri" pitchFamily="34" charset="-120"/>
-              </a:rPr>
-              <a:t>‫‪POC‬ על ‪1–2 TB‬‬</a:t>
-            </a:r>
-            <a:endParaRPr lang="he-IL" sz="1150" dirty="0"/>
-          </a:p>
-          <a:p>
-            <a:pPr rtl="1" algn="r" indent="0" marL="0">
-              <a:lnSpc>
-                <a:spcPct val="122000"/>
-              </a:lnSpc>
-              <a:buNone/>
-            </a:pPr>
-            <a:r>
-              <a:rPr lang="he-IL" altLang="en-US" sz="1150" dirty="0">
-                <a:solidFill>
-                  <a:srgbClr val="91A0B7"/>
-                </a:solidFill>
-                <a:latin typeface="Calibri" pitchFamily="34" charset="0"/>
-                <a:ea typeface="Calibri" pitchFamily="34" charset="-122"/>
-                <a:cs typeface="Calibri" pitchFamily="34" charset="-120"/>
-              </a:rPr>
-              <a:t>‫אישור ‪DPO‬ ורגולטור‬</a:t>
-            </a:r>
-            <a:endParaRPr lang="he-IL" sz="1150" dirty="0"/>
-          </a:p>
-          <a:p>
-            <a:pPr rtl="1" algn="r" indent="0" marL="0">
-              <a:lnSpc>
-                <a:spcPct val="122000"/>
-              </a:lnSpc>
-              <a:buNone/>
-            </a:pPr>
-            <a:r>
-              <a:rPr lang="he-IL" altLang="en-US" sz="1150" dirty="0">
-                <a:solidFill>
-                  <a:srgbClr val="91A0B7"/>
-                </a:solidFill>
-                <a:latin typeface="Calibri" pitchFamily="34" charset="0"/>
-                <a:ea typeface="Calibri" pitchFamily="34" charset="-122"/>
-                <a:cs typeface="Calibri" pitchFamily="34" charset="-120"/>
-              </a:rPr>
-              <a:t>‫הקמת ‪Direct Connect‬‬</a:t>
-            </a:r>
-            <a:endParaRPr lang="he-IL" sz="1150" dirty="0"/>
-          </a:p>
-        </p:txBody>
-      </p:sp>
-      <p:sp>
-        <p:nvSpPr>
-          <p:cNvPr id="14" name="Text 12"/>
-          <p:cNvSpPr/>
-          <p:nvPr/>
-        </p:nvSpPr>
-        <p:spPr>
-          <a:xfrm>
-            <a:off x="5121737" y="2322576"/>
-            <a:ext cx="1948221" cy="274320"/>
-          </a:xfrm>
-          <a:prstGeom prst="rect">
-            <a:avLst/>
-          </a:prstGeom>
-          <a:noFill/>
-          <a:ln/>
-        </p:spPr>
-        <p:txBody>
-          <a:bodyPr wrap="square" lIns="0" tIns="0" rIns="0" bIns="0" rtlCol="0" anchor="ctr"/>
-          <a:lstStyle/>
-          <a:p>
-            <a:pPr rtl="1" algn="r" indent="0" marL="0">
-              <a:lnSpc>
-                <a:spcPct val="100000"/>
-              </a:lnSpc>
-              <a:buNone/>
-            </a:pPr>
-            <a:r>
-              <a:rPr lang="he-IL" altLang="en-US" sz="1300" b="1" dirty="0">
-                <a:solidFill>
-                  <a:srgbClr val="F4F7FB"/>
-                </a:solidFill>
-                <a:latin typeface="Calibri" pitchFamily="34" charset="0"/>
-                <a:ea typeface="Calibri" pitchFamily="34" charset="-122"/>
-                <a:cs typeface="Calibri" pitchFamily="34" charset="-120"/>
-              </a:rPr>
-              <a:t>‫אוקטובר ‪26‬‬</a:t>
-            </a:r>
-            <a:endParaRPr lang="he-IL" sz="1300" dirty="0"/>
-          </a:p>
-        </p:txBody>
-      </p:sp>
-      <p:sp>
-        <p:nvSpPr>
-          <p:cNvPr id="15" name="Shape 13"/>
-          <p:cNvSpPr/>
-          <p:nvPr/>
-        </p:nvSpPr>
-        <p:spPr>
-          <a:xfrm>
-            <a:off x="6905366" y="2935224"/>
-            <a:ext cx="155448" cy="155448"/>
-          </a:xfrm>
-          <a:prstGeom prst="rect">
-            <a:avLst/>
-          </a:prstGeom>
-          <a:solidFill>
-            <a:srgbClr val="FF6B7A"/>
+          <p:cNvPr id="22" name="Shape 20"/>
+          <p:cNvSpPr/>
+          <p:nvPr/>
+        </p:nvSpPr>
+        <p:spPr>
+          <a:xfrm>
+            <a:off x="7299655" y="4187952"/>
+            <a:ext cx="118872" cy="118872"/>
+          </a:xfrm>
+          <a:prstGeom prst="rect">
+            <a:avLst/>
+          </a:prstGeom>
+          <a:solidFill>
+            <a:srgbClr val="2F8CFF"/>
           </a:solidFill>
           <a:ln w="12700">
             <a:solidFill>
-              <a:srgbClr val="FF6B7A"/>
+              <a:srgbClr val="2F8CFF"/>
             </a:solidFill>
             <a:prstDash val="solid"/>
           </a:ln>
@@ -12756,18 +13953,102 @@
       </p:sp>
       <p:sp>
         <p:nvSpPr>
-          <p:cNvPr id="16" name="Shape 14"/>
-          <p:cNvSpPr/>
-          <p:nvPr/>
-        </p:nvSpPr>
-        <p:spPr>
-          <a:xfrm>
-            <a:off x="5121737" y="3273552"/>
-            <a:ext cx="1948221" cy="1225296"/>
+          <p:cNvPr id="23" name="Text 21"/>
+          <p:cNvSpPr/>
+          <p:nvPr/>
+        </p:nvSpPr>
+        <p:spPr>
+          <a:xfrm>
+            <a:off x="4730191" y="4114800"/>
+            <a:ext cx="2478024" cy="274320"/>
+          </a:xfrm>
+          <a:prstGeom prst="rect">
+            <a:avLst/>
+          </a:prstGeom>
+          <a:noFill/>
+          <a:ln/>
+        </p:spPr>
+        <p:txBody>
+          <a:bodyPr wrap="square" lIns="0" tIns="0" rIns="0" bIns="0" rtlCol="0" anchor="ctr"/>
+          <a:lstStyle/>
+          <a:p>
+            <a:pPr rtl="1" algn="r" indent="0" marL="0">
+              <a:lnSpc>
+                <a:spcPct val="100000"/>
+              </a:lnSpc>
+              <a:buNone/>
+            </a:pPr>
+            <a:r>
+              <a:rPr lang="he-IL" altLang="en-US" sz="1350" b="1" dirty="0">
+                <a:solidFill>
+                  <a:srgbClr val="2F8CFF"/>
+                </a:solidFill>
+                <a:latin typeface="Calibri" pitchFamily="34" charset="0"/>
+                <a:ea typeface="Calibri" pitchFamily="34" charset="-122"/>
+                <a:cs typeface="Calibri" pitchFamily="34" charset="-120"/>
+              </a:rPr>
+              <a:t>‫עמידות מובנית‬</a:t>
+            </a:r>
+            <a:endParaRPr lang="he-IL" sz="1350" dirty="0"/>
+          </a:p>
+        </p:txBody>
+      </p:sp>
+      <p:sp>
+        <p:nvSpPr>
+          <p:cNvPr id="24" name="Text 22"/>
+          <p:cNvSpPr/>
+          <p:nvPr/>
+        </p:nvSpPr>
+        <p:spPr>
+          <a:xfrm>
+            <a:off x="4730191" y="4462272"/>
+            <a:ext cx="2734056" cy="822960"/>
+          </a:xfrm>
+          <a:prstGeom prst="rect">
+            <a:avLst/>
+          </a:prstGeom>
+          <a:noFill/>
+          <a:ln/>
+        </p:spPr>
+        <p:txBody>
+          <a:bodyPr wrap="square" lIns="0" tIns="0" rIns="0" bIns="0" rtlCol="0" anchor="t"/>
+          <a:lstStyle/>
+          <a:p>
+            <a:pPr rtl="1" algn="r" indent="0" marL="0">
+              <a:lnSpc>
+                <a:spcPct val="120000"/>
+              </a:lnSpc>
+              <a:buNone/>
+            </a:pPr>
+            <a:r>
+              <a:rPr lang="he-IL" altLang="en-US" sz="1150" dirty="0">
+                <a:solidFill>
+                  <a:srgbClr val="91A0B7"/>
+                </a:solidFill>
+                <a:latin typeface="Calibri" pitchFamily="34" charset="0"/>
+                <a:ea typeface="Calibri" pitchFamily="34" charset="-122"/>
+                <a:cs typeface="Calibri" pitchFamily="34" charset="-120"/>
+              </a:rPr>
+              <a:t>‫‪11‬ תשיעיות עמידות ופיזור בין אזורי זמינות, במקום שכפול משולש שאנחנו מתחזקים ומשלמים עליו פי שלושה בשלושה אתרים.‬</a:t>
+            </a:r>
+            <a:endParaRPr lang="he-IL" sz="1150" dirty="0"/>
+          </a:p>
+        </p:txBody>
+      </p:sp>
+      <p:sp>
+        <p:nvSpPr>
+          <p:cNvPr id="25" name="Shape 23"/>
+          <p:cNvSpPr/>
+          <p:nvPr/>
+        </p:nvSpPr>
+        <p:spPr>
+          <a:xfrm>
+            <a:off x="825703" y="3931920"/>
+            <a:ext cx="3246120" cy="1463040"/>
           </a:xfrm>
           <a:prstGeom prst="roundRect">
             <a:avLst>
-              <a:gd name="adj" fmla="val 4478"/>
+              <a:gd name="adj" fmla="val 3125"/>
             </a:avLst>
           </a:prstGeom>
           <a:solidFill>
@@ -12783,148 +14064,24 @@
       </p:sp>
       <p:sp>
         <p:nvSpPr>
-          <p:cNvPr id="17" name="Text 15"/>
-          <p:cNvSpPr/>
-          <p:nvPr/>
-        </p:nvSpPr>
-        <p:spPr>
-          <a:xfrm>
-            <a:off x="5322905" y="3401568"/>
-            <a:ext cx="1545885" cy="987552"/>
-          </a:xfrm>
-          <a:prstGeom prst="rect">
-            <a:avLst/>
-          </a:prstGeom>
-          <a:noFill/>
-          <a:ln/>
-        </p:spPr>
-        <p:txBody>
-          <a:bodyPr wrap="square" lIns="0" tIns="0" rIns="0" bIns="0" rtlCol="0" anchor="t"/>
-          <a:lstStyle/>
-          <a:p>
-            <a:pPr rtl="1" algn="r" indent="0" marL="0">
-              <a:lnSpc>
-                <a:spcPct val="122000"/>
-              </a:lnSpc>
-              <a:buNone/>
-            </a:pPr>
-            <a:r>
-              <a:rPr lang="he-IL" altLang="en-US" sz="1150" dirty="0">
-                <a:solidFill>
-                  <a:srgbClr val="91A0B7"/>
-                </a:solidFill>
-                <a:latin typeface="Calibri" pitchFamily="34" charset="0"/>
-                <a:ea typeface="Calibri" pitchFamily="34" charset="-122"/>
-                <a:cs typeface="Calibri" pitchFamily="34" charset="-120"/>
-              </a:rPr>
-              <a:t>‫הוצאת ‪PO‬ ל-‪Dell‬ — מועד אחרון‬</a:t>
-            </a:r>
-            <a:endParaRPr lang="he-IL" sz="1150" dirty="0"/>
-          </a:p>
-          <a:p>
-            <a:pPr rtl="1" algn="r" indent="0" marL="0">
-              <a:lnSpc>
-                <a:spcPct val="122000"/>
-              </a:lnSpc>
-              <a:buNone/>
-            </a:pPr>
-            <a:r>
-              <a:rPr lang="he-IL" altLang="en-US" sz="1150" dirty="0">
-                <a:solidFill>
-                  <a:srgbClr val="91A0B7"/>
-                </a:solidFill>
-                <a:latin typeface="Calibri" pitchFamily="34" charset="0"/>
-                <a:ea typeface="Calibri" pitchFamily="34" charset="-122"/>
-                <a:cs typeface="Calibri" pitchFamily="34" charset="-120"/>
-              </a:rPr>
-              <a:t>‫תחילת העתקה לייצור‬</a:t>
-            </a:r>
-            <a:endParaRPr lang="he-IL" sz="1150" dirty="0"/>
-          </a:p>
-          <a:p>
-            <a:pPr rtl="1" algn="r" indent="0" marL="0">
-              <a:lnSpc>
-                <a:spcPct val="122000"/>
-              </a:lnSpc>
-              <a:buNone/>
-            </a:pPr>
-            <a:r>
-              <a:rPr lang="he-IL" altLang="en-US" sz="1150" dirty="0">
-                <a:solidFill>
-                  <a:srgbClr val="91A0B7"/>
-                </a:solidFill>
-                <a:latin typeface="Calibri" pitchFamily="34" charset="0"/>
-                <a:ea typeface="Calibri" pitchFamily="34" charset="-122"/>
-                <a:cs typeface="Calibri" pitchFamily="34" charset="-120"/>
-              </a:rPr>
-              <a:t>‫ולידציה ראשונה ודוח חריגים‬</a:t>
-            </a:r>
-            <a:endParaRPr lang="he-IL" sz="1150" dirty="0"/>
-          </a:p>
-        </p:txBody>
-      </p:sp>
-      <p:sp>
-        <p:nvSpPr>
-          <p:cNvPr id="18" name="Text 16"/>
-          <p:cNvSpPr/>
-          <p:nvPr/>
-        </p:nvSpPr>
-        <p:spPr>
-          <a:xfrm>
-            <a:off x="2972349" y="2322576"/>
-            <a:ext cx="1948221" cy="274320"/>
-          </a:xfrm>
-          <a:prstGeom prst="rect">
-            <a:avLst/>
-          </a:prstGeom>
-          <a:noFill/>
-          <a:ln/>
-        </p:spPr>
-        <p:txBody>
-          <a:bodyPr wrap="square" lIns="0" tIns="0" rIns="0" bIns="0" rtlCol="0" anchor="ctr"/>
-          <a:lstStyle/>
-          <a:p>
-            <a:pPr rtl="1" algn="r" indent="0" marL="0">
-              <a:lnSpc>
-                <a:spcPct val="100000"/>
-              </a:lnSpc>
-              <a:buNone/>
-            </a:pPr>
-            <a:r>
-              <a:rPr lang="he-IL" altLang="en-US" sz="1300" b="1" dirty="0">
-                <a:solidFill>
-                  <a:srgbClr val="F4F7FB"/>
-                </a:solidFill>
-                <a:latin typeface="Calibri" pitchFamily="34" charset="0"/>
-                <a:ea typeface="Calibri" pitchFamily="34" charset="-122"/>
-                <a:cs typeface="Calibri" pitchFamily="34" charset="-120"/>
-              </a:rPr>
-              <a:t>‫נוב׳–דצמ׳ ‪26‬‬</a:t>
-            </a:r>
-            <a:endParaRPr lang="he-IL" sz="1300" dirty="0"/>
-          </a:p>
-        </p:txBody>
-      </p:sp>
-      <p:sp>
-        <p:nvSpPr>
-          <p:cNvPr id="19" name="Shape 17"/>
-          <p:cNvSpPr/>
-          <p:nvPr/>
-        </p:nvSpPr>
-        <p:spPr>
-          <a:xfrm>
-            <a:off x="4755977" y="2935224"/>
-            <a:ext cx="155448" cy="155448"/>
-          </a:xfrm>
-          <a:prstGeom prst="rect">
-            <a:avLst/>
-          </a:prstGeom>
-          <a:solidFill>
-            <a:srgbClr val="FF9F43"/>
+          <p:cNvPr id="26" name="Shape 24"/>
+          <p:cNvSpPr/>
+          <p:nvPr/>
+        </p:nvSpPr>
+        <p:spPr>
+          <a:xfrm>
+            <a:off x="3651199" y="4187952"/>
+            <a:ext cx="118872" cy="118872"/>
+          </a:xfrm>
+          <a:prstGeom prst="rect">
+            <a:avLst/>
+          </a:prstGeom>
+          <a:solidFill>
+            <a:srgbClr val="B07CFF"/>
           </a:solidFill>
           <a:ln w="12700">
             <a:solidFill>
-              <a:srgbClr val="FF9F43"/>
+              <a:srgbClr val="B07CFF"/>
             </a:solidFill>
             <a:prstDash val="solid"/>
           </a:ln>
@@ -12932,22 +14089,104 @@
       </p:sp>
       <p:sp>
         <p:nvSpPr>
-          <p:cNvPr id="20" name="Shape 18"/>
-          <p:cNvSpPr/>
-          <p:nvPr/>
-        </p:nvSpPr>
-        <p:spPr>
-          <a:xfrm>
-            <a:off x="2972349" y="3273552"/>
-            <a:ext cx="1948221" cy="1225296"/>
-          </a:xfrm>
-          <a:prstGeom prst="roundRect">
-            <a:avLst>
-              <a:gd name="adj" fmla="val 4478"/>
-            </a:avLst>
-          </a:prstGeom>
-          <a:solidFill>
-            <a:srgbClr val="182133"/>
+          <p:cNvPr id="27" name="Text 25"/>
+          <p:cNvSpPr/>
+          <p:nvPr/>
+        </p:nvSpPr>
+        <p:spPr>
+          <a:xfrm>
+            <a:off x="1081735" y="4114800"/>
+            <a:ext cx="2478024" cy="274320"/>
+          </a:xfrm>
+          <a:prstGeom prst="rect">
+            <a:avLst/>
+          </a:prstGeom>
+          <a:noFill/>
+          <a:ln/>
+        </p:spPr>
+        <p:txBody>
+          <a:bodyPr wrap="square" lIns="0" tIns="0" rIns="0" bIns="0" rtlCol="0" anchor="ctr"/>
+          <a:lstStyle/>
+          <a:p>
+            <a:pPr rtl="1" algn="r" indent="0" marL="0">
+              <a:lnSpc>
+                <a:spcPct val="100000"/>
+              </a:lnSpc>
+              <a:buNone/>
+            </a:pPr>
+            <a:r>
+              <a:rPr lang="he-IL" altLang="en-US" sz="1350" b="1" dirty="0">
+                <a:solidFill>
+                  <a:srgbClr val="B07CFF"/>
+                </a:solidFill>
+                <a:latin typeface="Calibri" pitchFamily="34" charset="0"/>
+                <a:ea typeface="Calibri" pitchFamily="34" charset="-122"/>
+                <a:cs typeface="Calibri" pitchFamily="34" charset="-120"/>
+              </a:rPr>
+              <a:t>‫בסיס לשירותי ‪AI‬‬</a:t>
+            </a:r>
+            <a:endParaRPr lang="he-IL" sz="1350" dirty="0"/>
+          </a:p>
+        </p:txBody>
+      </p:sp>
+      <p:sp>
+        <p:nvSpPr>
+          <p:cNvPr id="28" name="Text 26"/>
+          <p:cNvSpPr/>
+          <p:nvPr/>
+        </p:nvSpPr>
+        <p:spPr>
+          <a:xfrm>
+            <a:off x="1081735" y="4462272"/>
+            <a:ext cx="2734056" cy="822960"/>
+          </a:xfrm>
+          <a:prstGeom prst="rect">
+            <a:avLst/>
+          </a:prstGeom>
+          <a:noFill/>
+          <a:ln/>
+        </p:spPr>
+        <p:txBody>
+          <a:bodyPr wrap="square" lIns="0" tIns="0" rIns="0" bIns="0" rtlCol="0" anchor="t"/>
+          <a:lstStyle/>
+          <a:p>
+            <a:pPr rtl="1" algn="r" indent="0" marL="0">
+              <a:lnSpc>
+                <a:spcPct val="120000"/>
+              </a:lnSpc>
+              <a:buNone/>
+            </a:pPr>
+            <a:r>
+              <a:rPr lang="he-IL" altLang="en-US" sz="1150" dirty="0">
+                <a:solidFill>
+                  <a:srgbClr val="91A0B7"/>
+                </a:solidFill>
+                <a:latin typeface="Calibri" pitchFamily="34" charset="0"/>
+                <a:ea typeface="Calibri" pitchFamily="34" charset="-122"/>
+                <a:cs typeface="Calibri" pitchFamily="34" charset="-120"/>
+              </a:rPr>
+              <a:t>‫תמלול שיחות וניתוח דימות כשירות מנוהל מעל אותו אחסון — יכולת שאינה קיימת על ‪ECS‬ היום ואינה דורשת פרויקט תשתית נפרד.‬</a:t>
+            </a:r>
+            <a:endParaRPr lang="he-IL" sz="1150" dirty="0"/>
+          </a:p>
+        </p:txBody>
+      </p:sp>
+      <p:sp>
+        <p:nvSpPr>
+          <p:cNvPr id="29" name="Shape 27"/>
+          <p:cNvSpPr/>
+          <p:nvPr/>
+        </p:nvSpPr>
+        <p:spPr>
+          <a:xfrm>
+            <a:off x="822960" y="5907024"/>
+            <a:ext cx="10545775" cy="10973"/>
+          </a:xfrm>
+          <a:prstGeom prst="rect">
+            <a:avLst/>
+          </a:prstGeom>
+          <a:solidFill>
+            <a:srgbClr val="23304A"/>
           </a:solidFill>
           <a:ln w="12700">
             <a:solidFill>
@@ -12959,148 +14198,24 @@
       </p:sp>
       <p:sp>
         <p:nvSpPr>
-          <p:cNvPr id="21" name="Text 19"/>
-          <p:cNvSpPr/>
-          <p:nvPr/>
-        </p:nvSpPr>
-        <p:spPr>
-          <a:xfrm>
-            <a:off x="3173517" y="3401568"/>
-            <a:ext cx="1545885" cy="987552"/>
-          </a:xfrm>
-          <a:prstGeom prst="rect">
-            <a:avLst/>
-          </a:prstGeom>
-          <a:noFill/>
-          <a:ln/>
-        </p:spPr>
-        <p:txBody>
-          <a:bodyPr wrap="square" lIns="0" tIns="0" rIns="0" bIns="0" rtlCol="0" anchor="t"/>
-          <a:lstStyle/>
-          <a:p>
-            <a:pPr rtl="1" algn="r" indent="0" marL="0">
-              <a:lnSpc>
-                <a:spcPct val="122000"/>
-              </a:lnSpc>
-              <a:buNone/>
-            </a:pPr>
-            <a:r>
-              <a:rPr lang="he-IL" altLang="en-US" sz="1150" dirty="0">
-                <a:solidFill>
-                  <a:srgbClr val="91A0B7"/>
-                </a:solidFill>
-                <a:latin typeface="Calibri" pitchFamily="34" charset="0"/>
-                <a:ea typeface="Calibri" pitchFamily="34" charset="-122"/>
-                <a:cs typeface="Calibri" pitchFamily="34" charset="-120"/>
-              </a:rPr>
-              <a:t>‫ייצור והובלה אצל ‪Dell‬‬</a:t>
-            </a:r>
-            <a:endParaRPr lang="he-IL" sz="1150" dirty="0"/>
-          </a:p>
-          <a:p>
-            <a:pPr rtl="1" algn="r" indent="0" marL="0">
-              <a:lnSpc>
-                <a:spcPct val="122000"/>
-              </a:lnSpc>
-              <a:buNone/>
-            </a:pPr>
-            <a:r>
-              <a:rPr lang="he-IL" altLang="en-US" sz="1150" dirty="0">
-                <a:solidFill>
-                  <a:srgbClr val="91A0B7"/>
-                </a:solidFill>
-                <a:latin typeface="Calibri" pitchFamily="34" charset="0"/>
-                <a:ea typeface="Calibri" pitchFamily="34" charset="-122"/>
-                <a:cs typeface="Calibri" pitchFamily="34" charset="-120"/>
-              </a:rPr>
-              <a:t>‫המשך העתקה ומחיקה מ-‪ECS‬‬</a:t>
-            </a:r>
-            <a:endParaRPr lang="he-IL" sz="1150" dirty="0"/>
-          </a:p>
-          <a:p>
-            <a:pPr rtl="1" algn="r" indent="0" marL="0">
-              <a:lnSpc>
-                <a:spcPct val="122000"/>
-              </a:lnSpc>
-              <a:buNone/>
-            </a:pPr>
-            <a:r>
-              <a:rPr lang="he-IL" altLang="en-US" sz="1150" dirty="0">
-                <a:solidFill>
-                  <a:srgbClr val="91A0B7"/>
-                </a:solidFill>
-                <a:latin typeface="Calibri" pitchFamily="34" charset="0"/>
-                <a:ea typeface="Calibri" pitchFamily="34" charset="-122"/>
-                <a:cs typeface="Calibri" pitchFamily="34" charset="-120"/>
-              </a:rPr>
-              <a:t>‫דוח שלמות מסכם‬</a:t>
-            </a:r>
-            <a:endParaRPr lang="he-IL" sz="1150" dirty="0"/>
-          </a:p>
-        </p:txBody>
-      </p:sp>
-      <p:sp>
-        <p:nvSpPr>
-          <p:cNvPr id="22" name="Text 20"/>
-          <p:cNvSpPr/>
-          <p:nvPr/>
-        </p:nvSpPr>
-        <p:spPr>
-          <a:xfrm>
-            <a:off x="822960" y="2322576"/>
-            <a:ext cx="1948221" cy="274320"/>
-          </a:xfrm>
-          <a:prstGeom prst="rect">
-            <a:avLst/>
-          </a:prstGeom>
-          <a:noFill/>
-          <a:ln/>
-        </p:spPr>
-        <p:txBody>
-          <a:bodyPr wrap="square" lIns="0" tIns="0" rIns="0" bIns="0" rtlCol="0" anchor="ctr"/>
-          <a:lstStyle/>
-          <a:p>
-            <a:pPr rtl="1" algn="r" indent="0" marL="0">
-              <a:lnSpc>
-                <a:spcPct val="100000"/>
-              </a:lnSpc>
-              <a:buNone/>
-            </a:pPr>
-            <a:r>
-              <a:rPr lang="he-IL" altLang="en-US" sz="1300" b="1" dirty="0">
-                <a:solidFill>
-                  <a:srgbClr val="F4F7FB"/>
-                </a:solidFill>
-                <a:latin typeface="Calibri" pitchFamily="34" charset="0"/>
-                <a:ea typeface="Calibri" pitchFamily="34" charset="-122"/>
-                <a:cs typeface="Calibri" pitchFamily="34" charset="-120"/>
-              </a:rPr>
-              <a:t>‫ינואר–מרץ ‪27‬‬</a:t>
-            </a:r>
-            <a:endParaRPr lang="he-IL" sz="1300" dirty="0"/>
-          </a:p>
-        </p:txBody>
-      </p:sp>
-      <p:sp>
-        <p:nvSpPr>
-          <p:cNvPr id="23" name="Shape 21"/>
-          <p:cNvSpPr/>
-          <p:nvPr/>
-        </p:nvSpPr>
-        <p:spPr>
-          <a:xfrm>
-            <a:off x="2606589" y="2935224"/>
-            <a:ext cx="155448" cy="155448"/>
-          </a:xfrm>
-          <a:prstGeom prst="rect">
-            <a:avLst/>
-          </a:prstGeom>
-          <a:solidFill>
-            <a:srgbClr val="B07CFF"/>
+          <p:cNvPr id="30" name="Shape 28"/>
+          <p:cNvSpPr/>
+          <p:nvPr/>
+        </p:nvSpPr>
+        <p:spPr>
+          <a:xfrm>
+            <a:off x="11249863" y="6172200"/>
+            <a:ext cx="118872" cy="118872"/>
+          </a:xfrm>
+          <a:prstGeom prst="rect">
+            <a:avLst/>
+          </a:prstGeom>
+          <a:solidFill>
+            <a:srgbClr val="3DDC97"/>
           </a:solidFill>
           <a:ln w="12700">
             <a:solidFill>
-              <a:srgbClr val="B07CFF"/>
+              <a:srgbClr val="3DDC97"/>
             </a:solidFill>
             <a:prstDash val="solid"/>
           </a:ln>
@@ -13108,259 +14223,6 @@
       </p:sp>
       <p:sp>
         <p:nvSpPr>
-          <p:cNvPr id="24" name="Shape 22"/>
-          <p:cNvSpPr/>
-          <p:nvPr/>
-        </p:nvSpPr>
-        <p:spPr>
-          <a:xfrm>
-            <a:off x="822960" y="3273552"/>
-            <a:ext cx="1948221" cy="1225296"/>
-          </a:xfrm>
-          <a:prstGeom prst="roundRect">
-            <a:avLst>
-              <a:gd name="adj" fmla="val 4478"/>
-            </a:avLst>
-          </a:prstGeom>
-          <a:solidFill>
-            <a:srgbClr val="182133"/>
-          </a:solidFill>
-          <a:ln w="12700">
-            <a:solidFill>
-              <a:srgbClr val="23304A"/>
-            </a:solidFill>
-            <a:prstDash val="solid"/>
-          </a:ln>
-        </p:spPr>
-      </p:sp>
-      <p:sp>
-        <p:nvSpPr>
-          <p:cNvPr id="25" name="Text 23"/>
-          <p:cNvSpPr/>
-          <p:nvPr/>
-        </p:nvSpPr>
-        <p:spPr>
-          <a:xfrm>
-            <a:off x="1024128" y="3401568"/>
-            <a:ext cx="1545885" cy="987552"/>
-          </a:xfrm>
-          <a:prstGeom prst="rect">
-            <a:avLst/>
-          </a:prstGeom>
-          <a:noFill/>
-          <a:ln/>
-        </p:spPr>
-        <p:txBody>
-          <a:bodyPr wrap="square" lIns="0" tIns="0" rIns="0" bIns="0" rtlCol="0" anchor="t"/>
-          <a:lstStyle/>
-          <a:p>
-            <a:pPr rtl="1" algn="r" indent="0" marL="0">
-              <a:lnSpc>
-                <a:spcPct val="122000"/>
-              </a:lnSpc>
-              <a:buNone/>
-            </a:pPr>
-            <a:r>
-              <a:rPr lang="he-IL" altLang="en-US" sz="1150" dirty="0">
-                <a:solidFill>
-                  <a:srgbClr val="91A0B7"/>
-                </a:solidFill>
-                <a:latin typeface="Calibri" pitchFamily="34" charset="0"/>
-                <a:ea typeface="Calibri" pitchFamily="34" charset="-122"/>
-                <a:cs typeface="Calibri" pitchFamily="34" charset="-120"/>
-              </a:rPr>
-              <a:t>‫אספקת דיסקים והתקנה‬</a:t>
-            </a:r>
-            <a:endParaRPr lang="he-IL" sz="1150" dirty="0"/>
-          </a:p>
-          <a:p>
-            <a:pPr rtl="1" algn="r" indent="0" marL="0">
-              <a:lnSpc>
-                <a:spcPct val="122000"/>
-              </a:lnSpc>
-              <a:buNone/>
-            </a:pPr>
-            <a:r>
-              <a:rPr lang="he-IL" altLang="en-US" sz="1150" dirty="0">
-                <a:solidFill>
-                  <a:srgbClr val="91A0B7"/>
-                </a:solidFill>
-                <a:latin typeface="Calibri" pitchFamily="34" charset="0"/>
-                <a:ea typeface="Calibri" pitchFamily="34" charset="-122"/>
-                <a:cs typeface="Calibri" pitchFamily="34" charset="-120"/>
-              </a:rPr>
-              <a:t>‫חציית סף ‪80% — 733 TB‬‬</a:t>
-            </a:r>
-            <a:endParaRPr lang="he-IL" sz="1150" dirty="0"/>
-          </a:p>
-          <a:p>
-            <a:pPr rtl="1" algn="r" indent="0" marL="0">
-              <a:lnSpc>
-                <a:spcPct val="122000"/>
-              </a:lnSpc>
-              <a:buNone/>
-            </a:pPr>
-            <a:r>
-              <a:rPr lang="he-IL" altLang="en-US" sz="1150" dirty="0">
-                <a:solidFill>
-                  <a:srgbClr val="91A0B7"/>
-                </a:solidFill>
-                <a:latin typeface="Calibri" pitchFamily="34" charset="0"/>
-                <a:ea typeface="Calibri" pitchFamily="34" charset="-122"/>
-                <a:cs typeface="Calibri" pitchFamily="34" charset="-120"/>
-              </a:rPr>
-              <a:t>‫הקיבולת הנוספת נכנסת בזמן‬</a:t>
-            </a:r>
-            <a:endParaRPr lang="he-IL" sz="1150" dirty="0"/>
-          </a:p>
-        </p:txBody>
-      </p:sp>
-      <p:sp>
-        <p:nvSpPr>
-          <p:cNvPr id="26" name="Shape 24"/>
-          <p:cNvSpPr/>
-          <p:nvPr/>
-        </p:nvSpPr>
-        <p:spPr>
-          <a:xfrm>
-            <a:off x="822960" y="4809744"/>
-            <a:ext cx="10545775" cy="566928"/>
-          </a:xfrm>
-          <a:prstGeom prst="roundRect">
-            <a:avLst>
-              <a:gd name="adj" fmla="val 12903"/>
-            </a:avLst>
-          </a:prstGeom>
-          <a:solidFill>
-            <a:srgbClr val="2A1620"/>
-          </a:solidFill>
-          <a:ln w="12700">
-            <a:solidFill>
-              <a:srgbClr val="5A2A38"/>
-            </a:solidFill>
-            <a:prstDash val="solid"/>
-          </a:ln>
-        </p:spPr>
-      </p:sp>
-      <p:sp>
-        <p:nvSpPr>
-          <p:cNvPr id="27" name="Shape 25"/>
-          <p:cNvSpPr/>
-          <p:nvPr/>
-        </p:nvSpPr>
-        <p:spPr>
-          <a:xfrm>
-            <a:off x="10966399" y="5029200"/>
-            <a:ext cx="118872" cy="118872"/>
-          </a:xfrm>
-          <a:prstGeom prst="rect">
-            <a:avLst/>
-          </a:prstGeom>
-          <a:solidFill>
-            <a:srgbClr val="FF6B7A"/>
-          </a:solidFill>
-          <a:ln w="12700">
-            <a:solidFill>
-              <a:srgbClr val="FF6B7A"/>
-            </a:solidFill>
-            <a:prstDash val="solid"/>
-          </a:ln>
-        </p:spPr>
-      </p:sp>
-      <p:sp>
-        <p:nvSpPr>
-          <p:cNvPr id="28" name="Text 26"/>
-          <p:cNvSpPr/>
-          <p:nvPr/>
-        </p:nvSpPr>
-        <p:spPr>
-          <a:xfrm>
-            <a:off x="1097280" y="4809744"/>
-            <a:ext cx="9722815" cy="566928"/>
-          </a:xfrm>
-          <a:prstGeom prst="rect">
-            <a:avLst/>
-          </a:prstGeom>
-          <a:noFill/>
-          <a:ln/>
-        </p:spPr>
-        <p:txBody>
-          <a:bodyPr wrap="square" lIns="0" tIns="0" rIns="0" bIns="0" rtlCol="0" anchor="ctr"/>
-          <a:lstStyle/>
-          <a:p>
-            <a:pPr rtl="1" algn="r" indent="0" marL="0">
-              <a:lnSpc>
-                <a:spcPct val="100000"/>
-              </a:lnSpc>
-              <a:buNone/>
-            </a:pPr>
-            <a:r>
-              <a:rPr lang="he-IL" altLang="en-US" sz="1300" b="1" dirty="0">
-                <a:solidFill>
-                  <a:srgbClr val="FF6B7A"/>
-                </a:solidFill>
-                <a:latin typeface="Calibri" pitchFamily="34" charset="0"/>
-                <a:ea typeface="Calibri" pitchFamily="34" charset="-122"/>
-                <a:cs typeface="Calibri" pitchFamily="34" charset="-120"/>
-              </a:rPr>
-              <a:t>‫אוקטובר הוא נקודת האל-חזור: חודשיים אספקה פירושם שכל ‪PO‬ שיוצא אחריו מגיע אחרי חציית ‪80%‬.‬</a:t>
-            </a:r>
-            <a:endParaRPr lang="he-IL" sz="1300" dirty="0"/>
-          </a:p>
-        </p:txBody>
-      </p:sp>
-      <p:sp>
-        <p:nvSpPr>
-          <p:cNvPr id="29" name="Shape 27"/>
-          <p:cNvSpPr/>
-          <p:nvPr/>
-        </p:nvSpPr>
-        <p:spPr>
-          <a:xfrm>
-            <a:off x="822960" y="5907024"/>
-            <a:ext cx="10545775" cy="10973"/>
-          </a:xfrm>
-          <a:prstGeom prst="rect">
-            <a:avLst/>
-          </a:prstGeom>
-          <a:solidFill>
-            <a:srgbClr val="23304A"/>
-          </a:solidFill>
-          <a:ln w="12700">
-            <a:solidFill>
-              <a:srgbClr val="23304A"/>
-            </a:solidFill>
-            <a:prstDash val="solid"/>
-          </a:ln>
-        </p:spPr>
-      </p:sp>
-      <p:sp>
-        <p:nvSpPr>
-          <p:cNvPr id="30" name="Shape 28"/>
-          <p:cNvSpPr/>
-          <p:nvPr/>
-        </p:nvSpPr>
-        <p:spPr>
-          <a:xfrm>
-            <a:off x="11249863" y="6172200"/>
-            <a:ext cx="118872" cy="118872"/>
-          </a:xfrm>
-          <a:prstGeom prst="rect">
-            <a:avLst/>
-          </a:prstGeom>
-          <a:solidFill>
-            <a:srgbClr val="FF6B7A"/>
-          </a:solidFill>
-          <a:ln w="12700">
-            <a:solidFill>
-              <a:srgbClr val="FF6B7A"/>
-            </a:solidFill>
-            <a:prstDash val="solid"/>
-          </a:ln>
-        </p:spPr>
-      </p:sp>
-      <p:sp>
-        <p:nvSpPr>
           <p:cNvPr id="31" name="Text 29"/>
           <p:cNvSpPr/>
           <p:nvPr/>
@@ -13395,7 +14257,7 @@
                 <a:ea typeface="Calibri" pitchFamily="34" charset="-122"/>
                 <a:cs typeface="Calibri" pitchFamily="34" charset="-120"/>
               </a:rPr>
-              <a:t>‫המסלולים אינם תלויים זה בזה: עיכוב ב-‪POC‬ אינו מעכב את הרכש, ועיכוב ברכש אינו מעכב את ההעתקה. רק מסלול הרכש נעול על תאריך.‬</a:t>
+              <a:t>‫התועלת נמדדת ב-‪TB‬ שפונו בפועל ובחודשי הדחייה שהושגו לרכש — לא באחוזי חיסכון תיאורטיים.‬</a:t>
             </a:r>
             <a:endParaRPr lang="he-IL" sz="1150" dirty="0"/>
           </a:p>
